--- a/03-build/pptx/C5_U0_alumno.pptx
+++ b/03-build/pptx/C5_U0_alumno.pptx
@@ -123,10 +123,6 @@
       </a:defRPr>
     </a:lvl9pPr>
   </p:defaultTextStyle>
-  <p:showPr showAnimation="1" useTimings="0" loop="0">
-    <p:kiosk/>
-    <p:sldAll/>
-  </p:showPr>
 </p:presentation>
 </file>
 
@@ -4229,7 +4225,7 @@
                 </a:solidFill>
                 <a:latin typeface="Inter"/>
               </a:rPr>
-              <a:t>Leerlingenversie — kioskmodus</a:t>
+              <a:t>Leerlingenversie — klik onthult</a:t>
             </a:r>
           </a:p>
         </p:txBody>
@@ -5612,7 +5608,7 @@
                 </a:solidFill>
                 <a:latin typeface="Inter"/>
               </a:rPr>
-              <a:t>Leerlingenversie — kioskmodus</a:t>
+              <a:t>Leerlingenversie — klik onthult</a:t>
             </a:r>
           </a:p>
         </p:txBody>
@@ -8621,7 +8617,7 @@
                 </a:solidFill>
                 <a:latin typeface="Inter"/>
               </a:rPr>
-              <a:t>Leerlingenversie — kioskmodus</a:t>
+              <a:t>Leerlingenversie — klik onthult</a:t>
             </a:r>
           </a:p>
         </p:txBody>
@@ -11117,7 +11113,7 @@
                 </a:solidFill>
                 <a:latin typeface="Inter"/>
               </a:rPr>
-              <a:t>Leerlingenversie — kioskmodus</a:t>
+              <a:t>Leerlingenversie — klik onthult</a:t>
             </a:r>
           </a:p>
         </p:txBody>
@@ -11179,7 +11175,432 @@
           <p:childTnLst>
             <p:seq concurrent="1" nextAc="seek">
               <p:cTn id="2" dur="indefinite" nodeType="mainSeq">
-                <p:childTnLst/>
+                <p:childTnLst>
+                  <p:par>
+                    <p:cTn id="3" fill="hold">
+                      <p:stCondLst>
+                        <p:cond delay="indefinite"/>
+                      </p:stCondLst>
+                      <p:childTnLst>
+                        <p:par>
+                          <p:cTn id="4" fill="hold">
+                            <p:stCondLst>
+                              <p:cond delay="0"/>
+                            </p:stCondLst>
+                            <p:childTnLst>
+                              <p:par>
+                                <p:cTn id="5" presetID="10" presetClass="entr" presetSubtype="0" fill="hold" grpId="0" nodeType="clickEffect">
+                                  <p:stCondLst>
+                                    <p:cond delay="0"/>
+                                  </p:stCondLst>
+                                  <p:childTnLst>
+                                    <p:set>
+                                      <p:cBhvr>
+                                        <p:cTn id="6" dur="1" fill="hold">
+                                          <p:stCondLst>
+                                            <p:cond delay="0"/>
+                                          </p:stCondLst>
+                                        </p:cTn>
+                                        <p:tgtEl>
+                                          <p:spTgt spid="12"/>
+                                        </p:tgtEl>
+                                        <p:attrNameLst>
+                                          <p:attrName>style.visibility</p:attrName>
+                                        </p:attrNameLst>
+                                      </p:cBhvr>
+                                      <p:to>
+                                        <p:strVal val="visible"/>
+                                      </p:to>
+                                    </p:set>
+                                    <p:animEffect transition="in" filter="fade">
+                                      <p:cBhvr>
+                                        <p:cTn id="7" dur="500"/>
+                                        <p:tgtEl>
+                                          <p:spTgt spid="12"/>
+                                        </p:tgtEl>
+                                      </p:cBhvr>
+                                    </p:animEffect>
+                                  </p:childTnLst>
+                                </p:cTn>
+                              </p:par>
+                            </p:childTnLst>
+                          </p:cTn>
+                        </p:par>
+                      </p:childTnLst>
+                    </p:cTn>
+                  </p:par>
+                  <p:par>
+                    <p:cTn id="8" fill="hold">
+                      <p:stCondLst>
+                        <p:cond delay="indefinite"/>
+                      </p:stCondLst>
+                      <p:childTnLst>
+                        <p:par>
+                          <p:cTn id="9" fill="hold">
+                            <p:stCondLst>
+                              <p:cond delay="0"/>
+                            </p:stCondLst>
+                            <p:childTnLst>
+                              <p:par>
+                                <p:cTn id="10" presetID="10" presetClass="entr" presetSubtype="0" fill="hold" grpId="0" nodeType="clickEffect">
+                                  <p:stCondLst>
+                                    <p:cond delay="0"/>
+                                  </p:stCondLst>
+                                  <p:childTnLst>
+                                    <p:set>
+                                      <p:cBhvr>
+                                        <p:cTn id="11" dur="1" fill="hold">
+                                          <p:stCondLst>
+                                            <p:cond delay="0"/>
+                                          </p:stCondLst>
+                                        </p:cTn>
+                                        <p:tgtEl>
+                                          <p:spTgt spid="17"/>
+                                        </p:tgtEl>
+                                        <p:attrNameLst>
+                                          <p:attrName>style.visibility</p:attrName>
+                                        </p:attrNameLst>
+                                      </p:cBhvr>
+                                      <p:to>
+                                        <p:strVal val="visible"/>
+                                      </p:to>
+                                    </p:set>
+                                    <p:animEffect transition="in" filter="fade">
+                                      <p:cBhvr>
+                                        <p:cTn id="12" dur="500"/>
+                                        <p:tgtEl>
+                                          <p:spTgt spid="17"/>
+                                        </p:tgtEl>
+                                      </p:cBhvr>
+                                    </p:animEffect>
+                                  </p:childTnLst>
+                                </p:cTn>
+                              </p:par>
+                            </p:childTnLst>
+                          </p:cTn>
+                        </p:par>
+                      </p:childTnLst>
+                    </p:cTn>
+                  </p:par>
+                  <p:par>
+                    <p:cTn id="13" fill="hold">
+                      <p:stCondLst>
+                        <p:cond delay="indefinite"/>
+                      </p:stCondLst>
+                      <p:childTnLst>
+                        <p:par>
+                          <p:cTn id="14" fill="hold">
+                            <p:stCondLst>
+                              <p:cond delay="0"/>
+                            </p:stCondLst>
+                            <p:childTnLst>
+                              <p:par>
+                                <p:cTn id="15" presetID="10" presetClass="entr" presetSubtype="0" fill="hold" grpId="0" nodeType="clickEffect">
+                                  <p:stCondLst>
+                                    <p:cond delay="0"/>
+                                  </p:stCondLst>
+                                  <p:childTnLst>
+                                    <p:set>
+                                      <p:cBhvr>
+                                        <p:cTn id="16" dur="1" fill="hold">
+                                          <p:stCondLst>
+                                            <p:cond delay="0"/>
+                                          </p:stCondLst>
+                                        </p:cTn>
+                                        <p:tgtEl>
+                                          <p:spTgt spid="22"/>
+                                        </p:tgtEl>
+                                        <p:attrNameLst>
+                                          <p:attrName>style.visibility</p:attrName>
+                                        </p:attrNameLst>
+                                      </p:cBhvr>
+                                      <p:to>
+                                        <p:strVal val="visible"/>
+                                      </p:to>
+                                    </p:set>
+                                    <p:animEffect transition="in" filter="fade">
+                                      <p:cBhvr>
+                                        <p:cTn id="17" dur="500"/>
+                                        <p:tgtEl>
+                                          <p:spTgt spid="22"/>
+                                        </p:tgtEl>
+                                      </p:cBhvr>
+                                    </p:animEffect>
+                                  </p:childTnLst>
+                                </p:cTn>
+                              </p:par>
+                            </p:childTnLst>
+                          </p:cTn>
+                        </p:par>
+                      </p:childTnLst>
+                    </p:cTn>
+                  </p:par>
+                  <p:par>
+                    <p:cTn id="18" fill="hold">
+                      <p:stCondLst>
+                        <p:cond delay="indefinite"/>
+                      </p:stCondLst>
+                      <p:childTnLst>
+                        <p:par>
+                          <p:cTn id="19" fill="hold">
+                            <p:stCondLst>
+                              <p:cond delay="0"/>
+                            </p:stCondLst>
+                            <p:childTnLst>
+                              <p:par>
+                                <p:cTn id="20" presetID="10" presetClass="entr" presetSubtype="0" fill="hold" grpId="0" nodeType="clickEffect">
+                                  <p:stCondLst>
+                                    <p:cond delay="0"/>
+                                  </p:stCondLst>
+                                  <p:childTnLst>
+                                    <p:set>
+                                      <p:cBhvr>
+                                        <p:cTn id="21" dur="1" fill="hold">
+                                          <p:stCondLst>
+                                            <p:cond delay="0"/>
+                                          </p:stCondLst>
+                                        </p:cTn>
+                                        <p:tgtEl>
+                                          <p:spTgt spid="27"/>
+                                        </p:tgtEl>
+                                        <p:attrNameLst>
+                                          <p:attrName>style.visibility</p:attrName>
+                                        </p:attrNameLst>
+                                      </p:cBhvr>
+                                      <p:to>
+                                        <p:strVal val="visible"/>
+                                      </p:to>
+                                    </p:set>
+                                    <p:animEffect transition="in" filter="fade">
+                                      <p:cBhvr>
+                                        <p:cTn id="22" dur="500"/>
+                                        <p:tgtEl>
+                                          <p:spTgt spid="27"/>
+                                        </p:tgtEl>
+                                      </p:cBhvr>
+                                    </p:animEffect>
+                                  </p:childTnLst>
+                                </p:cTn>
+                              </p:par>
+                            </p:childTnLst>
+                          </p:cTn>
+                        </p:par>
+                      </p:childTnLst>
+                    </p:cTn>
+                  </p:par>
+                  <p:par>
+                    <p:cTn id="23" fill="hold">
+                      <p:stCondLst>
+                        <p:cond delay="indefinite"/>
+                      </p:stCondLst>
+                      <p:childTnLst>
+                        <p:par>
+                          <p:cTn id="24" fill="hold">
+                            <p:stCondLst>
+                              <p:cond delay="0"/>
+                            </p:stCondLst>
+                            <p:childTnLst>
+                              <p:par>
+                                <p:cTn id="25" presetID="10" presetClass="entr" presetSubtype="0" fill="hold" grpId="0" nodeType="clickEffect">
+                                  <p:stCondLst>
+                                    <p:cond delay="0"/>
+                                  </p:stCondLst>
+                                  <p:childTnLst>
+                                    <p:set>
+                                      <p:cBhvr>
+                                        <p:cTn id="26" dur="1" fill="hold">
+                                          <p:stCondLst>
+                                            <p:cond delay="0"/>
+                                          </p:stCondLst>
+                                        </p:cTn>
+                                        <p:tgtEl>
+                                          <p:spTgt spid="32"/>
+                                        </p:tgtEl>
+                                        <p:attrNameLst>
+                                          <p:attrName>style.visibility</p:attrName>
+                                        </p:attrNameLst>
+                                      </p:cBhvr>
+                                      <p:to>
+                                        <p:strVal val="visible"/>
+                                      </p:to>
+                                    </p:set>
+                                    <p:animEffect transition="in" filter="fade">
+                                      <p:cBhvr>
+                                        <p:cTn id="27" dur="500"/>
+                                        <p:tgtEl>
+                                          <p:spTgt spid="32"/>
+                                        </p:tgtEl>
+                                      </p:cBhvr>
+                                    </p:animEffect>
+                                  </p:childTnLst>
+                                </p:cTn>
+                              </p:par>
+                            </p:childTnLst>
+                          </p:cTn>
+                        </p:par>
+                      </p:childTnLst>
+                    </p:cTn>
+                  </p:par>
+                  <p:par>
+                    <p:cTn id="28" fill="hold">
+                      <p:stCondLst>
+                        <p:cond delay="indefinite"/>
+                      </p:stCondLst>
+                      <p:childTnLst>
+                        <p:par>
+                          <p:cTn id="29" fill="hold">
+                            <p:stCondLst>
+                              <p:cond delay="0"/>
+                            </p:stCondLst>
+                            <p:childTnLst>
+                              <p:par>
+                                <p:cTn id="30" presetID="10" presetClass="entr" presetSubtype="0" fill="hold" grpId="0" nodeType="clickEffect">
+                                  <p:stCondLst>
+                                    <p:cond delay="0"/>
+                                  </p:stCondLst>
+                                  <p:childTnLst>
+                                    <p:set>
+                                      <p:cBhvr>
+                                        <p:cTn id="31" dur="1" fill="hold">
+                                          <p:stCondLst>
+                                            <p:cond delay="0"/>
+                                          </p:stCondLst>
+                                        </p:cTn>
+                                        <p:tgtEl>
+                                          <p:spTgt spid="37"/>
+                                        </p:tgtEl>
+                                        <p:attrNameLst>
+                                          <p:attrName>style.visibility</p:attrName>
+                                        </p:attrNameLst>
+                                      </p:cBhvr>
+                                      <p:to>
+                                        <p:strVal val="visible"/>
+                                      </p:to>
+                                    </p:set>
+                                    <p:animEffect transition="in" filter="fade">
+                                      <p:cBhvr>
+                                        <p:cTn id="32" dur="500"/>
+                                        <p:tgtEl>
+                                          <p:spTgt spid="37"/>
+                                        </p:tgtEl>
+                                      </p:cBhvr>
+                                    </p:animEffect>
+                                  </p:childTnLst>
+                                </p:cTn>
+                              </p:par>
+                            </p:childTnLst>
+                          </p:cTn>
+                        </p:par>
+                      </p:childTnLst>
+                    </p:cTn>
+                  </p:par>
+                  <p:par>
+                    <p:cTn id="33" fill="hold">
+                      <p:stCondLst>
+                        <p:cond delay="indefinite"/>
+                      </p:stCondLst>
+                      <p:childTnLst>
+                        <p:par>
+                          <p:cTn id="34" fill="hold">
+                            <p:stCondLst>
+                              <p:cond delay="0"/>
+                            </p:stCondLst>
+                            <p:childTnLst>
+                              <p:par>
+                                <p:cTn id="35" presetID="10" presetClass="entr" presetSubtype="0" fill="hold" grpId="0" nodeType="clickEffect">
+                                  <p:stCondLst>
+                                    <p:cond delay="0"/>
+                                  </p:stCondLst>
+                                  <p:childTnLst>
+                                    <p:set>
+                                      <p:cBhvr>
+                                        <p:cTn id="36" dur="1" fill="hold">
+                                          <p:stCondLst>
+                                            <p:cond delay="0"/>
+                                          </p:stCondLst>
+                                        </p:cTn>
+                                        <p:tgtEl>
+                                          <p:spTgt spid="42"/>
+                                        </p:tgtEl>
+                                        <p:attrNameLst>
+                                          <p:attrName>style.visibility</p:attrName>
+                                        </p:attrNameLst>
+                                      </p:cBhvr>
+                                      <p:to>
+                                        <p:strVal val="visible"/>
+                                      </p:to>
+                                    </p:set>
+                                    <p:animEffect transition="in" filter="fade">
+                                      <p:cBhvr>
+                                        <p:cTn id="37" dur="500"/>
+                                        <p:tgtEl>
+                                          <p:spTgt spid="42"/>
+                                        </p:tgtEl>
+                                      </p:cBhvr>
+                                    </p:animEffect>
+                                  </p:childTnLst>
+                                </p:cTn>
+                              </p:par>
+                            </p:childTnLst>
+                          </p:cTn>
+                        </p:par>
+                      </p:childTnLst>
+                    </p:cTn>
+                  </p:par>
+                  <p:par>
+                    <p:cTn id="38" fill="hold">
+                      <p:stCondLst>
+                        <p:cond delay="indefinite"/>
+                      </p:stCondLst>
+                      <p:childTnLst>
+                        <p:par>
+                          <p:cTn id="39" fill="hold">
+                            <p:stCondLst>
+                              <p:cond delay="0"/>
+                            </p:stCondLst>
+                            <p:childTnLst>
+                              <p:par>
+                                <p:cTn id="40" presetID="10" presetClass="entr" presetSubtype="0" fill="hold" grpId="0" nodeType="clickEffect">
+                                  <p:stCondLst>
+                                    <p:cond delay="0"/>
+                                  </p:stCondLst>
+                                  <p:childTnLst>
+                                    <p:set>
+                                      <p:cBhvr>
+                                        <p:cTn id="41" dur="1" fill="hold">
+                                          <p:stCondLst>
+                                            <p:cond delay="0"/>
+                                          </p:stCondLst>
+                                        </p:cTn>
+                                        <p:tgtEl>
+                                          <p:spTgt spid="43"/>
+                                        </p:tgtEl>
+                                        <p:attrNameLst>
+                                          <p:attrName>style.visibility</p:attrName>
+                                        </p:attrNameLst>
+                                      </p:cBhvr>
+                                      <p:to>
+                                        <p:strVal val="visible"/>
+                                      </p:to>
+                                    </p:set>
+                                    <p:animEffect transition="in" filter="fade">
+                                      <p:cBhvr>
+                                        <p:cTn id="42" dur="500"/>
+                                        <p:tgtEl>
+                                          <p:spTgt spid="43"/>
+                                        </p:tgtEl>
+                                      </p:cBhvr>
+                                    </p:animEffect>
+                                  </p:childTnLst>
+                                </p:cTn>
+                              </p:par>
+                            </p:childTnLst>
+                          </p:cTn>
+                        </p:par>
+                      </p:childTnLst>
+                    </p:cTn>
+                  </p:par>
+                </p:childTnLst>
               </p:cTn>
               <p:prevCondLst>
                 <p:cond evt="onPrev" delay="0">
@@ -11192,542 +11613,6 @@
                 <p:cond evt="onNext" delay="0">
                   <p:tgtEl>
                     <p:sldTgt/>
-                  </p:tgtEl>
-                </p:cond>
-              </p:nextCondLst>
-            </p:seq>
-            <p:seq concurrent="1" nextAc="seek">
-              <p:cTn id="5" restart="whenNotActive" fill="hold" nodeType="interactiveSeq">
-                <p:stCondLst>
-                  <p:cond evt="onClick" delay="0">
-                    <p:tgtEl>
-                      <p:spTgt spid="8"/>
-                    </p:tgtEl>
-                  </p:cond>
-                </p:stCondLst>
-                <p:endSync evt="end" delay="0">
-                  <p:rtn val="all"/>
-                </p:endSync>
-                <p:childTnLst>
-                  <p:par>
-                    <p:cTn id="6" fill="hold">
-                      <p:stCondLst>
-                        <p:cond delay="0"/>
-                      </p:stCondLst>
-                      <p:childTnLst>
-                        <p:par>
-                          <p:cTn id="7" presetID="10" presetClass="entr" presetSubtype="0" fill="hold" grpId="0" nodeType="clickEffect">
-                            <p:stCondLst>
-                              <p:cond delay="0"/>
-                            </p:stCondLst>
-                            <p:childTnLst>
-                              <p:set>
-                                <p:cBhvr>
-                                  <p:cTn id="8" dur="1" fill="hold">
-                                    <p:stCondLst>
-                                      <p:cond delay="0"/>
-                                    </p:stCondLst>
-                                  </p:cTn>
-                                  <p:tgtEl>
-                                    <p:spTgt spid="12"/>
-                                  </p:tgtEl>
-                                  <p:attrNameLst>
-                                    <p:attrName>style.visibility</p:attrName>
-                                  </p:attrNameLst>
-                                </p:cBhvr>
-                                <p:to>
-                                  <p:strVal val="visible"/>
-                                </p:to>
-                              </p:set>
-                              <p:animEffect transition="in" filter="fade">
-                                <p:cBhvr>
-                                  <p:cTn id="9" dur="400"/>
-                                  <p:tgtEl>
-                                    <p:spTgt spid="12"/>
-                                  </p:tgtEl>
-                                </p:cBhvr>
-                              </p:animEffect>
-                            </p:childTnLst>
-                          </p:cTn>
-                        </p:par>
-                      </p:childTnLst>
-                    </p:cTn>
-                  </p:par>
-                </p:childTnLst>
-              </p:cTn>
-              <p:nextCondLst>
-                <p:cond evt="onClick" delay="0">
-                  <p:tgtEl>
-                    <p:spTgt spid="8"/>
-                  </p:tgtEl>
-                </p:cond>
-              </p:nextCondLst>
-            </p:seq>
-            <p:seq concurrent="1" nextAc="seek">
-              <p:cTn id="15" restart="whenNotActive" fill="hold" nodeType="interactiveSeq">
-                <p:stCondLst>
-                  <p:cond evt="onClick" delay="0">
-                    <p:tgtEl>
-                      <p:spTgt spid="13"/>
-                    </p:tgtEl>
-                  </p:cond>
-                </p:stCondLst>
-                <p:endSync evt="end" delay="0">
-                  <p:rtn val="all"/>
-                </p:endSync>
-                <p:childTnLst>
-                  <p:par>
-                    <p:cTn id="16" fill="hold">
-                      <p:stCondLst>
-                        <p:cond delay="0"/>
-                      </p:stCondLst>
-                      <p:childTnLst>
-                        <p:par>
-                          <p:cTn id="17" presetID="10" presetClass="entr" presetSubtype="0" fill="hold" grpId="0" nodeType="clickEffect">
-                            <p:stCondLst>
-                              <p:cond delay="0"/>
-                            </p:stCondLst>
-                            <p:childTnLst>
-                              <p:set>
-                                <p:cBhvr>
-                                  <p:cTn id="18" dur="1" fill="hold">
-                                    <p:stCondLst>
-                                      <p:cond delay="0"/>
-                                    </p:stCondLst>
-                                  </p:cTn>
-                                  <p:tgtEl>
-                                    <p:spTgt spid="17"/>
-                                  </p:tgtEl>
-                                  <p:attrNameLst>
-                                    <p:attrName>style.visibility</p:attrName>
-                                  </p:attrNameLst>
-                                </p:cBhvr>
-                                <p:to>
-                                  <p:strVal val="visible"/>
-                                </p:to>
-                              </p:set>
-                              <p:animEffect transition="in" filter="fade">
-                                <p:cBhvr>
-                                  <p:cTn id="19" dur="400"/>
-                                  <p:tgtEl>
-                                    <p:spTgt spid="17"/>
-                                  </p:tgtEl>
-                                </p:cBhvr>
-                              </p:animEffect>
-                            </p:childTnLst>
-                          </p:cTn>
-                        </p:par>
-                      </p:childTnLst>
-                    </p:cTn>
-                  </p:par>
-                </p:childTnLst>
-              </p:cTn>
-              <p:nextCondLst>
-                <p:cond evt="onClick" delay="0">
-                  <p:tgtEl>
-                    <p:spTgt spid="13"/>
-                  </p:tgtEl>
-                </p:cond>
-              </p:nextCondLst>
-            </p:seq>
-            <p:seq concurrent="1" nextAc="seek">
-              <p:cTn id="25" restart="whenNotActive" fill="hold" nodeType="interactiveSeq">
-                <p:stCondLst>
-                  <p:cond evt="onClick" delay="0">
-                    <p:tgtEl>
-                      <p:spTgt spid="18"/>
-                    </p:tgtEl>
-                  </p:cond>
-                </p:stCondLst>
-                <p:endSync evt="end" delay="0">
-                  <p:rtn val="all"/>
-                </p:endSync>
-                <p:childTnLst>
-                  <p:par>
-                    <p:cTn id="26" fill="hold">
-                      <p:stCondLst>
-                        <p:cond delay="0"/>
-                      </p:stCondLst>
-                      <p:childTnLst>
-                        <p:par>
-                          <p:cTn id="27" presetID="10" presetClass="entr" presetSubtype="0" fill="hold" grpId="0" nodeType="clickEffect">
-                            <p:stCondLst>
-                              <p:cond delay="0"/>
-                            </p:stCondLst>
-                            <p:childTnLst>
-                              <p:set>
-                                <p:cBhvr>
-                                  <p:cTn id="28" dur="1" fill="hold">
-                                    <p:stCondLst>
-                                      <p:cond delay="0"/>
-                                    </p:stCondLst>
-                                  </p:cTn>
-                                  <p:tgtEl>
-                                    <p:spTgt spid="22"/>
-                                  </p:tgtEl>
-                                  <p:attrNameLst>
-                                    <p:attrName>style.visibility</p:attrName>
-                                  </p:attrNameLst>
-                                </p:cBhvr>
-                                <p:to>
-                                  <p:strVal val="visible"/>
-                                </p:to>
-                              </p:set>
-                              <p:animEffect transition="in" filter="fade">
-                                <p:cBhvr>
-                                  <p:cTn id="29" dur="400"/>
-                                  <p:tgtEl>
-                                    <p:spTgt spid="22"/>
-                                  </p:tgtEl>
-                                </p:cBhvr>
-                              </p:animEffect>
-                            </p:childTnLst>
-                          </p:cTn>
-                        </p:par>
-                      </p:childTnLst>
-                    </p:cTn>
-                  </p:par>
-                </p:childTnLst>
-              </p:cTn>
-              <p:nextCondLst>
-                <p:cond evt="onClick" delay="0">
-                  <p:tgtEl>
-                    <p:spTgt spid="18"/>
-                  </p:tgtEl>
-                </p:cond>
-              </p:nextCondLst>
-            </p:seq>
-            <p:seq concurrent="1" nextAc="seek">
-              <p:cTn id="35" restart="whenNotActive" fill="hold" nodeType="interactiveSeq">
-                <p:stCondLst>
-                  <p:cond evt="onClick" delay="0">
-                    <p:tgtEl>
-                      <p:spTgt spid="23"/>
-                    </p:tgtEl>
-                  </p:cond>
-                </p:stCondLst>
-                <p:endSync evt="end" delay="0">
-                  <p:rtn val="all"/>
-                </p:endSync>
-                <p:childTnLst>
-                  <p:par>
-                    <p:cTn id="36" fill="hold">
-                      <p:stCondLst>
-                        <p:cond delay="0"/>
-                      </p:stCondLst>
-                      <p:childTnLst>
-                        <p:par>
-                          <p:cTn id="37" presetID="10" presetClass="entr" presetSubtype="0" fill="hold" grpId="0" nodeType="clickEffect">
-                            <p:stCondLst>
-                              <p:cond delay="0"/>
-                            </p:stCondLst>
-                            <p:childTnLst>
-                              <p:set>
-                                <p:cBhvr>
-                                  <p:cTn id="38" dur="1" fill="hold">
-                                    <p:stCondLst>
-                                      <p:cond delay="0"/>
-                                    </p:stCondLst>
-                                  </p:cTn>
-                                  <p:tgtEl>
-                                    <p:spTgt spid="27"/>
-                                  </p:tgtEl>
-                                  <p:attrNameLst>
-                                    <p:attrName>style.visibility</p:attrName>
-                                  </p:attrNameLst>
-                                </p:cBhvr>
-                                <p:to>
-                                  <p:strVal val="visible"/>
-                                </p:to>
-                              </p:set>
-                              <p:animEffect transition="in" filter="fade">
-                                <p:cBhvr>
-                                  <p:cTn id="39" dur="400"/>
-                                  <p:tgtEl>
-                                    <p:spTgt spid="27"/>
-                                  </p:tgtEl>
-                                </p:cBhvr>
-                              </p:animEffect>
-                            </p:childTnLst>
-                          </p:cTn>
-                        </p:par>
-                      </p:childTnLst>
-                    </p:cTn>
-                  </p:par>
-                </p:childTnLst>
-              </p:cTn>
-              <p:nextCondLst>
-                <p:cond evt="onClick" delay="0">
-                  <p:tgtEl>
-                    <p:spTgt spid="23"/>
-                  </p:tgtEl>
-                </p:cond>
-              </p:nextCondLst>
-            </p:seq>
-            <p:seq concurrent="1" nextAc="seek">
-              <p:cTn id="45" restart="whenNotActive" fill="hold" nodeType="interactiveSeq">
-                <p:stCondLst>
-                  <p:cond evt="onClick" delay="0">
-                    <p:tgtEl>
-                      <p:spTgt spid="28"/>
-                    </p:tgtEl>
-                  </p:cond>
-                </p:stCondLst>
-                <p:endSync evt="end" delay="0">
-                  <p:rtn val="all"/>
-                </p:endSync>
-                <p:childTnLst>
-                  <p:par>
-                    <p:cTn id="46" fill="hold">
-                      <p:stCondLst>
-                        <p:cond delay="0"/>
-                      </p:stCondLst>
-                      <p:childTnLst>
-                        <p:par>
-                          <p:cTn id="47" presetID="10" presetClass="entr" presetSubtype="0" fill="hold" grpId="0" nodeType="clickEffect">
-                            <p:stCondLst>
-                              <p:cond delay="0"/>
-                            </p:stCondLst>
-                            <p:childTnLst>
-                              <p:set>
-                                <p:cBhvr>
-                                  <p:cTn id="48" dur="1" fill="hold">
-                                    <p:stCondLst>
-                                      <p:cond delay="0"/>
-                                    </p:stCondLst>
-                                  </p:cTn>
-                                  <p:tgtEl>
-                                    <p:spTgt spid="32"/>
-                                  </p:tgtEl>
-                                  <p:attrNameLst>
-                                    <p:attrName>style.visibility</p:attrName>
-                                  </p:attrNameLst>
-                                </p:cBhvr>
-                                <p:to>
-                                  <p:strVal val="visible"/>
-                                </p:to>
-                              </p:set>
-                              <p:animEffect transition="in" filter="fade">
-                                <p:cBhvr>
-                                  <p:cTn id="49" dur="400"/>
-                                  <p:tgtEl>
-                                    <p:spTgt spid="32"/>
-                                  </p:tgtEl>
-                                </p:cBhvr>
-                              </p:animEffect>
-                            </p:childTnLst>
-                          </p:cTn>
-                        </p:par>
-                      </p:childTnLst>
-                    </p:cTn>
-                  </p:par>
-                </p:childTnLst>
-              </p:cTn>
-              <p:nextCondLst>
-                <p:cond evt="onClick" delay="0">
-                  <p:tgtEl>
-                    <p:spTgt spid="28"/>
-                  </p:tgtEl>
-                </p:cond>
-              </p:nextCondLst>
-            </p:seq>
-            <p:seq concurrent="1" nextAc="seek">
-              <p:cTn id="55" restart="whenNotActive" fill="hold" nodeType="interactiveSeq">
-                <p:stCondLst>
-                  <p:cond evt="onClick" delay="0">
-                    <p:tgtEl>
-                      <p:spTgt spid="33"/>
-                    </p:tgtEl>
-                  </p:cond>
-                </p:stCondLst>
-                <p:endSync evt="end" delay="0">
-                  <p:rtn val="all"/>
-                </p:endSync>
-                <p:childTnLst>
-                  <p:par>
-                    <p:cTn id="56" fill="hold">
-                      <p:stCondLst>
-                        <p:cond delay="0"/>
-                      </p:stCondLst>
-                      <p:childTnLst>
-                        <p:par>
-                          <p:cTn id="57" presetID="10" presetClass="entr" presetSubtype="0" fill="hold" grpId="0" nodeType="clickEffect">
-                            <p:stCondLst>
-                              <p:cond delay="0"/>
-                            </p:stCondLst>
-                            <p:childTnLst>
-                              <p:set>
-                                <p:cBhvr>
-                                  <p:cTn id="58" dur="1" fill="hold">
-                                    <p:stCondLst>
-                                      <p:cond delay="0"/>
-                                    </p:stCondLst>
-                                  </p:cTn>
-                                  <p:tgtEl>
-                                    <p:spTgt spid="37"/>
-                                  </p:tgtEl>
-                                  <p:attrNameLst>
-                                    <p:attrName>style.visibility</p:attrName>
-                                  </p:attrNameLst>
-                                </p:cBhvr>
-                                <p:to>
-                                  <p:strVal val="visible"/>
-                                </p:to>
-                              </p:set>
-                              <p:animEffect transition="in" filter="fade">
-                                <p:cBhvr>
-                                  <p:cTn id="59" dur="400"/>
-                                  <p:tgtEl>
-                                    <p:spTgt spid="37"/>
-                                  </p:tgtEl>
-                                </p:cBhvr>
-                              </p:animEffect>
-                            </p:childTnLst>
-                          </p:cTn>
-                        </p:par>
-                      </p:childTnLst>
-                    </p:cTn>
-                  </p:par>
-                </p:childTnLst>
-              </p:cTn>
-              <p:nextCondLst>
-                <p:cond evt="onClick" delay="0">
-                  <p:tgtEl>
-                    <p:spTgt spid="33"/>
-                  </p:tgtEl>
-                </p:cond>
-              </p:nextCondLst>
-            </p:seq>
-            <p:seq concurrent="1" nextAc="seek">
-              <p:cTn id="65" restart="whenNotActive" fill="hold" nodeType="interactiveSeq">
-                <p:stCondLst>
-                  <p:cond evt="onClick" delay="0">
-                    <p:tgtEl>
-                      <p:spTgt spid="38"/>
-                    </p:tgtEl>
-                  </p:cond>
-                </p:stCondLst>
-                <p:endSync evt="end" delay="0">
-                  <p:rtn val="all"/>
-                </p:endSync>
-                <p:childTnLst>
-                  <p:par>
-                    <p:cTn id="66" fill="hold">
-                      <p:stCondLst>
-                        <p:cond delay="0"/>
-                      </p:stCondLst>
-                      <p:childTnLst>
-                        <p:par>
-                          <p:cTn id="67" presetID="10" presetClass="entr" presetSubtype="0" fill="hold" grpId="0" nodeType="clickEffect">
-                            <p:stCondLst>
-                              <p:cond delay="0"/>
-                            </p:stCondLst>
-                            <p:childTnLst>
-                              <p:set>
-                                <p:cBhvr>
-                                  <p:cTn id="68" dur="1" fill="hold">
-                                    <p:stCondLst>
-                                      <p:cond delay="0"/>
-                                    </p:stCondLst>
-                                  </p:cTn>
-                                  <p:tgtEl>
-                                    <p:spTgt spid="42"/>
-                                  </p:tgtEl>
-                                  <p:attrNameLst>
-                                    <p:attrName>style.visibility</p:attrName>
-                                  </p:attrNameLst>
-                                </p:cBhvr>
-                                <p:to>
-                                  <p:strVal val="visible"/>
-                                </p:to>
-                              </p:set>
-                              <p:animEffect transition="in" filter="fade">
-                                <p:cBhvr>
-                                  <p:cTn id="69" dur="400"/>
-                                  <p:tgtEl>
-                                    <p:spTgt spid="42"/>
-                                  </p:tgtEl>
-                                </p:cBhvr>
-                              </p:animEffect>
-                            </p:childTnLst>
-                          </p:cTn>
-                        </p:par>
-                      </p:childTnLst>
-                    </p:cTn>
-                  </p:par>
-                </p:childTnLst>
-              </p:cTn>
-              <p:nextCondLst>
-                <p:cond evt="onClick" delay="0">
-                  <p:tgtEl>
-                    <p:spTgt spid="38"/>
-                  </p:tgtEl>
-                </p:cond>
-              </p:nextCondLst>
-            </p:seq>
-            <p:seq concurrent="1" nextAc="seek">
-              <p:cTn id="75" restart="whenNotActive" fill="hold" nodeType="interactiveSeq">
-                <p:stCondLst>
-                  <p:cond evt="onClick" delay="0">
-                    <p:tgtEl>
-                      <p:spTgt spid="38"/>
-                    </p:tgtEl>
-                  </p:cond>
-                </p:stCondLst>
-                <p:endSync evt="end" delay="0">
-                  <p:rtn val="all"/>
-                </p:endSync>
-                <p:childTnLst>
-                  <p:par>
-                    <p:cTn id="76" fill="hold">
-                      <p:stCondLst>
-                        <p:cond delay="0"/>
-                      </p:stCondLst>
-                      <p:childTnLst>
-                        <p:par>
-                          <p:cTn id="77" presetID="10" presetClass="entr" presetSubtype="0" fill="hold" grpId="0" nodeType="clickEffect">
-                            <p:stCondLst>
-                              <p:cond delay="0"/>
-                            </p:stCondLst>
-                            <p:childTnLst>
-                              <p:set>
-                                <p:cBhvr>
-                                  <p:cTn id="78" dur="1" fill="hold">
-                                    <p:stCondLst>
-                                      <p:cond delay="0"/>
-                                    </p:stCondLst>
-                                  </p:cTn>
-                                  <p:tgtEl>
-                                    <p:spTgt spid="43"/>
-                                  </p:tgtEl>
-                                  <p:attrNameLst>
-                                    <p:attrName>style.visibility</p:attrName>
-                                  </p:attrNameLst>
-                                </p:cBhvr>
-                                <p:to>
-                                  <p:strVal val="visible"/>
-                                </p:to>
-                              </p:set>
-                              <p:animEffect transition="in" filter="fade">
-                                <p:cBhvr>
-                                  <p:cTn id="79" dur="400"/>
-                                  <p:tgtEl>
-                                    <p:spTgt spid="43"/>
-                                  </p:tgtEl>
-                                </p:cBhvr>
-                              </p:animEffect>
-                            </p:childTnLst>
-                          </p:cTn>
-                        </p:par>
-                      </p:childTnLst>
-                    </p:cTn>
-                  </p:par>
-                </p:childTnLst>
-              </p:cTn>
-              <p:nextCondLst>
-                <p:cond evt="onClick" delay="0">
-                  <p:tgtEl>
-                    <p:spTgt spid="38"/>
                   </p:tgtEl>
                 </p:cond>
               </p:nextCondLst>
@@ -13848,7 +13733,7 @@
                 </a:solidFill>
                 <a:latin typeface="Inter"/>
               </a:rPr>
-              <a:t>Leerlingenversie — kioskmodus</a:t>
+              <a:t>Leerlingenversie — klik onthult</a:t>
             </a:r>
           </a:p>
         </p:txBody>
@@ -15038,7 +14923,7 @@
                 </a:solidFill>
                 <a:latin typeface="Inter"/>
               </a:rPr>
-              <a:t>Leerlingenversie — kioskmodus</a:t>
+              <a:t>Leerlingenversie — klik onthult</a:t>
             </a:r>
           </a:p>
         </p:txBody>
@@ -17045,7 +16930,7 @@
                 </a:solidFill>
                 <a:latin typeface="Inter"/>
               </a:rPr>
-              <a:t>Leerlingenversie — kioskmodus</a:t>
+              <a:t>Leerlingenversie — klik onthult</a:t>
             </a:r>
           </a:p>
         </p:txBody>
@@ -17107,7 +16992,326 @@
           <p:childTnLst>
             <p:seq concurrent="1" nextAc="seek">
               <p:cTn id="2" dur="indefinite" nodeType="mainSeq">
-                <p:childTnLst/>
+                <p:childTnLst>
+                  <p:par>
+                    <p:cTn id="3" fill="hold">
+                      <p:stCondLst>
+                        <p:cond delay="indefinite"/>
+                      </p:stCondLst>
+                      <p:childTnLst>
+                        <p:par>
+                          <p:cTn id="4" fill="hold">
+                            <p:stCondLst>
+                              <p:cond delay="0"/>
+                            </p:stCondLst>
+                            <p:childTnLst>
+                              <p:par>
+                                <p:cTn id="5" presetID="10" presetClass="entr" presetSubtype="0" fill="hold" grpId="0" nodeType="clickEffect">
+                                  <p:stCondLst>
+                                    <p:cond delay="0"/>
+                                  </p:stCondLst>
+                                  <p:childTnLst>
+                                    <p:set>
+                                      <p:cBhvr>
+                                        <p:cTn id="6" dur="1" fill="hold">
+                                          <p:stCondLst>
+                                            <p:cond delay="0"/>
+                                          </p:stCondLst>
+                                        </p:cTn>
+                                        <p:tgtEl>
+                                          <p:spTgt spid="14"/>
+                                        </p:tgtEl>
+                                        <p:attrNameLst>
+                                          <p:attrName>style.visibility</p:attrName>
+                                        </p:attrNameLst>
+                                      </p:cBhvr>
+                                      <p:to>
+                                        <p:strVal val="visible"/>
+                                      </p:to>
+                                    </p:set>
+                                    <p:animEffect transition="in" filter="fade">
+                                      <p:cBhvr>
+                                        <p:cTn id="7" dur="500"/>
+                                        <p:tgtEl>
+                                          <p:spTgt spid="14"/>
+                                        </p:tgtEl>
+                                      </p:cBhvr>
+                                    </p:animEffect>
+                                  </p:childTnLst>
+                                </p:cTn>
+                              </p:par>
+                            </p:childTnLst>
+                          </p:cTn>
+                        </p:par>
+                      </p:childTnLst>
+                    </p:cTn>
+                  </p:par>
+                  <p:par>
+                    <p:cTn id="8" fill="hold">
+                      <p:stCondLst>
+                        <p:cond delay="indefinite"/>
+                      </p:stCondLst>
+                      <p:childTnLst>
+                        <p:par>
+                          <p:cTn id="9" fill="hold">
+                            <p:stCondLst>
+                              <p:cond delay="0"/>
+                            </p:stCondLst>
+                            <p:childTnLst>
+                              <p:par>
+                                <p:cTn id="10" presetID="10" presetClass="entr" presetSubtype="0" fill="hold" grpId="0" nodeType="clickEffect">
+                                  <p:stCondLst>
+                                    <p:cond delay="0"/>
+                                  </p:stCondLst>
+                                  <p:childTnLst>
+                                    <p:set>
+                                      <p:cBhvr>
+                                        <p:cTn id="11" dur="1" fill="hold">
+                                          <p:stCondLst>
+                                            <p:cond delay="0"/>
+                                          </p:stCondLst>
+                                        </p:cTn>
+                                        <p:tgtEl>
+                                          <p:spTgt spid="20"/>
+                                        </p:tgtEl>
+                                        <p:attrNameLst>
+                                          <p:attrName>style.visibility</p:attrName>
+                                        </p:attrNameLst>
+                                      </p:cBhvr>
+                                      <p:to>
+                                        <p:strVal val="visible"/>
+                                      </p:to>
+                                    </p:set>
+                                    <p:animEffect transition="in" filter="fade">
+                                      <p:cBhvr>
+                                        <p:cTn id="12" dur="500"/>
+                                        <p:tgtEl>
+                                          <p:spTgt spid="20"/>
+                                        </p:tgtEl>
+                                      </p:cBhvr>
+                                    </p:animEffect>
+                                  </p:childTnLst>
+                                </p:cTn>
+                              </p:par>
+                            </p:childTnLst>
+                          </p:cTn>
+                        </p:par>
+                      </p:childTnLst>
+                    </p:cTn>
+                  </p:par>
+                  <p:par>
+                    <p:cTn id="13" fill="hold">
+                      <p:stCondLst>
+                        <p:cond delay="indefinite"/>
+                      </p:stCondLst>
+                      <p:childTnLst>
+                        <p:par>
+                          <p:cTn id="14" fill="hold">
+                            <p:stCondLst>
+                              <p:cond delay="0"/>
+                            </p:stCondLst>
+                            <p:childTnLst>
+                              <p:par>
+                                <p:cTn id="15" presetID="10" presetClass="entr" presetSubtype="0" fill="hold" grpId="0" nodeType="clickEffect">
+                                  <p:stCondLst>
+                                    <p:cond delay="0"/>
+                                  </p:stCondLst>
+                                  <p:childTnLst>
+                                    <p:set>
+                                      <p:cBhvr>
+                                        <p:cTn id="16" dur="1" fill="hold">
+                                          <p:stCondLst>
+                                            <p:cond delay="0"/>
+                                          </p:stCondLst>
+                                        </p:cTn>
+                                        <p:tgtEl>
+                                          <p:spTgt spid="26"/>
+                                        </p:tgtEl>
+                                        <p:attrNameLst>
+                                          <p:attrName>style.visibility</p:attrName>
+                                        </p:attrNameLst>
+                                      </p:cBhvr>
+                                      <p:to>
+                                        <p:strVal val="visible"/>
+                                      </p:to>
+                                    </p:set>
+                                    <p:animEffect transition="in" filter="fade">
+                                      <p:cBhvr>
+                                        <p:cTn id="17" dur="500"/>
+                                        <p:tgtEl>
+                                          <p:spTgt spid="26"/>
+                                        </p:tgtEl>
+                                      </p:cBhvr>
+                                    </p:animEffect>
+                                  </p:childTnLst>
+                                </p:cTn>
+                              </p:par>
+                            </p:childTnLst>
+                          </p:cTn>
+                        </p:par>
+                      </p:childTnLst>
+                    </p:cTn>
+                  </p:par>
+                  <p:par>
+                    <p:cTn id="18" fill="hold">
+                      <p:stCondLst>
+                        <p:cond delay="indefinite"/>
+                      </p:stCondLst>
+                      <p:childTnLst>
+                        <p:par>
+                          <p:cTn id="19" fill="hold">
+                            <p:stCondLst>
+                              <p:cond delay="0"/>
+                            </p:stCondLst>
+                            <p:childTnLst>
+                              <p:par>
+                                <p:cTn id="20" presetID="10" presetClass="entr" presetSubtype="0" fill="hold" grpId="0" nodeType="clickEffect">
+                                  <p:stCondLst>
+                                    <p:cond delay="0"/>
+                                  </p:stCondLst>
+                                  <p:childTnLst>
+                                    <p:set>
+                                      <p:cBhvr>
+                                        <p:cTn id="21" dur="1" fill="hold">
+                                          <p:stCondLst>
+                                            <p:cond delay="0"/>
+                                          </p:stCondLst>
+                                        </p:cTn>
+                                        <p:tgtEl>
+                                          <p:spTgt spid="32"/>
+                                        </p:tgtEl>
+                                        <p:attrNameLst>
+                                          <p:attrName>style.visibility</p:attrName>
+                                        </p:attrNameLst>
+                                      </p:cBhvr>
+                                      <p:to>
+                                        <p:strVal val="visible"/>
+                                      </p:to>
+                                    </p:set>
+                                    <p:animEffect transition="in" filter="fade">
+                                      <p:cBhvr>
+                                        <p:cTn id="22" dur="500"/>
+                                        <p:tgtEl>
+                                          <p:spTgt spid="32"/>
+                                        </p:tgtEl>
+                                      </p:cBhvr>
+                                    </p:animEffect>
+                                  </p:childTnLst>
+                                </p:cTn>
+                              </p:par>
+                            </p:childTnLst>
+                          </p:cTn>
+                        </p:par>
+                      </p:childTnLst>
+                    </p:cTn>
+                  </p:par>
+                  <p:par>
+                    <p:cTn id="23" fill="hold">
+                      <p:stCondLst>
+                        <p:cond delay="indefinite"/>
+                      </p:stCondLst>
+                      <p:childTnLst>
+                        <p:par>
+                          <p:cTn id="24" fill="hold">
+                            <p:stCondLst>
+                              <p:cond delay="0"/>
+                            </p:stCondLst>
+                            <p:childTnLst>
+                              <p:par>
+                                <p:cTn id="25" presetID="10" presetClass="entr" presetSubtype="0" fill="hold" grpId="0" nodeType="clickEffect">
+                                  <p:stCondLst>
+                                    <p:cond delay="0"/>
+                                  </p:stCondLst>
+                                  <p:childTnLst>
+                                    <p:set>
+                                      <p:cBhvr>
+                                        <p:cTn id="26" dur="1" fill="hold">
+                                          <p:stCondLst>
+                                            <p:cond delay="0"/>
+                                          </p:stCondLst>
+                                        </p:cTn>
+                                        <p:tgtEl>
+                                          <p:spTgt spid="37"/>
+                                        </p:tgtEl>
+                                        <p:attrNameLst>
+                                          <p:attrName>style.visibility</p:attrName>
+                                        </p:attrNameLst>
+                                      </p:cBhvr>
+                                      <p:to>
+                                        <p:strVal val="visible"/>
+                                      </p:to>
+                                    </p:set>
+                                    <p:animEffect transition="in" filter="fade">
+                                      <p:cBhvr>
+                                        <p:cTn id="27" dur="500"/>
+                                        <p:tgtEl>
+                                          <p:spTgt spid="37"/>
+                                        </p:tgtEl>
+                                      </p:cBhvr>
+                                    </p:animEffect>
+                                  </p:childTnLst>
+                                </p:cTn>
+                              </p:par>
+                            </p:childTnLst>
+                          </p:cTn>
+                        </p:par>
+                      </p:childTnLst>
+                    </p:cTn>
+                  </p:par>
+                  <p:par>
+                    <p:cTn id="28" fill="hold">
+                      <p:stCondLst>
+                        <p:cond delay="indefinite"/>
+                      </p:stCondLst>
+                      <p:childTnLst>
+                        <p:par>
+                          <p:cTn id="29" fill="hold">
+                            <p:stCondLst>
+                              <p:cond delay="0"/>
+                            </p:stCondLst>
+                            <p:childTnLst>
+                              <p:par>
+                                <p:cTn id="30" presetID="10" presetClass="entr" presetSubtype="0" fill="hold" grpId="0" nodeType="clickEffect">
+                                  <p:stCondLst>
+                                    <p:cond delay="0"/>
+                                  </p:stCondLst>
+                                  <p:childTnLst>
+                                    <p:set>
+                                      <p:cBhvr>
+                                        <p:cTn id="31" dur="1" fill="hold">
+                                          <p:stCondLst>
+                                            <p:cond delay="0"/>
+                                          </p:stCondLst>
+                                        </p:cTn>
+                                        <p:tgtEl>
+                                          <p:spTgt spid="38"/>
+                                        </p:tgtEl>
+                                        <p:attrNameLst>
+                                          <p:attrName>style.visibility</p:attrName>
+                                        </p:attrNameLst>
+                                      </p:cBhvr>
+                                      <p:to>
+                                        <p:strVal val="visible"/>
+                                      </p:to>
+                                    </p:set>
+                                    <p:animEffect transition="in" filter="fade">
+                                      <p:cBhvr>
+                                        <p:cTn id="32" dur="500"/>
+                                        <p:tgtEl>
+                                          <p:spTgt spid="38"/>
+                                        </p:tgtEl>
+                                      </p:cBhvr>
+                                    </p:animEffect>
+                                  </p:childTnLst>
+                                </p:cTn>
+                              </p:par>
+                            </p:childTnLst>
+                          </p:cTn>
+                        </p:par>
+                      </p:childTnLst>
+                    </p:cTn>
+                  </p:par>
+                </p:childTnLst>
               </p:cTn>
               <p:prevCondLst>
                 <p:cond evt="onPrev" delay="0">
@@ -17120,408 +17324,6 @@
                 <p:cond evt="onNext" delay="0">
                   <p:tgtEl>
                     <p:sldTgt/>
-                  </p:tgtEl>
-                </p:cond>
-              </p:nextCondLst>
-            </p:seq>
-            <p:seq concurrent="1" nextAc="seek">
-              <p:cTn id="5" restart="whenNotActive" fill="hold" nodeType="interactiveSeq">
-                <p:stCondLst>
-                  <p:cond evt="onClick" delay="0">
-                    <p:tgtEl>
-                      <p:spTgt spid="9"/>
-                    </p:tgtEl>
-                  </p:cond>
-                </p:stCondLst>
-                <p:endSync evt="end" delay="0">
-                  <p:rtn val="all"/>
-                </p:endSync>
-                <p:childTnLst>
-                  <p:par>
-                    <p:cTn id="6" fill="hold">
-                      <p:stCondLst>
-                        <p:cond delay="0"/>
-                      </p:stCondLst>
-                      <p:childTnLst>
-                        <p:par>
-                          <p:cTn id="7" presetID="10" presetClass="entr" presetSubtype="0" fill="hold" grpId="0" nodeType="clickEffect">
-                            <p:stCondLst>
-                              <p:cond delay="0"/>
-                            </p:stCondLst>
-                            <p:childTnLst>
-                              <p:set>
-                                <p:cBhvr>
-                                  <p:cTn id="8" dur="1" fill="hold">
-                                    <p:stCondLst>
-                                      <p:cond delay="0"/>
-                                    </p:stCondLst>
-                                  </p:cTn>
-                                  <p:tgtEl>
-                                    <p:spTgt spid="14"/>
-                                  </p:tgtEl>
-                                  <p:attrNameLst>
-                                    <p:attrName>style.visibility</p:attrName>
-                                  </p:attrNameLst>
-                                </p:cBhvr>
-                                <p:to>
-                                  <p:strVal val="visible"/>
-                                </p:to>
-                              </p:set>
-                              <p:animEffect transition="in" filter="fade">
-                                <p:cBhvr>
-                                  <p:cTn id="9" dur="400"/>
-                                  <p:tgtEl>
-                                    <p:spTgt spid="14"/>
-                                  </p:tgtEl>
-                                </p:cBhvr>
-                              </p:animEffect>
-                            </p:childTnLst>
-                          </p:cTn>
-                        </p:par>
-                      </p:childTnLst>
-                    </p:cTn>
-                  </p:par>
-                </p:childTnLst>
-              </p:cTn>
-              <p:nextCondLst>
-                <p:cond evt="onClick" delay="0">
-                  <p:tgtEl>
-                    <p:spTgt spid="9"/>
-                  </p:tgtEl>
-                </p:cond>
-              </p:nextCondLst>
-            </p:seq>
-            <p:seq concurrent="1" nextAc="seek">
-              <p:cTn id="15" restart="whenNotActive" fill="hold" nodeType="interactiveSeq">
-                <p:stCondLst>
-                  <p:cond evt="onClick" delay="0">
-                    <p:tgtEl>
-                      <p:spTgt spid="15"/>
-                    </p:tgtEl>
-                  </p:cond>
-                </p:stCondLst>
-                <p:endSync evt="end" delay="0">
-                  <p:rtn val="all"/>
-                </p:endSync>
-                <p:childTnLst>
-                  <p:par>
-                    <p:cTn id="16" fill="hold">
-                      <p:stCondLst>
-                        <p:cond delay="0"/>
-                      </p:stCondLst>
-                      <p:childTnLst>
-                        <p:par>
-                          <p:cTn id="17" presetID="10" presetClass="entr" presetSubtype="0" fill="hold" grpId="0" nodeType="clickEffect">
-                            <p:stCondLst>
-                              <p:cond delay="0"/>
-                            </p:stCondLst>
-                            <p:childTnLst>
-                              <p:set>
-                                <p:cBhvr>
-                                  <p:cTn id="18" dur="1" fill="hold">
-                                    <p:stCondLst>
-                                      <p:cond delay="0"/>
-                                    </p:stCondLst>
-                                  </p:cTn>
-                                  <p:tgtEl>
-                                    <p:spTgt spid="20"/>
-                                  </p:tgtEl>
-                                  <p:attrNameLst>
-                                    <p:attrName>style.visibility</p:attrName>
-                                  </p:attrNameLst>
-                                </p:cBhvr>
-                                <p:to>
-                                  <p:strVal val="visible"/>
-                                </p:to>
-                              </p:set>
-                              <p:animEffect transition="in" filter="fade">
-                                <p:cBhvr>
-                                  <p:cTn id="19" dur="400"/>
-                                  <p:tgtEl>
-                                    <p:spTgt spid="20"/>
-                                  </p:tgtEl>
-                                </p:cBhvr>
-                              </p:animEffect>
-                            </p:childTnLst>
-                          </p:cTn>
-                        </p:par>
-                      </p:childTnLst>
-                    </p:cTn>
-                  </p:par>
-                </p:childTnLst>
-              </p:cTn>
-              <p:nextCondLst>
-                <p:cond evt="onClick" delay="0">
-                  <p:tgtEl>
-                    <p:spTgt spid="15"/>
-                  </p:tgtEl>
-                </p:cond>
-              </p:nextCondLst>
-            </p:seq>
-            <p:seq concurrent="1" nextAc="seek">
-              <p:cTn id="25" restart="whenNotActive" fill="hold" nodeType="interactiveSeq">
-                <p:stCondLst>
-                  <p:cond evt="onClick" delay="0">
-                    <p:tgtEl>
-                      <p:spTgt spid="21"/>
-                    </p:tgtEl>
-                  </p:cond>
-                </p:stCondLst>
-                <p:endSync evt="end" delay="0">
-                  <p:rtn val="all"/>
-                </p:endSync>
-                <p:childTnLst>
-                  <p:par>
-                    <p:cTn id="26" fill="hold">
-                      <p:stCondLst>
-                        <p:cond delay="0"/>
-                      </p:stCondLst>
-                      <p:childTnLst>
-                        <p:par>
-                          <p:cTn id="27" presetID="10" presetClass="entr" presetSubtype="0" fill="hold" grpId="0" nodeType="clickEffect">
-                            <p:stCondLst>
-                              <p:cond delay="0"/>
-                            </p:stCondLst>
-                            <p:childTnLst>
-                              <p:set>
-                                <p:cBhvr>
-                                  <p:cTn id="28" dur="1" fill="hold">
-                                    <p:stCondLst>
-                                      <p:cond delay="0"/>
-                                    </p:stCondLst>
-                                  </p:cTn>
-                                  <p:tgtEl>
-                                    <p:spTgt spid="26"/>
-                                  </p:tgtEl>
-                                  <p:attrNameLst>
-                                    <p:attrName>style.visibility</p:attrName>
-                                  </p:attrNameLst>
-                                </p:cBhvr>
-                                <p:to>
-                                  <p:strVal val="visible"/>
-                                </p:to>
-                              </p:set>
-                              <p:animEffect transition="in" filter="fade">
-                                <p:cBhvr>
-                                  <p:cTn id="29" dur="400"/>
-                                  <p:tgtEl>
-                                    <p:spTgt spid="26"/>
-                                  </p:tgtEl>
-                                </p:cBhvr>
-                              </p:animEffect>
-                            </p:childTnLst>
-                          </p:cTn>
-                        </p:par>
-                      </p:childTnLst>
-                    </p:cTn>
-                  </p:par>
-                </p:childTnLst>
-              </p:cTn>
-              <p:nextCondLst>
-                <p:cond evt="onClick" delay="0">
-                  <p:tgtEl>
-                    <p:spTgt spid="21"/>
-                  </p:tgtEl>
-                </p:cond>
-              </p:nextCondLst>
-            </p:seq>
-            <p:seq concurrent="1" nextAc="seek">
-              <p:cTn id="35" restart="whenNotActive" fill="hold" nodeType="interactiveSeq">
-                <p:stCondLst>
-                  <p:cond evt="onClick" delay="0">
-                    <p:tgtEl>
-                      <p:spTgt spid="27"/>
-                    </p:tgtEl>
-                  </p:cond>
-                </p:stCondLst>
-                <p:endSync evt="end" delay="0">
-                  <p:rtn val="all"/>
-                </p:endSync>
-                <p:childTnLst>
-                  <p:par>
-                    <p:cTn id="36" fill="hold">
-                      <p:stCondLst>
-                        <p:cond delay="0"/>
-                      </p:stCondLst>
-                      <p:childTnLst>
-                        <p:par>
-                          <p:cTn id="37" presetID="10" presetClass="entr" presetSubtype="0" fill="hold" grpId="0" nodeType="clickEffect">
-                            <p:stCondLst>
-                              <p:cond delay="0"/>
-                            </p:stCondLst>
-                            <p:childTnLst>
-                              <p:set>
-                                <p:cBhvr>
-                                  <p:cTn id="38" dur="1" fill="hold">
-                                    <p:stCondLst>
-                                      <p:cond delay="0"/>
-                                    </p:stCondLst>
-                                  </p:cTn>
-                                  <p:tgtEl>
-                                    <p:spTgt spid="32"/>
-                                  </p:tgtEl>
-                                  <p:attrNameLst>
-                                    <p:attrName>style.visibility</p:attrName>
-                                  </p:attrNameLst>
-                                </p:cBhvr>
-                                <p:to>
-                                  <p:strVal val="visible"/>
-                                </p:to>
-                              </p:set>
-                              <p:animEffect transition="in" filter="fade">
-                                <p:cBhvr>
-                                  <p:cTn id="39" dur="400"/>
-                                  <p:tgtEl>
-                                    <p:spTgt spid="32"/>
-                                  </p:tgtEl>
-                                </p:cBhvr>
-                              </p:animEffect>
-                            </p:childTnLst>
-                          </p:cTn>
-                        </p:par>
-                      </p:childTnLst>
-                    </p:cTn>
-                  </p:par>
-                </p:childTnLst>
-              </p:cTn>
-              <p:nextCondLst>
-                <p:cond evt="onClick" delay="0">
-                  <p:tgtEl>
-                    <p:spTgt spid="27"/>
-                  </p:tgtEl>
-                </p:cond>
-              </p:nextCondLst>
-            </p:seq>
-            <p:seq concurrent="1" nextAc="seek">
-              <p:cTn id="45" restart="whenNotActive" fill="hold" nodeType="interactiveSeq">
-                <p:stCondLst>
-                  <p:cond evt="onClick" delay="0">
-                    <p:tgtEl>
-                      <p:spTgt spid="33"/>
-                    </p:tgtEl>
-                  </p:cond>
-                </p:stCondLst>
-                <p:endSync evt="end" delay="0">
-                  <p:rtn val="all"/>
-                </p:endSync>
-                <p:childTnLst>
-                  <p:par>
-                    <p:cTn id="46" fill="hold">
-                      <p:stCondLst>
-                        <p:cond delay="0"/>
-                      </p:stCondLst>
-                      <p:childTnLst>
-                        <p:par>
-                          <p:cTn id="47" presetID="10" presetClass="entr" presetSubtype="0" fill="hold" grpId="0" nodeType="clickEffect">
-                            <p:stCondLst>
-                              <p:cond delay="0"/>
-                            </p:stCondLst>
-                            <p:childTnLst>
-                              <p:set>
-                                <p:cBhvr>
-                                  <p:cTn id="48" dur="1" fill="hold">
-                                    <p:stCondLst>
-                                      <p:cond delay="0"/>
-                                    </p:stCondLst>
-                                  </p:cTn>
-                                  <p:tgtEl>
-                                    <p:spTgt spid="37"/>
-                                  </p:tgtEl>
-                                  <p:attrNameLst>
-                                    <p:attrName>style.visibility</p:attrName>
-                                  </p:attrNameLst>
-                                </p:cBhvr>
-                                <p:to>
-                                  <p:strVal val="visible"/>
-                                </p:to>
-                              </p:set>
-                              <p:animEffect transition="in" filter="fade">
-                                <p:cBhvr>
-                                  <p:cTn id="49" dur="400"/>
-                                  <p:tgtEl>
-                                    <p:spTgt spid="37"/>
-                                  </p:tgtEl>
-                                </p:cBhvr>
-                              </p:animEffect>
-                            </p:childTnLst>
-                          </p:cTn>
-                        </p:par>
-                      </p:childTnLst>
-                    </p:cTn>
-                  </p:par>
-                </p:childTnLst>
-              </p:cTn>
-              <p:nextCondLst>
-                <p:cond evt="onClick" delay="0">
-                  <p:tgtEl>
-                    <p:spTgt spid="33"/>
-                  </p:tgtEl>
-                </p:cond>
-              </p:nextCondLst>
-            </p:seq>
-            <p:seq concurrent="1" nextAc="seek">
-              <p:cTn id="55" restart="whenNotActive" fill="hold" nodeType="interactiveSeq">
-                <p:stCondLst>
-                  <p:cond evt="onClick" delay="0">
-                    <p:tgtEl>
-                      <p:spTgt spid="33"/>
-                    </p:tgtEl>
-                  </p:cond>
-                </p:stCondLst>
-                <p:endSync evt="end" delay="0">
-                  <p:rtn val="all"/>
-                </p:endSync>
-                <p:childTnLst>
-                  <p:par>
-                    <p:cTn id="56" fill="hold">
-                      <p:stCondLst>
-                        <p:cond delay="0"/>
-                      </p:stCondLst>
-                      <p:childTnLst>
-                        <p:par>
-                          <p:cTn id="57" presetID="10" presetClass="entr" presetSubtype="0" fill="hold" grpId="0" nodeType="clickEffect">
-                            <p:stCondLst>
-                              <p:cond delay="0"/>
-                            </p:stCondLst>
-                            <p:childTnLst>
-                              <p:set>
-                                <p:cBhvr>
-                                  <p:cTn id="58" dur="1" fill="hold">
-                                    <p:stCondLst>
-                                      <p:cond delay="0"/>
-                                    </p:stCondLst>
-                                  </p:cTn>
-                                  <p:tgtEl>
-                                    <p:spTgt spid="38"/>
-                                  </p:tgtEl>
-                                  <p:attrNameLst>
-                                    <p:attrName>style.visibility</p:attrName>
-                                  </p:attrNameLst>
-                                </p:cBhvr>
-                                <p:to>
-                                  <p:strVal val="visible"/>
-                                </p:to>
-                              </p:set>
-                              <p:animEffect transition="in" filter="fade">
-                                <p:cBhvr>
-                                  <p:cTn id="59" dur="400"/>
-                                  <p:tgtEl>
-                                    <p:spTgt spid="38"/>
-                                  </p:tgtEl>
-                                </p:cBhvr>
-                              </p:animEffect>
-                            </p:childTnLst>
-                          </p:cTn>
-                        </p:par>
-                      </p:childTnLst>
-                    </p:cTn>
-                  </p:par>
-                </p:childTnLst>
-              </p:cTn>
-              <p:nextCondLst>
-                <p:cond evt="onClick" delay="0">
-                  <p:tgtEl>
-                    <p:spTgt spid="33"/>
                   </p:tgtEl>
                 </p:cond>
               </p:nextCondLst>
@@ -20746,7 +20548,7 @@
                 </a:solidFill>
                 <a:latin typeface="Inter"/>
               </a:rPr>
-              <a:t>Leerlingenversie — kioskmodus</a:t>
+              <a:t>Leerlingenversie — klik onthult</a:t>
             </a:r>
           </a:p>
         </p:txBody>
@@ -23788,7 +23590,7 @@
                 </a:solidFill>
                 <a:latin typeface="Inter"/>
               </a:rPr>
-              <a:t>Leerlingenversie — kioskmodus</a:t>
+              <a:t>Leerlingenversie — klik onthult</a:t>
             </a:r>
           </a:p>
         </p:txBody>
@@ -25990,7 +25792,7 @@
                 </a:solidFill>
                 <a:latin typeface="Inter"/>
               </a:rPr>
-              <a:t>Leerlingenversie — kioskmodus</a:t>
+              <a:t>Leerlingenversie — klik onthult</a:t>
             </a:r>
           </a:p>
         </p:txBody>
@@ -28029,7 +27831,7 @@
                 </a:solidFill>
                 <a:latin typeface="Inter"/>
               </a:rPr>
-              <a:t>Leerlingenversie — kioskmodus</a:t>
+              <a:t>Leerlingenversie — klik onthult</a:t>
             </a:r>
           </a:p>
         </p:txBody>
@@ -28091,7 +27893,379 @@
           <p:childTnLst>
             <p:seq concurrent="1" nextAc="seek">
               <p:cTn id="2" dur="indefinite" nodeType="mainSeq">
-                <p:childTnLst/>
+                <p:childTnLst>
+                  <p:par>
+                    <p:cTn id="3" fill="hold">
+                      <p:stCondLst>
+                        <p:cond delay="indefinite"/>
+                      </p:stCondLst>
+                      <p:childTnLst>
+                        <p:par>
+                          <p:cTn id="4" fill="hold">
+                            <p:stCondLst>
+                              <p:cond delay="0"/>
+                            </p:stCondLst>
+                            <p:childTnLst>
+                              <p:par>
+                                <p:cTn id="5" presetID="10" presetClass="entr" presetSubtype="0" fill="hold" grpId="0" nodeType="clickEffect">
+                                  <p:stCondLst>
+                                    <p:cond delay="0"/>
+                                  </p:stCondLst>
+                                  <p:childTnLst>
+                                    <p:set>
+                                      <p:cBhvr>
+                                        <p:cTn id="6" dur="1" fill="hold">
+                                          <p:stCondLst>
+                                            <p:cond delay="0"/>
+                                          </p:stCondLst>
+                                        </p:cTn>
+                                        <p:tgtEl>
+                                          <p:spTgt spid="11"/>
+                                        </p:tgtEl>
+                                        <p:attrNameLst>
+                                          <p:attrName>style.visibility</p:attrName>
+                                        </p:attrNameLst>
+                                      </p:cBhvr>
+                                      <p:to>
+                                        <p:strVal val="visible"/>
+                                      </p:to>
+                                    </p:set>
+                                    <p:animEffect transition="in" filter="fade">
+                                      <p:cBhvr>
+                                        <p:cTn id="7" dur="500"/>
+                                        <p:tgtEl>
+                                          <p:spTgt spid="11"/>
+                                        </p:tgtEl>
+                                      </p:cBhvr>
+                                    </p:animEffect>
+                                  </p:childTnLst>
+                                </p:cTn>
+                              </p:par>
+                            </p:childTnLst>
+                          </p:cTn>
+                        </p:par>
+                      </p:childTnLst>
+                    </p:cTn>
+                  </p:par>
+                  <p:par>
+                    <p:cTn id="8" fill="hold">
+                      <p:stCondLst>
+                        <p:cond delay="indefinite"/>
+                      </p:stCondLst>
+                      <p:childTnLst>
+                        <p:par>
+                          <p:cTn id="9" fill="hold">
+                            <p:stCondLst>
+                              <p:cond delay="0"/>
+                            </p:stCondLst>
+                            <p:childTnLst>
+                              <p:par>
+                                <p:cTn id="10" presetID="10" presetClass="entr" presetSubtype="0" fill="hold" grpId="0" nodeType="clickEffect">
+                                  <p:stCondLst>
+                                    <p:cond delay="0"/>
+                                  </p:stCondLst>
+                                  <p:childTnLst>
+                                    <p:set>
+                                      <p:cBhvr>
+                                        <p:cTn id="11" dur="1" fill="hold">
+                                          <p:stCondLst>
+                                            <p:cond delay="0"/>
+                                          </p:stCondLst>
+                                        </p:cTn>
+                                        <p:tgtEl>
+                                          <p:spTgt spid="15"/>
+                                        </p:tgtEl>
+                                        <p:attrNameLst>
+                                          <p:attrName>style.visibility</p:attrName>
+                                        </p:attrNameLst>
+                                      </p:cBhvr>
+                                      <p:to>
+                                        <p:strVal val="visible"/>
+                                      </p:to>
+                                    </p:set>
+                                    <p:animEffect transition="in" filter="fade">
+                                      <p:cBhvr>
+                                        <p:cTn id="12" dur="500"/>
+                                        <p:tgtEl>
+                                          <p:spTgt spid="15"/>
+                                        </p:tgtEl>
+                                      </p:cBhvr>
+                                    </p:animEffect>
+                                  </p:childTnLst>
+                                </p:cTn>
+                              </p:par>
+                            </p:childTnLst>
+                          </p:cTn>
+                        </p:par>
+                      </p:childTnLst>
+                    </p:cTn>
+                  </p:par>
+                  <p:par>
+                    <p:cTn id="13" fill="hold">
+                      <p:stCondLst>
+                        <p:cond delay="indefinite"/>
+                      </p:stCondLst>
+                      <p:childTnLst>
+                        <p:par>
+                          <p:cTn id="14" fill="hold">
+                            <p:stCondLst>
+                              <p:cond delay="0"/>
+                            </p:stCondLst>
+                            <p:childTnLst>
+                              <p:par>
+                                <p:cTn id="15" presetID="10" presetClass="entr" presetSubtype="0" fill="hold" grpId="0" nodeType="clickEffect">
+                                  <p:stCondLst>
+                                    <p:cond delay="0"/>
+                                  </p:stCondLst>
+                                  <p:childTnLst>
+                                    <p:set>
+                                      <p:cBhvr>
+                                        <p:cTn id="16" dur="1" fill="hold">
+                                          <p:stCondLst>
+                                            <p:cond delay="0"/>
+                                          </p:stCondLst>
+                                        </p:cTn>
+                                        <p:tgtEl>
+                                          <p:spTgt spid="19"/>
+                                        </p:tgtEl>
+                                        <p:attrNameLst>
+                                          <p:attrName>style.visibility</p:attrName>
+                                        </p:attrNameLst>
+                                      </p:cBhvr>
+                                      <p:to>
+                                        <p:strVal val="visible"/>
+                                      </p:to>
+                                    </p:set>
+                                    <p:animEffect transition="in" filter="fade">
+                                      <p:cBhvr>
+                                        <p:cTn id="17" dur="500"/>
+                                        <p:tgtEl>
+                                          <p:spTgt spid="19"/>
+                                        </p:tgtEl>
+                                      </p:cBhvr>
+                                    </p:animEffect>
+                                  </p:childTnLst>
+                                </p:cTn>
+                              </p:par>
+                            </p:childTnLst>
+                          </p:cTn>
+                        </p:par>
+                      </p:childTnLst>
+                    </p:cTn>
+                  </p:par>
+                  <p:par>
+                    <p:cTn id="18" fill="hold">
+                      <p:stCondLst>
+                        <p:cond delay="indefinite"/>
+                      </p:stCondLst>
+                      <p:childTnLst>
+                        <p:par>
+                          <p:cTn id="19" fill="hold">
+                            <p:stCondLst>
+                              <p:cond delay="0"/>
+                            </p:stCondLst>
+                            <p:childTnLst>
+                              <p:par>
+                                <p:cTn id="20" presetID="10" presetClass="entr" presetSubtype="0" fill="hold" grpId="0" nodeType="clickEffect">
+                                  <p:stCondLst>
+                                    <p:cond delay="0"/>
+                                  </p:stCondLst>
+                                  <p:childTnLst>
+                                    <p:set>
+                                      <p:cBhvr>
+                                        <p:cTn id="21" dur="1" fill="hold">
+                                          <p:stCondLst>
+                                            <p:cond delay="0"/>
+                                          </p:stCondLst>
+                                        </p:cTn>
+                                        <p:tgtEl>
+                                          <p:spTgt spid="23"/>
+                                        </p:tgtEl>
+                                        <p:attrNameLst>
+                                          <p:attrName>style.visibility</p:attrName>
+                                        </p:attrNameLst>
+                                      </p:cBhvr>
+                                      <p:to>
+                                        <p:strVal val="visible"/>
+                                      </p:to>
+                                    </p:set>
+                                    <p:animEffect transition="in" filter="fade">
+                                      <p:cBhvr>
+                                        <p:cTn id="22" dur="500"/>
+                                        <p:tgtEl>
+                                          <p:spTgt spid="23"/>
+                                        </p:tgtEl>
+                                      </p:cBhvr>
+                                    </p:animEffect>
+                                  </p:childTnLst>
+                                </p:cTn>
+                              </p:par>
+                            </p:childTnLst>
+                          </p:cTn>
+                        </p:par>
+                      </p:childTnLst>
+                    </p:cTn>
+                  </p:par>
+                  <p:par>
+                    <p:cTn id="23" fill="hold">
+                      <p:stCondLst>
+                        <p:cond delay="indefinite"/>
+                      </p:stCondLst>
+                      <p:childTnLst>
+                        <p:par>
+                          <p:cTn id="24" fill="hold">
+                            <p:stCondLst>
+                              <p:cond delay="0"/>
+                            </p:stCondLst>
+                            <p:childTnLst>
+                              <p:par>
+                                <p:cTn id="25" presetID="10" presetClass="entr" presetSubtype="0" fill="hold" grpId="0" nodeType="clickEffect">
+                                  <p:stCondLst>
+                                    <p:cond delay="0"/>
+                                  </p:stCondLst>
+                                  <p:childTnLst>
+                                    <p:set>
+                                      <p:cBhvr>
+                                        <p:cTn id="26" dur="1" fill="hold">
+                                          <p:stCondLst>
+                                            <p:cond delay="0"/>
+                                          </p:stCondLst>
+                                        </p:cTn>
+                                        <p:tgtEl>
+                                          <p:spTgt spid="27"/>
+                                        </p:tgtEl>
+                                        <p:attrNameLst>
+                                          <p:attrName>style.visibility</p:attrName>
+                                        </p:attrNameLst>
+                                      </p:cBhvr>
+                                      <p:to>
+                                        <p:strVal val="visible"/>
+                                      </p:to>
+                                    </p:set>
+                                    <p:animEffect transition="in" filter="fade">
+                                      <p:cBhvr>
+                                        <p:cTn id="27" dur="500"/>
+                                        <p:tgtEl>
+                                          <p:spTgt spid="27"/>
+                                        </p:tgtEl>
+                                      </p:cBhvr>
+                                    </p:animEffect>
+                                  </p:childTnLst>
+                                </p:cTn>
+                              </p:par>
+                            </p:childTnLst>
+                          </p:cTn>
+                        </p:par>
+                      </p:childTnLst>
+                    </p:cTn>
+                  </p:par>
+                  <p:par>
+                    <p:cTn id="28" fill="hold">
+                      <p:stCondLst>
+                        <p:cond delay="indefinite"/>
+                      </p:stCondLst>
+                      <p:childTnLst>
+                        <p:par>
+                          <p:cTn id="29" fill="hold">
+                            <p:stCondLst>
+                              <p:cond delay="0"/>
+                            </p:stCondLst>
+                            <p:childTnLst>
+                              <p:par>
+                                <p:cTn id="30" presetID="10" presetClass="entr" presetSubtype="0" fill="hold" grpId="0" nodeType="clickEffect">
+                                  <p:stCondLst>
+                                    <p:cond delay="0"/>
+                                  </p:stCondLst>
+                                  <p:childTnLst>
+                                    <p:set>
+                                      <p:cBhvr>
+                                        <p:cTn id="31" dur="1" fill="hold">
+                                          <p:stCondLst>
+                                            <p:cond delay="0"/>
+                                          </p:stCondLst>
+                                        </p:cTn>
+                                        <p:tgtEl>
+                                          <p:spTgt spid="32"/>
+                                        </p:tgtEl>
+                                        <p:attrNameLst>
+                                          <p:attrName>style.visibility</p:attrName>
+                                        </p:attrNameLst>
+                                      </p:cBhvr>
+                                      <p:to>
+                                        <p:strVal val="visible"/>
+                                      </p:to>
+                                    </p:set>
+                                    <p:animEffect transition="in" filter="fade">
+                                      <p:cBhvr>
+                                        <p:cTn id="32" dur="500"/>
+                                        <p:tgtEl>
+                                          <p:spTgt spid="32"/>
+                                        </p:tgtEl>
+                                      </p:cBhvr>
+                                    </p:animEffect>
+                                  </p:childTnLst>
+                                </p:cTn>
+                              </p:par>
+                            </p:childTnLst>
+                          </p:cTn>
+                        </p:par>
+                      </p:childTnLst>
+                    </p:cTn>
+                  </p:par>
+                  <p:par>
+                    <p:cTn id="33" fill="hold">
+                      <p:stCondLst>
+                        <p:cond delay="indefinite"/>
+                      </p:stCondLst>
+                      <p:childTnLst>
+                        <p:par>
+                          <p:cTn id="34" fill="hold">
+                            <p:stCondLst>
+                              <p:cond delay="0"/>
+                            </p:stCondLst>
+                            <p:childTnLst>
+                              <p:par>
+                                <p:cTn id="35" presetID="10" presetClass="entr" presetSubtype="0" fill="hold" grpId="0" nodeType="clickEffect">
+                                  <p:stCondLst>
+                                    <p:cond delay="0"/>
+                                  </p:stCondLst>
+                                  <p:childTnLst>
+                                    <p:set>
+                                      <p:cBhvr>
+                                        <p:cTn id="36" dur="1" fill="hold">
+                                          <p:stCondLst>
+                                            <p:cond delay="0"/>
+                                          </p:stCondLst>
+                                        </p:cTn>
+                                        <p:tgtEl>
+                                          <p:spTgt spid="33"/>
+                                        </p:tgtEl>
+                                        <p:attrNameLst>
+                                          <p:attrName>style.visibility</p:attrName>
+                                        </p:attrNameLst>
+                                      </p:cBhvr>
+                                      <p:to>
+                                        <p:strVal val="visible"/>
+                                      </p:to>
+                                    </p:set>
+                                    <p:animEffect transition="in" filter="fade">
+                                      <p:cBhvr>
+                                        <p:cTn id="37" dur="500"/>
+                                        <p:tgtEl>
+                                          <p:spTgt spid="33"/>
+                                        </p:tgtEl>
+                                      </p:cBhvr>
+                                    </p:animEffect>
+                                  </p:childTnLst>
+                                </p:cTn>
+                              </p:par>
+                            </p:childTnLst>
+                          </p:cTn>
+                        </p:par>
+                      </p:childTnLst>
+                    </p:cTn>
+                  </p:par>
+                </p:childTnLst>
               </p:cTn>
               <p:prevCondLst>
                 <p:cond evt="onPrev" delay="0">
@@ -28104,475 +28278,6 @@
                 <p:cond evt="onNext" delay="0">
                   <p:tgtEl>
                     <p:sldTgt/>
-                  </p:tgtEl>
-                </p:cond>
-              </p:nextCondLst>
-            </p:seq>
-            <p:seq concurrent="1" nextAc="seek">
-              <p:cTn id="5" restart="whenNotActive" fill="hold" nodeType="interactiveSeq">
-                <p:stCondLst>
-                  <p:cond evt="onClick" delay="0">
-                    <p:tgtEl>
-                      <p:spTgt spid="8"/>
-                    </p:tgtEl>
-                  </p:cond>
-                </p:stCondLst>
-                <p:endSync evt="end" delay="0">
-                  <p:rtn val="all"/>
-                </p:endSync>
-                <p:childTnLst>
-                  <p:par>
-                    <p:cTn id="6" fill="hold">
-                      <p:stCondLst>
-                        <p:cond delay="0"/>
-                      </p:stCondLst>
-                      <p:childTnLst>
-                        <p:par>
-                          <p:cTn id="7" presetID="10" presetClass="entr" presetSubtype="0" fill="hold" grpId="0" nodeType="clickEffect">
-                            <p:stCondLst>
-                              <p:cond delay="0"/>
-                            </p:stCondLst>
-                            <p:childTnLst>
-                              <p:set>
-                                <p:cBhvr>
-                                  <p:cTn id="8" dur="1" fill="hold">
-                                    <p:stCondLst>
-                                      <p:cond delay="0"/>
-                                    </p:stCondLst>
-                                  </p:cTn>
-                                  <p:tgtEl>
-                                    <p:spTgt spid="11"/>
-                                  </p:tgtEl>
-                                  <p:attrNameLst>
-                                    <p:attrName>style.visibility</p:attrName>
-                                  </p:attrNameLst>
-                                </p:cBhvr>
-                                <p:to>
-                                  <p:strVal val="visible"/>
-                                </p:to>
-                              </p:set>
-                              <p:animEffect transition="in" filter="fade">
-                                <p:cBhvr>
-                                  <p:cTn id="9" dur="400"/>
-                                  <p:tgtEl>
-                                    <p:spTgt spid="11"/>
-                                  </p:tgtEl>
-                                </p:cBhvr>
-                              </p:animEffect>
-                            </p:childTnLst>
-                          </p:cTn>
-                        </p:par>
-                      </p:childTnLst>
-                    </p:cTn>
-                  </p:par>
-                </p:childTnLst>
-              </p:cTn>
-              <p:nextCondLst>
-                <p:cond evt="onClick" delay="0">
-                  <p:tgtEl>
-                    <p:spTgt spid="8"/>
-                  </p:tgtEl>
-                </p:cond>
-              </p:nextCondLst>
-            </p:seq>
-            <p:seq concurrent="1" nextAc="seek">
-              <p:cTn id="15" restart="whenNotActive" fill="hold" nodeType="interactiveSeq">
-                <p:stCondLst>
-                  <p:cond evt="onClick" delay="0">
-                    <p:tgtEl>
-                      <p:spTgt spid="12"/>
-                    </p:tgtEl>
-                  </p:cond>
-                </p:stCondLst>
-                <p:endSync evt="end" delay="0">
-                  <p:rtn val="all"/>
-                </p:endSync>
-                <p:childTnLst>
-                  <p:par>
-                    <p:cTn id="16" fill="hold">
-                      <p:stCondLst>
-                        <p:cond delay="0"/>
-                      </p:stCondLst>
-                      <p:childTnLst>
-                        <p:par>
-                          <p:cTn id="17" presetID="10" presetClass="entr" presetSubtype="0" fill="hold" grpId="0" nodeType="clickEffect">
-                            <p:stCondLst>
-                              <p:cond delay="0"/>
-                            </p:stCondLst>
-                            <p:childTnLst>
-                              <p:set>
-                                <p:cBhvr>
-                                  <p:cTn id="18" dur="1" fill="hold">
-                                    <p:stCondLst>
-                                      <p:cond delay="0"/>
-                                    </p:stCondLst>
-                                  </p:cTn>
-                                  <p:tgtEl>
-                                    <p:spTgt spid="15"/>
-                                  </p:tgtEl>
-                                  <p:attrNameLst>
-                                    <p:attrName>style.visibility</p:attrName>
-                                  </p:attrNameLst>
-                                </p:cBhvr>
-                                <p:to>
-                                  <p:strVal val="visible"/>
-                                </p:to>
-                              </p:set>
-                              <p:animEffect transition="in" filter="fade">
-                                <p:cBhvr>
-                                  <p:cTn id="19" dur="400"/>
-                                  <p:tgtEl>
-                                    <p:spTgt spid="15"/>
-                                  </p:tgtEl>
-                                </p:cBhvr>
-                              </p:animEffect>
-                            </p:childTnLst>
-                          </p:cTn>
-                        </p:par>
-                      </p:childTnLst>
-                    </p:cTn>
-                  </p:par>
-                </p:childTnLst>
-              </p:cTn>
-              <p:nextCondLst>
-                <p:cond evt="onClick" delay="0">
-                  <p:tgtEl>
-                    <p:spTgt spid="12"/>
-                  </p:tgtEl>
-                </p:cond>
-              </p:nextCondLst>
-            </p:seq>
-            <p:seq concurrent="1" nextAc="seek">
-              <p:cTn id="25" restart="whenNotActive" fill="hold" nodeType="interactiveSeq">
-                <p:stCondLst>
-                  <p:cond evt="onClick" delay="0">
-                    <p:tgtEl>
-                      <p:spTgt spid="16"/>
-                    </p:tgtEl>
-                  </p:cond>
-                </p:stCondLst>
-                <p:endSync evt="end" delay="0">
-                  <p:rtn val="all"/>
-                </p:endSync>
-                <p:childTnLst>
-                  <p:par>
-                    <p:cTn id="26" fill="hold">
-                      <p:stCondLst>
-                        <p:cond delay="0"/>
-                      </p:stCondLst>
-                      <p:childTnLst>
-                        <p:par>
-                          <p:cTn id="27" presetID="10" presetClass="entr" presetSubtype="0" fill="hold" grpId="0" nodeType="clickEffect">
-                            <p:stCondLst>
-                              <p:cond delay="0"/>
-                            </p:stCondLst>
-                            <p:childTnLst>
-                              <p:set>
-                                <p:cBhvr>
-                                  <p:cTn id="28" dur="1" fill="hold">
-                                    <p:stCondLst>
-                                      <p:cond delay="0"/>
-                                    </p:stCondLst>
-                                  </p:cTn>
-                                  <p:tgtEl>
-                                    <p:spTgt spid="19"/>
-                                  </p:tgtEl>
-                                  <p:attrNameLst>
-                                    <p:attrName>style.visibility</p:attrName>
-                                  </p:attrNameLst>
-                                </p:cBhvr>
-                                <p:to>
-                                  <p:strVal val="visible"/>
-                                </p:to>
-                              </p:set>
-                              <p:animEffect transition="in" filter="fade">
-                                <p:cBhvr>
-                                  <p:cTn id="29" dur="400"/>
-                                  <p:tgtEl>
-                                    <p:spTgt spid="19"/>
-                                  </p:tgtEl>
-                                </p:cBhvr>
-                              </p:animEffect>
-                            </p:childTnLst>
-                          </p:cTn>
-                        </p:par>
-                      </p:childTnLst>
-                    </p:cTn>
-                  </p:par>
-                </p:childTnLst>
-              </p:cTn>
-              <p:nextCondLst>
-                <p:cond evt="onClick" delay="0">
-                  <p:tgtEl>
-                    <p:spTgt spid="16"/>
-                  </p:tgtEl>
-                </p:cond>
-              </p:nextCondLst>
-            </p:seq>
-            <p:seq concurrent="1" nextAc="seek">
-              <p:cTn id="35" restart="whenNotActive" fill="hold" nodeType="interactiveSeq">
-                <p:stCondLst>
-                  <p:cond evt="onClick" delay="0">
-                    <p:tgtEl>
-                      <p:spTgt spid="20"/>
-                    </p:tgtEl>
-                  </p:cond>
-                </p:stCondLst>
-                <p:endSync evt="end" delay="0">
-                  <p:rtn val="all"/>
-                </p:endSync>
-                <p:childTnLst>
-                  <p:par>
-                    <p:cTn id="36" fill="hold">
-                      <p:stCondLst>
-                        <p:cond delay="0"/>
-                      </p:stCondLst>
-                      <p:childTnLst>
-                        <p:par>
-                          <p:cTn id="37" presetID="10" presetClass="entr" presetSubtype="0" fill="hold" grpId="0" nodeType="clickEffect">
-                            <p:stCondLst>
-                              <p:cond delay="0"/>
-                            </p:stCondLst>
-                            <p:childTnLst>
-                              <p:set>
-                                <p:cBhvr>
-                                  <p:cTn id="38" dur="1" fill="hold">
-                                    <p:stCondLst>
-                                      <p:cond delay="0"/>
-                                    </p:stCondLst>
-                                  </p:cTn>
-                                  <p:tgtEl>
-                                    <p:spTgt spid="23"/>
-                                  </p:tgtEl>
-                                  <p:attrNameLst>
-                                    <p:attrName>style.visibility</p:attrName>
-                                  </p:attrNameLst>
-                                </p:cBhvr>
-                                <p:to>
-                                  <p:strVal val="visible"/>
-                                </p:to>
-                              </p:set>
-                              <p:animEffect transition="in" filter="fade">
-                                <p:cBhvr>
-                                  <p:cTn id="39" dur="400"/>
-                                  <p:tgtEl>
-                                    <p:spTgt spid="23"/>
-                                  </p:tgtEl>
-                                </p:cBhvr>
-                              </p:animEffect>
-                            </p:childTnLst>
-                          </p:cTn>
-                        </p:par>
-                      </p:childTnLst>
-                    </p:cTn>
-                  </p:par>
-                </p:childTnLst>
-              </p:cTn>
-              <p:nextCondLst>
-                <p:cond evt="onClick" delay="0">
-                  <p:tgtEl>
-                    <p:spTgt spid="20"/>
-                  </p:tgtEl>
-                </p:cond>
-              </p:nextCondLst>
-            </p:seq>
-            <p:seq concurrent="1" nextAc="seek">
-              <p:cTn id="45" restart="whenNotActive" fill="hold" nodeType="interactiveSeq">
-                <p:stCondLst>
-                  <p:cond evt="onClick" delay="0">
-                    <p:tgtEl>
-                      <p:spTgt spid="24"/>
-                    </p:tgtEl>
-                  </p:cond>
-                </p:stCondLst>
-                <p:endSync evt="end" delay="0">
-                  <p:rtn val="all"/>
-                </p:endSync>
-                <p:childTnLst>
-                  <p:par>
-                    <p:cTn id="46" fill="hold">
-                      <p:stCondLst>
-                        <p:cond delay="0"/>
-                      </p:stCondLst>
-                      <p:childTnLst>
-                        <p:par>
-                          <p:cTn id="47" presetID="10" presetClass="entr" presetSubtype="0" fill="hold" grpId="0" nodeType="clickEffect">
-                            <p:stCondLst>
-                              <p:cond delay="0"/>
-                            </p:stCondLst>
-                            <p:childTnLst>
-                              <p:set>
-                                <p:cBhvr>
-                                  <p:cTn id="48" dur="1" fill="hold">
-                                    <p:stCondLst>
-                                      <p:cond delay="0"/>
-                                    </p:stCondLst>
-                                  </p:cTn>
-                                  <p:tgtEl>
-                                    <p:spTgt spid="27"/>
-                                  </p:tgtEl>
-                                  <p:attrNameLst>
-                                    <p:attrName>style.visibility</p:attrName>
-                                  </p:attrNameLst>
-                                </p:cBhvr>
-                                <p:to>
-                                  <p:strVal val="visible"/>
-                                </p:to>
-                              </p:set>
-                              <p:animEffect transition="in" filter="fade">
-                                <p:cBhvr>
-                                  <p:cTn id="49" dur="400"/>
-                                  <p:tgtEl>
-                                    <p:spTgt spid="27"/>
-                                  </p:tgtEl>
-                                </p:cBhvr>
-                              </p:animEffect>
-                            </p:childTnLst>
-                          </p:cTn>
-                        </p:par>
-                      </p:childTnLst>
-                    </p:cTn>
-                  </p:par>
-                </p:childTnLst>
-              </p:cTn>
-              <p:nextCondLst>
-                <p:cond evt="onClick" delay="0">
-                  <p:tgtEl>
-                    <p:spTgt spid="24"/>
-                  </p:tgtEl>
-                </p:cond>
-              </p:nextCondLst>
-            </p:seq>
-            <p:seq concurrent="1" nextAc="seek">
-              <p:cTn id="55" restart="whenNotActive" fill="hold" nodeType="interactiveSeq">
-                <p:stCondLst>
-                  <p:cond evt="onClick" delay="0">
-                    <p:tgtEl>
-                      <p:spTgt spid="28"/>
-                    </p:tgtEl>
-                  </p:cond>
-                </p:stCondLst>
-                <p:endSync evt="end" delay="0">
-                  <p:rtn val="all"/>
-                </p:endSync>
-                <p:childTnLst>
-                  <p:par>
-                    <p:cTn id="56" fill="hold">
-                      <p:stCondLst>
-                        <p:cond delay="0"/>
-                      </p:stCondLst>
-                      <p:childTnLst>
-                        <p:par>
-                          <p:cTn id="57" presetID="10" presetClass="entr" presetSubtype="0" fill="hold" grpId="0" nodeType="clickEffect">
-                            <p:stCondLst>
-                              <p:cond delay="0"/>
-                            </p:stCondLst>
-                            <p:childTnLst>
-                              <p:set>
-                                <p:cBhvr>
-                                  <p:cTn id="58" dur="1" fill="hold">
-                                    <p:stCondLst>
-                                      <p:cond delay="0"/>
-                                    </p:stCondLst>
-                                  </p:cTn>
-                                  <p:tgtEl>
-                                    <p:spTgt spid="32"/>
-                                  </p:tgtEl>
-                                  <p:attrNameLst>
-                                    <p:attrName>style.visibility</p:attrName>
-                                  </p:attrNameLst>
-                                </p:cBhvr>
-                                <p:to>
-                                  <p:strVal val="visible"/>
-                                </p:to>
-                              </p:set>
-                              <p:animEffect transition="in" filter="fade">
-                                <p:cBhvr>
-                                  <p:cTn id="59" dur="400"/>
-                                  <p:tgtEl>
-                                    <p:spTgt spid="32"/>
-                                  </p:tgtEl>
-                                </p:cBhvr>
-                              </p:animEffect>
-                            </p:childTnLst>
-                          </p:cTn>
-                        </p:par>
-                      </p:childTnLst>
-                    </p:cTn>
-                  </p:par>
-                </p:childTnLst>
-              </p:cTn>
-              <p:nextCondLst>
-                <p:cond evt="onClick" delay="0">
-                  <p:tgtEl>
-                    <p:spTgt spid="28"/>
-                  </p:tgtEl>
-                </p:cond>
-              </p:nextCondLst>
-            </p:seq>
-            <p:seq concurrent="1" nextAc="seek">
-              <p:cTn id="65" restart="whenNotActive" fill="hold" nodeType="interactiveSeq">
-                <p:stCondLst>
-                  <p:cond evt="onClick" delay="0">
-                    <p:tgtEl>
-                      <p:spTgt spid="28"/>
-                    </p:tgtEl>
-                  </p:cond>
-                </p:stCondLst>
-                <p:endSync evt="end" delay="0">
-                  <p:rtn val="all"/>
-                </p:endSync>
-                <p:childTnLst>
-                  <p:par>
-                    <p:cTn id="66" fill="hold">
-                      <p:stCondLst>
-                        <p:cond delay="0"/>
-                      </p:stCondLst>
-                      <p:childTnLst>
-                        <p:par>
-                          <p:cTn id="67" presetID="10" presetClass="entr" presetSubtype="0" fill="hold" grpId="0" nodeType="clickEffect">
-                            <p:stCondLst>
-                              <p:cond delay="0"/>
-                            </p:stCondLst>
-                            <p:childTnLst>
-                              <p:set>
-                                <p:cBhvr>
-                                  <p:cTn id="68" dur="1" fill="hold">
-                                    <p:stCondLst>
-                                      <p:cond delay="0"/>
-                                    </p:stCondLst>
-                                  </p:cTn>
-                                  <p:tgtEl>
-                                    <p:spTgt spid="33"/>
-                                  </p:tgtEl>
-                                  <p:attrNameLst>
-                                    <p:attrName>style.visibility</p:attrName>
-                                  </p:attrNameLst>
-                                </p:cBhvr>
-                                <p:to>
-                                  <p:strVal val="visible"/>
-                                </p:to>
-                              </p:set>
-                              <p:animEffect transition="in" filter="fade">
-                                <p:cBhvr>
-                                  <p:cTn id="69" dur="400"/>
-                                  <p:tgtEl>
-                                    <p:spTgt spid="33"/>
-                                  </p:tgtEl>
-                                </p:cBhvr>
-                              </p:animEffect>
-                            </p:childTnLst>
-                          </p:cTn>
-                        </p:par>
-                      </p:childTnLst>
-                    </p:cTn>
-                  </p:par>
-                </p:childTnLst>
-              </p:cTn>
-              <p:nextCondLst>
-                <p:cond evt="onClick" delay="0">
-                  <p:tgtEl>
-                    <p:spTgt spid="28"/>
                   </p:tgtEl>
                 </p:cond>
               </p:nextCondLst>
@@ -31479,7 +31184,7 @@
                 </a:solidFill>
                 <a:latin typeface="Inter"/>
               </a:rPr>
-              <a:t>Leerlingenversie — kioskmodus</a:t>
+              <a:t>Leerlingenversie — klik onthult</a:t>
             </a:r>
           </a:p>
         </p:txBody>
@@ -33340,7 +33045,7 @@
                 </a:solidFill>
                 <a:latin typeface="Inter"/>
               </a:rPr>
-              <a:t>Leerlingenversie — kioskmodus</a:t>
+              <a:t>Leerlingenversie — klik onthult</a:t>
             </a:r>
           </a:p>
         </p:txBody>
@@ -35532,7 +35237,7 @@
                 </a:solidFill>
                 <a:latin typeface="Inter"/>
               </a:rPr>
-              <a:t>Leerlingenversie — kioskmodus</a:t>
+              <a:t>Leerlingenversie — klik onthult</a:t>
             </a:r>
           </a:p>
         </p:txBody>
@@ -40185,7 +39890,7 @@
                 </a:solidFill>
                 <a:latin typeface="Inter"/>
               </a:rPr>
-              <a:t>Leerlingenversie — kioskmodus</a:t>
+              <a:t>Leerlingenversie — klik onthult</a:t>
             </a:r>
           </a:p>
         </p:txBody>
@@ -42450,7 +42155,7 @@
                 </a:solidFill>
                 <a:latin typeface="Inter"/>
               </a:rPr>
-              <a:t>Leerlingenversie — kioskmodus</a:t>
+              <a:t>Leerlingenversie — klik onthult</a:t>
             </a:r>
           </a:p>
         </p:txBody>
@@ -45204,7 +44909,7 @@
                 </a:solidFill>
                 <a:latin typeface="Inter"/>
               </a:rPr>
-              <a:t>Leerlingenversie — kioskmodus</a:t>
+              <a:t>Leerlingenversie — klik onthult</a:t>
             </a:r>
           </a:p>
         </p:txBody>
@@ -45266,7 +44971,326 @@
           <p:childTnLst>
             <p:seq concurrent="1" nextAc="seek">
               <p:cTn id="2" dur="indefinite" nodeType="mainSeq">
-                <p:childTnLst/>
+                <p:childTnLst>
+                  <p:par>
+                    <p:cTn id="3" fill="hold">
+                      <p:stCondLst>
+                        <p:cond delay="indefinite"/>
+                      </p:stCondLst>
+                      <p:childTnLst>
+                        <p:par>
+                          <p:cTn id="4" fill="hold">
+                            <p:stCondLst>
+                              <p:cond delay="0"/>
+                            </p:stCondLst>
+                            <p:childTnLst>
+                              <p:par>
+                                <p:cTn id="5" presetID="10" presetClass="entr" presetSubtype="0" fill="hold" grpId="0" nodeType="clickEffect">
+                                  <p:stCondLst>
+                                    <p:cond delay="0"/>
+                                  </p:stCondLst>
+                                  <p:childTnLst>
+                                    <p:set>
+                                      <p:cBhvr>
+                                        <p:cTn id="6" dur="1" fill="hold">
+                                          <p:stCondLst>
+                                            <p:cond delay="0"/>
+                                          </p:stCondLst>
+                                        </p:cTn>
+                                        <p:tgtEl>
+                                          <p:spTgt spid="13"/>
+                                        </p:tgtEl>
+                                        <p:attrNameLst>
+                                          <p:attrName>style.visibility</p:attrName>
+                                        </p:attrNameLst>
+                                      </p:cBhvr>
+                                      <p:to>
+                                        <p:strVal val="visible"/>
+                                      </p:to>
+                                    </p:set>
+                                    <p:animEffect transition="in" filter="fade">
+                                      <p:cBhvr>
+                                        <p:cTn id="7" dur="500"/>
+                                        <p:tgtEl>
+                                          <p:spTgt spid="13"/>
+                                        </p:tgtEl>
+                                      </p:cBhvr>
+                                    </p:animEffect>
+                                  </p:childTnLst>
+                                </p:cTn>
+                              </p:par>
+                            </p:childTnLst>
+                          </p:cTn>
+                        </p:par>
+                      </p:childTnLst>
+                    </p:cTn>
+                  </p:par>
+                  <p:par>
+                    <p:cTn id="8" fill="hold">
+                      <p:stCondLst>
+                        <p:cond delay="indefinite"/>
+                      </p:stCondLst>
+                      <p:childTnLst>
+                        <p:par>
+                          <p:cTn id="9" fill="hold">
+                            <p:stCondLst>
+                              <p:cond delay="0"/>
+                            </p:stCondLst>
+                            <p:childTnLst>
+                              <p:par>
+                                <p:cTn id="10" presetID="10" presetClass="entr" presetSubtype="0" fill="hold" grpId="0" nodeType="clickEffect">
+                                  <p:stCondLst>
+                                    <p:cond delay="0"/>
+                                  </p:stCondLst>
+                                  <p:childTnLst>
+                                    <p:set>
+                                      <p:cBhvr>
+                                        <p:cTn id="11" dur="1" fill="hold">
+                                          <p:stCondLst>
+                                            <p:cond delay="0"/>
+                                          </p:stCondLst>
+                                        </p:cTn>
+                                        <p:tgtEl>
+                                          <p:spTgt spid="18"/>
+                                        </p:tgtEl>
+                                        <p:attrNameLst>
+                                          <p:attrName>style.visibility</p:attrName>
+                                        </p:attrNameLst>
+                                      </p:cBhvr>
+                                      <p:to>
+                                        <p:strVal val="visible"/>
+                                      </p:to>
+                                    </p:set>
+                                    <p:animEffect transition="in" filter="fade">
+                                      <p:cBhvr>
+                                        <p:cTn id="12" dur="500"/>
+                                        <p:tgtEl>
+                                          <p:spTgt spid="18"/>
+                                        </p:tgtEl>
+                                      </p:cBhvr>
+                                    </p:animEffect>
+                                  </p:childTnLst>
+                                </p:cTn>
+                              </p:par>
+                            </p:childTnLst>
+                          </p:cTn>
+                        </p:par>
+                      </p:childTnLst>
+                    </p:cTn>
+                  </p:par>
+                  <p:par>
+                    <p:cTn id="13" fill="hold">
+                      <p:stCondLst>
+                        <p:cond delay="indefinite"/>
+                      </p:stCondLst>
+                      <p:childTnLst>
+                        <p:par>
+                          <p:cTn id="14" fill="hold">
+                            <p:stCondLst>
+                              <p:cond delay="0"/>
+                            </p:stCondLst>
+                            <p:childTnLst>
+                              <p:par>
+                                <p:cTn id="15" presetID="10" presetClass="entr" presetSubtype="0" fill="hold" grpId="0" nodeType="clickEffect">
+                                  <p:stCondLst>
+                                    <p:cond delay="0"/>
+                                  </p:stCondLst>
+                                  <p:childTnLst>
+                                    <p:set>
+                                      <p:cBhvr>
+                                        <p:cTn id="16" dur="1" fill="hold">
+                                          <p:stCondLst>
+                                            <p:cond delay="0"/>
+                                          </p:stCondLst>
+                                        </p:cTn>
+                                        <p:tgtEl>
+                                          <p:spTgt spid="23"/>
+                                        </p:tgtEl>
+                                        <p:attrNameLst>
+                                          <p:attrName>style.visibility</p:attrName>
+                                        </p:attrNameLst>
+                                      </p:cBhvr>
+                                      <p:to>
+                                        <p:strVal val="visible"/>
+                                      </p:to>
+                                    </p:set>
+                                    <p:animEffect transition="in" filter="fade">
+                                      <p:cBhvr>
+                                        <p:cTn id="17" dur="500"/>
+                                        <p:tgtEl>
+                                          <p:spTgt spid="23"/>
+                                        </p:tgtEl>
+                                      </p:cBhvr>
+                                    </p:animEffect>
+                                  </p:childTnLst>
+                                </p:cTn>
+                              </p:par>
+                            </p:childTnLst>
+                          </p:cTn>
+                        </p:par>
+                      </p:childTnLst>
+                    </p:cTn>
+                  </p:par>
+                  <p:par>
+                    <p:cTn id="18" fill="hold">
+                      <p:stCondLst>
+                        <p:cond delay="indefinite"/>
+                      </p:stCondLst>
+                      <p:childTnLst>
+                        <p:par>
+                          <p:cTn id="19" fill="hold">
+                            <p:stCondLst>
+                              <p:cond delay="0"/>
+                            </p:stCondLst>
+                            <p:childTnLst>
+                              <p:par>
+                                <p:cTn id="20" presetID="10" presetClass="entr" presetSubtype="0" fill="hold" grpId="0" nodeType="clickEffect">
+                                  <p:stCondLst>
+                                    <p:cond delay="0"/>
+                                  </p:stCondLst>
+                                  <p:childTnLst>
+                                    <p:set>
+                                      <p:cBhvr>
+                                        <p:cTn id="21" dur="1" fill="hold">
+                                          <p:stCondLst>
+                                            <p:cond delay="0"/>
+                                          </p:stCondLst>
+                                        </p:cTn>
+                                        <p:tgtEl>
+                                          <p:spTgt spid="28"/>
+                                        </p:tgtEl>
+                                        <p:attrNameLst>
+                                          <p:attrName>style.visibility</p:attrName>
+                                        </p:attrNameLst>
+                                      </p:cBhvr>
+                                      <p:to>
+                                        <p:strVal val="visible"/>
+                                      </p:to>
+                                    </p:set>
+                                    <p:animEffect transition="in" filter="fade">
+                                      <p:cBhvr>
+                                        <p:cTn id="22" dur="500"/>
+                                        <p:tgtEl>
+                                          <p:spTgt spid="28"/>
+                                        </p:tgtEl>
+                                      </p:cBhvr>
+                                    </p:animEffect>
+                                  </p:childTnLst>
+                                </p:cTn>
+                              </p:par>
+                            </p:childTnLst>
+                          </p:cTn>
+                        </p:par>
+                      </p:childTnLst>
+                    </p:cTn>
+                  </p:par>
+                  <p:par>
+                    <p:cTn id="23" fill="hold">
+                      <p:stCondLst>
+                        <p:cond delay="indefinite"/>
+                      </p:stCondLst>
+                      <p:childTnLst>
+                        <p:par>
+                          <p:cTn id="24" fill="hold">
+                            <p:stCondLst>
+                              <p:cond delay="0"/>
+                            </p:stCondLst>
+                            <p:childTnLst>
+                              <p:par>
+                                <p:cTn id="25" presetID="10" presetClass="entr" presetSubtype="0" fill="hold" grpId="0" nodeType="clickEffect">
+                                  <p:stCondLst>
+                                    <p:cond delay="0"/>
+                                  </p:stCondLst>
+                                  <p:childTnLst>
+                                    <p:set>
+                                      <p:cBhvr>
+                                        <p:cTn id="26" dur="1" fill="hold">
+                                          <p:stCondLst>
+                                            <p:cond delay="0"/>
+                                          </p:stCondLst>
+                                        </p:cTn>
+                                        <p:tgtEl>
+                                          <p:spTgt spid="50"/>
+                                        </p:tgtEl>
+                                        <p:attrNameLst>
+                                          <p:attrName>style.visibility</p:attrName>
+                                        </p:attrNameLst>
+                                      </p:cBhvr>
+                                      <p:to>
+                                        <p:strVal val="visible"/>
+                                      </p:to>
+                                    </p:set>
+                                    <p:animEffect transition="in" filter="fade">
+                                      <p:cBhvr>
+                                        <p:cTn id="27" dur="500"/>
+                                        <p:tgtEl>
+                                          <p:spTgt spid="50"/>
+                                        </p:tgtEl>
+                                      </p:cBhvr>
+                                    </p:animEffect>
+                                  </p:childTnLst>
+                                </p:cTn>
+                              </p:par>
+                            </p:childTnLst>
+                          </p:cTn>
+                        </p:par>
+                      </p:childTnLst>
+                    </p:cTn>
+                  </p:par>
+                  <p:par>
+                    <p:cTn id="28" fill="hold">
+                      <p:stCondLst>
+                        <p:cond delay="indefinite"/>
+                      </p:stCondLst>
+                      <p:childTnLst>
+                        <p:par>
+                          <p:cTn id="29" fill="hold">
+                            <p:stCondLst>
+                              <p:cond delay="0"/>
+                            </p:stCondLst>
+                            <p:childTnLst>
+                              <p:par>
+                                <p:cTn id="30" presetID="10" presetClass="entr" presetSubtype="0" fill="hold" grpId="0" nodeType="clickEffect">
+                                  <p:stCondLst>
+                                    <p:cond delay="0"/>
+                                  </p:stCondLst>
+                                  <p:childTnLst>
+                                    <p:set>
+                                      <p:cBhvr>
+                                        <p:cTn id="31" dur="1" fill="hold">
+                                          <p:stCondLst>
+                                            <p:cond delay="0"/>
+                                          </p:stCondLst>
+                                        </p:cTn>
+                                        <p:tgtEl>
+                                          <p:spTgt spid="51"/>
+                                        </p:tgtEl>
+                                        <p:attrNameLst>
+                                          <p:attrName>style.visibility</p:attrName>
+                                        </p:attrNameLst>
+                                      </p:cBhvr>
+                                      <p:to>
+                                        <p:strVal val="visible"/>
+                                      </p:to>
+                                    </p:set>
+                                    <p:animEffect transition="in" filter="fade">
+                                      <p:cBhvr>
+                                        <p:cTn id="32" dur="500"/>
+                                        <p:tgtEl>
+                                          <p:spTgt spid="51"/>
+                                        </p:tgtEl>
+                                      </p:cBhvr>
+                                    </p:animEffect>
+                                  </p:childTnLst>
+                                </p:cTn>
+                              </p:par>
+                            </p:childTnLst>
+                          </p:cTn>
+                        </p:par>
+                      </p:childTnLst>
+                    </p:cTn>
+                  </p:par>
+                </p:childTnLst>
               </p:cTn>
               <p:prevCondLst>
                 <p:cond evt="onPrev" delay="0">
@@ -45279,408 +45303,6 @@
                 <p:cond evt="onNext" delay="0">
                   <p:tgtEl>
                     <p:sldTgt/>
-                  </p:tgtEl>
-                </p:cond>
-              </p:nextCondLst>
-            </p:seq>
-            <p:seq concurrent="1" nextAc="seek">
-              <p:cTn id="5" restart="whenNotActive" fill="hold" nodeType="interactiveSeq">
-                <p:stCondLst>
-                  <p:cond evt="onClick" delay="0">
-                    <p:tgtEl>
-                      <p:spTgt spid="11"/>
-                    </p:tgtEl>
-                  </p:cond>
-                </p:stCondLst>
-                <p:endSync evt="end" delay="0">
-                  <p:rtn val="all"/>
-                </p:endSync>
-                <p:childTnLst>
-                  <p:par>
-                    <p:cTn id="6" fill="hold">
-                      <p:stCondLst>
-                        <p:cond delay="0"/>
-                      </p:stCondLst>
-                      <p:childTnLst>
-                        <p:par>
-                          <p:cTn id="7" presetID="10" presetClass="entr" presetSubtype="0" fill="hold" grpId="0" nodeType="clickEffect">
-                            <p:stCondLst>
-                              <p:cond delay="0"/>
-                            </p:stCondLst>
-                            <p:childTnLst>
-                              <p:set>
-                                <p:cBhvr>
-                                  <p:cTn id="8" dur="1" fill="hold">
-                                    <p:stCondLst>
-                                      <p:cond delay="0"/>
-                                    </p:stCondLst>
-                                  </p:cTn>
-                                  <p:tgtEl>
-                                    <p:spTgt spid="13"/>
-                                  </p:tgtEl>
-                                  <p:attrNameLst>
-                                    <p:attrName>style.visibility</p:attrName>
-                                  </p:attrNameLst>
-                                </p:cBhvr>
-                                <p:to>
-                                  <p:strVal val="visible"/>
-                                </p:to>
-                              </p:set>
-                              <p:animEffect transition="in" filter="fade">
-                                <p:cBhvr>
-                                  <p:cTn id="9" dur="400"/>
-                                  <p:tgtEl>
-                                    <p:spTgt spid="13"/>
-                                  </p:tgtEl>
-                                </p:cBhvr>
-                              </p:animEffect>
-                            </p:childTnLst>
-                          </p:cTn>
-                        </p:par>
-                      </p:childTnLst>
-                    </p:cTn>
-                  </p:par>
-                </p:childTnLst>
-              </p:cTn>
-              <p:nextCondLst>
-                <p:cond evt="onClick" delay="0">
-                  <p:tgtEl>
-                    <p:spTgt spid="11"/>
-                  </p:tgtEl>
-                </p:cond>
-              </p:nextCondLst>
-            </p:seq>
-            <p:seq concurrent="1" nextAc="seek">
-              <p:cTn id="15" restart="whenNotActive" fill="hold" nodeType="interactiveSeq">
-                <p:stCondLst>
-                  <p:cond evt="onClick" delay="0">
-                    <p:tgtEl>
-                      <p:spTgt spid="16"/>
-                    </p:tgtEl>
-                  </p:cond>
-                </p:stCondLst>
-                <p:endSync evt="end" delay="0">
-                  <p:rtn val="all"/>
-                </p:endSync>
-                <p:childTnLst>
-                  <p:par>
-                    <p:cTn id="16" fill="hold">
-                      <p:stCondLst>
-                        <p:cond delay="0"/>
-                      </p:stCondLst>
-                      <p:childTnLst>
-                        <p:par>
-                          <p:cTn id="17" presetID="10" presetClass="entr" presetSubtype="0" fill="hold" grpId="0" nodeType="clickEffect">
-                            <p:stCondLst>
-                              <p:cond delay="0"/>
-                            </p:stCondLst>
-                            <p:childTnLst>
-                              <p:set>
-                                <p:cBhvr>
-                                  <p:cTn id="18" dur="1" fill="hold">
-                                    <p:stCondLst>
-                                      <p:cond delay="0"/>
-                                    </p:stCondLst>
-                                  </p:cTn>
-                                  <p:tgtEl>
-                                    <p:spTgt spid="18"/>
-                                  </p:tgtEl>
-                                  <p:attrNameLst>
-                                    <p:attrName>style.visibility</p:attrName>
-                                  </p:attrNameLst>
-                                </p:cBhvr>
-                                <p:to>
-                                  <p:strVal val="visible"/>
-                                </p:to>
-                              </p:set>
-                              <p:animEffect transition="in" filter="fade">
-                                <p:cBhvr>
-                                  <p:cTn id="19" dur="400"/>
-                                  <p:tgtEl>
-                                    <p:spTgt spid="18"/>
-                                  </p:tgtEl>
-                                </p:cBhvr>
-                              </p:animEffect>
-                            </p:childTnLst>
-                          </p:cTn>
-                        </p:par>
-                      </p:childTnLst>
-                    </p:cTn>
-                  </p:par>
-                </p:childTnLst>
-              </p:cTn>
-              <p:nextCondLst>
-                <p:cond evt="onClick" delay="0">
-                  <p:tgtEl>
-                    <p:spTgt spid="16"/>
-                  </p:tgtEl>
-                </p:cond>
-              </p:nextCondLst>
-            </p:seq>
-            <p:seq concurrent="1" nextAc="seek">
-              <p:cTn id="25" restart="whenNotActive" fill="hold" nodeType="interactiveSeq">
-                <p:stCondLst>
-                  <p:cond evt="onClick" delay="0">
-                    <p:tgtEl>
-                      <p:spTgt spid="21"/>
-                    </p:tgtEl>
-                  </p:cond>
-                </p:stCondLst>
-                <p:endSync evt="end" delay="0">
-                  <p:rtn val="all"/>
-                </p:endSync>
-                <p:childTnLst>
-                  <p:par>
-                    <p:cTn id="26" fill="hold">
-                      <p:stCondLst>
-                        <p:cond delay="0"/>
-                      </p:stCondLst>
-                      <p:childTnLst>
-                        <p:par>
-                          <p:cTn id="27" presetID="10" presetClass="entr" presetSubtype="0" fill="hold" grpId="0" nodeType="clickEffect">
-                            <p:stCondLst>
-                              <p:cond delay="0"/>
-                            </p:stCondLst>
-                            <p:childTnLst>
-                              <p:set>
-                                <p:cBhvr>
-                                  <p:cTn id="28" dur="1" fill="hold">
-                                    <p:stCondLst>
-                                      <p:cond delay="0"/>
-                                    </p:stCondLst>
-                                  </p:cTn>
-                                  <p:tgtEl>
-                                    <p:spTgt spid="23"/>
-                                  </p:tgtEl>
-                                  <p:attrNameLst>
-                                    <p:attrName>style.visibility</p:attrName>
-                                  </p:attrNameLst>
-                                </p:cBhvr>
-                                <p:to>
-                                  <p:strVal val="visible"/>
-                                </p:to>
-                              </p:set>
-                              <p:animEffect transition="in" filter="fade">
-                                <p:cBhvr>
-                                  <p:cTn id="29" dur="400"/>
-                                  <p:tgtEl>
-                                    <p:spTgt spid="23"/>
-                                  </p:tgtEl>
-                                </p:cBhvr>
-                              </p:animEffect>
-                            </p:childTnLst>
-                          </p:cTn>
-                        </p:par>
-                      </p:childTnLst>
-                    </p:cTn>
-                  </p:par>
-                </p:childTnLst>
-              </p:cTn>
-              <p:nextCondLst>
-                <p:cond evt="onClick" delay="0">
-                  <p:tgtEl>
-                    <p:spTgt spid="21"/>
-                  </p:tgtEl>
-                </p:cond>
-              </p:nextCondLst>
-            </p:seq>
-            <p:seq concurrent="1" nextAc="seek">
-              <p:cTn id="35" restart="whenNotActive" fill="hold" nodeType="interactiveSeq">
-                <p:stCondLst>
-                  <p:cond evt="onClick" delay="0">
-                    <p:tgtEl>
-                      <p:spTgt spid="26"/>
-                    </p:tgtEl>
-                  </p:cond>
-                </p:stCondLst>
-                <p:endSync evt="end" delay="0">
-                  <p:rtn val="all"/>
-                </p:endSync>
-                <p:childTnLst>
-                  <p:par>
-                    <p:cTn id="36" fill="hold">
-                      <p:stCondLst>
-                        <p:cond delay="0"/>
-                      </p:stCondLst>
-                      <p:childTnLst>
-                        <p:par>
-                          <p:cTn id="37" presetID="10" presetClass="entr" presetSubtype="0" fill="hold" grpId="0" nodeType="clickEffect">
-                            <p:stCondLst>
-                              <p:cond delay="0"/>
-                            </p:stCondLst>
-                            <p:childTnLst>
-                              <p:set>
-                                <p:cBhvr>
-                                  <p:cTn id="38" dur="1" fill="hold">
-                                    <p:stCondLst>
-                                      <p:cond delay="0"/>
-                                    </p:stCondLst>
-                                  </p:cTn>
-                                  <p:tgtEl>
-                                    <p:spTgt spid="28"/>
-                                  </p:tgtEl>
-                                  <p:attrNameLst>
-                                    <p:attrName>style.visibility</p:attrName>
-                                  </p:attrNameLst>
-                                </p:cBhvr>
-                                <p:to>
-                                  <p:strVal val="visible"/>
-                                </p:to>
-                              </p:set>
-                              <p:animEffect transition="in" filter="fade">
-                                <p:cBhvr>
-                                  <p:cTn id="39" dur="400"/>
-                                  <p:tgtEl>
-                                    <p:spTgt spid="28"/>
-                                  </p:tgtEl>
-                                </p:cBhvr>
-                              </p:animEffect>
-                            </p:childTnLst>
-                          </p:cTn>
-                        </p:par>
-                      </p:childTnLst>
-                    </p:cTn>
-                  </p:par>
-                </p:childTnLst>
-              </p:cTn>
-              <p:nextCondLst>
-                <p:cond evt="onClick" delay="0">
-                  <p:tgtEl>
-                    <p:spTgt spid="26"/>
-                  </p:tgtEl>
-                </p:cond>
-              </p:nextCondLst>
-            </p:seq>
-            <p:seq concurrent="1" nextAc="seek">
-              <p:cTn id="45" restart="whenNotActive" fill="hold" nodeType="interactiveSeq">
-                <p:stCondLst>
-                  <p:cond evt="onClick" delay="0">
-                    <p:tgtEl>
-                      <p:spTgt spid="46"/>
-                    </p:tgtEl>
-                  </p:cond>
-                </p:stCondLst>
-                <p:endSync evt="end" delay="0">
-                  <p:rtn val="all"/>
-                </p:endSync>
-                <p:childTnLst>
-                  <p:par>
-                    <p:cTn id="46" fill="hold">
-                      <p:stCondLst>
-                        <p:cond delay="0"/>
-                      </p:stCondLst>
-                      <p:childTnLst>
-                        <p:par>
-                          <p:cTn id="47" presetID="10" presetClass="entr" presetSubtype="0" fill="hold" grpId="0" nodeType="clickEffect">
-                            <p:stCondLst>
-                              <p:cond delay="0"/>
-                            </p:stCondLst>
-                            <p:childTnLst>
-                              <p:set>
-                                <p:cBhvr>
-                                  <p:cTn id="48" dur="1" fill="hold">
-                                    <p:stCondLst>
-                                      <p:cond delay="0"/>
-                                    </p:stCondLst>
-                                  </p:cTn>
-                                  <p:tgtEl>
-                                    <p:spTgt spid="50"/>
-                                  </p:tgtEl>
-                                  <p:attrNameLst>
-                                    <p:attrName>style.visibility</p:attrName>
-                                  </p:attrNameLst>
-                                </p:cBhvr>
-                                <p:to>
-                                  <p:strVal val="visible"/>
-                                </p:to>
-                              </p:set>
-                              <p:animEffect transition="in" filter="fade">
-                                <p:cBhvr>
-                                  <p:cTn id="49" dur="400"/>
-                                  <p:tgtEl>
-                                    <p:spTgt spid="50"/>
-                                  </p:tgtEl>
-                                </p:cBhvr>
-                              </p:animEffect>
-                            </p:childTnLst>
-                          </p:cTn>
-                        </p:par>
-                      </p:childTnLst>
-                    </p:cTn>
-                  </p:par>
-                </p:childTnLst>
-              </p:cTn>
-              <p:nextCondLst>
-                <p:cond evt="onClick" delay="0">
-                  <p:tgtEl>
-                    <p:spTgt spid="46"/>
-                  </p:tgtEl>
-                </p:cond>
-              </p:nextCondLst>
-            </p:seq>
-            <p:seq concurrent="1" nextAc="seek">
-              <p:cTn id="55" restart="whenNotActive" fill="hold" nodeType="interactiveSeq">
-                <p:stCondLst>
-                  <p:cond evt="onClick" delay="0">
-                    <p:tgtEl>
-                      <p:spTgt spid="46"/>
-                    </p:tgtEl>
-                  </p:cond>
-                </p:stCondLst>
-                <p:endSync evt="end" delay="0">
-                  <p:rtn val="all"/>
-                </p:endSync>
-                <p:childTnLst>
-                  <p:par>
-                    <p:cTn id="56" fill="hold">
-                      <p:stCondLst>
-                        <p:cond delay="0"/>
-                      </p:stCondLst>
-                      <p:childTnLst>
-                        <p:par>
-                          <p:cTn id="57" presetID="10" presetClass="entr" presetSubtype="0" fill="hold" grpId="0" nodeType="clickEffect">
-                            <p:stCondLst>
-                              <p:cond delay="0"/>
-                            </p:stCondLst>
-                            <p:childTnLst>
-                              <p:set>
-                                <p:cBhvr>
-                                  <p:cTn id="58" dur="1" fill="hold">
-                                    <p:stCondLst>
-                                      <p:cond delay="0"/>
-                                    </p:stCondLst>
-                                  </p:cTn>
-                                  <p:tgtEl>
-                                    <p:spTgt spid="51"/>
-                                  </p:tgtEl>
-                                  <p:attrNameLst>
-                                    <p:attrName>style.visibility</p:attrName>
-                                  </p:attrNameLst>
-                                </p:cBhvr>
-                                <p:to>
-                                  <p:strVal val="visible"/>
-                                </p:to>
-                              </p:set>
-                              <p:animEffect transition="in" filter="fade">
-                                <p:cBhvr>
-                                  <p:cTn id="59" dur="400"/>
-                                  <p:tgtEl>
-                                    <p:spTgt spid="51"/>
-                                  </p:tgtEl>
-                                </p:cBhvr>
-                              </p:animEffect>
-                            </p:childTnLst>
-                          </p:cTn>
-                        </p:par>
-                      </p:childTnLst>
-                    </p:cTn>
-                  </p:par>
-                </p:childTnLst>
-              </p:cTn>
-              <p:nextCondLst>
-                <p:cond evt="onClick" delay="0">
-                  <p:tgtEl>
-                    <p:spTgt spid="46"/>
                   </p:tgtEl>
                 </p:cond>
               </p:nextCondLst>
@@ -48175,7 +47797,7 @@
                 </a:solidFill>
                 <a:latin typeface="Inter"/>
               </a:rPr>
-              <a:t>Leerlingenversie — kioskmodus</a:t>
+              <a:t>Leerlingenversie — klik onthult</a:t>
             </a:r>
           </a:p>
         </p:txBody>
@@ -49956,7 +49578,7 @@
                 </a:solidFill>
                 <a:latin typeface="Inter"/>
               </a:rPr>
-              <a:t>Leerlingenversie — kioskmodus</a:t>
+              <a:t>Leerlingenversie — klik onthult</a:t>
             </a:r>
           </a:p>
         </p:txBody>
@@ -52630,7 +52252,7 @@
                 </a:solidFill>
                 <a:latin typeface="Inter"/>
               </a:rPr>
-              <a:t>Leerlingenversie — kioskmodus</a:t>
+              <a:t>Leerlingenversie — klik onthult</a:t>
             </a:r>
           </a:p>
         </p:txBody>
@@ -52692,7 +52314,538 @@
           <p:childTnLst>
             <p:seq concurrent="1" nextAc="seek">
               <p:cTn id="2" dur="indefinite" nodeType="mainSeq">
-                <p:childTnLst/>
+                <p:childTnLst>
+                  <p:par>
+                    <p:cTn id="3" fill="hold">
+                      <p:stCondLst>
+                        <p:cond delay="indefinite"/>
+                      </p:stCondLst>
+                      <p:childTnLst>
+                        <p:par>
+                          <p:cTn id="4" fill="hold">
+                            <p:stCondLst>
+                              <p:cond delay="0"/>
+                            </p:stCondLst>
+                            <p:childTnLst>
+                              <p:par>
+                                <p:cTn id="5" presetID="10" presetClass="entr" presetSubtype="0" fill="hold" grpId="0" nodeType="clickEffect">
+                                  <p:stCondLst>
+                                    <p:cond delay="0"/>
+                                  </p:stCondLst>
+                                  <p:childTnLst>
+                                    <p:set>
+                                      <p:cBhvr>
+                                        <p:cTn id="6" dur="1" fill="hold">
+                                          <p:stCondLst>
+                                            <p:cond delay="0"/>
+                                          </p:stCondLst>
+                                        </p:cTn>
+                                        <p:tgtEl>
+                                          <p:spTgt spid="11"/>
+                                        </p:tgtEl>
+                                        <p:attrNameLst>
+                                          <p:attrName>style.visibility</p:attrName>
+                                        </p:attrNameLst>
+                                      </p:cBhvr>
+                                      <p:to>
+                                        <p:strVal val="visible"/>
+                                      </p:to>
+                                    </p:set>
+                                    <p:animEffect transition="in" filter="fade">
+                                      <p:cBhvr>
+                                        <p:cTn id="7" dur="500"/>
+                                        <p:tgtEl>
+                                          <p:spTgt spid="11"/>
+                                        </p:tgtEl>
+                                      </p:cBhvr>
+                                    </p:animEffect>
+                                  </p:childTnLst>
+                                </p:cTn>
+                              </p:par>
+                            </p:childTnLst>
+                          </p:cTn>
+                        </p:par>
+                      </p:childTnLst>
+                    </p:cTn>
+                  </p:par>
+                  <p:par>
+                    <p:cTn id="8" fill="hold">
+                      <p:stCondLst>
+                        <p:cond delay="indefinite"/>
+                      </p:stCondLst>
+                      <p:childTnLst>
+                        <p:par>
+                          <p:cTn id="9" fill="hold">
+                            <p:stCondLst>
+                              <p:cond delay="0"/>
+                            </p:stCondLst>
+                            <p:childTnLst>
+                              <p:par>
+                                <p:cTn id="10" presetID="10" presetClass="entr" presetSubtype="0" fill="hold" grpId="0" nodeType="clickEffect">
+                                  <p:stCondLst>
+                                    <p:cond delay="0"/>
+                                  </p:stCondLst>
+                                  <p:childTnLst>
+                                    <p:set>
+                                      <p:cBhvr>
+                                        <p:cTn id="11" dur="1" fill="hold">
+                                          <p:stCondLst>
+                                            <p:cond delay="0"/>
+                                          </p:stCondLst>
+                                        </p:cTn>
+                                        <p:tgtEl>
+                                          <p:spTgt spid="15"/>
+                                        </p:tgtEl>
+                                        <p:attrNameLst>
+                                          <p:attrName>style.visibility</p:attrName>
+                                        </p:attrNameLst>
+                                      </p:cBhvr>
+                                      <p:to>
+                                        <p:strVal val="visible"/>
+                                      </p:to>
+                                    </p:set>
+                                    <p:animEffect transition="in" filter="fade">
+                                      <p:cBhvr>
+                                        <p:cTn id="12" dur="500"/>
+                                        <p:tgtEl>
+                                          <p:spTgt spid="15"/>
+                                        </p:tgtEl>
+                                      </p:cBhvr>
+                                    </p:animEffect>
+                                  </p:childTnLst>
+                                </p:cTn>
+                              </p:par>
+                            </p:childTnLst>
+                          </p:cTn>
+                        </p:par>
+                      </p:childTnLst>
+                    </p:cTn>
+                  </p:par>
+                  <p:par>
+                    <p:cTn id="13" fill="hold">
+                      <p:stCondLst>
+                        <p:cond delay="indefinite"/>
+                      </p:stCondLst>
+                      <p:childTnLst>
+                        <p:par>
+                          <p:cTn id="14" fill="hold">
+                            <p:stCondLst>
+                              <p:cond delay="0"/>
+                            </p:stCondLst>
+                            <p:childTnLst>
+                              <p:par>
+                                <p:cTn id="15" presetID="10" presetClass="entr" presetSubtype="0" fill="hold" grpId="0" nodeType="clickEffect">
+                                  <p:stCondLst>
+                                    <p:cond delay="0"/>
+                                  </p:stCondLst>
+                                  <p:childTnLst>
+                                    <p:set>
+                                      <p:cBhvr>
+                                        <p:cTn id="16" dur="1" fill="hold">
+                                          <p:stCondLst>
+                                            <p:cond delay="0"/>
+                                          </p:stCondLst>
+                                        </p:cTn>
+                                        <p:tgtEl>
+                                          <p:spTgt spid="19"/>
+                                        </p:tgtEl>
+                                        <p:attrNameLst>
+                                          <p:attrName>style.visibility</p:attrName>
+                                        </p:attrNameLst>
+                                      </p:cBhvr>
+                                      <p:to>
+                                        <p:strVal val="visible"/>
+                                      </p:to>
+                                    </p:set>
+                                    <p:animEffect transition="in" filter="fade">
+                                      <p:cBhvr>
+                                        <p:cTn id="17" dur="500"/>
+                                        <p:tgtEl>
+                                          <p:spTgt spid="19"/>
+                                        </p:tgtEl>
+                                      </p:cBhvr>
+                                    </p:animEffect>
+                                  </p:childTnLst>
+                                </p:cTn>
+                              </p:par>
+                            </p:childTnLst>
+                          </p:cTn>
+                        </p:par>
+                      </p:childTnLst>
+                    </p:cTn>
+                  </p:par>
+                  <p:par>
+                    <p:cTn id="18" fill="hold">
+                      <p:stCondLst>
+                        <p:cond delay="indefinite"/>
+                      </p:stCondLst>
+                      <p:childTnLst>
+                        <p:par>
+                          <p:cTn id="19" fill="hold">
+                            <p:stCondLst>
+                              <p:cond delay="0"/>
+                            </p:stCondLst>
+                            <p:childTnLst>
+                              <p:par>
+                                <p:cTn id="20" presetID="10" presetClass="entr" presetSubtype="0" fill="hold" grpId="0" nodeType="clickEffect">
+                                  <p:stCondLst>
+                                    <p:cond delay="0"/>
+                                  </p:stCondLst>
+                                  <p:childTnLst>
+                                    <p:set>
+                                      <p:cBhvr>
+                                        <p:cTn id="21" dur="1" fill="hold">
+                                          <p:stCondLst>
+                                            <p:cond delay="0"/>
+                                          </p:stCondLst>
+                                        </p:cTn>
+                                        <p:tgtEl>
+                                          <p:spTgt spid="23"/>
+                                        </p:tgtEl>
+                                        <p:attrNameLst>
+                                          <p:attrName>style.visibility</p:attrName>
+                                        </p:attrNameLst>
+                                      </p:cBhvr>
+                                      <p:to>
+                                        <p:strVal val="visible"/>
+                                      </p:to>
+                                    </p:set>
+                                    <p:animEffect transition="in" filter="fade">
+                                      <p:cBhvr>
+                                        <p:cTn id="22" dur="500"/>
+                                        <p:tgtEl>
+                                          <p:spTgt spid="23"/>
+                                        </p:tgtEl>
+                                      </p:cBhvr>
+                                    </p:animEffect>
+                                  </p:childTnLst>
+                                </p:cTn>
+                              </p:par>
+                            </p:childTnLst>
+                          </p:cTn>
+                        </p:par>
+                      </p:childTnLst>
+                    </p:cTn>
+                  </p:par>
+                  <p:par>
+                    <p:cTn id="23" fill="hold">
+                      <p:stCondLst>
+                        <p:cond delay="indefinite"/>
+                      </p:stCondLst>
+                      <p:childTnLst>
+                        <p:par>
+                          <p:cTn id="24" fill="hold">
+                            <p:stCondLst>
+                              <p:cond delay="0"/>
+                            </p:stCondLst>
+                            <p:childTnLst>
+                              <p:par>
+                                <p:cTn id="25" presetID="10" presetClass="entr" presetSubtype="0" fill="hold" grpId="0" nodeType="clickEffect">
+                                  <p:stCondLst>
+                                    <p:cond delay="0"/>
+                                  </p:stCondLst>
+                                  <p:childTnLst>
+                                    <p:set>
+                                      <p:cBhvr>
+                                        <p:cTn id="26" dur="1" fill="hold">
+                                          <p:stCondLst>
+                                            <p:cond delay="0"/>
+                                          </p:stCondLst>
+                                        </p:cTn>
+                                        <p:tgtEl>
+                                          <p:spTgt spid="27"/>
+                                        </p:tgtEl>
+                                        <p:attrNameLst>
+                                          <p:attrName>style.visibility</p:attrName>
+                                        </p:attrNameLst>
+                                      </p:cBhvr>
+                                      <p:to>
+                                        <p:strVal val="visible"/>
+                                      </p:to>
+                                    </p:set>
+                                    <p:animEffect transition="in" filter="fade">
+                                      <p:cBhvr>
+                                        <p:cTn id="27" dur="500"/>
+                                        <p:tgtEl>
+                                          <p:spTgt spid="27"/>
+                                        </p:tgtEl>
+                                      </p:cBhvr>
+                                    </p:animEffect>
+                                  </p:childTnLst>
+                                </p:cTn>
+                              </p:par>
+                            </p:childTnLst>
+                          </p:cTn>
+                        </p:par>
+                      </p:childTnLst>
+                    </p:cTn>
+                  </p:par>
+                  <p:par>
+                    <p:cTn id="28" fill="hold">
+                      <p:stCondLst>
+                        <p:cond delay="indefinite"/>
+                      </p:stCondLst>
+                      <p:childTnLst>
+                        <p:par>
+                          <p:cTn id="29" fill="hold">
+                            <p:stCondLst>
+                              <p:cond delay="0"/>
+                            </p:stCondLst>
+                            <p:childTnLst>
+                              <p:par>
+                                <p:cTn id="30" presetID="10" presetClass="entr" presetSubtype="0" fill="hold" grpId="0" nodeType="clickEffect">
+                                  <p:stCondLst>
+                                    <p:cond delay="0"/>
+                                  </p:stCondLst>
+                                  <p:childTnLst>
+                                    <p:set>
+                                      <p:cBhvr>
+                                        <p:cTn id="31" dur="1" fill="hold">
+                                          <p:stCondLst>
+                                            <p:cond delay="0"/>
+                                          </p:stCondLst>
+                                        </p:cTn>
+                                        <p:tgtEl>
+                                          <p:spTgt spid="31"/>
+                                        </p:tgtEl>
+                                        <p:attrNameLst>
+                                          <p:attrName>style.visibility</p:attrName>
+                                        </p:attrNameLst>
+                                      </p:cBhvr>
+                                      <p:to>
+                                        <p:strVal val="visible"/>
+                                      </p:to>
+                                    </p:set>
+                                    <p:animEffect transition="in" filter="fade">
+                                      <p:cBhvr>
+                                        <p:cTn id="32" dur="500"/>
+                                        <p:tgtEl>
+                                          <p:spTgt spid="31"/>
+                                        </p:tgtEl>
+                                      </p:cBhvr>
+                                    </p:animEffect>
+                                  </p:childTnLst>
+                                </p:cTn>
+                              </p:par>
+                            </p:childTnLst>
+                          </p:cTn>
+                        </p:par>
+                      </p:childTnLst>
+                    </p:cTn>
+                  </p:par>
+                  <p:par>
+                    <p:cTn id="33" fill="hold">
+                      <p:stCondLst>
+                        <p:cond delay="indefinite"/>
+                      </p:stCondLst>
+                      <p:childTnLst>
+                        <p:par>
+                          <p:cTn id="34" fill="hold">
+                            <p:stCondLst>
+                              <p:cond delay="0"/>
+                            </p:stCondLst>
+                            <p:childTnLst>
+                              <p:par>
+                                <p:cTn id="35" presetID="10" presetClass="entr" presetSubtype="0" fill="hold" grpId="0" nodeType="clickEffect">
+                                  <p:stCondLst>
+                                    <p:cond delay="0"/>
+                                  </p:stCondLst>
+                                  <p:childTnLst>
+                                    <p:set>
+                                      <p:cBhvr>
+                                        <p:cTn id="36" dur="1" fill="hold">
+                                          <p:stCondLst>
+                                            <p:cond delay="0"/>
+                                          </p:stCondLst>
+                                        </p:cTn>
+                                        <p:tgtEl>
+                                          <p:spTgt spid="35"/>
+                                        </p:tgtEl>
+                                        <p:attrNameLst>
+                                          <p:attrName>style.visibility</p:attrName>
+                                        </p:attrNameLst>
+                                      </p:cBhvr>
+                                      <p:to>
+                                        <p:strVal val="visible"/>
+                                      </p:to>
+                                    </p:set>
+                                    <p:animEffect transition="in" filter="fade">
+                                      <p:cBhvr>
+                                        <p:cTn id="37" dur="500"/>
+                                        <p:tgtEl>
+                                          <p:spTgt spid="35"/>
+                                        </p:tgtEl>
+                                      </p:cBhvr>
+                                    </p:animEffect>
+                                  </p:childTnLst>
+                                </p:cTn>
+                              </p:par>
+                            </p:childTnLst>
+                          </p:cTn>
+                        </p:par>
+                      </p:childTnLst>
+                    </p:cTn>
+                  </p:par>
+                  <p:par>
+                    <p:cTn id="38" fill="hold">
+                      <p:stCondLst>
+                        <p:cond delay="indefinite"/>
+                      </p:stCondLst>
+                      <p:childTnLst>
+                        <p:par>
+                          <p:cTn id="39" fill="hold">
+                            <p:stCondLst>
+                              <p:cond delay="0"/>
+                            </p:stCondLst>
+                            <p:childTnLst>
+                              <p:par>
+                                <p:cTn id="40" presetID="10" presetClass="entr" presetSubtype="0" fill="hold" grpId="0" nodeType="clickEffect">
+                                  <p:stCondLst>
+                                    <p:cond delay="0"/>
+                                  </p:stCondLst>
+                                  <p:childTnLst>
+                                    <p:set>
+                                      <p:cBhvr>
+                                        <p:cTn id="41" dur="1" fill="hold">
+                                          <p:stCondLst>
+                                            <p:cond delay="0"/>
+                                          </p:stCondLst>
+                                        </p:cTn>
+                                        <p:tgtEl>
+                                          <p:spTgt spid="39"/>
+                                        </p:tgtEl>
+                                        <p:attrNameLst>
+                                          <p:attrName>style.visibility</p:attrName>
+                                        </p:attrNameLst>
+                                      </p:cBhvr>
+                                      <p:to>
+                                        <p:strVal val="visible"/>
+                                      </p:to>
+                                    </p:set>
+                                    <p:animEffect transition="in" filter="fade">
+                                      <p:cBhvr>
+                                        <p:cTn id="42" dur="500"/>
+                                        <p:tgtEl>
+                                          <p:spTgt spid="39"/>
+                                        </p:tgtEl>
+                                      </p:cBhvr>
+                                    </p:animEffect>
+                                  </p:childTnLst>
+                                </p:cTn>
+                              </p:par>
+                            </p:childTnLst>
+                          </p:cTn>
+                        </p:par>
+                      </p:childTnLst>
+                    </p:cTn>
+                  </p:par>
+                  <p:par>
+                    <p:cTn id="43" fill="hold">
+                      <p:stCondLst>
+                        <p:cond delay="indefinite"/>
+                      </p:stCondLst>
+                      <p:childTnLst>
+                        <p:par>
+                          <p:cTn id="44" fill="hold">
+                            <p:stCondLst>
+                              <p:cond delay="0"/>
+                            </p:stCondLst>
+                            <p:childTnLst>
+                              <p:par>
+                                <p:cTn id="45" presetID="10" presetClass="entr" presetSubtype="0" fill="hold" grpId="0" nodeType="clickEffect">
+                                  <p:stCondLst>
+                                    <p:cond delay="0"/>
+                                  </p:stCondLst>
+                                  <p:childTnLst>
+                                    <p:set>
+                                      <p:cBhvr>
+                                        <p:cTn id="46" dur="1" fill="hold">
+                                          <p:stCondLst>
+                                            <p:cond delay="0"/>
+                                          </p:stCondLst>
+                                        </p:cTn>
+                                        <p:tgtEl>
+                                          <p:spTgt spid="44"/>
+                                        </p:tgtEl>
+                                        <p:attrNameLst>
+                                          <p:attrName>style.visibility</p:attrName>
+                                        </p:attrNameLst>
+                                      </p:cBhvr>
+                                      <p:to>
+                                        <p:strVal val="visible"/>
+                                      </p:to>
+                                    </p:set>
+                                    <p:animEffect transition="in" filter="fade">
+                                      <p:cBhvr>
+                                        <p:cTn id="47" dur="500"/>
+                                        <p:tgtEl>
+                                          <p:spTgt spid="44"/>
+                                        </p:tgtEl>
+                                      </p:cBhvr>
+                                    </p:animEffect>
+                                  </p:childTnLst>
+                                </p:cTn>
+                              </p:par>
+                            </p:childTnLst>
+                          </p:cTn>
+                        </p:par>
+                      </p:childTnLst>
+                    </p:cTn>
+                  </p:par>
+                  <p:par>
+                    <p:cTn id="48" fill="hold">
+                      <p:stCondLst>
+                        <p:cond delay="indefinite"/>
+                      </p:stCondLst>
+                      <p:childTnLst>
+                        <p:par>
+                          <p:cTn id="49" fill="hold">
+                            <p:stCondLst>
+                              <p:cond delay="0"/>
+                            </p:stCondLst>
+                            <p:childTnLst>
+                              <p:par>
+                                <p:cTn id="50" presetID="10" presetClass="entr" presetSubtype="0" fill="hold" grpId="0" nodeType="clickEffect">
+                                  <p:stCondLst>
+                                    <p:cond delay="0"/>
+                                  </p:stCondLst>
+                                  <p:childTnLst>
+                                    <p:set>
+                                      <p:cBhvr>
+                                        <p:cTn id="51" dur="1" fill="hold">
+                                          <p:stCondLst>
+                                            <p:cond delay="0"/>
+                                          </p:stCondLst>
+                                        </p:cTn>
+                                        <p:tgtEl>
+                                          <p:spTgt spid="45"/>
+                                        </p:tgtEl>
+                                        <p:attrNameLst>
+                                          <p:attrName>style.visibility</p:attrName>
+                                        </p:attrNameLst>
+                                      </p:cBhvr>
+                                      <p:to>
+                                        <p:strVal val="visible"/>
+                                      </p:to>
+                                    </p:set>
+                                    <p:animEffect transition="in" filter="fade">
+                                      <p:cBhvr>
+                                        <p:cTn id="52" dur="500"/>
+                                        <p:tgtEl>
+                                          <p:spTgt spid="45"/>
+                                        </p:tgtEl>
+                                      </p:cBhvr>
+                                    </p:animEffect>
+                                  </p:childTnLst>
+                                </p:cTn>
+                              </p:par>
+                            </p:childTnLst>
+                          </p:cTn>
+                        </p:par>
+                      </p:childTnLst>
+                    </p:cTn>
+                  </p:par>
+                </p:childTnLst>
               </p:cTn>
               <p:prevCondLst>
                 <p:cond evt="onPrev" delay="0">
@@ -52705,676 +52858,6 @@
                 <p:cond evt="onNext" delay="0">
                   <p:tgtEl>
                     <p:sldTgt/>
-                  </p:tgtEl>
-                </p:cond>
-              </p:nextCondLst>
-            </p:seq>
-            <p:seq concurrent="1" nextAc="seek">
-              <p:cTn id="5" restart="whenNotActive" fill="hold" nodeType="interactiveSeq">
-                <p:stCondLst>
-                  <p:cond evt="onClick" delay="0">
-                    <p:tgtEl>
-                      <p:spTgt spid="8"/>
-                    </p:tgtEl>
-                  </p:cond>
-                </p:stCondLst>
-                <p:endSync evt="end" delay="0">
-                  <p:rtn val="all"/>
-                </p:endSync>
-                <p:childTnLst>
-                  <p:par>
-                    <p:cTn id="6" fill="hold">
-                      <p:stCondLst>
-                        <p:cond delay="0"/>
-                      </p:stCondLst>
-                      <p:childTnLst>
-                        <p:par>
-                          <p:cTn id="7" presetID="10" presetClass="entr" presetSubtype="0" fill="hold" grpId="0" nodeType="clickEffect">
-                            <p:stCondLst>
-                              <p:cond delay="0"/>
-                            </p:stCondLst>
-                            <p:childTnLst>
-                              <p:set>
-                                <p:cBhvr>
-                                  <p:cTn id="8" dur="1" fill="hold">
-                                    <p:stCondLst>
-                                      <p:cond delay="0"/>
-                                    </p:stCondLst>
-                                  </p:cTn>
-                                  <p:tgtEl>
-                                    <p:spTgt spid="11"/>
-                                  </p:tgtEl>
-                                  <p:attrNameLst>
-                                    <p:attrName>style.visibility</p:attrName>
-                                  </p:attrNameLst>
-                                </p:cBhvr>
-                                <p:to>
-                                  <p:strVal val="visible"/>
-                                </p:to>
-                              </p:set>
-                              <p:animEffect transition="in" filter="fade">
-                                <p:cBhvr>
-                                  <p:cTn id="9" dur="400"/>
-                                  <p:tgtEl>
-                                    <p:spTgt spid="11"/>
-                                  </p:tgtEl>
-                                </p:cBhvr>
-                              </p:animEffect>
-                            </p:childTnLst>
-                          </p:cTn>
-                        </p:par>
-                      </p:childTnLst>
-                    </p:cTn>
-                  </p:par>
-                </p:childTnLst>
-              </p:cTn>
-              <p:nextCondLst>
-                <p:cond evt="onClick" delay="0">
-                  <p:tgtEl>
-                    <p:spTgt spid="8"/>
-                  </p:tgtEl>
-                </p:cond>
-              </p:nextCondLst>
-            </p:seq>
-            <p:seq concurrent="1" nextAc="seek">
-              <p:cTn id="15" restart="whenNotActive" fill="hold" nodeType="interactiveSeq">
-                <p:stCondLst>
-                  <p:cond evt="onClick" delay="0">
-                    <p:tgtEl>
-                      <p:spTgt spid="12"/>
-                    </p:tgtEl>
-                  </p:cond>
-                </p:stCondLst>
-                <p:endSync evt="end" delay="0">
-                  <p:rtn val="all"/>
-                </p:endSync>
-                <p:childTnLst>
-                  <p:par>
-                    <p:cTn id="16" fill="hold">
-                      <p:stCondLst>
-                        <p:cond delay="0"/>
-                      </p:stCondLst>
-                      <p:childTnLst>
-                        <p:par>
-                          <p:cTn id="17" presetID="10" presetClass="entr" presetSubtype="0" fill="hold" grpId="0" nodeType="clickEffect">
-                            <p:stCondLst>
-                              <p:cond delay="0"/>
-                            </p:stCondLst>
-                            <p:childTnLst>
-                              <p:set>
-                                <p:cBhvr>
-                                  <p:cTn id="18" dur="1" fill="hold">
-                                    <p:stCondLst>
-                                      <p:cond delay="0"/>
-                                    </p:stCondLst>
-                                  </p:cTn>
-                                  <p:tgtEl>
-                                    <p:spTgt spid="15"/>
-                                  </p:tgtEl>
-                                  <p:attrNameLst>
-                                    <p:attrName>style.visibility</p:attrName>
-                                  </p:attrNameLst>
-                                </p:cBhvr>
-                                <p:to>
-                                  <p:strVal val="visible"/>
-                                </p:to>
-                              </p:set>
-                              <p:animEffect transition="in" filter="fade">
-                                <p:cBhvr>
-                                  <p:cTn id="19" dur="400"/>
-                                  <p:tgtEl>
-                                    <p:spTgt spid="15"/>
-                                  </p:tgtEl>
-                                </p:cBhvr>
-                              </p:animEffect>
-                            </p:childTnLst>
-                          </p:cTn>
-                        </p:par>
-                      </p:childTnLst>
-                    </p:cTn>
-                  </p:par>
-                </p:childTnLst>
-              </p:cTn>
-              <p:nextCondLst>
-                <p:cond evt="onClick" delay="0">
-                  <p:tgtEl>
-                    <p:spTgt spid="12"/>
-                  </p:tgtEl>
-                </p:cond>
-              </p:nextCondLst>
-            </p:seq>
-            <p:seq concurrent="1" nextAc="seek">
-              <p:cTn id="25" restart="whenNotActive" fill="hold" nodeType="interactiveSeq">
-                <p:stCondLst>
-                  <p:cond evt="onClick" delay="0">
-                    <p:tgtEl>
-                      <p:spTgt spid="16"/>
-                    </p:tgtEl>
-                  </p:cond>
-                </p:stCondLst>
-                <p:endSync evt="end" delay="0">
-                  <p:rtn val="all"/>
-                </p:endSync>
-                <p:childTnLst>
-                  <p:par>
-                    <p:cTn id="26" fill="hold">
-                      <p:stCondLst>
-                        <p:cond delay="0"/>
-                      </p:stCondLst>
-                      <p:childTnLst>
-                        <p:par>
-                          <p:cTn id="27" presetID="10" presetClass="entr" presetSubtype="0" fill="hold" grpId="0" nodeType="clickEffect">
-                            <p:stCondLst>
-                              <p:cond delay="0"/>
-                            </p:stCondLst>
-                            <p:childTnLst>
-                              <p:set>
-                                <p:cBhvr>
-                                  <p:cTn id="28" dur="1" fill="hold">
-                                    <p:stCondLst>
-                                      <p:cond delay="0"/>
-                                    </p:stCondLst>
-                                  </p:cTn>
-                                  <p:tgtEl>
-                                    <p:spTgt spid="19"/>
-                                  </p:tgtEl>
-                                  <p:attrNameLst>
-                                    <p:attrName>style.visibility</p:attrName>
-                                  </p:attrNameLst>
-                                </p:cBhvr>
-                                <p:to>
-                                  <p:strVal val="visible"/>
-                                </p:to>
-                              </p:set>
-                              <p:animEffect transition="in" filter="fade">
-                                <p:cBhvr>
-                                  <p:cTn id="29" dur="400"/>
-                                  <p:tgtEl>
-                                    <p:spTgt spid="19"/>
-                                  </p:tgtEl>
-                                </p:cBhvr>
-                              </p:animEffect>
-                            </p:childTnLst>
-                          </p:cTn>
-                        </p:par>
-                      </p:childTnLst>
-                    </p:cTn>
-                  </p:par>
-                </p:childTnLst>
-              </p:cTn>
-              <p:nextCondLst>
-                <p:cond evt="onClick" delay="0">
-                  <p:tgtEl>
-                    <p:spTgt spid="16"/>
-                  </p:tgtEl>
-                </p:cond>
-              </p:nextCondLst>
-            </p:seq>
-            <p:seq concurrent="1" nextAc="seek">
-              <p:cTn id="35" restart="whenNotActive" fill="hold" nodeType="interactiveSeq">
-                <p:stCondLst>
-                  <p:cond evt="onClick" delay="0">
-                    <p:tgtEl>
-                      <p:spTgt spid="20"/>
-                    </p:tgtEl>
-                  </p:cond>
-                </p:stCondLst>
-                <p:endSync evt="end" delay="0">
-                  <p:rtn val="all"/>
-                </p:endSync>
-                <p:childTnLst>
-                  <p:par>
-                    <p:cTn id="36" fill="hold">
-                      <p:stCondLst>
-                        <p:cond delay="0"/>
-                      </p:stCondLst>
-                      <p:childTnLst>
-                        <p:par>
-                          <p:cTn id="37" presetID="10" presetClass="entr" presetSubtype="0" fill="hold" grpId="0" nodeType="clickEffect">
-                            <p:stCondLst>
-                              <p:cond delay="0"/>
-                            </p:stCondLst>
-                            <p:childTnLst>
-                              <p:set>
-                                <p:cBhvr>
-                                  <p:cTn id="38" dur="1" fill="hold">
-                                    <p:stCondLst>
-                                      <p:cond delay="0"/>
-                                    </p:stCondLst>
-                                  </p:cTn>
-                                  <p:tgtEl>
-                                    <p:spTgt spid="23"/>
-                                  </p:tgtEl>
-                                  <p:attrNameLst>
-                                    <p:attrName>style.visibility</p:attrName>
-                                  </p:attrNameLst>
-                                </p:cBhvr>
-                                <p:to>
-                                  <p:strVal val="visible"/>
-                                </p:to>
-                              </p:set>
-                              <p:animEffect transition="in" filter="fade">
-                                <p:cBhvr>
-                                  <p:cTn id="39" dur="400"/>
-                                  <p:tgtEl>
-                                    <p:spTgt spid="23"/>
-                                  </p:tgtEl>
-                                </p:cBhvr>
-                              </p:animEffect>
-                            </p:childTnLst>
-                          </p:cTn>
-                        </p:par>
-                      </p:childTnLst>
-                    </p:cTn>
-                  </p:par>
-                </p:childTnLst>
-              </p:cTn>
-              <p:nextCondLst>
-                <p:cond evt="onClick" delay="0">
-                  <p:tgtEl>
-                    <p:spTgt spid="20"/>
-                  </p:tgtEl>
-                </p:cond>
-              </p:nextCondLst>
-            </p:seq>
-            <p:seq concurrent="1" nextAc="seek">
-              <p:cTn id="45" restart="whenNotActive" fill="hold" nodeType="interactiveSeq">
-                <p:stCondLst>
-                  <p:cond evt="onClick" delay="0">
-                    <p:tgtEl>
-                      <p:spTgt spid="24"/>
-                    </p:tgtEl>
-                  </p:cond>
-                </p:stCondLst>
-                <p:endSync evt="end" delay="0">
-                  <p:rtn val="all"/>
-                </p:endSync>
-                <p:childTnLst>
-                  <p:par>
-                    <p:cTn id="46" fill="hold">
-                      <p:stCondLst>
-                        <p:cond delay="0"/>
-                      </p:stCondLst>
-                      <p:childTnLst>
-                        <p:par>
-                          <p:cTn id="47" presetID="10" presetClass="entr" presetSubtype="0" fill="hold" grpId="0" nodeType="clickEffect">
-                            <p:stCondLst>
-                              <p:cond delay="0"/>
-                            </p:stCondLst>
-                            <p:childTnLst>
-                              <p:set>
-                                <p:cBhvr>
-                                  <p:cTn id="48" dur="1" fill="hold">
-                                    <p:stCondLst>
-                                      <p:cond delay="0"/>
-                                    </p:stCondLst>
-                                  </p:cTn>
-                                  <p:tgtEl>
-                                    <p:spTgt spid="27"/>
-                                  </p:tgtEl>
-                                  <p:attrNameLst>
-                                    <p:attrName>style.visibility</p:attrName>
-                                  </p:attrNameLst>
-                                </p:cBhvr>
-                                <p:to>
-                                  <p:strVal val="visible"/>
-                                </p:to>
-                              </p:set>
-                              <p:animEffect transition="in" filter="fade">
-                                <p:cBhvr>
-                                  <p:cTn id="49" dur="400"/>
-                                  <p:tgtEl>
-                                    <p:spTgt spid="27"/>
-                                  </p:tgtEl>
-                                </p:cBhvr>
-                              </p:animEffect>
-                            </p:childTnLst>
-                          </p:cTn>
-                        </p:par>
-                      </p:childTnLst>
-                    </p:cTn>
-                  </p:par>
-                </p:childTnLst>
-              </p:cTn>
-              <p:nextCondLst>
-                <p:cond evt="onClick" delay="0">
-                  <p:tgtEl>
-                    <p:spTgt spid="24"/>
-                  </p:tgtEl>
-                </p:cond>
-              </p:nextCondLst>
-            </p:seq>
-            <p:seq concurrent="1" nextAc="seek">
-              <p:cTn id="55" restart="whenNotActive" fill="hold" nodeType="interactiveSeq">
-                <p:stCondLst>
-                  <p:cond evt="onClick" delay="0">
-                    <p:tgtEl>
-                      <p:spTgt spid="28"/>
-                    </p:tgtEl>
-                  </p:cond>
-                </p:stCondLst>
-                <p:endSync evt="end" delay="0">
-                  <p:rtn val="all"/>
-                </p:endSync>
-                <p:childTnLst>
-                  <p:par>
-                    <p:cTn id="56" fill="hold">
-                      <p:stCondLst>
-                        <p:cond delay="0"/>
-                      </p:stCondLst>
-                      <p:childTnLst>
-                        <p:par>
-                          <p:cTn id="57" presetID="10" presetClass="entr" presetSubtype="0" fill="hold" grpId="0" nodeType="clickEffect">
-                            <p:stCondLst>
-                              <p:cond delay="0"/>
-                            </p:stCondLst>
-                            <p:childTnLst>
-                              <p:set>
-                                <p:cBhvr>
-                                  <p:cTn id="58" dur="1" fill="hold">
-                                    <p:stCondLst>
-                                      <p:cond delay="0"/>
-                                    </p:stCondLst>
-                                  </p:cTn>
-                                  <p:tgtEl>
-                                    <p:spTgt spid="31"/>
-                                  </p:tgtEl>
-                                  <p:attrNameLst>
-                                    <p:attrName>style.visibility</p:attrName>
-                                  </p:attrNameLst>
-                                </p:cBhvr>
-                                <p:to>
-                                  <p:strVal val="visible"/>
-                                </p:to>
-                              </p:set>
-                              <p:animEffect transition="in" filter="fade">
-                                <p:cBhvr>
-                                  <p:cTn id="59" dur="400"/>
-                                  <p:tgtEl>
-                                    <p:spTgt spid="31"/>
-                                  </p:tgtEl>
-                                </p:cBhvr>
-                              </p:animEffect>
-                            </p:childTnLst>
-                          </p:cTn>
-                        </p:par>
-                      </p:childTnLst>
-                    </p:cTn>
-                  </p:par>
-                </p:childTnLst>
-              </p:cTn>
-              <p:nextCondLst>
-                <p:cond evt="onClick" delay="0">
-                  <p:tgtEl>
-                    <p:spTgt spid="28"/>
-                  </p:tgtEl>
-                </p:cond>
-              </p:nextCondLst>
-            </p:seq>
-            <p:seq concurrent="1" nextAc="seek">
-              <p:cTn id="65" restart="whenNotActive" fill="hold" nodeType="interactiveSeq">
-                <p:stCondLst>
-                  <p:cond evt="onClick" delay="0">
-                    <p:tgtEl>
-                      <p:spTgt spid="32"/>
-                    </p:tgtEl>
-                  </p:cond>
-                </p:stCondLst>
-                <p:endSync evt="end" delay="0">
-                  <p:rtn val="all"/>
-                </p:endSync>
-                <p:childTnLst>
-                  <p:par>
-                    <p:cTn id="66" fill="hold">
-                      <p:stCondLst>
-                        <p:cond delay="0"/>
-                      </p:stCondLst>
-                      <p:childTnLst>
-                        <p:par>
-                          <p:cTn id="67" presetID="10" presetClass="entr" presetSubtype="0" fill="hold" grpId="0" nodeType="clickEffect">
-                            <p:stCondLst>
-                              <p:cond delay="0"/>
-                            </p:stCondLst>
-                            <p:childTnLst>
-                              <p:set>
-                                <p:cBhvr>
-                                  <p:cTn id="68" dur="1" fill="hold">
-                                    <p:stCondLst>
-                                      <p:cond delay="0"/>
-                                    </p:stCondLst>
-                                  </p:cTn>
-                                  <p:tgtEl>
-                                    <p:spTgt spid="35"/>
-                                  </p:tgtEl>
-                                  <p:attrNameLst>
-                                    <p:attrName>style.visibility</p:attrName>
-                                  </p:attrNameLst>
-                                </p:cBhvr>
-                                <p:to>
-                                  <p:strVal val="visible"/>
-                                </p:to>
-                              </p:set>
-                              <p:animEffect transition="in" filter="fade">
-                                <p:cBhvr>
-                                  <p:cTn id="69" dur="400"/>
-                                  <p:tgtEl>
-                                    <p:spTgt spid="35"/>
-                                  </p:tgtEl>
-                                </p:cBhvr>
-                              </p:animEffect>
-                            </p:childTnLst>
-                          </p:cTn>
-                        </p:par>
-                      </p:childTnLst>
-                    </p:cTn>
-                  </p:par>
-                </p:childTnLst>
-              </p:cTn>
-              <p:nextCondLst>
-                <p:cond evt="onClick" delay="0">
-                  <p:tgtEl>
-                    <p:spTgt spid="32"/>
-                  </p:tgtEl>
-                </p:cond>
-              </p:nextCondLst>
-            </p:seq>
-            <p:seq concurrent="1" nextAc="seek">
-              <p:cTn id="75" restart="whenNotActive" fill="hold" nodeType="interactiveSeq">
-                <p:stCondLst>
-                  <p:cond evt="onClick" delay="0">
-                    <p:tgtEl>
-                      <p:spTgt spid="36"/>
-                    </p:tgtEl>
-                  </p:cond>
-                </p:stCondLst>
-                <p:endSync evt="end" delay="0">
-                  <p:rtn val="all"/>
-                </p:endSync>
-                <p:childTnLst>
-                  <p:par>
-                    <p:cTn id="76" fill="hold">
-                      <p:stCondLst>
-                        <p:cond delay="0"/>
-                      </p:stCondLst>
-                      <p:childTnLst>
-                        <p:par>
-                          <p:cTn id="77" presetID="10" presetClass="entr" presetSubtype="0" fill="hold" grpId="0" nodeType="clickEffect">
-                            <p:stCondLst>
-                              <p:cond delay="0"/>
-                            </p:stCondLst>
-                            <p:childTnLst>
-                              <p:set>
-                                <p:cBhvr>
-                                  <p:cTn id="78" dur="1" fill="hold">
-                                    <p:stCondLst>
-                                      <p:cond delay="0"/>
-                                    </p:stCondLst>
-                                  </p:cTn>
-                                  <p:tgtEl>
-                                    <p:spTgt spid="39"/>
-                                  </p:tgtEl>
-                                  <p:attrNameLst>
-                                    <p:attrName>style.visibility</p:attrName>
-                                  </p:attrNameLst>
-                                </p:cBhvr>
-                                <p:to>
-                                  <p:strVal val="visible"/>
-                                </p:to>
-                              </p:set>
-                              <p:animEffect transition="in" filter="fade">
-                                <p:cBhvr>
-                                  <p:cTn id="79" dur="400"/>
-                                  <p:tgtEl>
-                                    <p:spTgt spid="39"/>
-                                  </p:tgtEl>
-                                </p:cBhvr>
-                              </p:animEffect>
-                            </p:childTnLst>
-                          </p:cTn>
-                        </p:par>
-                      </p:childTnLst>
-                    </p:cTn>
-                  </p:par>
-                </p:childTnLst>
-              </p:cTn>
-              <p:nextCondLst>
-                <p:cond evt="onClick" delay="0">
-                  <p:tgtEl>
-                    <p:spTgt spid="36"/>
-                  </p:tgtEl>
-                </p:cond>
-              </p:nextCondLst>
-            </p:seq>
-            <p:seq concurrent="1" nextAc="seek">
-              <p:cTn id="85" restart="whenNotActive" fill="hold" nodeType="interactiveSeq">
-                <p:stCondLst>
-                  <p:cond evt="onClick" delay="0">
-                    <p:tgtEl>
-                      <p:spTgt spid="40"/>
-                    </p:tgtEl>
-                  </p:cond>
-                </p:stCondLst>
-                <p:endSync evt="end" delay="0">
-                  <p:rtn val="all"/>
-                </p:endSync>
-                <p:childTnLst>
-                  <p:par>
-                    <p:cTn id="86" fill="hold">
-                      <p:stCondLst>
-                        <p:cond delay="0"/>
-                      </p:stCondLst>
-                      <p:childTnLst>
-                        <p:par>
-                          <p:cTn id="87" presetID="10" presetClass="entr" presetSubtype="0" fill="hold" grpId="0" nodeType="clickEffect">
-                            <p:stCondLst>
-                              <p:cond delay="0"/>
-                            </p:stCondLst>
-                            <p:childTnLst>
-                              <p:set>
-                                <p:cBhvr>
-                                  <p:cTn id="88" dur="1" fill="hold">
-                                    <p:stCondLst>
-                                      <p:cond delay="0"/>
-                                    </p:stCondLst>
-                                  </p:cTn>
-                                  <p:tgtEl>
-                                    <p:spTgt spid="44"/>
-                                  </p:tgtEl>
-                                  <p:attrNameLst>
-                                    <p:attrName>style.visibility</p:attrName>
-                                  </p:attrNameLst>
-                                </p:cBhvr>
-                                <p:to>
-                                  <p:strVal val="visible"/>
-                                </p:to>
-                              </p:set>
-                              <p:animEffect transition="in" filter="fade">
-                                <p:cBhvr>
-                                  <p:cTn id="89" dur="400"/>
-                                  <p:tgtEl>
-                                    <p:spTgt spid="44"/>
-                                  </p:tgtEl>
-                                </p:cBhvr>
-                              </p:animEffect>
-                            </p:childTnLst>
-                          </p:cTn>
-                        </p:par>
-                      </p:childTnLst>
-                    </p:cTn>
-                  </p:par>
-                </p:childTnLst>
-              </p:cTn>
-              <p:nextCondLst>
-                <p:cond evt="onClick" delay="0">
-                  <p:tgtEl>
-                    <p:spTgt spid="40"/>
-                  </p:tgtEl>
-                </p:cond>
-              </p:nextCondLst>
-            </p:seq>
-            <p:seq concurrent="1" nextAc="seek">
-              <p:cTn id="95" restart="whenNotActive" fill="hold" nodeType="interactiveSeq">
-                <p:stCondLst>
-                  <p:cond evt="onClick" delay="0">
-                    <p:tgtEl>
-                      <p:spTgt spid="40"/>
-                    </p:tgtEl>
-                  </p:cond>
-                </p:stCondLst>
-                <p:endSync evt="end" delay="0">
-                  <p:rtn val="all"/>
-                </p:endSync>
-                <p:childTnLst>
-                  <p:par>
-                    <p:cTn id="96" fill="hold">
-                      <p:stCondLst>
-                        <p:cond delay="0"/>
-                      </p:stCondLst>
-                      <p:childTnLst>
-                        <p:par>
-                          <p:cTn id="97" presetID="10" presetClass="entr" presetSubtype="0" fill="hold" grpId="0" nodeType="clickEffect">
-                            <p:stCondLst>
-                              <p:cond delay="0"/>
-                            </p:stCondLst>
-                            <p:childTnLst>
-                              <p:set>
-                                <p:cBhvr>
-                                  <p:cTn id="98" dur="1" fill="hold">
-                                    <p:stCondLst>
-                                      <p:cond delay="0"/>
-                                    </p:stCondLst>
-                                  </p:cTn>
-                                  <p:tgtEl>
-                                    <p:spTgt spid="45"/>
-                                  </p:tgtEl>
-                                  <p:attrNameLst>
-                                    <p:attrName>style.visibility</p:attrName>
-                                  </p:attrNameLst>
-                                </p:cBhvr>
-                                <p:to>
-                                  <p:strVal val="visible"/>
-                                </p:to>
-                              </p:set>
-                              <p:animEffect transition="in" filter="fade">
-                                <p:cBhvr>
-                                  <p:cTn id="99" dur="400"/>
-                                  <p:tgtEl>
-                                    <p:spTgt spid="45"/>
-                                  </p:tgtEl>
-                                </p:cBhvr>
-                              </p:animEffect>
-                            </p:childTnLst>
-                          </p:cTn>
-                        </p:par>
-                      </p:childTnLst>
-                    </p:cTn>
-                  </p:par>
-                </p:childTnLst>
-              </p:cTn>
-              <p:nextCondLst>
-                <p:cond evt="onClick" delay="0">
-                  <p:tgtEl>
-                    <p:spTgt spid="40"/>
                   </p:tgtEl>
                 </p:cond>
               </p:nextCondLst>

--- a/03-build/pptx/C5_U0_alumno.pptx
+++ b/03-build/pptx/C5_U0_alumno.pptx
@@ -20412,17 +20412,164 @@
       </p:sp>
       <p:sp>
         <p:nvSpPr>
-          <p:cNvPr id="67" name="Rectangle 66"/>
+          <p:cNvPr id="67" name="Rounded Rectangle 66"/>
           <p:cNvSpPr/>
           <p:nvPr/>
         </p:nvSpPr>
         <p:spPr>
           <a:xfrm>
-            <a:off x="0" y="6547104"/>
-            <a:ext cx="12191695" cy="310896"/>
-          </a:xfrm>
-          <a:prstGeom prst="rect">
-            <a:avLst/>
+            <a:off x="457200" y="5559552"/>
+            <a:ext cx="2474366" cy="292608"/>
+          </a:xfrm>
+          <a:prstGeom prst="roundRect">
+            <a:avLst>
+              <a:gd name="adj" fmla="val 50000"/>
+            </a:avLst>
+          </a:prstGeom>
+          <a:solidFill>
+            <a:srgbClr val="E4F4EE"/>
+          </a:solidFill>
+          <a:ln>
+            <a:noFill/>
+          </a:ln>
+          <a:effectLst/>
+        </p:spPr>
+        <p:style>
+          <a:lnRef idx="1">
+            <a:schemeClr val="accent1"/>
+          </a:lnRef>
+          <a:fillRef idx="3">
+            <a:schemeClr val="accent1"/>
+          </a:fillRef>
+          <a:effectRef idx="2">
+            <a:schemeClr val="accent1"/>
+          </a:effectRef>
+          <a:fontRef idx="minor">
+            <a:schemeClr val="lt1"/>
+          </a:fontRef>
+        </p:style>
+        <p:txBody>
+          <a:bodyPr rtlCol="0" anchor="ctr" wrap="none" lIns="88900" rIns="88900" tIns="12700" bIns="12700"/>
+          <a:lstStyle/>
+          <a:p>
+            <a:pPr algn="ctr"/>
+            <a:r>
+              <a:rPr sz="1050" b="1">
+                <a:solidFill>
+                  <a:srgbClr val="157355"/>
+                </a:solidFill>
+                <a:latin typeface="Inter"/>
+              </a:rPr>
+              <a:t>👀 LEER · comprensión lectora</a:t>
+            </a:r>
+          </a:p>
+        </p:txBody>
+      </p:sp>
+      <p:sp>
+        <p:nvSpPr>
+          <p:cNvPr id="68" name="TextBox 67"/>
+          <p:cNvSpPr txBox="1"/>
+          <p:nvPr/>
+        </p:nvSpPr>
+        <p:spPr>
+          <a:xfrm>
+            <a:off x="457200" y="5943600"/>
+            <a:ext cx="7315200" cy="457200"/>
+          </a:xfrm>
+          <a:prstGeom prst="rect">
+            <a:avLst/>
+          </a:prstGeom>
+          <a:noFill/>
+        </p:spPr>
+        <p:txBody>
+          <a:bodyPr wrap="square" anchor="t" lIns="38100" rIns="38100" tIns="25400" bIns="25400">
+            <a:spAutoFit/>
+          </a:bodyPr>
+          <a:lstStyle/>
+          <a:p>
+            <a:pPr algn="l">
+              <a:lnSpc>
+                <a:spcPct val="106000"/>
+              </a:lnSpc>
+              <a:spcBef>
+                <a:spcPts val="0"/>
+              </a:spcBef>
+              <a:spcAft>
+                <a:spcPts val="200"/>
+              </a:spcAft>
+            </a:pPr>
+            <a:r>
+              <a:rPr sz="1100" b="0" i="0">
+                <a:solidFill>
+                  <a:srgbClr val="20242E"/>
+                </a:solidFill>
+                <a:latin typeface="Inter"/>
+              </a:rPr>
+              <a:t>V/F · Lee la lista: «En Brasil se habla español.»  </a:t>
+            </a:r>
+          </a:p>
+        </p:txBody>
+      </p:sp>
+      <p:sp>
+        <p:nvSpPr>
+          <p:cNvPr id="69" name="TextBox 68"/>
+          <p:cNvSpPr txBox="1"/>
+          <p:nvPr/>
+        </p:nvSpPr>
+        <p:spPr>
+          <a:xfrm>
+            <a:off x="5669280" y="5943600"/>
+            <a:ext cx="1920240" cy="457200"/>
+          </a:xfrm>
+          <a:prstGeom prst="rect">
+            <a:avLst/>
+          </a:prstGeom>
+          <a:noFill/>
+        </p:spPr>
+        <p:txBody>
+          <a:bodyPr wrap="square" anchor="ctr" lIns="38100" rIns="38100" tIns="25400" bIns="25400">
+            <a:spAutoFit/>
+          </a:bodyPr>
+          <a:lstStyle/>
+          <a:p>
+            <a:pPr algn="l">
+              <a:lnSpc>
+                <a:spcPct val="106000"/>
+              </a:lnSpc>
+              <a:spcBef>
+                <a:spcPts val="0"/>
+              </a:spcBef>
+              <a:spcAft>
+                <a:spcPts val="200"/>
+              </a:spcAft>
+            </a:pPr>
+            <a:r>
+              <a:rPr sz="1100" b="1" i="0">
+                <a:solidFill>
+                  <a:srgbClr val="DC2626"/>
+                </a:solidFill>
+                <a:latin typeface="Inter"/>
+              </a:rPr>
+              <a:t>→ FALSO (portugués)</a:t>
+            </a:r>
+          </a:p>
+        </p:txBody>
+      </p:sp>
+      <p:sp>
+        <p:nvSpPr>
+          <p:cNvPr id="70" name="Rounded Rectangle 69"/>
+          <p:cNvSpPr/>
+          <p:nvPr/>
+        </p:nvSpPr>
+        <p:spPr>
+          <a:xfrm>
+            <a:off x="7772400" y="5943600"/>
+            <a:ext cx="3147364" cy="292608"/>
+          </a:xfrm>
+          <a:prstGeom prst="roundRect">
+            <a:avLst>
+              <a:gd name="adj" fmla="val 50000"/>
+            </a:avLst>
           </a:prstGeom>
           <a:solidFill>
             <a:srgbClr val="F3EEE4"/>
@@ -20447,6 +20594,59 @@
           </a:fontRef>
         </p:style>
         <p:txBody>
+          <a:bodyPr rtlCol="0" anchor="ctr" wrap="none" lIns="88900" rIns="88900" tIns="12700" bIns="12700"/>
+          <a:lstStyle/>
+          <a:p>
+            <a:pPr algn="ctr"/>
+            <a:r>
+              <a:rPr sz="1000" b="1">
+                <a:solidFill>
+                  <a:srgbClr val="157355"/>
+                </a:solidFill>
+                <a:latin typeface="Inter"/>
+              </a:rPr>
+              <a:t>🔗 Online: mapa clicable + flip cards</a:t>
+            </a:r>
+          </a:p>
+        </p:txBody>
+      </p:sp>
+      <p:sp>
+        <p:nvSpPr>
+          <p:cNvPr id="71" name="Rectangle 70"/>
+          <p:cNvSpPr/>
+          <p:nvPr/>
+        </p:nvSpPr>
+        <p:spPr>
+          <a:xfrm>
+            <a:off x="0" y="6547104"/>
+            <a:ext cx="12191695" cy="310896"/>
+          </a:xfrm>
+          <a:prstGeom prst="rect">
+            <a:avLst/>
+          </a:prstGeom>
+          <a:solidFill>
+            <a:srgbClr val="F3EEE4"/>
+          </a:solidFill>
+          <a:ln>
+            <a:noFill/>
+          </a:ln>
+          <a:effectLst/>
+        </p:spPr>
+        <p:style>
+          <a:lnRef idx="1">
+            <a:schemeClr val="accent1"/>
+          </a:lnRef>
+          <a:fillRef idx="3">
+            <a:schemeClr val="accent1"/>
+          </a:fillRef>
+          <a:effectRef idx="2">
+            <a:schemeClr val="accent1"/>
+          </a:effectRef>
+          <a:fontRef idx="minor">
+            <a:schemeClr val="lt1"/>
+          </a:fontRef>
+        </p:style>
+        <p:txBody>
           <a:bodyPr rtlCol="0" anchor="ctr"/>
           <a:lstStyle/>
           <a:p>
@@ -20456,7 +20656,7 @@
       </p:sp>
       <p:sp>
         <p:nvSpPr>
-          <p:cNvPr id="68" name="TextBox 67"/>
+          <p:cNvPr id="72" name="TextBox 71"/>
           <p:cNvSpPr txBox="1"/>
           <p:nvPr/>
         </p:nvSpPr>
@@ -20510,7 +20710,7 @@
       </p:sp>
       <p:sp>
         <p:nvSpPr>
-          <p:cNvPr id="69" name="TextBox 68"/>
+          <p:cNvPr id="73" name="TextBox 72"/>
           <p:cNvSpPr txBox="1"/>
           <p:nvPr/>
         </p:nvSpPr>
@@ -20555,7 +20755,7 @@
       </p:sp>
       <p:sp>
         <p:nvSpPr>
-          <p:cNvPr id="70" name="TextBox 69"/>
+          <p:cNvPr id="74" name="TextBox 73"/>
           <p:cNvSpPr txBox="1"/>
           <p:nvPr/>
         </p:nvSpPr>
@@ -20603,6 +20803,89 @@
   <p:clrMapOvr>
     <a:masterClrMapping/>
   </p:clrMapOvr>
+  <p:timing>
+    <p:tnLst>
+      <p:par>
+        <p:cTn id="1" dur="indefinite" restart="never" nodeType="tmRoot">
+          <p:childTnLst>
+            <p:seq concurrent="1" nextAc="seek">
+              <p:cTn id="2" dur="indefinite" nodeType="mainSeq">
+                <p:childTnLst>
+                  <p:par>
+                    <p:cTn id="3" fill="hold">
+                      <p:stCondLst>
+                        <p:cond delay="indefinite"/>
+                      </p:stCondLst>
+                      <p:childTnLst>
+                        <p:par>
+                          <p:cTn id="4" fill="hold">
+                            <p:stCondLst>
+                              <p:cond delay="0"/>
+                            </p:stCondLst>
+                            <p:childTnLst>
+                              <p:par>
+                                <p:cTn id="5" presetID="10" presetClass="entr" presetSubtype="0" fill="hold" grpId="0" nodeType="clickEffect">
+                                  <p:stCondLst>
+                                    <p:cond delay="0"/>
+                                  </p:stCondLst>
+                                  <p:childTnLst>
+                                    <p:set>
+                                      <p:cBhvr>
+                                        <p:cTn id="6" dur="1" fill="hold">
+                                          <p:stCondLst>
+                                            <p:cond delay="0"/>
+                                          </p:stCondLst>
+                                        </p:cTn>
+                                        <p:tgtEl>
+                                          <p:spTgt spid="69"/>
+                                        </p:tgtEl>
+                                        <p:attrNameLst>
+                                          <p:attrName>style.visibility</p:attrName>
+                                        </p:attrNameLst>
+                                      </p:cBhvr>
+                                      <p:to>
+                                        <p:strVal val="visible"/>
+                                      </p:to>
+                                    </p:set>
+                                    <p:animEffect transition="in" filter="fade">
+                                      <p:cBhvr>
+                                        <p:cTn id="7" dur="500"/>
+                                        <p:tgtEl>
+                                          <p:spTgt spid="69"/>
+                                        </p:tgtEl>
+                                      </p:cBhvr>
+                                    </p:animEffect>
+                                  </p:childTnLst>
+                                </p:cTn>
+                              </p:par>
+                            </p:childTnLst>
+                          </p:cTn>
+                        </p:par>
+                      </p:childTnLst>
+                    </p:cTn>
+                  </p:par>
+                </p:childTnLst>
+              </p:cTn>
+              <p:prevCondLst>
+                <p:cond evt="onPrev" delay="0">
+                  <p:tgtEl>
+                    <p:sldTgt/>
+                  </p:tgtEl>
+                </p:cond>
+              </p:prevCondLst>
+              <p:nextCondLst>
+                <p:cond evt="onNext" delay="0">
+                  <p:tgtEl>
+                    <p:sldTgt/>
+                  </p:tgtEl>
+                </p:cond>
+              </p:nextCondLst>
+            </p:seq>
+          </p:childTnLst>
+        </p:cTn>
+      </p:par>
+    </p:tnLst>
+  </p:timing>
 </p:sld>
 </file>
 

--- a/03-build/pptx/C5_U0_alumno.pptx
+++ b/03-build/pptx/C5_U0_alumno.pptx
@@ -25,6 +25,8 @@
     <p:sldId id="273" r:id="rId24"/>
     <p:sldId id="274" r:id="rId25"/>
     <p:sldId id="275" r:id="rId26"/>
+    <p:sldId id="276" r:id="rId27"/>
+    <p:sldId id="277" r:id="rId28"/>
   </p:sldIdLst>
   <p:sldSz cx="12191695" cy="6858000" type="screen4x3"/>
   <p:notesSz cx="6858000" cy="9144000"/>
@@ -24000,6 +24002,6136 @@
             <a:avLst/>
           </a:prstGeom>
           <a:solidFill>
+            <a:srgbClr val="1E9E74"/>
+          </a:solidFill>
+          <a:ln>
+            <a:noFill/>
+          </a:ln>
+          <a:effectLst/>
+        </p:spPr>
+        <p:style>
+          <a:lnRef idx="1">
+            <a:schemeClr val="accent1"/>
+          </a:lnRef>
+          <a:fillRef idx="3">
+            <a:schemeClr val="accent1"/>
+          </a:fillRef>
+          <a:effectRef idx="2">
+            <a:schemeClr val="accent1"/>
+          </a:effectRef>
+          <a:fontRef idx="minor">
+            <a:schemeClr val="lt1"/>
+          </a:fontRef>
+        </p:style>
+        <p:txBody>
+          <a:bodyPr rtlCol="0" anchor="ctr"/>
+          <a:lstStyle/>
+          <a:p>
+            <a:pPr algn="ctr"/>
+          </a:p>
+        </p:txBody>
+      </p:sp>
+      <p:sp>
+        <p:nvSpPr>
+          <p:cNvPr id="4" name="Rectangle 3"/>
+          <p:cNvSpPr/>
+          <p:nvPr/>
+        </p:nvSpPr>
+        <p:spPr>
+          <a:xfrm>
+            <a:off x="0" y="1078992"/>
+            <a:ext cx="12191695" cy="54864"/>
+          </a:xfrm>
+          <a:prstGeom prst="rect">
+            <a:avLst/>
+          </a:prstGeom>
+          <a:solidFill>
+            <a:srgbClr val="157355"/>
+          </a:solidFill>
+          <a:ln>
+            <a:noFill/>
+          </a:ln>
+          <a:effectLst/>
+        </p:spPr>
+        <p:style>
+          <a:lnRef idx="1">
+            <a:schemeClr val="accent1"/>
+          </a:lnRef>
+          <a:fillRef idx="3">
+            <a:schemeClr val="accent1"/>
+          </a:fillRef>
+          <a:effectRef idx="2">
+            <a:schemeClr val="accent1"/>
+          </a:effectRef>
+          <a:fontRef idx="minor">
+            <a:schemeClr val="lt1"/>
+          </a:fontRef>
+        </p:style>
+        <p:txBody>
+          <a:bodyPr rtlCol="0" anchor="ctr"/>
+          <a:lstStyle/>
+          <a:p>
+            <a:pPr algn="ctr"/>
+          </a:p>
+        </p:txBody>
+      </p:sp>
+      <p:sp>
+        <p:nvSpPr>
+          <p:cNvPr id="5" name="Rounded Rectangle 4"/>
+          <p:cNvSpPr/>
+          <p:nvPr/>
+        </p:nvSpPr>
+        <p:spPr>
+          <a:xfrm>
+            <a:off x="502920" y="182880"/>
+            <a:ext cx="1128369" cy="292608"/>
+          </a:xfrm>
+          <a:prstGeom prst="roundRect">
+            <a:avLst>
+              <a:gd name="adj" fmla="val 50000"/>
+            </a:avLst>
+          </a:prstGeom>
+          <a:solidFill>
+            <a:srgbClr val="FFFFFF"/>
+          </a:solidFill>
+          <a:ln>
+            <a:noFill/>
+          </a:ln>
+          <a:effectLst/>
+        </p:spPr>
+        <p:style>
+          <a:lnRef idx="1">
+            <a:schemeClr val="accent1"/>
+          </a:lnRef>
+          <a:fillRef idx="3">
+            <a:schemeClr val="accent1"/>
+          </a:fillRef>
+          <a:effectRef idx="2">
+            <a:schemeClr val="accent1"/>
+          </a:effectRef>
+          <a:fontRef idx="minor">
+            <a:schemeClr val="lt1"/>
+          </a:fontRef>
+        </p:style>
+        <p:txBody>
+          <a:bodyPr rtlCol="0" anchor="ctr" wrap="none" lIns="88900" rIns="88900" tIns="12700" bIns="12700"/>
+          <a:lstStyle/>
+          <a:p>
+            <a:pPr algn="ctr"/>
+            <a:r>
+              <a:rPr sz="1100" b="1">
+                <a:solidFill>
+                  <a:srgbClr val="1E9E74"/>
+                </a:solidFill>
+                <a:latin typeface="Inter"/>
+              </a:rPr>
+              <a:t>§5 · LECTURA</a:t>
+            </a:r>
+          </a:p>
+        </p:txBody>
+      </p:sp>
+      <p:sp>
+        <p:nvSpPr>
+          <p:cNvPr id="6" name="TextBox 5"/>
+          <p:cNvSpPr txBox="1"/>
+          <p:nvPr/>
+        </p:nvSpPr>
+        <p:spPr>
+          <a:xfrm>
+            <a:off x="10424160" y="-137160"/>
+            <a:ext cx="1737360" cy="1371600"/>
+          </a:xfrm>
+          <a:prstGeom prst="rect">
+            <a:avLst/>
+          </a:prstGeom>
+          <a:noFill/>
+        </p:spPr>
+        <p:txBody>
+          <a:bodyPr wrap="square" anchor="t" lIns="38100" rIns="38100" tIns="25400" bIns="25400">
+            <a:spAutoFit/>
+          </a:bodyPr>
+          <a:lstStyle/>
+          <a:p>
+            <a:pPr algn="r">
+              <a:lnSpc>
+                <a:spcPct val="106000"/>
+              </a:lnSpc>
+              <a:spcBef>
+                <a:spcPts val="0"/>
+              </a:spcBef>
+              <a:spcAft>
+                <a:spcPts val="200"/>
+              </a:spcAft>
+            </a:pPr>
+            <a:r>
+              <a:rPr sz="8800" b="1" i="0">
+                <a:solidFill>
+                  <a:srgbClr val="FFFFFF"/>
+                </a:solidFill>
+                <a:latin typeface="Bricolage Grotesque"/>
+              </a:rPr>
+              <a:t>5</a:t>
+            </a:r>
+          </a:p>
+        </p:txBody>
+      </p:sp>
+      <p:sp>
+        <p:nvSpPr>
+          <p:cNvPr id="7" name="TextBox 6"/>
+          <p:cNvSpPr txBox="1"/>
+          <p:nvPr/>
+        </p:nvSpPr>
+        <p:spPr>
+          <a:xfrm>
+            <a:off x="457200" y="457200"/>
+            <a:ext cx="9692640" cy="502920"/>
+          </a:xfrm>
+          <a:prstGeom prst="rect">
+            <a:avLst/>
+          </a:prstGeom>
+          <a:noFill/>
+        </p:spPr>
+        <p:txBody>
+          <a:bodyPr wrap="square" anchor="ctr" lIns="38100" rIns="38100" tIns="25400" bIns="25400">
+            <a:spAutoFit/>
+          </a:bodyPr>
+          <a:lstStyle/>
+          <a:p>
+            <a:pPr algn="l">
+              <a:lnSpc>
+                <a:spcPct val="106000"/>
+              </a:lnSpc>
+              <a:spcBef>
+                <a:spcPts val="0"/>
+              </a:spcBef>
+              <a:spcAft>
+                <a:spcPts val="200"/>
+              </a:spcAft>
+            </a:pPr>
+            <a:r>
+              <a:rPr sz="2700" b="1" i="0">
+                <a:solidFill>
+                  <a:srgbClr val="FFFFFF"/>
+                </a:solidFill>
+                <a:latin typeface="Bricolage Grotesque"/>
+              </a:rPr>
+              <a:t>«El Club de Español»</a:t>
+            </a:r>
+          </a:p>
+        </p:txBody>
+      </p:sp>
+      <p:sp>
+        <p:nvSpPr>
+          <p:cNvPr id="8" name="TextBox 7"/>
+          <p:cNvSpPr txBox="1"/>
+          <p:nvPr/>
+        </p:nvSpPr>
+        <p:spPr>
+          <a:xfrm>
+            <a:off x="502920" y="932688"/>
+            <a:ext cx="9692640" cy="274320"/>
+          </a:xfrm>
+          <a:prstGeom prst="rect">
+            <a:avLst/>
+          </a:prstGeom>
+          <a:noFill/>
+        </p:spPr>
+        <p:txBody>
+          <a:bodyPr wrap="square" anchor="t" lIns="38100" rIns="38100" tIns="25400" bIns="25400">
+            <a:spAutoFit/>
+          </a:bodyPr>
+          <a:lstStyle/>
+          <a:p>
+            <a:pPr algn="l">
+              <a:lnSpc>
+                <a:spcPct val="106000"/>
+              </a:lnSpc>
+              <a:spcBef>
+                <a:spcPts val="0"/>
+              </a:spcBef>
+              <a:spcAft>
+                <a:spcPts val="200"/>
+              </a:spcAft>
+            </a:pPr>
+            <a:r>
+              <a:rPr sz="1250" b="0" i="1">
+                <a:solidFill>
+                  <a:srgbClr val="E4F4EE"/>
+                </a:solidFill>
+                <a:latin typeface="Inter"/>
+              </a:rPr>
+              <a:t>Een echte tekst. Je hoeft niet alles te begrijpen om de informatie eruit te halen.</a:t>
+            </a:r>
+          </a:p>
+        </p:txBody>
+      </p:sp>
+      <p:sp>
+        <p:nvSpPr>
+          <p:cNvPr id="9" name="Rounded Rectangle 8"/>
+          <p:cNvSpPr/>
+          <p:nvPr/>
+        </p:nvSpPr>
+        <p:spPr>
+          <a:xfrm>
+            <a:off x="457200" y="1325880"/>
+            <a:ext cx="5577840" cy="4160520"/>
+          </a:xfrm>
+          <a:prstGeom prst="roundRect">
+            <a:avLst>
+              <a:gd name="adj" fmla="val 5500"/>
+            </a:avLst>
+          </a:prstGeom>
+          <a:solidFill>
+            <a:srgbClr val="FFFFFF"/>
+          </a:solidFill>
+          <a:ln w="17780">
+            <a:solidFill>
+              <a:srgbClr val="1E9E74"/>
+            </a:solidFill>
+          </a:ln>
+          <a:effectLst/>
+          <a:effectLst>
+            <a:outerShdw blurRad="90000" dist="38000" dir="5400000" rotWithShape="0">
+              <a:srgbClr val="20242E">
+                <a:alpha val="22000"/>
+              </a:srgbClr>
+            </a:outerShdw>
+          </a:effectLst>
+        </p:spPr>
+        <p:style>
+          <a:lnRef idx="1">
+            <a:schemeClr val="accent1"/>
+          </a:lnRef>
+          <a:fillRef idx="3">
+            <a:schemeClr val="accent1"/>
+          </a:fillRef>
+          <a:effectRef idx="2">
+            <a:schemeClr val="accent1"/>
+          </a:effectRef>
+          <a:fontRef idx="minor">
+            <a:schemeClr val="lt1"/>
+          </a:fontRef>
+        </p:style>
+        <p:txBody>
+          <a:bodyPr rtlCol="0" anchor="ctr"/>
+          <a:lstStyle/>
+          <a:p>
+            <a:pPr algn="ctr"/>
+          </a:p>
+        </p:txBody>
+      </p:sp>
+      <p:sp>
+        <p:nvSpPr>
+          <p:cNvPr id="10" name="Rectangle 9"/>
+          <p:cNvSpPr/>
+          <p:nvPr/>
+        </p:nvSpPr>
+        <p:spPr>
+          <a:xfrm>
+            <a:off x="457200" y="1325880"/>
+            <a:ext cx="5577840" cy="384048"/>
+          </a:xfrm>
+          <a:prstGeom prst="rect">
+            <a:avLst/>
+          </a:prstGeom>
+          <a:solidFill>
+            <a:srgbClr val="1E9E74"/>
+          </a:solidFill>
+          <a:ln>
+            <a:noFill/>
+          </a:ln>
+          <a:effectLst/>
+        </p:spPr>
+        <p:style>
+          <a:lnRef idx="1">
+            <a:schemeClr val="accent1"/>
+          </a:lnRef>
+          <a:fillRef idx="3">
+            <a:schemeClr val="accent1"/>
+          </a:fillRef>
+          <a:effectRef idx="2">
+            <a:schemeClr val="accent1"/>
+          </a:effectRef>
+          <a:fontRef idx="minor">
+            <a:schemeClr val="lt1"/>
+          </a:fontRef>
+        </p:style>
+        <p:txBody>
+          <a:bodyPr rtlCol="0" anchor="ctr"/>
+          <a:lstStyle/>
+          <a:p>
+            <a:pPr algn="ctr"/>
+          </a:p>
+        </p:txBody>
+      </p:sp>
+      <p:sp>
+        <p:nvSpPr>
+          <p:cNvPr id="11" name="TextBox 10"/>
+          <p:cNvSpPr txBox="1"/>
+          <p:nvPr/>
+        </p:nvSpPr>
+        <p:spPr>
+          <a:xfrm>
+            <a:off x="594360" y="1344168"/>
+            <a:ext cx="5303520" cy="365760"/>
+          </a:xfrm>
+          <a:prstGeom prst="rect">
+            <a:avLst/>
+          </a:prstGeom>
+          <a:noFill/>
+        </p:spPr>
+        <p:txBody>
+          <a:bodyPr wrap="square" anchor="ctr" lIns="38100" rIns="38100" tIns="25400" bIns="25400">
+            <a:spAutoFit/>
+          </a:bodyPr>
+          <a:lstStyle/>
+          <a:p>
+            <a:pPr algn="l">
+              <a:lnSpc>
+                <a:spcPct val="106000"/>
+              </a:lnSpc>
+              <a:spcBef>
+                <a:spcPts val="0"/>
+              </a:spcBef>
+              <a:spcAft>
+                <a:spcPts val="200"/>
+              </a:spcAft>
+            </a:pPr>
+            <a:r>
+              <a:rPr sz="1150" b="1" i="0">
+                <a:solidFill>
+                  <a:srgbClr val="FFFFFF"/>
+                </a:solidFill>
+                <a:latin typeface="Bricolage Grotesque"/>
+              </a:rPr>
+              <a:t>anuncio (cartel del instituto)</a:t>
+            </a:r>
+          </a:p>
+        </p:txBody>
+      </p:sp>
+      <p:sp>
+        <p:nvSpPr>
+          <p:cNvPr id="12" name="TextBox 11"/>
+          <p:cNvSpPr txBox="1"/>
+          <p:nvPr/>
+        </p:nvSpPr>
+        <p:spPr>
+          <a:xfrm>
+            <a:off x="640080" y="1810512"/>
+            <a:ext cx="5212080" cy="3566160"/>
+          </a:xfrm>
+          <a:prstGeom prst="rect">
+            <a:avLst/>
+          </a:prstGeom>
+          <a:noFill/>
+        </p:spPr>
+        <p:txBody>
+          <a:bodyPr wrap="square" anchor="t" lIns="38100" rIns="38100" tIns="25400" bIns="25400">
+            <a:spAutoFit/>
+          </a:bodyPr>
+          <a:lstStyle/>
+          <a:p>
+            <a:pPr algn="l">
+              <a:lnSpc>
+                <a:spcPct val="118000"/>
+              </a:lnSpc>
+              <a:spcBef>
+                <a:spcPts val="0"/>
+              </a:spcBef>
+              <a:spcAft>
+                <a:spcPts val="200"/>
+              </a:spcAft>
+            </a:pPr>
+            <a:r>
+              <a:rPr sz="1250" b="1" i="0">
+                <a:solidFill>
+                  <a:srgbClr val="157355"/>
+                </a:solidFill>
+                <a:latin typeface="Bricolage Grotesque"/>
+              </a:rPr>
+              <a:t>¡APÚNTATE AL CLUB DE ESPAÑOL! 🇪🇸🇲🇽🇨🇴🇵🇪</a:t>
+            </a:r>
+          </a:p>
+          <a:p>
+            <a:pPr algn="l">
+              <a:lnSpc>
+                <a:spcPct val="118000"/>
+              </a:lnSpc>
+              <a:spcBef>
+                <a:spcPts val="0"/>
+              </a:spcBef>
+              <a:spcAft>
+                <a:spcPts val="200"/>
+              </a:spcAft>
+            </a:pPr>
+            <a:r>
+              <a:rPr sz="1050" b="0" i="1">
+                <a:solidFill>
+                  <a:srgbClr val="6A6E78"/>
+                </a:solidFill>
+                <a:latin typeface="Inter"/>
+              </a:rPr>
+              <a:t>Un idioma, veinte países, una ruta.</a:t>
+            </a:r>
+          </a:p>
+          <a:p>
+            <a:pPr algn="l">
+              <a:lnSpc>
+                <a:spcPct val="118000"/>
+              </a:lnSpc>
+              <a:spcBef>
+                <a:spcPts val="0"/>
+              </a:spcBef>
+              <a:spcAft>
+                <a:spcPts val="200"/>
+              </a:spcAft>
+            </a:pPr>
+            <a:r>
+              <a:rPr sz="1050" b="0" i="0">
+                <a:solidFill>
+                  <a:srgbClr val="20242E"/>
+                </a:solidFill>
+                <a:latin typeface="Inter"/>
+              </a:rPr>
+              <a:t>¿Hablas un poco de español? ¿O cero español? ¡No importa! En el club hablamos, cantamos y jugamos en español.</a:t>
+            </a:r>
+          </a:p>
+          <a:p>
+            <a:pPr algn="l">
+              <a:lnSpc>
+                <a:spcPct val="118000"/>
+              </a:lnSpc>
+              <a:spcBef>
+                <a:spcPts val="0"/>
+              </a:spcBef>
+              <a:spcAft>
+                <a:spcPts val="200"/>
+              </a:spcAft>
+            </a:pPr>
+            <a:r>
+              <a:rPr sz="1050" b="0" i="0">
+                <a:solidFill>
+                  <a:srgbClr val="20242E"/>
+                </a:solidFill>
+                <a:latin typeface="Inter"/>
+              </a:rPr>
+              <a:t>• ¿Cuándo? Los martes y los jueves, de cuatro a cinco.</a:t>
+            </a:r>
+          </a:p>
+          <a:p>
+            <a:pPr algn="l">
+              <a:lnSpc>
+                <a:spcPct val="118000"/>
+              </a:lnSpc>
+              <a:spcBef>
+                <a:spcPts val="0"/>
+              </a:spcBef>
+              <a:spcAft>
+                <a:spcPts val="200"/>
+              </a:spcAft>
+            </a:pPr>
+            <a:r>
+              <a:rPr sz="1050" b="0" i="0">
+                <a:solidFill>
+                  <a:srgbClr val="20242E"/>
+                </a:solidFill>
+                <a:latin typeface="Inter"/>
+              </a:rPr>
+              <a:t>• ¿Dónde? En el aula catorce, primera planta.</a:t>
+            </a:r>
+          </a:p>
+          <a:p>
+            <a:pPr algn="l">
+              <a:lnSpc>
+                <a:spcPct val="118000"/>
+              </a:lnSpc>
+              <a:spcBef>
+                <a:spcPts val="0"/>
+              </a:spcBef>
+              <a:spcAft>
+                <a:spcPts val="200"/>
+              </a:spcAft>
+            </a:pPr>
+            <a:r>
+              <a:rPr sz="1050" b="0" i="0">
+                <a:solidFill>
+                  <a:srgbClr val="20242E"/>
+                </a:solidFill>
+                <a:latin typeface="Inter"/>
+              </a:rPr>
+              <a:t>• ¿Cuánto cuesta? ¡Cero euros!</a:t>
+            </a:r>
+          </a:p>
+          <a:p>
+            <a:pPr algn="l">
+              <a:lnSpc>
+                <a:spcPct val="118000"/>
+              </a:lnSpc>
+              <a:spcBef>
+                <a:spcPts val="0"/>
+              </a:spcBef>
+              <a:spcAft>
+                <a:spcPts val="200"/>
+              </a:spcAft>
+            </a:pPr>
+            <a:r>
+              <a:rPr sz="1050" b="0" i="0">
+                <a:solidFill>
+                  <a:srgbClr val="20242E"/>
+                </a:solidFill>
+                <a:latin typeface="Inter"/>
+              </a:rPr>
+              <a:t>• ¿Cuántos somos? Ahora somos dieciocho. Hay sitio para veinte.</a:t>
+            </a:r>
+          </a:p>
+          <a:p>
+            <a:pPr algn="l">
+              <a:lnSpc>
+                <a:spcPct val="118000"/>
+              </a:lnSpc>
+              <a:spcBef>
+                <a:spcPts val="0"/>
+              </a:spcBef>
+              <a:spcAft>
+                <a:spcPts val="200"/>
+              </a:spcAft>
+            </a:pPr>
+            <a:r>
+              <a:rPr sz="1050" b="0" i="0">
+                <a:solidFill>
+                  <a:srgbClr val="20242E"/>
+                </a:solidFill>
+                <a:latin typeface="Inter"/>
+              </a:rPr>
+              <a:t>Este año viajamos por el mundo hispano: España, México, Colombia y Perú. Cada mes, un país y una fiesta.</a:t>
+            </a:r>
+          </a:p>
+          <a:p>
+            <a:pPr algn="l">
+              <a:lnSpc>
+                <a:spcPct val="118000"/>
+              </a:lnSpc>
+              <a:spcBef>
+                <a:spcPts val="0"/>
+              </a:spcBef>
+              <a:spcAft>
+                <a:spcPts val="200"/>
+              </a:spcAft>
+            </a:pPr>
+            <a:r>
+              <a:rPr sz="950" b="0" i="0">
+                <a:solidFill>
+                  <a:srgbClr val="6A6E78"/>
+                </a:solidFill>
+                <a:latin typeface="Inter"/>
+              </a:rPr>
+              <a:t>Escribe a: club.espanol@instituto.be — o habla con la señora Ortega.</a:t>
+            </a:r>
+          </a:p>
+        </p:txBody>
+      </p:sp>
+      <p:sp>
+        <p:nvSpPr>
+          <p:cNvPr id="13" name="Rounded Rectangle 12"/>
+          <p:cNvSpPr/>
+          <p:nvPr/>
+        </p:nvSpPr>
+        <p:spPr>
+          <a:xfrm>
+            <a:off x="6263640" y="1325880"/>
+            <a:ext cx="5468112" cy="1965960"/>
+          </a:xfrm>
+          <a:prstGeom prst="roundRect">
+            <a:avLst>
+              <a:gd name="adj" fmla="val 5500"/>
+            </a:avLst>
+          </a:prstGeom>
+          <a:solidFill>
+            <a:srgbClr val="F3EEE4"/>
+          </a:solidFill>
+          <a:ln w="15240">
+            <a:solidFill>
+              <a:srgbClr val="E4E3DE"/>
+            </a:solidFill>
+          </a:ln>
+          <a:effectLst/>
+          <a:effectLst>
+            <a:outerShdw blurRad="90000" dist="38000" dir="5400000" rotWithShape="0">
+              <a:srgbClr val="20242E">
+                <a:alpha val="22000"/>
+              </a:srgbClr>
+            </a:outerShdw>
+          </a:effectLst>
+        </p:spPr>
+        <p:style>
+          <a:lnRef idx="1">
+            <a:schemeClr val="accent1"/>
+          </a:lnRef>
+          <a:fillRef idx="3">
+            <a:schemeClr val="accent1"/>
+          </a:fillRef>
+          <a:effectRef idx="2">
+            <a:schemeClr val="accent1"/>
+          </a:effectRef>
+          <a:fontRef idx="minor">
+            <a:schemeClr val="lt1"/>
+          </a:fontRef>
+        </p:style>
+        <p:txBody>
+          <a:bodyPr rtlCol="0" anchor="ctr"/>
+          <a:lstStyle/>
+          <a:p>
+            <a:pPr algn="ctr"/>
+          </a:p>
+        </p:txBody>
+      </p:sp>
+      <p:sp>
+        <p:nvSpPr>
+          <p:cNvPr id="14" name="TextBox 13"/>
+          <p:cNvSpPr txBox="1"/>
+          <p:nvPr/>
+        </p:nvSpPr>
+        <p:spPr>
+          <a:xfrm>
+            <a:off x="6446520" y="1417320"/>
+            <a:ext cx="5120640" cy="292608"/>
+          </a:xfrm>
+          <a:prstGeom prst="rect">
+            <a:avLst/>
+          </a:prstGeom>
+          <a:noFill/>
+        </p:spPr>
+        <p:txBody>
+          <a:bodyPr wrap="square" anchor="t" lIns="38100" rIns="38100" tIns="25400" bIns="25400">
+            <a:spAutoFit/>
+          </a:bodyPr>
+          <a:lstStyle/>
+          <a:p>
+            <a:pPr algn="l">
+              <a:lnSpc>
+                <a:spcPct val="106000"/>
+              </a:lnSpc>
+              <a:spcBef>
+                <a:spcPts val="0"/>
+              </a:spcBef>
+              <a:spcAft>
+                <a:spcPts val="200"/>
+              </a:spcAft>
+            </a:pPr>
+            <a:r>
+              <a:rPr sz="1200" b="1" i="0">
+                <a:solidFill>
+                  <a:srgbClr val="157355"/>
+                </a:solidFill>
+                <a:latin typeface="Bricolage Grotesque"/>
+              </a:rPr>
+              <a:t>Escanea — busca el dato</a:t>
+            </a:r>
+          </a:p>
+        </p:txBody>
+      </p:sp>
+      <p:sp>
+        <p:nvSpPr>
+          <p:cNvPr id="15" name="TextBox 14"/>
+          <p:cNvSpPr txBox="1"/>
+          <p:nvPr/>
+        </p:nvSpPr>
+        <p:spPr>
+          <a:xfrm>
+            <a:off x="6446520" y="1755648"/>
+            <a:ext cx="5120640" cy="1463040"/>
+          </a:xfrm>
+          <a:prstGeom prst="rect">
+            <a:avLst/>
+          </a:prstGeom>
+          <a:noFill/>
+        </p:spPr>
+        <p:txBody>
+          <a:bodyPr wrap="square" anchor="t" lIns="38100" rIns="38100" tIns="25400" bIns="25400">
+            <a:spAutoFit/>
+          </a:bodyPr>
+          <a:lstStyle/>
+          <a:p>
+            <a:pPr algn="l">
+              <a:lnSpc>
+                <a:spcPct val="125000"/>
+              </a:lnSpc>
+              <a:spcBef>
+                <a:spcPts val="0"/>
+              </a:spcBef>
+              <a:spcAft>
+                <a:spcPts val="200"/>
+              </a:spcAft>
+            </a:pPr>
+            <a:r>
+              <a:rPr sz="1050" b="0" i="0">
+                <a:solidFill>
+                  <a:srgbClr val="20242E"/>
+                </a:solidFill>
+                <a:latin typeface="Inter"/>
+              </a:rPr>
+              <a:t>1. ¿En qué aula es el club?</a:t>
+            </a:r>
+          </a:p>
+          <a:p>
+            <a:pPr algn="l">
+              <a:lnSpc>
+                <a:spcPct val="125000"/>
+              </a:lnSpc>
+              <a:spcBef>
+                <a:spcPts val="0"/>
+              </a:spcBef>
+              <a:spcAft>
+                <a:spcPts val="200"/>
+              </a:spcAft>
+            </a:pPr>
+            <a:r>
+              <a:rPr sz="1050" b="0" i="0">
+                <a:solidFill>
+                  <a:srgbClr val="20242E"/>
+                </a:solidFill>
+                <a:latin typeface="Inter"/>
+              </a:rPr>
+              <a:t>2. ¿Cuántos alumnos hay ahora en el club?</a:t>
+            </a:r>
+          </a:p>
+          <a:p>
+            <a:pPr algn="l">
+              <a:lnSpc>
+                <a:spcPct val="125000"/>
+              </a:lnSpc>
+              <a:spcBef>
+                <a:spcPts val="0"/>
+              </a:spcBef>
+              <a:spcAft>
+                <a:spcPts val="200"/>
+              </a:spcAft>
+            </a:pPr>
+            <a:r>
+              <a:rPr sz="1050" b="0" i="0">
+                <a:solidFill>
+                  <a:srgbClr val="20242E"/>
+                </a:solidFill>
+                <a:latin typeface="Inter"/>
+              </a:rPr>
+              <a:t>3. ¿Cuánto cuesta? (en cifras)</a:t>
+            </a:r>
+          </a:p>
+          <a:p>
+            <a:pPr algn="l">
+              <a:lnSpc>
+                <a:spcPct val="125000"/>
+              </a:lnSpc>
+              <a:spcBef>
+                <a:spcPts val="0"/>
+              </a:spcBef>
+              <a:spcAft>
+                <a:spcPts val="200"/>
+              </a:spcAft>
+            </a:pPr>
+            <a:r>
+              <a:rPr sz="1050" b="0" i="0">
+                <a:solidFill>
+                  <a:srgbClr val="20242E"/>
+                </a:solidFill>
+                <a:latin typeface="Inter"/>
+              </a:rPr>
+              <a:t>4. ¿Cuántos países visita el club este año?</a:t>
+            </a:r>
+          </a:p>
+        </p:txBody>
+      </p:sp>
+      <p:sp>
+        <p:nvSpPr>
+          <p:cNvPr id="16" name="Rounded Rectangle 15"/>
+          <p:cNvSpPr/>
+          <p:nvPr/>
+        </p:nvSpPr>
+        <p:spPr>
+          <a:xfrm>
+            <a:off x="6263640" y="3429000"/>
+            <a:ext cx="5468112" cy="2057400"/>
+          </a:xfrm>
+          <a:prstGeom prst="roundRect">
+            <a:avLst>
+              <a:gd name="adj" fmla="val 5500"/>
+            </a:avLst>
+          </a:prstGeom>
+          <a:solidFill>
+            <a:srgbClr val="FFFFFF"/>
+          </a:solidFill>
+          <a:ln w="15240">
+            <a:solidFill>
+              <a:srgbClr val="E4E3DE"/>
+            </a:solidFill>
+          </a:ln>
+          <a:effectLst/>
+          <a:effectLst>
+            <a:outerShdw blurRad="90000" dist="38000" dir="5400000" rotWithShape="0">
+              <a:srgbClr val="20242E">
+                <a:alpha val="22000"/>
+              </a:srgbClr>
+            </a:outerShdw>
+          </a:effectLst>
+        </p:spPr>
+        <p:style>
+          <a:lnRef idx="1">
+            <a:schemeClr val="accent1"/>
+          </a:lnRef>
+          <a:fillRef idx="3">
+            <a:schemeClr val="accent1"/>
+          </a:fillRef>
+          <a:effectRef idx="2">
+            <a:schemeClr val="accent1"/>
+          </a:effectRef>
+          <a:fontRef idx="minor">
+            <a:schemeClr val="lt1"/>
+          </a:fontRef>
+        </p:style>
+        <p:txBody>
+          <a:bodyPr rtlCol="0" anchor="ctr"/>
+          <a:lstStyle/>
+          <a:p>
+            <a:pPr algn="ctr"/>
+          </a:p>
+        </p:txBody>
+      </p:sp>
+      <p:sp>
+        <p:nvSpPr>
+          <p:cNvPr id="17" name="TextBox 16"/>
+          <p:cNvSpPr txBox="1"/>
+          <p:nvPr/>
+        </p:nvSpPr>
+        <p:spPr>
+          <a:xfrm>
+            <a:off x="6446520" y="3520440"/>
+            <a:ext cx="5120640" cy="292608"/>
+          </a:xfrm>
+          <a:prstGeom prst="rect">
+            <a:avLst/>
+          </a:prstGeom>
+          <a:noFill/>
+        </p:spPr>
+        <p:txBody>
+          <a:bodyPr wrap="square" anchor="t" lIns="38100" rIns="38100" tIns="25400" bIns="25400">
+            <a:spAutoFit/>
+          </a:bodyPr>
+          <a:lstStyle/>
+          <a:p>
+            <a:pPr algn="l">
+              <a:lnSpc>
+                <a:spcPct val="106000"/>
+              </a:lnSpc>
+              <a:spcBef>
+                <a:spcPts val="0"/>
+              </a:spcBef>
+              <a:spcAft>
+                <a:spcPts val="200"/>
+              </a:spcAft>
+            </a:pPr>
+            <a:r>
+              <a:rPr sz="1200" b="1" i="0">
+                <a:solidFill>
+                  <a:srgbClr val="157355"/>
+                </a:solidFill>
+                <a:latin typeface="Bricolage Grotesque"/>
+              </a:rPr>
+              <a:t>¿Verdadero o falso? — y la prueba</a:t>
+            </a:r>
+          </a:p>
+        </p:txBody>
+      </p:sp>
+      <p:sp>
+        <p:nvSpPr>
+          <p:cNvPr id="18" name="TextBox 17"/>
+          <p:cNvSpPr txBox="1"/>
+          <p:nvPr/>
+        </p:nvSpPr>
+        <p:spPr>
+          <a:xfrm>
+            <a:off x="6446520" y="3858768"/>
+            <a:ext cx="5120640" cy="1554480"/>
+          </a:xfrm>
+          <a:prstGeom prst="rect">
+            <a:avLst/>
+          </a:prstGeom>
+          <a:noFill/>
+        </p:spPr>
+        <p:txBody>
+          <a:bodyPr wrap="square" anchor="t" lIns="38100" rIns="38100" tIns="25400" bIns="25400">
+            <a:spAutoFit/>
+          </a:bodyPr>
+          <a:lstStyle/>
+          <a:p>
+            <a:pPr algn="l">
+              <a:lnSpc>
+                <a:spcPct val="125000"/>
+              </a:lnSpc>
+              <a:spcBef>
+                <a:spcPts val="0"/>
+              </a:spcBef>
+              <a:spcAft>
+                <a:spcPts val="200"/>
+              </a:spcAft>
+            </a:pPr>
+            <a:r>
+              <a:rPr sz="1050" b="0" i="0">
+                <a:solidFill>
+                  <a:srgbClr val="20242E"/>
+                </a:solidFill>
+                <a:latin typeface="Inter"/>
+              </a:rPr>
+              <a:t>1. El club es gratis.</a:t>
+            </a:r>
+          </a:p>
+          <a:p>
+            <a:pPr algn="l">
+              <a:lnSpc>
+                <a:spcPct val="125000"/>
+              </a:lnSpc>
+              <a:spcBef>
+                <a:spcPts val="0"/>
+              </a:spcBef>
+              <a:spcAft>
+                <a:spcPts val="200"/>
+              </a:spcAft>
+            </a:pPr>
+            <a:r>
+              <a:rPr sz="1050" b="0" i="0">
+                <a:solidFill>
+                  <a:srgbClr val="20242E"/>
+                </a:solidFill>
+                <a:latin typeface="Inter"/>
+              </a:rPr>
+              <a:t>2. El club es solo para alumnos que ya hablan español.</a:t>
+            </a:r>
+          </a:p>
+          <a:p>
+            <a:pPr algn="l">
+              <a:lnSpc>
+                <a:spcPct val="125000"/>
+              </a:lnSpc>
+              <a:spcBef>
+                <a:spcPts val="0"/>
+              </a:spcBef>
+              <a:spcAft>
+                <a:spcPts val="200"/>
+              </a:spcAft>
+            </a:pPr>
+            <a:r>
+              <a:rPr sz="1050" b="0" i="0">
+                <a:solidFill>
+                  <a:srgbClr val="20242E"/>
+                </a:solidFill>
+                <a:latin typeface="Inter"/>
+              </a:rPr>
+              <a:t>3. El club se reúne dos días por semana.</a:t>
+            </a:r>
+          </a:p>
+          <a:p>
+            <a:pPr algn="l">
+              <a:lnSpc>
+                <a:spcPct val="125000"/>
+              </a:lnSpc>
+              <a:spcBef>
+                <a:spcPts val="0"/>
+              </a:spcBef>
+              <a:spcAft>
+                <a:spcPts val="200"/>
+              </a:spcAft>
+            </a:pPr>
+            <a:r>
+              <a:rPr sz="1050" b="0" i="0">
+                <a:solidFill>
+                  <a:srgbClr val="20242E"/>
+                </a:solidFill>
+                <a:latin typeface="Inter"/>
+              </a:rPr>
+              <a:t>4. Todavía hay sitio en el club.</a:t>
+            </a:r>
+          </a:p>
+        </p:txBody>
+      </p:sp>
+      <p:sp>
+        <p:nvSpPr>
+          <p:cNvPr id="19" name="Rounded Rectangle 18"/>
+          <p:cNvSpPr/>
+          <p:nvPr/>
+        </p:nvSpPr>
+        <p:spPr>
+          <a:xfrm>
+            <a:off x="457200" y="5596128"/>
+            <a:ext cx="11274552" cy="658368"/>
+          </a:xfrm>
+          <a:prstGeom prst="roundRect">
+            <a:avLst>
+              <a:gd name="adj" fmla="val 6000"/>
+            </a:avLst>
+          </a:prstGeom>
+          <a:solidFill>
+            <a:srgbClr val="E4F4EE"/>
+          </a:solidFill>
+          <a:ln w="19050">
+            <a:solidFill>
+              <a:srgbClr val="1E9E74"/>
+            </a:solidFill>
+          </a:ln>
+          <a:effectLst/>
+        </p:spPr>
+        <p:style>
+          <a:lnRef idx="1">
+            <a:schemeClr val="accent1"/>
+          </a:lnRef>
+          <a:fillRef idx="3">
+            <a:schemeClr val="accent1"/>
+          </a:fillRef>
+          <a:effectRef idx="2">
+            <a:schemeClr val="accent1"/>
+          </a:effectRef>
+          <a:fontRef idx="minor">
+            <a:schemeClr val="lt1"/>
+          </a:fontRef>
+        </p:style>
+        <p:txBody>
+          <a:bodyPr rtlCol="0" anchor="ctr" wrap="square" lIns="127000" rIns="127000" tIns="139700" bIns="76200"/>
+          <a:lstStyle/>
+          <a:p>
+            <a:pPr algn="ctr">
+              <a:lnSpc>
+                <a:spcPct val="102000"/>
+              </a:lnSpc>
+              <a:spcBef>
+                <a:spcPts val="0"/>
+              </a:spcBef>
+              <a:spcAft>
+                <a:spcPts val="300"/>
+              </a:spcAft>
+            </a:pPr>
+            <a:r>
+              <a:rPr sz="1200" b="0" i="0">
+                <a:solidFill>
+                  <a:srgbClr val="157355"/>
+                </a:solidFill>
+                <a:latin typeface="Inter"/>
+              </a:rPr>
+              <a:t>Escanear: 1) 14 · 2) 18 · 3) 0 · 4) 4</a:t>
+            </a:r>
+          </a:p>
+          <a:p>
+            <a:pPr>
+              <a:lnSpc>
+                <a:spcPct val="102000"/>
+              </a:lnSpc>
+              <a:spcBef>
+                <a:spcPts val="0"/>
+              </a:spcBef>
+              <a:spcAft>
+                <a:spcPts val="300"/>
+              </a:spcAft>
+            </a:pPr>
+            <a:r>
+              <a:rPr sz="1200" b="0" i="0">
+                <a:solidFill>
+                  <a:srgbClr val="157355"/>
+                </a:solidFill>
+                <a:latin typeface="Inter"/>
+              </a:rPr>
+              <a:t>1) V — «¡Cero euros!»</a:t>
+            </a:r>
+          </a:p>
+          <a:p>
+            <a:pPr>
+              <a:lnSpc>
+                <a:spcPct val="102000"/>
+              </a:lnSpc>
+              <a:spcBef>
+                <a:spcPts val="0"/>
+              </a:spcBef>
+              <a:spcAft>
+                <a:spcPts val="300"/>
+              </a:spcAft>
+            </a:pPr>
+            <a:r>
+              <a:rPr sz="1200" b="0" i="0">
+                <a:solidFill>
+                  <a:srgbClr val="157355"/>
+                </a:solidFill>
+                <a:latin typeface="Inter"/>
+              </a:rPr>
+              <a:t>2) F — «¿O cero español? ¡No importa!»</a:t>
+            </a:r>
+          </a:p>
+          <a:p>
+            <a:pPr>
+              <a:lnSpc>
+                <a:spcPct val="102000"/>
+              </a:lnSpc>
+              <a:spcBef>
+                <a:spcPts val="0"/>
+              </a:spcBef>
+              <a:spcAft>
+                <a:spcPts val="300"/>
+              </a:spcAft>
+            </a:pPr>
+            <a:r>
+              <a:rPr sz="1200" b="0" i="0">
+                <a:solidFill>
+                  <a:srgbClr val="157355"/>
+                </a:solidFill>
+                <a:latin typeface="Inter"/>
+              </a:rPr>
+              <a:t>3) V — «Los martes y los jueves»</a:t>
+            </a:r>
+          </a:p>
+          <a:p>
+            <a:pPr>
+              <a:lnSpc>
+                <a:spcPct val="102000"/>
+              </a:lnSpc>
+              <a:spcBef>
+                <a:spcPts val="0"/>
+              </a:spcBef>
+              <a:spcAft>
+                <a:spcPts val="300"/>
+              </a:spcAft>
+            </a:pPr>
+            <a:r>
+              <a:rPr sz="1200" b="0" i="0">
+                <a:solidFill>
+                  <a:srgbClr val="157355"/>
+                </a:solidFill>
+                <a:latin typeface="Inter"/>
+              </a:rPr>
+              <a:t>4) V — «Hay sitio para veinte»</a:t>
+            </a:r>
+          </a:p>
+        </p:txBody>
+      </p:sp>
+      <p:sp>
+        <p:nvSpPr>
+          <p:cNvPr id="20" name="Rounded Rectangle 19"/>
+          <p:cNvSpPr/>
+          <p:nvPr/>
+        </p:nvSpPr>
+        <p:spPr>
+          <a:xfrm>
+            <a:off x="594360" y="5468112"/>
+            <a:ext cx="791870" cy="292608"/>
+          </a:xfrm>
+          <a:prstGeom prst="roundRect">
+            <a:avLst>
+              <a:gd name="adj" fmla="val 50000"/>
+            </a:avLst>
+          </a:prstGeom>
+          <a:solidFill>
+            <a:srgbClr val="1E9E74"/>
+          </a:solidFill>
+          <a:ln>
+            <a:noFill/>
+          </a:ln>
+          <a:effectLst/>
+        </p:spPr>
+        <p:style>
+          <a:lnRef idx="1">
+            <a:schemeClr val="accent1"/>
+          </a:lnRef>
+          <a:fillRef idx="3">
+            <a:schemeClr val="accent1"/>
+          </a:fillRef>
+          <a:effectRef idx="2">
+            <a:schemeClr val="accent1"/>
+          </a:effectRef>
+          <a:fontRef idx="minor">
+            <a:schemeClr val="lt1"/>
+          </a:fontRef>
+        </p:style>
+        <p:txBody>
+          <a:bodyPr rtlCol="0" anchor="ctr" wrap="none" lIns="88900" rIns="88900" tIns="12700" bIns="12700"/>
+          <a:lstStyle/>
+          <a:p>
+            <a:pPr algn="ctr"/>
+            <a:r>
+              <a:rPr sz="950" b="1">
+                <a:solidFill>
+                  <a:srgbClr val="FFFFFF"/>
+                </a:solidFill>
+                <a:latin typeface="Inter"/>
+              </a:rPr>
+              <a:t>SOLUCIÓN</a:t>
+            </a:r>
+          </a:p>
+        </p:txBody>
+      </p:sp>
+      <p:sp>
+        <p:nvSpPr>
+          <p:cNvPr id="21" name="Rectangle 20"/>
+          <p:cNvSpPr/>
+          <p:nvPr/>
+        </p:nvSpPr>
+        <p:spPr>
+          <a:xfrm>
+            <a:off x="0" y="6547104"/>
+            <a:ext cx="12191695" cy="310896"/>
+          </a:xfrm>
+          <a:prstGeom prst="rect">
+            <a:avLst/>
+          </a:prstGeom>
+          <a:solidFill>
+            <a:srgbClr val="F3EEE4"/>
+          </a:solidFill>
+          <a:ln>
+            <a:noFill/>
+          </a:ln>
+          <a:effectLst/>
+        </p:spPr>
+        <p:style>
+          <a:lnRef idx="1">
+            <a:schemeClr val="accent1"/>
+          </a:lnRef>
+          <a:fillRef idx="3">
+            <a:schemeClr val="accent1"/>
+          </a:fillRef>
+          <a:effectRef idx="2">
+            <a:schemeClr val="accent1"/>
+          </a:effectRef>
+          <a:fontRef idx="minor">
+            <a:schemeClr val="lt1"/>
+          </a:fontRef>
+        </p:style>
+        <p:txBody>
+          <a:bodyPr rtlCol="0" anchor="ctr"/>
+          <a:lstStyle/>
+          <a:p>
+            <a:pPr algn="ctr"/>
+          </a:p>
+        </p:txBody>
+      </p:sp>
+      <p:sp>
+        <p:nvSpPr>
+          <p:cNvPr id="22" name="TextBox 21"/>
+          <p:cNvSpPr txBox="1"/>
+          <p:nvPr/>
+        </p:nvSpPr>
+        <p:spPr>
+          <a:xfrm>
+            <a:off x="411480" y="6565392"/>
+            <a:ext cx="5486400" cy="274320"/>
+          </a:xfrm>
+          <a:prstGeom prst="rect">
+            <a:avLst/>
+          </a:prstGeom>
+          <a:noFill/>
+        </p:spPr>
+        <p:txBody>
+          <a:bodyPr wrap="square" anchor="ctr" lIns="38100" rIns="38100" tIns="25400" bIns="25400">
+            <a:spAutoFit/>
+          </a:bodyPr>
+          <a:lstStyle/>
+          <a:p>
+            <a:pPr algn="l">
+              <a:lnSpc>
+                <a:spcPct val="106000"/>
+              </a:lnSpc>
+              <a:spcBef>
+                <a:spcPts val="0"/>
+              </a:spcBef>
+              <a:spcAft>
+                <a:spcPts val="200"/>
+              </a:spcAft>
+            </a:pPr>
+            <a:r>
+              <a:rPr sz="1100" b="1" i="0">
+                <a:solidFill>
+                  <a:srgbClr val="1E9E74"/>
+                </a:solidFill>
+                <a:latin typeface="Inter"/>
+              </a:rPr>
+              <a:t>● </a:t>
+            </a:r>
+            <a:r>
+              <a:rPr sz="950" b="0" i="0">
+                <a:solidFill>
+                  <a:srgbClr val="6A6E78"/>
+                </a:solidFill>
+                <a:latin typeface="Inter"/>
+              </a:rPr>
+              <a:t>U0 · ¡EMPEZAMOS!   ·   C5 · A1 · La Ruta</a:t>
+            </a:r>
+          </a:p>
+        </p:txBody>
+      </p:sp>
+      <p:sp>
+        <p:nvSpPr>
+          <p:cNvPr id="23" name="TextBox 22"/>
+          <p:cNvSpPr txBox="1"/>
+          <p:nvPr/>
+        </p:nvSpPr>
+        <p:spPr>
+          <a:xfrm>
+            <a:off x="8686800" y="6565392"/>
+            <a:ext cx="3063240" cy="274320"/>
+          </a:xfrm>
+          <a:prstGeom prst="rect">
+            <a:avLst/>
+          </a:prstGeom>
+          <a:noFill/>
+        </p:spPr>
+        <p:txBody>
+          <a:bodyPr wrap="square" anchor="ctr" lIns="38100" rIns="38100" tIns="25400" bIns="25400">
+            <a:spAutoFit/>
+          </a:bodyPr>
+          <a:lstStyle/>
+          <a:p>
+            <a:pPr algn="r">
+              <a:lnSpc>
+                <a:spcPct val="106000"/>
+              </a:lnSpc>
+              <a:spcBef>
+                <a:spcPts val="0"/>
+              </a:spcBef>
+              <a:spcAft>
+                <a:spcPts val="200"/>
+              </a:spcAft>
+            </a:pPr>
+            <a:r>
+              <a:rPr sz="900" b="0" i="1">
+                <a:solidFill>
+                  <a:srgbClr val="6A6E78"/>
+                </a:solidFill>
+                <a:latin typeface="Inter"/>
+              </a:rPr>
+              <a:t>Leerlingenversie — klik onthult</a:t>
+            </a:r>
+          </a:p>
+        </p:txBody>
+      </p:sp>
+      <p:sp>
+        <p:nvSpPr>
+          <p:cNvPr id="24" name="TextBox 23"/>
+          <p:cNvSpPr txBox="1"/>
+          <p:nvPr/>
+        </p:nvSpPr>
+        <p:spPr>
+          <a:xfrm>
+            <a:off x="11475720" y="6565392"/>
+            <a:ext cx="457200" cy="274320"/>
+          </a:xfrm>
+          <a:prstGeom prst="rect">
+            <a:avLst/>
+          </a:prstGeom>
+          <a:noFill/>
+        </p:spPr>
+        <p:txBody>
+          <a:bodyPr wrap="square" anchor="ctr" lIns="38100" rIns="38100" tIns="25400" bIns="25400">
+            <a:spAutoFit/>
+          </a:bodyPr>
+          <a:lstStyle/>
+          <a:p>
+            <a:pPr algn="r">
+              <a:lnSpc>
+                <a:spcPct val="106000"/>
+              </a:lnSpc>
+              <a:spcBef>
+                <a:spcPts val="0"/>
+              </a:spcBef>
+              <a:spcAft>
+                <a:spcPts val="200"/>
+              </a:spcAft>
+            </a:pPr>
+            <a:r>
+              <a:rPr sz="950" b="1" i="0">
+                <a:solidFill>
+                  <a:srgbClr val="157355"/>
+                </a:solidFill>
+                <a:latin typeface="Inter"/>
+              </a:rPr>
+              <a:t>18</a:t>
+            </a:r>
+          </a:p>
+        </p:txBody>
+      </p:sp>
+    </p:spTree>
+  </p:cSld>
+  <p:clrMapOvr>
+    <a:masterClrMapping/>
+  </p:clrMapOvr>
+  <p:timing>
+    <p:tnLst>
+      <p:par>
+        <p:cTn id="1" dur="indefinite" restart="never" nodeType="tmRoot">
+          <p:childTnLst>
+            <p:seq concurrent="1" nextAc="seek">
+              <p:cTn id="2" dur="indefinite" nodeType="mainSeq">
+                <p:childTnLst>
+                  <p:par>
+                    <p:cTn id="3" fill="hold">
+                      <p:stCondLst>
+                        <p:cond delay="indefinite"/>
+                      </p:stCondLst>
+                      <p:childTnLst>
+                        <p:par>
+                          <p:cTn id="4" fill="hold">
+                            <p:stCondLst>
+                              <p:cond delay="0"/>
+                            </p:stCondLst>
+                            <p:childTnLst>
+                              <p:par>
+                                <p:cTn id="5" presetID="10" presetClass="entr" presetSubtype="0" fill="hold" grpId="0" nodeType="clickEffect">
+                                  <p:stCondLst>
+                                    <p:cond delay="0"/>
+                                  </p:stCondLst>
+                                  <p:childTnLst>
+                                    <p:set>
+                                      <p:cBhvr>
+                                        <p:cTn id="6" dur="1" fill="hold">
+                                          <p:stCondLst>
+                                            <p:cond delay="0"/>
+                                          </p:stCondLst>
+                                        </p:cTn>
+                                        <p:tgtEl>
+                                          <p:spTgt spid="19"/>
+                                        </p:tgtEl>
+                                        <p:attrNameLst>
+                                          <p:attrName>style.visibility</p:attrName>
+                                        </p:attrNameLst>
+                                      </p:cBhvr>
+                                      <p:to>
+                                        <p:strVal val="visible"/>
+                                      </p:to>
+                                    </p:set>
+                                    <p:animEffect transition="in" filter="fade">
+                                      <p:cBhvr>
+                                        <p:cTn id="7" dur="500"/>
+                                        <p:tgtEl>
+                                          <p:spTgt spid="19"/>
+                                        </p:tgtEl>
+                                      </p:cBhvr>
+                                    </p:animEffect>
+                                  </p:childTnLst>
+                                </p:cTn>
+                              </p:par>
+                            </p:childTnLst>
+                          </p:cTn>
+                        </p:par>
+                      </p:childTnLst>
+                    </p:cTn>
+                  </p:par>
+                  <p:par>
+                    <p:cTn id="8" fill="hold">
+                      <p:stCondLst>
+                        <p:cond delay="indefinite"/>
+                      </p:stCondLst>
+                      <p:childTnLst>
+                        <p:par>
+                          <p:cTn id="9" fill="hold">
+                            <p:stCondLst>
+                              <p:cond delay="0"/>
+                            </p:stCondLst>
+                            <p:childTnLst>
+                              <p:par>
+                                <p:cTn id="10" presetID="10" presetClass="entr" presetSubtype="0" fill="hold" grpId="0" nodeType="clickEffect">
+                                  <p:stCondLst>
+                                    <p:cond delay="0"/>
+                                  </p:stCondLst>
+                                  <p:childTnLst>
+                                    <p:set>
+                                      <p:cBhvr>
+                                        <p:cTn id="11" dur="1" fill="hold">
+                                          <p:stCondLst>
+                                            <p:cond delay="0"/>
+                                          </p:stCondLst>
+                                        </p:cTn>
+                                        <p:tgtEl>
+                                          <p:spTgt spid="20"/>
+                                        </p:tgtEl>
+                                        <p:attrNameLst>
+                                          <p:attrName>style.visibility</p:attrName>
+                                        </p:attrNameLst>
+                                      </p:cBhvr>
+                                      <p:to>
+                                        <p:strVal val="visible"/>
+                                      </p:to>
+                                    </p:set>
+                                    <p:animEffect transition="in" filter="fade">
+                                      <p:cBhvr>
+                                        <p:cTn id="12" dur="500"/>
+                                        <p:tgtEl>
+                                          <p:spTgt spid="20"/>
+                                        </p:tgtEl>
+                                      </p:cBhvr>
+                                    </p:animEffect>
+                                  </p:childTnLst>
+                                </p:cTn>
+                              </p:par>
+                            </p:childTnLst>
+                          </p:cTn>
+                        </p:par>
+                      </p:childTnLst>
+                    </p:cTn>
+                  </p:par>
+                </p:childTnLst>
+              </p:cTn>
+              <p:prevCondLst>
+                <p:cond evt="onPrev" delay="0">
+                  <p:tgtEl>
+                    <p:sldTgt/>
+                  </p:tgtEl>
+                </p:cond>
+              </p:prevCondLst>
+              <p:nextCondLst>
+                <p:cond evt="onNext" delay="0">
+                  <p:tgtEl>
+                    <p:sldTgt/>
+                  </p:tgtEl>
+                </p:cond>
+              </p:nextCondLst>
+            </p:seq>
+          </p:childTnLst>
+        </p:cTn>
+      </p:par>
+    </p:tnLst>
+  </p:timing>
+</p:sld>
+</file>
+
+<file path=ppt/slides/slide19.xml><?xml version="1.0" encoding="utf-8"?>
+<p:sld xmlns:a="http://schemas.openxmlformats.org/drawingml/2006/main" xmlns:p="http://schemas.openxmlformats.org/presentationml/2006/main" xmlns:r="http://schemas.openxmlformats.org/officeDocument/2006/relationships">
+  <p:cSld>
+    <p:spTree>
+      <p:nvGrpSpPr>
+        <p:cNvPr id="1" name=""/>
+        <p:cNvGrpSpPr/>
+        <p:nvPr/>
+      </p:nvGrpSpPr>
+      <p:grpSpPr/>
+      <p:sp>
+        <p:nvSpPr>
+          <p:cNvPr id="2" name="Rectangle 1"/>
+          <p:cNvSpPr/>
+          <p:nvPr/>
+        </p:nvSpPr>
+        <p:spPr>
+          <a:xfrm>
+            <a:off x="0" y="0"/>
+            <a:ext cx="12191695" cy="6858000"/>
+          </a:xfrm>
+          <a:prstGeom prst="rect">
+            <a:avLst/>
+          </a:prstGeom>
+          <a:solidFill>
+            <a:srgbClr val="FCFBF8"/>
+          </a:solidFill>
+          <a:ln>
+            <a:noFill/>
+          </a:ln>
+          <a:effectLst/>
+        </p:spPr>
+        <p:style>
+          <a:lnRef idx="1">
+            <a:schemeClr val="accent1"/>
+          </a:lnRef>
+          <a:fillRef idx="3">
+            <a:schemeClr val="accent1"/>
+          </a:fillRef>
+          <a:effectRef idx="2">
+            <a:schemeClr val="accent1"/>
+          </a:effectRef>
+          <a:fontRef idx="minor">
+            <a:schemeClr val="lt1"/>
+          </a:fontRef>
+        </p:style>
+        <p:txBody>
+          <a:bodyPr rtlCol="0" anchor="ctr"/>
+          <a:lstStyle/>
+          <a:p>
+            <a:pPr algn="ctr"/>
+          </a:p>
+        </p:txBody>
+      </p:sp>
+      <p:sp>
+        <p:nvSpPr>
+          <p:cNvPr id="3" name="Rectangle 2"/>
+          <p:cNvSpPr/>
+          <p:nvPr/>
+        </p:nvSpPr>
+        <p:spPr>
+          <a:xfrm>
+            <a:off x="0" y="0"/>
+            <a:ext cx="12191695" cy="1078992"/>
+          </a:xfrm>
+          <a:prstGeom prst="rect">
+            <a:avLst/>
+          </a:prstGeom>
+          <a:solidFill>
+            <a:srgbClr val="1E9E74"/>
+          </a:solidFill>
+          <a:ln>
+            <a:noFill/>
+          </a:ln>
+          <a:effectLst/>
+        </p:spPr>
+        <p:style>
+          <a:lnRef idx="1">
+            <a:schemeClr val="accent1"/>
+          </a:lnRef>
+          <a:fillRef idx="3">
+            <a:schemeClr val="accent1"/>
+          </a:fillRef>
+          <a:effectRef idx="2">
+            <a:schemeClr val="accent1"/>
+          </a:effectRef>
+          <a:fontRef idx="minor">
+            <a:schemeClr val="lt1"/>
+          </a:fontRef>
+        </p:style>
+        <p:txBody>
+          <a:bodyPr rtlCol="0" anchor="ctr"/>
+          <a:lstStyle/>
+          <a:p>
+            <a:pPr algn="ctr"/>
+          </a:p>
+        </p:txBody>
+      </p:sp>
+      <p:sp>
+        <p:nvSpPr>
+          <p:cNvPr id="4" name="Rectangle 3"/>
+          <p:cNvSpPr/>
+          <p:nvPr/>
+        </p:nvSpPr>
+        <p:spPr>
+          <a:xfrm>
+            <a:off x="0" y="1078992"/>
+            <a:ext cx="12191695" cy="54864"/>
+          </a:xfrm>
+          <a:prstGeom prst="rect">
+            <a:avLst/>
+          </a:prstGeom>
+          <a:solidFill>
+            <a:srgbClr val="157355"/>
+          </a:solidFill>
+          <a:ln>
+            <a:noFill/>
+          </a:ln>
+          <a:effectLst/>
+        </p:spPr>
+        <p:style>
+          <a:lnRef idx="1">
+            <a:schemeClr val="accent1"/>
+          </a:lnRef>
+          <a:fillRef idx="3">
+            <a:schemeClr val="accent1"/>
+          </a:fillRef>
+          <a:effectRef idx="2">
+            <a:schemeClr val="accent1"/>
+          </a:effectRef>
+          <a:fontRef idx="minor">
+            <a:schemeClr val="lt1"/>
+          </a:fontRef>
+        </p:style>
+        <p:txBody>
+          <a:bodyPr rtlCol="0" anchor="ctr"/>
+          <a:lstStyle/>
+          <a:p>
+            <a:pPr algn="ctr"/>
+          </a:p>
+        </p:txBody>
+      </p:sp>
+      <p:sp>
+        <p:nvSpPr>
+          <p:cNvPr id="5" name="Rounded Rectangle 4"/>
+          <p:cNvSpPr/>
+          <p:nvPr/>
+        </p:nvSpPr>
+        <p:spPr>
+          <a:xfrm>
+            <a:off x="502920" y="182880"/>
+            <a:ext cx="1128369" cy="292608"/>
+          </a:xfrm>
+          <a:prstGeom prst="roundRect">
+            <a:avLst>
+              <a:gd name="adj" fmla="val 50000"/>
+            </a:avLst>
+          </a:prstGeom>
+          <a:solidFill>
+            <a:srgbClr val="FFFFFF"/>
+          </a:solidFill>
+          <a:ln>
+            <a:noFill/>
+          </a:ln>
+          <a:effectLst/>
+        </p:spPr>
+        <p:style>
+          <a:lnRef idx="1">
+            <a:schemeClr val="accent1"/>
+          </a:lnRef>
+          <a:fillRef idx="3">
+            <a:schemeClr val="accent1"/>
+          </a:fillRef>
+          <a:effectRef idx="2">
+            <a:schemeClr val="accent1"/>
+          </a:effectRef>
+          <a:fontRef idx="minor">
+            <a:schemeClr val="lt1"/>
+          </a:fontRef>
+        </p:style>
+        <p:txBody>
+          <a:bodyPr rtlCol="0" anchor="ctr" wrap="none" lIns="88900" rIns="88900" tIns="12700" bIns="12700"/>
+          <a:lstStyle/>
+          <a:p>
+            <a:pPr algn="ctr"/>
+            <a:r>
+              <a:rPr sz="1100" b="1">
+                <a:solidFill>
+                  <a:srgbClr val="1E9E74"/>
+                </a:solidFill>
+                <a:latin typeface="Inter"/>
+              </a:rPr>
+              <a:t>§6 · ESCUCHA</a:t>
+            </a:r>
+          </a:p>
+        </p:txBody>
+      </p:sp>
+      <p:sp>
+        <p:nvSpPr>
+          <p:cNvPr id="6" name="TextBox 5"/>
+          <p:cNvSpPr txBox="1"/>
+          <p:nvPr/>
+        </p:nvSpPr>
+        <p:spPr>
+          <a:xfrm>
+            <a:off x="10424160" y="-137160"/>
+            <a:ext cx="1737360" cy="1371600"/>
+          </a:xfrm>
+          <a:prstGeom prst="rect">
+            <a:avLst/>
+          </a:prstGeom>
+          <a:noFill/>
+        </p:spPr>
+        <p:txBody>
+          <a:bodyPr wrap="square" anchor="t" lIns="38100" rIns="38100" tIns="25400" bIns="25400">
+            <a:spAutoFit/>
+          </a:bodyPr>
+          <a:lstStyle/>
+          <a:p>
+            <a:pPr algn="r">
+              <a:lnSpc>
+                <a:spcPct val="106000"/>
+              </a:lnSpc>
+              <a:spcBef>
+                <a:spcPts val="0"/>
+              </a:spcBef>
+              <a:spcAft>
+                <a:spcPts val="200"/>
+              </a:spcAft>
+            </a:pPr>
+            <a:r>
+              <a:rPr sz="8800" b="1" i="0">
+                <a:solidFill>
+                  <a:srgbClr val="FFFFFF"/>
+                </a:solidFill>
+                <a:latin typeface="Bricolage Grotesque"/>
+              </a:rPr>
+              <a:t>6</a:t>
+            </a:r>
+          </a:p>
+        </p:txBody>
+      </p:sp>
+      <p:sp>
+        <p:nvSpPr>
+          <p:cNvPr id="7" name="TextBox 6"/>
+          <p:cNvSpPr txBox="1"/>
+          <p:nvPr/>
+        </p:nvSpPr>
+        <p:spPr>
+          <a:xfrm>
+            <a:off x="457200" y="457200"/>
+            <a:ext cx="9692640" cy="502920"/>
+          </a:xfrm>
+          <a:prstGeom prst="rect">
+            <a:avLst/>
+          </a:prstGeom>
+          <a:noFill/>
+        </p:spPr>
+        <p:txBody>
+          <a:bodyPr wrap="square" anchor="ctr" lIns="38100" rIns="38100" tIns="25400" bIns="25400">
+            <a:spAutoFit/>
+          </a:bodyPr>
+          <a:lstStyle/>
+          <a:p>
+            <a:pPr algn="l">
+              <a:lnSpc>
+                <a:spcPct val="106000"/>
+              </a:lnSpc>
+              <a:spcBef>
+                <a:spcPts val="0"/>
+              </a:spcBef>
+              <a:spcAft>
+                <a:spcPts val="200"/>
+              </a:spcAft>
+            </a:pPr>
+            <a:r>
+              <a:rPr sz="2700" b="1" i="0">
+                <a:solidFill>
+                  <a:srgbClr val="FFFFFF"/>
+                </a:solidFill>
+                <a:latin typeface="Bricolage Grotesque"/>
+              </a:rPr>
+              <a:t>«En la puerta de embarque»</a:t>
+            </a:r>
+          </a:p>
+        </p:txBody>
+      </p:sp>
+      <p:sp>
+        <p:nvSpPr>
+          <p:cNvPr id="8" name="TextBox 7"/>
+          <p:cNvSpPr txBox="1"/>
+          <p:nvPr/>
+        </p:nvSpPr>
+        <p:spPr>
+          <a:xfrm>
+            <a:off x="502920" y="932688"/>
+            <a:ext cx="9692640" cy="274320"/>
+          </a:xfrm>
+          <a:prstGeom prst="rect">
+            <a:avLst/>
+          </a:prstGeom>
+          <a:noFill/>
+        </p:spPr>
+        <p:txBody>
+          <a:bodyPr wrap="square" anchor="t" lIns="38100" rIns="38100" tIns="25400" bIns="25400">
+            <a:spAutoFit/>
+          </a:bodyPr>
+          <a:lstStyle/>
+          <a:p>
+            <a:pPr algn="l">
+              <a:lnSpc>
+                <a:spcPct val="106000"/>
+              </a:lnSpc>
+              <a:spcBef>
+                <a:spcPts val="0"/>
+              </a:spcBef>
+              <a:spcAft>
+                <a:spcPts val="200"/>
+              </a:spcAft>
+            </a:pPr>
+            <a:r>
+              <a:rPr sz="1250" b="0" i="1">
+                <a:solidFill>
+                  <a:srgbClr val="E4F4EE"/>
+                </a:solidFill>
+                <a:latin typeface="Inter"/>
+              </a:rPr>
+              <a:t>Eerst de situatie, dan luisteren. Het transcript komt pas ná de taken.</a:t>
+            </a:r>
+          </a:p>
+        </p:txBody>
+      </p:sp>
+      <p:sp>
+        <p:nvSpPr>
+          <p:cNvPr id="9" name="Rounded Rectangle 8"/>
+          <p:cNvSpPr/>
+          <p:nvPr/>
+        </p:nvSpPr>
+        <p:spPr>
+          <a:xfrm>
+            <a:off x="457200" y="1325880"/>
+            <a:ext cx="11274552" cy="1051560"/>
+          </a:xfrm>
+          <a:prstGeom prst="roundRect">
+            <a:avLst>
+              <a:gd name="adj" fmla="val 5500"/>
+            </a:avLst>
+          </a:prstGeom>
+          <a:solidFill>
+            <a:srgbClr val="E4F4EE"/>
+          </a:solidFill>
+          <a:ln w="15240">
+            <a:solidFill>
+              <a:srgbClr val="1E9E74"/>
+            </a:solidFill>
+          </a:ln>
+          <a:effectLst/>
+          <a:effectLst>
+            <a:outerShdw blurRad="90000" dist="38000" dir="5400000" rotWithShape="0">
+              <a:srgbClr val="20242E">
+                <a:alpha val="22000"/>
+              </a:srgbClr>
+            </a:outerShdw>
+          </a:effectLst>
+        </p:spPr>
+        <p:style>
+          <a:lnRef idx="1">
+            <a:schemeClr val="accent1"/>
+          </a:lnRef>
+          <a:fillRef idx="3">
+            <a:schemeClr val="accent1"/>
+          </a:fillRef>
+          <a:effectRef idx="2">
+            <a:schemeClr val="accent1"/>
+          </a:effectRef>
+          <a:fontRef idx="minor">
+            <a:schemeClr val="lt1"/>
+          </a:fontRef>
+        </p:style>
+        <p:txBody>
+          <a:bodyPr rtlCol="0" anchor="ctr"/>
+          <a:lstStyle/>
+          <a:p>
+            <a:pPr algn="ctr"/>
+          </a:p>
+        </p:txBody>
+      </p:sp>
+      <p:sp>
+        <p:nvSpPr>
+          <p:cNvPr id="10" name="TextBox 9"/>
+          <p:cNvSpPr txBox="1"/>
+          <p:nvPr/>
+        </p:nvSpPr>
+        <p:spPr>
+          <a:xfrm>
+            <a:off x="640080" y="1417320"/>
+            <a:ext cx="10881360" cy="868680"/>
+          </a:xfrm>
+          <a:prstGeom prst="rect">
+            <a:avLst/>
+          </a:prstGeom>
+          <a:noFill/>
+        </p:spPr>
+        <p:txBody>
+          <a:bodyPr wrap="square" anchor="t" lIns="38100" rIns="38100" tIns="25400" bIns="25400">
+            <a:spAutoFit/>
+          </a:bodyPr>
+          <a:lstStyle/>
+          <a:p>
+            <a:pPr algn="l">
+              <a:lnSpc>
+                <a:spcPct val="120000"/>
+              </a:lnSpc>
+              <a:spcBef>
+                <a:spcPts val="0"/>
+              </a:spcBef>
+              <a:spcAft>
+                <a:spcPts val="200"/>
+              </a:spcAft>
+            </a:pPr>
+            <a:r>
+              <a:rPr sz="1100" b="1" i="0">
+                <a:solidFill>
+                  <a:srgbClr val="157355"/>
+                </a:solidFill>
+                <a:latin typeface="Inter"/>
+              </a:rPr>
+              <a:t>¿Dónde? </a:t>
+            </a:r>
+            <a:r>
+              <a:rPr sz="1100" b="0" i="0">
+                <a:solidFill>
+                  <a:srgbClr val="20242E"/>
+                </a:solidFill>
+                <a:latin typeface="Inter"/>
+              </a:rPr>
+              <a:t>El aeropuerto de Barajas, Madrid — puerta B12</a:t>
+            </a:r>
+            <a:r>
+              <a:rPr sz="1100" b="1" i="0">
+                <a:solidFill>
+                  <a:srgbClr val="157355"/>
+                </a:solidFill>
+                <a:latin typeface="Inter"/>
+              </a:rPr>
+              <a:t>     ¿Quién? </a:t>
+            </a:r>
+            <a:r>
+              <a:rPr sz="1100" b="0" i="0">
+                <a:solidFill>
+                  <a:srgbClr val="20242E"/>
+                </a:solidFill>
+                <a:latin typeface="Inter"/>
+              </a:rPr>
+              <a:t>Lucía (de Sevilla) y tú</a:t>
+            </a:r>
+          </a:p>
+          <a:p>
+            <a:pPr algn="l">
+              <a:lnSpc>
+                <a:spcPct val="120000"/>
+              </a:lnSpc>
+              <a:spcBef>
+                <a:spcPts val="0"/>
+              </a:spcBef>
+              <a:spcAft>
+                <a:spcPts val="200"/>
+              </a:spcAft>
+            </a:pPr>
+            <a:r>
+              <a:rPr sz="1100" b="1" i="0">
+                <a:solidFill>
+                  <a:srgbClr val="157355"/>
+                </a:solidFill>
+                <a:latin typeface="Inter"/>
+              </a:rPr>
+              <a:t>¿Qué pasa? </a:t>
+            </a:r>
+            <a:r>
+              <a:rPr sz="1100" b="0" i="0">
+                <a:solidFill>
+                  <a:srgbClr val="20242E"/>
+                </a:solidFill>
+                <a:latin typeface="Inter"/>
+              </a:rPr>
+              <a:t>Esperáis el mismo vuelo y os presentáis</a:t>
+            </a:r>
+          </a:p>
+          <a:p>
+            <a:pPr algn="l">
+              <a:lnSpc>
+                <a:spcPct val="120000"/>
+              </a:lnSpc>
+              <a:spcBef>
+                <a:spcPts val="0"/>
+              </a:spcBef>
+              <a:spcAft>
+                <a:spcPts val="200"/>
+              </a:spcAft>
+            </a:pPr>
+            <a:r>
+              <a:rPr sz="1050" b="1" i="0">
+                <a:solidFill>
+                  <a:srgbClr val="6A6E78"/>
+                </a:solidFill>
+                <a:latin typeface="Inter"/>
+              </a:rPr>
+              <a:t>Palabras clave: </a:t>
+            </a:r>
+            <a:r>
+              <a:rPr sz="1050" b="0" i="1">
+                <a:solidFill>
+                  <a:srgbClr val="20242E"/>
+                </a:solidFill>
+                <a:latin typeface="Inter"/>
+              </a:rPr>
+              <a:t>¿Cómo te llamas? · Soy de… · ¿Cómo se escribe?</a:t>
+            </a:r>
+          </a:p>
+        </p:txBody>
+      </p:sp>
+      <p:sp>
+        <p:nvSpPr>
+          <p:cNvPr id="11" name="Rounded Rectangle 10"/>
+          <p:cNvSpPr/>
+          <p:nvPr/>
+        </p:nvSpPr>
+        <p:spPr>
+          <a:xfrm>
+            <a:off x="457200" y="2514600"/>
+            <a:ext cx="5577840" cy="2971800"/>
+          </a:xfrm>
+          <a:prstGeom prst="roundRect">
+            <a:avLst>
+              <a:gd name="adj" fmla="val 5500"/>
+            </a:avLst>
+          </a:prstGeom>
+          <a:solidFill>
+            <a:srgbClr val="FFFFFF"/>
+          </a:solidFill>
+          <a:ln w="15240">
+            <a:solidFill>
+              <a:srgbClr val="E4E3DE"/>
+            </a:solidFill>
+          </a:ln>
+          <a:effectLst/>
+          <a:effectLst>
+            <a:outerShdw blurRad="90000" dist="38000" dir="5400000" rotWithShape="0">
+              <a:srgbClr val="20242E">
+                <a:alpha val="22000"/>
+              </a:srgbClr>
+            </a:outerShdw>
+          </a:effectLst>
+        </p:spPr>
+        <p:style>
+          <a:lnRef idx="1">
+            <a:schemeClr val="accent1"/>
+          </a:lnRef>
+          <a:fillRef idx="3">
+            <a:schemeClr val="accent1"/>
+          </a:fillRef>
+          <a:effectRef idx="2">
+            <a:schemeClr val="accent1"/>
+          </a:effectRef>
+          <a:fontRef idx="minor">
+            <a:schemeClr val="lt1"/>
+          </a:fontRef>
+        </p:style>
+        <p:txBody>
+          <a:bodyPr rtlCol="0" anchor="ctr"/>
+          <a:lstStyle/>
+          <a:p>
+            <a:pPr algn="ctr"/>
+          </a:p>
+        </p:txBody>
+      </p:sp>
+      <p:sp>
+        <p:nvSpPr>
+          <p:cNvPr id="12" name="TextBox 11"/>
+          <p:cNvSpPr txBox="1"/>
+          <p:nvPr/>
+        </p:nvSpPr>
+        <p:spPr>
+          <a:xfrm>
+            <a:off x="640080" y="2606040"/>
+            <a:ext cx="5212080" cy="292608"/>
+          </a:xfrm>
+          <a:prstGeom prst="rect">
+            <a:avLst/>
+          </a:prstGeom>
+          <a:noFill/>
+        </p:spPr>
+        <p:txBody>
+          <a:bodyPr wrap="square" anchor="t" lIns="38100" rIns="38100" tIns="25400" bIns="25400">
+            <a:spAutoFit/>
+          </a:bodyPr>
+          <a:lstStyle/>
+          <a:p>
+            <a:pPr algn="l">
+              <a:lnSpc>
+                <a:spcPct val="106000"/>
+              </a:lnSpc>
+              <a:spcBef>
+                <a:spcPts val="0"/>
+              </a:spcBef>
+              <a:spcAft>
+                <a:spcPts val="200"/>
+              </a:spcAft>
+            </a:pPr>
+            <a:r>
+              <a:rPr sz="1200" b="1" i="0">
+                <a:solidFill>
+                  <a:srgbClr val="157355"/>
+                </a:solidFill>
+                <a:latin typeface="Bricolage Grotesque"/>
+              </a:rPr>
+              <a:t>Escucha con detalle</a:t>
+            </a:r>
+          </a:p>
+        </p:txBody>
+      </p:sp>
+      <p:sp>
+        <p:nvSpPr>
+          <p:cNvPr id="13" name="TextBox 12"/>
+          <p:cNvSpPr txBox="1"/>
+          <p:nvPr/>
+        </p:nvSpPr>
+        <p:spPr>
+          <a:xfrm>
+            <a:off x="640080" y="2944368"/>
+            <a:ext cx="5212080" cy="2377440"/>
+          </a:xfrm>
+          <a:prstGeom prst="rect">
+            <a:avLst/>
+          </a:prstGeom>
+          <a:noFill/>
+        </p:spPr>
+        <p:txBody>
+          <a:bodyPr wrap="square" anchor="t" lIns="38100" rIns="38100" tIns="25400" bIns="25400">
+            <a:spAutoFit/>
+          </a:bodyPr>
+          <a:lstStyle/>
+          <a:p>
+            <a:pPr algn="l">
+              <a:lnSpc>
+                <a:spcPct val="135000"/>
+              </a:lnSpc>
+              <a:spcBef>
+                <a:spcPts val="0"/>
+              </a:spcBef>
+              <a:spcAft>
+                <a:spcPts val="200"/>
+              </a:spcAft>
+            </a:pPr>
+            <a:r>
+              <a:rPr sz="1050" b="0" i="0">
+                <a:solidFill>
+                  <a:srgbClr val="20242E"/>
+                </a:solidFill>
+                <a:latin typeface="Inter"/>
+              </a:rPr>
+              <a:t>1. ¿Cuál es la puerta de embarque?</a:t>
+            </a:r>
+          </a:p>
+          <a:p>
+            <a:pPr algn="l">
+              <a:lnSpc>
+                <a:spcPct val="135000"/>
+              </a:lnSpc>
+              <a:spcBef>
+                <a:spcPts val="0"/>
+              </a:spcBef>
+              <a:spcAft>
+                <a:spcPts val="200"/>
+              </a:spcAft>
+            </a:pPr>
+            <a:r>
+              <a:rPr sz="1050" b="0" i="0">
+                <a:solidFill>
+                  <a:srgbClr val="20242E"/>
+                </a:solidFill>
+                <a:latin typeface="Inter"/>
+              </a:rPr>
+              <a:t>2. ¿De dónde es Lucía?</a:t>
+            </a:r>
+          </a:p>
+          <a:p>
+            <a:pPr algn="l">
+              <a:lnSpc>
+                <a:spcPct val="135000"/>
+              </a:lnSpc>
+              <a:spcBef>
+                <a:spcPts val="0"/>
+              </a:spcBef>
+              <a:spcAft>
+                <a:spcPts val="200"/>
+              </a:spcAft>
+            </a:pPr>
+            <a:r>
+              <a:rPr sz="1050" b="0" i="0">
+                <a:solidFill>
+                  <a:srgbClr val="20242E"/>
+                </a:solidFill>
+                <a:latin typeface="Inter"/>
+              </a:rPr>
+              <a:t>3. ¿Cuántos años tiene Sam?</a:t>
+            </a:r>
+          </a:p>
+          <a:p>
+            <a:pPr algn="l">
+              <a:lnSpc>
+                <a:spcPct val="135000"/>
+              </a:lnSpc>
+              <a:spcBef>
+                <a:spcPts val="0"/>
+              </a:spcBef>
+              <a:spcAft>
+                <a:spcPts val="200"/>
+              </a:spcAft>
+            </a:pPr>
+            <a:r>
+              <a:rPr sz="1050" b="0" i="0">
+                <a:solidFill>
+                  <a:srgbClr val="20242E"/>
+                </a:solidFill>
+                <a:latin typeface="Inter"/>
+              </a:rPr>
+              <a:t>4. ¿Cuántos años tiene Lucía?</a:t>
+            </a:r>
+          </a:p>
+          <a:p>
+            <a:pPr algn="l">
+              <a:lnSpc>
+                <a:spcPct val="135000"/>
+              </a:lnSpc>
+              <a:spcBef>
+                <a:spcPts val="0"/>
+              </a:spcBef>
+              <a:spcAft>
+                <a:spcPts val="200"/>
+              </a:spcAft>
+            </a:pPr>
+            <a:r>
+              <a:rPr sz="1050" b="0" i="0">
+                <a:solidFill>
+                  <a:srgbClr val="20242E"/>
+                </a:solidFill>
+                <a:latin typeface="Inter"/>
+              </a:rPr>
+              <a:t>5. ¿A qué hora sale el vuelo?</a:t>
+            </a:r>
+          </a:p>
+        </p:txBody>
+      </p:sp>
+      <p:sp>
+        <p:nvSpPr>
+          <p:cNvPr id="14" name="Rounded Rectangle 13"/>
+          <p:cNvSpPr/>
+          <p:nvPr/>
+        </p:nvSpPr>
+        <p:spPr>
+          <a:xfrm>
+            <a:off x="6263640" y="2514600"/>
+            <a:ext cx="5468112" cy="2971800"/>
+          </a:xfrm>
+          <a:prstGeom prst="roundRect">
+            <a:avLst>
+              <a:gd name="adj" fmla="val 5500"/>
+            </a:avLst>
+          </a:prstGeom>
+          <a:solidFill>
+            <a:srgbClr val="F3EEE4"/>
+          </a:solidFill>
+          <a:ln w="15240">
+            <a:solidFill>
+              <a:srgbClr val="E4E3DE"/>
+            </a:solidFill>
+          </a:ln>
+          <a:effectLst/>
+          <a:effectLst>
+            <a:outerShdw blurRad="90000" dist="38000" dir="5400000" rotWithShape="0">
+              <a:srgbClr val="20242E">
+                <a:alpha val="22000"/>
+              </a:srgbClr>
+            </a:outerShdw>
+          </a:effectLst>
+        </p:spPr>
+        <p:style>
+          <a:lnRef idx="1">
+            <a:schemeClr val="accent1"/>
+          </a:lnRef>
+          <a:fillRef idx="3">
+            <a:schemeClr val="accent1"/>
+          </a:fillRef>
+          <a:effectRef idx="2">
+            <a:schemeClr val="accent1"/>
+          </a:effectRef>
+          <a:fontRef idx="minor">
+            <a:schemeClr val="lt1"/>
+          </a:fontRef>
+        </p:style>
+        <p:txBody>
+          <a:bodyPr rtlCol="0" anchor="ctr"/>
+          <a:lstStyle/>
+          <a:p>
+            <a:pPr algn="ctr"/>
+          </a:p>
+        </p:txBody>
+      </p:sp>
+      <p:sp>
+        <p:nvSpPr>
+          <p:cNvPr id="15" name="TextBox 14"/>
+          <p:cNvSpPr txBox="1"/>
+          <p:nvPr/>
+        </p:nvSpPr>
+        <p:spPr>
+          <a:xfrm>
+            <a:off x="6446520" y="2606040"/>
+            <a:ext cx="5120640" cy="292608"/>
+          </a:xfrm>
+          <a:prstGeom prst="rect">
+            <a:avLst/>
+          </a:prstGeom>
+          <a:noFill/>
+        </p:spPr>
+        <p:txBody>
+          <a:bodyPr wrap="square" anchor="t" lIns="38100" rIns="38100" tIns="25400" bIns="25400">
+            <a:spAutoFit/>
+          </a:bodyPr>
+          <a:lstStyle/>
+          <a:p>
+            <a:pPr algn="l">
+              <a:lnSpc>
+                <a:spcPct val="106000"/>
+              </a:lnSpc>
+              <a:spcBef>
+                <a:spcPts val="0"/>
+              </a:spcBef>
+              <a:spcAft>
+                <a:spcPts val="200"/>
+              </a:spcAft>
+            </a:pPr>
+            <a:r>
+              <a:rPr sz="1200" b="1" i="0">
+                <a:solidFill>
+                  <a:srgbClr val="157355"/>
+                </a:solidFill>
+                <a:latin typeface="Bricolage Grotesque"/>
+              </a:rPr>
+              <a:t>¿Verdadero o falso? — y la prueba</a:t>
+            </a:r>
+          </a:p>
+        </p:txBody>
+      </p:sp>
+      <p:sp>
+        <p:nvSpPr>
+          <p:cNvPr id="16" name="TextBox 15"/>
+          <p:cNvSpPr txBox="1"/>
+          <p:nvPr/>
+        </p:nvSpPr>
+        <p:spPr>
+          <a:xfrm>
+            <a:off x="6446520" y="2944368"/>
+            <a:ext cx="5120640" cy="1463040"/>
+          </a:xfrm>
+          <a:prstGeom prst="rect">
+            <a:avLst/>
+          </a:prstGeom>
+          <a:noFill/>
+        </p:spPr>
+        <p:txBody>
+          <a:bodyPr wrap="square" anchor="t" lIns="38100" rIns="38100" tIns="25400" bIns="25400">
+            <a:spAutoFit/>
+          </a:bodyPr>
+          <a:lstStyle/>
+          <a:p>
+            <a:pPr algn="l">
+              <a:lnSpc>
+                <a:spcPct val="135000"/>
+              </a:lnSpc>
+              <a:spcBef>
+                <a:spcPts val="0"/>
+              </a:spcBef>
+              <a:spcAft>
+                <a:spcPts val="200"/>
+              </a:spcAft>
+            </a:pPr>
+            <a:r>
+              <a:rPr sz="1050" b="0" i="0">
+                <a:solidFill>
+                  <a:srgbClr val="20242E"/>
+                </a:solidFill>
+                <a:latin typeface="Inter"/>
+              </a:rPr>
+              <a:t>1. Sam habla dos lenguas.</a:t>
+            </a:r>
+          </a:p>
+          <a:p>
+            <a:pPr algn="l">
+              <a:lnSpc>
+                <a:spcPct val="135000"/>
+              </a:lnSpc>
+              <a:spcBef>
+                <a:spcPts val="0"/>
+              </a:spcBef>
+              <a:spcAft>
+                <a:spcPts val="200"/>
+              </a:spcAft>
+            </a:pPr>
+            <a:r>
+              <a:rPr sz="1050" b="0" i="0">
+                <a:solidFill>
+                  <a:srgbClr val="20242E"/>
+                </a:solidFill>
+                <a:latin typeface="Inter"/>
+              </a:rPr>
+              <a:t>2. Lucía es de Madrid.</a:t>
+            </a:r>
+          </a:p>
+          <a:p>
+            <a:pPr algn="l">
+              <a:lnSpc>
+                <a:spcPct val="135000"/>
+              </a:lnSpc>
+              <a:spcBef>
+                <a:spcPts val="0"/>
+              </a:spcBef>
+              <a:spcAft>
+                <a:spcPts val="200"/>
+              </a:spcAft>
+            </a:pPr>
+            <a:r>
+              <a:rPr sz="1050" b="0" i="0">
+                <a:solidFill>
+                  <a:srgbClr val="20242E"/>
+                </a:solidFill>
+                <a:latin typeface="Inter"/>
+              </a:rPr>
+              <a:t>3. Sam deletrea su nombre.</a:t>
+            </a:r>
+          </a:p>
+        </p:txBody>
+      </p:sp>
+      <p:sp>
+        <p:nvSpPr>
+          <p:cNvPr id="17" name="TextBox 16"/>
+          <p:cNvSpPr txBox="1"/>
+          <p:nvPr/>
+        </p:nvSpPr>
+        <p:spPr>
+          <a:xfrm>
+            <a:off x="6446520" y="4572000"/>
+            <a:ext cx="5120640" cy="822960"/>
+          </a:xfrm>
+          <a:prstGeom prst="rect">
+            <a:avLst/>
+          </a:prstGeom>
+          <a:noFill/>
+        </p:spPr>
+        <p:txBody>
+          <a:bodyPr wrap="square" anchor="t" lIns="38100" rIns="38100" tIns="25400" bIns="25400">
+            <a:spAutoFit/>
+          </a:bodyPr>
+          <a:lstStyle/>
+          <a:p>
+            <a:pPr algn="l">
+              <a:lnSpc>
+                <a:spcPct val="120000"/>
+              </a:lnSpc>
+              <a:spcBef>
+                <a:spcPts val="0"/>
+              </a:spcBef>
+              <a:spcAft>
+                <a:spcPts val="200"/>
+              </a:spcAft>
+            </a:pPr>
+            <a:r>
+              <a:rPr sz="1050" b="1" i="0">
+                <a:solidFill>
+                  <a:srgbClr val="157355"/>
+                </a:solidFill>
+                <a:latin typeface="Inter"/>
+              </a:rPr>
+              <a:t>Tu reacción: </a:t>
+            </a:r>
+            <a:r>
+              <a:rPr sz="1000" b="0" i="0">
+                <a:solidFill>
+                  <a:srgbClr val="20242E"/>
+                </a:solidFill>
+                <a:latin typeface="Inter"/>
+              </a:rPr>
+              <a:t>Lucía te pregunta: «¿Y tú, cómo te llamas y de dónde eres?» Contesta en tres frases: nombre · origen · edad.</a:t>
+            </a:r>
+          </a:p>
+        </p:txBody>
+      </p:sp>
+      <p:sp>
+        <p:nvSpPr>
+          <p:cNvPr id="18" name="Rounded Rectangle 17"/>
+          <p:cNvSpPr/>
+          <p:nvPr/>
+        </p:nvSpPr>
+        <p:spPr>
+          <a:xfrm>
+            <a:off x="457200" y="5596128"/>
+            <a:ext cx="11274552" cy="658368"/>
+          </a:xfrm>
+          <a:prstGeom prst="roundRect">
+            <a:avLst>
+              <a:gd name="adj" fmla="val 6000"/>
+            </a:avLst>
+          </a:prstGeom>
+          <a:solidFill>
+            <a:srgbClr val="E4F4EE"/>
+          </a:solidFill>
+          <a:ln w="19050">
+            <a:solidFill>
+              <a:srgbClr val="1E9E74"/>
+            </a:solidFill>
+          </a:ln>
+          <a:effectLst/>
+        </p:spPr>
+        <p:style>
+          <a:lnRef idx="1">
+            <a:schemeClr val="accent1"/>
+          </a:lnRef>
+          <a:fillRef idx="3">
+            <a:schemeClr val="accent1"/>
+          </a:fillRef>
+          <a:effectRef idx="2">
+            <a:schemeClr val="accent1"/>
+          </a:effectRef>
+          <a:fontRef idx="minor">
+            <a:schemeClr val="lt1"/>
+          </a:fontRef>
+        </p:style>
+        <p:txBody>
+          <a:bodyPr rtlCol="0" anchor="ctr" wrap="square" lIns="127000" rIns="127000" tIns="139700" bIns="76200"/>
+          <a:lstStyle/>
+          <a:p>
+            <a:pPr algn="ctr">
+              <a:lnSpc>
+                <a:spcPct val="102000"/>
+              </a:lnSpc>
+              <a:spcBef>
+                <a:spcPts val="0"/>
+              </a:spcBef>
+              <a:spcAft>
+                <a:spcPts val="300"/>
+              </a:spcAft>
+            </a:pPr>
+            <a:r>
+              <a:rPr sz="1200" b="0" i="0">
+                <a:solidFill>
+                  <a:srgbClr val="157355"/>
+                </a:solidFill>
+                <a:latin typeface="Inter"/>
+              </a:rPr>
+              <a:t>Detalle: 1) B12 · 2) De Sevilla · 3) 16 · 4) 17 · 5) A las once</a:t>
+            </a:r>
+          </a:p>
+          <a:p>
+            <a:pPr>
+              <a:lnSpc>
+                <a:spcPct val="102000"/>
+              </a:lnSpc>
+              <a:spcBef>
+                <a:spcPts val="0"/>
+              </a:spcBef>
+              <a:spcAft>
+                <a:spcPts val="300"/>
+              </a:spcAft>
+            </a:pPr>
+            <a:r>
+              <a:rPr sz="1200" b="0" i="0">
+                <a:solidFill>
+                  <a:srgbClr val="157355"/>
+                </a:solidFill>
+                <a:latin typeface="Inter"/>
+              </a:rPr>
+              <a:t>1) V — «Hablo neerlandés y un poco de español»</a:t>
+            </a:r>
+          </a:p>
+          <a:p>
+            <a:pPr>
+              <a:lnSpc>
+                <a:spcPct val="102000"/>
+              </a:lnSpc>
+              <a:spcBef>
+                <a:spcPts val="0"/>
+              </a:spcBef>
+              <a:spcAft>
+                <a:spcPts val="300"/>
+              </a:spcAft>
+            </a:pPr>
+            <a:r>
+              <a:rPr sz="1200" b="0" i="0">
+                <a:solidFill>
+                  <a:srgbClr val="157355"/>
+                </a:solidFill>
+                <a:latin typeface="Inter"/>
+              </a:rPr>
+              <a:t>2) F — «Yo soy de Sevilla»</a:t>
+            </a:r>
+          </a:p>
+          <a:p>
+            <a:pPr>
+              <a:lnSpc>
+                <a:spcPct val="102000"/>
+              </a:lnSpc>
+              <a:spcBef>
+                <a:spcPts val="0"/>
+              </a:spcBef>
+              <a:spcAft>
+                <a:spcPts val="300"/>
+              </a:spcAft>
+            </a:pPr>
+            <a:r>
+              <a:rPr sz="1200" b="0" i="0">
+                <a:solidFill>
+                  <a:srgbClr val="157355"/>
+                </a:solidFill>
+                <a:latin typeface="Inter"/>
+              </a:rPr>
+              <a:t>3) V — «Ese, a, eme»</a:t>
+            </a:r>
+          </a:p>
+        </p:txBody>
+      </p:sp>
+      <p:sp>
+        <p:nvSpPr>
+          <p:cNvPr id="19" name="Rounded Rectangle 18"/>
+          <p:cNvSpPr/>
+          <p:nvPr/>
+        </p:nvSpPr>
+        <p:spPr>
+          <a:xfrm>
+            <a:off x="594360" y="5468112"/>
+            <a:ext cx="791870" cy="292608"/>
+          </a:xfrm>
+          <a:prstGeom prst="roundRect">
+            <a:avLst>
+              <a:gd name="adj" fmla="val 50000"/>
+            </a:avLst>
+          </a:prstGeom>
+          <a:solidFill>
+            <a:srgbClr val="1E9E74"/>
+          </a:solidFill>
+          <a:ln>
+            <a:noFill/>
+          </a:ln>
+          <a:effectLst/>
+        </p:spPr>
+        <p:style>
+          <a:lnRef idx="1">
+            <a:schemeClr val="accent1"/>
+          </a:lnRef>
+          <a:fillRef idx="3">
+            <a:schemeClr val="accent1"/>
+          </a:fillRef>
+          <a:effectRef idx="2">
+            <a:schemeClr val="accent1"/>
+          </a:effectRef>
+          <a:fontRef idx="minor">
+            <a:schemeClr val="lt1"/>
+          </a:fontRef>
+        </p:style>
+        <p:txBody>
+          <a:bodyPr rtlCol="0" anchor="ctr" wrap="none" lIns="88900" rIns="88900" tIns="12700" bIns="12700"/>
+          <a:lstStyle/>
+          <a:p>
+            <a:pPr algn="ctr"/>
+            <a:r>
+              <a:rPr sz="950" b="1">
+                <a:solidFill>
+                  <a:srgbClr val="FFFFFF"/>
+                </a:solidFill>
+                <a:latin typeface="Inter"/>
+              </a:rPr>
+              <a:t>SOLUCIÓN</a:t>
+            </a:r>
+          </a:p>
+        </p:txBody>
+      </p:sp>
+      <p:sp>
+        <p:nvSpPr>
+          <p:cNvPr id="20" name="Rectangle 19"/>
+          <p:cNvSpPr/>
+          <p:nvPr/>
+        </p:nvSpPr>
+        <p:spPr>
+          <a:xfrm>
+            <a:off x="0" y="6547104"/>
+            <a:ext cx="12191695" cy="310896"/>
+          </a:xfrm>
+          <a:prstGeom prst="rect">
+            <a:avLst/>
+          </a:prstGeom>
+          <a:solidFill>
+            <a:srgbClr val="F3EEE4"/>
+          </a:solidFill>
+          <a:ln>
+            <a:noFill/>
+          </a:ln>
+          <a:effectLst/>
+        </p:spPr>
+        <p:style>
+          <a:lnRef idx="1">
+            <a:schemeClr val="accent1"/>
+          </a:lnRef>
+          <a:fillRef idx="3">
+            <a:schemeClr val="accent1"/>
+          </a:fillRef>
+          <a:effectRef idx="2">
+            <a:schemeClr val="accent1"/>
+          </a:effectRef>
+          <a:fontRef idx="minor">
+            <a:schemeClr val="lt1"/>
+          </a:fontRef>
+        </p:style>
+        <p:txBody>
+          <a:bodyPr rtlCol="0" anchor="ctr"/>
+          <a:lstStyle/>
+          <a:p>
+            <a:pPr algn="ctr"/>
+          </a:p>
+        </p:txBody>
+      </p:sp>
+      <p:sp>
+        <p:nvSpPr>
+          <p:cNvPr id="21" name="TextBox 20"/>
+          <p:cNvSpPr txBox="1"/>
+          <p:nvPr/>
+        </p:nvSpPr>
+        <p:spPr>
+          <a:xfrm>
+            <a:off x="411480" y="6565392"/>
+            <a:ext cx="5486400" cy="274320"/>
+          </a:xfrm>
+          <a:prstGeom prst="rect">
+            <a:avLst/>
+          </a:prstGeom>
+          <a:noFill/>
+        </p:spPr>
+        <p:txBody>
+          <a:bodyPr wrap="square" anchor="ctr" lIns="38100" rIns="38100" tIns="25400" bIns="25400">
+            <a:spAutoFit/>
+          </a:bodyPr>
+          <a:lstStyle/>
+          <a:p>
+            <a:pPr algn="l">
+              <a:lnSpc>
+                <a:spcPct val="106000"/>
+              </a:lnSpc>
+              <a:spcBef>
+                <a:spcPts val="0"/>
+              </a:spcBef>
+              <a:spcAft>
+                <a:spcPts val="200"/>
+              </a:spcAft>
+            </a:pPr>
+            <a:r>
+              <a:rPr sz="1100" b="1" i="0">
+                <a:solidFill>
+                  <a:srgbClr val="1E9E74"/>
+                </a:solidFill>
+                <a:latin typeface="Inter"/>
+              </a:rPr>
+              <a:t>● </a:t>
+            </a:r>
+            <a:r>
+              <a:rPr sz="950" b="0" i="0">
+                <a:solidFill>
+                  <a:srgbClr val="6A6E78"/>
+                </a:solidFill>
+                <a:latin typeface="Inter"/>
+              </a:rPr>
+              <a:t>U0 · ¡EMPEZAMOS!   ·   C5 · A1 · La Ruta</a:t>
+            </a:r>
+          </a:p>
+        </p:txBody>
+      </p:sp>
+      <p:sp>
+        <p:nvSpPr>
+          <p:cNvPr id="22" name="TextBox 21"/>
+          <p:cNvSpPr txBox="1"/>
+          <p:nvPr/>
+        </p:nvSpPr>
+        <p:spPr>
+          <a:xfrm>
+            <a:off x="8686800" y="6565392"/>
+            <a:ext cx="3063240" cy="274320"/>
+          </a:xfrm>
+          <a:prstGeom prst="rect">
+            <a:avLst/>
+          </a:prstGeom>
+          <a:noFill/>
+        </p:spPr>
+        <p:txBody>
+          <a:bodyPr wrap="square" anchor="ctr" lIns="38100" rIns="38100" tIns="25400" bIns="25400">
+            <a:spAutoFit/>
+          </a:bodyPr>
+          <a:lstStyle/>
+          <a:p>
+            <a:pPr algn="r">
+              <a:lnSpc>
+                <a:spcPct val="106000"/>
+              </a:lnSpc>
+              <a:spcBef>
+                <a:spcPts val="0"/>
+              </a:spcBef>
+              <a:spcAft>
+                <a:spcPts val="200"/>
+              </a:spcAft>
+            </a:pPr>
+            <a:r>
+              <a:rPr sz="900" b="0" i="1">
+                <a:solidFill>
+                  <a:srgbClr val="6A6E78"/>
+                </a:solidFill>
+                <a:latin typeface="Inter"/>
+              </a:rPr>
+              <a:t>Leerlingenversie — klik onthult</a:t>
+            </a:r>
+          </a:p>
+        </p:txBody>
+      </p:sp>
+      <p:sp>
+        <p:nvSpPr>
+          <p:cNvPr id="23" name="TextBox 22"/>
+          <p:cNvSpPr txBox="1"/>
+          <p:nvPr/>
+        </p:nvSpPr>
+        <p:spPr>
+          <a:xfrm>
+            <a:off x="11475720" y="6565392"/>
+            <a:ext cx="457200" cy="274320"/>
+          </a:xfrm>
+          <a:prstGeom prst="rect">
+            <a:avLst/>
+          </a:prstGeom>
+          <a:noFill/>
+        </p:spPr>
+        <p:txBody>
+          <a:bodyPr wrap="square" anchor="ctr" lIns="38100" rIns="38100" tIns="25400" bIns="25400">
+            <a:spAutoFit/>
+          </a:bodyPr>
+          <a:lstStyle/>
+          <a:p>
+            <a:pPr algn="r">
+              <a:lnSpc>
+                <a:spcPct val="106000"/>
+              </a:lnSpc>
+              <a:spcBef>
+                <a:spcPts val="0"/>
+              </a:spcBef>
+              <a:spcAft>
+                <a:spcPts val="200"/>
+              </a:spcAft>
+            </a:pPr>
+            <a:r>
+              <a:rPr sz="950" b="1" i="0">
+                <a:solidFill>
+                  <a:srgbClr val="157355"/>
+                </a:solidFill>
+                <a:latin typeface="Inter"/>
+              </a:rPr>
+              <a:t>19</a:t>
+            </a:r>
+          </a:p>
+        </p:txBody>
+      </p:sp>
+    </p:spTree>
+  </p:cSld>
+  <p:clrMapOvr>
+    <a:masterClrMapping/>
+  </p:clrMapOvr>
+  <p:timing>
+    <p:tnLst>
+      <p:par>
+        <p:cTn id="1" dur="indefinite" restart="never" nodeType="tmRoot">
+          <p:childTnLst>
+            <p:seq concurrent="1" nextAc="seek">
+              <p:cTn id="2" dur="indefinite" nodeType="mainSeq">
+                <p:childTnLst>
+                  <p:par>
+                    <p:cTn id="3" fill="hold">
+                      <p:stCondLst>
+                        <p:cond delay="indefinite"/>
+                      </p:stCondLst>
+                      <p:childTnLst>
+                        <p:par>
+                          <p:cTn id="4" fill="hold">
+                            <p:stCondLst>
+                              <p:cond delay="0"/>
+                            </p:stCondLst>
+                            <p:childTnLst>
+                              <p:par>
+                                <p:cTn id="5" presetID="10" presetClass="entr" presetSubtype="0" fill="hold" grpId="0" nodeType="clickEffect">
+                                  <p:stCondLst>
+                                    <p:cond delay="0"/>
+                                  </p:stCondLst>
+                                  <p:childTnLst>
+                                    <p:set>
+                                      <p:cBhvr>
+                                        <p:cTn id="6" dur="1" fill="hold">
+                                          <p:stCondLst>
+                                            <p:cond delay="0"/>
+                                          </p:stCondLst>
+                                        </p:cTn>
+                                        <p:tgtEl>
+                                          <p:spTgt spid="18"/>
+                                        </p:tgtEl>
+                                        <p:attrNameLst>
+                                          <p:attrName>style.visibility</p:attrName>
+                                        </p:attrNameLst>
+                                      </p:cBhvr>
+                                      <p:to>
+                                        <p:strVal val="visible"/>
+                                      </p:to>
+                                    </p:set>
+                                    <p:animEffect transition="in" filter="fade">
+                                      <p:cBhvr>
+                                        <p:cTn id="7" dur="500"/>
+                                        <p:tgtEl>
+                                          <p:spTgt spid="18"/>
+                                        </p:tgtEl>
+                                      </p:cBhvr>
+                                    </p:animEffect>
+                                  </p:childTnLst>
+                                </p:cTn>
+                              </p:par>
+                            </p:childTnLst>
+                          </p:cTn>
+                        </p:par>
+                      </p:childTnLst>
+                    </p:cTn>
+                  </p:par>
+                  <p:par>
+                    <p:cTn id="8" fill="hold">
+                      <p:stCondLst>
+                        <p:cond delay="indefinite"/>
+                      </p:stCondLst>
+                      <p:childTnLst>
+                        <p:par>
+                          <p:cTn id="9" fill="hold">
+                            <p:stCondLst>
+                              <p:cond delay="0"/>
+                            </p:stCondLst>
+                            <p:childTnLst>
+                              <p:par>
+                                <p:cTn id="10" presetID="10" presetClass="entr" presetSubtype="0" fill="hold" grpId="0" nodeType="clickEffect">
+                                  <p:stCondLst>
+                                    <p:cond delay="0"/>
+                                  </p:stCondLst>
+                                  <p:childTnLst>
+                                    <p:set>
+                                      <p:cBhvr>
+                                        <p:cTn id="11" dur="1" fill="hold">
+                                          <p:stCondLst>
+                                            <p:cond delay="0"/>
+                                          </p:stCondLst>
+                                        </p:cTn>
+                                        <p:tgtEl>
+                                          <p:spTgt spid="19"/>
+                                        </p:tgtEl>
+                                        <p:attrNameLst>
+                                          <p:attrName>style.visibility</p:attrName>
+                                        </p:attrNameLst>
+                                      </p:cBhvr>
+                                      <p:to>
+                                        <p:strVal val="visible"/>
+                                      </p:to>
+                                    </p:set>
+                                    <p:animEffect transition="in" filter="fade">
+                                      <p:cBhvr>
+                                        <p:cTn id="12" dur="500"/>
+                                        <p:tgtEl>
+                                          <p:spTgt spid="19"/>
+                                        </p:tgtEl>
+                                      </p:cBhvr>
+                                    </p:animEffect>
+                                  </p:childTnLst>
+                                </p:cTn>
+                              </p:par>
+                            </p:childTnLst>
+                          </p:cTn>
+                        </p:par>
+                      </p:childTnLst>
+                    </p:cTn>
+                  </p:par>
+                </p:childTnLst>
+              </p:cTn>
+              <p:prevCondLst>
+                <p:cond evt="onPrev" delay="0">
+                  <p:tgtEl>
+                    <p:sldTgt/>
+                  </p:tgtEl>
+                </p:cond>
+              </p:prevCondLst>
+              <p:nextCondLst>
+                <p:cond evt="onNext" delay="0">
+                  <p:tgtEl>
+                    <p:sldTgt/>
+                  </p:tgtEl>
+                </p:cond>
+              </p:nextCondLst>
+            </p:seq>
+          </p:childTnLst>
+        </p:cTn>
+      </p:par>
+    </p:tnLst>
+  </p:timing>
+</p:sld>
+</file>
+
+<file path=ppt/slides/slide2.xml><?xml version="1.0" encoding="utf-8"?>
+<p:sld xmlns:a="http://schemas.openxmlformats.org/drawingml/2006/main" xmlns:p="http://schemas.openxmlformats.org/presentationml/2006/main" xmlns:r="http://schemas.openxmlformats.org/officeDocument/2006/relationships">
+  <p:cSld>
+    <p:spTree>
+      <p:nvGrpSpPr>
+        <p:cNvPr id="1" name=""/>
+        <p:cNvGrpSpPr/>
+        <p:nvPr/>
+      </p:nvGrpSpPr>
+      <p:grpSpPr/>
+      <p:sp>
+        <p:nvSpPr>
+          <p:cNvPr id="2" name="Rectangle 1"/>
+          <p:cNvSpPr/>
+          <p:nvPr/>
+        </p:nvSpPr>
+        <p:spPr>
+          <a:xfrm>
+            <a:off x="0" y="0"/>
+            <a:ext cx="12191695" cy="6858000"/>
+          </a:xfrm>
+          <a:prstGeom prst="rect">
+            <a:avLst/>
+          </a:prstGeom>
+          <a:solidFill>
+            <a:srgbClr val="FCFBF8"/>
+          </a:solidFill>
+          <a:ln>
+            <a:noFill/>
+          </a:ln>
+          <a:effectLst/>
+        </p:spPr>
+        <p:style>
+          <a:lnRef idx="1">
+            <a:schemeClr val="accent1"/>
+          </a:lnRef>
+          <a:fillRef idx="3">
+            <a:schemeClr val="accent1"/>
+          </a:fillRef>
+          <a:effectRef idx="2">
+            <a:schemeClr val="accent1"/>
+          </a:effectRef>
+          <a:fontRef idx="minor">
+            <a:schemeClr val="lt1"/>
+          </a:fontRef>
+        </p:style>
+        <p:txBody>
+          <a:bodyPr rtlCol="0" anchor="ctr"/>
+          <a:lstStyle/>
+          <a:p>
+            <a:pPr algn="ctr"/>
+          </a:p>
+        </p:txBody>
+      </p:sp>
+      <p:sp>
+        <p:nvSpPr>
+          <p:cNvPr id="3" name="Rectangle 2"/>
+          <p:cNvSpPr/>
+          <p:nvPr/>
+        </p:nvSpPr>
+        <p:spPr>
+          <a:xfrm>
+            <a:off x="0" y="0"/>
+            <a:ext cx="12191695" cy="1078992"/>
+          </a:xfrm>
+          <a:prstGeom prst="rect">
+            <a:avLst/>
+          </a:prstGeom>
+          <a:solidFill>
+            <a:srgbClr val="1E9E74"/>
+          </a:solidFill>
+          <a:ln>
+            <a:noFill/>
+          </a:ln>
+          <a:effectLst/>
+        </p:spPr>
+        <p:style>
+          <a:lnRef idx="1">
+            <a:schemeClr val="accent1"/>
+          </a:lnRef>
+          <a:fillRef idx="3">
+            <a:schemeClr val="accent1"/>
+          </a:fillRef>
+          <a:effectRef idx="2">
+            <a:schemeClr val="accent1"/>
+          </a:effectRef>
+          <a:fontRef idx="minor">
+            <a:schemeClr val="lt1"/>
+          </a:fontRef>
+        </p:style>
+        <p:txBody>
+          <a:bodyPr rtlCol="0" anchor="ctr"/>
+          <a:lstStyle/>
+          <a:p>
+            <a:pPr algn="ctr"/>
+          </a:p>
+        </p:txBody>
+      </p:sp>
+      <p:sp>
+        <p:nvSpPr>
+          <p:cNvPr id="4" name="Rectangle 3"/>
+          <p:cNvSpPr/>
+          <p:nvPr/>
+        </p:nvSpPr>
+        <p:spPr>
+          <a:xfrm>
+            <a:off x="0" y="1078992"/>
+            <a:ext cx="12191695" cy="54864"/>
+          </a:xfrm>
+          <a:prstGeom prst="rect">
+            <a:avLst/>
+          </a:prstGeom>
+          <a:solidFill>
+            <a:srgbClr val="157355"/>
+          </a:solidFill>
+          <a:ln>
+            <a:noFill/>
+          </a:ln>
+          <a:effectLst/>
+        </p:spPr>
+        <p:style>
+          <a:lnRef idx="1">
+            <a:schemeClr val="accent1"/>
+          </a:lnRef>
+          <a:fillRef idx="3">
+            <a:schemeClr val="accent1"/>
+          </a:fillRef>
+          <a:effectRef idx="2">
+            <a:schemeClr val="accent1"/>
+          </a:effectRef>
+          <a:fontRef idx="minor">
+            <a:schemeClr val="lt1"/>
+          </a:fontRef>
+        </p:style>
+        <p:txBody>
+          <a:bodyPr rtlCol="0" anchor="ctr"/>
+          <a:lstStyle/>
+          <a:p>
+            <a:pPr algn="ctr"/>
+          </a:p>
+        </p:txBody>
+      </p:sp>
+      <p:sp>
+        <p:nvSpPr>
+          <p:cNvPr id="5" name="Rounded Rectangle 4"/>
+          <p:cNvSpPr/>
+          <p:nvPr/>
+        </p:nvSpPr>
+        <p:spPr>
+          <a:xfrm>
+            <a:off x="502920" y="182880"/>
+            <a:ext cx="1633118" cy="292608"/>
+          </a:xfrm>
+          <a:prstGeom prst="roundRect">
+            <a:avLst>
+              <a:gd name="adj" fmla="val 50000"/>
+            </a:avLst>
+          </a:prstGeom>
+          <a:solidFill>
+            <a:srgbClr val="FFFFFF"/>
+          </a:solidFill>
+          <a:ln>
+            <a:noFill/>
+          </a:ln>
+          <a:effectLst/>
+        </p:spPr>
+        <p:style>
+          <a:lnRef idx="1">
+            <a:schemeClr val="accent1"/>
+          </a:lnRef>
+          <a:fillRef idx="3">
+            <a:schemeClr val="accent1"/>
+          </a:fillRef>
+          <a:effectRef idx="2">
+            <a:schemeClr val="accent1"/>
+          </a:effectRef>
+          <a:fontRef idx="minor">
+            <a:schemeClr val="lt1"/>
+          </a:fontRef>
+        </p:style>
+        <p:txBody>
+          <a:bodyPr rtlCol="0" anchor="ctr" wrap="none" lIns="88900" rIns="88900" tIns="12700" bIns="12700"/>
+          <a:lstStyle/>
+          <a:p>
+            <a:pPr algn="ctr"/>
+            <a:r>
+              <a:rPr sz="1100" b="1">
+                <a:solidFill>
+                  <a:srgbClr val="1E9E74"/>
+                </a:solidFill>
+                <a:latin typeface="Inter"/>
+              </a:rPr>
+              <a:t>MENÚ DE LA LECCIÓN</a:t>
+            </a:r>
+          </a:p>
+        </p:txBody>
+      </p:sp>
+      <p:sp>
+        <p:nvSpPr>
+          <p:cNvPr id="6" name="TextBox 5"/>
+          <p:cNvSpPr txBox="1"/>
+          <p:nvPr/>
+        </p:nvSpPr>
+        <p:spPr>
+          <a:xfrm>
+            <a:off x="10424160" y="-137160"/>
+            <a:ext cx="1737360" cy="1371600"/>
+          </a:xfrm>
+          <a:prstGeom prst="rect">
+            <a:avLst/>
+          </a:prstGeom>
+          <a:noFill/>
+        </p:spPr>
+        <p:txBody>
+          <a:bodyPr wrap="square" anchor="t" lIns="38100" rIns="38100" tIns="25400" bIns="25400">
+            <a:spAutoFit/>
+          </a:bodyPr>
+          <a:lstStyle/>
+          <a:p>
+            <a:pPr algn="r">
+              <a:lnSpc>
+                <a:spcPct val="106000"/>
+              </a:lnSpc>
+              <a:spcBef>
+                <a:spcPts val="0"/>
+              </a:spcBef>
+              <a:spcAft>
+                <a:spcPts val="200"/>
+              </a:spcAft>
+            </a:pPr>
+            <a:r>
+              <a:rPr sz="8800" b="1" i="0">
+                <a:solidFill>
+                  <a:srgbClr val="FFFFFF"/>
+                </a:solidFill>
+                <a:latin typeface="Bricolage Grotesque"/>
+              </a:rPr>
+              <a:t>0</a:t>
+            </a:r>
+          </a:p>
+        </p:txBody>
+      </p:sp>
+      <p:sp>
+        <p:nvSpPr>
+          <p:cNvPr id="7" name="TextBox 6"/>
+          <p:cNvSpPr txBox="1"/>
+          <p:nvPr/>
+        </p:nvSpPr>
+        <p:spPr>
+          <a:xfrm>
+            <a:off x="457200" y="457200"/>
+            <a:ext cx="9692640" cy="502920"/>
+          </a:xfrm>
+          <a:prstGeom prst="rect">
+            <a:avLst/>
+          </a:prstGeom>
+          <a:noFill/>
+        </p:spPr>
+        <p:txBody>
+          <a:bodyPr wrap="square" anchor="ctr" lIns="38100" rIns="38100" tIns="25400" bIns="25400">
+            <a:spAutoFit/>
+          </a:bodyPr>
+          <a:lstStyle/>
+          <a:p>
+            <a:pPr algn="l">
+              <a:lnSpc>
+                <a:spcPct val="106000"/>
+              </a:lnSpc>
+              <a:spcBef>
+                <a:spcPts val="0"/>
+              </a:spcBef>
+              <a:spcAft>
+                <a:spcPts val="200"/>
+              </a:spcAft>
+            </a:pPr>
+            <a:r>
+              <a:rPr sz="2700" b="1" i="0">
+                <a:solidFill>
+                  <a:srgbClr val="FFFFFF"/>
+                </a:solidFill>
+                <a:latin typeface="Bricolage Grotesque"/>
+              </a:rPr>
+              <a:t>El mapa de la Unidad 0</a:t>
+            </a:r>
+          </a:p>
+        </p:txBody>
+      </p:sp>
+      <p:sp>
+        <p:nvSpPr>
+          <p:cNvPr id="8" name="TextBox 7"/>
+          <p:cNvSpPr txBox="1"/>
+          <p:nvPr/>
+        </p:nvSpPr>
+        <p:spPr>
+          <a:xfrm>
+            <a:off x="502920" y="932688"/>
+            <a:ext cx="9692640" cy="274320"/>
+          </a:xfrm>
+          <a:prstGeom prst="rect">
+            <a:avLst/>
+          </a:prstGeom>
+          <a:noFill/>
+        </p:spPr>
+        <p:txBody>
+          <a:bodyPr wrap="square" anchor="t" lIns="38100" rIns="38100" tIns="25400" bIns="25400">
+            <a:spAutoFit/>
+          </a:bodyPr>
+          <a:lstStyle/>
+          <a:p>
+            <a:pPr algn="l">
+              <a:lnSpc>
+                <a:spcPct val="106000"/>
+              </a:lnSpc>
+              <a:spcBef>
+                <a:spcPts val="0"/>
+              </a:spcBef>
+              <a:spcAft>
+                <a:spcPts val="200"/>
+              </a:spcAft>
+            </a:pPr>
+            <a:r>
+              <a:rPr sz="1250" b="0" i="1">
+                <a:solidFill>
+                  <a:srgbClr val="E4F4EE"/>
+                </a:solidFill>
+                <a:latin typeface="Inter"/>
+              </a:rPr>
+              <a:t>Kies je route — klik een tegel (of volg de volgorde). Alles oefent naar de Tarea final toe.</a:t>
+            </a:r>
+          </a:p>
+        </p:txBody>
+      </p:sp>
+      <p:sp>
+        <p:nvSpPr>
+          <p:cNvPr id="9" name="Rounded Rectangle 8">
+            <a:hlinkClick action="ppaction://hlinksldjump" r:id="rId2"/>
+          </p:cNvPr>
+          <p:cNvSpPr/>
+          <p:nvPr/>
+        </p:nvSpPr>
+        <p:spPr>
+          <a:xfrm>
+            <a:off x="457200" y="1417320"/>
+            <a:ext cx="2743200" cy="2240280"/>
+          </a:xfrm>
+          <a:prstGeom prst="roundRect">
+            <a:avLst>
+              <a:gd name="adj" fmla="val 5500"/>
+            </a:avLst>
+          </a:prstGeom>
+          <a:solidFill>
+            <a:srgbClr val="FFFFFF"/>
+          </a:solidFill>
+          <a:ln w="20320">
+            <a:solidFill>
+              <a:srgbClr val="1E9E74"/>
+            </a:solidFill>
+          </a:ln>
+          <a:effectLst/>
+          <a:effectLst>
+            <a:outerShdw blurRad="90000" dist="38000" dir="5400000" rotWithShape="0">
+              <a:srgbClr val="20242E">
+                <a:alpha val="22000"/>
+              </a:srgbClr>
+            </a:outerShdw>
+          </a:effectLst>
+        </p:spPr>
+        <p:style>
+          <a:lnRef idx="1">
+            <a:schemeClr val="accent1"/>
+          </a:lnRef>
+          <a:fillRef idx="3">
+            <a:schemeClr val="accent1"/>
+          </a:fillRef>
+          <a:effectRef idx="2">
+            <a:schemeClr val="accent1"/>
+          </a:effectRef>
+          <a:fontRef idx="minor">
+            <a:schemeClr val="lt1"/>
+          </a:fontRef>
+        </p:style>
+        <p:txBody>
+          <a:bodyPr rtlCol="0" anchor="ctr"/>
+          <a:lstStyle/>
+          <a:p>
+            <a:pPr algn="ctr"/>
+          </a:p>
+        </p:txBody>
+      </p:sp>
+      <p:sp>
+        <p:nvSpPr>
+          <p:cNvPr id="10" name="Rectangle 9">
+            <a:hlinkClick action="ppaction://hlinksldjump" r:id="rId2"/>
+          </p:cNvPr>
+          <p:cNvSpPr/>
+          <p:nvPr/>
+        </p:nvSpPr>
+        <p:spPr>
+          <a:xfrm>
+            <a:off x="457200" y="1417320"/>
+            <a:ext cx="2743200" cy="457200"/>
+          </a:xfrm>
+          <a:prstGeom prst="rect">
+            <a:avLst/>
+          </a:prstGeom>
+          <a:solidFill>
+            <a:srgbClr val="1E9E74"/>
+          </a:solidFill>
+          <a:ln>
+            <a:noFill/>
+          </a:ln>
+          <a:effectLst/>
+        </p:spPr>
+        <p:style>
+          <a:lnRef idx="1">
+            <a:schemeClr val="accent1"/>
+          </a:lnRef>
+          <a:fillRef idx="3">
+            <a:schemeClr val="accent1"/>
+          </a:fillRef>
+          <a:effectRef idx="2">
+            <a:schemeClr val="accent1"/>
+          </a:effectRef>
+          <a:fontRef idx="minor">
+            <a:schemeClr val="lt1"/>
+          </a:fontRef>
+        </p:style>
+        <p:txBody>
+          <a:bodyPr rtlCol="0" anchor="ctr"/>
+          <a:lstStyle/>
+          <a:p>
+            <a:pPr algn="ctr"/>
+          </a:p>
+        </p:txBody>
+      </p:sp>
+      <p:sp>
+        <p:nvSpPr>
+          <p:cNvPr id="11" name="Rounded Rectangle 10"/>
+          <p:cNvSpPr/>
+          <p:nvPr/>
+        </p:nvSpPr>
+        <p:spPr>
+          <a:xfrm>
+            <a:off x="566928" y="1490472"/>
+            <a:ext cx="310896" cy="310896"/>
+          </a:xfrm>
+          <a:prstGeom prst="roundRect">
+            <a:avLst>
+              <a:gd name="adj" fmla="val 50000"/>
+            </a:avLst>
+          </a:prstGeom>
+          <a:solidFill>
+            <a:srgbClr val="FFFFFF"/>
+          </a:solidFill>
+          <a:ln>
+            <a:noFill/>
+          </a:ln>
+          <a:effectLst/>
+        </p:spPr>
+        <p:style>
+          <a:lnRef idx="1">
+            <a:schemeClr val="accent1"/>
+          </a:lnRef>
+          <a:fillRef idx="3">
+            <a:schemeClr val="accent1"/>
+          </a:fillRef>
+          <a:effectRef idx="2">
+            <a:schemeClr val="accent1"/>
+          </a:effectRef>
+          <a:fontRef idx="minor">
+            <a:schemeClr val="lt1"/>
+          </a:fontRef>
+        </p:style>
+        <p:txBody>
+          <a:bodyPr rtlCol="0" anchor="ctr"/>
+          <a:lstStyle/>
+          <a:p>
+            <a:pPr algn="ctr"/>
+            <a:r>
+              <a:rPr sz="1200" b="1">
+                <a:solidFill>
+                  <a:srgbClr val="1E9E74"/>
+                </a:solidFill>
+                <a:latin typeface="Bricolage Grotesque"/>
+              </a:rPr>
+              <a:t>§1</a:t>
+            </a:r>
+          </a:p>
+        </p:txBody>
+      </p:sp>
+      <p:sp>
+        <p:nvSpPr>
+          <p:cNvPr id="12" name="TextBox 11"/>
+          <p:cNvSpPr txBox="1"/>
+          <p:nvPr/>
+        </p:nvSpPr>
+        <p:spPr>
+          <a:xfrm>
+            <a:off x="987552" y="1472184"/>
+            <a:ext cx="2103120" cy="365760"/>
+          </a:xfrm>
+          <a:prstGeom prst="rect">
+            <a:avLst/>
+          </a:prstGeom>
+          <a:noFill/>
+        </p:spPr>
+        <p:txBody>
+          <a:bodyPr wrap="square" anchor="ctr" lIns="38100" rIns="38100" tIns="25400" bIns="25400">
+            <a:spAutoFit/>
+          </a:bodyPr>
+          <a:lstStyle/>
+          <a:p>
+            <a:pPr algn="l">
+              <a:lnSpc>
+                <a:spcPct val="106000"/>
+              </a:lnSpc>
+              <a:spcBef>
+                <a:spcPts val="0"/>
+              </a:spcBef>
+              <a:spcAft>
+                <a:spcPts val="200"/>
+              </a:spcAft>
+            </a:pPr>
+            <a:r>
+              <a:rPr sz="1450" b="1" i="0">
+                <a:solidFill>
+                  <a:srgbClr val="FFFFFF"/>
+                </a:solidFill>
+                <a:latin typeface="Bricolage Grotesque"/>
+              </a:rPr>
+              <a:t>Sonar en español</a:t>
+            </a:r>
+          </a:p>
+        </p:txBody>
+      </p:sp>
+      <p:sp>
+        <p:nvSpPr>
+          <p:cNvPr id="13" name="TextBox 12"/>
+          <p:cNvSpPr txBox="1"/>
+          <p:nvPr/>
+        </p:nvSpPr>
+        <p:spPr>
+          <a:xfrm>
+            <a:off x="621792" y="2039112"/>
+            <a:ext cx="2414016" cy="1097280"/>
+          </a:xfrm>
+          <a:prstGeom prst="rect">
+            <a:avLst/>
+          </a:prstGeom>
+          <a:noFill/>
+        </p:spPr>
+        <p:txBody>
+          <a:bodyPr wrap="square" anchor="t" lIns="38100" rIns="38100" tIns="25400" bIns="25400">
+            <a:spAutoFit/>
+          </a:bodyPr>
+          <a:lstStyle/>
+          <a:p>
+            <a:pPr algn="l">
+              <a:lnSpc>
+                <a:spcPct val="112000"/>
+              </a:lnSpc>
+              <a:spcBef>
+                <a:spcPts val="0"/>
+              </a:spcBef>
+              <a:spcAft>
+                <a:spcPts val="200"/>
+              </a:spcAft>
+            </a:pPr>
+            <a:r>
+              <a:rPr sz="1150" b="0" i="0">
+                <a:solidFill>
+                  <a:srgbClr val="20242E"/>
+                </a:solidFill>
+                <a:latin typeface="Inter"/>
+              </a:rPr>
+              <a:t>alfabet · uitspraak · klanktrampas</a:t>
+            </a:r>
+          </a:p>
+        </p:txBody>
+      </p:sp>
+      <p:sp>
+        <p:nvSpPr>
+          <p:cNvPr id="14" name="Rounded Rectangle 13"/>
+          <p:cNvSpPr/>
+          <p:nvPr/>
+        </p:nvSpPr>
+        <p:spPr>
+          <a:xfrm>
+            <a:off x="621792" y="3246120"/>
+            <a:ext cx="707745" cy="292608"/>
+          </a:xfrm>
+          <a:prstGeom prst="roundRect">
+            <a:avLst>
+              <a:gd name="adj" fmla="val 50000"/>
+            </a:avLst>
+          </a:prstGeom>
+          <a:solidFill>
+            <a:srgbClr val="E4F4EE"/>
+          </a:solidFill>
+          <a:ln>
+            <a:noFill/>
+          </a:ln>
+          <a:effectLst/>
+        </p:spPr>
+        <p:style>
+          <a:lnRef idx="1">
+            <a:schemeClr val="accent1"/>
+          </a:lnRef>
+          <a:fillRef idx="3">
+            <a:schemeClr val="accent1"/>
+          </a:fillRef>
+          <a:effectRef idx="2">
+            <a:schemeClr val="accent1"/>
+          </a:effectRef>
+          <a:fontRef idx="minor">
+            <a:schemeClr val="lt1"/>
+          </a:fontRef>
+        </p:style>
+        <p:txBody>
+          <a:bodyPr rtlCol="0" anchor="ctr" wrap="none" lIns="88900" rIns="88900" tIns="12700" bIns="12700"/>
+          <a:lstStyle/>
+          <a:p>
+            <a:pPr algn="ctr"/>
+            <a:r>
+              <a:rPr sz="950" b="1">
+                <a:solidFill>
+                  <a:srgbClr val="157355"/>
+                </a:solidFill>
+                <a:latin typeface="Inter"/>
+              </a:rPr>
+              <a:t>→ dia 4</a:t>
+            </a:r>
+          </a:p>
+        </p:txBody>
+      </p:sp>
+      <p:sp>
+        <p:nvSpPr>
+          <p:cNvPr id="15" name="Rounded Rectangle 14">
+            <a:hlinkClick action="ppaction://hlinksldjump" r:id="rId3"/>
+          </p:cNvPr>
+          <p:cNvSpPr/>
+          <p:nvPr/>
+        </p:nvSpPr>
+        <p:spPr>
+          <a:xfrm>
+            <a:off x="3328416" y="1417320"/>
+            <a:ext cx="2743200" cy="2240280"/>
+          </a:xfrm>
+          <a:prstGeom prst="roundRect">
+            <a:avLst>
+              <a:gd name="adj" fmla="val 5500"/>
+            </a:avLst>
+          </a:prstGeom>
+          <a:solidFill>
+            <a:srgbClr val="FFFFFF"/>
+          </a:solidFill>
+          <a:ln w="20320">
+            <a:solidFill>
+              <a:srgbClr val="1E9E74"/>
+            </a:solidFill>
+          </a:ln>
+          <a:effectLst/>
+          <a:effectLst>
+            <a:outerShdw blurRad="90000" dist="38000" dir="5400000" rotWithShape="0">
+              <a:srgbClr val="20242E">
+                <a:alpha val="22000"/>
+              </a:srgbClr>
+            </a:outerShdw>
+          </a:effectLst>
+        </p:spPr>
+        <p:style>
+          <a:lnRef idx="1">
+            <a:schemeClr val="accent1"/>
+          </a:lnRef>
+          <a:fillRef idx="3">
+            <a:schemeClr val="accent1"/>
+          </a:fillRef>
+          <a:effectRef idx="2">
+            <a:schemeClr val="accent1"/>
+          </a:effectRef>
+          <a:fontRef idx="minor">
+            <a:schemeClr val="lt1"/>
+          </a:fontRef>
+        </p:style>
+        <p:txBody>
+          <a:bodyPr rtlCol="0" anchor="ctr"/>
+          <a:lstStyle/>
+          <a:p>
+            <a:pPr algn="ctr"/>
+          </a:p>
+        </p:txBody>
+      </p:sp>
+      <p:sp>
+        <p:nvSpPr>
+          <p:cNvPr id="16" name="Rectangle 15">
+            <a:hlinkClick action="ppaction://hlinksldjump" r:id="rId3"/>
+          </p:cNvPr>
+          <p:cNvSpPr/>
+          <p:nvPr/>
+        </p:nvSpPr>
+        <p:spPr>
+          <a:xfrm>
+            <a:off x="3328416" y="1417320"/>
+            <a:ext cx="2743200" cy="457200"/>
+          </a:xfrm>
+          <a:prstGeom prst="rect">
+            <a:avLst/>
+          </a:prstGeom>
+          <a:solidFill>
+            <a:srgbClr val="1E9E74"/>
+          </a:solidFill>
+          <a:ln>
+            <a:noFill/>
+          </a:ln>
+          <a:effectLst/>
+        </p:spPr>
+        <p:style>
+          <a:lnRef idx="1">
+            <a:schemeClr val="accent1"/>
+          </a:lnRef>
+          <a:fillRef idx="3">
+            <a:schemeClr val="accent1"/>
+          </a:fillRef>
+          <a:effectRef idx="2">
+            <a:schemeClr val="accent1"/>
+          </a:effectRef>
+          <a:fontRef idx="minor">
+            <a:schemeClr val="lt1"/>
+          </a:fontRef>
+        </p:style>
+        <p:txBody>
+          <a:bodyPr rtlCol="0" anchor="ctr"/>
+          <a:lstStyle/>
+          <a:p>
+            <a:pPr algn="ctr"/>
+          </a:p>
+        </p:txBody>
+      </p:sp>
+      <p:sp>
+        <p:nvSpPr>
+          <p:cNvPr id="17" name="Rounded Rectangle 16"/>
+          <p:cNvSpPr/>
+          <p:nvPr/>
+        </p:nvSpPr>
+        <p:spPr>
+          <a:xfrm>
+            <a:off x="3438144" y="1490472"/>
+            <a:ext cx="310896" cy="310896"/>
+          </a:xfrm>
+          <a:prstGeom prst="roundRect">
+            <a:avLst>
+              <a:gd name="adj" fmla="val 50000"/>
+            </a:avLst>
+          </a:prstGeom>
+          <a:solidFill>
+            <a:srgbClr val="FFFFFF"/>
+          </a:solidFill>
+          <a:ln>
+            <a:noFill/>
+          </a:ln>
+          <a:effectLst/>
+        </p:spPr>
+        <p:style>
+          <a:lnRef idx="1">
+            <a:schemeClr val="accent1"/>
+          </a:lnRef>
+          <a:fillRef idx="3">
+            <a:schemeClr val="accent1"/>
+          </a:fillRef>
+          <a:effectRef idx="2">
+            <a:schemeClr val="accent1"/>
+          </a:effectRef>
+          <a:fontRef idx="minor">
+            <a:schemeClr val="lt1"/>
+          </a:fontRef>
+        </p:style>
+        <p:txBody>
+          <a:bodyPr rtlCol="0" anchor="ctr"/>
+          <a:lstStyle/>
+          <a:p>
+            <a:pPr algn="ctr"/>
+            <a:r>
+              <a:rPr sz="1200" b="1">
+                <a:solidFill>
+                  <a:srgbClr val="1E9E74"/>
+                </a:solidFill>
+                <a:latin typeface="Bricolage Grotesque"/>
+              </a:rPr>
+              <a:t>§2</a:t>
+            </a:r>
+          </a:p>
+        </p:txBody>
+      </p:sp>
+      <p:sp>
+        <p:nvSpPr>
+          <p:cNvPr id="18" name="TextBox 17"/>
+          <p:cNvSpPr txBox="1"/>
+          <p:nvPr/>
+        </p:nvSpPr>
+        <p:spPr>
+          <a:xfrm>
+            <a:off x="3858768" y="1472184"/>
+            <a:ext cx="2103120" cy="365760"/>
+          </a:xfrm>
+          <a:prstGeom prst="rect">
+            <a:avLst/>
+          </a:prstGeom>
+          <a:noFill/>
+        </p:spPr>
+        <p:txBody>
+          <a:bodyPr wrap="square" anchor="ctr" lIns="38100" rIns="38100" tIns="25400" bIns="25400">
+            <a:spAutoFit/>
+          </a:bodyPr>
+          <a:lstStyle/>
+          <a:p>
+            <a:pPr algn="l">
+              <a:lnSpc>
+                <a:spcPct val="106000"/>
+              </a:lnSpc>
+              <a:spcBef>
+                <a:spcPts val="0"/>
+              </a:spcBef>
+              <a:spcAft>
+                <a:spcPts val="200"/>
+              </a:spcAft>
+            </a:pPr>
+            <a:r>
+              <a:rPr sz="1450" b="1" i="0">
+                <a:solidFill>
+                  <a:srgbClr val="FFFFFF"/>
+                </a:solidFill>
+                <a:latin typeface="Bricolage Grotesque"/>
+              </a:rPr>
+              <a:t>La regla del sombrero</a:t>
+            </a:r>
+          </a:p>
+        </p:txBody>
+      </p:sp>
+      <p:sp>
+        <p:nvSpPr>
+          <p:cNvPr id="19" name="TextBox 18"/>
+          <p:cNvSpPr txBox="1"/>
+          <p:nvPr/>
+        </p:nvSpPr>
+        <p:spPr>
+          <a:xfrm>
+            <a:off x="3493008" y="2039112"/>
+            <a:ext cx="2414016" cy="1097280"/>
+          </a:xfrm>
+          <a:prstGeom prst="rect">
+            <a:avLst/>
+          </a:prstGeom>
+          <a:noFill/>
+        </p:spPr>
+        <p:txBody>
+          <a:bodyPr wrap="square" anchor="t" lIns="38100" rIns="38100" tIns="25400" bIns="25400">
+            <a:spAutoFit/>
+          </a:bodyPr>
+          <a:lstStyle/>
+          <a:p>
+            <a:pPr algn="l">
+              <a:lnSpc>
+                <a:spcPct val="112000"/>
+              </a:lnSpc>
+              <a:spcBef>
+                <a:spcPts val="0"/>
+              </a:spcBef>
+              <a:spcAft>
+                <a:spcPts val="200"/>
+              </a:spcAft>
+            </a:pPr>
+            <a:r>
+              <a:rPr sz="1150" b="0" i="0">
+                <a:solidFill>
+                  <a:srgbClr val="20242E"/>
+                </a:solidFill>
+                <a:latin typeface="Inter"/>
+              </a:rPr>
+              <a:t>klemtoon · aguda/llana/esdrújula · tilde</a:t>
+            </a:r>
+          </a:p>
+        </p:txBody>
+      </p:sp>
+      <p:sp>
+        <p:nvSpPr>
+          <p:cNvPr id="20" name="Rounded Rectangle 19"/>
+          <p:cNvSpPr/>
+          <p:nvPr/>
+        </p:nvSpPr>
+        <p:spPr>
+          <a:xfrm>
+            <a:off x="3493008" y="3246120"/>
+            <a:ext cx="707745" cy="292608"/>
+          </a:xfrm>
+          <a:prstGeom prst="roundRect">
+            <a:avLst>
+              <a:gd name="adj" fmla="val 50000"/>
+            </a:avLst>
+          </a:prstGeom>
+          <a:solidFill>
+            <a:srgbClr val="E4F4EE"/>
+          </a:solidFill>
+          <a:ln>
+            <a:noFill/>
+          </a:ln>
+          <a:effectLst/>
+        </p:spPr>
+        <p:style>
+          <a:lnRef idx="1">
+            <a:schemeClr val="accent1"/>
+          </a:lnRef>
+          <a:fillRef idx="3">
+            <a:schemeClr val="accent1"/>
+          </a:fillRef>
+          <a:effectRef idx="2">
+            <a:schemeClr val="accent1"/>
+          </a:effectRef>
+          <a:fontRef idx="minor">
+            <a:schemeClr val="lt1"/>
+          </a:fontRef>
+        </p:style>
+        <p:txBody>
+          <a:bodyPr rtlCol="0" anchor="ctr" wrap="none" lIns="88900" rIns="88900" tIns="12700" bIns="12700"/>
+          <a:lstStyle/>
+          <a:p>
+            <a:pPr algn="ctr"/>
+            <a:r>
+              <a:rPr sz="950" b="1">
+                <a:solidFill>
+                  <a:srgbClr val="157355"/>
+                </a:solidFill>
+                <a:latin typeface="Inter"/>
+              </a:rPr>
+              <a:t>→ dia 7</a:t>
+            </a:r>
+          </a:p>
+        </p:txBody>
+      </p:sp>
+      <p:sp>
+        <p:nvSpPr>
+          <p:cNvPr id="21" name="Rounded Rectangle 20">
+            <a:hlinkClick action="ppaction://hlinksldjump" r:id="rId4"/>
+          </p:cNvPr>
+          <p:cNvSpPr/>
+          <p:nvPr/>
+        </p:nvSpPr>
+        <p:spPr>
+          <a:xfrm>
+            <a:off x="6199632" y="1417320"/>
+            <a:ext cx="2743200" cy="2240280"/>
+          </a:xfrm>
+          <a:prstGeom prst="roundRect">
+            <a:avLst>
+              <a:gd name="adj" fmla="val 5500"/>
+            </a:avLst>
+          </a:prstGeom>
+          <a:solidFill>
+            <a:srgbClr val="FFFFFF"/>
+          </a:solidFill>
+          <a:ln w="20320">
+            <a:solidFill>
+              <a:srgbClr val="1E9E74"/>
+            </a:solidFill>
+          </a:ln>
+          <a:effectLst/>
+          <a:effectLst>
+            <a:outerShdw blurRad="90000" dist="38000" dir="5400000" rotWithShape="0">
+              <a:srgbClr val="20242E">
+                <a:alpha val="22000"/>
+              </a:srgbClr>
+            </a:outerShdw>
+          </a:effectLst>
+        </p:spPr>
+        <p:style>
+          <a:lnRef idx="1">
+            <a:schemeClr val="accent1"/>
+          </a:lnRef>
+          <a:fillRef idx="3">
+            <a:schemeClr val="accent1"/>
+          </a:fillRef>
+          <a:effectRef idx="2">
+            <a:schemeClr val="accent1"/>
+          </a:effectRef>
+          <a:fontRef idx="minor">
+            <a:schemeClr val="lt1"/>
+          </a:fontRef>
+        </p:style>
+        <p:txBody>
+          <a:bodyPr rtlCol="0" anchor="ctr"/>
+          <a:lstStyle/>
+          <a:p>
+            <a:pPr algn="ctr"/>
+          </a:p>
+        </p:txBody>
+      </p:sp>
+      <p:sp>
+        <p:nvSpPr>
+          <p:cNvPr id="22" name="Rectangle 21">
+            <a:hlinkClick action="ppaction://hlinksldjump" r:id="rId4"/>
+          </p:cNvPr>
+          <p:cNvSpPr/>
+          <p:nvPr/>
+        </p:nvSpPr>
+        <p:spPr>
+          <a:xfrm>
+            <a:off x="6199632" y="1417320"/>
+            <a:ext cx="2743200" cy="457200"/>
+          </a:xfrm>
+          <a:prstGeom prst="rect">
+            <a:avLst/>
+          </a:prstGeom>
+          <a:solidFill>
+            <a:srgbClr val="1E9E74"/>
+          </a:solidFill>
+          <a:ln>
+            <a:noFill/>
+          </a:ln>
+          <a:effectLst/>
+        </p:spPr>
+        <p:style>
+          <a:lnRef idx="1">
+            <a:schemeClr val="accent1"/>
+          </a:lnRef>
+          <a:fillRef idx="3">
+            <a:schemeClr val="accent1"/>
+          </a:fillRef>
+          <a:effectRef idx="2">
+            <a:schemeClr val="accent1"/>
+          </a:effectRef>
+          <a:fontRef idx="minor">
+            <a:schemeClr val="lt1"/>
+          </a:fontRef>
+        </p:style>
+        <p:txBody>
+          <a:bodyPr rtlCol="0" anchor="ctr"/>
+          <a:lstStyle/>
+          <a:p>
+            <a:pPr algn="ctr"/>
+          </a:p>
+        </p:txBody>
+      </p:sp>
+      <p:sp>
+        <p:nvSpPr>
+          <p:cNvPr id="23" name="Rounded Rectangle 22"/>
+          <p:cNvSpPr/>
+          <p:nvPr/>
+        </p:nvSpPr>
+        <p:spPr>
+          <a:xfrm>
+            <a:off x="6309360" y="1490472"/>
+            <a:ext cx="310896" cy="310896"/>
+          </a:xfrm>
+          <a:prstGeom prst="roundRect">
+            <a:avLst>
+              <a:gd name="adj" fmla="val 50000"/>
+            </a:avLst>
+          </a:prstGeom>
+          <a:solidFill>
+            <a:srgbClr val="FFFFFF"/>
+          </a:solidFill>
+          <a:ln>
+            <a:noFill/>
+          </a:ln>
+          <a:effectLst/>
+        </p:spPr>
+        <p:style>
+          <a:lnRef idx="1">
+            <a:schemeClr val="accent1"/>
+          </a:lnRef>
+          <a:fillRef idx="3">
+            <a:schemeClr val="accent1"/>
+          </a:fillRef>
+          <a:effectRef idx="2">
+            <a:schemeClr val="accent1"/>
+          </a:effectRef>
+          <a:fontRef idx="minor">
+            <a:schemeClr val="lt1"/>
+          </a:fontRef>
+        </p:style>
+        <p:txBody>
+          <a:bodyPr rtlCol="0" anchor="ctr"/>
+          <a:lstStyle/>
+          <a:p>
+            <a:pPr algn="ctr"/>
+            <a:r>
+              <a:rPr sz="1200" b="1">
+                <a:solidFill>
+                  <a:srgbClr val="1E9E74"/>
+                </a:solidFill>
+                <a:latin typeface="Bricolage Grotesque"/>
+              </a:rPr>
+              <a:t>§3</a:t>
+            </a:r>
+          </a:p>
+        </p:txBody>
+      </p:sp>
+      <p:sp>
+        <p:nvSpPr>
+          <p:cNvPr id="24" name="TextBox 23"/>
+          <p:cNvSpPr txBox="1"/>
+          <p:nvPr/>
+        </p:nvSpPr>
+        <p:spPr>
+          <a:xfrm>
+            <a:off x="6729984" y="1472184"/>
+            <a:ext cx="2103120" cy="365760"/>
+          </a:xfrm>
+          <a:prstGeom prst="rect">
+            <a:avLst/>
+          </a:prstGeom>
+          <a:noFill/>
+        </p:spPr>
+        <p:txBody>
+          <a:bodyPr wrap="square" anchor="ctr" lIns="38100" rIns="38100" tIns="25400" bIns="25400">
+            <a:spAutoFit/>
+          </a:bodyPr>
+          <a:lstStyle/>
+          <a:p>
+            <a:pPr algn="l">
+              <a:lnSpc>
+                <a:spcPct val="106000"/>
+              </a:lnSpc>
+              <a:spcBef>
+                <a:spcPts val="0"/>
+              </a:spcBef>
+              <a:spcAft>
+                <a:spcPts val="200"/>
+              </a:spcAft>
+            </a:pPr>
+            <a:r>
+              <a:rPr sz="1450" b="1" i="0">
+                <a:solidFill>
+                  <a:srgbClr val="FFFFFF"/>
+                </a:solidFill>
+                <a:latin typeface="Bricolage Grotesque"/>
+              </a:rPr>
+              <a:t>Números 0–100</a:t>
+            </a:r>
+          </a:p>
+        </p:txBody>
+      </p:sp>
+      <p:sp>
+        <p:nvSpPr>
+          <p:cNvPr id="25" name="TextBox 24"/>
+          <p:cNvSpPr txBox="1"/>
+          <p:nvPr/>
+        </p:nvSpPr>
+        <p:spPr>
+          <a:xfrm>
+            <a:off x="6364224" y="2039112"/>
+            <a:ext cx="2414016" cy="1097280"/>
+          </a:xfrm>
+          <a:prstGeom prst="rect">
+            <a:avLst/>
+          </a:prstGeom>
+          <a:noFill/>
+        </p:spPr>
+        <p:txBody>
+          <a:bodyPr wrap="square" anchor="t" lIns="38100" rIns="38100" tIns="25400" bIns="25400">
+            <a:spAutoFit/>
+          </a:bodyPr>
+          <a:lstStyle/>
+          <a:p>
+            <a:pPr algn="l">
+              <a:lnSpc>
+                <a:spcPct val="112000"/>
+              </a:lnSpc>
+              <a:spcBef>
+                <a:spcPts val="0"/>
+              </a:spcBef>
+              <a:spcAft>
+                <a:spcPts val="200"/>
+              </a:spcAft>
+            </a:pPr>
+            <a:r>
+              <a:rPr sz="1150" b="0" i="0">
+                <a:solidFill>
+                  <a:srgbClr val="20242E"/>
+                </a:solidFill>
+                <a:latin typeface="Inter"/>
+              </a:rPr>
+              <a:t>tellen · leeftijd · telefoon</a:t>
+            </a:r>
+          </a:p>
+        </p:txBody>
+      </p:sp>
+      <p:sp>
+        <p:nvSpPr>
+          <p:cNvPr id="26" name="Rounded Rectangle 25"/>
+          <p:cNvSpPr/>
+          <p:nvPr/>
+        </p:nvSpPr>
+        <p:spPr>
+          <a:xfrm>
+            <a:off x="6364224" y="3246120"/>
+            <a:ext cx="791870" cy="292608"/>
+          </a:xfrm>
+          <a:prstGeom prst="roundRect">
+            <a:avLst>
+              <a:gd name="adj" fmla="val 50000"/>
+            </a:avLst>
+          </a:prstGeom>
+          <a:solidFill>
+            <a:srgbClr val="E4F4EE"/>
+          </a:solidFill>
+          <a:ln>
+            <a:noFill/>
+          </a:ln>
+          <a:effectLst/>
+        </p:spPr>
+        <p:style>
+          <a:lnRef idx="1">
+            <a:schemeClr val="accent1"/>
+          </a:lnRef>
+          <a:fillRef idx="3">
+            <a:schemeClr val="accent1"/>
+          </a:fillRef>
+          <a:effectRef idx="2">
+            <a:schemeClr val="accent1"/>
+          </a:effectRef>
+          <a:fontRef idx="minor">
+            <a:schemeClr val="lt1"/>
+          </a:fontRef>
+        </p:style>
+        <p:txBody>
+          <a:bodyPr rtlCol="0" anchor="ctr" wrap="none" lIns="88900" rIns="88900" tIns="12700" bIns="12700"/>
+          <a:lstStyle/>
+          <a:p>
+            <a:pPr algn="ctr"/>
+            <a:r>
+              <a:rPr sz="950" b="1">
+                <a:solidFill>
+                  <a:srgbClr val="157355"/>
+                </a:solidFill>
+                <a:latin typeface="Inter"/>
+              </a:rPr>
+              <a:t>→ dia 10</a:t>
+            </a:r>
+          </a:p>
+        </p:txBody>
+      </p:sp>
+      <p:sp>
+        <p:nvSpPr>
+          <p:cNvPr id="27" name="Rounded Rectangle 26">
+            <a:hlinkClick action="ppaction://hlinksldjump" r:id="rId5"/>
+          </p:cNvPr>
+          <p:cNvSpPr/>
+          <p:nvPr/>
+        </p:nvSpPr>
+        <p:spPr>
+          <a:xfrm>
+            <a:off x="9070848" y="1417320"/>
+            <a:ext cx="2743200" cy="2240280"/>
+          </a:xfrm>
+          <a:prstGeom prst="roundRect">
+            <a:avLst>
+              <a:gd name="adj" fmla="val 5500"/>
+            </a:avLst>
+          </a:prstGeom>
+          <a:solidFill>
+            <a:srgbClr val="FFFFFF"/>
+          </a:solidFill>
+          <a:ln w="20320">
+            <a:solidFill>
+              <a:srgbClr val="1E9E74"/>
+            </a:solidFill>
+          </a:ln>
+          <a:effectLst/>
+          <a:effectLst>
+            <a:outerShdw blurRad="90000" dist="38000" dir="5400000" rotWithShape="0">
+              <a:srgbClr val="20242E">
+                <a:alpha val="22000"/>
+              </a:srgbClr>
+            </a:outerShdw>
+          </a:effectLst>
+        </p:spPr>
+        <p:style>
+          <a:lnRef idx="1">
+            <a:schemeClr val="accent1"/>
+          </a:lnRef>
+          <a:fillRef idx="3">
+            <a:schemeClr val="accent1"/>
+          </a:fillRef>
+          <a:effectRef idx="2">
+            <a:schemeClr val="accent1"/>
+          </a:effectRef>
+          <a:fontRef idx="minor">
+            <a:schemeClr val="lt1"/>
+          </a:fontRef>
+        </p:style>
+        <p:txBody>
+          <a:bodyPr rtlCol="0" anchor="ctr"/>
+          <a:lstStyle/>
+          <a:p>
+            <a:pPr algn="ctr"/>
+          </a:p>
+        </p:txBody>
+      </p:sp>
+      <p:sp>
+        <p:nvSpPr>
+          <p:cNvPr id="28" name="Rectangle 27">
+            <a:hlinkClick action="ppaction://hlinksldjump" r:id="rId5"/>
+          </p:cNvPr>
+          <p:cNvSpPr/>
+          <p:nvPr/>
+        </p:nvSpPr>
+        <p:spPr>
+          <a:xfrm>
+            <a:off x="9070848" y="1417320"/>
+            <a:ext cx="2743200" cy="457200"/>
+          </a:xfrm>
+          <a:prstGeom prst="rect">
+            <a:avLst/>
+          </a:prstGeom>
+          <a:solidFill>
+            <a:srgbClr val="1E9E74"/>
+          </a:solidFill>
+          <a:ln>
+            <a:noFill/>
+          </a:ln>
+          <a:effectLst/>
+        </p:spPr>
+        <p:style>
+          <a:lnRef idx="1">
+            <a:schemeClr val="accent1"/>
+          </a:lnRef>
+          <a:fillRef idx="3">
+            <a:schemeClr val="accent1"/>
+          </a:fillRef>
+          <a:effectRef idx="2">
+            <a:schemeClr val="accent1"/>
+          </a:effectRef>
+          <a:fontRef idx="minor">
+            <a:schemeClr val="lt1"/>
+          </a:fontRef>
+        </p:style>
+        <p:txBody>
+          <a:bodyPr rtlCol="0" anchor="ctr"/>
+          <a:lstStyle/>
+          <a:p>
+            <a:pPr algn="ctr"/>
+          </a:p>
+        </p:txBody>
+      </p:sp>
+      <p:sp>
+        <p:nvSpPr>
+          <p:cNvPr id="29" name="Rounded Rectangle 28"/>
+          <p:cNvSpPr/>
+          <p:nvPr/>
+        </p:nvSpPr>
+        <p:spPr>
+          <a:xfrm>
+            <a:off x="9180576" y="1490472"/>
+            <a:ext cx="310896" cy="310896"/>
+          </a:xfrm>
+          <a:prstGeom prst="roundRect">
+            <a:avLst>
+              <a:gd name="adj" fmla="val 50000"/>
+            </a:avLst>
+          </a:prstGeom>
+          <a:solidFill>
+            <a:srgbClr val="FFFFFF"/>
+          </a:solidFill>
+          <a:ln>
+            <a:noFill/>
+          </a:ln>
+          <a:effectLst/>
+        </p:spPr>
+        <p:style>
+          <a:lnRef idx="1">
+            <a:schemeClr val="accent1"/>
+          </a:lnRef>
+          <a:fillRef idx="3">
+            <a:schemeClr val="accent1"/>
+          </a:fillRef>
+          <a:effectRef idx="2">
+            <a:schemeClr val="accent1"/>
+          </a:effectRef>
+          <a:fontRef idx="minor">
+            <a:schemeClr val="lt1"/>
+          </a:fontRef>
+        </p:style>
+        <p:txBody>
+          <a:bodyPr rtlCol="0" anchor="ctr"/>
+          <a:lstStyle/>
+          <a:p>
+            <a:pPr algn="ctr"/>
+            <a:r>
+              <a:rPr sz="1200" b="1">
+                <a:solidFill>
+                  <a:srgbClr val="1E9E74"/>
+                </a:solidFill>
+                <a:latin typeface="Bricolage Grotesque"/>
+              </a:rPr>
+              <a:t>§4</a:t>
+            </a:r>
+          </a:p>
+        </p:txBody>
+      </p:sp>
+      <p:sp>
+        <p:nvSpPr>
+          <p:cNvPr id="30" name="TextBox 29"/>
+          <p:cNvSpPr txBox="1"/>
+          <p:nvPr/>
+        </p:nvSpPr>
+        <p:spPr>
+          <a:xfrm>
+            <a:off x="9601200" y="1472184"/>
+            <a:ext cx="2103120" cy="365760"/>
+          </a:xfrm>
+          <a:prstGeom prst="rect">
+            <a:avLst/>
+          </a:prstGeom>
+          <a:noFill/>
+        </p:spPr>
+        <p:txBody>
+          <a:bodyPr wrap="square" anchor="ctr" lIns="38100" rIns="38100" tIns="25400" bIns="25400">
+            <a:spAutoFit/>
+          </a:bodyPr>
+          <a:lstStyle/>
+          <a:p>
+            <a:pPr algn="l">
+              <a:lnSpc>
+                <a:spcPct val="106000"/>
+              </a:lnSpc>
+              <a:spcBef>
+                <a:spcPts val="0"/>
+              </a:spcBef>
+              <a:spcAft>
+                <a:spcPts val="200"/>
+              </a:spcAft>
+            </a:pPr>
+            <a:r>
+              <a:rPr sz="1450" b="1" i="0">
+                <a:solidFill>
+                  <a:srgbClr val="FFFFFF"/>
+                </a:solidFill>
+                <a:latin typeface="Bricolage Grotesque"/>
+              </a:rPr>
+              <a:t>Saludos y clase</a:t>
+            </a:r>
+          </a:p>
+        </p:txBody>
+      </p:sp>
+      <p:sp>
+        <p:nvSpPr>
+          <p:cNvPr id="31" name="TextBox 30"/>
+          <p:cNvSpPr txBox="1"/>
+          <p:nvPr/>
+        </p:nvSpPr>
+        <p:spPr>
+          <a:xfrm>
+            <a:off x="9235440" y="2039112"/>
+            <a:ext cx="2414016" cy="1097280"/>
+          </a:xfrm>
+          <a:prstGeom prst="rect">
+            <a:avLst/>
+          </a:prstGeom>
+          <a:noFill/>
+        </p:spPr>
+        <p:txBody>
+          <a:bodyPr wrap="square" anchor="t" lIns="38100" rIns="38100" tIns="25400" bIns="25400">
+            <a:spAutoFit/>
+          </a:bodyPr>
+          <a:lstStyle/>
+          <a:p>
+            <a:pPr algn="l">
+              <a:lnSpc>
+                <a:spcPct val="112000"/>
+              </a:lnSpc>
+              <a:spcBef>
+                <a:spcPts val="0"/>
+              </a:spcBef>
+              <a:spcAft>
+                <a:spcPts val="200"/>
+              </a:spcAft>
+            </a:pPr>
+            <a:r>
+              <a:rPr sz="1150" b="0" i="0">
+                <a:solidFill>
+                  <a:srgbClr val="20242E"/>
+                </a:solidFill>
+                <a:latin typeface="Inter"/>
+              </a:rPr>
+              <a:t>groeten · voorstellen · lengua de clase</a:t>
+            </a:r>
+          </a:p>
+        </p:txBody>
+      </p:sp>
+      <p:sp>
+        <p:nvSpPr>
+          <p:cNvPr id="32" name="Rounded Rectangle 31"/>
+          <p:cNvSpPr/>
+          <p:nvPr/>
+        </p:nvSpPr>
+        <p:spPr>
+          <a:xfrm>
+            <a:off x="9235440" y="3246120"/>
+            <a:ext cx="791870" cy="292608"/>
+          </a:xfrm>
+          <a:prstGeom prst="roundRect">
+            <a:avLst>
+              <a:gd name="adj" fmla="val 50000"/>
+            </a:avLst>
+          </a:prstGeom>
+          <a:solidFill>
+            <a:srgbClr val="E4F4EE"/>
+          </a:solidFill>
+          <a:ln>
+            <a:noFill/>
+          </a:ln>
+          <a:effectLst/>
+        </p:spPr>
+        <p:style>
+          <a:lnRef idx="1">
+            <a:schemeClr val="accent1"/>
+          </a:lnRef>
+          <a:fillRef idx="3">
+            <a:schemeClr val="accent1"/>
+          </a:fillRef>
+          <a:effectRef idx="2">
+            <a:schemeClr val="accent1"/>
+          </a:effectRef>
+          <a:fontRef idx="minor">
+            <a:schemeClr val="lt1"/>
+          </a:fontRef>
+        </p:style>
+        <p:txBody>
+          <a:bodyPr rtlCol="0" anchor="ctr" wrap="none" lIns="88900" rIns="88900" tIns="12700" bIns="12700"/>
+          <a:lstStyle/>
+          <a:p>
+            <a:pPr algn="ctr"/>
+            <a:r>
+              <a:rPr sz="950" b="1">
+                <a:solidFill>
+                  <a:srgbClr val="157355"/>
+                </a:solidFill>
+                <a:latin typeface="Inter"/>
+              </a:rPr>
+              <a:t>→ dia 13</a:t>
+            </a:r>
+          </a:p>
+        </p:txBody>
+      </p:sp>
+      <p:sp>
+        <p:nvSpPr>
+          <p:cNvPr id="33" name="Rounded Rectangle 32">
+            <a:hlinkClick action="ppaction://hlinksldjump" r:id="rId6"/>
+          </p:cNvPr>
+          <p:cNvSpPr/>
+          <p:nvPr/>
+        </p:nvSpPr>
+        <p:spPr>
+          <a:xfrm>
+            <a:off x="457200" y="3840480"/>
+            <a:ext cx="2743200" cy="2240280"/>
+          </a:xfrm>
+          <a:prstGeom prst="roundRect">
+            <a:avLst>
+              <a:gd name="adj" fmla="val 5500"/>
+            </a:avLst>
+          </a:prstGeom>
+          <a:solidFill>
+            <a:srgbClr val="FFFFFF"/>
+          </a:solidFill>
+          <a:ln w="20320">
+            <a:solidFill>
+              <a:srgbClr val="157355"/>
+            </a:solidFill>
+          </a:ln>
+          <a:effectLst/>
+          <a:effectLst>
+            <a:outerShdw blurRad="90000" dist="38000" dir="5400000" rotWithShape="0">
+              <a:srgbClr val="20242E">
+                <a:alpha val="22000"/>
+              </a:srgbClr>
+            </a:outerShdw>
+          </a:effectLst>
+        </p:spPr>
+        <p:style>
+          <a:lnRef idx="1">
+            <a:schemeClr val="accent1"/>
+          </a:lnRef>
+          <a:fillRef idx="3">
+            <a:schemeClr val="accent1"/>
+          </a:fillRef>
+          <a:effectRef idx="2">
+            <a:schemeClr val="accent1"/>
+          </a:effectRef>
+          <a:fontRef idx="minor">
+            <a:schemeClr val="lt1"/>
+          </a:fontRef>
+        </p:style>
+        <p:txBody>
+          <a:bodyPr rtlCol="0" anchor="ctr"/>
+          <a:lstStyle/>
+          <a:p>
+            <a:pPr algn="ctr"/>
+          </a:p>
+        </p:txBody>
+      </p:sp>
+      <p:sp>
+        <p:nvSpPr>
+          <p:cNvPr id="34" name="Rectangle 33">
+            <a:hlinkClick action="ppaction://hlinksldjump" r:id="rId6"/>
+          </p:cNvPr>
+          <p:cNvSpPr/>
+          <p:nvPr/>
+        </p:nvSpPr>
+        <p:spPr>
+          <a:xfrm>
+            <a:off x="457200" y="3840480"/>
+            <a:ext cx="2743200" cy="457200"/>
+          </a:xfrm>
+          <a:prstGeom prst="rect">
+            <a:avLst/>
+          </a:prstGeom>
+          <a:solidFill>
+            <a:srgbClr val="157355"/>
+          </a:solidFill>
+          <a:ln>
+            <a:noFill/>
+          </a:ln>
+          <a:effectLst/>
+        </p:spPr>
+        <p:style>
+          <a:lnRef idx="1">
+            <a:schemeClr val="accent1"/>
+          </a:lnRef>
+          <a:fillRef idx="3">
+            <a:schemeClr val="accent1"/>
+          </a:fillRef>
+          <a:effectRef idx="2">
+            <a:schemeClr val="accent1"/>
+          </a:effectRef>
+          <a:fontRef idx="minor">
+            <a:schemeClr val="lt1"/>
+          </a:fontRef>
+        </p:style>
+        <p:txBody>
+          <a:bodyPr rtlCol="0" anchor="ctr"/>
+          <a:lstStyle/>
+          <a:p>
+            <a:pPr algn="ctr"/>
+          </a:p>
+        </p:txBody>
+      </p:sp>
+      <p:sp>
+        <p:nvSpPr>
+          <p:cNvPr id="35" name="Rounded Rectangle 34"/>
+          <p:cNvSpPr/>
+          <p:nvPr/>
+        </p:nvSpPr>
+        <p:spPr>
+          <a:xfrm>
+            <a:off x="566928" y="3913632"/>
+            <a:ext cx="310896" cy="310896"/>
+          </a:xfrm>
+          <a:prstGeom prst="roundRect">
+            <a:avLst>
+              <a:gd name="adj" fmla="val 50000"/>
+            </a:avLst>
+          </a:prstGeom>
+          <a:solidFill>
+            <a:srgbClr val="FFFFFF"/>
+          </a:solidFill>
+          <a:ln>
+            <a:noFill/>
+          </a:ln>
+          <a:effectLst/>
+        </p:spPr>
+        <p:style>
+          <a:lnRef idx="1">
+            <a:schemeClr val="accent1"/>
+          </a:lnRef>
+          <a:fillRef idx="3">
+            <a:schemeClr val="accent1"/>
+          </a:fillRef>
+          <a:effectRef idx="2">
+            <a:schemeClr val="accent1"/>
+          </a:effectRef>
+          <a:fontRef idx="minor">
+            <a:schemeClr val="lt1"/>
+          </a:fontRef>
+        </p:style>
+        <p:txBody>
+          <a:bodyPr rtlCol="0" anchor="ctr"/>
+          <a:lstStyle/>
+          <a:p>
+            <a:pPr algn="ctr"/>
+            <a:r>
+              <a:rPr sz="1200" b="1">
+                <a:solidFill>
+                  <a:srgbClr val="157355"/>
+                </a:solidFill>
+                <a:latin typeface="Bricolage Grotesque"/>
+              </a:rPr>
+              <a:t>★</a:t>
+            </a:r>
+          </a:p>
+        </p:txBody>
+      </p:sp>
+      <p:sp>
+        <p:nvSpPr>
+          <p:cNvPr id="36" name="TextBox 35"/>
+          <p:cNvSpPr txBox="1"/>
+          <p:nvPr/>
+        </p:nvSpPr>
+        <p:spPr>
+          <a:xfrm>
+            <a:off x="987552" y="3895344"/>
+            <a:ext cx="2103120" cy="365760"/>
+          </a:xfrm>
+          <a:prstGeom prst="rect">
+            <a:avLst/>
+          </a:prstGeom>
+          <a:noFill/>
+        </p:spPr>
+        <p:txBody>
+          <a:bodyPr wrap="square" anchor="ctr" lIns="38100" rIns="38100" tIns="25400" bIns="25400">
+            <a:spAutoFit/>
+          </a:bodyPr>
+          <a:lstStyle/>
+          <a:p>
+            <a:pPr algn="l">
+              <a:lnSpc>
+                <a:spcPct val="106000"/>
+              </a:lnSpc>
+              <a:spcBef>
+                <a:spcPts val="0"/>
+              </a:spcBef>
+              <a:spcAft>
+                <a:spcPts val="200"/>
+              </a:spcAft>
+            </a:pPr>
+            <a:r>
+              <a:rPr sz="1450" b="1" i="0">
+                <a:solidFill>
+                  <a:srgbClr val="FFFFFF"/>
+                </a:solidFill>
+                <a:latin typeface="Bricolage Grotesque"/>
+              </a:rPr>
+              <a:t>Cultura</a:t>
+            </a:r>
+          </a:p>
+        </p:txBody>
+      </p:sp>
+      <p:sp>
+        <p:nvSpPr>
+          <p:cNvPr id="37" name="TextBox 36"/>
+          <p:cNvSpPr txBox="1"/>
+          <p:nvPr/>
+        </p:nvSpPr>
+        <p:spPr>
+          <a:xfrm>
+            <a:off x="621792" y="4462272"/>
+            <a:ext cx="2414016" cy="1097280"/>
+          </a:xfrm>
+          <a:prstGeom prst="rect">
+            <a:avLst/>
+          </a:prstGeom>
+          <a:noFill/>
+        </p:spPr>
+        <p:txBody>
+          <a:bodyPr wrap="square" anchor="t" lIns="38100" rIns="38100" tIns="25400" bIns="25400">
+            <a:spAutoFit/>
+          </a:bodyPr>
+          <a:lstStyle/>
+          <a:p>
+            <a:pPr algn="l">
+              <a:lnSpc>
+                <a:spcPct val="112000"/>
+              </a:lnSpc>
+              <a:spcBef>
+                <a:spcPts val="0"/>
+              </a:spcBef>
+              <a:spcAft>
+                <a:spcPts val="200"/>
+              </a:spcAft>
+            </a:pPr>
+            <a:r>
+              <a:rPr sz="1150" b="0" i="0">
+                <a:solidFill>
+                  <a:srgbClr val="20242E"/>
+                </a:solidFill>
+                <a:latin typeface="Inter"/>
+              </a:rPr>
+              <a:t>¿Dónde se habla español? (+20 países)</a:t>
+            </a:r>
+          </a:p>
+        </p:txBody>
+      </p:sp>
+      <p:sp>
+        <p:nvSpPr>
+          <p:cNvPr id="38" name="Rounded Rectangle 37"/>
+          <p:cNvSpPr/>
+          <p:nvPr/>
+        </p:nvSpPr>
+        <p:spPr>
+          <a:xfrm>
+            <a:off x="621792" y="5669280"/>
+            <a:ext cx="791870" cy="292608"/>
+          </a:xfrm>
+          <a:prstGeom prst="roundRect">
+            <a:avLst>
+              <a:gd name="adj" fmla="val 50000"/>
+            </a:avLst>
+          </a:prstGeom>
+          <a:solidFill>
+            <a:srgbClr val="E4F4EE"/>
+          </a:solidFill>
+          <a:ln>
+            <a:noFill/>
+          </a:ln>
+          <a:effectLst/>
+        </p:spPr>
+        <p:style>
+          <a:lnRef idx="1">
+            <a:schemeClr val="accent1"/>
+          </a:lnRef>
+          <a:fillRef idx="3">
+            <a:schemeClr val="accent1"/>
+          </a:fillRef>
+          <a:effectRef idx="2">
+            <a:schemeClr val="accent1"/>
+          </a:effectRef>
+          <a:fontRef idx="minor">
+            <a:schemeClr val="lt1"/>
+          </a:fontRef>
+        </p:style>
+        <p:txBody>
+          <a:bodyPr rtlCol="0" anchor="ctr" wrap="none" lIns="88900" rIns="88900" tIns="12700" bIns="12700"/>
+          <a:lstStyle/>
+          <a:p>
+            <a:pPr algn="ctr"/>
+            <a:r>
+              <a:rPr sz="950" b="1">
+                <a:solidFill>
+                  <a:srgbClr val="157355"/>
+                </a:solidFill>
+                <a:latin typeface="Inter"/>
+              </a:rPr>
+              <a:t>→ dia 16</a:t>
+            </a:r>
+          </a:p>
+        </p:txBody>
+      </p:sp>
+      <p:sp>
+        <p:nvSpPr>
+          <p:cNvPr id="39" name="Rounded Rectangle 38">
+            <a:hlinkClick action="ppaction://hlinksldjump" r:id="rId7"/>
+          </p:cNvPr>
+          <p:cNvSpPr/>
+          <p:nvPr/>
+        </p:nvSpPr>
+        <p:spPr>
+          <a:xfrm>
+            <a:off x="3328416" y="3840480"/>
+            <a:ext cx="2743200" cy="2240280"/>
+          </a:xfrm>
+          <a:prstGeom prst="roundRect">
+            <a:avLst>
+              <a:gd name="adj" fmla="val 5500"/>
+            </a:avLst>
+          </a:prstGeom>
+          <a:solidFill>
+            <a:srgbClr val="FFFFFF"/>
+          </a:solidFill>
+          <a:ln w="20320">
+            <a:solidFill>
+              <a:srgbClr val="157355"/>
+            </a:solidFill>
+          </a:ln>
+          <a:effectLst/>
+          <a:effectLst>
+            <a:outerShdw blurRad="90000" dist="38000" dir="5400000" rotWithShape="0">
+              <a:srgbClr val="20242E">
+                <a:alpha val="22000"/>
+              </a:srgbClr>
+            </a:outerShdw>
+          </a:effectLst>
+        </p:spPr>
+        <p:style>
+          <a:lnRef idx="1">
+            <a:schemeClr val="accent1"/>
+          </a:lnRef>
+          <a:fillRef idx="3">
+            <a:schemeClr val="accent1"/>
+          </a:fillRef>
+          <a:effectRef idx="2">
+            <a:schemeClr val="accent1"/>
+          </a:effectRef>
+          <a:fontRef idx="minor">
+            <a:schemeClr val="lt1"/>
+          </a:fontRef>
+        </p:style>
+        <p:txBody>
+          <a:bodyPr rtlCol="0" anchor="ctr"/>
+          <a:lstStyle/>
+          <a:p>
+            <a:pPr algn="ctr"/>
+          </a:p>
+        </p:txBody>
+      </p:sp>
+      <p:sp>
+        <p:nvSpPr>
+          <p:cNvPr id="40" name="Rectangle 39">
+            <a:hlinkClick action="ppaction://hlinksldjump" r:id="rId7"/>
+          </p:cNvPr>
+          <p:cNvSpPr/>
+          <p:nvPr/>
+        </p:nvSpPr>
+        <p:spPr>
+          <a:xfrm>
+            <a:off x="3328416" y="3840480"/>
+            <a:ext cx="2743200" cy="457200"/>
+          </a:xfrm>
+          <a:prstGeom prst="rect">
+            <a:avLst/>
+          </a:prstGeom>
+          <a:solidFill>
+            <a:srgbClr val="157355"/>
+          </a:solidFill>
+          <a:ln>
+            <a:noFill/>
+          </a:ln>
+          <a:effectLst/>
+        </p:spPr>
+        <p:style>
+          <a:lnRef idx="1">
+            <a:schemeClr val="accent1"/>
+          </a:lnRef>
+          <a:fillRef idx="3">
+            <a:schemeClr val="accent1"/>
+          </a:fillRef>
+          <a:effectRef idx="2">
+            <a:schemeClr val="accent1"/>
+          </a:effectRef>
+          <a:fontRef idx="minor">
+            <a:schemeClr val="lt1"/>
+          </a:fontRef>
+        </p:style>
+        <p:txBody>
+          <a:bodyPr rtlCol="0" anchor="ctr"/>
+          <a:lstStyle/>
+          <a:p>
+            <a:pPr algn="ctr"/>
+          </a:p>
+        </p:txBody>
+      </p:sp>
+      <p:sp>
+        <p:nvSpPr>
+          <p:cNvPr id="41" name="Rounded Rectangle 40"/>
+          <p:cNvSpPr/>
+          <p:nvPr/>
+        </p:nvSpPr>
+        <p:spPr>
+          <a:xfrm>
+            <a:off x="3438144" y="3913632"/>
+            <a:ext cx="310896" cy="310896"/>
+          </a:xfrm>
+          <a:prstGeom prst="roundRect">
+            <a:avLst>
+              <a:gd name="adj" fmla="val 50000"/>
+            </a:avLst>
+          </a:prstGeom>
+          <a:solidFill>
+            <a:srgbClr val="FFFFFF"/>
+          </a:solidFill>
+          <a:ln>
+            <a:noFill/>
+          </a:ln>
+          <a:effectLst/>
+        </p:spPr>
+        <p:style>
+          <a:lnRef idx="1">
+            <a:schemeClr val="accent1"/>
+          </a:lnRef>
+          <a:fillRef idx="3">
+            <a:schemeClr val="accent1"/>
+          </a:fillRef>
+          <a:effectRef idx="2">
+            <a:schemeClr val="accent1"/>
+          </a:effectRef>
+          <a:fontRef idx="minor">
+            <a:schemeClr val="lt1"/>
+          </a:fontRef>
+        </p:style>
+        <p:txBody>
+          <a:bodyPr rtlCol="0" anchor="ctr"/>
+          <a:lstStyle/>
+          <a:p>
+            <a:pPr algn="ctr"/>
+            <a:r>
+              <a:rPr sz="1200" b="1">
+                <a:solidFill>
+                  <a:srgbClr val="157355"/>
+                </a:solidFill>
+                <a:latin typeface="Bricolage Grotesque"/>
+              </a:rPr>
+              <a:t>✈</a:t>
+            </a:r>
+          </a:p>
+        </p:txBody>
+      </p:sp>
+      <p:sp>
+        <p:nvSpPr>
+          <p:cNvPr id="42" name="TextBox 41"/>
+          <p:cNvSpPr txBox="1"/>
+          <p:nvPr/>
+        </p:nvSpPr>
+        <p:spPr>
+          <a:xfrm>
+            <a:off x="3858768" y="3895344"/>
+            <a:ext cx="2103120" cy="365760"/>
+          </a:xfrm>
+          <a:prstGeom prst="rect">
+            <a:avLst/>
+          </a:prstGeom>
+          <a:noFill/>
+        </p:spPr>
+        <p:txBody>
+          <a:bodyPr wrap="square" anchor="ctr" lIns="38100" rIns="38100" tIns="25400" bIns="25400">
+            <a:spAutoFit/>
+          </a:bodyPr>
+          <a:lstStyle/>
+          <a:p>
+            <a:pPr algn="l">
+              <a:lnSpc>
+                <a:spcPct val="106000"/>
+              </a:lnSpc>
+              <a:spcBef>
+                <a:spcPts val="0"/>
+              </a:spcBef>
+              <a:spcAft>
+                <a:spcPts val="200"/>
+              </a:spcAft>
+            </a:pPr>
+            <a:r>
+              <a:rPr sz="1450" b="1" i="0">
+                <a:solidFill>
+                  <a:srgbClr val="FFFFFF"/>
+                </a:solidFill>
+                <a:latin typeface="Bricolage Grotesque"/>
+              </a:rPr>
+              <a:t>Tarea final</a:t>
+            </a:r>
+          </a:p>
+        </p:txBody>
+      </p:sp>
+      <p:sp>
+        <p:nvSpPr>
+          <p:cNvPr id="43" name="TextBox 42"/>
+          <p:cNvSpPr txBox="1"/>
+          <p:nvPr/>
+        </p:nvSpPr>
+        <p:spPr>
+          <a:xfrm>
+            <a:off x="3493008" y="4462272"/>
+            <a:ext cx="2414016" cy="1097280"/>
+          </a:xfrm>
+          <a:prstGeom prst="rect">
+            <a:avLst/>
+          </a:prstGeom>
+          <a:noFill/>
+        </p:spPr>
+        <p:txBody>
+          <a:bodyPr wrap="square" anchor="t" lIns="38100" rIns="38100" tIns="25400" bIns="25400">
+            <a:spAutoFit/>
+          </a:bodyPr>
+          <a:lstStyle/>
+          <a:p>
+            <a:pPr algn="l">
+              <a:lnSpc>
+                <a:spcPct val="112000"/>
+              </a:lnSpc>
+              <a:spcBef>
+                <a:spcPts val="0"/>
+              </a:spcBef>
+              <a:spcAft>
+                <a:spcPts val="200"/>
+              </a:spcAft>
+            </a:pPr>
+            <a:r>
+              <a:rPr sz="1150" b="0" i="0">
+                <a:solidFill>
+                  <a:srgbClr val="20242E"/>
+                </a:solidFill>
+                <a:latin typeface="Inter"/>
+              </a:rPr>
+              <a:t>Tarjeta de embarque (eindmissie)</a:t>
+            </a:r>
+          </a:p>
+        </p:txBody>
+      </p:sp>
+      <p:sp>
+        <p:nvSpPr>
+          <p:cNvPr id="44" name="Rounded Rectangle 43"/>
+          <p:cNvSpPr/>
+          <p:nvPr/>
+        </p:nvSpPr>
+        <p:spPr>
+          <a:xfrm>
+            <a:off x="3493008" y="5669280"/>
+            <a:ext cx="791870" cy="292608"/>
+          </a:xfrm>
+          <a:prstGeom prst="roundRect">
+            <a:avLst>
+              <a:gd name="adj" fmla="val 50000"/>
+            </a:avLst>
+          </a:prstGeom>
+          <a:solidFill>
+            <a:srgbClr val="E4F4EE"/>
+          </a:solidFill>
+          <a:ln>
+            <a:noFill/>
+          </a:ln>
+          <a:effectLst/>
+        </p:spPr>
+        <p:style>
+          <a:lnRef idx="1">
+            <a:schemeClr val="accent1"/>
+          </a:lnRef>
+          <a:fillRef idx="3">
+            <a:schemeClr val="accent1"/>
+          </a:fillRef>
+          <a:effectRef idx="2">
+            <a:schemeClr val="accent1"/>
+          </a:effectRef>
+          <a:fontRef idx="minor">
+            <a:schemeClr val="lt1"/>
+          </a:fontRef>
+        </p:style>
+        <p:txBody>
+          <a:bodyPr rtlCol="0" anchor="ctr" wrap="none" lIns="88900" rIns="88900" tIns="12700" bIns="12700"/>
+          <a:lstStyle/>
+          <a:p>
+            <a:pPr algn="ctr"/>
+            <a:r>
+              <a:rPr sz="950" b="1">
+                <a:solidFill>
+                  <a:srgbClr val="157355"/>
+                </a:solidFill>
+                <a:latin typeface="Inter"/>
+              </a:rPr>
+              <a:t>→ dia 18</a:t>
+            </a:r>
+          </a:p>
+        </p:txBody>
+      </p:sp>
+      <p:sp>
+        <p:nvSpPr>
+          <p:cNvPr id="45" name="Rounded Rectangle 44">
+            <a:hlinkClick action="ppaction://hlinksldjump" r:id="rId8"/>
+          </p:cNvPr>
+          <p:cNvSpPr/>
+          <p:nvPr/>
+        </p:nvSpPr>
+        <p:spPr>
+          <a:xfrm>
+            <a:off x="6199632" y="3840480"/>
+            <a:ext cx="2743200" cy="2240280"/>
+          </a:xfrm>
+          <a:prstGeom prst="roundRect">
+            <a:avLst>
+              <a:gd name="adj" fmla="val 5500"/>
+            </a:avLst>
+          </a:prstGeom>
+          <a:solidFill>
+            <a:srgbClr val="FFFFFF"/>
+          </a:solidFill>
+          <a:ln w="20320">
+            <a:solidFill>
+              <a:srgbClr val="B7860B"/>
+            </a:solidFill>
+          </a:ln>
+          <a:effectLst/>
+          <a:effectLst>
+            <a:outerShdw blurRad="90000" dist="38000" dir="5400000" rotWithShape="0">
+              <a:srgbClr val="20242E">
+                <a:alpha val="22000"/>
+              </a:srgbClr>
+            </a:outerShdw>
+          </a:effectLst>
+        </p:spPr>
+        <p:style>
+          <a:lnRef idx="1">
+            <a:schemeClr val="accent1"/>
+          </a:lnRef>
+          <a:fillRef idx="3">
+            <a:schemeClr val="accent1"/>
+          </a:fillRef>
+          <a:effectRef idx="2">
+            <a:schemeClr val="accent1"/>
+          </a:effectRef>
+          <a:fontRef idx="minor">
+            <a:schemeClr val="lt1"/>
+          </a:fontRef>
+        </p:style>
+        <p:txBody>
+          <a:bodyPr rtlCol="0" anchor="ctr"/>
+          <a:lstStyle/>
+          <a:p>
+            <a:pPr algn="ctr"/>
+          </a:p>
+        </p:txBody>
+      </p:sp>
+      <p:sp>
+        <p:nvSpPr>
+          <p:cNvPr id="46" name="Rectangle 45">
+            <a:hlinkClick action="ppaction://hlinksldjump" r:id="rId8"/>
+          </p:cNvPr>
+          <p:cNvSpPr/>
+          <p:nvPr/>
+        </p:nvSpPr>
+        <p:spPr>
+          <a:xfrm>
+            <a:off x="6199632" y="3840480"/>
+            <a:ext cx="2743200" cy="457200"/>
+          </a:xfrm>
+          <a:prstGeom prst="rect">
+            <a:avLst/>
+          </a:prstGeom>
+          <a:solidFill>
+            <a:srgbClr val="B7860B"/>
+          </a:solidFill>
+          <a:ln>
+            <a:noFill/>
+          </a:ln>
+          <a:effectLst/>
+        </p:spPr>
+        <p:style>
+          <a:lnRef idx="1">
+            <a:schemeClr val="accent1"/>
+          </a:lnRef>
+          <a:fillRef idx="3">
+            <a:schemeClr val="accent1"/>
+          </a:fillRef>
+          <a:effectRef idx="2">
+            <a:schemeClr val="accent1"/>
+          </a:effectRef>
+          <a:fontRef idx="minor">
+            <a:schemeClr val="lt1"/>
+          </a:fontRef>
+        </p:style>
+        <p:txBody>
+          <a:bodyPr rtlCol="0" anchor="ctr"/>
+          <a:lstStyle/>
+          <a:p>
+            <a:pPr algn="ctr"/>
+          </a:p>
+        </p:txBody>
+      </p:sp>
+      <p:sp>
+        <p:nvSpPr>
+          <p:cNvPr id="47" name="Rounded Rectangle 46"/>
+          <p:cNvSpPr/>
+          <p:nvPr/>
+        </p:nvSpPr>
+        <p:spPr>
+          <a:xfrm>
+            <a:off x="6309360" y="3913632"/>
+            <a:ext cx="310896" cy="310896"/>
+          </a:xfrm>
+          <a:prstGeom prst="roundRect">
+            <a:avLst>
+              <a:gd name="adj" fmla="val 50000"/>
+            </a:avLst>
+          </a:prstGeom>
+          <a:solidFill>
+            <a:srgbClr val="FFFFFF"/>
+          </a:solidFill>
+          <a:ln>
+            <a:noFill/>
+          </a:ln>
+          <a:effectLst/>
+        </p:spPr>
+        <p:style>
+          <a:lnRef idx="1">
+            <a:schemeClr val="accent1"/>
+          </a:lnRef>
+          <a:fillRef idx="3">
+            <a:schemeClr val="accent1"/>
+          </a:fillRef>
+          <a:effectRef idx="2">
+            <a:schemeClr val="accent1"/>
+          </a:effectRef>
+          <a:fontRef idx="minor">
+            <a:schemeClr val="lt1"/>
+          </a:fontRef>
+        </p:style>
+        <p:txBody>
+          <a:bodyPr rtlCol="0" anchor="ctr"/>
+          <a:lstStyle/>
+          <a:p>
+            <a:pPr algn="ctr"/>
+            <a:r>
+              <a:rPr sz="1200" b="1">
+                <a:solidFill>
+                  <a:srgbClr val="B7860B"/>
+                </a:solidFill>
+                <a:latin typeface="Bricolage Grotesque"/>
+              </a:rPr>
+              <a:t>?</a:t>
+            </a:r>
+          </a:p>
+        </p:txBody>
+      </p:sp>
+      <p:sp>
+        <p:nvSpPr>
+          <p:cNvPr id="48" name="TextBox 47"/>
+          <p:cNvSpPr txBox="1"/>
+          <p:nvPr/>
+        </p:nvSpPr>
+        <p:spPr>
+          <a:xfrm>
+            <a:off x="6729984" y="3895344"/>
+            <a:ext cx="2103120" cy="365760"/>
+          </a:xfrm>
+          <a:prstGeom prst="rect">
+            <a:avLst/>
+          </a:prstGeom>
+          <a:noFill/>
+        </p:spPr>
+        <p:txBody>
+          <a:bodyPr wrap="square" anchor="ctr" lIns="38100" rIns="38100" tIns="25400" bIns="25400">
+            <a:spAutoFit/>
+          </a:bodyPr>
+          <a:lstStyle/>
+          <a:p>
+            <a:pPr algn="l">
+              <a:lnSpc>
+                <a:spcPct val="106000"/>
+              </a:lnSpc>
+              <a:spcBef>
+                <a:spcPts val="0"/>
+              </a:spcBef>
+              <a:spcAft>
+                <a:spcPts val="200"/>
+              </a:spcAft>
+            </a:pPr>
+            <a:r>
+              <a:rPr sz="1450" b="1" i="0">
+                <a:solidFill>
+                  <a:srgbClr val="FFFFFF"/>
+                </a:solidFill>
+                <a:latin typeface="Bricolage Grotesque"/>
+              </a:rPr>
+              <a:t>Quiz «La mezcla»</a:t>
+            </a:r>
+          </a:p>
+        </p:txBody>
+      </p:sp>
+      <p:sp>
+        <p:nvSpPr>
+          <p:cNvPr id="49" name="TextBox 48"/>
+          <p:cNvSpPr txBox="1"/>
+          <p:nvPr/>
+        </p:nvSpPr>
+        <p:spPr>
+          <a:xfrm>
+            <a:off x="6364224" y="4462272"/>
+            <a:ext cx="2414016" cy="1097280"/>
+          </a:xfrm>
+          <a:prstGeom prst="rect">
+            <a:avLst/>
+          </a:prstGeom>
+          <a:noFill/>
+        </p:spPr>
+        <p:txBody>
+          <a:bodyPr wrap="square" anchor="t" lIns="38100" rIns="38100" tIns="25400" bIns="25400">
+            <a:spAutoFit/>
+          </a:bodyPr>
+          <a:lstStyle/>
+          <a:p>
+            <a:pPr algn="l">
+              <a:lnSpc>
+                <a:spcPct val="112000"/>
+              </a:lnSpc>
+              <a:spcBef>
+                <a:spcPts val="0"/>
+              </a:spcBef>
+              <a:spcAft>
+                <a:spcPts val="200"/>
+              </a:spcAft>
+            </a:pPr>
+            <a:r>
+              <a:rPr sz="1150" b="0" i="0">
+                <a:solidFill>
+                  <a:srgbClr val="20242E"/>
+                </a:solidFill>
+                <a:latin typeface="Inter"/>
+              </a:rPr>
+              <a:t>gemengde ophaal — mét oplossing</a:t>
+            </a:r>
+          </a:p>
+        </p:txBody>
+      </p:sp>
+      <p:sp>
+        <p:nvSpPr>
+          <p:cNvPr id="50" name="Rounded Rectangle 49"/>
+          <p:cNvSpPr/>
+          <p:nvPr/>
+        </p:nvSpPr>
+        <p:spPr>
+          <a:xfrm>
+            <a:off x="6364224" y="5669280"/>
+            <a:ext cx="791870" cy="292608"/>
+          </a:xfrm>
+          <a:prstGeom prst="roundRect">
+            <a:avLst>
+              <a:gd name="adj" fmla="val 50000"/>
+            </a:avLst>
+          </a:prstGeom>
+          <a:solidFill>
+            <a:srgbClr val="E4F4EE"/>
+          </a:solidFill>
+          <a:ln>
+            <a:noFill/>
+          </a:ln>
+          <a:effectLst/>
+        </p:spPr>
+        <p:style>
+          <a:lnRef idx="1">
+            <a:schemeClr val="accent1"/>
+          </a:lnRef>
+          <a:fillRef idx="3">
+            <a:schemeClr val="accent1"/>
+          </a:fillRef>
+          <a:effectRef idx="2">
+            <a:schemeClr val="accent1"/>
+          </a:effectRef>
+          <a:fontRef idx="minor">
+            <a:schemeClr val="lt1"/>
+          </a:fontRef>
+        </p:style>
+        <p:txBody>
+          <a:bodyPr rtlCol="0" anchor="ctr" wrap="none" lIns="88900" rIns="88900" tIns="12700" bIns="12700"/>
+          <a:lstStyle/>
+          <a:p>
+            <a:pPr algn="ctr"/>
+            <a:r>
+              <a:rPr sz="950" b="1">
+                <a:solidFill>
+                  <a:srgbClr val="157355"/>
+                </a:solidFill>
+                <a:latin typeface="Inter"/>
+              </a:rPr>
+              <a:t>→ dia 19</a:t>
+            </a:r>
+          </a:p>
+        </p:txBody>
+      </p:sp>
+      <p:sp>
+        <p:nvSpPr>
+          <p:cNvPr id="51" name="Rounded Rectangle 50">
+            <a:hlinkClick action="ppaction://hlinksldjump" r:id="rId9"/>
+          </p:cNvPr>
+          <p:cNvSpPr/>
+          <p:nvPr/>
+        </p:nvSpPr>
+        <p:spPr>
+          <a:xfrm>
+            <a:off x="9070848" y="3840480"/>
+            <a:ext cx="2743200" cy="2240280"/>
+          </a:xfrm>
+          <a:prstGeom prst="roundRect">
+            <a:avLst>
+              <a:gd name="adj" fmla="val 5500"/>
+            </a:avLst>
+          </a:prstGeom>
+          <a:solidFill>
+            <a:srgbClr val="FFFFFF"/>
+          </a:solidFill>
+          <a:ln w="20320">
+            <a:solidFill>
+              <a:srgbClr val="157355"/>
+            </a:solidFill>
+          </a:ln>
+          <a:effectLst/>
+          <a:effectLst>
+            <a:outerShdw blurRad="90000" dist="38000" dir="5400000" rotWithShape="0">
+              <a:srgbClr val="20242E">
+                <a:alpha val="22000"/>
+              </a:srgbClr>
+            </a:outerShdw>
+          </a:effectLst>
+        </p:spPr>
+        <p:style>
+          <a:lnRef idx="1">
+            <a:schemeClr val="accent1"/>
+          </a:lnRef>
+          <a:fillRef idx="3">
+            <a:schemeClr val="accent1"/>
+          </a:fillRef>
+          <a:effectRef idx="2">
+            <a:schemeClr val="accent1"/>
+          </a:effectRef>
+          <a:fontRef idx="minor">
+            <a:schemeClr val="lt1"/>
+          </a:fontRef>
+        </p:style>
+        <p:txBody>
+          <a:bodyPr rtlCol="0" anchor="ctr"/>
+          <a:lstStyle/>
+          <a:p>
+            <a:pPr algn="ctr"/>
+          </a:p>
+        </p:txBody>
+      </p:sp>
+      <p:sp>
+        <p:nvSpPr>
+          <p:cNvPr id="52" name="Rectangle 51">
+            <a:hlinkClick action="ppaction://hlinksldjump" r:id="rId9"/>
+          </p:cNvPr>
+          <p:cNvSpPr/>
+          <p:nvPr/>
+        </p:nvSpPr>
+        <p:spPr>
+          <a:xfrm>
+            <a:off x="9070848" y="3840480"/>
+            <a:ext cx="2743200" cy="457200"/>
+          </a:xfrm>
+          <a:prstGeom prst="rect">
+            <a:avLst/>
+          </a:prstGeom>
+          <a:solidFill>
+            <a:srgbClr val="157355"/>
+          </a:solidFill>
+          <a:ln>
+            <a:noFill/>
+          </a:ln>
+          <a:effectLst/>
+        </p:spPr>
+        <p:style>
+          <a:lnRef idx="1">
+            <a:schemeClr val="accent1"/>
+          </a:lnRef>
+          <a:fillRef idx="3">
+            <a:schemeClr val="accent1"/>
+          </a:fillRef>
+          <a:effectRef idx="2">
+            <a:schemeClr val="accent1"/>
+          </a:effectRef>
+          <a:fontRef idx="minor">
+            <a:schemeClr val="lt1"/>
+          </a:fontRef>
+        </p:style>
+        <p:txBody>
+          <a:bodyPr rtlCol="0" anchor="ctr"/>
+          <a:lstStyle/>
+          <a:p>
+            <a:pPr algn="ctr"/>
+          </a:p>
+        </p:txBody>
+      </p:sp>
+      <p:sp>
+        <p:nvSpPr>
+          <p:cNvPr id="53" name="Rounded Rectangle 52"/>
+          <p:cNvSpPr/>
+          <p:nvPr/>
+        </p:nvSpPr>
+        <p:spPr>
+          <a:xfrm>
+            <a:off x="9180576" y="3913632"/>
+            <a:ext cx="310896" cy="310896"/>
+          </a:xfrm>
+          <a:prstGeom prst="roundRect">
+            <a:avLst>
+              <a:gd name="adj" fmla="val 50000"/>
+            </a:avLst>
+          </a:prstGeom>
+          <a:solidFill>
+            <a:srgbClr val="FFFFFF"/>
+          </a:solidFill>
+          <a:ln>
+            <a:noFill/>
+          </a:ln>
+          <a:effectLst/>
+        </p:spPr>
+        <p:style>
+          <a:lnRef idx="1">
+            <a:schemeClr val="accent1"/>
+          </a:lnRef>
+          <a:fillRef idx="3">
+            <a:schemeClr val="accent1"/>
+          </a:fillRef>
+          <a:effectRef idx="2">
+            <a:schemeClr val="accent1"/>
+          </a:effectRef>
+          <a:fontRef idx="minor">
+            <a:schemeClr val="lt1"/>
+          </a:fontRef>
+        </p:style>
+        <p:txBody>
+          <a:bodyPr rtlCol="0" anchor="ctr"/>
+          <a:lstStyle/>
+          <a:p>
+            <a:pPr algn="ctr"/>
+            <a:r>
+              <a:rPr sz="1200" b="1">
+                <a:solidFill>
+                  <a:srgbClr val="157355"/>
+                </a:solidFill>
+                <a:latin typeface="Bricolage Grotesque"/>
+              </a:rPr>
+              <a:t>◎</a:t>
+            </a:r>
+          </a:p>
+        </p:txBody>
+      </p:sp>
+      <p:sp>
+        <p:nvSpPr>
+          <p:cNvPr id="54" name="TextBox 53"/>
+          <p:cNvSpPr txBox="1"/>
+          <p:nvPr/>
+        </p:nvSpPr>
+        <p:spPr>
+          <a:xfrm>
+            <a:off x="9601200" y="3895344"/>
+            <a:ext cx="2103120" cy="365760"/>
+          </a:xfrm>
+          <a:prstGeom prst="rect">
+            <a:avLst/>
+          </a:prstGeom>
+          <a:noFill/>
+        </p:spPr>
+        <p:txBody>
+          <a:bodyPr wrap="square" anchor="ctr" lIns="38100" rIns="38100" tIns="25400" bIns="25400">
+            <a:spAutoFit/>
+          </a:bodyPr>
+          <a:lstStyle/>
+          <a:p>
+            <a:pPr algn="l">
+              <a:lnSpc>
+                <a:spcPct val="106000"/>
+              </a:lnSpc>
+              <a:spcBef>
+                <a:spcPts val="0"/>
+              </a:spcBef>
+              <a:spcAft>
+                <a:spcPts val="200"/>
+              </a:spcAft>
+            </a:pPr>
+            <a:r>
+              <a:rPr sz="1450" b="1" i="0">
+                <a:solidFill>
+                  <a:srgbClr val="FFFFFF"/>
+                </a:solidFill>
+                <a:latin typeface="Bricolage Grotesque"/>
+              </a:rPr>
+              <a:t>Repaso + semáforo</a:t>
+            </a:r>
+          </a:p>
+        </p:txBody>
+      </p:sp>
+      <p:sp>
+        <p:nvSpPr>
+          <p:cNvPr id="55" name="TextBox 54"/>
+          <p:cNvSpPr txBox="1"/>
+          <p:nvPr/>
+        </p:nvSpPr>
+        <p:spPr>
+          <a:xfrm>
+            <a:off x="9235440" y="4462272"/>
+            <a:ext cx="2414016" cy="1097280"/>
+          </a:xfrm>
+          <a:prstGeom prst="rect">
+            <a:avLst/>
+          </a:prstGeom>
+          <a:noFill/>
+        </p:spPr>
+        <p:txBody>
+          <a:bodyPr wrap="square" anchor="t" lIns="38100" rIns="38100" tIns="25400" bIns="25400">
+            <a:spAutoFit/>
+          </a:bodyPr>
+          <a:lstStyle/>
+          <a:p>
+            <a:pPr algn="l">
+              <a:lnSpc>
+                <a:spcPct val="112000"/>
+              </a:lnSpc>
+              <a:spcBef>
+                <a:spcPts val="0"/>
+              </a:spcBef>
+              <a:spcAft>
+                <a:spcPts val="200"/>
+              </a:spcAft>
+            </a:pPr>
+            <a:r>
+              <a:rPr sz="1150" b="0" i="0">
+                <a:solidFill>
+                  <a:srgbClr val="20242E"/>
+                </a:solidFill>
+                <a:latin typeface="Inter"/>
+              </a:rPr>
+              <a:t>lo esencial · zelfevaluatie</a:t>
+            </a:r>
+          </a:p>
+        </p:txBody>
+      </p:sp>
+      <p:sp>
+        <p:nvSpPr>
+          <p:cNvPr id="56" name="Rounded Rectangle 55"/>
+          <p:cNvSpPr/>
+          <p:nvPr/>
+        </p:nvSpPr>
+        <p:spPr>
+          <a:xfrm>
+            <a:off x="9235440" y="5669280"/>
+            <a:ext cx="791870" cy="292608"/>
+          </a:xfrm>
+          <a:prstGeom prst="roundRect">
+            <a:avLst>
+              <a:gd name="adj" fmla="val 50000"/>
+            </a:avLst>
+          </a:prstGeom>
+          <a:solidFill>
+            <a:srgbClr val="E4F4EE"/>
+          </a:solidFill>
+          <a:ln>
+            <a:noFill/>
+          </a:ln>
+          <a:effectLst/>
+        </p:spPr>
+        <p:style>
+          <a:lnRef idx="1">
+            <a:schemeClr val="accent1"/>
+          </a:lnRef>
+          <a:fillRef idx="3">
+            <a:schemeClr val="accent1"/>
+          </a:fillRef>
+          <a:effectRef idx="2">
+            <a:schemeClr val="accent1"/>
+          </a:effectRef>
+          <a:fontRef idx="minor">
+            <a:schemeClr val="lt1"/>
+          </a:fontRef>
+        </p:style>
+        <p:txBody>
+          <a:bodyPr rtlCol="0" anchor="ctr" wrap="none" lIns="88900" rIns="88900" tIns="12700" bIns="12700"/>
+          <a:lstStyle/>
+          <a:p>
+            <a:pPr algn="ctr"/>
+            <a:r>
+              <a:rPr sz="950" b="1">
+                <a:solidFill>
+                  <a:srgbClr val="157355"/>
+                </a:solidFill>
+                <a:latin typeface="Inter"/>
+              </a:rPr>
+              <a:t>→ dia 20</a:t>
+            </a:r>
+          </a:p>
+        </p:txBody>
+      </p:sp>
+      <p:sp>
+        <p:nvSpPr>
+          <p:cNvPr id="57" name="Rectangle 56"/>
+          <p:cNvSpPr/>
+          <p:nvPr/>
+        </p:nvSpPr>
+        <p:spPr>
+          <a:xfrm>
+            <a:off x="0" y="6547104"/>
+            <a:ext cx="12191695" cy="310896"/>
+          </a:xfrm>
+          <a:prstGeom prst="rect">
+            <a:avLst/>
+          </a:prstGeom>
+          <a:solidFill>
+            <a:srgbClr val="F3EEE4"/>
+          </a:solidFill>
+          <a:ln>
+            <a:noFill/>
+          </a:ln>
+          <a:effectLst/>
+        </p:spPr>
+        <p:style>
+          <a:lnRef idx="1">
+            <a:schemeClr val="accent1"/>
+          </a:lnRef>
+          <a:fillRef idx="3">
+            <a:schemeClr val="accent1"/>
+          </a:fillRef>
+          <a:effectRef idx="2">
+            <a:schemeClr val="accent1"/>
+          </a:effectRef>
+          <a:fontRef idx="minor">
+            <a:schemeClr val="lt1"/>
+          </a:fontRef>
+        </p:style>
+        <p:txBody>
+          <a:bodyPr rtlCol="0" anchor="ctr"/>
+          <a:lstStyle/>
+          <a:p>
+            <a:pPr algn="ctr"/>
+          </a:p>
+        </p:txBody>
+      </p:sp>
+      <p:sp>
+        <p:nvSpPr>
+          <p:cNvPr id="58" name="TextBox 57"/>
+          <p:cNvSpPr txBox="1"/>
+          <p:nvPr/>
+        </p:nvSpPr>
+        <p:spPr>
+          <a:xfrm>
+            <a:off x="411480" y="6565392"/>
+            <a:ext cx="5486400" cy="274320"/>
+          </a:xfrm>
+          <a:prstGeom prst="rect">
+            <a:avLst/>
+          </a:prstGeom>
+          <a:noFill/>
+        </p:spPr>
+        <p:txBody>
+          <a:bodyPr wrap="square" anchor="ctr" lIns="38100" rIns="38100" tIns="25400" bIns="25400">
+            <a:spAutoFit/>
+          </a:bodyPr>
+          <a:lstStyle/>
+          <a:p>
+            <a:pPr algn="l">
+              <a:lnSpc>
+                <a:spcPct val="106000"/>
+              </a:lnSpc>
+              <a:spcBef>
+                <a:spcPts val="0"/>
+              </a:spcBef>
+              <a:spcAft>
+                <a:spcPts val="200"/>
+              </a:spcAft>
+            </a:pPr>
+            <a:r>
+              <a:rPr sz="1100" b="1" i="0">
+                <a:solidFill>
+                  <a:srgbClr val="1E9E74"/>
+                </a:solidFill>
+                <a:latin typeface="Inter"/>
+              </a:rPr>
+              <a:t>● </a:t>
+            </a:r>
+            <a:r>
+              <a:rPr sz="950" b="0" i="0">
+                <a:solidFill>
+                  <a:srgbClr val="6A6E78"/>
+                </a:solidFill>
+                <a:latin typeface="Inter"/>
+              </a:rPr>
+              <a:t>U0 · ¡EMPEZAMOS!   ·   C5 · A1 · La Ruta</a:t>
+            </a:r>
+          </a:p>
+        </p:txBody>
+      </p:sp>
+      <p:sp>
+        <p:nvSpPr>
+          <p:cNvPr id="59" name="TextBox 58"/>
+          <p:cNvSpPr txBox="1"/>
+          <p:nvPr/>
+        </p:nvSpPr>
+        <p:spPr>
+          <a:xfrm>
+            <a:off x="8686800" y="6565392"/>
+            <a:ext cx="3063240" cy="274320"/>
+          </a:xfrm>
+          <a:prstGeom prst="rect">
+            <a:avLst/>
+          </a:prstGeom>
+          <a:noFill/>
+        </p:spPr>
+        <p:txBody>
+          <a:bodyPr wrap="square" anchor="ctr" lIns="38100" rIns="38100" tIns="25400" bIns="25400">
+            <a:spAutoFit/>
+          </a:bodyPr>
+          <a:lstStyle/>
+          <a:p>
+            <a:pPr algn="r">
+              <a:lnSpc>
+                <a:spcPct val="106000"/>
+              </a:lnSpc>
+              <a:spcBef>
+                <a:spcPts val="0"/>
+              </a:spcBef>
+              <a:spcAft>
+                <a:spcPts val="200"/>
+              </a:spcAft>
+            </a:pPr>
+            <a:r>
+              <a:rPr sz="900" b="0" i="1">
+                <a:solidFill>
+                  <a:srgbClr val="6A6E78"/>
+                </a:solidFill>
+                <a:latin typeface="Inter"/>
+              </a:rPr>
+              <a:t>Leerlingenversie — klik onthult</a:t>
+            </a:r>
+          </a:p>
+        </p:txBody>
+      </p:sp>
+      <p:sp>
+        <p:nvSpPr>
+          <p:cNvPr id="60" name="TextBox 59"/>
+          <p:cNvSpPr txBox="1"/>
+          <p:nvPr/>
+        </p:nvSpPr>
+        <p:spPr>
+          <a:xfrm>
+            <a:off x="11475720" y="6565392"/>
+            <a:ext cx="457200" cy="274320"/>
+          </a:xfrm>
+          <a:prstGeom prst="rect">
+            <a:avLst/>
+          </a:prstGeom>
+          <a:noFill/>
+        </p:spPr>
+        <p:txBody>
+          <a:bodyPr wrap="square" anchor="ctr" lIns="38100" rIns="38100" tIns="25400" bIns="25400">
+            <a:spAutoFit/>
+          </a:bodyPr>
+          <a:lstStyle/>
+          <a:p>
+            <a:pPr algn="r">
+              <a:lnSpc>
+                <a:spcPct val="106000"/>
+              </a:lnSpc>
+              <a:spcBef>
+                <a:spcPts val="0"/>
+              </a:spcBef>
+              <a:spcAft>
+                <a:spcPts val="200"/>
+              </a:spcAft>
+            </a:pPr>
+            <a:r>
+              <a:rPr sz="950" b="1" i="0">
+                <a:solidFill>
+                  <a:srgbClr val="157355"/>
+                </a:solidFill>
+                <a:latin typeface="Inter"/>
+              </a:rPr>
+              <a:t>2</a:t>
+            </a:r>
+          </a:p>
+        </p:txBody>
+      </p:sp>
+    </p:spTree>
+  </p:cSld>
+  <p:clrMapOvr>
+    <a:masterClrMapping/>
+  </p:clrMapOvr>
+</p:sld>
+</file>
+
+<file path=ppt/slides/slide20.xml><?xml version="1.0" encoding="utf-8"?>
+<p:sld xmlns:a="http://schemas.openxmlformats.org/drawingml/2006/main" xmlns:p="http://schemas.openxmlformats.org/presentationml/2006/main" xmlns:r="http://schemas.openxmlformats.org/officeDocument/2006/relationships">
+  <p:cSld>
+    <p:spTree>
+      <p:nvGrpSpPr>
+        <p:cNvPr id="1" name=""/>
+        <p:cNvGrpSpPr/>
+        <p:nvPr/>
+      </p:nvGrpSpPr>
+      <p:grpSpPr/>
+      <p:sp>
+        <p:nvSpPr>
+          <p:cNvPr id="2" name="Rectangle 1"/>
+          <p:cNvSpPr/>
+          <p:nvPr/>
+        </p:nvSpPr>
+        <p:spPr>
+          <a:xfrm>
+            <a:off x="0" y="0"/>
+            <a:ext cx="12191695" cy="6858000"/>
+          </a:xfrm>
+          <a:prstGeom prst="rect">
+            <a:avLst/>
+          </a:prstGeom>
+          <a:solidFill>
+            <a:srgbClr val="FCFBF8"/>
+          </a:solidFill>
+          <a:ln>
+            <a:noFill/>
+          </a:ln>
+          <a:effectLst/>
+        </p:spPr>
+        <p:style>
+          <a:lnRef idx="1">
+            <a:schemeClr val="accent1"/>
+          </a:lnRef>
+          <a:fillRef idx="3">
+            <a:schemeClr val="accent1"/>
+          </a:fillRef>
+          <a:effectRef idx="2">
+            <a:schemeClr val="accent1"/>
+          </a:effectRef>
+          <a:fontRef idx="minor">
+            <a:schemeClr val="lt1"/>
+          </a:fontRef>
+        </p:style>
+        <p:txBody>
+          <a:bodyPr rtlCol="0" anchor="ctr"/>
+          <a:lstStyle/>
+          <a:p>
+            <a:pPr algn="ctr"/>
+          </a:p>
+        </p:txBody>
+      </p:sp>
+      <p:sp>
+        <p:nvSpPr>
+          <p:cNvPr id="3" name="Rectangle 2"/>
+          <p:cNvSpPr/>
+          <p:nvPr/>
+        </p:nvSpPr>
+        <p:spPr>
+          <a:xfrm>
+            <a:off x="0" y="0"/>
+            <a:ext cx="12191695" cy="1078992"/>
+          </a:xfrm>
+          <a:prstGeom prst="rect">
+            <a:avLst/>
+          </a:prstGeom>
+          <a:solidFill>
             <a:srgbClr val="157355"/>
           </a:solidFill>
           <a:ln>
@@ -26120,7 +32252,7 @@
                 </a:solidFill>
                 <a:latin typeface="Inter"/>
               </a:rPr>
-              <a:t>18</a:t>
+              <a:t>20</a:t>
             </a:r>
           </a:p>
         </p:txBody>
@@ -26133,7 +32265,7 @@
 </p:sld>
 </file>
 
-<file path=ppt/slides/slide19.xml><?xml version="1.0" encoding="utf-8"?>
+<file path=ppt/slides/slide21.xml><?xml version="1.0" encoding="utf-8"?>
 <p:sld xmlns:a="http://schemas.openxmlformats.org/drawingml/2006/main" xmlns:p="http://schemas.openxmlformats.org/presentationml/2006/main" xmlns:r="http://schemas.openxmlformats.org/officeDocument/2006/relationships">
   <p:cSld>
     <p:spTree>
@@ -28159,7 +34291,7 @@
                 </a:solidFill>
                 <a:latin typeface="Inter"/>
               </a:rPr>
-              <a:t>19</a:t>
+              <a:t>21</a:t>
             </a:r>
           </a:p>
         </p:txBody>
@@ -28573,2959 +34705,7 @@
 </p:sld>
 </file>
 
-<file path=ppt/slides/slide2.xml><?xml version="1.0" encoding="utf-8"?>
-<p:sld xmlns:a="http://schemas.openxmlformats.org/drawingml/2006/main" xmlns:p="http://schemas.openxmlformats.org/presentationml/2006/main" xmlns:r="http://schemas.openxmlformats.org/officeDocument/2006/relationships">
-  <p:cSld>
-    <p:spTree>
-      <p:nvGrpSpPr>
-        <p:cNvPr id="1" name=""/>
-        <p:cNvGrpSpPr/>
-        <p:nvPr/>
-      </p:nvGrpSpPr>
-      <p:grpSpPr/>
-      <p:sp>
-        <p:nvSpPr>
-          <p:cNvPr id="2" name="Rectangle 1"/>
-          <p:cNvSpPr/>
-          <p:nvPr/>
-        </p:nvSpPr>
-        <p:spPr>
-          <a:xfrm>
-            <a:off x="0" y="0"/>
-            <a:ext cx="12191695" cy="6858000"/>
-          </a:xfrm>
-          <a:prstGeom prst="rect">
-            <a:avLst/>
-          </a:prstGeom>
-          <a:solidFill>
-            <a:srgbClr val="FCFBF8"/>
-          </a:solidFill>
-          <a:ln>
-            <a:noFill/>
-          </a:ln>
-          <a:effectLst/>
-        </p:spPr>
-        <p:style>
-          <a:lnRef idx="1">
-            <a:schemeClr val="accent1"/>
-          </a:lnRef>
-          <a:fillRef idx="3">
-            <a:schemeClr val="accent1"/>
-          </a:fillRef>
-          <a:effectRef idx="2">
-            <a:schemeClr val="accent1"/>
-          </a:effectRef>
-          <a:fontRef idx="minor">
-            <a:schemeClr val="lt1"/>
-          </a:fontRef>
-        </p:style>
-        <p:txBody>
-          <a:bodyPr rtlCol="0" anchor="ctr"/>
-          <a:lstStyle/>
-          <a:p>
-            <a:pPr algn="ctr"/>
-          </a:p>
-        </p:txBody>
-      </p:sp>
-      <p:sp>
-        <p:nvSpPr>
-          <p:cNvPr id="3" name="Rectangle 2"/>
-          <p:cNvSpPr/>
-          <p:nvPr/>
-        </p:nvSpPr>
-        <p:spPr>
-          <a:xfrm>
-            <a:off x="0" y="0"/>
-            <a:ext cx="12191695" cy="1078992"/>
-          </a:xfrm>
-          <a:prstGeom prst="rect">
-            <a:avLst/>
-          </a:prstGeom>
-          <a:solidFill>
-            <a:srgbClr val="1E9E74"/>
-          </a:solidFill>
-          <a:ln>
-            <a:noFill/>
-          </a:ln>
-          <a:effectLst/>
-        </p:spPr>
-        <p:style>
-          <a:lnRef idx="1">
-            <a:schemeClr val="accent1"/>
-          </a:lnRef>
-          <a:fillRef idx="3">
-            <a:schemeClr val="accent1"/>
-          </a:fillRef>
-          <a:effectRef idx="2">
-            <a:schemeClr val="accent1"/>
-          </a:effectRef>
-          <a:fontRef idx="minor">
-            <a:schemeClr val="lt1"/>
-          </a:fontRef>
-        </p:style>
-        <p:txBody>
-          <a:bodyPr rtlCol="0" anchor="ctr"/>
-          <a:lstStyle/>
-          <a:p>
-            <a:pPr algn="ctr"/>
-          </a:p>
-        </p:txBody>
-      </p:sp>
-      <p:sp>
-        <p:nvSpPr>
-          <p:cNvPr id="4" name="Rectangle 3"/>
-          <p:cNvSpPr/>
-          <p:nvPr/>
-        </p:nvSpPr>
-        <p:spPr>
-          <a:xfrm>
-            <a:off x="0" y="1078992"/>
-            <a:ext cx="12191695" cy="54864"/>
-          </a:xfrm>
-          <a:prstGeom prst="rect">
-            <a:avLst/>
-          </a:prstGeom>
-          <a:solidFill>
-            <a:srgbClr val="157355"/>
-          </a:solidFill>
-          <a:ln>
-            <a:noFill/>
-          </a:ln>
-          <a:effectLst/>
-        </p:spPr>
-        <p:style>
-          <a:lnRef idx="1">
-            <a:schemeClr val="accent1"/>
-          </a:lnRef>
-          <a:fillRef idx="3">
-            <a:schemeClr val="accent1"/>
-          </a:fillRef>
-          <a:effectRef idx="2">
-            <a:schemeClr val="accent1"/>
-          </a:effectRef>
-          <a:fontRef idx="minor">
-            <a:schemeClr val="lt1"/>
-          </a:fontRef>
-        </p:style>
-        <p:txBody>
-          <a:bodyPr rtlCol="0" anchor="ctr"/>
-          <a:lstStyle/>
-          <a:p>
-            <a:pPr algn="ctr"/>
-          </a:p>
-        </p:txBody>
-      </p:sp>
-      <p:sp>
-        <p:nvSpPr>
-          <p:cNvPr id="5" name="Rounded Rectangle 4"/>
-          <p:cNvSpPr/>
-          <p:nvPr/>
-        </p:nvSpPr>
-        <p:spPr>
-          <a:xfrm>
-            <a:off x="502920" y="182880"/>
-            <a:ext cx="1633118" cy="292608"/>
-          </a:xfrm>
-          <a:prstGeom prst="roundRect">
-            <a:avLst>
-              <a:gd name="adj" fmla="val 50000"/>
-            </a:avLst>
-          </a:prstGeom>
-          <a:solidFill>
-            <a:srgbClr val="FFFFFF"/>
-          </a:solidFill>
-          <a:ln>
-            <a:noFill/>
-          </a:ln>
-          <a:effectLst/>
-        </p:spPr>
-        <p:style>
-          <a:lnRef idx="1">
-            <a:schemeClr val="accent1"/>
-          </a:lnRef>
-          <a:fillRef idx="3">
-            <a:schemeClr val="accent1"/>
-          </a:fillRef>
-          <a:effectRef idx="2">
-            <a:schemeClr val="accent1"/>
-          </a:effectRef>
-          <a:fontRef idx="minor">
-            <a:schemeClr val="lt1"/>
-          </a:fontRef>
-        </p:style>
-        <p:txBody>
-          <a:bodyPr rtlCol="0" anchor="ctr" wrap="none" lIns="88900" rIns="88900" tIns="12700" bIns="12700"/>
-          <a:lstStyle/>
-          <a:p>
-            <a:pPr algn="ctr"/>
-            <a:r>
-              <a:rPr sz="1100" b="1">
-                <a:solidFill>
-                  <a:srgbClr val="1E9E74"/>
-                </a:solidFill>
-                <a:latin typeface="Inter"/>
-              </a:rPr>
-              <a:t>MENÚ DE LA LECCIÓN</a:t>
-            </a:r>
-          </a:p>
-        </p:txBody>
-      </p:sp>
-      <p:sp>
-        <p:nvSpPr>
-          <p:cNvPr id="6" name="TextBox 5"/>
-          <p:cNvSpPr txBox="1"/>
-          <p:nvPr/>
-        </p:nvSpPr>
-        <p:spPr>
-          <a:xfrm>
-            <a:off x="10424160" y="-137160"/>
-            <a:ext cx="1737360" cy="1371600"/>
-          </a:xfrm>
-          <a:prstGeom prst="rect">
-            <a:avLst/>
-          </a:prstGeom>
-          <a:noFill/>
-        </p:spPr>
-        <p:txBody>
-          <a:bodyPr wrap="square" anchor="t" lIns="38100" rIns="38100" tIns="25400" bIns="25400">
-            <a:spAutoFit/>
-          </a:bodyPr>
-          <a:lstStyle/>
-          <a:p>
-            <a:pPr algn="r">
-              <a:lnSpc>
-                <a:spcPct val="106000"/>
-              </a:lnSpc>
-              <a:spcBef>
-                <a:spcPts val="0"/>
-              </a:spcBef>
-              <a:spcAft>
-                <a:spcPts val="200"/>
-              </a:spcAft>
-            </a:pPr>
-            <a:r>
-              <a:rPr sz="8800" b="1" i="0">
-                <a:solidFill>
-                  <a:srgbClr val="FFFFFF"/>
-                </a:solidFill>
-                <a:latin typeface="Bricolage Grotesque"/>
-              </a:rPr>
-              <a:t>0</a:t>
-            </a:r>
-          </a:p>
-        </p:txBody>
-      </p:sp>
-      <p:sp>
-        <p:nvSpPr>
-          <p:cNvPr id="7" name="TextBox 6"/>
-          <p:cNvSpPr txBox="1"/>
-          <p:nvPr/>
-        </p:nvSpPr>
-        <p:spPr>
-          <a:xfrm>
-            <a:off x="457200" y="457200"/>
-            <a:ext cx="9692640" cy="502920"/>
-          </a:xfrm>
-          <a:prstGeom prst="rect">
-            <a:avLst/>
-          </a:prstGeom>
-          <a:noFill/>
-        </p:spPr>
-        <p:txBody>
-          <a:bodyPr wrap="square" anchor="ctr" lIns="38100" rIns="38100" tIns="25400" bIns="25400">
-            <a:spAutoFit/>
-          </a:bodyPr>
-          <a:lstStyle/>
-          <a:p>
-            <a:pPr algn="l">
-              <a:lnSpc>
-                <a:spcPct val="106000"/>
-              </a:lnSpc>
-              <a:spcBef>
-                <a:spcPts val="0"/>
-              </a:spcBef>
-              <a:spcAft>
-                <a:spcPts val="200"/>
-              </a:spcAft>
-            </a:pPr>
-            <a:r>
-              <a:rPr sz="2700" b="1" i="0">
-                <a:solidFill>
-                  <a:srgbClr val="FFFFFF"/>
-                </a:solidFill>
-                <a:latin typeface="Bricolage Grotesque"/>
-              </a:rPr>
-              <a:t>El mapa de la Unidad 0</a:t>
-            </a:r>
-          </a:p>
-        </p:txBody>
-      </p:sp>
-      <p:sp>
-        <p:nvSpPr>
-          <p:cNvPr id="8" name="TextBox 7"/>
-          <p:cNvSpPr txBox="1"/>
-          <p:nvPr/>
-        </p:nvSpPr>
-        <p:spPr>
-          <a:xfrm>
-            <a:off x="502920" y="932688"/>
-            <a:ext cx="9692640" cy="274320"/>
-          </a:xfrm>
-          <a:prstGeom prst="rect">
-            <a:avLst/>
-          </a:prstGeom>
-          <a:noFill/>
-        </p:spPr>
-        <p:txBody>
-          <a:bodyPr wrap="square" anchor="t" lIns="38100" rIns="38100" tIns="25400" bIns="25400">
-            <a:spAutoFit/>
-          </a:bodyPr>
-          <a:lstStyle/>
-          <a:p>
-            <a:pPr algn="l">
-              <a:lnSpc>
-                <a:spcPct val="106000"/>
-              </a:lnSpc>
-              <a:spcBef>
-                <a:spcPts val="0"/>
-              </a:spcBef>
-              <a:spcAft>
-                <a:spcPts val="200"/>
-              </a:spcAft>
-            </a:pPr>
-            <a:r>
-              <a:rPr sz="1250" b="0" i="1">
-                <a:solidFill>
-                  <a:srgbClr val="E4F4EE"/>
-                </a:solidFill>
-                <a:latin typeface="Inter"/>
-              </a:rPr>
-              <a:t>Kies je route — klik een tegel (of volg de volgorde). Alles oefent naar de Tarea final toe.</a:t>
-            </a:r>
-          </a:p>
-        </p:txBody>
-      </p:sp>
-      <p:sp>
-        <p:nvSpPr>
-          <p:cNvPr id="9" name="Rounded Rectangle 8">
-            <a:hlinkClick action="ppaction://hlinksldjump" r:id="rId2"/>
-          </p:cNvPr>
-          <p:cNvSpPr/>
-          <p:nvPr/>
-        </p:nvSpPr>
-        <p:spPr>
-          <a:xfrm>
-            <a:off x="457200" y="1417320"/>
-            <a:ext cx="2743200" cy="2240280"/>
-          </a:xfrm>
-          <a:prstGeom prst="roundRect">
-            <a:avLst>
-              <a:gd name="adj" fmla="val 5500"/>
-            </a:avLst>
-          </a:prstGeom>
-          <a:solidFill>
-            <a:srgbClr val="FFFFFF"/>
-          </a:solidFill>
-          <a:ln w="20320">
-            <a:solidFill>
-              <a:srgbClr val="1E9E74"/>
-            </a:solidFill>
-          </a:ln>
-          <a:effectLst/>
-          <a:effectLst>
-            <a:outerShdw blurRad="90000" dist="38000" dir="5400000" rotWithShape="0">
-              <a:srgbClr val="20242E">
-                <a:alpha val="22000"/>
-              </a:srgbClr>
-            </a:outerShdw>
-          </a:effectLst>
-        </p:spPr>
-        <p:style>
-          <a:lnRef idx="1">
-            <a:schemeClr val="accent1"/>
-          </a:lnRef>
-          <a:fillRef idx="3">
-            <a:schemeClr val="accent1"/>
-          </a:fillRef>
-          <a:effectRef idx="2">
-            <a:schemeClr val="accent1"/>
-          </a:effectRef>
-          <a:fontRef idx="minor">
-            <a:schemeClr val="lt1"/>
-          </a:fontRef>
-        </p:style>
-        <p:txBody>
-          <a:bodyPr rtlCol="0" anchor="ctr"/>
-          <a:lstStyle/>
-          <a:p>
-            <a:pPr algn="ctr"/>
-          </a:p>
-        </p:txBody>
-      </p:sp>
-      <p:sp>
-        <p:nvSpPr>
-          <p:cNvPr id="10" name="Rectangle 9">
-            <a:hlinkClick action="ppaction://hlinksldjump" r:id="rId2"/>
-          </p:cNvPr>
-          <p:cNvSpPr/>
-          <p:nvPr/>
-        </p:nvSpPr>
-        <p:spPr>
-          <a:xfrm>
-            <a:off x="457200" y="1417320"/>
-            <a:ext cx="2743200" cy="457200"/>
-          </a:xfrm>
-          <a:prstGeom prst="rect">
-            <a:avLst/>
-          </a:prstGeom>
-          <a:solidFill>
-            <a:srgbClr val="1E9E74"/>
-          </a:solidFill>
-          <a:ln>
-            <a:noFill/>
-          </a:ln>
-          <a:effectLst/>
-        </p:spPr>
-        <p:style>
-          <a:lnRef idx="1">
-            <a:schemeClr val="accent1"/>
-          </a:lnRef>
-          <a:fillRef idx="3">
-            <a:schemeClr val="accent1"/>
-          </a:fillRef>
-          <a:effectRef idx="2">
-            <a:schemeClr val="accent1"/>
-          </a:effectRef>
-          <a:fontRef idx="minor">
-            <a:schemeClr val="lt1"/>
-          </a:fontRef>
-        </p:style>
-        <p:txBody>
-          <a:bodyPr rtlCol="0" anchor="ctr"/>
-          <a:lstStyle/>
-          <a:p>
-            <a:pPr algn="ctr"/>
-          </a:p>
-        </p:txBody>
-      </p:sp>
-      <p:sp>
-        <p:nvSpPr>
-          <p:cNvPr id="11" name="Rounded Rectangle 10"/>
-          <p:cNvSpPr/>
-          <p:nvPr/>
-        </p:nvSpPr>
-        <p:spPr>
-          <a:xfrm>
-            <a:off x="566928" y="1490472"/>
-            <a:ext cx="310896" cy="310896"/>
-          </a:xfrm>
-          <a:prstGeom prst="roundRect">
-            <a:avLst>
-              <a:gd name="adj" fmla="val 50000"/>
-            </a:avLst>
-          </a:prstGeom>
-          <a:solidFill>
-            <a:srgbClr val="FFFFFF"/>
-          </a:solidFill>
-          <a:ln>
-            <a:noFill/>
-          </a:ln>
-          <a:effectLst/>
-        </p:spPr>
-        <p:style>
-          <a:lnRef idx="1">
-            <a:schemeClr val="accent1"/>
-          </a:lnRef>
-          <a:fillRef idx="3">
-            <a:schemeClr val="accent1"/>
-          </a:fillRef>
-          <a:effectRef idx="2">
-            <a:schemeClr val="accent1"/>
-          </a:effectRef>
-          <a:fontRef idx="minor">
-            <a:schemeClr val="lt1"/>
-          </a:fontRef>
-        </p:style>
-        <p:txBody>
-          <a:bodyPr rtlCol="0" anchor="ctr"/>
-          <a:lstStyle/>
-          <a:p>
-            <a:pPr algn="ctr"/>
-            <a:r>
-              <a:rPr sz="1200" b="1">
-                <a:solidFill>
-                  <a:srgbClr val="1E9E74"/>
-                </a:solidFill>
-                <a:latin typeface="Bricolage Grotesque"/>
-              </a:rPr>
-              <a:t>§1</a:t>
-            </a:r>
-          </a:p>
-        </p:txBody>
-      </p:sp>
-      <p:sp>
-        <p:nvSpPr>
-          <p:cNvPr id="12" name="TextBox 11"/>
-          <p:cNvSpPr txBox="1"/>
-          <p:nvPr/>
-        </p:nvSpPr>
-        <p:spPr>
-          <a:xfrm>
-            <a:off x="987552" y="1472184"/>
-            <a:ext cx="2103120" cy="365760"/>
-          </a:xfrm>
-          <a:prstGeom prst="rect">
-            <a:avLst/>
-          </a:prstGeom>
-          <a:noFill/>
-        </p:spPr>
-        <p:txBody>
-          <a:bodyPr wrap="square" anchor="ctr" lIns="38100" rIns="38100" tIns="25400" bIns="25400">
-            <a:spAutoFit/>
-          </a:bodyPr>
-          <a:lstStyle/>
-          <a:p>
-            <a:pPr algn="l">
-              <a:lnSpc>
-                <a:spcPct val="106000"/>
-              </a:lnSpc>
-              <a:spcBef>
-                <a:spcPts val="0"/>
-              </a:spcBef>
-              <a:spcAft>
-                <a:spcPts val="200"/>
-              </a:spcAft>
-            </a:pPr>
-            <a:r>
-              <a:rPr sz="1450" b="1" i="0">
-                <a:solidFill>
-                  <a:srgbClr val="FFFFFF"/>
-                </a:solidFill>
-                <a:latin typeface="Bricolage Grotesque"/>
-              </a:rPr>
-              <a:t>Sonar en español</a:t>
-            </a:r>
-          </a:p>
-        </p:txBody>
-      </p:sp>
-      <p:sp>
-        <p:nvSpPr>
-          <p:cNvPr id="13" name="TextBox 12"/>
-          <p:cNvSpPr txBox="1"/>
-          <p:nvPr/>
-        </p:nvSpPr>
-        <p:spPr>
-          <a:xfrm>
-            <a:off x="621792" y="2039112"/>
-            <a:ext cx="2414016" cy="1097280"/>
-          </a:xfrm>
-          <a:prstGeom prst="rect">
-            <a:avLst/>
-          </a:prstGeom>
-          <a:noFill/>
-        </p:spPr>
-        <p:txBody>
-          <a:bodyPr wrap="square" anchor="t" lIns="38100" rIns="38100" tIns="25400" bIns="25400">
-            <a:spAutoFit/>
-          </a:bodyPr>
-          <a:lstStyle/>
-          <a:p>
-            <a:pPr algn="l">
-              <a:lnSpc>
-                <a:spcPct val="112000"/>
-              </a:lnSpc>
-              <a:spcBef>
-                <a:spcPts val="0"/>
-              </a:spcBef>
-              <a:spcAft>
-                <a:spcPts val="200"/>
-              </a:spcAft>
-            </a:pPr>
-            <a:r>
-              <a:rPr sz="1150" b="0" i="0">
-                <a:solidFill>
-                  <a:srgbClr val="20242E"/>
-                </a:solidFill>
-                <a:latin typeface="Inter"/>
-              </a:rPr>
-              <a:t>alfabet · uitspraak · klanktrampas</a:t>
-            </a:r>
-          </a:p>
-        </p:txBody>
-      </p:sp>
-      <p:sp>
-        <p:nvSpPr>
-          <p:cNvPr id="14" name="Rounded Rectangle 13"/>
-          <p:cNvSpPr/>
-          <p:nvPr/>
-        </p:nvSpPr>
-        <p:spPr>
-          <a:xfrm>
-            <a:off x="621792" y="3246120"/>
-            <a:ext cx="707745" cy="292608"/>
-          </a:xfrm>
-          <a:prstGeom prst="roundRect">
-            <a:avLst>
-              <a:gd name="adj" fmla="val 50000"/>
-            </a:avLst>
-          </a:prstGeom>
-          <a:solidFill>
-            <a:srgbClr val="E4F4EE"/>
-          </a:solidFill>
-          <a:ln>
-            <a:noFill/>
-          </a:ln>
-          <a:effectLst/>
-        </p:spPr>
-        <p:style>
-          <a:lnRef idx="1">
-            <a:schemeClr val="accent1"/>
-          </a:lnRef>
-          <a:fillRef idx="3">
-            <a:schemeClr val="accent1"/>
-          </a:fillRef>
-          <a:effectRef idx="2">
-            <a:schemeClr val="accent1"/>
-          </a:effectRef>
-          <a:fontRef idx="minor">
-            <a:schemeClr val="lt1"/>
-          </a:fontRef>
-        </p:style>
-        <p:txBody>
-          <a:bodyPr rtlCol="0" anchor="ctr" wrap="none" lIns="88900" rIns="88900" tIns="12700" bIns="12700"/>
-          <a:lstStyle/>
-          <a:p>
-            <a:pPr algn="ctr"/>
-            <a:r>
-              <a:rPr sz="950" b="1">
-                <a:solidFill>
-                  <a:srgbClr val="157355"/>
-                </a:solidFill>
-                <a:latin typeface="Inter"/>
-              </a:rPr>
-              <a:t>→ dia 4</a:t>
-            </a:r>
-          </a:p>
-        </p:txBody>
-      </p:sp>
-      <p:sp>
-        <p:nvSpPr>
-          <p:cNvPr id="15" name="Rounded Rectangle 14">
-            <a:hlinkClick action="ppaction://hlinksldjump" r:id="rId3"/>
-          </p:cNvPr>
-          <p:cNvSpPr/>
-          <p:nvPr/>
-        </p:nvSpPr>
-        <p:spPr>
-          <a:xfrm>
-            <a:off x="3328416" y="1417320"/>
-            <a:ext cx="2743200" cy="2240280"/>
-          </a:xfrm>
-          <a:prstGeom prst="roundRect">
-            <a:avLst>
-              <a:gd name="adj" fmla="val 5500"/>
-            </a:avLst>
-          </a:prstGeom>
-          <a:solidFill>
-            <a:srgbClr val="FFFFFF"/>
-          </a:solidFill>
-          <a:ln w="20320">
-            <a:solidFill>
-              <a:srgbClr val="1E9E74"/>
-            </a:solidFill>
-          </a:ln>
-          <a:effectLst/>
-          <a:effectLst>
-            <a:outerShdw blurRad="90000" dist="38000" dir="5400000" rotWithShape="0">
-              <a:srgbClr val="20242E">
-                <a:alpha val="22000"/>
-              </a:srgbClr>
-            </a:outerShdw>
-          </a:effectLst>
-        </p:spPr>
-        <p:style>
-          <a:lnRef idx="1">
-            <a:schemeClr val="accent1"/>
-          </a:lnRef>
-          <a:fillRef idx="3">
-            <a:schemeClr val="accent1"/>
-          </a:fillRef>
-          <a:effectRef idx="2">
-            <a:schemeClr val="accent1"/>
-          </a:effectRef>
-          <a:fontRef idx="minor">
-            <a:schemeClr val="lt1"/>
-          </a:fontRef>
-        </p:style>
-        <p:txBody>
-          <a:bodyPr rtlCol="0" anchor="ctr"/>
-          <a:lstStyle/>
-          <a:p>
-            <a:pPr algn="ctr"/>
-          </a:p>
-        </p:txBody>
-      </p:sp>
-      <p:sp>
-        <p:nvSpPr>
-          <p:cNvPr id="16" name="Rectangle 15">
-            <a:hlinkClick action="ppaction://hlinksldjump" r:id="rId3"/>
-          </p:cNvPr>
-          <p:cNvSpPr/>
-          <p:nvPr/>
-        </p:nvSpPr>
-        <p:spPr>
-          <a:xfrm>
-            <a:off x="3328416" y="1417320"/>
-            <a:ext cx="2743200" cy="457200"/>
-          </a:xfrm>
-          <a:prstGeom prst="rect">
-            <a:avLst/>
-          </a:prstGeom>
-          <a:solidFill>
-            <a:srgbClr val="1E9E74"/>
-          </a:solidFill>
-          <a:ln>
-            <a:noFill/>
-          </a:ln>
-          <a:effectLst/>
-        </p:spPr>
-        <p:style>
-          <a:lnRef idx="1">
-            <a:schemeClr val="accent1"/>
-          </a:lnRef>
-          <a:fillRef idx="3">
-            <a:schemeClr val="accent1"/>
-          </a:fillRef>
-          <a:effectRef idx="2">
-            <a:schemeClr val="accent1"/>
-          </a:effectRef>
-          <a:fontRef idx="minor">
-            <a:schemeClr val="lt1"/>
-          </a:fontRef>
-        </p:style>
-        <p:txBody>
-          <a:bodyPr rtlCol="0" anchor="ctr"/>
-          <a:lstStyle/>
-          <a:p>
-            <a:pPr algn="ctr"/>
-          </a:p>
-        </p:txBody>
-      </p:sp>
-      <p:sp>
-        <p:nvSpPr>
-          <p:cNvPr id="17" name="Rounded Rectangle 16"/>
-          <p:cNvSpPr/>
-          <p:nvPr/>
-        </p:nvSpPr>
-        <p:spPr>
-          <a:xfrm>
-            <a:off x="3438144" y="1490472"/>
-            <a:ext cx="310896" cy="310896"/>
-          </a:xfrm>
-          <a:prstGeom prst="roundRect">
-            <a:avLst>
-              <a:gd name="adj" fmla="val 50000"/>
-            </a:avLst>
-          </a:prstGeom>
-          <a:solidFill>
-            <a:srgbClr val="FFFFFF"/>
-          </a:solidFill>
-          <a:ln>
-            <a:noFill/>
-          </a:ln>
-          <a:effectLst/>
-        </p:spPr>
-        <p:style>
-          <a:lnRef idx="1">
-            <a:schemeClr val="accent1"/>
-          </a:lnRef>
-          <a:fillRef idx="3">
-            <a:schemeClr val="accent1"/>
-          </a:fillRef>
-          <a:effectRef idx="2">
-            <a:schemeClr val="accent1"/>
-          </a:effectRef>
-          <a:fontRef idx="minor">
-            <a:schemeClr val="lt1"/>
-          </a:fontRef>
-        </p:style>
-        <p:txBody>
-          <a:bodyPr rtlCol="0" anchor="ctr"/>
-          <a:lstStyle/>
-          <a:p>
-            <a:pPr algn="ctr"/>
-            <a:r>
-              <a:rPr sz="1200" b="1">
-                <a:solidFill>
-                  <a:srgbClr val="1E9E74"/>
-                </a:solidFill>
-                <a:latin typeface="Bricolage Grotesque"/>
-              </a:rPr>
-              <a:t>§2</a:t>
-            </a:r>
-          </a:p>
-        </p:txBody>
-      </p:sp>
-      <p:sp>
-        <p:nvSpPr>
-          <p:cNvPr id="18" name="TextBox 17"/>
-          <p:cNvSpPr txBox="1"/>
-          <p:nvPr/>
-        </p:nvSpPr>
-        <p:spPr>
-          <a:xfrm>
-            <a:off x="3858768" y="1472184"/>
-            <a:ext cx="2103120" cy="365760"/>
-          </a:xfrm>
-          <a:prstGeom prst="rect">
-            <a:avLst/>
-          </a:prstGeom>
-          <a:noFill/>
-        </p:spPr>
-        <p:txBody>
-          <a:bodyPr wrap="square" anchor="ctr" lIns="38100" rIns="38100" tIns="25400" bIns="25400">
-            <a:spAutoFit/>
-          </a:bodyPr>
-          <a:lstStyle/>
-          <a:p>
-            <a:pPr algn="l">
-              <a:lnSpc>
-                <a:spcPct val="106000"/>
-              </a:lnSpc>
-              <a:spcBef>
-                <a:spcPts val="0"/>
-              </a:spcBef>
-              <a:spcAft>
-                <a:spcPts val="200"/>
-              </a:spcAft>
-            </a:pPr>
-            <a:r>
-              <a:rPr sz="1450" b="1" i="0">
-                <a:solidFill>
-                  <a:srgbClr val="FFFFFF"/>
-                </a:solidFill>
-                <a:latin typeface="Bricolage Grotesque"/>
-              </a:rPr>
-              <a:t>La regla del sombrero</a:t>
-            </a:r>
-          </a:p>
-        </p:txBody>
-      </p:sp>
-      <p:sp>
-        <p:nvSpPr>
-          <p:cNvPr id="19" name="TextBox 18"/>
-          <p:cNvSpPr txBox="1"/>
-          <p:nvPr/>
-        </p:nvSpPr>
-        <p:spPr>
-          <a:xfrm>
-            <a:off x="3493008" y="2039112"/>
-            <a:ext cx="2414016" cy="1097280"/>
-          </a:xfrm>
-          <a:prstGeom prst="rect">
-            <a:avLst/>
-          </a:prstGeom>
-          <a:noFill/>
-        </p:spPr>
-        <p:txBody>
-          <a:bodyPr wrap="square" anchor="t" lIns="38100" rIns="38100" tIns="25400" bIns="25400">
-            <a:spAutoFit/>
-          </a:bodyPr>
-          <a:lstStyle/>
-          <a:p>
-            <a:pPr algn="l">
-              <a:lnSpc>
-                <a:spcPct val="112000"/>
-              </a:lnSpc>
-              <a:spcBef>
-                <a:spcPts val="0"/>
-              </a:spcBef>
-              <a:spcAft>
-                <a:spcPts val="200"/>
-              </a:spcAft>
-            </a:pPr>
-            <a:r>
-              <a:rPr sz="1150" b="0" i="0">
-                <a:solidFill>
-                  <a:srgbClr val="20242E"/>
-                </a:solidFill>
-                <a:latin typeface="Inter"/>
-              </a:rPr>
-              <a:t>klemtoon · aguda/llana/esdrújula · tilde</a:t>
-            </a:r>
-          </a:p>
-        </p:txBody>
-      </p:sp>
-      <p:sp>
-        <p:nvSpPr>
-          <p:cNvPr id="20" name="Rounded Rectangle 19"/>
-          <p:cNvSpPr/>
-          <p:nvPr/>
-        </p:nvSpPr>
-        <p:spPr>
-          <a:xfrm>
-            <a:off x="3493008" y="3246120"/>
-            <a:ext cx="707745" cy="292608"/>
-          </a:xfrm>
-          <a:prstGeom prst="roundRect">
-            <a:avLst>
-              <a:gd name="adj" fmla="val 50000"/>
-            </a:avLst>
-          </a:prstGeom>
-          <a:solidFill>
-            <a:srgbClr val="E4F4EE"/>
-          </a:solidFill>
-          <a:ln>
-            <a:noFill/>
-          </a:ln>
-          <a:effectLst/>
-        </p:spPr>
-        <p:style>
-          <a:lnRef idx="1">
-            <a:schemeClr val="accent1"/>
-          </a:lnRef>
-          <a:fillRef idx="3">
-            <a:schemeClr val="accent1"/>
-          </a:fillRef>
-          <a:effectRef idx="2">
-            <a:schemeClr val="accent1"/>
-          </a:effectRef>
-          <a:fontRef idx="minor">
-            <a:schemeClr val="lt1"/>
-          </a:fontRef>
-        </p:style>
-        <p:txBody>
-          <a:bodyPr rtlCol="0" anchor="ctr" wrap="none" lIns="88900" rIns="88900" tIns="12700" bIns="12700"/>
-          <a:lstStyle/>
-          <a:p>
-            <a:pPr algn="ctr"/>
-            <a:r>
-              <a:rPr sz="950" b="1">
-                <a:solidFill>
-                  <a:srgbClr val="157355"/>
-                </a:solidFill>
-                <a:latin typeface="Inter"/>
-              </a:rPr>
-              <a:t>→ dia 7</a:t>
-            </a:r>
-          </a:p>
-        </p:txBody>
-      </p:sp>
-      <p:sp>
-        <p:nvSpPr>
-          <p:cNvPr id="21" name="Rounded Rectangle 20">
-            <a:hlinkClick action="ppaction://hlinksldjump" r:id="rId4"/>
-          </p:cNvPr>
-          <p:cNvSpPr/>
-          <p:nvPr/>
-        </p:nvSpPr>
-        <p:spPr>
-          <a:xfrm>
-            <a:off x="6199632" y="1417320"/>
-            <a:ext cx="2743200" cy="2240280"/>
-          </a:xfrm>
-          <a:prstGeom prst="roundRect">
-            <a:avLst>
-              <a:gd name="adj" fmla="val 5500"/>
-            </a:avLst>
-          </a:prstGeom>
-          <a:solidFill>
-            <a:srgbClr val="FFFFFF"/>
-          </a:solidFill>
-          <a:ln w="20320">
-            <a:solidFill>
-              <a:srgbClr val="1E9E74"/>
-            </a:solidFill>
-          </a:ln>
-          <a:effectLst/>
-          <a:effectLst>
-            <a:outerShdw blurRad="90000" dist="38000" dir="5400000" rotWithShape="0">
-              <a:srgbClr val="20242E">
-                <a:alpha val="22000"/>
-              </a:srgbClr>
-            </a:outerShdw>
-          </a:effectLst>
-        </p:spPr>
-        <p:style>
-          <a:lnRef idx="1">
-            <a:schemeClr val="accent1"/>
-          </a:lnRef>
-          <a:fillRef idx="3">
-            <a:schemeClr val="accent1"/>
-          </a:fillRef>
-          <a:effectRef idx="2">
-            <a:schemeClr val="accent1"/>
-          </a:effectRef>
-          <a:fontRef idx="minor">
-            <a:schemeClr val="lt1"/>
-          </a:fontRef>
-        </p:style>
-        <p:txBody>
-          <a:bodyPr rtlCol="0" anchor="ctr"/>
-          <a:lstStyle/>
-          <a:p>
-            <a:pPr algn="ctr"/>
-          </a:p>
-        </p:txBody>
-      </p:sp>
-      <p:sp>
-        <p:nvSpPr>
-          <p:cNvPr id="22" name="Rectangle 21">
-            <a:hlinkClick action="ppaction://hlinksldjump" r:id="rId4"/>
-          </p:cNvPr>
-          <p:cNvSpPr/>
-          <p:nvPr/>
-        </p:nvSpPr>
-        <p:spPr>
-          <a:xfrm>
-            <a:off x="6199632" y="1417320"/>
-            <a:ext cx="2743200" cy="457200"/>
-          </a:xfrm>
-          <a:prstGeom prst="rect">
-            <a:avLst/>
-          </a:prstGeom>
-          <a:solidFill>
-            <a:srgbClr val="1E9E74"/>
-          </a:solidFill>
-          <a:ln>
-            <a:noFill/>
-          </a:ln>
-          <a:effectLst/>
-        </p:spPr>
-        <p:style>
-          <a:lnRef idx="1">
-            <a:schemeClr val="accent1"/>
-          </a:lnRef>
-          <a:fillRef idx="3">
-            <a:schemeClr val="accent1"/>
-          </a:fillRef>
-          <a:effectRef idx="2">
-            <a:schemeClr val="accent1"/>
-          </a:effectRef>
-          <a:fontRef idx="minor">
-            <a:schemeClr val="lt1"/>
-          </a:fontRef>
-        </p:style>
-        <p:txBody>
-          <a:bodyPr rtlCol="0" anchor="ctr"/>
-          <a:lstStyle/>
-          <a:p>
-            <a:pPr algn="ctr"/>
-          </a:p>
-        </p:txBody>
-      </p:sp>
-      <p:sp>
-        <p:nvSpPr>
-          <p:cNvPr id="23" name="Rounded Rectangle 22"/>
-          <p:cNvSpPr/>
-          <p:nvPr/>
-        </p:nvSpPr>
-        <p:spPr>
-          <a:xfrm>
-            <a:off x="6309360" y="1490472"/>
-            <a:ext cx="310896" cy="310896"/>
-          </a:xfrm>
-          <a:prstGeom prst="roundRect">
-            <a:avLst>
-              <a:gd name="adj" fmla="val 50000"/>
-            </a:avLst>
-          </a:prstGeom>
-          <a:solidFill>
-            <a:srgbClr val="FFFFFF"/>
-          </a:solidFill>
-          <a:ln>
-            <a:noFill/>
-          </a:ln>
-          <a:effectLst/>
-        </p:spPr>
-        <p:style>
-          <a:lnRef idx="1">
-            <a:schemeClr val="accent1"/>
-          </a:lnRef>
-          <a:fillRef idx="3">
-            <a:schemeClr val="accent1"/>
-          </a:fillRef>
-          <a:effectRef idx="2">
-            <a:schemeClr val="accent1"/>
-          </a:effectRef>
-          <a:fontRef idx="minor">
-            <a:schemeClr val="lt1"/>
-          </a:fontRef>
-        </p:style>
-        <p:txBody>
-          <a:bodyPr rtlCol="0" anchor="ctr"/>
-          <a:lstStyle/>
-          <a:p>
-            <a:pPr algn="ctr"/>
-            <a:r>
-              <a:rPr sz="1200" b="1">
-                <a:solidFill>
-                  <a:srgbClr val="1E9E74"/>
-                </a:solidFill>
-                <a:latin typeface="Bricolage Grotesque"/>
-              </a:rPr>
-              <a:t>§3</a:t>
-            </a:r>
-          </a:p>
-        </p:txBody>
-      </p:sp>
-      <p:sp>
-        <p:nvSpPr>
-          <p:cNvPr id="24" name="TextBox 23"/>
-          <p:cNvSpPr txBox="1"/>
-          <p:nvPr/>
-        </p:nvSpPr>
-        <p:spPr>
-          <a:xfrm>
-            <a:off x="6729984" y="1472184"/>
-            <a:ext cx="2103120" cy="365760"/>
-          </a:xfrm>
-          <a:prstGeom prst="rect">
-            <a:avLst/>
-          </a:prstGeom>
-          <a:noFill/>
-        </p:spPr>
-        <p:txBody>
-          <a:bodyPr wrap="square" anchor="ctr" lIns="38100" rIns="38100" tIns="25400" bIns="25400">
-            <a:spAutoFit/>
-          </a:bodyPr>
-          <a:lstStyle/>
-          <a:p>
-            <a:pPr algn="l">
-              <a:lnSpc>
-                <a:spcPct val="106000"/>
-              </a:lnSpc>
-              <a:spcBef>
-                <a:spcPts val="0"/>
-              </a:spcBef>
-              <a:spcAft>
-                <a:spcPts val="200"/>
-              </a:spcAft>
-            </a:pPr>
-            <a:r>
-              <a:rPr sz="1450" b="1" i="0">
-                <a:solidFill>
-                  <a:srgbClr val="FFFFFF"/>
-                </a:solidFill>
-                <a:latin typeface="Bricolage Grotesque"/>
-              </a:rPr>
-              <a:t>Números 0–100</a:t>
-            </a:r>
-          </a:p>
-        </p:txBody>
-      </p:sp>
-      <p:sp>
-        <p:nvSpPr>
-          <p:cNvPr id="25" name="TextBox 24"/>
-          <p:cNvSpPr txBox="1"/>
-          <p:nvPr/>
-        </p:nvSpPr>
-        <p:spPr>
-          <a:xfrm>
-            <a:off x="6364224" y="2039112"/>
-            <a:ext cx="2414016" cy="1097280"/>
-          </a:xfrm>
-          <a:prstGeom prst="rect">
-            <a:avLst/>
-          </a:prstGeom>
-          <a:noFill/>
-        </p:spPr>
-        <p:txBody>
-          <a:bodyPr wrap="square" anchor="t" lIns="38100" rIns="38100" tIns="25400" bIns="25400">
-            <a:spAutoFit/>
-          </a:bodyPr>
-          <a:lstStyle/>
-          <a:p>
-            <a:pPr algn="l">
-              <a:lnSpc>
-                <a:spcPct val="112000"/>
-              </a:lnSpc>
-              <a:spcBef>
-                <a:spcPts val="0"/>
-              </a:spcBef>
-              <a:spcAft>
-                <a:spcPts val="200"/>
-              </a:spcAft>
-            </a:pPr>
-            <a:r>
-              <a:rPr sz="1150" b="0" i="0">
-                <a:solidFill>
-                  <a:srgbClr val="20242E"/>
-                </a:solidFill>
-                <a:latin typeface="Inter"/>
-              </a:rPr>
-              <a:t>tellen · leeftijd · telefoon</a:t>
-            </a:r>
-          </a:p>
-        </p:txBody>
-      </p:sp>
-      <p:sp>
-        <p:nvSpPr>
-          <p:cNvPr id="26" name="Rounded Rectangle 25"/>
-          <p:cNvSpPr/>
-          <p:nvPr/>
-        </p:nvSpPr>
-        <p:spPr>
-          <a:xfrm>
-            <a:off x="6364224" y="3246120"/>
-            <a:ext cx="791870" cy="292608"/>
-          </a:xfrm>
-          <a:prstGeom prst="roundRect">
-            <a:avLst>
-              <a:gd name="adj" fmla="val 50000"/>
-            </a:avLst>
-          </a:prstGeom>
-          <a:solidFill>
-            <a:srgbClr val="E4F4EE"/>
-          </a:solidFill>
-          <a:ln>
-            <a:noFill/>
-          </a:ln>
-          <a:effectLst/>
-        </p:spPr>
-        <p:style>
-          <a:lnRef idx="1">
-            <a:schemeClr val="accent1"/>
-          </a:lnRef>
-          <a:fillRef idx="3">
-            <a:schemeClr val="accent1"/>
-          </a:fillRef>
-          <a:effectRef idx="2">
-            <a:schemeClr val="accent1"/>
-          </a:effectRef>
-          <a:fontRef idx="minor">
-            <a:schemeClr val="lt1"/>
-          </a:fontRef>
-        </p:style>
-        <p:txBody>
-          <a:bodyPr rtlCol="0" anchor="ctr" wrap="none" lIns="88900" rIns="88900" tIns="12700" bIns="12700"/>
-          <a:lstStyle/>
-          <a:p>
-            <a:pPr algn="ctr"/>
-            <a:r>
-              <a:rPr sz="950" b="1">
-                <a:solidFill>
-                  <a:srgbClr val="157355"/>
-                </a:solidFill>
-                <a:latin typeface="Inter"/>
-              </a:rPr>
-              <a:t>→ dia 10</a:t>
-            </a:r>
-          </a:p>
-        </p:txBody>
-      </p:sp>
-      <p:sp>
-        <p:nvSpPr>
-          <p:cNvPr id="27" name="Rounded Rectangle 26">
-            <a:hlinkClick action="ppaction://hlinksldjump" r:id="rId5"/>
-          </p:cNvPr>
-          <p:cNvSpPr/>
-          <p:nvPr/>
-        </p:nvSpPr>
-        <p:spPr>
-          <a:xfrm>
-            <a:off x="9070848" y="1417320"/>
-            <a:ext cx="2743200" cy="2240280"/>
-          </a:xfrm>
-          <a:prstGeom prst="roundRect">
-            <a:avLst>
-              <a:gd name="adj" fmla="val 5500"/>
-            </a:avLst>
-          </a:prstGeom>
-          <a:solidFill>
-            <a:srgbClr val="FFFFFF"/>
-          </a:solidFill>
-          <a:ln w="20320">
-            <a:solidFill>
-              <a:srgbClr val="1E9E74"/>
-            </a:solidFill>
-          </a:ln>
-          <a:effectLst/>
-          <a:effectLst>
-            <a:outerShdw blurRad="90000" dist="38000" dir="5400000" rotWithShape="0">
-              <a:srgbClr val="20242E">
-                <a:alpha val="22000"/>
-              </a:srgbClr>
-            </a:outerShdw>
-          </a:effectLst>
-        </p:spPr>
-        <p:style>
-          <a:lnRef idx="1">
-            <a:schemeClr val="accent1"/>
-          </a:lnRef>
-          <a:fillRef idx="3">
-            <a:schemeClr val="accent1"/>
-          </a:fillRef>
-          <a:effectRef idx="2">
-            <a:schemeClr val="accent1"/>
-          </a:effectRef>
-          <a:fontRef idx="minor">
-            <a:schemeClr val="lt1"/>
-          </a:fontRef>
-        </p:style>
-        <p:txBody>
-          <a:bodyPr rtlCol="0" anchor="ctr"/>
-          <a:lstStyle/>
-          <a:p>
-            <a:pPr algn="ctr"/>
-          </a:p>
-        </p:txBody>
-      </p:sp>
-      <p:sp>
-        <p:nvSpPr>
-          <p:cNvPr id="28" name="Rectangle 27">
-            <a:hlinkClick action="ppaction://hlinksldjump" r:id="rId5"/>
-          </p:cNvPr>
-          <p:cNvSpPr/>
-          <p:nvPr/>
-        </p:nvSpPr>
-        <p:spPr>
-          <a:xfrm>
-            <a:off x="9070848" y="1417320"/>
-            <a:ext cx="2743200" cy="457200"/>
-          </a:xfrm>
-          <a:prstGeom prst="rect">
-            <a:avLst/>
-          </a:prstGeom>
-          <a:solidFill>
-            <a:srgbClr val="1E9E74"/>
-          </a:solidFill>
-          <a:ln>
-            <a:noFill/>
-          </a:ln>
-          <a:effectLst/>
-        </p:spPr>
-        <p:style>
-          <a:lnRef idx="1">
-            <a:schemeClr val="accent1"/>
-          </a:lnRef>
-          <a:fillRef idx="3">
-            <a:schemeClr val="accent1"/>
-          </a:fillRef>
-          <a:effectRef idx="2">
-            <a:schemeClr val="accent1"/>
-          </a:effectRef>
-          <a:fontRef idx="minor">
-            <a:schemeClr val="lt1"/>
-          </a:fontRef>
-        </p:style>
-        <p:txBody>
-          <a:bodyPr rtlCol="0" anchor="ctr"/>
-          <a:lstStyle/>
-          <a:p>
-            <a:pPr algn="ctr"/>
-          </a:p>
-        </p:txBody>
-      </p:sp>
-      <p:sp>
-        <p:nvSpPr>
-          <p:cNvPr id="29" name="Rounded Rectangle 28"/>
-          <p:cNvSpPr/>
-          <p:nvPr/>
-        </p:nvSpPr>
-        <p:spPr>
-          <a:xfrm>
-            <a:off x="9180576" y="1490472"/>
-            <a:ext cx="310896" cy="310896"/>
-          </a:xfrm>
-          <a:prstGeom prst="roundRect">
-            <a:avLst>
-              <a:gd name="adj" fmla="val 50000"/>
-            </a:avLst>
-          </a:prstGeom>
-          <a:solidFill>
-            <a:srgbClr val="FFFFFF"/>
-          </a:solidFill>
-          <a:ln>
-            <a:noFill/>
-          </a:ln>
-          <a:effectLst/>
-        </p:spPr>
-        <p:style>
-          <a:lnRef idx="1">
-            <a:schemeClr val="accent1"/>
-          </a:lnRef>
-          <a:fillRef idx="3">
-            <a:schemeClr val="accent1"/>
-          </a:fillRef>
-          <a:effectRef idx="2">
-            <a:schemeClr val="accent1"/>
-          </a:effectRef>
-          <a:fontRef idx="minor">
-            <a:schemeClr val="lt1"/>
-          </a:fontRef>
-        </p:style>
-        <p:txBody>
-          <a:bodyPr rtlCol="0" anchor="ctr"/>
-          <a:lstStyle/>
-          <a:p>
-            <a:pPr algn="ctr"/>
-            <a:r>
-              <a:rPr sz="1200" b="1">
-                <a:solidFill>
-                  <a:srgbClr val="1E9E74"/>
-                </a:solidFill>
-                <a:latin typeface="Bricolage Grotesque"/>
-              </a:rPr>
-              <a:t>§4</a:t>
-            </a:r>
-          </a:p>
-        </p:txBody>
-      </p:sp>
-      <p:sp>
-        <p:nvSpPr>
-          <p:cNvPr id="30" name="TextBox 29"/>
-          <p:cNvSpPr txBox="1"/>
-          <p:nvPr/>
-        </p:nvSpPr>
-        <p:spPr>
-          <a:xfrm>
-            <a:off x="9601200" y="1472184"/>
-            <a:ext cx="2103120" cy="365760"/>
-          </a:xfrm>
-          <a:prstGeom prst="rect">
-            <a:avLst/>
-          </a:prstGeom>
-          <a:noFill/>
-        </p:spPr>
-        <p:txBody>
-          <a:bodyPr wrap="square" anchor="ctr" lIns="38100" rIns="38100" tIns="25400" bIns="25400">
-            <a:spAutoFit/>
-          </a:bodyPr>
-          <a:lstStyle/>
-          <a:p>
-            <a:pPr algn="l">
-              <a:lnSpc>
-                <a:spcPct val="106000"/>
-              </a:lnSpc>
-              <a:spcBef>
-                <a:spcPts val="0"/>
-              </a:spcBef>
-              <a:spcAft>
-                <a:spcPts val="200"/>
-              </a:spcAft>
-            </a:pPr>
-            <a:r>
-              <a:rPr sz="1450" b="1" i="0">
-                <a:solidFill>
-                  <a:srgbClr val="FFFFFF"/>
-                </a:solidFill>
-                <a:latin typeface="Bricolage Grotesque"/>
-              </a:rPr>
-              <a:t>Saludos y clase</a:t>
-            </a:r>
-          </a:p>
-        </p:txBody>
-      </p:sp>
-      <p:sp>
-        <p:nvSpPr>
-          <p:cNvPr id="31" name="TextBox 30"/>
-          <p:cNvSpPr txBox="1"/>
-          <p:nvPr/>
-        </p:nvSpPr>
-        <p:spPr>
-          <a:xfrm>
-            <a:off x="9235440" y="2039112"/>
-            <a:ext cx="2414016" cy="1097280"/>
-          </a:xfrm>
-          <a:prstGeom prst="rect">
-            <a:avLst/>
-          </a:prstGeom>
-          <a:noFill/>
-        </p:spPr>
-        <p:txBody>
-          <a:bodyPr wrap="square" anchor="t" lIns="38100" rIns="38100" tIns="25400" bIns="25400">
-            <a:spAutoFit/>
-          </a:bodyPr>
-          <a:lstStyle/>
-          <a:p>
-            <a:pPr algn="l">
-              <a:lnSpc>
-                <a:spcPct val="112000"/>
-              </a:lnSpc>
-              <a:spcBef>
-                <a:spcPts val="0"/>
-              </a:spcBef>
-              <a:spcAft>
-                <a:spcPts val="200"/>
-              </a:spcAft>
-            </a:pPr>
-            <a:r>
-              <a:rPr sz="1150" b="0" i="0">
-                <a:solidFill>
-                  <a:srgbClr val="20242E"/>
-                </a:solidFill>
-                <a:latin typeface="Inter"/>
-              </a:rPr>
-              <a:t>groeten · voorstellen · lengua de clase</a:t>
-            </a:r>
-          </a:p>
-        </p:txBody>
-      </p:sp>
-      <p:sp>
-        <p:nvSpPr>
-          <p:cNvPr id="32" name="Rounded Rectangle 31"/>
-          <p:cNvSpPr/>
-          <p:nvPr/>
-        </p:nvSpPr>
-        <p:spPr>
-          <a:xfrm>
-            <a:off x="9235440" y="3246120"/>
-            <a:ext cx="791870" cy="292608"/>
-          </a:xfrm>
-          <a:prstGeom prst="roundRect">
-            <a:avLst>
-              <a:gd name="adj" fmla="val 50000"/>
-            </a:avLst>
-          </a:prstGeom>
-          <a:solidFill>
-            <a:srgbClr val="E4F4EE"/>
-          </a:solidFill>
-          <a:ln>
-            <a:noFill/>
-          </a:ln>
-          <a:effectLst/>
-        </p:spPr>
-        <p:style>
-          <a:lnRef idx="1">
-            <a:schemeClr val="accent1"/>
-          </a:lnRef>
-          <a:fillRef idx="3">
-            <a:schemeClr val="accent1"/>
-          </a:fillRef>
-          <a:effectRef idx="2">
-            <a:schemeClr val="accent1"/>
-          </a:effectRef>
-          <a:fontRef idx="minor">
-            <a:schemeClr val="lt1"/>
-          </a:fontRef>
-        </p:style>
-        <p:txBody>
-          <a:bodyPr rtlCol="0" anchor="ctr" wrap="none" lIns="88900" rIns="88900" tIns="12700" bIns="12700"/>
-          <a:lstStyle/>
-          <a:p>
-            <a:pPr algn="ctr"/>
-            <a:r>
-              <a:rPr sz="950" b="1">
-                <a:solidFill>
-                  <a:srgbClr val="157355"/>
-                </a:solidFill>
-                <a:latin typeface="Inter"/>
-              </a:rPr>
-              <a:t>→ dia 13</a:t>
-            </a:r>
-          </a:p>
-        </p:txBody>
-      </p:sp>
-      <p:sp>
-        <p:nvSpPr>
-          <p:cNvPr id="33" name="Rounded Rectangle 32">
-            <a:hlinkClick action="ppaction://hlinksldjump" r:id="rId6"/>
-          </p:cNvPr>
-          <p:cNvSpPr/>
-          <p:nvPr/>
-        </p:nvSpPr>
-        <p:spPr>
-          <a:xfrm>
-            <a:off x="457200" y="3840480"/>
-            <a:ext cx="2743200" cy="2240280"/>
-          </a:xfrm>
-          <a:prstGeom prst="roundRect">
-            <a:avLst>
-              <a:gd name="adj" fmla="val 5500"/>
-            </a:avLst>
-          </a:prstGeom>
-          <a:solidFill>
-            <a:srgbClr val="FFFFFF"/>
-          </a:solidFill>
-          <a:ln w="20320">
-            <a:solidFill>
-              <a:srgbClr val="157355"/>
-            </a:solidFill>
-          </a:ln>
-          <a:effectLst/>
-          <a:effectLst>
-            <a:outerShdw blurRad="90000" dist="38000" dir="5400000" rotWithShape="0">
-              <a:srgbClr val="20242E">
-                <a:alpha val="22000"/>
-              </a:srgbClr>
-            </a:outerShdw>
-          </a:effectLst>
-        </p:spPr>
-        <p:style>
-          <a:lnRef idx="1">
-            <a:schemeClr val="accent1"/>
-          </a:lnRef>
-          <a:fillRef idx="3">
-            <a:schemeClr val="accent1"/>
-          </a:fillRef>
-          <a:effectRef idx="2">
-            <a:schemeClr val="accent1"/>
-          </a:effectRef>
-          <a:fontRef idx="minor">
-            <a:schemeClr val="lt1"/>
-          </a:fontRef>
-        </p:style>
-        <p:txBody>
-          <a:bodyPr rtlCol="0" anchor="ctr"/>
-          <a:lstStyle/>
-          <a:p>
-            <a:pPr algn="ctr"/>
-          </a:p>
-        </p:txBody>
-      </p:sp>
-      <p:sp>
-        <p:nvSpPr>
-          <p:cNvPr id="34" name="Rectangle 33">
-            <a:hlinkClick action="ppaction://hlinksldjump" r:id="rId6"/>
-          </p:cNvPr>
-          <p:cNvSpPr/>
-          <p:nvPr/>
-        </p:nvSpPr>
-        <p:spPr>
-          <a:xfrm>
-            <a:off x="457200" y="3840480"/>
-            <a:ext cx="2743200" cy="457200"/>
-          </a:xfrm>
-          <a:prstGeom prst="rect">
-            <a:avLst/>
-          </a:prstGeom>
-          <a:solidFill>
-            <a:srgbClr val="157355"/>
-          </a:solidFill>
-          <a:ln>
-            <a:noFill/>
-          </a:ln>
-          <a:effectLst/>
-        </p:spPr>
-        <p:style>
-          <a:lnRef idx="1">
-            <a:schemeClr val="accent1"/>
-          </a:lnRef>
-          <a:fillRef idx="3">
-            <a:schemeClr val="accent1"/>
-          </a:fillRef>
-          <a:effectRef idx="2">
-            <a:schemeClr val="accent1"/>
-          </a:effectRef>
-          <a:fontRef idx="minor">
-            <a:schemeClr val="lt1"/>
-          </a:fontRef>
-        </p:style>
-        <p:txBody>
-          <a:bodyPr rtlCol="0" anchor="ctr"/>
-          <a:lstStyle/>
-          <a:p>
-            <a:pPr algn="ctr"/>
-          </a:p>
-        </p:txBody>
-      </p:sp>
-      <p:sp>
-        <p:nvSpPr>
-          <p:cNvPr id="35" name="Rounded Rectangle 34"/>
-          <p:cNvSpPr/>
-          <p:nvPr/>
-        </p:nvSpPr>
-        <p:spPr>
-          <a:xfrm>
-            <a:off x="566928" y="3913632"/>
-            <a:ext cx="310896" cy="310896"/>
-          </a:xfrm>
-          <a:prstGeom prst="roundRect">
-            <a:avLst>
-              <a:gd name="adj" fmla="val 50000"/>
-            </a:avLst>
-          </a:prstGeom>
-          <a:solidFill>
-            <a:srgbClr val="FFFFFF"/>
-          </a:solidFill>
-          <a:ln>
-            <a:noFill/>
-          </a:ln>
-          <a:effectLst/>
-        </p:spPr>
-        <p:style>
-          <a:lnRef idx="1">
-            <a:schemeClr val="accent1"/>
-          </a:lnRef>
-          <a:fillRef idx="3">
-            <a:schemeClr val="accent1"/>
-          </a:fillRef>
-          <a:effectRef idx="2">
-            <a:schemeClr val="accent1"/>
-          </a:effectRef>
-          <a:fontRef idx="minor">
-            <a:schemeClr val="lt1"/>
-          </a:fontRef>
-        </p:style>
-        <p:txBody>
-          <a:bodyPr rtlCol="0" anchor="ctr"/>
-          <a:lstStyle/>
-          <a:p>
-            <a:pPr algn="ctr"/>
-            <a:r>
-              <a:rPr sz="1200" b="1">
-                <a:solidFill>
-                  <a:srgbClr val="157355"/>
-                </a:solidFill>
-                <a:latin typeface="Bricolage Grotesque"/>
-              </a:rPr>
-              <a:t>★</a:t>
-            </a:r>
-          </a:p>
-        </p:txBody>
-      </p:sp>
-      <p:sp>
-        <p:nvSpPr>
-          <p:cNvPr id="36" name="TextBox 35"/>
-          <p:cNvSpPr txBox="1"/>
-          <p:nvPr/>
-        </p:nvSpPr>
-        <p:spPr>
-          <a:xfrm>
-            <a:off x="987552" y="3895344"/>
-            <a:ext cx="2103120" cy="365760"/>
-          </a:xfrm>
-          <a:prstGeom prst="rect">
-            <a:avLst/>
-          </a:prstGeom>
-          <a:noFill/>
-        </p:spPr>
-        <p:txBody>
-          <a:bodyPr wrap="square" anchor="ctr" lIns="38100" rIns="38100" tIns="25400" bIns="25400">
-            <a:spAutoFit/>
-          </a:bodyPr>
-          <a:lstStyle/>
-          <a:p>
-            <a:pPr algn="l">
-              <a:lnSpc>
-                <a:spcPct val="106000"/>
-              </a:lnSpc>
-              <a:spcBef>
-                <a:spcPts val="0"/>
-              </a:spcBef>
-              <a:spcAft>
-                <a:spcPts val="200"/>
-              </a:spcAft>
-            </a:pPr>
-            <a:r>
-              <a:rPr sz="1450" b="1" i="0">
-                <a:solidFill>
-                  <a:srgbClr val="FFFFFF"/>
-                </a:solidFill>
-                <a:latin typeface="Bricolage Grotesque"/>
-              </a:rPr>
-              <a:t>Cultura</a:t>
-            </a:r>
-          </a:p>
-        </p:txBody>
-      </p:sp>
-      <p:sp>
-        <p:nvSpPr>
-          <p:cNvPr id="37" name="TextBox 36"/>
-          <p:cNvSpPr txBox="1"/>
-          <p:nvPr/>
-        </p:nvSpPr>
-        <p:spPr>
-          <a:xfrm>
-            <a:off x="621792" y="4462272"/>
-            <a:ext cx="2414016" cy="1097280"/>
-          </a:xfrm>
-          <a:prstGeom prst="rect">
-            <a:avLst/>
-          </a:prstGeom>
-          <a:noFill/>
-        </p:spPr>
-        <p:txBody>
-          <a:bodyPr wrap="square" anchor="t" lIns="38100" rIns="38100" tIns="25400" bIns="25400">
-            <a:spAutoFit/>
-          </a:bodyPr>
-          <a:lstStyle/>
-          <a:p>
-            <a:pPr algn="l">
-              <a:lnSpc>
-                <a:spcPct val="112000"/>
-              </a:lnSpc>
-              <a:spcBef>
-                <a:spcPts val="0"/>
-              </a:spcBef>
-              <a:spcAft>
-                <a:spcPts val="200"/>
-              </a:spcAft>
-            </a:pPr>
-            <a:r>
-              <a:rPr sz="1150" b="0" i="0">
-                <a:solidFill>
-                  <a:srgbClr val="20242E"/>
-                </a:solidFill>
-                <a:latin typeface="Inter"/>
-              </a:rPr>
-              <a:t>¿Dónde se habla español? (+20 países)</a:t>
-            </a:r>
-          </a:p>
-        </p:txBody>
-      </p:sp>
-      <p:sp>
-        <p:nvSpPr>
-          <p:cNvPr id="38" name="Rounded Rectangle 37"/>
-          <p:cNvSpPr/>
-          <p:nvPr/>
-        </p:nvSpPr>
-        <p:spPr>
-          <a:xfrm>
-            <a:off x="621792" y="5669280"/>
-            <a:ext cx="791870" cy="292608"/>
-          </a:xfrm>
-          <a:prstGeom prst="roundRect">
-            <a:avLst>
-              <a:gd name="adj" fmla="val 50000"/>
-            </a:avLst>
-          </a:prstGeom>
-          <a:solidFill>
-            <a:srgbClr val="E4F4EE"/>
-          </a:solidFill>
-          <a:ln>
-            <a:noFill/>
-          </a:ln>
-          <a:effectLst/>
-        </p:spPr>
-        <p:style>
-          <a:lnRef idx="1">
-            <a:schemeClr val="accent1"/>
-          </a:lnRef>
-          <a:fillRef idx="3">
-            <a:schemeClr val="accent1"/>
-          </a:fillRef>
-          <a:effectRef idx="2">
-            <a:schemeClr val="accent1"/>
-          </a:effectRef>
-          <a:fontRef idx="minor">
-            <a:schemeClr val="lt1"/>
-          </a:fontRef>
-        </p:style>
-        <p:txBody>
-          <a:bodyPr rtlCol="0" anchor="ctr" wrap="none" lIns="88900" rIns="88900" tIns="12700" bIns="12700"/>
-          <a:lstStyle/>
-          <a:p>
-            <a:pPr algn="ctr"/>
-            <a:r>
-              <a:rPr sz="950" b="1">
-                <a:solidFill>
-                  <a:srgbClr val="157355"/>
-                </a:solidFill>
-                <a:latin typeface="Inter"/>
-              </a:rPr>
-              <a:t>→ dia 16</a:t>
-            </a:r>
-          </a:p>
-        </p:txBody>
-      </p:sp>
-      <p:sp>
-        <p:nvSpPr>
-          <p:cNvPr id="39" name="Rounded Rectangle 38">
-            <a:hlinkClick action="ppaction://hlinksldjump" r:id="rId7"/>
-          </p:cNvPr>
-          <p:cNvSpPr/>
-          <p:nvPr/>
-        </p:nvSpPr>
-        <p:spPr>
-          <a:xfrm>
-            <a:off x="3328416" y="3840480"/>
-            <a:ext cx="2743200" cy="2240280"/>
-          </a:xfrm>
-          <a:prstGeom prst="roundRect">
-            <a:avLst>
-              <a:gd name="adj" fmla="val 5500"/>
-            </a:avLst>
-          </a:prstGeom>
-          <a:solidFill>
-            <a:srgbClr val="FFFFFF"/>
-          </a:solidFill>
-          <a:ln w="20320">
-            <a:solidFill>
-              <a:srgbClr val="157355"/>
-            </a:solidFill>
-          </a:ln>
-          <a:effectLst/>
-          <a:effectLst>
-            <a:outerShdw blurRad="90000" dist="38000" dir="5400000" rotWithShape="0">
-              <a:srgbClr val="20242E">
-                <a:alpha val="22000"/>
-              </a:srgbClr>
-            </a:outerShdw>
-          </a:effectLst>
-        </p:spPr>
-        <p:style>
-          <a:lnRef idx="1">
-            <a:schemeClr val="accent1"/>
-          </a:lnRef>
-          <a:fillRef idx="3">
-            <a:schemeClr val="accent1"/>
-          </a:fillRef>
-          <a:effectRef idx="2">
-            <a:schemeClr val="accent1"/>
-          </a:effectRef>
-          <a:fontRef idx="minor">
-            <a:schemeClr val="lt1"/>
-          </a:fontRef>
-        </p:style>
-        <p:txBody>
-          <a:bodyPr rtlCol="0" anchor="ctr"/>
-          <a:lstStyle/>
-          <a:p>
-            <a:pPr algn="ctr"/>
-          </a:p>
-        </p:txBody>
-      </p:sp>
-      <p:sp>
-        <p:nvSpPr>
-          <p:cNvPr id="40" name="Rectangle 39">
-            <a:hlinkClick action="ppaction://hlinksldjump" r:id="rId7"/>
-          </p:cNvPr>
-          <p:cNvSpPr/>
-          <p:nvPr/>
-        </p:nvSpPr>
-        <p:spPr>
-          <a:xfrm>
-            <a:off x="3328416" y="3840480"/>
-            <a:ext cx="2743200" cy="457200"/>
-          </a:xfrm>
-          <a:prstGeom prst="rect">
-            <a:avLst/>
-          </a:prstGeom>
-          <a:solidFill>
-            <a:srgbClr val="157355"/>
-          </a:solidFill>
-          <a:ln>
-            <a:noFill/>
-          </a:ln>
-          <a:effectLst/>
-        </p:spPr>
-        <p:style>
-          <a:lnRef idx="1">
-            <a:schemeClr val="accent1"/>
-          </a:lnRef>
-          <a:fillRef idx="3">
-            <a:schemeClr val="accent1"/>
-          </a:fillRef>
-          <a:effectRef idx="2">
-            <a:schemeClr val="accent1"/>
-          </a:effectRef>
-          <a:fontRef idx="minor">
-            <a:schemeClr val="lt1"/>
-          </a:fontRef>
-        </p:style>
-        <p:txBody>
-          <a:bodyPr rtlCol="0" anchor="ctr"/>
-          <a:lstStyle/>
-          <a:p>
-            <a:pPr algn="ctr"/>
-          </a:p>
-        </p:txBody>
-      </p:sp>
-      <p:sp>
-        <p:nvSpPr>
-          <p:cNvPr id="41" name="Rounded Rectangle 40"/>
-          <p:cNvSpPr/>
-          <p:nvPr/>
-        </p:nvSpPr>
-        <p:spPr>
-          <a:xfrm>
-            <a:off x="3438144" y="3913632"/>
-            <a:ext cx="310896" cy="310896"/>
-          </a:xfrm>
-          <a:prstGeom prst="roundRect">
-            <a:avLst>
-              <a:gd name="adj" fmla="val 50000"/>
-            </a:avLst>
-          </a:prstGeom>
-          <a:solidFill>
-            <a:srgbClr val="FFFFFF"/>
-          </a:solidFill>
-          <a:ln>
-            <a:noFill/>
-          </a:ln>
-          <a:effectLst/>
-        </p:spPr>
-        <p:style>
-          <a:lnRef idx="1">
-            <a:schemeClr val="accent1"/>
-          </a:lnRef>
-          <a:fillRef idx="3">
-            <a:schemeClr val="accent1"/>
-          </a:fillRef>
-          <a:effectRef idx="2">
-            <a:schemeClr val="accent1"/>
-          </a:effectRef>
-          <a:fontRef idx="minor">
-            <a:schemeClr val="lt1"/>
-          </a:fontRef>
-        </p:style>
-        <p:txBody>
-          <a:bodyPr rtlCol="0" anchor="ctr"/>
-          <a:lstStyle/>
-          <a:p>
-            <a:pPr algn="ctr"/>
-            <a:r>
-              <a:rPr sz="1200" b="1">
-                <a:solidFill>
-                  <a:srgbClr val="157355"/>
-                </a:solidFill>
-                <a:latin typeface="Bricolage Grotesque"/>
-              </a:rPr>
-              <a:t>✈</a:t>
-            </a:r>
-          </a:p>
-        </p:txBody>
-      </p:sp>
-      <p:sp>
-        <p:nvSpPr>
-          <p:cNvPr id="42" name="TextBox 41"/>
-          <p:cNvSpPr txBox="1"/>
-          <p:nvPr/>
-        </p:nvSpPr>
-        <p:spPr>
-          <a:xfrm>
-            <a:off x="3858768" y="3895344"/>
-            <a:ext cx="2103120" cy="365760"/>
-          </a:xfrm>
-          <a:prstGeom prst="rect">
-            <a:avLst/>
-          </a:prstGeom>
-          <a:noFill/>
-        </p:spPr>
-        <p:txBody>
-          <a:bodyPr wrap="square" anchor="ctr" lIns="38100" rIns="38100" tIns="25400" bIns="25400">
-            <a:spAutoFit/>
-          </a:bodyPr>
-          <a:lstStyle/>
-          <a:p>
-            <a:pPr algn="l">
-              <a:lnSpc>
-                <a:spcPct val="106000"/>
-              </a:lnSpc>
-              <a:spcBef>
-                <a:spcPts val="0"/>
-              </a:spcBef>
-              <a:spcAft>
-                <a:spcPts val="200"/>
-              </a:spcAft>
-            </a:pPr>
-            <a:r>
-              <a:rPr sz="1450" b="1" i="0">
-                <a:solidFill>
-                  <a:srgbClr val="FFFFFF"/>
-                </a:solidFill>
-                <a:latin typeface="Bricolage Grotesque"/>
-              </a:rPr>
-              <a:t>Tarea final</a:t>
-            </a:r>
-          </a:p>
-        </p:txBody>
-      </p:sp>
-      <p:sp>
-        <p:nvSpPr>
-          <p:cNvPr id="43" name="TextBox 42"/>
-          <p:cNvSpPr txBox="1"/>
-          <p:nvPr/>
-        </p:nvSpPr>
-        <p:spPr>
-          <a:xfrm>
-            <a:off x="3493008" y="4462272"/>
-            <a:ext cx="2414016" cy="1097280"/>
-          </a:xfrm>
-          <a:prstGeom prst="rect">
-            <a:avLst/>
-          </a:prstGeom>
-          <a:noFill/>
-        </p:spPr>
-        <p:txBody>
-          <a:bodyPr wrap="square" anchor="t" lIns="38100" rIns="38100" tIns="25400" bIns="25400">
-            <a:spAutoFit/>
-          </a:bodyPr>
-          <a:lstStyle/>
-          <a:p>
-            <a:pPr algn="l">
-              <a:lnSpc>
-                <a:spcPct val="112000"/>
-              </a:lnSpc>
-              <a:spcBef>
-                <a:spcPts val="0"/>
-              </a:spcBef>
-              <a:spcAft>
-                <a:spcPts val="200"/>
-              </a:spcAft>
-            </a:pPr>
-            <a:r>
-              <a:rPr sz="1150" b="0" i="0">
-                <a:solidFill>
-                  <a:srgbClr val="20242E"/>
-                </a:solidFill>
-                <a:latin typeface="Inter"/>
-              </a:rPr>
-              <a:t>Tarjeta de embarque (eindmissie)</a:t>
-            </a:r>
-          </a:p>
-        </p:txBody>
-      </p:sp>
-      <p:sp>
-        <p:nvSpPr>
-          <p:cNvPr id="44" name="Rounded Rectangle 43"/>
-          <p:cNvSpPr/>
-          <p:nvPr/>
-        </p:nvSpPr>
-        <p:spPr>
-          <a:xfrm>
-            <a:off x="3493008" y="5669280"/>
-            <a:ext cx="791870" cy="292608"/>
-          </a:xfrm>
-          <a:prstGeom prst="roundRect">
-            <a:avLst>
-              <a:gd name="adj" fmla="val 50000"/>
-            </a:avLst>
-          </a:prstGeom>
-          <a:solidFill>
-            <a:srgbClr val="E4F4EE"/>
-          </a:solidFill>
-          <a:ln>
-            <a:noFill/>
-          </a:ln>
-          <a:effectLst/>
-        </p:spPr>
-        <p:style>
-          <a:lnRef idx="1">
-            <a:schemeClr val="accent1"/>
-          </a:lnRef>
-          <a:fillRef idx="3">
-            <a:schemeClr val="accent1"/>
-          </a:fillRef>
-          <a:effectRef idx="2">
-            <a:schemeClr val="accent1"/>
-          </a:effectRef>
-          <a:fontRef idx="minor">
-            <a:schemeClr val="lt1"/>
-          </a:fontRef>
-        </p:style>
-        <p:txBody>
-          <a:bodyPr rtlCol="0" anchor="ctr" wrap="none" lIns="88900" rIns="88900" tIns="12700" bIns="12700"/>
-          <a:lstStyle/>
-          <a:p>
-            <a:pPr algn="ctr"/>
-            <a:r>
-              <a:rPr sz="950" b="1">
-                <a:solidFill>
-                  <a:srgbClr val="157355"/>
-                </a:solidFill>
-                <a:latin typeface="Inter"/>
-              </a:rPr>
-              <a:t>→ dia 18</a:t>
-            </a:r>
-          </a:p>
-        </p:txBody>
-      </p:sp>
-      <p:sp>
-        <p:nvSpPr>
-          <p:cNvPr id="45" name="Rounded Rectangle 44">
-            <a:hlinkClick action="ppaction://hlinksldjump" r:id="rId8"/>
-          </p:cNvPr>
-          <p:cNvSpPr/>
-          <p:nvPr/>
-        </p:nvSpPr>
-        <p:spPr>
-          <a:xfrm>
-            <a:off x="6199632" y="3840480"/>
-            <a:ext cx="2743200" cy="2240280"/>
-          </a:xfrm>
-          <a:prstGeom prst="roundRect">
-            <a:avLst>
-              <a:gd name="adj" fmla="val 5500"/>
-            </a:avLst>
-          </a:prstGeom>
-          <a:solidFill>
-            <a:srgbClr val="FFFFFF"/>
-          </a:solidFill>
-          <a:ln w="20320">
-            <a:solidFill>
-              <a:srgbClr val="B7860B"/>
-            </a:solidFill>
-          </a:ln>
-          <a:effectLst/>
-          <a:effectLst>
-            <a:outerShdw blurRad="90000" dist="38000" dir="5400000" rotWithShape="0">
-              <a:srgbClr val="20242E">
-                <a:alpha val="22000"/>
-              </a:srgbClr>
-            </a:outerShdw>
-          </a:effectLst>
-        </p:spPr>
-        <p:style>
-          <a:lnRef idx="1">
-            <a:schemeClr val="accent1"/>
-          </a:lnRef>
-          <a:fillRef idx="3">
-            <a:schemeClr val="accent1"/>
-          </a:fillRef>
-          <a:effectRef idx="2">
-            <a:schemeClr val="accent1"/>
-          </a:effectRef>
-          <a:fontRef idx="minor">
-            <a:schemeClr val="lt1"/>
-          </a:fontRef>
-        </p:style>
-        <p:txBody>
-          <a:bodyPr rtlCol="0" anchor="ctr"/>
-          <a:lstStyle/>
-          <a:p>
-            <a:pPr algn="ctr"/>
-          </a:p>
-        </p:txBody>
-      </p:sp>
-      <p:sp>
-        <p:nvSpPr>
-          <p:cNvPr id="46" name="Rectangle 45">
-            <a:hlinkClick action="ppaction://hlinksldjump" r:id="rId8"/>
-          </p:cNvPr>
-          <p:cNvSpPr/>
-          <p:nvPr/>
-        </p:nvSpPr>
-        <p:spPr>
-          <a:xfrm>
-            <a:off x="6199632" y="3840480"/>
-            <a:ext cx="2743200" cy="457200"/>
-          </a:xfrm>
-          <a:prstGeom prst="rect">
-            <a:avLst/>
-          </a:prstGeom>
-          <a:solidFill>
-            <a:srgbClr val="B7860B"/>
-          </a:solidFill>
-          <a:ln>
-            <a:noFill/>
-          </a:ln>
-          <a:effectLst/>
-        </p:spPr>
-        <p:style>
-          <a:lnRef idx="1">
-            <a:schemeClr val="accent1"/>
-          </a:lnRef>
-          <a:fillRef idx="3">
-            <a:schemeClr val="accent1"/>
-          </a:fillRef>
-          <a:effectRef idx="2">
-            <a:schemeClr val="accent1"/>
-          </a:effectRef>
-          <a:fontRef idx="minor">
-            <a:schemeClr val="lt1"/>
-          </a:fontRef>
-        </p:style>
-        <p:txBody>
-          <a:bodyPr rtlCol="0" anchor="ctr"/>
-          <a:lstStyle/>
-          <a:p>
-            <a:pPr algn="ctr"/>
-          </a:p>
-        </p:txBody>
-      </p:sp>
-      <p:sp>
-        <p:nvSpPr>
-          <p:cNvPr id="47" name="Rounded Rectangle 46"/>
-          <p:cNvSpPr/>
-          <p:nvPr/>
-        </p:nvSpPr>
-        <p:spPr>
-          <a:xfrm>
-            <a:off x="6309360" y="3913632"/>
-            <a:ext cx="310896" cy="310896"/>
-          </a:xfrm>
-          <a:prstGeom prst="roundRect">
-            <a:avLst>
-              <a:gd name="adj" fmla="val 50000"/>
-            </a:avLst>
-          </a:prstGeom>
-          <a:solidFill>
-            <a:srgbClr val="FFFFFF"/>
-          </a:solidFill>
-          <a:ln>
-            <a:noFill/>
-          </a:ln>
-          <a:effectLst/>
-        </p:spPr>
-        <p:style>
-          <a:lnRef idx="1">
-            <a:schemeClr val="accent1"/>
-          </a:lnRef>
-          <a:fillRef idx="3">
-            <a:schemeClr val="accent1"/>
-          </a:fillRef>
-          <a:effectRef idx="2">
-            <a:schemeClr val="accent1"/>
-          </a:effectRef>
-          <a:fontRef idx="minor">
-            <a:schemeClr val="lt1"/>
-          </a:fontRef>
-        </p:style>
-        <p:txBody>
-          <a:bodyPr rtlCol="0" anchor="ctr"/>
-          <a:lstStyle/>
-          <a:p>
-            <a:pPr algn="ctr"/>
-            <a:r>
-              <a:rPr sz="1200" b="1">
-                <a:solidFill>
-                  <a:srgbClr val="B7860B"/>
-                </a:solidFill>
-                <a:latin typeface="Bricolage Grotesque"/>
-              </a:rPr>
-              <a:t>?</a:t>
-            </a:r>
-          </a:p>
-        </p:txBody>
-      </p:sp>
-      <p:sp>
-        <p:nvSpPr>
-          <p:cNvPr id="48" name="TextBox 47"/>
-          <p:cNvSpPr txBox="1"/>
-          <p:nvPr/>
-        </p:nvSpPr>
-        <p:spPr>
-          <a:xfrm>
-            <a:off x="6729984" y="3895344"/>
-            <a:ext cx="2103120" cy="365760"/>
-          </a:xfrm>
-          <a:prstGeom prst="rect">
-            <a:avLst/>
-          </a:prstGeom>
-          <a:noFill/>
-        </p:spPr>
-        <p:txBody>
-          <a:bodyPr wrap="square" anchor="ctr" lIns="38100" rIns="38100" tIns="25400" bIns="25400">
-            <a:spAutoFit/>
-          </a:bodyPr>
-          <a:lstStyle/>
-          <a:p>
-            <a:pPr algn="l">
-              <a:lnSpc>
-                <a:spcPct val="106000"/>
-              </a:lnSpc>
-              <a:spcBef>
-                <a:spcPts val="0"/>
-              </a:spcBef>
-              <a:spcAft>
-                <a:spcPts val="200"/>
-              </a:spcAft>
-            </a:pPr>
-            <a:r>
-              <a:rPr sz="1450" b="1" i="0">
-                <a:solidFill>
-                  <a:srgbClr val="FFFFFF"/>
-                </a:solidFill>
-                <a:latin typeface="Bricolage Grotesque"/>
-              </a:rPr>
-              <a:t>Quiz «La mezcla»</a:t>
-            </a:r>
-          </a:p>
-        </p:txBody>
-      </p:sp>
-      <p:sp>
-        <p:nvSpPr>
-          <p:cNvPr id="49" name="TextBox 48"/>
-          <p:cNvSpPr txBox="1"/>
-          <p:nvPr/>
-        </p:nvSpPr>
-        <p:spPr>
-          <a:xfrm>
-            <a:off x="6364224" y="4462272"/>
-            <a:ext cx="2414016" cy="1097280"/>
-          </a:xfrm>
-          <a:prstGeom prst="rect">
-            <a:avLst/>
-          </a:prstGeom>
-          <a:noFill/>
-        </p:spPr>
-        <p:txBody>
-          <a:bodyPr wrap="square" anchor="t" lIns="38100" rIns="38100" tIns="25400" bIns="25400">
-            <a:spAutoFit/>
-          </a:bodyPr>
-          <a:lstStyle/>
-          <a:p>
-            <a:pPr algn="l">
-              <a:lnSpc>
-                <a:spcPct val="112000"/>
-              </a:lnSpc>
-              <a:spcBef>
-                <a:spcPts val="0"/>
-              </a:spcBef>
-              <a:spcAft>
-                <a:spcPts val="200"/>
-              </a:spcAft>
-            </a:pPr>
-            <a:r>
-              <a:rPr sz="1150" b="0" i="0">
-                <a:solidFill>
-                  <a:srgbClr val="20242E"/>
-                </a:solidFill>
-                <a:latin typeface="Inter"/>
-              </a:rPr>
-              <a:t>gemengde ophaal — mét oplossing</a:t>
-            </a:r>
-          </a:p>
-        </p:txBody>
-      </p:sp>
-      <p:sp>
-        <p:nvSpPr>
-          <p:cNvPr id="50" name="Rounded Rectangle 49"/>
-          <p:cNvSpPr/>
-          <p:nvPr/>
-        </p:nvSpPr>
-        <p:spPr>
-          <a:xfrm>
-            <a:off x="6364224" y="5669280"/>
-            <a:ext cx="791870" cy="292608"/>
-          </a:xfrm>
-          <a:prstGeom prst="roundRect">
-            <a:avLst>
-              <a:gd name="adj" fmla="val 50000"/>
-            </a:avLst>
-          </a:prstGeom>
-          <a:solidFill>
-            <a:srgbClr val="E4F4EE"/>
-          </a:solidFill>
-          <a:ln>
-            <a:noFill/>
-          </a:ln>
-          <a:effectLst/>
-        </p:spPr>
-        <p:style>
-          <a:lnRef idx="1">
-            <a:schemeClr val="accent1"/>
-          </a:lnRef>
-          <a:fillRef idx="3">
-            <a:schemeClr val="accent1"/>
-          </a:fillRef>
-          <a:effectRef idx="2">
-            <a:schemeClr val="accent1"/>
-          </a:effectRef>
-          <a:fontRef idx="minor">
-            <a:schemeClr val="lt1"/>
-          </a:fontRef>
-        </p:style>
-        <p:txBody>
-          <a:bodyPr rtlCol="0" anchor="ctr" wrap="none" lIns="88900" rIns="88900" tIns="12700" bIns="12700"/>
-          <a:lstStyle/>
-          <a:p>
-            <a:pPr algn="ctr"/>
-            <a:r>
-              <a:rPr sz="950" b="1">
-                <a:solidFill>
-                  <a:srgbClr val="157355"/>
-                </a:solidFill>
-                <a:latin typeface="Inter"/>
-              </a:rPr>
-              <a:t>→ dia 19</a:t>
-            </a:r>
-          </a:p>
-        </p:txBody>
-      </p:sp>
-      <p:sp>
-        <p:nvSpPr>
-          <p:cNvPr id="51" name="Rounded Rectangle 50">
-            <a:hlinkClick action="ppaction://hlinksldjump" r:id="rId9"/>
-          </p:cNvPr>
-          <p:cNvSpPr/>
-          <p:nvPr/>
-        </p:nvSpPr>
-        <p:spPr>
-          <a:xfrm>
-            <a:off x="9070848" y="3840480"/>
-            <a:ext cx="2743200" cy="2240280"/>
-          </a:xfrm>
-          <a:prstGeom prst="roundRect">
-            <a:avLst>
-              <a:gd name="adj" fmla="val 5500"/>
-            </a:avLst>
-          </a:prstGeom>
-          <a:solidFill>
-            <a:srgbClr val="FFFFFF"/>
-          </a:solidFill>
-          <a:ln w="20320">
-            <a:solidFill>
-              <a:srgbClr val="157355"/>
-            </a:solidFill>
-          </a:ln>
-          <a:effectLst/>
-          <a:effectLst>
-            <a:outerShdw blurRad="90000" dist="38000" dir="5400000" rotWithShape="0">
-              <a:srgbClr val="20242E">
-                <a:alpha val="22000"/>
-              </a:srgbClr>
-            </a:outerShdw>
-          </a:effectLst>
-        </p:spPr>
-        <p:style>
-          <a:lnRef idx="1">
-            <a:schemeClr val="accent1"/>
-          </a:lnRef>
-          <a:fillRef idx="3">
-            <a:schemeClr val="accent1"/>
-          </a:fillRef>
-          <a:effectRef idx="2">
-            <a:schemeClr val="accent1"/>
-          </a:effectRef>
-          <a:fontRef idx="minor">
-            <a:schemeClr val="lt1"/>
-          </a:fontRef>
-        </p:style>
-        <p:txBody>
-          <a:bodyPr rtlCol="0" anchor="ctr"/>
-          <a:lstStyle/>
-          <a:p>
-            <a:pPr algn="ctr"/>
-          </a:p>
-        </p:txBody>
-      </p:sp>
-      <p:sp>
-        <p:nvSpPr>
-          <p:cNvPr id="52" name="Rectangle 51">
-            <a:hlinkClick action="ppaction://hlinksldjump" r:id="rId9"/>
-          </p:cNvPr>
-          <p:cNvSpPr/>
-          <p:nvPr/>
-        </p:nvSpPr>
-        <p:spPr>
-          <a:xfrm>
-            <a:off x="9070848" y="3840480"/>
-            <a:ext cx="2743200" cy="457200"/>
-          </a:xfrm>
-          <a:prstGeom prst="rect">
-            <a:avLst/>
-          </a:prstGeom>
-          <a:solidFill>
-            <a:srgbClr val="157355"/>
-          </a:solidFill>
-          <a:ln>
-            <a:noFill/>
-          </a:ln>
-          <a:effectLst/>
-        </p:spPr>
-        <p:style>
-          <a:lnRef idx="1">
-            <a:schemeClr val="accent1"/>
-          </a:lnRef>
-          <a:fillRef idx="3">
-            <a:schemeClr val="accent1"/>
-          </a:fillRef>
-          <a:effectRef idx="2">
-            <a:schemeClr val="accent1"/>
-          </a:effectRef>
-          <a:fontRef idx="minor">
-            <a:schemeClr val="lt1"/>
-          </a:fontRef>
-        </p:style>
-        <p:txBody>
-          <a:bodyPr rtlCol="0" anchor="ctr"/>
-          <a:lstStyle/>
-          <a:p>
-            <a:pPr algn="ctr"/>
-          </a:p>
-        </p:txBody>
-      </p:sp>
-      <p:sp>
-        <p:nvSpPr>
-          <p:cNvPr id="53" name="Rounded Rectangle 52"/>
-          <p:cNvSpPr/>
-          <p:nvPr/>
-        </p:nvSpPr>
-        <p:spPr>
-          <a:xfrm>
-            <a:off x="9180576" y="3913632"/>
-            <a:ext cx="310896" cy="310896"/>
-          </a:xfrm>
-          <a:prstGeom prst="roundRect">
-            <a:avLst>
-              <a:gd name="adj" fmla="val 50000"/>
-            </a:avLst>
-          </a:prstGeom>
-          <a:solidFill>
-            <a:srgbClr val="FFFFFF"/>
-          </a:solidFill>
-          <a:ln>
-            <a:noFill/>
-          </a:ln>
-          <a:effectLst/>
-        </p:spPr>
-        <p:style>
-          <a:lnRef idx="1">
-            <a:schemeClr val="accent1"/>
-          </a:lnRef>
-          <a:fillRef idx="3">
-            <a:schemeClr val="accent1"/>
-          </a:fillRef>
-          <a:effectRef idx="2">
-            <a:schemeClr val="accent1"/>
-          </a:effectRef>
-          <a:fontRef idx="minor">
-            <a:schemeClr val="lt1"/>
-          </a:fontRef>
-        </p:style>
-        <p:txBody>
-          <a:bodyPr rtlCol="0" anchor="ctr"/>
-          <a:lstStyle/>
-          <a:p>
-            <a:pPr algn="ctr"/>
-            <a:r>
-              <a:rPr sz="1200" b="1">
-                <a:solidFill>
-                  <a:srgbClr val="157355"/>
-                </a:solidFill>
-                <a:latin typeface="Bricolage Grotesque"/>
-              </a:rPr>
-              <a:t>◎</a:t>
-            </a:r>
-          </a:p>
-        </p:txBody>
-      </p:sp>
-      <p:sp>
-        <p:nvSpPr>
-          <p:cNvPr id="54" name="TextBox 53"/>
-          <p:cNvSpPr txBox="1"/>
-          <p:nvPr/>
-        </p:nvSpPr>
-        <p:spPr>
-          <a:xfrm>
-            <a:off x="9601200" y="3895344"/>
-            <a:ext cx="2103120" cy="365760"/>
-          </a:xfrm>
-          <a:prstGeom prst="rect">
-            <a:avLst/>
-          </a:prstGeom>
-          <a:noFill/>
-        </p:spPr>
-        <p:txBody>
-          <a:bodyPr wrap="square" anchor="ctr" lIns="38100" rIns="38100" tIns="25400" bIns="25400">
-            <a:spAutoFit/>
-          </a:bodyPr>
-          <a:lstStyle/>
-          <a:p>
-            <a:pPr algn="l">
-              <a:lnSpc>
-                <a:spcPct val="106000"/>
-              </a:lnSpc>
-              <a:spcBef>
-                <a:spcPts val="0"/>
-              </a:spcBef>
-              <a:spcAft>
-                <a:spcPts val="200"/>
-              </a:spcAft>
-            </a:pPr>
-            <a:r>
-              <a:rPr sz="1450" b="1" i="0">
-                <a:solidFill>
-                  <a:srgbClr val="FFFFFF"/>
-                </a:solidFill>
-                <a:latin typeface="Bricolage Grotesque"/>
-              </a:rPr>
-              <a:t>Repaso + semáforo</a:t>
-            </a:r>
-          </a:p>
-        </p:txBody>
-      </p:sp>
-      <p:sp>
-        <p:nvSpPr>
-          <p:cNvPr id="55" name="TextBox 54"/>
-          <p:cNvSpPr txBox="1"/>
-          <p:nvPr/>
-        </p:nvSpPr>
-        <p:spPr>
-          <a:xfrm>
-            <a:off x="9235440" y="4462272"/>
-            <a:ext cx="2414016" cy="1097280"/>
-          </a:xfrm>
-          <a:prstGeom prst="rect">
-            <a:avLst/>
-          </a:prstGeom>
-          <a:noFill/>
-        </p:spPr>
-        <p:txBody>
-          <a:bodyPr wrap="square" anchor="t" lIns="38100" rIns="38100" tIns="25400" bIns="25400">
-            <a:spAutoFit/>
-          </a:bodyPr>
-          <a:lstStyle/>
-          <a:p>
-            <a:pPr algn="l">
-              <a:lnSpc>
-                <a:spcPct val="112000"/>
-              </a:lnSpc>
-              <a:spcBef>
-                <a:spcPts val="0"/>
-              </a:spcBef>
-              <a:spcAft>
-                <a:spcPts val="200"/>
-              </a:spcAft>
-            </a:pPr>
-            <a:r>
-              <a:rPr sz="1150" b="0" i="0">
-                <a:solidFill>
-                  <a:srgbClr val="20242E"/>
-                </a:solidFill>
-                <a:latin typeface="Inter"/>
-              </a:rPr>
-              <a:t>lo esencial · zelfevaluatie</a:t>
-            </a:r>
-          </a:p>
-        </p:txBody>
-      </p:sp>
-      <p:sp>
-        <p:nvSpPr>
-          <p:cNvPr id="56" name="Rounded Rectangle 55"/>
-          <p:cNvSpPr/>
-          <p:nvPr/>
-        </p:nvSpPr>
-        <p:spPr>
-          <a:xfrm>
-            <a:off x="9235440" y="5669280"/>
-            <a:ext cx="791870" cy="292608"/>
-          </a:xfrm>
-          <a:prstGeom prst="roundRect">
-            <a:avLst>
-              <a:gd name="adj" fmla="val 50000"/>
-            </a:avLst>
-          </a:prstGeom>
-          <a:solidFill>
-            <a:srgbClr val="E4F4EE"/>
-          </a:solidFill>
-          <a:ln>
-            <a:noFill/>
-          </a:ln>
-          <a:effectLst/>
-        </p:spPr>
-        <p:style>
-          <a:lnRef idx="1">
-            <a:schemeClr val="accent1"/>
-          </a:lnRef>
-          <a:fillRef idx="3">
-            <a:schemeClr val="accent1"/>
-          </a:fillRef>
-          <a:effectRef idx="2">
-            <a:schemeClr val="accent1"/>
-          </a:effectRef>
-          <a:fontRef idx="minor">
-            <a:schemeClr val="lt1"/>
-          </a:fontRef>
-        </p:style>
-        <p:txBody>
-          <a:bodyPr rtlCol="0" anchor="ctr" wrap="none" lIns="88900" rIns="88900" tIns="12700" bIns="12700"/>
-          <a:lstStyle/>
-          <a:p>
-            <a:pPr algn="ctr"/>
-            <a:r>
-              <a:rPr sz="950" b="1">
-                <a:solidFill>
-                  <a:srgbClr val="157355"/>
-                </a:solidFill>
-                <a:latin typeface="Inter"/>
-              </a:rPr>
-              <a:t>→ dia 20</a:t>
-            </a:r>
-          </a:p>
-        </p:txBody>
-      </p:sp>
-      <p:sp>
-        <p:nvSpPr>
-          <p:cNvPr id="57" name="Rectangle 56"/>
-          <p:cNvSpPr/>
-          <p:nvPr/>
-        </p:nvSpPr>
-        <p:spPr>
-          <a:xfrm>
-            <a:off x="0" y="6547104"/>
-            <a:ext cx="12191695" cy="310896"/>
-          </a:xfrm>
-          <a:prstGeom prst="rect">
-            <a:avLst/>
-          </a:prstGeom>
-          <a:solidFill>
-            <a:srgbClr val="F3EEE4"/>
-          </a:solidFill>
-          <a:ln>
-            <a:noFill/>
-          </a:ln>
-          <a:effectLst/>
-        </p:spPr>
-        <p:style>
-          <a:lnRef idx="1">
-            <a:schemeClr val="accent1"/>
-          </a:lnRef>
-          <a:fillRef idx="3">
-            <a:schemeClr val="accent1"/>
-          </a:fillRef>
-          <a:effectRef idx="2">
-            <a:schemeClr val="accent1"/>
-          </a:effectRef>
-          <a:fontRef idx="minor">
-            <a:schemeClr val="lt1"/>
-          </a:fontRef>
-        </p:style>
-        <p:txBody>
-          <a:bodyPr rtlCol="0" anchor="ctr"/>
-          <a:lstStyle/>
-          <a:p>
-            <a:pPr algn="ctr"/>
-          </a:p>
-        </p:txBody>
-      </p:sp>
-      <p:sp>
-        <p:nvSpPr>
-          <p:cNvPr id="58" name="TextBox 57"/>
-          <p:cNvSpPr txBox="1"/>
-          <p:nvPr/>
-        </p:nvSpPr>
-        <p:spPr>
-          <a:xfrm>
-            <a:off x="411480" y="6565392"/>
-            <a:ext cx="5486400" cy="274320"/>
-          </a:xfrm>
-          <a:prstGeom prst="rect">
-            <a:avLst/>
-          </a:prstGeom>
-          <a:noFill/>
-        </p:spPr>
-        <p:txBody>
-          <a:bodyPr wrap="square" anchor="ctr" lIns="38100" rIns="38100" tIns="25400" bIns="25400">
-            <a:spAutoFit/>
-          </a:bodyPr>
-          <a:lstStyle/>
-          <a:p>
-            <a:pPr algn="l">
-              <a:lnSpc>
-                <a:spcPct val="106000"/>
-              </a:lnSpc>
-              <a:spcBef>
-                <a:spcPts val="0"/>
-              </a:spcBef>
-              <a:spcAft>
-                <a:spcPts val="200"/>
-              </a:spcAft>
-            </a:pPr>
-            <a:r>
-              <a:rPr sz="1100" b="1" i="0">
-                <a:solidFill>
-                  <a:srgbClr val="1E9E74"/>
-                </a:solidFill>
-                <a:latin typeface="Inter"/>
-              </a:rPr>
-              <a:t>● </a:t>
-            </a:r>
-            <a:r>
-              <a:rPr sz="950" b="0" i="0">
-                <a:solidFill>
-                  <a:srgbClr val="6A6E78"/>
-                </a:solidFill>
-                <a:latin typeface="Inter"/>
-              </a:rPr>
-              <a:t>U0 · ¡EMPEZAMOS!   ·   C5 · A1 · La Ruta</a:t>
-            </a:r>
-          </a:p>
-        </p:txBody>
-      </p:sp>
-      <p:sp>
-        <p:nvSpPr>
-          <p:cNvPr id="59" name="TextBox 58"/>
-          <p:cNvSpPr txBox="1"/>
-          <p:nvPr/>
-        </p:nvSpPr>
-        <p:spPr>
-          <a:xfrm>
-            <a:off x="8686800" y="6565392"/>
-            <a:ext cx="3063240" cy="274320"/>
-          </a:xfrm>
-          <a:prstGeom prst="rect">
-            <a:avLst/>
-          </a:prstGeom>
-          <a:noFill/>
-        </p:spPr>
-        <p:txBody>
-          <a:bodyPr wrap="square" anchor="ctr" lIns="38100" rIns="38100" tIns="25400" bIns="25400">
-            <a:spAutoFit/>
-          </a:bodyPr>
-          <a:lstStyle/>
-          <a:p>
-            <a:pPr algn="r">
-              <a:lnSpc>
-                <a:spcPct val="106000"/>
-              </a:lnSpc>
-              <a:spcBef>
-                <a:spcPts val="0"/>
-              </a:spcBef>
-              <a:spcAft>
-                <a:spcPts val="200"/>
-              </a:spcAft>
-            </a:pPr>
-            <a:r>
-              <a:rPr sz="900" b="0" i="1">
-                <a:solidFill>
-                  <a:srgbClr val="6A6E78"/>
-                </a:solidFill>
-                <a:latin typeface="Inter"/>
-              </a:rPr>
-              <a:t>Leerlingenversie — klik onthult</a:t>
-            </a:r>
-          </a:p>
-        </p:txBody>
-      </p:sp>
-      <p:sp>
-        <p:nvSpPr>
-          <p:cNvPr id="60" name="TextBox 59"/>
-          <p:cNvSpPr txBox="1"/>
-          <p:nvPr/>
-        </p:nvSpPr>
-        <p:spPr>
-          <a:xfrm>
-            <a:off x="11475720" y="6565392"/>
-            <a:ext cx="457200" cy="274320"/>
-          </a:xfrm>
-          <a:prstGeom prst="rect">
-            <a:avLst/>
-          </a:prstGeom>
-          <a:noFill/>
-        </p:spPr>
-        <p:txBody>
-          <a:bodyPr wrap="square" anchor="ctr" lIns="38100" rIns="38100" tIns="25400" bIns="25400">
-            <a:spAutoFit/>
-          </a:bodyPr>
-          <a:lstStyle/>
-          <a:p>
-            <a:pPr algn="r">
-              <a:lnSpc>
-                <a:spcPct val="106000"/>
-              </a:lnSpc>
-              <a:spcBef>
-                <a:spcPts val="0"/>
-              </a:spcBef>
-              <a:spcAft>
-                <a:spcPts val="200"/>
-              </a:spcAft>
-            </a:pPr>
-            <a:r>
-              <a:rPr sz="950" b="1" i="0">
-                <a:solidFill>
-                  <a:srgbClr val="157355"/>
-                </a:solidFill>
-                <a:latin typeface="Inter"/>
-              </a:rPr>
-              <a:t>2</a:t>
-            </a:r>
-          </a:p>
-        </p:txBody>
-      </p:sp>
-    </p:spTree>
-  </p:cSld>
-  <p:clrMapOvr>
-    <a:masterClrMapping/>
-  </p:clrMapOvr>
-</p:sld>
-</file>
-
-<file path=ppt/slides/slide20.xml><?xml version="1.0" encoding="utf-8"?>
+<file path=ppt/slides/slide22.xml><?xml version="1.0" encoding="utf-8"?>
 <p:sld xmlns:a="http://schemas.openxmlformats.org/drawingml/2006/main" xmlns:p="http://schemas.openxmlformats.org/presentationml/2006/main" xmlns:r="http://schemas.openxmlformats.org/officeDocument/2006/relationships">
   <p:cSld>
     <p:spTree>
@@ -33373,7 +36553,7 @@
                 </a:solidFill>
                 <a:latin typeface="Inter"/>
               </a:rPr>
-              <a:t>20</a:t>
+              <a:t>22</a:t>
             </a:r>
           </a:p>
         </p:txBody>

--- a/03-build/pptx/C5_U0_alumno.pptx
+++ b/03-build/pptx/C5_U0_alumno.pptx
@@ -4641,7 +4641,6 @@
               <a:srgbClr val="1E9E74"/>
             </a:solidFill>
           </a:ln>
-          <a:effectLst/>
           <a:effectLst>
             <a:outerShdw blurRad="90000" dist="38000" dir="5400000" rotWithShape="0">
               <a:srgbClr val="20242E">
@@ -4839,7 +4838,6 @@
               <a:srgbClr val="1E9E74"/>
             </a:solidFill>
           </a:ln>
-          <a:effectLst/>
           <a:effectLst>
             <a:outerShdw blurRad="90000" dist="38000" dir="5400000" rotWithShape="0">
               <a:srgbClr val="20242E">
@@ -5037,7 +5035,6 @@
               <a:srgbClr val="1E9E74"/>
             </a:solidFill>
           </a:ln>
-          <a:effectLst/>
           <a:effectLst>
             <a:outerShdw blurRad="90000" dist="38000" dir="5400000" rotWithShape="0">
               <a:srgbClr val="20242E">
@@ -5235,7 +5232,6 @@
               <a:srgbClr val="B7860B"/>
             </a:solidFill>
           </a:ln>
-          <a:effectLst/>
           <a:effectLst>
             <a:outerShdw blurRad="90000" dist="38000" dir="5400000" rotWithShape="0">
               <a:srgbClr val="20242E">
@@ -5979,7 +5975,6 @@
               <a:srgbClr val="DC2626"/>
             </a:solidFill>
           </a:ln>
-          <a:effectLst/>
           <a:effectLst>
             <a:outerShdw blurRad="90000" dist="38000" dir="5400000" rotWithShape="0">
               <a:srgbClr val="20242E">
@@ -8988,7 +8983,6 @@
               <a:srgbClr val="E4E3DE"/>
             </a:solidFill>
           </a:ln>
-          <a:effectLst/>
           <a:effectLst>
             <a:outerShdw blurRad="90000" dist="38000" dir="5400000" rotWithShape="0">
               <a:srgbClr val="20242E">
@@ -9179,7 +9173,6 @@
               <a:srgbClr val="157355"/>
             </a:solidFill>
           </a:ln>
-          <a:effectLst/>
           <a:effectLst>
             <a:outerShdw blurRad="90000" dist="38000" dir="5400000" rotWithShape="0">
               <a:srgbClr val="20242E">
@@ -9243,7 +9236,6 @@
               <a:srgbClr val="E4E3DE"/>
             </a:solidFill>
           </a:ln>
-          <a:effectLst/>
           <a:effectLst>
             <a:outerShdw blurRad="90000" dist="38000" dir="5400000" rotWithShape="0">
               <a:srgbClr val="20242E">
@@ -9434,7 +9426,6 @@
               <a:srgbClr val="157355"/>
             </a:solidFill>
           </a:ln>
-          <a:effectLst/>
           <a:effectLst>
             <a:outerShdw blurRad="90000" dist="38000" dir="5400000" rotWithShape="0">
               <a:srgbClr val="20242E">
@@ -9498,7 +9489,6 @@
               <a:srgbClr val="E4E3DE"/>
             </a:solidFill>
           </a:ln>
-          <a:effectLst/>
           <a:effectLst>
             <a:outerShdw blurRad="90000" dist="38000" dir="5400000" rotWithShape="0">
               <a:srgbClr val="20242E">
@@ -9689,7 +9679,6 @@
               <a:srgbClr val="157355"/>
             </a:solidFill>
           </a:ln>
-          <a:effectLst/>
           <a:effectLst>
             <a:outerShdw blurRad="90000" dist="38000" dir="5400000" rotWithShape="0">
               <a:srgbClr val="20242E">
@@ -9753,7 +9742,6 @@
               <a:srgbClr val="E4E3DE"/>
             </a:solidFill>
           </a:ln>
-          <a:effectLst/>
           <a:effectLst>
             <a:outerShdw blurRad="90000" dist="38000" dir="5400000" rotWithShape="0">
               <a:srgbClr val="20242E">
@@ -9944,7 +9932,6 @@
               <a:srgbClr val="157355"/>
             </a:solidFill>
           </a:ln>
-          <a:effectLst/>
           <a:effectLst>
             <a:outerShdw blurRad="90000" dist="38000" dir="5400000" rotWithShape="0">
               <a:srgbClr val="20242E">
@@ -10008,7 +9995,6 @@
               <a:srgbClr val="E4E3DE"/>
             </a:solidFill>
           </a:ln>
-          <a:effectLst/>
           <a:effectLst>
             <a:outerShdw blurRad="90000" dist="38000" dir="5400000" rotWithShape="0">
               <a:srgbClr val="20242E">
@@ -10199,7 +10185,6 @@
               <a:srgbClr val="157355"/>
             </a:solidFill>
           </a:ln>
-          <a:effectLst/>
           <a:effectLst>
             <a:outerShdw blurRad="90000" dist="38000" dir="5400000" rotWithShape="0">
               <a:srgbClr val="20242E">
@@ -10263,7 +10248,6 @@
               <a:srgbClr val="E4E3DE"/>
             </a:solidFill>
           </a:ln>
-          <a:effectLst/>
           <a:effectLst>
             <a:outerShdw blurRad="90000" dist="38000" dir="5400000" rotWithShape="0">
               <a:srgbClr val="20242E">
@@ -10454,7 +10438,6 @@
               <a:srgbClr val="157355"/>
             </a:solidFill>
           </a:ln>
-          <a:effectLst/>
           <a:effectLst>
             <a:outerShdw blurRad="90000" dist="38000" dir="5400000" rotWithShape="0">
               <a:srgbClr val="20242E">
@@ -11983,7 +11966,6 @@
               <a:srgbClr val="EA7317"/>
             </a:solidFill>
           </a:ln>
-          <a:effectLst/>
           <a:effectLst>
             <a:outerShdw blurRad="90000" dist="38000" dir="5400000" rotWithShape="0">
               <a:srgbClr val="20242E">
@@ -12529,7 +12511,6 @@
               <a:srgbClr val="2563EB"/>
             </a:solidFill>
           </a:ln>
-          <a:effectLst/>
           <a:effectLst>
             <a:outerShdw blurRad="90000" dist="38000" dir="5400000" rotWithShape="0">
               <a:srgbClr val="20242E">
@@ -13075,7 +13056,6 @@
               <a:srgbClr val="EAB308"/>
             </a:solidFill>
           </a:ln>
-          <a:effectLst/>
           <a:effectLst>
             <a:outerShdw blurRad="90000" dist="38000" dir="5400000" rotWithShape="0">
               <a:srgbClr val="20242E">
@@ -15349,7 +15329,6 @@
               <a:srgbClr val="E4E3DE"/>
             </a:solidFill>
           </a:ln>
-          <a:effectLst/>
           <a:effectLst>
             <a:outerShdw blurRad="90000" dist="38000" dir="5400000" rotWithShape="0">
               <a:srgbClr val="20242E">
@@ -15629,7 +15608,6 @@
               <a:srgbClr val="E4E3DE"/>
             </a:solidFill>
           </a:ln>
-          <a:effectLst/>
           <a:effectLst>
             <a:outerShdw blurRad="90000" dist="38000" dir="5400000" rotWithShape="0">
               <a:srgbClr val="20242E">
@@ -15909,7 +15887,6 @@
               <a:srgbClr val="E4E3DE"/>
             </a:solidFill>
           </a:ln>
-          <a:effectLst/>
           <a:effectLst>
             <a:outerShdw blurRad="90000" dist="38000" dir="5400000" rotWithShape="0">
               <a:srgbClr val="20242E">
@@ -16189,7 +16166,6 @@
               <a:srgbClr val="E4E3DE"/>
             </a:solidFill>
           </a:ln>
-          <a:effectLst/>
           <a:effectLst>
             <a:outerShdw blurRad="90000" dist="38000" dir="5400000" rotWithShape="0">
               <a:srgbClr val="20242E">
@@ -17649,7 +17625,6 @@
               <a:srgbClr val="1E9E74"/>
             </a:solidFill>
           </a:ln>
-          <a:effectLst/>
           <a:effectLst>
             <a:outerShdw blurRad="90000" dist="38000" dir="5400000" rotWithShape="0">
               <a:srgbClr val="20242E">
@@ -19747,7 +19722,6 @@
               <a:srgbClr val="1E9E74"/>
             </a:solidFill>
           </a:ln>
-          <a:effectLst/>
           <a:effectLst>
             <a:outerShdw blurRad="90000" dist="38000" dir="5400000" rotWithShape="0">
               <a:srgbClr val="20242E">
@@ -19892,7 +19866,6 @@
               <a:srgbClr val="1E9E74"/>
             </a:solidFill>
           </a:ln>
-          <a:effectLst/>
           <a:effectLst>
             <a:outerShdw blurRad="90000" dist="38000" dir="5400000" rotWithShape="0">
               <a:srgbClr val="20242E">
@@ -20037,7 +20010,6 @@
               <a:srgbClr val="1E9E74"/>
             </a:solidFill>
           </a:ln>
-          <a:effectLst/>
           <a:effectLst>
             <a:outerShdw blurRad="90000" dist="38000" dir="5400000" rotWithShape="0">
               <a:srgbClr val="20242E">
@@ -20182,7 +20154,6 @@
               <a:srgbClr val="1E9E74"/>
             </a:solidFill>
           </a:ln>
-          <a:effectLst/>
           <a:effectLst>
             <a:outerShdw blurRad="90000" dist="38000" dir="5400000" rotWithShape="0">
               <a:srgbClr val="20242E">
@@ -20327,7 +20298,6 @@
               <a:srgbClr val="B7860B"/>
             </a:solidFill>
           </a:ln>
-          <a:effectLst/>
           <a:effectLst>
             <a:outerShdw blurRad="90000" dist="38000" dir="5400000" rotWithShape="0">
               <a:srgbClr val="20242E">
@@ -23380,7 +23350,6 @@
               <a:srgbClr val="B7860B"/>
             </a:solidFill>
           </a:ln>
-          <a:effectLst/>
           <a:effectLst>
             <a:outerShdw blurRad="90000" dist="38000" dir="5400000" rotWithShape="0">
               <a:srgbClr val="20242E">
@@ -24289,7 +24258,6 @@
               <a:srgbClr val="1E9E74"/>
             </a:solidFill>
           </a:ln>
-          <a:effectLst/>
           <a:effectLst>
             <a:outerShdw blurRad="90000" dist="38000" dir="5400000" rotWithShape="0">
               <a:srgbClr val="20242E">
@@ -24654,7 +24622,6 @@
               <a:srgbClr val="E4E3DE"/>
             </a:solidFill>
           </a:ln>
-          <a:effectLst/>
           <a:effectLst>
             <a:outerShdw blurRad="90000" dist="38000" dir="5400000" rotWithShape="0">
               <a:srgbClr val="20242E">
@@ -24865,7 +24832,6 @@
               <a:srgbClr val="E4E3DE"/>
             </a:solidFill>
           </a:ln>
-          <a:effectLst/>
           <a:effectLst>
             <a:outerShdw blurRad="90000" dist="38000" dir="5400000" rotWithShape="0">
               <a:srgbClr val="20242E">
@@ -25950,7 +25916,6 @@
               <a:srgbClr val="1E9E74"/>
             </a:solidFill>
           </a:ln>
-          <a:effectLst/>
           <a:effectLst>
             <a:outerShdw blurRad="90000" dist="38000" dir="5400000" rotWithShape="0">
               <a:srgbClr val="20242E">
@@ -26139,7 +26104,6 @@
               <a:srgbClr val="E4E3DE"/>
             </a:solidFill>
           </a:ln>
-          <a:effectLst/>
           <a:effectLst>
             <a:outerShdw blurRad="90000" dist="38000" dir="5400000" rotWithShape="0">
               <a:srgbClr val="20242E">
@@ -26372,7 +26336,6 @@
               <a:srgbClr val="E4E3DE"/>
             </a:solidFill>
           </a:ln>
-          <a:effectLst/>
           <a:effectLst>
             <a:outerShdw blurRad="90000" dist="38000" dir="5400000" rotWithShape="0">
               <a:srgbClr val="20242E">
@@ -27469,7 +27432,6 @@
               <a:srgbClr val="1E9E74"/>
             </a:solidFill>
           </a:ln>
-          <a:effectLst/>
           <a:effectLst>
             <a:outerShdw blurRad="90000" dist="38000" dir="5400000" rotWithShape="0">
               <a:srgbClr val="20242E">
@@ -27772,7 +27734,6 @@
               <a:srgbClr val="1E9E74"/>
             </a:solidFill>
           </a:ln>
-          <a:effectLst/>
           <a:effectLst>
             <a:outerShdw blurRad="90000" dist="38000" dir="5400000" rotWithShape="0">
               <a:srgbClr val="20242E">
@@ -28075,7 +28036,6 @@
               <a:srgbClr val="1E9E74"/>
             </a:solidFill>
           </a:ln>
-          <a:effectLst/>
           <a:effectLst>
             <a:outerShdw blurRad="90000" dist="38000" dir="5400000" rotWithShape="0">
               <a:srgbClr val="20242E">
@@ -28378,7 +28338,6 @@
               <a:srgbClr val="1E9E74"/>
             </a:solidFill>
           </a:ln>
-          <a:effectLst/>
           <a:effectLst>
             <a:outerShdw blurRad="90000" dist="38000" dir="5400000" rotWithShape="0">
               <a:srgbClr val="20242E">
@@ -28681,7 +28640,6 @@
               <a:srgbClr val="157355"/>
             </a:solidFill>
           </a:ln>
-          <a:effectLst/>
           <a:effectLst>
             <a:outerShdw blurRad="90000" dist="38000" dir="5400000" rotWithShape="0">
               <a:srgbClr val="20242E">
@@ -28984,7 +28942,6 @@
               <a:srgbClr val="157355"/>
             </a:solidFill>
           </a:ln>
-          <a:effectLst/>
           <a:effectLst>
             <a:outerShdw blurRad="90000" dist="38000" dir="5400000" rotWithShape="0">
               <a:srgbClr val="20242E">
@@ -29287,7 +29244,6 @@
               <a:srgbClr val="B7860B"/>
             </a:solidFill>
           </a:ln>
-          <a:effectLst/>
           <a:effectLst>
             <a:outerShdw blurRad="90000" dist="38000" dir="5400000" rotWithShape="0">
               <a:srgbClr val="20242E">
@@ -29590,7 +29546,6 @@
               <a:srgbClr val="157355"/>
             </a:solidFill>
           </a:ln>
-          <a:effectLst/>
           <a:effectLst>
             <a:outerShdw blurRad="90000" dist="38000" dir="5400000" rotWithShape="0">
               <a:srgbClr val="20242E">
@@ -30374,7 +30329,6 @@
               <a:srgbClr val="157355"/>
             </a:solidFill>
           </a:ln>
-          <a:effectLst/>
           <a:effectLst>
             <a:outerShdw blurRad="90000" dist="38000" dir="5400000" rotWithShape="0">
               <a:srgbClr val="20242E">
@@ -30924,7 +30878,6 @@
               <a:srgbClr val="157355"/>
             </a:solidFill>
           </a:ln>
-          <a:effectLst/>
           <a:effectLst>
             <a:outerShdw blurRad="90000" dist="38000" dir="5400000" rotWithShape="0">
               <a:srgbClr val="20242E">
@@ -32576,7 +32529,6 @@
               <a:srgbClr val="E4E3DE"/>
             </a:solidFill>
           </a:ln>
-          <a:effectLst/>
           <a:effectLst>
             <a:outerShdw blurRad="90000" dist="38000" dir="5400000" rotWithShape="0">
               <a:srgbClr val="20242E">
@@ -32731,7 +32683,6 @@
               <a:srgbClr val="157355"/>
             </a:solidFill>
           </a:ln>
-          <a:effectLst/>
           <a:effectLst>
             <a:outerShdw blurRad="90000" dist="38000" dir="5400000" rotWithShape="0">
               <a:srgbClr val="20242E">
@@ -32795,7 +32746,6 @@
               <a:srgbClr val="E4E3DE"/>
             </a:solidFill>
           </a:ln>
-          <a:effectLst/>
           <a:effectLst>
             <a:outerShdw blurRad="90000" dist="38000" dir="5400000" rotWithShape="0">
               <a:srgbClr val="20242E">
@@ -32950,7 +32900,6 @@
               <a:srgbClr val="157355"/>
             </a:solidFill>
           </a:ln>
-          <a:effectLst/>
           <a:effectLst>
             <a:outerShdw blurRad="90000" dist="38000" dir="5400000" rotWithShape="0">
               <a:srgbClr val="20242E">
@@ -33014,7 +32963,6 @@
               <a:srgbClr val="E4E3DE"/>
             </a:solidFill>
           </a:ln>
-          <a:effectLst/>
           <a:effectLst>
             <a:outerShdw blurRad="90000" dist="38000" dir="5400000" rotWithShape="0">
               <a:srgbClr val="20242E">
@@ -33169,7 +33117,6 @@
               <a:srgbClr val="157355"/>
             </a:solidFill>
           </a:ln>
-          <a:effectLst/>
           <a:effectLst>
             <a:outerShdw blurRad="90000" dist="38000" dir="5400000" rotWithShape="0">
               <a:srgbClr val="20242E">
@@ -33233,7 +33180,6 @@
               <a:srgbClr val="E4E3DE"/>
             </a:solidFill>
           </a:ln>
-          <a:effectLst/>
           <a:effectLst>
             <a:outerShdw blurRad="90000" dist="38000" dir="5400000" rotWithShape="0">
               <a:srgbClr val="20242E">
@@ -33388,7 +33334,6 @@
               <a:srgbClr val="157355"/>
             </a:solidFill>
           </a:ln>
-          <a:effectLst/>
           <a:effectLst>
             <a:outerShdw blurRad="90000" dist="38000" dir="5400000" rotWithShape="0">
               <a:srgbClr val="20242E">
@@ -33452,7 +33397,6 @@
               <a:srgbClr val="E4E3DE"/>
             </a:solidFill>
           </a:ln>
-          <a:effectLst/>
           <a:effectLst>
             <a:outerShdw blurRad="90000" dist="38000" dir="5400000" rotWithShape="0">
               <a:srgbClr val="20242E">
@@ -33607,7 +33551,6 @@
               <a:srgbClr val="157355"/>
             </a:solidFill>
           </a:ln>
-          <a:effectLst/>
           <a:effectLst>
             <a:outerShdw blurRad="90000" dist="38000" dir="5400000" rotWithShape="0">
               <a:srgbClr val="20242E">
@@ -35016,7 +34959,6 @@
               <a:srgbClr val="1E9E74"/>
             </a:solidFill>
           </a:ln>
-          <a:effectLst/>
           <a:effectLst>
             <a:outerShdw blurRad="90000" dist="38000" dir="5400000" rotWithShape="0">
               <a:srgbClr val="20242E">
@@ -35322,7 +35264,6 @@
               <a:srgbClr val="1E9E74"/>
             </a:solidFill>
           </a:ln>
-          <a:effectLst/>
           <a:effectLst>
             <a:outerShdw blurRad="90000" dist="38000" dir="5400000" rotWithShape="0">
               <a:srgbClr val="20242E">
@@ -35628,7 +35569,6 @@
               <a:srgbClr val="1E9E74"/>
             </a:solidFill>
           </a:ln>
-          <a:effectLst/>
           <a:effectLst>
             <a:outerShdw blurRad="90000" dist="38000" dir="5400000" rotWithShape="0">
               <a:srgbClr val="20242E">
@@ -35934,7 +35874,6 @@
               <a:srgbClr val="1E9E74"/>
             </a:solidFill>
           </a:ln>
-          <a:effectLst/>
           <a:effectLst>
             <a:outerShdw blurRad="90000" dist="38000" dir="5400000" rotWithShape="0">
               <a:srgbClr val="20242E">
@@ -36240,7 +36179,6 @@
               <a:srgbClr val="B7860B"/>
             </a:solidFill>
           </a:ln>
-          <a:effectLst/>
           <a:effectLst>
             <a:outerShdw blurRad="90000" dist="38000" dir="5400000" rotWithShape="0">
               <a:srgbClr val="20242E">
@@ -36877,7 +36815,6 @@
               <a:srgbClr val="E07A5F"/>
             </a:solidFill>
           </a:ln>
-          <a:effectLst/>
           <a:effectLst>
             <a:outerShdw blurRad="90000" dist="38000" dir="5400000" rotWithShape="0">
               <a:srgbClr val="20242E">
@@ -37190,7 +37127,6 @@
               <a:srgbClr val="5B8DEF"/>
             </a:solidFill>
           </a:ln>
-          <a:effectLst/>
           <a:effectLst>
             <a:outerShdw blurRad="90000" dist="38000" dir="5400000" rotWithShape="0">
               <a:srgbClr val="20242E">
@@ -37503,7 +37439,6 @@
               <a:srgbClr val="2FA8A0"/>
             </a:solidFill>
           </a:ln>
-          <a:effectLst/>
           <a:effectLst>
             <a:outerShdw blurRad="90000" dist="38000" dir="5400000" rotWithShape="0">
               <a:srgbClr val="20242E">
@@ -37816,7 +37751,6 @@
               <a:srgbClr val="D69A2E"/>
             </a:solidFill>
           </a:ln>
-          <a:effectLst/>
           <a:effectLst>
             <a:outerShdw blurRad="90000" dist="38000" dir="5400000" rotWithShape="0">
               <a:srgbClr val="20242E">
@@ -38129,7 +38063,6 @@
               <a:srgbClr val="8A7BE0"/>
             </a:solidFill>
           </a:ln>
-          <a:effectLst/>
           <a:effectLst>
             <a:outerShdw blurRad="90000" dist="38000" dir="5400000" rotWithShape="0">
               <a:srgbClr val="20242E">
@@ -43722,7 +43655,6 @@
               <a:srgbClr val="1E9E74"/>
             </a:solidFill>
           </a:ln>
-          <a:effectLst/>
           <a:effectLst>
             <a:outerShdw blurRad="90000" dist="38000" dir="5400000" rotWithShape="0">
               <a:srgbClr val="20242E">
@@ -44019,7 +43951,6 @@
               <a:srgbClr val="1E9E74"/>
             </a:solidFill>
           </a:ln>
-          <a:effectLst/>
           <a:effectLst>
             <a:outerShdw blurRad="90000" dist="38000" dir="5400000" rotWithShape="0">
               <a:srgbClr val="20242E">
@@ -44316,7 +44247,6 @@
               <a:srgbClr val="1E9E74"/>
             </a:solidFill>
           </a:ln>
-          <a:effectLst/>
           <a:effectLst>
             <a:outerShdw blurRad="90000" dist="38000" dir="5400000" rotWithShape="0">
               <a:srgbClr val="20242E">
@@ -44613,7 +44543,6 @@
               <a:srgbClr val="1E9E74"/>
             </a:solidFill>
           </a:ln>
-          <a:effectLst/>
           <a:effectLst>
             <a:outerShdw blurRad="90000" dist="38000" dir="5400000" rotWithShape="0">
               <a:srgbClr val="20242E">
@@ -44910,7 +44839,6 @@
               <a:srgbClr val="1E9E74"/>
             </a:solidFill>
           </a:ln>
-          <a:effectLst/>
           <a:effectLst>
             <a:outerShdw blurRad="90000" dist="38000" dir="5400000" rotWithShape="0">
               <a:srgbClr val="20242E">
@@ -45207,7 +45135,6 @@
               <a:srgbClr val="1E9E74"/>
             </a:solidFill>
           </a:ln>
-          <a:effectLst/>
           <a:effectLst>
             <a:outerShdw blurRad="90000" dist="38000" dir="5400000" rotWithShape="0">
               <a:srgbClr val="20242E">
@@ -46215,7 +46142,6 @@
               <a:srgbClr val="157355"/>
             </a:solidFill>
           </a:ln>
-          <a:effectLst/>
           <a:effectLst>
             <a:outerShdw blurRad="90000" dist="38000" dir="5400000" rotWithShape="0">
               <a:srgbClr val="20242E">
@@ -46462,7 +46388,6 @@
               <a:srgbClr val="157355"/>
             </a:solidFill>
           </a:ln>
-          <a:effectLst/>
           <a:effectLst>
             <a:outerShdw blurRad="90000" dist="38000" dir="5400000" rotWithShape="0">
               <a:srgbClr val="20242E">
@@ -46709,7 +46634,6 @@
               <a:srgbClr val="157355"/>
             </a:solidFill>
           </a:ln>
-          <a:effectLst/>
           <a:effectLst>
             <a:outerShdw blurRad="90000" dist="38000" dir="5400000" rotWithShape="0">
               <a:srgbClr val="20242E">
@@ -46956,7 +46880,6 @@
               <a:srgbClr val="157355"/>
             </a:solidFill>
           </a:ln>
-          <a:effectLst/>
           <a:effectLst>
             <a:outerShdw blurRad="90000" dist="38000" dir="5400000" rotWithShape="0">
               <a:srgbClr val="20242E">
@@ -51629,7 +51552,6 @@
               <a:srgbClr val="E07A5F"/>
             </a:solidFill>
           </a:ln>
-          <a:effectLst/>
           <a:effectLst>
             <a:outerShdw blurRad="90000" dist="38000" dir="5400000" rotWithShape="0">
               <a:srgbClr val="20242E">
@@ -51872,7 +51794,6 @@
               <a:srgbClr val="1E9E74"/>
             </a:solidFill>
           </a:ln>
-          <a:effectLst/>
           <a:effectLst>
             <a:outerShdw blurRad="90000" dist="38000" dir="5400000" rotWithShape="0">
               <a:srgbClr val="20242E">
@@ -52115,7 +52036,6 @@
               <a:srgbClr val="8A7BE0"/>
             </a:solidFill>
           </a:ln>
-          <a:effectLst/>
           <a:effectLst>
             <a:outerShdw blurRad="90000" dist="38000" dir="5400000" rotWithShape="0">
               <a:srgbClr val="20242E">
@@ -52639,7 +52559,6 @@
               <a:srgbClr val="B7860B"/>
             </a:solidFill>
           </a:ln>
-          <a:effectLst/>
           <a:effectLst>
             <a:outerShdw blurRad="90000" dist="38000" dir="5400000" rotWithShape="0">
               <a:srgbClr val="20242E">
@@ -53410,7 +53329,6 @@
               <a:srgbClr val="E4E3DE"/>
             </a:solidFill>
           </a:ln>
-          <a:effectLst/>
           <a:effectLst>
             <a:outerShdw blurRad="90000" dist="38000" dir="5400000" rotWithShape="0">
               <a:srgbClr val="20242E">
@@ -53555,7 +53473,6 @@
               <a:srgbClr val="157355"/>
             </a:solidFill>
           </a:ln>
-          <a:effectLst/>
           <a:effectLst>
             <a:outerShdw blurRad="90000" dist="38000" dir="5400000" rotWithShape="0">
               <a:srgbClr val="20242E">
@@ -53619,7 +53536,6 @@
               <a:srgbClr val="E4E3DE"/>
             </a:solidFill>
           </a:ln>
-          <a:effectLst/>
           <a:effectLst>
             <a:outerShdw blurRad="90000" dist="38000" dir="5400000" rotWithShape="0">
               <a:srgbClr val="20242E">
@@ -53764,7 +53680,6 @@
               <a:srgbClr val="157355"/>
             </a:solidFill>
           </a:ln>
-          <a:effectLst/>
           <a:effectLst>
             <a:outerShdw blurRad="90000" dist="38000" dir="5400000" rotWithShape="0">
               <a:srgbClr val="20242E">
@@ -53828,7 +53743,6 @@
               <a:srgbClr val="E4E3DE"/>
             </a:solidFill>
           </a:ln>
-          <a:effectLst/>
           <a:effectLst>
             <a:outerShdw blurRad="90000" dist="38000" dir="5400000" rotWithShape="0">
               <a:srgbClr val="20242E">
@@ -53973,7 +53887,6 @@
               <a:srgbClr val="157355"/>
             </a:solidFill>
           </a:ln>
-          <a:effectLst/>
           <a:effectLst>
             <a:outerShdw blurRad="90000" dist="38000" dir="5400000" rotWithShape="0">
               <a:srgbClr val="20242E">
@@ -54037,7 +53950,6 @@
               <a:srgbClr val="E4E3DE"/>
             </a:solidFill>
           </a:ln>
-          <a:effectLst/>
           <a:effectLst>
             <a:outerShdw blurRad="90000" dist="38000" dir="5400000" rotWithShape="0">
               <a:srgbClr val="20242E">
@@ -54182,7 +54094,6 @@
               <a:srgbClr val="157355"/>
             </a:solidFill>
           </a:ln>
-          <a:effectLst/>
           <a:effectLst>
             <a:outerShdw blurRad="90000" dist="38000" dir="5400000" rotWithShape="0">
               <a:srgbClr val="20242E">
@@ -54246,7 +54157,6 @@
               <a:srgbClr val="E4E3DE"/>
             </a:solidFill>
           </a:ln>
-          <a:effectLst/>
           <a:effectLst>
             <a:outerShdw blurRad="90000" dist="38000" dir="5400000" rotWithShape="0">
               <a:srgbClr val="20242E">
@@ -54391,7 +54301,6 @@
               <a:srgbClr val="157355"/>
             </a:solidFill>
           </a:ln>
-          <a:effectLst/>
           <a:effectLst>
             <a:outerShdw blurRad="90000" dist="38000" dir="5400000" rotWithShape="0">
               <a:srgbClr val="20242E">
@@ -54455,7 +54364,6 @@
               <a:srgbClr val="E4E3DE"/>
             </a:solidFill>
           </a:ln>
-          <a:effectLst/>
           <a:effectLst>
             <a:outerShdw blurRad="90000" dist="38000" dir="5400000" rotWithShape="0">
               <a:srgbClr val="20242E">
@@ -54600,7 +54508,6 @@
               <a:srgbClr val="157355"/>
             </a:solidFill>
           </a:ln>
-          <a:effectLst/>
           <a:effectLst>
             <a:outerShdw blurRad="90000" dist="38000" dir="5400000" rotWithShape="0">
               <a:srgbClr val="20242E">
@@ -54664,7 +54571,6 @@
               <a:srgbClr val="E4E3DE"/>
             </a:solidFill>
           </a:ln>
-          <a:effectLst/>
           <a:effectLst>
             <a:outerShdw blurRad="90000" dist="38000" dir="5400000" rotWithShape="0">
               <a:srgbClr val="20242E">
@@ -54809,7 +54715,6 @@
               <a:srgbClr val="157355"/>
             </a:solidFill>
           </a:ln>
-          <a:effectLst/>
           <a:effectLst>
             <a:outerShdw blurRad="90000" dist="38000" dir="5400000" rotWithShape="0">
               <a:srgbClr val="20242E">
@@ -54873,7 +54778,6 @@
               <a:srgbClr val="E4E3DE"/>
             </a:solidFill>
           </a:ln>
-          <a:effectLst/>
           <a:effectLst>
             <a:outerShdw blurRad="90000" dist="38000" dir="5400000" rotWithShape="0">
               <a:srgbClr val="20242E">
@@ -55018,7 +54922,6 @@
               <a:srgbClr val="157355"/>
             </a:solidFill>
           </a:ln>
-          <a:effectLst/>
           <a:effectLst>
             <a:outerShdw blurRad="90000" dist="38000" dir="5400000" rotWithShape="0">
               <a:srgbClr val="20242E">

--- a/03-build/pptx/C5_U0_alumno.pptx
+++ b/03-build/pptx/C5_U0_alumno.pptx
@@ -11,6 +11,9 @@
     <p:sldId id="259" r:id="rId10"/>
     <p:sldId id="260" r:id="rId11"/>
     <p:sldId id="261" r:id="rId12"/>
+    <p:sldId id="278" r:id="rId29"/>
+    <p:sldId id="279" r:id="rId30"/>
+    <p:sldId id="280" r:id="rId31"/>
     <p:sldId id="262" r:id="rId13"/>
     <p:sldId id="263" r:id="rId14"/>
     <p:sldId id="264" r:id="rId15"/>
@@ -126,6 +129,255 @@
     </a:lvl9pPr>
   </p:defaultTextStyle>
 </p:presentation>
+</file>
+
+<file path=ppt/notesSlides/notesSlide1.xml><?xml version="1.0" encoding="utf-8"?>
+<p:notes xmlns:a="http://schemas.openxmlformats.org/drawingml/2006/main" xmlns:p="http://schemas.openxmlformats.org/presentationml/2006/main" xmlns:r="http://schemas.openxmlformats.org/officeDocument/2006/relationships">
+  <p:cSld>
+    <p:spTree>
+      <p:nvGrpSpPr>
+        <p:cNvPr id="1" name=""/>
+        <p:cNvGrpSpPr/>
+        <p:nvPr/>
+      </p:nvGrpSpPr>
+      <p:grpSpPr>
+        <a:xfrm>
+          <a:off x="0" y="0"/>
+          <a:ext cx="0" cy="0"/>
+          <a:chOff x="0" y="0"/>
+          <a:chExt cx="0" cy="0"/>
+        </a:xfrm>
+      </p:grpSpPr>
+      <p:sp>
+        <p:nvSpPr>
+          <p:cNvPr id="2" name="Slide Image Placeholder 1"/>
+          <p:cNvSpPr>
+            <a:spLocks noGrp="1"/>
+          </p:cNvSpPr>
+          <p:nvPr>
+            <p:ph type="sldImg" idx="2"/>
+          </p:nvPr>
+        </p:nvSpPr>
+        <p:spPr/>
+      </p:sp>
+      <p:sp>
+        <p:nvSpPr>
+          <p:cNvPr id="3" name="Notes Placeholder 2"/>
+          <p:cNvSpPr>
+            <a:spLocks noGrp="1"/>
+          </p:cNvSpPr>
+          <p:nvPr>
+            <p:ph type="body" idx="3" sz="quarter"/>
+          </p:nvPr>
+        </p:nvSpPr>
+        <p:spPr/>
+        <p:txBody>
+          <a:bodyPr/>
+          <a:lstStyle/>
+          <a:p>
+            <a:r>
+              <a:t>RETO 2 · La subasta de sonidos — 🔓 puzzel &amp; escape</a:t>
+            </a:r>
+          </a:p>
+          <a:p>
+            <a:r>
+              <a:t>OPDRACHT: Bied op een lot. Win je het, dan spreek je beide woorden uit en zeg je of ze hetzelfde of verschillend klinken. Juist? Je wint de waarde van het lot. Fout? Je verliest je bod.</a:t>
+            </a:r>
+          </a:p>
+          <a:p>
+            <a:r>
+              <a:t>DE REGEL: Je mag pas bieden ná het horen van het lot, en je mag niet overleggen terwijl je biedt. De duurste loten zijn de valstrikken.</a:t>
+            </a:r>
+          </a:p>
+          <a:p>
+            <a:r>
+              <a:t>VERLOOP: El/la profe lee el lote en voz alta, una sola vez. | Los equipos pujan por turnos. El más alto se lo lleva. | El equipo pronuncia y decide: ¿igual o diferente? | Se revela la respuesta y la regla que hay detrás.</a:t>
+            </a:r>
+          </a:p>
+          <a:p>
+            <a:r>
+              <a:t>SLEUTEL: Lot 1 diferente · 2 diferente · 3 IGUAL · 4 diferente · 5 IGUAL · 6 diferente · 7 diferente · 8 diferente in Spanje, gelijk in Amerika  ||  De twee duurste loten (3 en 5) zijn precies de twee die Nederlandstaligen het vaakst fout hebben: zij hóren een h en een v die er niet zijn.  ||  Lot 8 heeft geen enkel juist antwoord zonder de vraag «waar?» — accepteer beide, mits het team zijn keuze motiveert.</a:t>
+            </a:r>
+          </a:p>
+          <a:p>
+            <a:r>
+              <a:t>NOTA: Zet het puntentotaal zichtbaar op het bord. De spanning zit in lot 3 en 5: teams die daar hoog bieden zonder de regel te kennen, verliezen alles.</a:t>
+            </a:r>
+          </a:p>
+        </p:txBody>
+      </p:sp>
+    </p:spTree>
+  </p:cSld>
+  <p:clrMapOvr>
+    <a:masterClrMapping/>
+  </p:clrMapOvr>
+</p:notes>
+</file>
+
+<file path=ppt/notesSlides/notesSlide2.xml><?xml version="1.0" encoding="utf-8"?>
+<p:notes xmlns:a="http://schemas.openxmlformats.org/drawingml/2006/main" xmlns:p="http://schemas.openxmlformats.org/presentationml/2006/main" xmlns:r="http://schemas.openxmlformats.org/officeDocument/2006/relationships">
+  <p:cSld>
+    <p:spTree>
+      <p:nvGrpSpPr>
+        <p:cNvPr id="1" name=""/>
+        <p:cNvGrpSpPr/>
+        <p:nvPr/>
+      </p:nvGrpSpPr>
+      <p:grpSpPr>
+        <a:xfrm>
+          <a:off x="0" y="0"/>
+          <a:ext cx="0" cy="0"/>
+          <a:chOff x="0" y="0"/>
+          <a:chExt cx="0" cy="0"/>
+        </a:xfrm>
+      </p:grpSpPr>
+      <p:sp>
+        <p:nvSpPr>
+          <p:cNvPr id="2" name="Slide Image Placeholder 1"/>
+          <p:cNvSpPr>
+            <a:spLocks noGrp="1"/>
+          </p:cNvSpPr>
+          <p:nvPr>
+            <p:ph type="sldImg" idx="2"/>
+          </p:nvPr>
+        </p:nvSpPr>
+        <p:spPr/>
+      </p:sp>
+      <p:sp>
+        <p:nvSpPr>
+          <p:cNvPr id="3" name="Notes Placeholder 2"/>
+          <p:cNvSpPr>
+            <a:spLocks noGrp="1"/>
+          </p:cNvSpPr>
+          <p:nvPr>
+            <p:ph type="body" idx="3" sz="quarter"/>
+          </p:nvPr>
+        </p:nvSpPr>
+        <p:spPr/>
+        <p:txBody>
+          <a:bodyPr/>
+          <a:lstStyle/>
+          <a:p>
+            <a:r>
+              <a:t>RETO 5 · La tilde en el semáforo — 🔓 puzzel &amp; escape</a:t>
+            </a:r>
+          </a:p>
+          <a:p>
+            <a:r>
+              <a:t>OPDRACHT: Je hoort een woord. Links = aguda, midden = llana, rechts = esdrújula. Je hebt drie seconden.</a:t>
+            </a:r>
+          </a:p>
+          <a:p>
+            <a:r>
+              <a:t>DE REGEL: Je beslist op wat je hóórt, niet op wat je ziet — het woord staat pas op het scherm ná de beslissing. Wie te laat is, gaat zitten.</a:t>
+            </a:r>
+          </a:p>
+          <a:p>
+            <a:r>
+              <a:t>VERLOOP: Calentamiento: tres palabras con el escrito a la vista. | El juego: solo la voz. Tres segundos por palabra. | Ronda final: los que quedan de pie deciden a la vez. | Después: ¿qué palabras engañaron a más gente? ¿Por qué?</a:t>
+            </a:r>
+          </a:p>
+          <a:p>
+            <a:r>
+              <a:t>SLEUTEL: aguda (links): café · Perú · jamón · papel · reloj  ||  llana (midden): casa · mesa · lápiz · ventana  ||  esdrújula (rechts): México · teléfono · número · sábado · música · plátano  ||  De twee lastigste: «papel» en «reloj» dragen géén tilde maar zijn wél aguda (ze eindigen niet op klinker, -n of -s). «lápiz» draagt er wél een en is llana.</a:t>
+            </a:r>
+          </a:p>
+          <a:p>
+            <a:r>
+              <a:t>NOTA: Het lichaam onthoudt wat het hoofd vergeet. Speel minstens twee rondes: in de tweede ronde zie je de klemtoon al door de klas heen bewegen.</a:t>
+            </a:r>
+          </a:p>
+        </p:txBody>
+      </p:sp>
+    </p:spTree>
+  </p:cSld>
+  <p:clrMapOvr>
+    <a:masterClrMapping/>
+  </p:clrMapOvr>
+</p:notes>
+</file>
+
+<file path=ppt/notesSlides/notesSlide3.xml><?xml version="1.0" encoding="utf-8"?>
+<p:notes xmlns:a="http://schemas.openxmlformats.org/drawingml/2006/main" xmlns:p="http://schemas.openxmlformats.org/presentationml/2006/main" xmlns:r="http://schemas.openxmlformats.org/officeDocument/2006/relationships">
+  <p:cSld>
+    <p:spTree>
+      <p:nvGrpSpPr>
+        <p:cNvPr id="1" name=""/>
+        <p:cNvGrpSpPr/>
+        <p:nvPr/>
+      </p:nvGrpSpPr>
+      <p:grpSpPr>
+        <a:xfrm>
+          <a:off x="0" y="0"/>
+          <a:ext cx="0" cy="0"/>
+          <a:chOff x="0" y="0"/>
+          <a:chExt cx="0" cy="0"/>
+        </a:xfrm>
+      </p:grpSpPr>
+      <p:sp>
+        <p:nvSpPr>
+          <p:cNvPr id="2" name="Slide Image Placeholder 1"/>
+          <p:cNvSpPr>
+            <a:spLocks noGrp="1"/>
+          </p:cNvSpPr>
+          <p:nvPr>
+            <p:ph type="sldImg" idx="2"/>
+          </p:nvPr>
+        </p:nvSpPr>
+        <p:spPr/>
+      </p:sp>
+      <p:sp>
+        <p:nvSpPr>
+          <p:cNvPr id="3" name="Notes Placeholder 2"/>
+          <p:cNvSpPr>
+            <a:spLocks noGrp="1"/>
+          </p:cNvSpPr>
+          <p:nvPr>
+            <p:ph type="body" idx="3" sz="quarter"/>
+          </p:nvPr>
+        </p:nvSpPr>
+        <p:spPr/>
+        <p:txBody>
+          <a:bodyPr/>
+          <a:lstStyle/>
+          <a:p>
+            <a:r>
+              <a:t>RETO 6 · Radio Nombres — 📻 mediaformat</a:t>
+            </a:r>
+          </a:p>
+          <a:p>
+            <a:r>
+              <a:t>OPDRACHT: Spel de naam binnen tien seconden. Eén punt per correcte letternaam, één punt aftrek per hapering.</a:t>
+            </a:r>
+          </a:p>
+          <a:p>
+            <a:r>
+              <a:t>DE REGEL: Je zegt de lettersnamen (efe, hache, uve doble), nooit de klanken. Wie «ffff» zegt in plaats van «efe», verliest de beurt.</a:t>
+            </a:r>
+          </a:p>
+          <a:p>
+            <a:r>
+              <a:t>VERLOOP: Ronda 1 — los compañeros: deletrea el nombre de alguien de la clase. | Ronda 2 — las ciudades: el/la profe dice la ciudad, tú la deletreas. | Ronda 3 — las trampas: nombres flamencos con w, y, ij, j. | Final — el nombre más largo de la clase, sin errores.</a:t>
+            </a:r>
+          </a:p>
+          <a:p>
+            <a:r>
+              <a:t>SLEUTEL: Zaragoza = zeta-a-erre-a-ge-o-zeta-a  ·  Jaén = jota-a-e con tilde-ene  ||  Huelva = hache-u-e-ele-uve-a (de hache zwijgt, maar je spélt ze wél)  ||  Wouter = uve doble-o-u-te-e-erre  ·  Yara = i griega-a-erre-a  ||  Veelgemaakte fout: «be» en «uve» verwisselen. Laat leerlingen «be de burro» en «uve de vaca» zeggen zoals in Latijns-Amerika.</a:t>
+            </a:r>
+          </a:p>
+          <a:p>
+            <a:r>
+              <a:t>NOTA: Werkt het best met een echte timer op het scherm. De aftrek voor haperen klinkt streng, maar maakt juist dat leerlingen eerst denken en dan spreken.</a:t>
+            </a:r>
+          </a:p>
+        </p:txBody>
+      </p:sp>
+    </p:spTree>
+  </p:cSld>
+  <p:clrMapOvr>
+    <a:masterClrMapping/>
+  </p:clrMapOvr>
+</p:notes>
 </file>
 
 <file path=ppt/slideLayouts/slideLayout1.xml><?xml version="1.0" encoding="utf-8"?>
@@ -36501,6 +36753,9553 @@
   <p:clrMapOvr>
     <a:masterClrMapping/>
   </p:clrMapOvr>
+</p:sld>
+</file>
+
+<file path=ppt/slides/slide23.xml><?xml version="1.0" encoding="utf-8"?>
+<p:sld xmlns:a="http://schemas.openxmlformats.org/drawingml/2006/main" xmlns:p="http://schemas.openxmlformats.org/presentationml/2006/main" xmlns:r="http://schemas.openxmlformats.org/officeDocument/2006/relationships">
+  <p:cSld>
+    <p:spTree>
+      <p:nvGrpSpPr>
+        <p:cNvPr id="1" name=""/>
+        <p:cNvGrpSpPr/>
+        <p:nvPr/>
+      </p:nvGrpSpPr>
+      <p:grpSpPr/>
+      <p:sp>
+        <p:nvSpPr>
+          <p:cNvPr id="2" name="Fondo"/>
+          <p:cNvSpPr/>
+          <p:nvPr/>
+        </p:nvSpPr>
+        <p:spPr>
+          <a:xfrm>
+            <a:off x="0" y="0"/>
+            <a:ext cx="12191695" cy="6858000"/>
+          </a:xfrm>
+          <a:prstGeom prst="rect">
+            <a:avLst/>
+          </a:prstGeom>
+          <a:solidFill>
+            <a:srgbClr val="FCFBF8"/>
+          </a:solidFill>
+          <a:ln>
+            <a:noFill/>
+          </a:ln>
+          <a:effectLst/>
+        </p:spPr>
+        <p:style>
+          <a:lnRef idx="1">
+            <a:schemeClr val="accent1"/>
+          </a:lnRef>
+          <a:fillRef idx="3">
+            <a:schemeClr val="accent1"/>
+          </a:fillRef>
+          <a:effectRef idx="2">
+            <a:schemeClr val="accent1"/>
+          </a:effectRef>
+          <a:fontRef idx="minor">
+            <a:schemeClr val="lt1"/>
+          </a:fontRef>
+        </p:style>
+        <p:txBody>
+          <a:bodyPr rtlCol="0" anchor="ctr"/>
+          <a:lstStyle/>
+          <a:p/>
+        </p:txBody>
+      </p:sp>
+      <p:sp>
+        <p:nvSpPr>
+          <p:cNvPr id="3" name="Cabecera"/>
+          <p:cNvSpPr/>
+          <p:nvPr/>
+        </p:nvSpPr>
+        <p:spPr>
+          <a:xfrm>
+            <a:off x="0" y="0"/>
+            <a:ext cx="12191695" cy="1078992"/>
+          </a:xfrm>
+          <a:prstGeom prst="rect">
+            <a:avLst/>
+          </a:prstGeom>
+          <a:solidFill>
+            <a:srgbClr val="1E9E74"/>
+          </a:solidFill>
+          <a:ln>
+            <a:noFill/>
+          </a:ln>
+          <a:effectLst/>
+        </p:spPr>
+        <p:style>
+          <a:lnRef idx="1">
+            <a:schemeClr val="accent1"/>
+          </a:lnRef>
+          <a:fillRef idx="3">
+            <a:schemeClr val="accent1"/>
+          </a:fillRef>
+          <a:effectRef idx="2">
+            <a:schemeClr val="accent1"/>
+          </a:effectRef>
+          <a:fontRef idx="minor">
+            <a:schemeClr val="lt1"/>
+          </a:fontRef>
+        </p:style>
+        <p:txBody>
+          <a:bodyPr rtlCol="0" anchor="ctr"/>
+          <a:lstStyle/>
+          <a:p/>
+        </p:txBody>
+      </p:sp>
+      <p:sp>
+        <p:nvSpPr>
+          <p:cNvPr id="4" name="Chip"/>
+          <p:cNvSpPr/>
+          <p:nvPr/>
+        </p:nvSpPr>
+        <p:spPr>
+          <a:xfrm>
+            <a:off x="457200" y="182880"/>
+            <a:ext cx="3017520" cy="292608"/>
+          </a:xfrm>
+          <a:prstGeom prst="roundRect">
+            <a:avLst>
+              <a:gd name="adj" fmla="val 50000"/>
+            </a:avLst>
+          </a:prstGeom>
+          <a:solidFill>
+            <a:srgbClr val="FFFFFF"/>
+          </a:solidFill>
+          <a:ln>
+            <a:noFill/>
+          </a:ln>
+          <a:effectLst/>
+        </p:spPr>
+        <p:style>
+          <a:lnRef idx="1">
+            <a:schemeClr val="accent1"/>
+          </a:lnRef>
+          <a:fillRef idx="3">
+            <a:schemeClr val="accent1"/>
+          </a:fillRef>
+          <a:effectRef idx="2">
+            <a:schemeClr val="accent1"/>
+          </a:effectRef>
+          <a:fontRef idx="minor">
+            <a:schemeClr val="lt1"/>
+          </a:fontRef>
+        </p:style>
+        <p:txBody>
+          <a:bodyPr rtlCol="0" anchor="ctr"/>
+          <a:lstStyle/>
+          <a:p/>
+        </p:txBody>
+      </p:sp>
+      <p:sp>
+        <p:nvSpPr>
+          <p:cNvPr id="5" name="ChipTxt"/>
+          <p:cNvSpPr txBox="1"/>
+          <p:nvPr/>
+        </p:nvSpPr>
+        <p:spPr>
+          <a:xfrm>
+            <a:off x="457200" y="173736"/>
+            <a:ext cx="3017520" cy="310896"/>
+          </a:xfrm>
+          <a:prstGeom prst="rect">
+            <a:avLst/>
+          </a:prstGeom>
+          <a:noFill/>
+        </p:spPr>
+        <p:txBody>
+          <a:bodyPr wrap="square" anchor="ctr" lIns="45720" rIns="45720" tIns="27432" bIns="27432">
+            <a:normAutofit/>
+          </a:bodyPr>
+          <a:lstStyle/>
+          <a:p>
+            <a:pPr algn="ctr"/>
+            <a:r>
+              <a:rPr sz="950" b="1">
+                <a:solidFill>
+                  <a:srgbClr val="157355"/>
+                </a:solidFill>
+                <a:latin typeface="Inter"/>
+              </a:rPr>
+              <a:t>RETO 2 · PUZZEL &amp; ESCAPE</a:t>
+            </a:r>
+          </a:p>
+        </p:txBody>
+      </p:sp>
+      <p:sp>
+        <p:nvSpPr>
+          <p:cNvPr id="6" name="Titulo"/>
+          <p:cNvSpPr txBox="1"/>
+          <p:nvPr/>
+        </p:nvSpPr>
+        <p:spPr>
+          <a:xfrm>
+            <a:off x="457200" y="502920"/>
+            <a:ext cx="8412480" cy="475488"/>
+          </a:xfrm>
+          <a:prstGeom prst="rect">
+            <a:avLst/>
+          </a:prstGeom>
+          <a:noFill/>
+        </p:spPr>
+        <p:txBody>
+          <a:bodyPr wrap="square" anchor="t" lIns="45720" rIns="45720" tIns="27432" bIns="27432">
+            <a:normAutofit/>
+          </a:bodyPr>
+          <a:lstStyle/>
+          <a:p>
+            <a:pPr algn="l"/>
+            <a:r>
+              <a:rPr sz="2700" b="1">
+                <a:solidFill>
+                  <a:srgbClr val="FFFFFF"/>
+                </a:solidFill>
+                <a:latin typeface="Bricolage Grotesque"/>
+              </a:rPr>
+              <a:t>La subasta de sonidos</a:t>
+            </a:r>
+          </a:p>
+        </p:txBody>
+      </p:sp>
+      <p:sp>
+        <p:nvSpPr>
+          <p:cNvPr id="7" name="Badges"/>
+          <p:cNvSpPr txBox="1"/>
+          <p:nvPr/>
+        </p:nvSpPr>
+        <p:spPr>
+          <a:xfrm>
+            <a:off x="9052560" y="256032"/>
+            <a:ext cx="2651760" cy="640080"/>
+          </a:xfrm>
+          <a:prstGeom prst="rect">
+            <a:avLst/>
+          </a:prstGeom>
+          <a:noFill/>
+        </p:spPr>
+        <p:txBody>
+          <a:bodyPr wrap="square" anchor="t" lIns="45720" rIns="45720" tIns="27432" bIns="27432">
+            <a:normAutofit/>
+          </a:bodyPr>
+          <a:lstStyle/>
+          <a:p>
+            <a:pPr algn="r"/>
+            <a:r>
+              <a:rPr sz="1000">
+                <a:solidFill>
+                  <a:srgbClr val="E4F4EE"/>
+                </a:solidFill>
+                <a:latin typeface="Inter"/>
+              </a:rPr>
+              <a:t>👨‍👩‍👧 En equipos</a:t>
+            </a:r>
+          </a:p>
+          <a:p>
+            <a:pPr algn="r"/>
+            <a:r>
+              <a:rPr sz="1000">
+                <a:solidFill>
+                  <a:srgbClr val="E4F4EE"/>
+                </a:solidFill>
+                <a:latin typeface="Inter"/>
+              </a:rPr>
+              <a:t>± 15 min · ★★★</a:t>
+            </a:r>
+          </a:p>
+        </p:txBody>
+      </p:sp>
+      <p:sp>
+        <p:nvSpPr>
+          <p:cNvPr id="8" name="Gancho"/>
+          <p:cNvSpPr txBox="1"/>
+          <p:nvPr/>
+        </p:nvSpPr>
+        <p:spPr>
+          <a:xfrm>
+            <a:off x="457200" y="1225296"/>
+            <a:ext cx="11274552" cy="566928"/>
+          </a:xfrm>
+          <a:prstGeom prst="rect">
+            <a:avLst/>
+          </a:prstGeom>
+          <a:noFill/>
+        </p:spPr>
+        <p:txBody>
+          <a:bodyPr wrap="square" anchor="t" lIns="45720" rIns="45720" tIns="27432" bIns="27432">
+            <a:normAutofit/>
+          </a:bodyPr>
+          <a:lstStyle/>
+          <a:p>
+            <a:pPr algn="l"/>
+            <a:r>
+              <a:rPr sz="1600" b="1">
+                <a:solidFill>
+                  <a:srgbClr val="157355"/>
+                </a:solidFill>
+                <a:latin typeface="Bricolage Grotesque"/>
+              </a:rPr>
+              <a:t>Cada equipo tiene cien puntos. Se subastan ocho lotes de sonidos.</a:t>
+            </a:r>
+          </a:p>
+          <a:p>
+            <a:pPr algn="l"/>
+            <a:r>
+              <a:rPr sz="1100" i="1">
+                <a:solidFill>
+                  <a:srgbClr val="6A6E78"/>
+                </a:solidFill>
+                <a:latin typeface="Inter"/>
+              </a:rPr>
+              <a:t>Elk team heeft honderd punten. Er worden acht klankloten geveild.</a:t>
+            </a:r>
+          </a:p>
+        </p:txBody>
+      </p:sp>
+      <p:sp>
+        <p:nvSpPr>
+          <p:cNvPr id="9" name="ReglaCaja"/>
+          <p:cNvSpPr/>
+          <p:nvPr/>
+        </p:nvSpPr>
+        <p:spPr>
+          <a:xfrm>
+            <a:off x="457200" y="1847088"/>
+            <a:ext cx="11274552" cy="658368"/>
+          </a:xfrm>
+          <a:prstGeom prst="roundRect">
+            <a:avLst>
+              <a:gd name="adj" fmla="val 5000"/>
+            </a:avLst>
+          </a:prstGeom>
+          <a:solidFill>
+            <a:srgbClr val="FBF3D6"/>
+          </a:solidFill>
+          <a:ln>
+            <a:noFill/>
+          </a:ln>
+          <a:effectLst/>
+        </p:spPr>
+        <p:style>
+          <a:lnRef idx="1">
+            <a:schemeClr val="accent1"/>
+          </a:lnRef>
+          <a:fillRef idx="3">
+            <a:schemeClr val="accent1"/>
+          </a:fillRef>
+          <a:effectRef idx="2">
+            <a:schemeClr val="accent1"/>
+          </a:effectRef>
+          <a:fontRef idx="minor">
+            <a:schemeClr val="lt1"/>
+          </a:fontRef>
+        </p:style>
+        <p:txBody>
+          <a:bodyPr rtlCol="0" anchor="ctr"/>
+          <a:lstStyle/>
+          <a:p/>
+        </p:txBody>
+      </p:sp>
+      <p:sp>
+        <p:nvSpPr>
+          <p:cNvPr id="10" name="ReglaTxt"/>
+          <p:cNvSpPr txBox="1"/>
+          <p:nvPr/>
+        </p:nvSpPr>
+        <p:spPr>
+          <a:xfrm>
+            <a:off x="603504" y="1883664"/>
+            <a:ext cx="10972800" cy="585216"/>
+          </a:xfrm>
+          <a:prstGeom prst="rect">
+            <a:avLst/>
+          </a:prstGeom>
+          <a:noFill/>
+        </p:spPr>
+        <p:txBody>
+          <a:bodyPr wrap="square" anchor="t" lIns="45720" rIns="45720" tIns="27432" bIns="27432">
+            <a:normAutofit/>
+          </a:bodyPr>
+          <a:lstStyle/>
+          <a:p>
+            <a:pPr algn="l"/>
+            <a:r>
+              <a:rPr sz="850" b="1">
+                <a:solidFill>
+                  <a:srgbClr val="B7860B"/>
+                </a:solidFill>
+                <a:latin typeface="Inter"/>
+              </a:rPr>
+              <a:t>LA REGLA DEL RETO</a:t>
+            </a:r>
+          </a:p>
+          <a:p>
+            <a:pPr algn="l"/>
+            <a:r>
+              <a:rPr sz="1100">
+                <a:solidFill>
+                  <a:srgbClr val="20242E"/>
+                </a:solidFill>
+                <a:latin typeface="Inter"/>
+              </a:rPr>
+              <a:t>Je mag pas bieden ná het horen van het lot, en je mag niet overleggen terwijl je biedt. De duurste loten zijn de valstrikken.</a:t>
+            </a:r>
+          </a:p>
+        </p:txBody>
+      </p:sp>
+      <p:sp>
+        <p:nvSpPr>
+          <p:cNvPr id="11" name="Tarjeta 0"/>
+          <p:cNvSpPr/>
+          <p:nvPr/>
+        </p:nvSpPr>
+        <p:spPr>
+          <a:xfrm>
+            <a:off x="457200" y="2670048"/>
+            <a:ext cx="3660648" cy="1170432"/>
+          </a:xfrm>
+          <a:prstGeom prst="roundRect">
+            <a:avLst>
+              <a:gd name="adj" fmla="val 6000"/>
+            </a:avLst>
+          </a:prstGeom>
+          <a:solidFill>
+            <a:srgbClr val="FFFFFF"/>
+          </a:solidFill>
+          <a:ln w="12700">
+            <a:solidFill>
+              <a:srgbClr val="E4E3DE"/>
+            </a:solidFill>
+          </a:ln>
+          <a:effectLst/>
+        </p:spPr>
+        <p:style>
+          <a:lnRef idx="1">
+            <a:schemeClr val="accent1"/>
+          </a:lnRef>
+          <a:fillRef idx="3">
+            <a:schemeClr val="accent1"/>
+          </a:fillRef>
+          <a:effectRef idx="2">
+            <a:schemeClr val="accent1"/>
+          </a:effectRef>
+          <a:fontRef idx="minor">
+            <a:schemeClr val="lt1"/>
+          </a:fontRef>
+        </p:style>
+        <p:txBody>
+          <a:bodyPr rtlCol="0" anchor="ctr"/>
+          <a:lstStyle/>
+          <a:p/>
+        </p:txBody>
+      </p:sp>
+      <p:sp>
+        <p:nvSpPr>
+          <p:cNvPr id="12" name="TarjetaTxt 0"/>
+          <p:cNvSpPr txBox="1"/>
+          <p:nvPr/>
+        </p:nvSpPr>
+        <p:spPr>
+          <a:xfrm>
+            <a:off x="548640" y="2724912"/>
+            <a:ext cx="3477768" cy="859536"/>
+          </a:xfrm>
+          <a:prstGeom prst="rect">
+            <a:avLst/>
+          </a:prstGeom>
+          <a:noFill/>
+        </p:spPr>
+        <p:txBody>
+          <a:bodyPr wrap="square" anchor="t" lIns="45720" rIns="45720" tIns="27432" bIns="27432">
+            <a:normAutofit/>
+          </a:bodyPr>
+          <a:lstStyle/>
+          <a:p>
+            <a:pPr algn="l"/>
+            <a:r>
+              <a:rPr sz="1100" b="1">
+                <a:solidFill>
+                  <a:srgbClr val="157355"/>
+                </a:solidFill>
+                <a:latin typeface="Bricolage Grotesque"/>
+              </a:rPr>
+              <a:t>LOTE 1 · 10 pts</a:t>
+            </a:r>
+          </a:p>
+          <a:p>
+            <a:pPr algn="l"/>
+            <a:r>
+              <a:rPr sz="1000">
+                <a:solidFill>
+                  <a:srgbClr val="20242E"/>
+                </a:solidFill>
+                <a:latin typeface="Inter"/>
+              </a:rPr>
+              <a:t>gato   ·   gente</a:t>
+            </a:r>
+          </a:p>
+        </p:txBody>
+      </p:sp>
+      <p:sp>
+        <p:nvSpPr>
+          <p:cNvPr id="13" name="Onthul 0"/>
+          <p:cNvSpPr/>
+          <p:nvPr/>
+        </p:nvSpPr>
+        <p:spPr>
+          <a:xfrm>
+            <a:off x="548640" y="3547872"/>
+            <a:ext cx="3477768" cy="237744"/>
+          </a:xfrm>
+          <a:prstGeom prst="roundRect">
+            <a:avLst>
+              <a:gd name="adj" fmla="val 20000"/>
+            </a:avLst>
+          </a:prstGeom>
+          <a:solidFill>
+            <a:srgbClr val="E4F4EE"/>
+          </a:solidFill>
+          <a:ln>
+            <a:noFill/>
+          </a:ln>
+          <a:effectLst/>
+        </p:spPr>
+        <p:style>
+          <a:lnRef idx="1">
+            <a:schemeClr val="accent1"/>
+          </a:lnRef>
+          <a:fillRef idx="3">
+            <a:schemeClr val="accent1"/>
+          </a:fillRef>
+          <a:effectRef idx="2">
+            <a:schemeClr val="accent1"/>
+          </a:effectRef>
+          <a:fontRef idx="minor">
+            <a:schemeClr val="lt1"/>
+          </a:fontRef>
+        </p:style>
+        <p:txBody>
+          <a:bodyPr rtlCol="0" anchor="ctr"/>
+          <a:lstStyle/>
+          <a:p/>
+        </p:txBody>
+      </p:sp>
+      <p:sp>
+        <p:nvSpPr>
+          <p:cNvPr id="14" name="OnthulTxt 0"/>
+          <p:cNvSpPr txBox="1"/>
+          <p:nvPr/>
+        </p:nvSpPr>
+        <p:spPr>
+          <a:xfrm>
+            <a:off x="566928" y="3547872"/>
+            <a:ext cx="3441192" cy="237744"/>
+          </a:xfrm>
+          <a:prstGeom prst="rect">
+            <a:avLst/>
+          </a:prstGeom>
+          <a:noFill/>
+        </p:spPr>
+        <p:txBody>
+          <a:bodyPr wrap="square" anchor="ctr" lIns="45720" rIns="45720" tIns="27432" bIns="27432">
+            <a:normAutofit/>
+          </a:bodyPr>
+          <a:lstStyle/>
+          <a:p>
+            <a:pPr algn="l"/>
+            <a:r>
+              <a:rPr sz="850" b="1">
+                <a:solidFill>
+                  <a:srgbClr val="157355"/>
+                </a:solidFill>
+                <a:latin typeface="Inter"/>
+              </a:rPr>
+              <a:t>DIFERENTE — g + a/o/u = harde g</a:t>
+            </a:r>
+          </a:p>
+        </p:txBody>
+      </p:sp>
+      <p:sp>
+        <p:nvSpPr>
+          <p:cNvPr id="15" name="Tarjeta 1"/>
+          <p:cNvSpPr/>
+          <p:nvPr/>
+        </p:nvSpPr>
+        <p:spPr>
+          <a:xfrm>
+            <a:off x="4264152" y="2670048"/>
+            <a:ext cx="3660648" cy="1170432"/>
+          </a:xfrm>
+          <a:prstGeom prst="roundRect">
+            <a:avLst>
+              <a:gd name="adj" fmla="val 6000"/>
+            </a:avLst>
+          </a:prstGeom>
+          <a:solidFill>
+            <a:srgbClr val="FFFFFF"/>
+          </a:solidFill>
+          <a:ln w="12700">
+            <a:solidFill>
+              <a:srgbClr val="E4E3DE"/>
+            </a:solidFill>
+          </a:ln>
+          <a:effectLst/>
+        </p:spPr>
+        <p:style>
+          <a:lnRef idx="1">
+            <a:schemeClr val="accent1"/>
+          </a:lnRef>
+          <a:fillRef idx="3">
+            <a:schemeClr val="accent1"/>
+          </a:fillRef>
+          <a:effectRef idx="2">
+            <a:schemeClr val="accent1"/>
+          </a:effectRef>
+          <a:fontRef idx="minor">
+            <a:schemeClr val="lt1"/>
+          </a:fontRef>
+        </p:style>
+        <p:txBody>
+          <a:bodyPr rtlCol="0" anchor="ctr"/>
+          <a:lstStyle/>
+          <a:p/>
+        </p:txBody>
+      </p:sp>
+      <p:sp>
+        <p:nvSpPr>
+          <p:cNvPr id="16" name="TarjetaTxt 1"/>
+          <p:cNvSpPr txBox="1"/>
+          <p:nvPr/>
+        </p:nvSpPr>
+        <p:spPr>
+          <a:xfrm>
+            <a:off x="4355592" y="2724912"/>
+            <a:ext cx="3477768" cy="859536"/>
+          </a:xfrm>
+          <a:prstGeom prst="rect">
+            <a:avLst/>
+          </a:prstGeom>
+          <a:noFill/>
+        </p:spPr>
+        <p:txBody>
+          <a:bodyPr wrap="square" anchor="t" lIns="45720" rIns="45720" tIns="27432" bIns="27432">
+            <a:normAutofit/>
+          </a:bodyPr>
+          <a:lstStyle/>
+          <a:p>
+            <a:pPr algn="l"/>
+            <a:r>
+              <a:rPr sz="1100" b="1">
+                <a:solidFill>
+                  <a:srgbClr val="157355"/>
+                </a:solidFill>
+                <a:latin typeface="Bricolage Grotesque"/>
+              </a:rPr>
+              <a:t>LOTE 2 · 10 pts</a:t>
+            </a:r>
+          </a:p>
+          <a:p>
+            <a:pPr algn="l"/>
+            <a:r>
+              <a:rPr sz="1000">
+                <a:solidFill>
+                  <a:srgbClr val="20242E"/>
+                </a:solidFill>
+                <a:latin typeface="Inter"/>
+              </a:rPr>
+              <a:t>queso   ·   cero</a:t>
+            </a:r>
+          </a:p>
+        </p:txBody>
+      </p:sp>
+      <p:sp>
+        <p:nvSpPr>
+          <p:cNvPr id="17" name="Onthul 1"/>
+          <p:cNvSpPr/>
+          <p:nvPr/>
+        </p:nvSpPr>
+        <p:spPr>
+          <a:xfrm>
+            <a:off x="4355592" y="3547872"/>
+            <a:ext cx="3477768" cy="237744"/>
+          </a:xfrm>
+          <a:prstGeom prst="roundRect">
+            <a:avLst>
+              <a:gd name="adj" fmla="val 20000"/>
+            </a:avLst>
+          </a:prstGeom>
+          <a:solidFill>
+            <a:srgbClr val="E4F4EE"/>
+          </a:solidFill>
+          <a:ln>
+            <a:noFill/>
+          </a:ln>
+          <a:effectLst/>
+        </p:spPr>
+        <p:style>
+          <a:lnRef idx="1">
+            <a:schemeClr val="accent1"/>
+          </a:lnRef>
+          <a:fillRef idx="3">
+            <a:schemeClr val="accent1"/>
+          </a:fillRef>
+          <a:effectRef idx="2">
+            <a:schemeClr val="accent1"/>
+          </a:effectRef>
+          <a:fontRef idx="minor">
+            <a:schemeClr val="lt1"/>
+          </a:fontRef>
+        </p:style>
+        <p:txBody>
+          <a:bodyPr rtlCol="0" anchor="ctr"/>
+          <a:lstStyle/>
+          <a:p/>
+        </p:txBody>
+      </p:sp>
+      <p:sp>
+        <p:nvSpPr>
+          <p:cNvPr id="18" name="OnthulTxt 1"/>
+          <p:cNvSpPr txBox="1"/>
+          <p:nvPr/>
+        </p:nvSpPr>
+        <p:spPr>
+          <a:xfrm>
+            <a:off x="4373880" y="3547872"/>
+            <a:ext cx="3441192" cy="237744"/>
+          </a:xfrm>
+          <a:prstGeom prst="rect">
+            <a:avLst/>
+          </a:prstGeom>
+          <a:noFill/>
+        </p:spPr>
+        <p:txBody>
+          <a:bodyPr wrap="square" anchor="ctr" lIns="45720" rIns="45720" tIns="27432" bIns="27432">
+            <a:normAutofit/>
+          </a:bodyPr>
+          <a:lstStyle/>
+          <a:p>
+            <a:pPr algn="l"/>
+            <a:r>
+              <a:rPr sz="850" b="1">
+                <a:solidFill>
+                  <a:srgbClr val="157355"/>
+                </a:solidFill>
+                <a:latin typeface="Inter"/>
+              </a:rPr>
+              <a:t>DIFERENTE — qu = k</a:t>
+            </a:r>
+          </a:p>
+        </p:txBody>
+      </p:sp>
+      <p:sp>
+        <p:nvSpPr>
+          <p:cNvPr id="19" name="Tarjeta 2"/>
+          <p:cNvSpPr/>
+          <p:nvPr/>
+        </p:nvSpPr>
+        <p:spPr>
+          <a:xfrm>
+            <a:off x="8071104" y="2670048"/>
+            <a:ext cx="3660648" cy="1170432"/>
+          </a:xfrm>
+          <a:prstGeom prst="roundRect">
+            <a:avLst>
+              <a:gd name="adj" fmla="val 6000"/>
+            </a:avLst>
+          </a:prstGeom>
+          <a:solidFill>
+            <a:srgbClr val="FFFFFF"/>
+          </a:solidFill>
+          <a:ln w="12700">
+            <a:solidFill>
+              <a:srgbClr val="E4E3DE"/>
+            </a:solidFill>
+          </a:ln>
+          <a:effectLst/>
+        </p:spPr>
+        <p:style>
+          <a:lnRef idx="1">
+            <a:schemeClr val="accent1"/>
+          </a:lnRef>
+          <a:fillRef idx="3">
+            <a:schemeClr val="accent1"/>
+          </a:fillRef>
+          <a:effectRef idx="2">
+            <a:schemeClr val="accent1"/>
+          </a:effectRef>
+          <a:fontRef idx="minor">
+            <a:schemeClr val="lt1"/>
+          </a:fontRef>
+        </p:style>
+        <p:txBody>
+          <a:bodyPr rtlCol="0" anchor="ctr"/>
+          <a:lstStyle/>
+          <a:p/>
+        </p:txBody>
+      </p:sp>
+      <p:sp>
+        <p:nvSpPr>
+          <p:cNvPr id="20" name="TarjetaTxt 2"/>
+          <p:cNvSpPr txBox="1"/>
+          <p:nvPr/>
+        </p:nvSpPr>
+        <p:spPr>
+          <a:xfrm>
+            <a:off x="8162544" y="2724912"/>
+            <a:ext cx="3477768" cy="859536"/>
+          </a:xfrm>
+          <a:prstGeom prst="rect">
+            <a:avLst/>
+          </a:prstGeom>
+          <a:noFill/>
+        </p:spPr>
+        <p:txBody>
+          <a:bodyPr wrap="square" anchor="t" lIns="45720" rIns="45720" tIns="27432" bIns="27432">
+            <a:normAutofit/>
+          </a:bodyPr>
+          <a:lstStyle/>
+          <a:p>
+            <a:pPr algn="l"/>
+            <a:r>
+              <a:rPr sz="1100" b="1">
+                <a:solidFill>
+                  <a:srgbClr val="157355"/>
+                </a:solidFill>
+                <a:latin typeface="Bricolage Grotesque"/>
+              </a:rPr>
+              <a:t>LOTE 3 · 25 pts</a:t>
+            </a:r>
+          </a:p>
+          <a:p>
+            <a:pPr algn="l"/>
+            <a:r>
+              <a:rPr sz="1000">
+                <a:solidFill>
+                  <a:srgbClr val="20242E"/>
+                </a:solidFill>
+                <a:latin typeface="Inter"/>
+              </a:rPr>
+              <a:t>hola   ·   ola</a:t>
+            </a:r>
+          </a:p>
+        </p:txBody>
+      </p:sp>
+      <p:sp>
+        <p:nvSpPr>
+          <p:cNvPr id="21" name="Onthul 2"/>
+          <p:cNvSpPr/>
+          <p:nvPr/>
+        </p:nvSpPr>
+        <p:spPr>
+          <a:xfrm>
+            <a:off x="8162544" y="3547872"/>
+            <a:ext cx="3477768" cy="237744"/>
+          </a:xfrm>
+          <a:prstGeom prst="roundRect">
+            <a:avLst>
+              <a:gd name="adj" fmla="val 20000"/>
+            </a:avLst>
+          </a:prstGeom>
+          <a:solidFill>
+            <a:srgbClr val="E4F4EE"/>
+          </a:solidFill>
+          <a:ln>
+            <a:noFill/>
+          </a:ln>
+          <a:effectLst/>
+        </p:spPr>
+        <p:style>
+          <a:lnRef idx="1">
+            <a:schemeClr val="accent1"/>
+          </a:lnRef>
+          <a:fillRef idx="3">
+            <a:schemeClr val="accent1"/>
+          </a:fillRef>
+          <a:effectRef idx="2">
+            <a:schemeClr val="accent1"/>
+          </a:effectRef>
+          <a:fontRef idx="minor">
+            <a:schemeClr val="lt1"/>
+          </a:fontRef>
+        </p:style>
+        <p:txBody>
+          <a:bodyPr rtlCol="0" anchor="ctr"/>
+          <a:lstStyle/>
+          <a:p/>
+        </p:txBody>
+      </p:sp>
+      <p:sp>
+        <p:nvSpPr>
+          <p:cNvPr id="22" name="OnthulTxt 2"/>
+          <p:cNvSpPr txBox="1"/>
+          <p:nvPr/>
+        </p:nvSpPr>
+        <p:spPr>
+          <a:xfrm>
+            <a:off x="8180832" y="3547872"/>
+            <a:ext cx="3441192" cy="237744"/>
+          </a:xfrm>
+          <a:prstGeom prst="rect">
+            <a:avLst/>
+          </a:prstGeom>
+          <a:noFill/>
+        </p:spPr>
+        <p:txBody>
+          <a:bodyPr wrap="square" anchor="ctr" lIns="45720" rIns="45720" tIns="27432" bIns="27432">
+            <a:normAutofit/>
+          </a:bodyPr>
+          <a:lstStyle/>
+          <a:p>
+            <a:pPr algn="l"/>
+            <a:r>
+              <a:rPr sz="850" b="1">
+                <a:solidFill>
+                  <a:srgbClr val="157355"/>
+                </a:solidFill>
+                <a:latin typeface="Inter"/>
+              </a:rPr>
+              <a:t>IGUAL — de hache zwijgt altijd — de twee woor…</a:t>
+            </a:r>
+          </a:p>
+        </p:txBody>
+      </p:sp>
+      <p:sp>
+        <p:nvSpPr>
+          <p:cNvPr id="23" name="Tarjeta 3"/>
+          <p:cNvSpPr/>
+          <p:nvPr/>
+        </p:nvSpPr>
+        <p:spPr>
+          <a:xfrm>
+            <a:off x="457200" y="3968496"/>
+            <a:ext cx="3660648" cy="1170432"/>
+          </a:xfrm>
+          <a:prstGeom prst="roundRect">
+            <a:avLst>
+              <a:gd name="adj" fmla="val 6000"/>
+            </a:avLst>
+          </a:prstGeom>
+          <a:solidFill>
+            <a:srgbClr val="FFFFFF"/>
+          </a:solidFill>
+          <a:ln w="12700">
+            <a:solidFill>
+              <a:srgbClr val="E4E3DE"/>
+            </a:solidFill>
+          </a:ln>
+          <a:effectLst/>
+        </p:spPr>
+        <p:style>
+          <a:lnRef idx="1">
+            <a:schemeClr val="accent1"/>
+          </a:lnRef>
+          <a:fillRef idx="3">
+            <a:schemeClr val="accent1"/>
+          </a:fillRef>
+          <a:effectRef idx="2">
+            <a:schemeClr val="accent1"/>
+          </a:effectRef>
+          <a:fontRef idx="minor">
+            <a:schemeClr val="lt1"/>
+          </a:fontRef>
+        </p:style>
+        <p:txBody>
+          <a:bodyPr rtlCol="0" anchor="ctr"/>
+          <a:lstStyle/>
+          <a:p/>
+        </p:txBody>
+      </p:sp>
+      <p:sp>
+        <p:nvSpPr>
+          <p:cNvPr id="24" name="TarjetaTxt 3"/>
+          <p:cNvSpPr txBox="1"/>
+          <p:nvPr/>
+        </p:nvSpPr>
+        <p:spPr>
+          <a:xfrm>
+            <a:off x="548640" y="4023360"/>
+            <a:ext cx="3477768" cy="859536"/>
+          </a:xfrm>
+          <a:prstGeom prst="rect">
+            <a:avLst/>
+          </a:prstGeom>
+          <a:noFill/>
+        </p:spPr>
+        <p:txBody>
+          <a:bodyPr wrap="square" anchor="t" lIns="45720" rIns="45720" tIns="27432" bIns="27432">
+            <a:normAutofit/>
+          </a:bodyPr>
+          <a:lstStyle/>
+          <a:p>
+            <a:pPr algn="l"/>
+            <a:r>
+              <a:rPr sz="1100" b="1">
+                <a:solidFill>
+                  <a:srgbClr val="157355"/>
+                </a:solidFill>
+                <a:latin typeface="Bricolage Grotesque"/>
+              </a:rPr>
+              <a:t>LOTE 4 · 15 pts</a:t>
+            </a:r>
+          </a:p>
+          <a:p>
+            <a:pPr algn="l"/>
+            <a:r>
+              <a:rPr sz="1000">
+                <a:solidFill>
+                  <a:srgbClr val="20242E"/>
+                </a:solidFill>
+                <a:latin typeface="Inter"/>
+              </a:rPr>
+              <a:t>perro   ·   pero</a:t>
+            </a:r>
+          </a:p>
+        </p:txBody>
+      </p:sp>
+      <p:sp>
+        <p:nvSpPr>
+          <p:cNvPr id="25" name="Onthul 3"/>
+          <p:cNvSpPr/>
+          <p:nvPr/>
+        </p:nvSpPr>
+        <p:spPr>
+          <a:xfrm>
+            <a:off x="548640" y="4846320"/>
+            <a:ext cx="3477768" cy="237744"/>
+          </a:xfrm>
+          <a:prstGeom prst="roundRect">
+            <a:avLst>
+              <a:gd name="adj" fmla="val 20000"/>
+            </a:avLst>
+          </a:prstGeom>
+          <a:solidFill>
+            <a:srgbClr val="E4F4EE"/>
+          </a:solidFill>
+          <a:ln>
+            <a:noFill/>
+          </a:ln>
+          <a:effectLst/>
+        </p:spPr>
+        <p:style>
+          <a:lnRef idx="1">
+            <a:schemeClr val="accent1"/>
+          </a:lnRef>
+          <a:fillRef idx="3">
+            <a:schemeClr val="accent1"/>
+          </a:fillRef>
+          <a:effectRef idx="2">
+            <a:schemeClr val="accent1"/>
+          </a:effectRef>
+          <a:fontRef idx="minor">
+            <a:schemeClr val="lt1"/>
+          </a:fontRef>
+        </p:style>
+        <p:txBody>
+          <a:bodyPr rtlCol="0" anchor="ctr"/>
+          <a:lstStyle/>
+          <a:p/>
+        </p:txBody>
+      </p:sp>
+      <p:sp>
+        <p:nvSpPr>
+          <p:cNvPr id="26" name="OnthulTxt 3"/>
+          <p:cNvSpPr txBox="1"/>
+          <p:nvPr/>
+        </p:nvSpPr>
+        <p:spPr>
+          <a:xfrm>
+            <a:off x="566928" y="4846320"/>
+            <a:ext cx="3441192" cy="237744"/>
+          </a:xfrm>
+          <a:prstGeom prst="rect">
+            <a:avLst/>
+          </a:prstGeom>
+          <a:noFill/>
+        </p:spPr>
+        <p:txBody>
+          <a:bodyPr wrap="square" anchor="ctr" lIns="45720" rIns="45720" tIns="27432" bIns="27432">
+            <a:normAutofit/>
+          </a:bodyPr>
+          <a:lstStyle/>
+          <a:p>
+            <a:pPr algn="l"/>
+            <a:r>
+              <a:rPr sz="850" b="1">
+                <a:solidFill>
+                  <a:srgbClr val="157355"/>
+                </a:solidFill>
+                <a:latin typeface="Inter"/>
+              </a:rPr>
+              <a:t>DIFERENTE — rr = rollende r</a:t>
+            </a:r>
+          </a:p>
+        </p:txBody>
+      </p:sp>
+      <p:sp>
+        <p:nvSpPr>
+          <p:cNvPr id="27" name="Tarjeta 4"/>
+          <p:cNvSpPr/>
+          <p:nvPr/>
+        </p:nvSpPr>
+        <p:spPr>
+          <a:xfrm>
+            <a:off x="4264152" y="3968496"/>
+            <a:ext cx="3660648" cy="1170432"/>
+          </a:xfrm>
+          <a:prstGeom prst="roundRect">
+            <a:avLst>
+              <a:gd name="adj" fmla="val 6000"/>
+            </a:avLst>
+          </a:prstGeom>
+          <a:solidFill>
+            <a:srgbClr val="FFFFFF"/>
+          </a:solidFill>
+          <a:ln w="12700">
+            <a:solidFill>
+              <a:srgbClr val="E4E3DE"/>
+            </a:solidFill>
+          </a:ln>
+          <a:effectLst/>
+        </p:spPr>
+        <p:style>
+          <a:lnRef idx="1">
+            <a:schemeClr val="accent1"/>
+          </a:lnRef>
+          <a:fillRef idx="3">
+            <a:schemeClr val="accent1"/>
+          </a:fillRef>
+          <a:effectRef idx="2">
+            <a:schemeClr val="accent1"/>
+          </a:effectRef>
+          <a:fontRef idx="minor">
+            <a:schemeClr val="lt1"/>
+          </a:fontRef>
+        </p:style>
+        <p:txBody>
+          <a:bodyPr rtlCol="0" anchor="ctr"/>
+          <a:lstStyle/>
+          <a:p/>
+        </p:txBody>
+      </p:sp>
+      <p:sp>
+        <p:nvSpPr>
+          <p:cNvPr id="28" name="TarjetaTxt 4"/>
+          <p:cNvSpPr txBox="1"/>
+          <p:nvPr/>
+        </p:nvSpPr>
+        <p:spPr>
+          <a:xfrm>
+            <a:off x="4355592" y="4023360"/>
+            <a:ext cx="3477768" cy="859536"/>
+          </a:xfrm>
+          <a:prstGeom prst="rect">
+            <a:avLst/>
+          </a:prstGeom>
+          <a:noFill/>
+        </p:spPr>
+        <p:txBody>
+          <a:bodyPr wrap="square" anchor="t" lIns="45720" rIns="45720" tIns="27432" bIns="27432">
+            <a:normAutofit/>
+          </a:bodyPr>
+          <a:lstStyle/>
+          <a:p>
+            <a:pPr algn="l"/>
+            <a:r>
+              <a:rPr sz="1100" b="1">
+                <a:solidFill>
+                  <a:srgbClr val="157355"/>
+                </a:solidFill>
+                <a:latin typeface="Bricolage Grotesque"/>
+              </a:rPr>
+              <a:t>LOTE 5 · 25 pts</a:t>
+            </a:r>
+          </a:p>
+          <a:p>
+            <a:pPr algn="l"/>
+            <a:r>
+              <a:rPr sz="1000">
+                <a:solidFill>
+                  <a:srgbClr val="20242E"/>
+                </a:solidFill>
+                <a:latin typeface="Inter"/>
+              </a:rPr>
+              <a:t>vino   ·   bino</a:t>
+            </a:r>
+          </a:p>
+        </p:txBody>
+      </p:sp>
+      <p:sp>
+        <p:nvSpPr>
+          <p:cNvPr id="29" name="Onthul 4"/>
+          <p:cNvSpPr/>
+          <p:nvPr/>
+        </p:nvSpPr>
+        <p:spPr>
+          <a:xfrm>
+            <a:off x="4355592" y="4846320"/>
+            <a:ext cx="3477768" cy="237744"/>
+          </a:xfrm>
+          <a:prstGeom prst="roundRect">
+            <a:avLst>
+              <a:gd name="adj" fmla="val 20000"/>
+            </a:avLst>
+          </a:prstGeom>
+          <a:solidFill>
+            <a:srgbClr val="E4F4EE"/>
+          </a:solidFill>
+          <a:ln>
+            <a:noFill/>
+          </a:ln>
+          <a:effectLst/>
+        </p:spPr>
+        <p:style>
+          <a:lnRef idx="1">
+            <a:schemeClr val="accent1"/>
+          </a:lnRef>
+          <a:fillRef idx="3">
+            <a:schemeClr val="accent1"/>
+          </a:fillRef>
+          <a:effectRef idx="2">
+            <a:schemeClr val="accent1"/>
+          </a:effectRef>
+          <a:fontRef idx="minor">
+            <a:schemeClr val="lt1"/>
+          </a:fontRef>
+        </p:style>
+        <p:txBody>
+          <a:bodyPr rtlCol="0" anchor="ctr"/>
+          <a:lstStyle/>
+          <a:p/>
+        </p:txBody>
+      </p:sp>
+      <p:sp>
+        <p:nvSpPr>
+          <p:cNvPr id="30" name="OnthulTxt 4"/>
+          <p:cNvSpPr txBox="1"/>
+          <p:nvPr/>
+        </p:nvSpPr>
+        <p:spPr>
+          <a:xfrm>
+            <a:off x="4373880" y="4846320"/>
+            <a:ext cx="3441192" cy="237744"/>
+          </a:xfrm>
+          <a:prstGeom prst="rect">
+            <a:avLst/>
+          </a:prstGeom>
+          <a:noFill/>
+        </p:spPr>
+        <p:txBody>
+          <a:bodyPr wrap="square" anchor="ctr" lIns="45720" rIns="45720" tIns="27432" bIns="27432">
+            <a:normAutofit/>
+          </a:bodyPr>
+          <a:lstStyle/>
+          <a:p>
+            <a:pPr algn="l"/>
+            <a:r>
+              <a:rPr sz="850" b="1">
+                <a:solidFill>
+                  <a:srgbClr val="157355"/>
+                </a:solidFill>
+                <a:latin typeface="Inter"/>
+              </a:rPr>
+              <a:t>IGUAL — v en b klinken in het Spaans hetzelfde</a:t>
+            </a:r>
+          </a:p>
+        </p:txBody>
+      </p:sp>
+      <p:sp>
+        <p:nvSpPr>
+          <p:cNvPr id="31" name="Tarjeta 5"/>
+          <p:cNvSpPr/>
+          <p:nvPr/>
+        </p:nvSpPr>
+        <p:spPr>
+          <a:xfrm>
+            <a:off x="8071104" y="3968496"/>
+            <a:ext cx="3660648" cy="1170432"/>
+          </a:xfrm>
+          <a:prstGeom prst="roundRect">
+            <a:avLst>
+              <a:gd name="adj" fmla="val 6000"/>
+            </a:avLst>
+          </a:prstGeom>
+          <a:solidFill>
+            <a:srgbClr val="FFFFFF"/>
+          </a:solidFill>
+          <a:ln w="12700">
+            <a:solidFill>
+              <a:srgbClr val="E4E3DE"/>
+            </a:solidFill>
+          </a:ln>
+          <a:effectLst/>
+        </p:spPr>
+        <p:style>
+          <a:lnRef idx="1">
+            <a:schemeClr val="accent1"/>
+          </a:lnRef>
+          <a:fillRef idx="3">
+            <a:schemeClr val="accent1"/>
+          </a:fillRef>
+          <a:effectRef idx="2">
+            <a:schemeClr val="accent1"/>
+          </a:effectRef>
+          <a:fontRef idx="minor">
+            <a:schemeClr val="lt1"/>
+          </a:fontRef>
+        </p:style>
+        <p:txBody>
+          <a:bodyPr rtlCol="0" anchor="ctr"/>
+          <a:lstStyle/>
+          <a:p/>
+        </p:txBody>
+      </p:sp>
+      <p:sp>
+        <p:nvSpPr>
+          <p:cNvPr id="32" name="TarjetaTxt 5"/>
+          <p:cNvSpPr txBox="1"/>
+          <p:nvPr/>
+        </p:nvSpPr>
+        <p:spPr>
+          <a:xfrm>
+            <a:off x="8162544" y="4023360"/>
+            <a:ext cx="3477768" cy="859536"/>
+          </a:xfrm>
+          <a:prstGeom prst="rect">
+            <a:avLst/>
+          </a:prstGeom>
+          <a:noFill/>
+        </p:spPr>
+        <p:txBody>
+          <a:bodyPr wrap="square" anchor="t" lIns="45720" rIns="45720" tIns="27432" bIns="27432">
+            <a:normAutofit/>
+          </a:bodyPr>
+          <a:lstStyle/>
+          <a:p>
+            <a:pPr algn="l"/>
+            <a:r>
+              <a:rPr sz="1100" b="1">
+                <a:solidFill>
+                  <a:srgbClr val="157355"/>
+                </a:solidFill>
+                <a:latin typeface="Bricolage Grotesque"/>
+              </a:rPr>
+              <a:t>LOTE 6 · 15 pts</a:t>
+            </a:r>
+          </a:p>
+          <a:p>
+            <a:pPr algn="l"/>
+            <a:r>
+              <a:rPr sz="1000">
+                <a:solidFill>
+                  <a:srgbClr val="20242E"/>
+                </a:solidFill>
+                <a:latin typeface="Inter"/>
+              </a:rPr>
+              <a:t>guitarra   ·   gitano</a:t>
+            </a:r>
+          </a:p>
+        </p:txBody>
+      </p:sp>
+      <p:sp>
+        <p:nvSpPr>
+          <p:cNvPr id="33" name="Onthul 5"/>
+          <p:cNvSpPr/>
+          <p:nvPr/>
+        </p:nvSpPr>
+        <p:spPr>
+          <a:xfrm>
+            <a:off x="8162544" y="4846320"/>
+            <a:ext cx="3477768" cy="237744"/>
+          </a:xfrm>
+          <a:prstGeom prst="roundRect">
+            <a:avLst>
+              <a:gd name="adj" fmla="val 20000"/>
+            </a:avLst>
+          </a:prstGeom>
+          <a:solidFill>
+            <a:srgbClr val="E4F4EE"/>
+          </a:solidFill>
+          <a:ln>
+            <a:noFill/>
+          </a:ln>
+          <a:effectLst/>
+        </p:spPr>
+        <p:style>
+          <a:lnRef idx="1">
+            <a:schemeClr val="accent1"/>
+          </a:lnRef>
+          <a:fillRef idx="3">
+            <a:schemeClr val="accent1"/>
+          </a:fillRef>
+          <a:effectRef idx="2">
+            <a:schemeClr val="accent1"/>
+          </a:effectRef>
+          <a:fontRef idx="minor">
+            <a:schemeClr val="lt1"/>
+          </a:fontRef>
+        </p:style>
+        <p:txBody>
+          <a:bodyPr rtlCol="0" anchor="ctr"/>
+          <a:lstStyle/>
+          <a:p/>
+        </p:txBody>
+      </p:sp>
+      <p:sp>
+        <p:nvSpPr>
+          <p:cNvPr id="34" name="OnthulTxt 5"/>
+          <p:cNvSpPr txBox="1"/>
+          <p:nvPr/>
+        </p:nvSpPr>
+        <p:spPr>
+          <a:xfrm>
+            <a:off x="8180832" y="4846320"/>
+            <a:ext cx="3441192" cy="237744"/>
+          </a:xfrm>
+          <a:prstGeom prst="rect">
+            <a:avLst/>
+          </a:prstGeom>
+          <a:noFill/>
+        </p:spPr>
+        <p:txBody>
+          <a:bodyPr wrap="square" anchor="ctr" lIns="45720" rIns="45720" tIns="27432" bIns="27432">
+            <a:normAutofit/>
+          </a:bodyPr>
+          <a:lstStyle/>
+          <a:p>
+            <a:pPr algn="l"/>
+            <a:r>
+              <a:rPr sz="850" b="1">
+                <a:solidFill>
+                  <a:srgbClr val="157355"/>
+                </a:solidFill>
+                <a:latin typeface="Inter"/>
+              </a:rPr>
+              <a:t>DIFERENTE — gui = harde g (u zwijgt)</a:t>
+            </a:r>
+          </a:p>
+        </p:txBody>
+      </p:sp>
+      <p:sp>
+        <p:nvSpPr>
+          <p:cNvPr id="35" name="Tarjeta 6"/>
+          <p:cNvSpPr/>
+          <p:nvPr/>
+        </p:nvSpPr>
+        <p:spPr>
+          <a:xfrm>
+            <a:off x="457200" y="5266944"/>
+            <a:ext cx="3660648" cy="1170432"/>
+          </a:xfrm>
+          <a:prstGeom prst="roundRect">
+            <a:avLst>
+              <a:gd name="adj" fmla="val 6000"/>
+            </a:avLst>
+          </a:prstGeom>
+          <a:solidFill>
+            <a:srgbClr val="FFFFFF"/>
+          </a:solidFill>
+          <a:ln w="12700">
+            <a:solidFill>
+              <a:srgbClr val="E4E3DE"/>
+            </a:solidFill>
+          </a:ln>
+          <a:effectLst/>
+        </p:spPr>
+        <p:style>
+          <a:lnRef idx="1">
+            <a:schemeClr val="accent1"/>
+          </a:lnRef>
+          <a:fillRef idx="3">
+            <a:schemeClr val="accent1"/>
+          </a:fillRef>
+          <a:effectRef idx="2">
+            <a:schemeClr val="accent1"/>
+          </a:effectRef>
+          <a:fontRef idx="minor">
+            <a:schemeClr val="lt1"/>
+          </a:fontRef>
+        </p:style>
+        <p:txBody>
+          <a:bodyPr rtlCol="0" anchor="ctr"/>
+          <a:lstStyle/>
+          <a:p/>
+        </p:txBody>
+      </p:sp>
+      <p:sp>
+        <p:nvSpPr>
+          <p:cNvPr id="36" name="TarjetaTxt 6"/>
+          <p:cNvSpPr txBox="1"/>
+          <p:nvPr/>
+        </p:nvSpPr>
+        <p:spPr>
+          <a:xfrm>
+            <a:off x="548640" y="5321808"/>
+            <a:ext cx="3477768" cy="859536"/>
+          </a:xfrm>
+          <a:prstGeom prst="rect">
+            <a:avLst/>
+          </a:prstGeom>
+          <a:noFill/>
+        </p:spPr>
+        <p:txBody>
+          <a:bodyPr wrap="square" anchor="t" lIns="45720" rIns="45720" tIns="27432" bIns="27432">
+            <a:normAutofit/>
+          </a:bodyPr>
+          <a:lstStyle/>
+          <a:p>
+            <a:pPr algn="l"/>
+            <a:r>
+              <a:rPr sz="1100" b="1">
+                <a:solidFill>
+                  <a:srgbClr val="157355"/>
+                </a:solidFill>
+                <a:latin typeface="Bricolage Grotesque"/>
+              </a:rPr>
+              <a:t>LOTE 7 · 20 pts</a:t>
+            </a:r>
+          </a:p>
+          <a:p>
+            <a:pPr algn="l"/>
+            <a:r>
+              <a:rPr sz="1000">
+                <a:solidFill>
+                  <a:srgbClr val="20242E"/>
+                </a:solidFill>
+                <a:latin typeface="Inter"/>
+              </a:rPr>
+              <a:t>año   ·   ano</a:t>
+            </a:r>
+          </a:p>
+        </p:txBody>
+      </p:sp>
+      <p:sp>
+        <p:nvSpPr>
+          <p:cNvPr id="37" name="Onthul 6"/>
+          <p:cNvSpPr/>
+          <p:nvPr/>
+        </p:nvSpPr>
+        <p:spPr>
+          <a:xfrm>
+            <a:off x="548640" y="6144768"/>
+            <a:ext cx="3477768" cy="237744"/>
+          </a:xfrm>
+          <a:prstGeom prst="roundRect">
+            <a:avLst>
+              <a:gd name="adj" fmla="val 20000"/>
+            </a:avLst>
+          </a:prstGeom>
+          <a:solidFill>
+            <a:srgbClr val="E4F4EE"/>
+          </a:solidFill>
+          <a:ln>
+            <a:noFill/>
+          </a:ln>
+          <a:effectLst/>
+        </p:spPr>
+        <p:style>
+          <a:lnRef idx="1">
+            <a:schemeClr val="accent1"/>
+          </a:lnRef>
+          <a:fillRef idx="3">
+            <a:schemeClr val="accent1"/>
+          </a:fillRef>
+          <a:effectRef idx="2">
+            <a:schemeClr val="accent1"/>
+          </a:effectRef>
+          <a:fontRef idx="minor">
+            <a:schemeClr val="lt1"/>
+          </a:fontRef>
+        </p:style>
+        <p:txBody>
+          <a:bodyPr rtlCol="0" anchor="ctr"/>
+          <a:lstStyle/>
+          <a:p/>
+        </p:txBody>
+      </p:sp>
+      <p:sp>
+        <p:nvSpPr>
+          <p:cNvPr id="38" name="OnthulTxt 6"/>
+          <p:cNvSpPr txBox="1"/>
+          <p:nvPr/>
+        </p:nvSpPr>
+        <p:spPr>
+          <a:xfrm>
+            <a:off x="566928" y="6144768"/>
+            <a:ext cx="3441192" cy="237744"/>
+          </a:xfrm>
+          <a:prstGeom prst="rect">
+            <a:avLst/>
+          </a:prstGeom>
+          <a:noFill/>
+        </p:spPr>
+        <p:txBody>
+          <a:bodyPr wrap="square" anchor="ctr" lIns="45720" rIns="45720" tIns="27432" bIns="27432">
+            <a:normAutofit/>
+          </a:bodyPr>
+          <a:lstStyle/>
+          <a:p>
+            <a:pPr algn="l"/>
+            <a:r>
+              <a:rPr sz="850" b="1">
+                <a:solidFill>
+                  <a:srgbClr val="157355"/>
+                </a:solidFill>
+                <a:latin typeface="Inter"/>
+              </a:rPr>
+              <a:t>DIFERENTE — ñ is een eigen letter met een eig…</a:t>
+            </a:r>
+          </a:p>
+        </p:txBody>
+      </p:sp>
+      <p:sp>
+        <p:nvSpPr>
+          <p:cNvPr id="39" name="Tarjeta 7"/>
+          <p:cNvSpPr/>
+          <p:nvPr/>
+        </p:nvSpPr>
+        <p:spPr>
+          <a:xfrm>
+            <a:off x="4264152" y="5266944"/>
+            <a:ext cx="3660648" cy="1170432"/>
+          </a:xfrm>
+          <a:prstGeom prst="roundRect">
+            <a:avLst>
+              <a:gd name="adj" fmla="val 6000"/>
+            </a:avLst>
+          </a:prstGeom>
+          <a:solidFill>
+            <a:srgbClr val="FFFFFF"/>
+          </a:solidFill>
+          <a:ln w="12700">
+            <a:solidFill>
+              <a:srgbClr val="E4E3DE"/>
+            </a:solidFill>
+          </a:ln>
+          <a:effectLst/>
+        </p:spPr>
+        <p:style>
+          <a:lnRef idx="1">
+            <a:schemeClr val="accent1"/>
+          </a:lnRef>
+          <a:fillRef idx="3">
+            <a:schemeClr val="accent1"/>
+          </a:fillRef>
+          <a:effectRef idx="2">
+            <a:schemeClr val="accent1"/>
+          </a:effectRef>
+          <a:fontRef idx="minor">
+            <a:schemeClr val="lt1"/>
+          </a:fontRef>
+        </p:style>
+        <p:txBody>
+          <a:bodyPr rtlCol="0" anchor="ctr"/>
+          <a:lstStyle/>
+          <a:p/>
+        </p:txBody>
+      </p:sp>
+      <p:sp>
+        <p:nvSpPr>
+          <p:cNvPr id="40" name="TarjetaTxt 7"/>
+          <p:cNvSpPr txBox="1"/>
+          <p:nvPr/>
+        </p:nvSpPr>
+        <p:spPr>
+          <a:xfrm>
+            <a:off x="4355592" y="5321808"/>
+            <a:ext cx="3477768" cy="859536"/>
+          </a:xfrm>
+          <a:prstGeom prst="rect">
+            <a:avLst/>
+          </a:prstGeom>
+          <a:noFill/>
+        </p:spPr>
+        <p:txBody>
+          <a:bodyPr wrap="square" anchor="t" lIns="45720" rIns="45720" tIns="27432" bIns="27432">
+            <a:normAutofit/>
+          </a:bodyPr>
+          <a:lstStyle/>
+          <a:p>
+            <a:pPr algn="l"/>
+            <a:r>
+              <a:rPr sz="1100" b="1">
+                <a:solidFill>
+                  <a:srgbClr val="157355"/>
+                </a:solidFill>
+                <a:latin typeface="Bricolage Grotesque"/>
+              </a:rPr>
+              <a:t>LOTE 8 · 20 pts</a:t>
+            </a:r>
+          </a:p>
+          <a:p>
+            <a:pPr algn="l"/>
+            <a:r>
+              <a:rPr sz="1000">
+                <a:solidFill>
+                  <a:srgbClr val="20242E"/>
+                </a:solidFill>
+                <a:latin typeface="Inter"/>
+              </a:rPr>
+              <a:t>casa   ·   caza</a:t>
+            </a:r>
+          </a:p>
+        </p:txBody>
+      </p:sp>
+      <p:sp>
+        <p:nvSpPr>
+          <p:cNvPr id="41" name="Onthul 7"/>
+          <p:cNvSpPr/>
+          <p:nvPr/>
+        </p:nvSpPr>
+        <p:spPr>
+          <a:xfrm>
+            <a:off x="4355592" y="6144768"/>
+            <a:ext cx="3477768" cy="237744"/>
+          </a:xfrm>
+          <a:prstGeom prst="roundRect">
+            <a:avLst>
+              <a:gd name="adj" fmla="val 20000"/>
+            </a:avLst>
+          </a:prstGeom>
+          <a:solidFill>
+            <a:srgbClr val="E4F4EE"/>
+          </a:solidFill>
+          <a:ln>
+            <a:noFill/>
+          </a:ln>
+          <a:effectLst/>
+        </p:spPr>
+        <p:style>
+          <a:lnRef idx="1">
+            <a:schemeClr val="accent1"/>
+          </a:lnRef>
+          <a:fillRef idx="3">
+            <a:schemeClr val="accent1"/>
+          </a:fillRef>
+          <a:effectRef idx="2">
+            <a:schemeClr val="accent1"/>
+          </a:effectRef>
+          <a:fontRef idx="minor">
+            <a:schemeClr val="lt1"/>
+          </a:fontRef>
+        </p:style>
+        <p:txBody>
+          <a:bodyPr rtlCol="0" anchor="ctr"/>
+          <a:lstStyle/>
+          <a:p/>
+        </p:txBody>
+      </p:sp>
+      <p:sp>
+        <p:nvSpPr>
+          <p:cNvPr id="42" name="OnthulTxt 7"/>
+          <p:cNvSpPr txBox="1"/>
+          <p:nvPr/>
+        </p:nvSpPr>
+        <p:spPr>
+          <a:xfrm>
+            <a:off x="4373880" y="6144768"/>
+            <a:ext cx="3441192" cy="237744"/>
+          </a:xfrm>
+          <a:prstGeom prst="rect">
+            <a:avLst/>
+          </a:prstGeom>
+          <a:noFill/>
+        </p:spPr>
+        <p:txBody>
+          <a:bodyPr wrap="square" anchor="ctr" lIns="45720" rIns="45720" tIns="27432" bIns="27432">
+            <a:normAutofit/>
+          </a:bodyPr>
+          <a:lstStyle/>
+          <a:p>
+            <a:pPr algn="l"/>
+            <a:r>
+              <a:rPr sz="850" b="1">
+                <a:solidFill>
+                  <a:srgbClr val="157355"/>
+                </a:solidFill>
+                <a:latin typeface="Inter"/>
+              </a:rPr>
+              <a:t>DIFERENTE — s = s</a:t>
+            </a:r>
+          </a:p>
+        </p:txBody>
+      </p:sp>
+    </p:spTree>
+  </p:cSld>
+  <p:clrMapOvr>
+    <a:masterClrMapping/>
+  </p:clrMapOvr>
+  <p:timing>
+    <p:tnLst>
+      <p:par>
+        <p:cTn id="1" dur="indefinite" restart="never" nodeType="tmRoot">
+          <p:childTnLst>
+            <p:seq concurrent="1" nextAc="seek">
+              <p:cTn id="2" dur="indefinite" nodeType="mainSeq">
+                <p:childTnLst>
+                  <p:par>
+                    <p:cTn id="5" fill="hold">
+                      <p:stCondLst>
+                        <p:cond delay="indefinite"/>
+                      </p:stCondLst>
+                      <p:childTnLst>
+                        <p:par>
+                          <p:cTn id="6" fill="hold">
+                            <p:stCondLst>
+                              <p:cond delay="0"/>
+                            </p:stCondLst>
+                            <p:childTnLst>
+                              <p:par>
+                                <p:cTn id="7" presetID="10" presetClass="entr" presetSubtype="0" fill="hold" grpId="0" nodeType="clickEffect">
+                                  <p:stCondLst>
+                                    <p:cond delay="0"/>
+                                  </p:stCondLst>
+                                  <p:childTnLst>
+                                    <p:set>
+                                      <p:cBhvr>
+                                        <p:cTn id="8" dur="1" fill="hold">
+                                          <p:stCondLst>
+                                            <p:cond delay="0"/>
+                                          </p:stCondLst>
+                                        </p:cTn>
+                                        <p:tgtEl>
+                                          <p:spTgt spid="13"/>
+                                        </p:tgtEl>
+                                        <p:attrNameLst>
+                                          <p:attrName>style.visibility</p:attrName>
+                                        </p:attrNameLst>
+                                      </p:cBhvr>
+                                      <p:to>
+                                        <p:strVal val="visible"/>
+                                      </p:to>
+                                    </p:set>
+                                    <p:animEffect transition="in" filter="fade">
+                                      <p:cBhvr>
+                                        <p:cTn id="9" dur="500"/>
+                                        <p:tgtEl>
+                                          <p:spTgt spid="13"/>
+                                        </p:tgtEl>
+                                      </p:cBhvr>
+                                    </p:animEffect>
+                                  </p:childTnLst>
+                                </p:cTn>
+                              </p:par>
+                            </p:childTnLst>
+                          </p:cTn>
+                        </p:par>
+                      </p:childTnLst>
+                    </p:cTn>
+                  </p:par>
+                  <p:par>
+                    <p:cTn id="10" fill="hold">
+                      <p:stCondLst>
+                        <p:cond delay="indefinite"/>
+                      </p:stCondLst>
+                      <p:childTnLst>
+                        <p:par>
+                          <p:cTn id="11" fill="hold">
+                            <p:stCondLst>
+                              <p:cond delay="0"/>
+                            </p:stCondLst>
+                            <p:childTnLst>
+                              <p:par>
+                                <p:cTn id="12" presetID="10" presetClass="entr" presetSubtype="0" fill="hold" grpId="0" nodeType="clickEffect">
+                                  <p:stCondLst>
+                                    <p:cond delay="0"/>
+                                  </p:stCondLst>
+                                  <p:childTnLst>
+                                    <p:set>
+                                      <p:cBhvr>
+                                        <p:cTn id="13" dur="1" fill="hold">
+                                          <p:stCondLst>
+                                            <p:cond delay="0"/>
+                                          </p:stCondLst>
+                                        </p:cTn>
+                                        <p:tgtEl>
+                                          <p:spTgt spid="14"/>
+                                        </p:tgtEl>
+                                        <p:attrNameLst>
+                                          <p:attrName>style.visibility</p:attrName>
+                                        </p:attrNameLst>
+                                      </p:cBhvr>
+                                      <p:to>
+                                        <p:strVal val="visible"/>
+                                      </p:to>
+                                    </p:set>
+                                    <p:animEffect transition="in" filter="fade">
+                                      <p:cBhvr>
+                                        <p:cTn id="14" dur="500"/>
+                                        <p:tgtEl>
+                                          <p:spTgt spid="14"/>
+                                        </p:tgtEl>
+                                      </p:cBhvr>
+                                    </p:animEffect>
+                                  </p:childTnLst>
+                                </p:cTn>
+                              </p:par>
+                            </p:childTnLst>
+                          </p:cTn>
+                        </p:par>
+                      </p:childTnLst>
+                    </p:cTn>
+                  </p:par>
+                  <p:par>
+                    <p:cTn id="15" fill="hold">
+                      <p:stCondLst>
+                        <p:cond delay="indefinite"/>
+                      </p:stCondLst>
+                      <p:childTnLst>
+                        <p:par>
+                          <p:cTn id="16" fill="hold">
+                            <p:stCondLst>
+                              <p:cond delay="0"/>
+                            </p:stCondLst>
+                            <p:childTnLst>
+                              <p:par>
+                                <p:cTn id="17" presetID="10" presetClass="entr" presetSubtype="0" fill="hold" grpId="0" nodeType="clickEffect">
+                                  <p:stCondLst>
+                                    <p:cond delay="0"/>
+                                  </p:stCondLst>
+                                  <p:childTnLst>
+                                    <p:set>
+                                      <p:cBhvr>
+                                        <p:cTn id="18" dur="1" fill="hold">
+                                          <p:stCondLst>
+                                            <p:cond delay="0"/>
+                                          </p:stCondLst>
+                                        </p:cTn>
+                                        <p:tgtEl>
+                                          <p:spTgt spid="17"/>
+                                        </p:tgtEl>
+                                        <p:attrNameLst>
+                                          <p:attrName>style.visibility</p:attrName>
+                                        </p:attrNameLst>
+                                      </p:cBhvr>
+                                      <p:to>
+                                        <p:strVal val="visible"/>
+                                      </p:to>
+                                    </p:set>
+                                    <p:animEffect transition="in" filter="fade">
+                                      <p:cBhvr>
+                                        <p:cTn id="19" dur="500"/>
+                                        <p:tgtEl>
+                                          <p:spTgt spid="17"/>
+                                        </p:tgtEl>
+                                      </p:cBhvr>
+                                    </p:animEffect>
+                                  </p:childTnLst>
+                                </p:cTn>
+                              </p:par>
+                            </p:childTnLst>
+                          </p:cTn>
+                        </p:par>
+                      </p:childTnLst>
+                    </p:cTn>
+                  </p:par>
+                  <p:par>
+                    <p:cTn id="20" fill="hold">
+                      <p:stCondLst>
+                        <p:cond delay="indefinite"/>
+                      </p:stCondLst>
+                      <p:childTnLst>
+                        <p:par>
+                          <p:cTn id="21" fill="hold">
+                            <p:stCondLst>
+                              <p:cond delay="0"/>
+                            </p:stCondLst>
+                            <p:childTnLst>
+                              <p:par>
+                                <p:cTn id="22" presetID="10" presetClass="entr" presetSubtype="0" fill="hold" grpId="0" nodeType="clickEffect">
+                                  <p:stCondLst>
+                                    <p:cond delay="0"/>
+                                  </p:stCondLst>
+                                  <p:childTnLst>
+                                    <p:set>
+                                      <p:cBhvr>
+                                        <p:cTn id="23" dur="1" fill="hold">
+                                          <p:stCondLst>
+                                            <p:cond delay="0"/>
+                                          </p:stCondLst>
+                                        </p:cTn>
+                                        <p:tgtEl>
+                                          <p:spTgt spid="18"/>
+                                        </p:tgtEl>
+                                        <p:attrNameLst>
+                                          <p:attrName>style.visibility</p:attrName>
+                                        </p:attrNameLst>
+                                      </p:cBhvr>
+                                      <p:to>
+                                        <p:strVal val="visible"/>
+                                      </p:to>
+                                    </p:set>
+                                    <p:animEffect transition="in" filter="fade">
+                                      <p:cBhvr>
+                                        <p:cTn id="24" dur="500"/>
+                                        <p:tgtEl>
+                                          <p:spTgt spid="18"/>
+                                        </p:tgtEl>
+                                      </p:cBhvr>
+                                    </p:animEffect>
+                                  </p:childTnLst>
+                                </p:cTn>
+                              </p:par>
+                            </p:childTnLst>
+                          </p:cTn>
+                        </p:par>
+                      </p:childTnLst>
+                    </p:cTn>
+                  </p:par>
+                  <p:par>
+                    <p:cTn id="25" fill="hold">
+                      <p:stCondLst>
+                        <p:cond delay="indefinite"/>
+                      </p:stCondLst>
+                      <p:childTnLst>
+                        <p:par>
+                          <p:cTn id="26" fill="hold">
+                            <p:stCondLst>
+                              <p:cond delay="0"/>
+                            </p:stCondLst>
+                            <p:childTnLst>
+                              <p:par>
+                                <p:cTn id="27" presetID="10" presetClass="entr" presetSubtype="0" fill="hold" grpId="0" nodeType="clickEffect">
+                                  <p:stCondLst>
+                                    <p:cond delay="0"/>
+                                  </p:stCondLst>
+                                  <p:childTnLst>
+                                    <p:set>
+                                      <p:cBhvr>
+                                        <p:cTn id="28" dur="1" fill="hold">
+                                          <p:stCondLst>
+                                            <p:cond delay="0"/>
+                                          </p:stCondLst>
+                                        </p:cTn>
+                                        <p:tgtEl>
+                                          <p:spTgt spid="21"/>
+                                        </p:tgtEl>
+                                        <p:attrNameLst>
+                                          <p:attrName>style.visibility</p:attrName>
+                                        </p:attrNameLst>
+                                      </p:cBhvr>
+                                      <p:to>
+                                        <p:strVal val="visible"/>
+                                      </p:to>
+                                    </p:set>
+                                    <p:animEffect transition="in" filter="fade">
+                                      <p:cBhvr>
+                                        <p:cTn id="29" dur="500"/>
+                                        <p:tgtEl>
+                                          <p:spTgt spid="21"/>
+                                        </p:tgtEl>
+                                      </p:cBhvr>
+                                    </p:animEffect>
+                                  </p:childTnLst>
+                                </p:cTn>
+                              </p:par>
+                            </p:childTnLst>
+                          </p:cTn>
+                        </p:par>
+                      </p:childTnLst>
+                    </p:cTn>
+                  </p:par>
+                  <p:par>
+                    <p:cTn id="30" fill="hold">
+                      <p:stCondLst>
+                        <p:cond delay="indefinite"/>
+                      </p:stCondLst>
+                      <p:childTnLst>
+                        <p:par>
+                          <p:cTn id="31" fill="hold">
+                            <p:stCondLst>
+                              <p:cond delay="0"/>
+                            </p:stCondLst>
+                            <p:childTnLst>
+                              <p:par>
+                                <p:cTn id="32" presetID="10" presetClass="entr" presetSubtype="0" fill="hold" grpId="0" nodeType="clickEffect">
+                                  <p:stCondLst>
+                                    <p:cond delay="0"/>
+                                  </p:stCondLst>
+                                  <p:childTnLst>
+                                    <p:set>
+                                      <p:cBhvr>
+                                        <p:cTn id="33" dur="1" fill="hold">
+                                          <p:stCondLst>
+                                            <p:cond delay="0"/>
+                                          </p:stCondLst>
+                                        </p:cTn>
+                                        <p:tgtEl>
+                                          <p:spTgt spid="22"/>
+                                        </p:tgtEl>
+                                        <p:attrNameLst>
+                                          <p:attrName>style.visibility</p:attrName>
+                                        </p:attrNameLst>
+                                      </p:cBhvr>
+                                      <p:to>
+                                        <p:strVal val="visible"/>
+                                      </p:to>
+                                    </p:set>
+                                    <p:animEffect transition="in" filter="fade">
+                                      <p:cBhvr>
+                                        <p:cTn id="34" dur="500"/>
+                                        <p:tgtEl>
+                                          <p:spTgt spid="22"/>
+                                        </p:tgtEl>
+                                      </p:cBhvr>
+                                    </p:animEffect>
+                                  </p:childTnLst>
+                                </p:cTn>
+                              </p:par>
+                            </p:childTnLst>
+                          </p:cTn>
+                        </p:par>
+                      </p:childTnLst>
+                    </p:cTn>
+                  </p:par>
+                  <p:par>
+                    <p:cTn id="35" fill="hold">
+                      <p:stCondLst>
+                        <p:cond delay="indefinite"/>
+                      </p:stCondLst>
+                      <p:childTnLst>
+                        <p:par>
+                          <p:cTn id="36" fill="hold">
+                            <p:stCondLst>
+                              <p:cond delay="0"/>
+                            </p:stCondLst>
+                            <p:childTnLst>
+                              <p:par>
+                                <p:cTn id="37" presetID="10" presetClass="entr" presetSubtype="0" fill="hold" grpId="0" nodeType="clickEffect">
+                                  <p:stCondLst>
+                                    <p:cond delay="0"/>
+                                  </p:stCondLst>
+                                  <p:childTnLst>
+                                    <p:set>
+                                      <p:cBhvr>
+                                        <p:cTn id="38" dur="1" fill="hold">
+                                          <p:stCondLst>
+                                            <p:cond delay="0"/>
+                                          </p:stCondLst>
+                                        </p:cTn>
+                                        <p:tgtEl>
+                                          <p:spTgt spid="25"/>
+                                        </p:tgtEl>
+                                        <p:attrNameLst>
+                                          <p:attrName>style.visibility</p:attrName>
+                                        </p:attrNameLst>
+                                      </p:cBhvr>
+                                      <p:to>
+                                        <p:strVal val="visible"/>
+                                      </p:to>
+                                    </p:set>
+                                    <p:animEffect transition="in" filter="fade">
+                                      <p:cBhvr>
+                                        <p:cTn id="39" dur="500"/>
+                                        <p:tgtEl>
+                                          <p:spTgt spid="25"/>
+                                        </p:tgtEl>
+                                      </p:cBhvr>
+                                    </p:animEffect>
+                                  </p:childTnLst>
+                                </p:cTn>
+                              </p:par>
+                            </p:childTnLst>
+                          </p:cTn>
+                        </p:par>
+                      </p:childTnLst>
+                    </p:cTn>
+                  </p:par>
+                  <p:par>
+                    <p:cTn id="40" fill="hold">
+                      <p:stCondLst>
+                        <p:cond delay="indefinite"/>
+                      </p:stCondLst>
+                      <p:childTnLst>
+                        <p:par>
+                          <p:cTn id="41" fill="hold">
+                            <p:stCondLst>
+                              <p:cond delay="0"/>
+                            </p:stCondLst>
+                            <p:childTnLst>
+                              <p:par>
+                                <p:cTn id="42" presetID="10" presetClass="entr" presetSubtype="0" fill="hold" grpId="0" nodeType="clickEffect">
+                                  <p:stCondLst>
+                                    <p:cond delay="0"/>
+                                  </p:stCondLst>
+                                  <p:childTnLst>
+                                    <p:set>
+                                      <p:cBhvr>
+                                        <p:cTn id="43" dur="1" fill="hold">
+                                          <p:stCondLst>
+                                            <p:cond delay="0"/>
+                                          </p:stCondLst>
+                                        </p:cTn>
+                                        <p:tgtEl>
+                                          <p:spTgt spid="26"/>
+                                        </p:tgtEl>
+                                        <p:attrNameLst>
+                                          <p:attrName>style.visibility</p:attrName>
+                                        </p:attrNameLst>
+                                      </p:cBhvr>
+                                      <p:to>
+                                        <p:strVal val="visible"/>
+                                      </p:to>
+                                    </p:set>
+                                    <p:animEffect transition="in" filter="fade">
+                                      <p:cBhvr>
+                                        <p:cTn id="44" dur="500"/>
+                                        <p:tgtEl>
+                                          <p:spTgt spid="26"/>
+                                        </p:tgtEl>
+                                      </p:cBhvr>
+                                    </p:animEffect>
+                                  </p:childTnLst>
+                                </p:cTn>
+                              </p:par>
+                            </p:childTnLst>
+                          </p:cTn>
+                        </p:par>
+                      </p:childTnLst>
+                    </p:cTn>
+                  </p:par>
+                  <p:par>
+                    <p:cTn id="45" fill="hold">
+                      <p:stCondLst>
+                        <p:cond delay="indefinite"/>
+                      </p:stCondLst>
+                      <p:childTnLst>
+                        <p:par>
+                          <p:cTn id="46" fill="hold">
+                            <p:stCondLst>
+                              <p:cond delay="0"/>
+                            </p:stCondLst>
+                            <p:childTnLst>
+                              <p:par>
+                                <p:cTn id="47" presetID="10" presetClass="entr" presetSubtype="0" fill="hold" grpId="0" nodeType="clickEffect">
+                                  <p:stCondLst>
+                                    <p:cond delay="0"/>
+                                  </p:stCondLst>
+                                  <p:childTnLst>
+                                    <p:set>
+                                      <p:cBhvr>
+                                        <p:cTn id="48" dur="1" fill="hold">
+                                          <p:stCondLst>
+                                            <p:cond delay="0"/>
+                                          </p:stCondLst>
+                                        </p:cTn>
+                                        <p:tgtEl>
+                                          <p:spTgt spid="29"/>
+                                        </p:tgtEl>
+                                        <p:attrNameLst>
+                                          <p:attrName>style.visibility</p:attrName>
+                                        </p:attrNameLst>
+                                      </p:cBhvr>
+                                      <p:to>
+                                        <p:strVal val="visible"/>
+                                      </p:to>
+                                    </p:set>
+                                    <p:animEffect transition="in" filter="fade">
+                                      <p:cBhvr>
+                                        <p:cTn id="49" dur="500"/>
+                                        <p:tgtEl>
+                                          <p:spTgt spid="29"/>
+                                        </p:tgtEl>
+                                      </p:cBhvr>
+                                    </p:animEffect>
+                                  </p:childTnLst>
+                                </p:cTn>
+                              </p:par>
+                            </p:childTnLst>
+                          </p:cTn>
+                        </p:par>
+                      </p:childTnLst>
+                    </p:cTn>
+                  </p:par>
+                  <p:par>
+                    <p:cTn id="50" fill="hold">
+                      <p:stCondLst>
+                        <p:cond delay="indefinite"/>
+                      </p:stCondLst>
+                      <p:childTnLst>
+                        <p:par>
+                          <p:cTn id="51" fill="hold">
+                            <p:stCondLst>
+                              <p:cond delay="0"/>
+                            </p:stCondLst>
+                            <p:childTnLst>
+                              <p:par>
+                                <p:cTn id="52" presetID="10" presetClass="entr" presetSubtype="0" fill="hold" grpId="0" nodeType="clickEffect">
+                                  <p:stCondLst>
+                                    <p:cond delay="0"/>
+                                  </p:stCondLst>
+                                  <p:childTnLst>
+                                    <p:set>
+                                      <p:cBhvr>
+                                        <p:cTn id="53" dur="1" fill="hold">
+                                          <p:stCondLst>
+                                            <p:cond delay="0"/>
+                                          </p:stCondLst>
+                                        </p:cTn>
+                                        <p:tgtEl>
+                                          <p:spTgt spid="30"/>
+                                        </p:tgtEl>
+                                        <p:attrNameLst>
+                                          <p:attrName>style.visibility</p:attrName>
+                                        </p:attrNameLst>
+                                      </p:cBhvr>
+                                      <p:to>
+                                        <p:strVal val="visible"/>
+                                      </p:to>
+                                    </p:set>
+                                    <p:animEffect transition="in" filter="fade">
+                                      <p:cBhvr>
+                                        <p:cTn id="54" dur="500"/>
+                                        <p:tgtEl>
+                                          <p:spTgt spid="30"/>
+                                        </p:tgtEl>
+                                      </p:cBhvr>
+                                    </p:animEffect>
+                                  </p:childTnLst>
+                                </p:cTn>
+                              </p:par>
+                            </p:childTnLst>
+                          </p:cTn>
+                        </p:par>
+                      </p:childTnLst>
+                    </p:cTn>
+                  </p:par>
+                  <p:par>
+                    <p:cTn id="55" fill="hold">
+                      <p:stCondLst>
+                        <p:cond delay="indefinite"/>
+                      </p:stCondLst>
+                      <p:childTnLst>
+                        <p:par>
+                          <p:cTn id="56" fill="hold">
+                            <p:stCondLst>
+                              <p:cond delay="0"/>
+                            </p:stCondLst>
+                            <p:childTnLst>
+                              <p:par>
+                                <p:cTn id="57" presetID="10" presetClass="entr" presetSubtype="0" fill="hold" grpId="0" nodeType="clickEffect">
+                                  <p:stCondLst>
+                                    <p:cond delay="0"/>
+                                  </p:stCondLst>
+                                  <p:childTnLst>
+                                    <p:set>
+                                      <p:cBhvr>
+                                        <p:cTn id="58" dur="1" fill="hold">
+                                          <p:stCondLst>
+                                            <p:cond delay="0"/>
+                                          </p:stCondLst>
+                                        </p:cTn>
+                                        <p:tgtEl>
+                                          <p:spTgt spid="33"/>
+                                        </p:tgtEl>
+                                        <p:attrNameLst>
+                                          <p:attrName>style.visibility</p:attrName>
+                                        </p:attrNameLst>
+                                      </p:cBhvr>
+                                      <p:to>
+                                        <p:strVal val="visible"/>
+                                      </p:to>
+                                    </p:set>
+                                    <p:animEffect transition="in" filter="fade">
+                                      <p:cBhvr>
+                                        <p:cTn id="59" dur="500"/>
+                                        <p:tgtEl>
+                                          <p:spTgt spid="33"/>
+                                        </p:tgtEl>
+                                      </p:cBhvr>
+                                    </p:animEffect>
+                                  </p:childTnLst>
+                                </p:cTn>
+                              </p:par>
+                            </p:childTnLst>
+                          </p:cTn>
+                        </p:par>
+                      </p:childTnLst>
+                    </p:cTn>
+                  </p:par>
+                  <p:par>
+                    <p:cTn id="60" fill="hold">
+                      <p:stCondLst>
+                        <p:cond delay="indefinite"/>
+                      </p:stCondLst>
+                      <p:childTnLst>
+                        <p:par>
+                          <p:cTn id="61" fill="hold">
+                            <p:stCondLst>
+                              <p:cond delay="0"/>
+                            </p:stCondLst>
+                            <p:childTnLst>
+                              <p:par>
+                                <p:cTn id="62" presetID="10" presetClass="entr" presetSubtype="0" fill="hold" grpId="0" nodeType="clickEffect">
+                                  <p:stCondLst>
+                                    <p:cond delay="0"/>
+                                  </p:stCondLst>
+                                  <p:childTnLst>
+                                    <p:set>
+                                      <p:cBhvr>
+                                        <p:cTn id="63" dur="1" fill="hold">
+                                          <p:stCondLst>
+                                            <p:cond delay="0"/>
+                                          </p:stCondLst>
+                                        </p:cTn>
+                                        <p:tgtEl>
+                                          <p:spTgt spid="34"/>
+                                        </p:tgtEl>
+                                        <p:attrNameLst>
+                                          <p:attrName>style.visibility</p:attrName>
+                                        </p:attrNameLst>
+                                      </p:cBhvr>
+                                      <p:to>
+                                        <p:strVal val="visible"/>
+                                      </p:to>
+                                    </p:set>
+                                    <p:animEffect transition="in" filter="fade">
+                                      <p:cBhvr>
+                                        <p:cTn id="64" dur="500"/>
+                                        <p:tgtEl>
+                                          <p:spTgt spid="34"/>
+                                        </p:tgtEl>
+                                      </p:cBhvr>
+                                    </p:animEffect>
+                                  </p:childTnLst>
+                                </p:cTn>
+                              </p:par>
+                            </p:childTnLst>
+                          </p:cTn>
+                        </p:par>
+                      </p:childTnLst>
+                    </p:cTn>
+                  </p:par>
+                  <p:par>
+                    <p:cTn id="65" fill="hold">
+                      <p:stCondLst>
+                        <p:cond delay="indefinite"/>
+                      </p:stCondLst>
+                      <p:childTnLst>
+                        <p:par>
+                          <p:cTn id="66" fill="hold">
+                            <p:stCondLst>
+                              <p:cond delay="0"/>
+                            </p:stCondLst>
+                            <p:childTnLst>
+                              <p:par>
+                                <p:cTn id="67" presetID="10" presetClass="entr" presetSubtype="0" fill="hold" grpId="0" nodeType="clickEffect">
+                                  <p:stCondLst>
+                                    <p:cond delay="0"/>
+                                  </p:stCondLst>
+                                  <p:childTnLst>
+                                    <p:set>
+                                      <p:cBhvr>
+                                        <p:cTn id="68" dur="1" fill="hold">
+                                          <p:stCondLst>
+                                            <p:cond delay="0"/>
+                                          </p:stCondLst>
+                                        </p:cTn>
+                                        <p:tgtEl>
+                                          <p:spTgt spid="37"/>
+                                        </p:tgtEl>
+                                        <p:attrNameLst>
+                                          <p:attrName>style.visibility</p:attrName>
+                                        </p:attrNameLst>
+                                      </p:cBhvr>
+                                      <p:to>
+                                        <p:strVal val="visible"/>
+                                      </p:to>
+                                    </p:set>
+                                    <p:animEffect transition="in" filter="fade">
+                                      <p:cBhvr>
+                                        <p:cTn id="69" dur="500"/>
+                                        <p:tgtEl>
+                                          <p:spTgt spid="37"/>
+                                        </p:tgtEl>
+                                      </p:cBhvr>
+                                    </p:animEffect>
+                                  </p:childTnLst>
+                                </p:cTn>
+                              </p:par>
+                            </p:childTnLst>
+                          </p:cTn>
+                        </p:par>
+                      </p:childTnLst>
+                    </p:cTn>
+                  </p:par>
+                  <p:par>
+                    <p:cTn id="70" fill="hold">
+                      <p:stCondLst>
+                        <p:cond delay="indefinite"/>
+                      </p:stCondLst>
+                      <p:childTnLst>
+                        <p:par>
+                          <p:cTn id="71" fill="hold">
+                            <p:stCondLst>
+                              <p:cond delay="0"/>
+                            </p:stCondLst>
+                            <p:childTnLst>
+                              <p:par>
+                                <p:cTn id="72" presetID="10" presetClass="entr" presetSubtype="0" fill="hold" grpId="0" nodeType="clickEffect">
+                                  <p:stCondLst>
+                                    <p:cond delay="0"/>
+                                  </p:stCondLst>
+                                  <p:childTnLst>
+                                    <p:set>
+                                      <p:cBhvr>
+                                        <p:cTn id="73" dur="1" fill="hold">
+                                          <p:stCondLst>
+                                            <p:cond delay="0"/>
+                                          </p:stCondLst>
+                                        </p:cTn>
+                                        <p:tgtEl>
+                                          <p:spTgt spid="38"/>
+                                        </p:tgtEl>
+                                        <p:attrNameLst>
+                                          <p:attrName>style.visibility</p:attrName>
+                                        </p:attrNameLst>
+                                      </p:cBhvr>
+                                      <p:to>
+                                        <p:strVal val="visible"/>
+                                      </p:to>
+                                    </p:set>
+                                    <p:animEffect transition="in" filter="fade">
+                                      <p:cBhvr>
+                                        <p:cTn id="74" dur="500"/>
+                                        <p:tgtEl>
+                                          <p:spTgt spid="38"/>
+                                        </p:tgtEl>
+                                      </p:cBhvr>
+                                    </p:animEffect>
+                                  </p:childTnLst>
+                                </p:cTn>
+                              </p:par>
+                            </p:childTnLst>
+                          </p:cTn>
+                        </p:par>
+                      </p:childTnLst>
+                    </p:cTn>
+                  </p:par>
+                  <p:par>
+                    <p:cTn id="75" fill="hold">
+                      <p:stCondLst>
+                        <p:cond delay="indefinite"/>
+                      </p:stCondLst>
+                      <p:childTnLst>
+                        <p:par>
+                          <p:cTn id="76" fill="hold">
+                            <p:stCondLst>
+                              <p:cond delay="0"/>
+                            </p:stCondLst>
+                            <p:childTnLst>
+                              <p:par>
+                                <p:cTn id="77" presetID="10" presetClass="entr" presetSubtype="0" fill="hold" grpId="0" nodeType="clickEffect">
+                                  <p:stCondLst>
+                                    <p:cond delay="0"/>
+                                  </p:stCondLst>
+                                  <p:childTnLst>
+                                    <p:set>
+                                      <p:cBhvr>
+                                        <p:cTn id="78" dur="1" fill="hold">
+                                          <p:stCondLst>
+                                            <p:cond delay="0"/>
+                                          </p:stCondLst>
+                                        </p:cTn>
+                                        <p:tgtEl>
+                                          <p:spTgt spid="41"/>
+                                        </p:tgtEl>
+                                        <p:attrNameLst>
+                                          <p:attrName>style.visibility</p:attrName>
+                                        </p:attrNameLst>
+                                      </p:cBhvr>
+                                      <p:to>
+                                        <p:strVal val="visible"/>
+                                      </p:to>
+                                    </p:set>
+                                    <p:animEffect transition="in" filter="fade">
+                                      <p:cBhvr>
+                                        <p:cTn id="79" dur="500"/>
+                                        <p:tgtEl>
+                                          <p:spTgt spid="41"/>
+                                        </p:tgtEl>
+                                      </p:cBhvr>
+                                    </p:animEffect>
+                                  </p:childTnLst>
+                                </p:cTn>
+                              </p:par>
+                            </p:childTnLst>
+                          </p:cTn>
+                        </p:par>
+                      </p:childTnLst>
+                    </p:cTn>
+                  </p:par>
+                  <p:par>
+                    <p:cTn id="80" fill="hold">
+                      <p:stCondLst>
+                        <p:cond delay="indefinite"/>
+                      </p:stCondLst>
+                      <p:childTnLst>
+                        <p:par>
+                          <p:cTn id="81" fill="hold">
+                            <p:stCondLst>
+                              <p:cond delay="0"/>
+                            </p:stCondLst>
+                            <p:childTnLst>
+                              <p:par>
+                                <p:cTn id="82" presetID="10" presetClass="entr" presetSubtype="0" fill="hold" grpId="0" nodeType="clickEffect">
+                                  <p:stCondLst>
+                                    <p:cond delay="0"/>
+                                  </p:stCondLst>
+                                  <p:childTnLst>
+                                    <p:set>
+                                      <p:cBhvr>
+                                        <p:cTn id="83" dur="1" fill="hold">
+                                          <p:stCondLst>
+                                            <p:cond delay="0"/>
+                                          </p:stCondLst>
+                                        </p:cTn>
+                                        <p:tgtEl>
+                                          <p:spTgt spid="42"/>
+                                        </p:tgtEl>
+                                        <p:attrNameLst>
+                                          <p:attrName>style.visibility</p:attrName>
+                                        </p:attrNameLst>
+                                      </p:cBhvr>
+                                      <p:to>
+                                        <p:strVal val="visible"/>
+                                      </p:to>
+                                    </p:set>
+                                    <p:animEffect transition="in" filter="fade">
+                                      <p:cBhvr>
+                                        <p:cTn id="84" dur="500"/>
+                                        <p:tgtEl>
+                                          <p:spTgt spid="42"/>
+                                        </p:tgtEl>
+                                      </p:cBhvr>
+                                    </p:animEffect>
+                                  </p:childTnLst>
+                                </p:cTn>
+                              </p:par>
+                            </p:childTnLst>
+                          </p:cTn>
+                        </p:par>
+                      </p:childTnLst>
+                    </p:cTn>
+                  </p:par>
+                </p:childTnLst>
+              </p:cTn>
+              <p:prevCondLst>
+                <p:cond evt="onPrev" delay="0">
+                  <p:tgtEl>
+                    <p:sldTgt/>
+                  </p:tgtEl>
+                </p:cond>
+              </p:prevCondLst>
+              <p:nextCondLst>
+                <p:cond evt="onNext" delay="0">
+                  <p:tgtEl>
+                    <p:sldTgt/>
+                  </p:tgtEl>
+                </p:cond>
+              </p:nextCondLst>
+            </p:seq>
+          </p:childTnLst>
+        </p:cTn>
+      </p:par>
+    </p:tnLst>
+  </p:timing>
+</p:sld>
+</file>
+
+<file path=ppt/slides/slide24.xml><?xml version="1.0" encoding="utf-8"?>
+<p:sld xmlns:a="http://schemas.openxmlformats.org/drawingml/2006/main" xmlns:p="http://schemas.openxmlformats.org/presentationml/2006/main" xmlns:r="http://schemas.openxmlformats.org/officeDocument/2006/relationships">
+  <p:cSld>
+    <p:spTree>
+      <p:nvGrpSpPr>
+        <p:cNvPr id="1" name=""/>
+        <p:cNvGrpSpPr/>
+        <p:nvPr/>
+      </p:nvGrpSpPr>
+      <p:grpSpPr/>
+      <p:sp>
+        <p:nvSpPr>
+          <p:cNvPr id="2" name="Fondo"/>
+          <p:cNvSpPr/>
+          <p:nvPr/>
+        </p:nvSpPr>
+        <p:spPr>
+          <a:xfrm>
+            <a:off x="0" y="0"/>
+            <a:ext cx="12191695" cy="6858000"/>
+          </a:xfrm>
+          <a:prstGeom prst="rect">
+            <a:avLst/>
+          </a:prstGeom>
+          <a:solidFill>
+            <a:srgbClr val="FCFBF8"/>
+          </a:solidFill>
+          <a:ln>
+            <a:noFill/>
+          </a:ln>
+          <a:effectLst/>
+        </p:spPr>
+        <p:style>
+          <a:lnRef idx="1">
+            <a:schemeClr val="accent1"/>
+          </a:lnRef>
+          <a:fillRef idx="3">
+            <a:schemeClr val="accent1"/>
+          </a:fillRef>
+          <a:effectRef idx="2">
+            <a:schemeClr val="accent1"/>
+          </a:effectRef>
+          <a:fontRef idx="minor">
+            <a:schemeClr val="lt1"/>
+          </a:fontRef>
+        </p:style>
+        <p:txBody>
+          <a:bodyPr rtlCol="0" anchor="ctr"/>
+          <a:lstStyle/>
+          <a:p/>
+        </p:txBody>
+      </p:sp>
+      <p:sp>
+        <p:nvSpPr>
+          <p:cNvPr id="3" name="Cabecera"/>
+          <p:cNvSpPr/>
+          <p:nvPr/>
+        </p:nvSpPr>
+        <p:spPr>
+          <a:xfrm>
+            <a:off x="0" y="0"/>
+            <a:ext cx="12191695" cy="1078992"/>
+          </a:xfrm>
+          <a:prstGeom prst="rect">
+            <a:avLst/>
+          </a:prstGeom>
+          <a:solidFill>
+            <a:srgbClr val="1E9E74"/>
+          </a:solidFill>
+          <a:ln>
+            <a:noFill/>
+          </a:ln>
+          <a:effectLst/>
+        </p:spPr>
+        <p:style>
+          <a:lnRef idx="1">
+            <a:schemeClr val="accent1"/>
+          </a:lnRef>
+          <a:fillRef idx="3">
+            <a:schemeClr val="accent1"/>
+          </a:fillRef>
+          <a:effectRef idx="2">
+            <a:schemeClr val="accent1"/>
+          </a:effectRef>
+          <a:fontRef idx="minor">
+            <a:schemeClr val="lt1"/>
+          </a:fontRef>
+        </p:style>
+        <p:txBody>
+          <a:bodyPr rtlCol="0" anchor="ctr"/>
+          <a:lstStyle/>
+          <a:p/>
+        </p:txBody>
+      </p:sp>
+      <p:sp>
+        <p:nvSpPr>
+          <p:cNvPr id="4" name="Chip"/>
+          <p:cNvSpPr/>
+          <p:nvPr/>
+        </p:nvSpPr>
+        <p:spPr>
+          <a:xfrm>
+            <a:off x="457200" y="182880"/>
+            <a:ext cx="3017520" cy="292608"/>
+          </a:xfrm>
+          <a:prstGeom prst="roundRect">
+            <a:avLst>
+              <a:gd name="adj" fmla="val 50000"/>
+            </a:avLst>
+          </a:prstGeom>
+          <a:solidFill>
+            <a:srgbClr val="FFFFFF"/>
+          </a:solidFill>
+          <a:ln>
+            <a:noFill/>
+          </a:ln>
+          <a:effectLst/>
+        </p:spPr>
+        <p:style>
+          <a:lnRef idx="1">
+            <a:schemeClr val="accent1"/>
+          </a:lnRef>
+          <a:fillRef idx="3">
+            <a:schemeClr val="accent1"/>
+          </a:fillRef>
+          <a:effectRef idx="2">
+            <a:schemeClr val="accent1"/>
+          </a:effectRef>
+          <a:fontRef idx="minor">
+            <a:schemeClr val="lt1"/>
+          </a:fontRef>
+        </p:style>
+        <p:txBody>
+          <a:bodyPr rtlCol="0" anchor="ctr"/>
+          <a:lstStyle/>
+          <a:p/>
+        </p:txBody>
+      </p:sp>
+      <p:sp>
+        <p:nvSpPr>
+          <p:cNvPr id="5" name="ChipTxt"/>
+          <p:cNvSpPr txBox="1"/>
+          <p:nvPr/>
+        </p:nvSpPr>
+        <p:spPr>
+          <a:xfrm>
+            <a:off x="457200" y="173736"/>
+            <a:ext cx="3017520" cy="310896"/>
+          </a:xfrm>
+          <a:prstGeom prst="rect">
+            <a:avLst/>
+          </a:prstGeom>
+          <a:noFill/>
+        </p:spPr>
+        <p:txBody>
+          <a:bodyPr wrap="square" anchor="ctr" lIns="45720" rIns="45720" tIns="27432" bIns="27432">
+            <a:normAutofit/>
+          </a:bodyPr>
+          <a:lstStyle/>
+          <a:p>
+            <a:pPr algn="ctr"/>
+            <a:r>
+              <a:rPr sz="950" b="1">
+                <a:solidFill>
+                  <a:srgbClr val="157355"/>
+                </a:solidFill>
+                <a:latin typeface="Inter"/>
+              </a:rPr>
+              <a:t>RETO 5 · PUZZEL &amp; ESCAPE</a:t>
+            </a:r>
+          </a:p>
+        </p:txBody>
+      </p:sp>
+      <p:sp>
+        <p:nvSpPr>
+          <p:cNvPr id="6" name="Titulo"/>
+          <p:cNvSpPr txBox="1"/>
+          <p:nvPr/>
+        </p:nvSpPr>
+        <p:spPr>
+          <a:xfrm>
+            <a:off x="457200" y="502920"/>
+            <a:ext cx="8412480" cy="475488"/>
+          </a:xfrm>
+          <a:prstGeom prst="rect">
+            <a:avLst/>
+          </a:prstGeom>
+          <a:noFill/>
+        </p:spPr>
+        <p:txBody>
+          <a:bodyPr wrap="square" anchor="t" lIns="45720" rIns="45720" tIns="27432" bIns="27432">
+            <a:normAutofit/>
+          </a:bodyPr>
+          <a:lstStyle/>
+          <a:p>
+            <a:pPr algn="l"/>
+            <a:r>
+              <a:rPr sz="2700" b="1">
+                <a:solidFill>
+                  <a:srgbClr val="FFFFFF"/>
+                </a:solidFill>
+                <a:latin typeface="Bricolage Grotesque"/>
+              </a:rPr>
+              <a:t>La tilde en el semáforo</a:t>
+            </a:r>
+          </a:p>
+        </p:txBody>
+      </p:sp>
+      <p:sp>
+        <p:nvSpPr>
+          <p:cNvPr id="7" name="Badges"/>
+          <p:cNvSpPr txBox="1"/>
+          <p:nvPr/>
+        </p:nvSpPr>
+        <p:spPr>
+          <a:xfrm>
+            <a:off x="9052560" y="256032"/>
+            <a:ext cx="2651760" cy="640080"/>
+          </a:xfrm>
+          <a:prstGeom prst="rect">
+            <a:avLst/>
+          </a:prstGeom>
+          <a:noFill/>
+        </p:spPr>
+        <p:txBody>
+          <a:bodyPr wrap="square" anchor="t" lIns="45720" rIns="45720" tIns="27432" bIns="27432">
+            <a:normAutofit/>
+          </a:bodyPr>
+          <a:lstStyle/>
+          <a:p>
+            <a:pPr algn="r"/>
+            <a:r>
+              <a:rPr sz="1000">
+                <a:solidFill>
+                  <a:srgbClr val="E4F4EE"/>
+                </a:solidFill>
+                <a:latin typeface="Inter"/>
+              </a:rPr>
+              <a:t>🏫 Toda la clase · de pie</a:t>
+            </a:r>
+          </a:p>
+          <a:p>
+            <a:pPr algn="r"/>
+            <a:r>
+              <a:rPr sz="1000">
+                <a:solidFill>
+                  <a:srgbClr val="E4F4EE"/>
+                </a:solidFill>
+                <a:latin typeface="Inter"/>
+              </a:rPr>
+              <a:t>± 10 min · ★★☆</a:t>
+            </a:r>
+          </a:p>
+        </p:txBody>
+      </p:sp>
+      <p:sp>
+        <p:nvSpPr>
+          <p:cNvPr id="8" name="Gancho"/>
+          <p:cNvSpPr txBox="1"/>
+          <p:nvPr/>
+        </p:nvSpPr>
+        <p:spPr>
+          <a:xfrm>
+            <a:off x="457200" y="1225296"/>
+            <a:ext cx="11274552" cy="566928"/>
+          </a:xfrm>
+          <a:prstGeom prst="rect">
+            <a:avLst/>
+          </a:prstGeom>
+          <a:noFill/>
+        </p:spPr>
+        <p:txBody>
+          <a:bodyPr wrap="square" anchor="t" lIns="45720" rIns="45720" tIns="27432" bIns="27432">
+            <a:normAutofit/>
+          </a:bodyPr>
+          <a:lstStyle/>
+          <a:p>
+            <a:pPr algn="l"/>
+            <a:r>
+              <a:rPr sz="1600" b="1">
+                <a:solidFill>
+                  <a:srgbClr val="157355"/>
+                </a:solidFill>
+                <a:latin typeface="Bricolage Grotesque"/>
+              </a:rPr>
+              <a:t>De pie. La clase es un semáforo: izquierda, centro, derecha.</a:t>
+            </a:r>
+          </a:p>
+          <a:p>
+            <a:pPr algn="l"/>
+            <a:r>
+              <a:rPr sz="1100" i="1">
+                <a:solidFill>
+                  <a:srgbClr val="6A6E78"/>
+                </a:solidFill>
+                <a:latin typeface="Inter"/>
+              </a:rPr>
+              <a:t>Rechtstaan. De klas is een verkeerslicht: links, midden, rechts.</a:t>
+            </a:r>
+          </a:p>
+        </p:txBody>
+      </p:sp>
+      <p:sp>
+        <p:nvSpPr>
+          <p:cNvPr id="9" name="ReglaCaja"/>
+          <p:cNvSpPr/>
+          <p:nvPr/>
+        </p:nvSpPr>
+        <p:spPr>
+          <a:xfrm>
+            <a:off x="457200" y="1847088"/>
+            <a:ext cx="11274552" cy="658368"/>
+          </a:xfrm>
+          <a:prstGeom prst="roundRect">
+            <a:avLst>
+              <a:gd name="adj" fmla="val 5000"/>
+            </a:avLst>
+          </a:prstGeom>
+          <a:solidFill>
+            <a:srgbClr val="FBF3D6"/>
+          </a:solidFill>
+          <a:ln>
+            <a:noFill/>
+          </a:ln>
+          <a:effectLst/>
+        </p:spPr>
+        <p:style>
+          <a:lnRef idx="1">
+            <a:schemeClr val="accent1"/>
+          </a:lnRef>
+          <a:fillRef idx="3">
+            <a:schemeClr val="accent1"/>
+          </a:fillRef>
+          <a:effectRef idx="2">
+            <a:schemeClr val="accent1"/>
+          </a:effectRef>
+          <a:fontRef idx="minor">
+            <a:schemeClr val="lt1"/>
+          </a:fontRef>
+        </p:style>
+        <p:txBody>
+          <a:bodyPr rtlCol="0" anchor="ctr"/>
+          <a:lstStyle/>
+          <a:p/>
+        </p:txBody>
+      </p:sp>
+      <p:sp>
+        <p:nvSpPr>
+          <p:cNvPr id="10" name="ReglaTxt"/>
+          <p:cNvSpPr txBox="1"/>
+          <p:nvPr/>
+        </p:nvSpPr>
+        <p:spPr>
+          <a:xfrm>
+            <a:off x="603504" y="1883664"/>
+            <a:ext cx="10972800" cy="585216"/>
+          </a:xfrm>
+          <a:prstGeom prst="rect">
+            <a:avLst/>
+          </a:prstGeom>
+          <a:noFill/>
+        </p:spPr>
+        <p:txBody>
+          <a:bodyPr wrap="square" anchor="t" lIns="45720" rIns="45720" tIns="27432" bIns="27432">
+            <a:normAutofit/>
+          </a:bodyPr>
+          <a:lstStyle/>
+          <a:p>
+            <a:pPr algn="l"/>
+            <a:r>
+              <a:rPr sz="850" b="1">
+                <a:solidFill>
+                  <a:srgbClr val="B7860B"/>
+                </a:solidFill>
+                <a:latin typeface="Inter"/>
+              </a:rPr>
+              <a:t>LA REGLA DEL RETO</a:t>
+            </a:r>
+          </a:p>
+          <a:p>
+            <a:pPr algn="l"/>
+            <a:r>
+              <a:rPr sz="1100">
+                <a:solidFill>
+                  <a:srgbClr val="20242E"/>
+                </a:solidFill>
+                <a:latin typeface="Inter"/>
+              </a:rPr>
+              <a:t>Je beslist op wat je hóórt, niet op wat je ziet — het woord staat pas op het scherm ná de beslissing. Wie te laat is, gaat zitten.</a:t>
+            </a:r>
+          </a:p>
+        </p:txBody>
+      </p:sp>
+      <p:sp>
+        <p:nvSpPr>
+          <p:cNvPr id="11" name="Tarjeta 0"/>
+          <p:cNvSpPr/>
+          <p:nvPr/>
+        </p:nvSpPr>
+        <p:spPr>
+          <a:xfrm>
+            <a:off x="457200" y="2670048"/>
+            <a:ext cx="2708910" cy="898398"/>
+          </a:xfrm>
+          <a:prstGeom prst="roundRect">
+            <a:avLst>
+              <a:gd name="adj" fmla="val 6000"/>
+            </a:avLst>
+          </a:prstGeom>
+          <a:solidFill>
+            <a:srgbClr val="FFFFFF"/>
+          </a:solidFill>
+          <a:ln w="12700">
+            <a:solidFill>
+              <a:srgbClr val="E4E3DE"/>
+            </a:solidFill>
+          </a:ln>
+          <a:effectLst/>
+        </p:spPr>
+        <p:style>
+          <a:lnRef idx="1">
+            <a:schemeClr val="accent1"/>
+          </a:lnRef>
+          <a:fillRef idx="3">
+            <a:schemeClr val="accent1"/>
+          </a:fillRef>
+          <a:effectRef idx="2">
+            <a:schemeClr val="accent1"/>
+          </a:effectRef>
+          <a:fontRef idx="minor">
+            <a:schemeClr val="lt1"/>
+          </a:fontRef>
+        </p:style>
+        <p:txBody>
+          <a:bodyPr rtlCol="0" anchor="ctr"/>
+          <a:lstStyle/>
+          <a:p/>
+        </p:txBody>
+      </p:sp>
+      <p:sp>
+        <p:nvSpPr>
+          <p:cNvPr id="12" name="TarjetaTxt 0"/>
+          <p:cNvSpPr txBox="1"/>
+          <p:nvPr/>
+        </p:nvSpPr>
+        <p:spPr>
+          <a:xfrm>
+            <a:off x="548640" y="2724912"/>
+            <a:ext cx="2526030" cy="587502"/>
+          </a:xfrm>
+          <a:prstGeom prst="rect">
+            <a:avLst/>
+          </a:prstGeom>
+          <a:noFill/>
+        </p:spPr>
+        <p:txBody>
+          <a:bodyPr wrap="square" anchor="t" lIns="45720" rIns="45720" tIns="27432" bIns="27432">
+            <a:normAutofit/>
+          </a:bodyPr>
+          <a:lstStyle/>
+          <a:p>
+            <a:pPr algn="l"/>
+            <a:r>
+              <a:rPr sz="1100" b="1">
+                <a:solidFill>
+                  <a:srgbClr val="157355"/>
+                </a:solidFill>
+                <a:latin typeface="Bricolage Grotesque"/>
+              </a:rPr>
+              <a:t>café</a:t>
+            </a:r>
+          </a:p>
+        </p:txBody>
+      </p:sp>
+      <p:sp>
+        <p:nvSpPr>
+          <p:cNvPr id="13" name="Onthul 0"/>
+          <p:cNvSpPr/>
+          <p:nvPr/>
+        </p:nvSpPr>
+        <p:spPr>
+          <a:xfrm>
+            <a:off x="548640" y="3275838"/>
+            <a:ext cx="2526030" cy="237744"/>
+          </a:xfrm>
+          <a:prstGeom prst="roundRect">
+            <a:avLst>
+              <a:gd name="adj" fmla="val 20000"/>
+            </a:avLst>
+          </a:prstGeom>
+          <a:solidFill>
+            <a:srgbClr val="E4F4EE"/>
+          </a:solidFill>
+          <a:ln>
+            <a:noFill/>
+          </a:ln>
+          <a:effectLst/>
+        </p:spPr>
+        <p:style>
+          <a:lnRef idx="1">
+            <a:schemeClr val="accent1"/>
+          </a:lnRef>
+          <a:fillRef idx="3">
+            <a:schemeClr val="accent1"/>
+          </a:fillRef>
+          <a:effectRef idx="2">
+            <a:schemeClr val="accent1"/>
+          </a:effectRef>
+          <a:fontRef idx="minor">
+            <a:schemeClr val="lt1"/>
+          </a:fontRef>
+        </p:style>
+        <p:txBody>
+          <a:bodyPr rtlCol="0" anchor="ctr"/>
+          <a:lstStyle/>
+          <a:p/>
+        </p:txBody>
+      </p:sp>
+      <p:sp>
+        <p:nvSpPr>
+          <p:cNvPr id="14" name="OnthulTxt 0"/>
+          <p:cNvSpPr txBox="1"/>
+          <p:nvPr/>
+        </p:nvSpPr>
+        <p:spPr>
+          <a:xfrm>
+            <a:off x="566928" y="3275838"/>
+            <a:ext cx="2489454" cy="237744"/>
+          </a:xfrm>
+          <a:prstGeom prst="rect">
+            <a:avLst/>
+          </a:prstGeom>
+          <a:noFill/>
+        </p:spPr>
+        <p:txBody>
+          <a:bodyPr wrap="square" anchor="ctr" lIns="45720" rIns="45720" tIns="27432" bIns="27432">
+            <a:normAutofit/>
+          </a:bodyPr>
+          <a:lstStyle/>
+          <a:p>
+            <a:pPr algn="l"/>
+            <a:r>
+              <a:rPr sz="850" b="1">
+                <a:solidFill>
+                  <a:srgbClr val="157355"/>
+                </a:solidFill>
+                <a:latin typeface="Inter"/>
+              </a:rPr>
+              <a:t>aguda — «fé»</a:t>
+            </a:r>
+          </a:p>
+        </p:txBody>
+      </p:sp>
+      <p:sp>
+        <p:nvSpPr>
+          <p:cNvPr id="15" name="Tarjeta 1"/>
+          <p:cNvSpPr/>
+          <p:nvPr/>
+        </p:nvSpPr>
+        <p:spPr>
+          <a:xfrm>
+            <a:off x="3312414" y="2670048"/>
+            <a:ext cx="2708910" cy="898398"/>
+          </a:xfrm>
+          <a:prstGeom prst="roundRect">
+            <a:avLst>
+              <a:gd name="adj" fmla="val 6000"/>
+            </a:avLst>
+          </a:prstGeom>
+          <a:solidFill>
+            <a:srgbClr val="FFFFFF"/>
+          </a:solidFill>
+          <a:ln w="12700">
+            <a:solidFill>
+              <a:srgbClr val="E4E3DE"/>
+            </a:solidFill>
+          </a:ln>
+          <a:effectLst/>
+        </p:spPr>
+        <p:style>
+          <a:lnRef idx="1">
+            <a:schemeClr val="accent1"/>
+          </a:lnRef>
+          <a:fillRef idx="3">
+            <a:schemeClr val="accent1"/>
+          </a:fillRef>
+          <a:effectRef idx="2">
+            <a:schemeClr val="accent1"/>
+          </a:effectRef>
+          <a:fontRef idx="minor">
+            <a:schemeClr val="lt1"/>
+          </a:fontRef>
+        </p:style>
+        <p:txBody>
+          <a:bodyPr rtlCol="0" anchor="ctr"/>
+          <a:lstStyle/>
+          <a:p/>
+        </p:txBody>
+      </p:sp>
+      <p:sp>
+        <p:nvSpPr>
+          <p:cNvPr id="16" name="TarjetaTxt 1"/>
+          <p:cNvSpPr txBox="1"/>
+          <p:nvPr/>
+        </p:nvSpPr>
+        <p:spPr>
+          <a:xfrm>
+            <a:off x="3403854" y="2724912"/>
+            <a:ext cx="2526030" cy="587502"/>
+          </a:xfrm>
+          <a:prstGeom prst="rect">
+            <a:avLst/>
+          </a:prstGeom>
+          <a:noFill/>
+        </p:spPr>
+        <p:txBody>
+          <a:bodyPr wrap="square" anchor="t" lIns="45720" rIns="45720" tIns="27432" bIns="27432">
+            <a:normAutofit/>
+          </a:bodyPr>
+          <a:lstStyle/>
+          <a:p>
+            <a:pPr algn="l"/>
+            <a:r>
+              <a:rPr sz="1100" b="1">
+                <a:solidFill>
+                  <a:srgbClr val="157355"/>
+                </a:solidFill>
+                <a:latin typeface="Bricolage Grotesque"/>
+              </a:rPr>
+              <a:t>casa</a:t>
+            </a:r>
+          </a:p>
+        </p:txBody>
+      </p:sp>
+      <p:sp>
+        <p:nvSpPr>
+          <p:cNvPr id="17" name="Onthul 1"/>
+          <p:cNvSpPr/>
+          <p:nvPr/>
+        </p:nvSpPr>
+        <p:spPr>
+          <a:xfrm>
+            <a:off x="3403854" y="3275838"/>
+            <a:ext cx="2526030" cy="237744"/>
+          </a:xfrm>
+          <a:prstGeom prst="roundRect">
+            <a:avLst>
+              <a:gd name="adj" fmla="val 20000"/>
+            </a:avLst>
+          </a:prstGeom>
+          <a:solidFill>
+            <a:srgbClr val="E4F4EE"/>
+          </a:solidFill>
+          <a:ln>
+            <a:noFill/>
+          </a:ln>
+          <a:effectLst/>
+        </p:spPr>
+        <p:style>
+          <a:lnRef idx="1">
+            <a:schemeClr val="accent1"/>
+          </a:lnRef>
+          <a:fillRef idx="3">
+            <a:schemeClr val="accent1"/>
+          </a:fillRef>
+          <a:effectRef idx="2">
+            <a:schemeClr val="accent1"/>
+          </a:effectRef>
+          <a:fontRef idx="minor">
+            <a:schemeClr val="lt1"/>
+          </a:fontRef>
+        </p:style>
+        <p:txBody>
+          <a:bodyPr rtlCol="0" anchor="ctr"/>
+          <a:lstStyle/>
+          <a:p/>
+        </p:txBody>
+      </p:sp>
+      <p:sp>
+        <p:nvSpPr>
+          <p:cNvPr id="18" name="OnthulTxt 1"/>
+          <p:cNvSpPr txBox="1"/>
+          <p:nvPr/>
+        </p:nvSpPr>
+        <p:spPr>
+          <a:xfrm>
+            <a:off x="3422142" y="3275838"/>
+            <a:ext cx="2489454" cy="237744"/>
+          </a:xfrm>
+          <a:prstGeom prst="rect">
+            <a:avLst/>
+          </a:prstGeom>
+          <a:noFill/>
+        </p:spPr>
+        <p:txBody>
+          <a:bodyPr wrap="square" anchor="ctr" lIns="45720" rIns="45720" tIns="27432" bIns="27432">
+            <a:normAutofit/>
+          </a:bodyPr>
+          <a:lstStyle/>
+          <a:p>
+            <a:pPr algn="l"/>
+            <a:r>
+              <a:rPr sz="850" b="1">
+                <a:solidFill>
+                  <a:srgbClr val="157355"/>
+                </a:solidFill>
+                <a:latin typeface="Inter"/>
+              </a:rPr>
+              <a:t>llana — «ca»</a:t>
+            </a:r>
+          </a:p>
+        </p:txBody>
+      </p:sp>
+      <p:sp>
+        <p:nvSpPr>
+          <p:cNvPr id="19" name="Tarjeta 2"/>
+          <p:cNvSpPr/>
+          <p:nvPr/>
+        </p:nvSpPr>
+        <p:spPr>
+          <a:xfrm>
+            <a:off x="6167628" y="2670048"/>
+            <a:ext cx="2708910" cy="898398"/>
+          </a:xfrm>
+          <a:prstGeom prst="roundRect">
+            <a:avLst>
+              <a:gd name="adj" fmla="val 6000"/>
+            </a:avLst>
+          </a:prstGeom>
+          <a:solidFill>
+            <a:srgbClr val="FFFFFF"/>
+          </a:solidFill>
+          <a:ln w="12700">
+            <a:solidFill>
+              <a:srgbClr val="E4E3DE"/>
+            </a:solidFill>
+          </a:ln>
+          <a:effectLst/>
+        </p:spPr>
+        <p:style>
+          <a:lnRef idx="1">
+            <a:schemeClr val="accent1"/>
+          </a:lnRef>
+          <a:fillRef idx="3">
+            <a:schemeClr val="accent1"/>
+          </a:fillRef>
+          <a:effectRef idx="2">
+            <a:schemeClr val="accent1"/>
+          </a:effectRef>
+          <a:fontRef idx="minor">
+            <a:schemeClr val="lt1"/>
+          </a:fontRef>
+        </p:style>
+        <p:txBody>
+          <a:bodyPr rtlCol="0" anchor="ctr"/>
+          <a:lstStyle/>
+          <a:p/>
+        </p:txBody>
+      </p:sp>
+      <p:sp>
+        <p:nvSpPr>
+          <p:cNvPr id="20" name="TarjetaTxt 2"/>
+          <p:cNvSpPr txBox="1"/>
+          <p:nvPr/>
+        </p:nvSpPr>
+        <p:spPr>
+          <a:xfrm>
+            <a:off x="6259068" y="2724912"/>
+            <a:ext cx="2526030" cy="587502"/>
+          </a:xfrm>
+          <a:prstGeom prst="rect">
+            <a:avLst/>
+          </a:prstGeom>
+          <a:noFill/>
+        </p:spPr>
+        <p:txBody>
+          <a:bodyPr wrap="square" anchor="t" lIns="45720" rIns="45720" tIns="27432" bIns="27432">
+            <a:normAutofit/>
+          </a:bodyPr>
+          <a:lstStyle/>
+          <a:p>
+            <a:pPr algn="l"/>
+            <a:r>
+              <a:rPr sz="1100" b="1">
+                <a:solidFill>
+                  <a:srgbClr val="157355"/>
+                </a:solidFill>
+                <a:latin typeface="Bricolage Grotesque"/>
+              </a:rPr>
+              <a:t>México</a:t>
+            </a:r>
+          </a:p>
+        </p:txBody>
+      </p:sp>
+      <p:sp>
+        <p:nvSpPr>
+          <p:cNvPr id="21" name="Onthul 2"/>
+          <p:cNvSpPr/>
+          <p:nvPr/>
+        </p:nvSpPr>
+        <p:spPr>
+          <a:xfrm>
+            <a:off x="6259068" y="3275838"/>
+            <a:ext cx="2526030" cy="237744"/>
+          </a:xfrm>
+          <a:prstGeom prst="roundRect">
+            <a:avLst>
+              <a:gd name="adj" fmla="val 20000"/>
+            </a:avLst>
+          </a:prstGeom>
+          <a:solidFill>
+            <a:srgbClr val="E4F4EE"/>
+          </a:solidFill>
+          <a:ln>
+            <a:noFill/>
+          </a:ln>
+          <a:effectLst/>
+        </p:spPr>
+        <p:style>
+          <a:lnRef idx="1">
+            <a:schemeClr val="accent1"/>
+          </a:lnRef>
+          <a:fillRef idx="3">
+            <a:schemeClr val="accent1"/>
+          </a:fillRef>
+          <a:effectRef idx="2">
+            <a:schemeClr val="accent1"/>
+          </a:effectRef>
+          <a:fontRef idx="minor">
+            <a:schemeClr val="lt1"/>
+          </a:fontRef>
+        </p:style>
+        <p:txBody>
+          <a:bodyPr rtlCol="0" anchor="ctr"/>
+          <a:lstStyle/>
+          <a:p/>
+        </p:txBody>
+      </p:sp>
+      <p:sp>
+        <p:nvSpPr>
+          <p:cNvPr id="22" name="OnthulTxt 2"/>
+          <p:cNvSpPr txBox="1"/>
+          <p:nvPr/>
+        </p:nvSpPr>
+        <p:spPr>
+          <a:xfrm>
+            <a:off x="6277356" y="3275838"/>
+            <a:ext cx="2489454" cy="237744"/>
+          </a:xfrm>
+          <a:prstGeom prst="rect">
+            <a:avLst/>
+          </a:prstGeom>
+          <a:noFill/>
+        </p:spPr>
+        <p:txBody>
+          <a:bodyPr wrap="square" anchor="ctr" lIns="45720" rIns="45720" tIns="27432" bIns="27432">
+            <a:normAutofit/>
+          </a:bodyPr>
+          <a:lstStyle/>
+          <a:p>
+            <a:pPr algn="l"/>
+            <a:r>
+              <a:rPr sz="850" b="1">
+                <a:solidFill>
+                  <a:srgbClr val="157355"/>
+                </a:solidFill>
+                <a:latin typeface="Inter"/>
+              </a:rPr>
+              <a:t>esdrújula — «Mé»</a:t>
+            </a:r>
+          </a:p>
+        </p:txBody>
+      </p:sp>
+      <p:sp>
+        <p:nvSpPr>
+          <p:cNvPr id="23" name="Tarjeta 3"/>
+          <p:cNvSpPr/>
+          <p:nvPr/>
+        </p:nvSpPr>
+        <p:spPr>
+          <a:xfrm>
+            <a:off x="9022842" y="2670048"/>
+            <a:ext cx="2708910" cy="898398"/>
+          </a:xfrm>
+          <a:prstGeom prst="roundRect">
+            <a:avLst>
+              <a:gd name="adj" fmla="val 6000"/>
+            </a:avLst>
+          </a:prstGeom>
+          <a:solidFill>
+            <a:srgbClr val="FFFFFF"/>
+          </a:solidFill>
+          <a:ln w="12700">
+            <a:solidFill>
+              <a:srgbClr val="E4E3DE"/>
+            </a:solidFill>
+          </a:ln>
+          <a:effectLst/>
+        </p:spPr>
+        <p:style>
+          <a:lnRef idx="1">
+            <a:schemeClr val="accent1"/>
+          </a:lnRef>
+          <a:fillRef idx="3">
+            <a:schemeClr val="accent1"/>
+          </a:fillRef>
+          <a:effectRef idx="2">
+            <a:schemeClr val="accent1"/>
+          </a:effectRef>
+          <a:fontRef idx="minor">
+            <a:schemeClr val="lt1"/>
+          </a:fontRef>
+        </p:style>
+        <p:txBody>
+          <a:bodyPr rtlCol="0" anchor="ctr"/>
+          <a:lstStyle/>
+          <a:p/>
+        </p:txBody>
+      </p:sp>
+      <p:sp>
+        <p:nvSpPr>
+          <p:cNvPr id="24" name="TarjetaTxt 3"/>
+          <p:cNvSpPr txBox="1"/>
+          <p:nvPr/>
+        </p:nvSpPr>
+        <p:spPr>
+          <a:xfrm>
+            <a:off x="9114282" y="2724912"/>
+            <a:ext cx="2526030" cy="587502"/>
+          </a:xfrm>
+          <a:prstGeom prst="rect">
+            <a:avLst/>
+          </a:prstGeom>
+          <a:noFill/>
+        </p:spPr>
+        <p:txBody>
+          <a:bodyPr wrap="square" anchor="t" lIns="45720" rIns="45720" tIns="27432" bIns="27432">
+            <a:normAutofit/>
+          </a:bodyPr>
+          <a:lstStyle/>
+          <a:p>
+            <a:pPr algn="l"/>
+            <a:r>
+              <a:rPr sz="1100" b="1">
+                <a:solidFill>
+                  <a:srgbClr val="157355"/>
+                </a:solidFill>
+                <a:latin typeface="Bricolage Grotesque"/>
+              </a:rPr>
+              <a:t>teléfono</a:t>
+            </a:r>
+          </a:p>
+        </p:txBody>
+      </p:sp>
+      <p:sp>
+        <p:nvSpPr>
+          <p:cNvPr id="25" name="Onthul 3"/>
+          <p:cNvSpPr/>
+          <p:nvPr/>
+        </p:nvSpPr>
+        <p:spPr>
+          <a:xfrm>
+            <a:off x="9114282" y="3275838"/>
+            <a:ext cx="2526030" cy="237744"/>
+          </a:xfrm>
+          <a:prstGeom prst="roundRect">
+            <a:avLst>
+              <a:gd name="adj" fmla="val 20000"/>
+            </a:avLst>
+          </a:prstGeom>
+          <a:solidFill>
+            <a:srgbClr val="E4F4EE"/>
+          </a:solidFill>
+          <a:ln>
+            <a:noFill/>
+          </a:ln>
+          <a:effectLst/>
+        </p:spPr>
+        <p:style>
+          <a:lnRef idx="1">
+            <a:schemeClr val="accent1"/>
+          </a:lnRef>
+          <a:fillRef idx="3">
+            <a:schemeClr val="accent1"/>
+          </a:fillRef>
+          <a:effectRef idx="2">
+            <a:schemeClr val="accent1"/>
+          </a:effectRef>
+          <a:fontRef idx="minor">
+            <a:schemeClr val="lt1"/>
+          </a:fontRef>
+        </p:style>
+        <p:txBody>
+          <a:bodyPr rtlCol="0" anchor="ctr"/>
+          <a:lstStyle/>
+          <a:p/>
+        </p:txBody>
+      </p:sp>
+      <p:sp>
+        <p:nvSpPr>
+          <p:cNvPr id="26" name="OnthulTxt 3"/>
+          <p:cNvSpPr txBox="1"/>
+          <p:nvPr/>
+        </p:nvSpPr>
+        <p:spPr>
+          <a:xfrm>
+            <a:off x="9132570" y="3275838"/>
+            <a:ext cx="2489454" cy="237744"/>
+          </a:xfrm>
+          <a:prstGeom prst="rect">
+            <a:avLst/>
+          </a:prstGeom>
+          <a:noFill/>
+        </p:spPr>
+        <p:txBody>
+          <a:bodyPr wrap="square" anchor="ctr" lIns="45720" rIns="45720" tIns="27432" bIns="27432">
+            <a:normAutofit/>
+          </a:bodyPr>
+          <a:lstStyle/>
+          <a:p>
+            <a:pPr algn="l"/>
+            <a:r>
+              <a:rPr sz="850" b="1">
+                <a:solidFill>
+                  <a:srgbClr val="157355"/>
+                </a:solidFill>
+                <a:latin typeface="Inter"/>
+              </a:rPr>
+              <a:t>esdrújula — «lé»</a:t>
+            </a:r>
+          </a:p>
+        </p:txBody>
+      </p:sp>
+      <p:sp>
+        <p:nvSpPr>
+          <p:cNvPr id="27" name="Tarjeta 4"/>
+          <p:cNvSpPr/>
+          <p:nvPr/>
+        </p:nvSpPr>
+        <p:spPr>
+          <a:xfrm>
+            <a:off x="457200" y="3696462"/>
+            <a:ext cx="2708910" cy="898398"/>
+          </a:xfrm>
+          <a:prstGeom prst="roundRect">
+            <a:avLst>
+              <a:gd name="adj" fmla="val 6000"/>
+            </a:avLst>
+          </a:prstGeom>
+          <a:solidFill>
+            <a:srgbClr val="FFFFFF"/>
+          </a:solidFill>
+          <a:ln w="12700">
+            <a:solidFill>
+              <a:srgbClr val="E4E3DE"/>
+            </a:solidFill>
+          </a:ln>
+          <a:effectLst/>
+        </p:spPr>
+        <p:style>
+          <a:lnRef idx="1">
+            <a:schemeClr val="accent1"/>
+          </a:lnRef>
+          <a:fillRef idx="3">
+            <a:schemeClr val="accent1"/>
+          </a:fillRef>
+          <a:effectRef idx="2">
+            <a:schemeClr val="accent1"/>
+          </a:effectRef>
+          <a:fontRef idx="minor">
+            <a:schemeClr val="lt1"/>
+          </a:fontRef>
+        </p:style>
+        <p:txBody>
+          <a:bodyPr rtlCol="0" anchor="ctr"/>
+          <a:lstStyle/>
+          <a:p/>
+        </p:txBody>
+      </p:sp>
+      <p:sp>
+        <p:nvSpPr>
+          <p:cNvPr id="28" name="TarjetaTxt 4"/>
+          <p:cNvSpPr txBox="1"/>
+          <p:nvPr/>
+        </p:nvSpPr>
+        <p:spPr>
+          <a:xfrm>
+            <a:off x="548640" y="3751326"/>
+            <a:ext cx="2526030" cy="587502"/>
+          </a:xfrm>
+          <a:prstGeom prst="rect">
+            <a:avLst/>
+          </a:prstGeom>
+          <a:noFill/>
+        </p:spPr>
+        <p:txBody>
+          <a:bodyPr wrap="square" anchor="t" lIns="45720" rIns="45720" tIns="27432" bIns="27432">
+            <a:normAutofit/>
+          </a:bodyPr>
+          <a:lstStyle/>
+          <a:p>
+            <a:pPr algn="l"/>
+            <a:r>
+              <a:rPr sz="1100" b="1">
+                <a:solidFill>
+                  <a:srgbClr val="157355"/>
+                </a:solidFill>
+                <a:latin typeface="Bricolage Grotesque"/>
+              </a:rPr>
+              <a:t>Perú</a:t>
+            </a:r>
+          </a:p>
+        </p:txBody>
+      </p:sp>
+      <p:sp>
+        <p:nvSpPr>
+          <p:cNvPr id="29" name="Onthul 4"/>
+          <p:cNvSpPr/>
+          <p:nvPr/>
+        </p:nvSpPr>
+        <p:spPr>
+          <a:xfrm>
+            <a:off x="548640" y="4302252"/>
+            <a:ext cx="2526030" cy="237744"/>
+          </a:xfrm>
+          <a:prstGeom prst="roundRect">
+            <a:avLst>
+              <a:gd name="adj" fmla="val 20000"/>
+            </a:avLst>
+          </a:prstGeom>
+          <a:solidFill>
+            <a:srgbClr val="E4F4EE"/>
+          </a:solidFill>
+          <a:ln>
+            <a:noFill/>
+          </a:ln>
+          <a:effectLst/>
+        </p:spPr>
+        <p:style>
+          <a:lnRef idx="1">
+            <a:schemeClr val="accent1"/>
+          </a:lnRef>
+          <a:fillRef idx="3">
+            <a:schemeClr val="accent1"/>
+          </a:fillRef>
+          <a:effectRef idx="2">
+            <a:schemeClr val="accent1"/>
+          </a:effectRef>
+          <a:fontRef idx="minor">
+            <a:schemeClr val="lt1"/>
+          </a:fontRef>
+        </p:style>
+        <p:txBody>
+          <a:bodyPr rtlCol="0" anchor="ctr"/>
+          <a:lstStyle/>
+          <a:p/>
+        </p:txBody>
+      </p:sp>
+      <p:sp>
+        <p:nvSpPr>
+          <p:cNvPr id="30" name="OnthulTxt 4"/>
+          <p:cNvSpPr txBox="1"/>
+          <p:nvPr/>
+        </p:nvSpPr>
+        <p:spPr>
+          <a:xfrm>
+            <a:off x="566928" y="4302252"/>
+            <a:ext cx="2489454" cy="237744"/>
+          </a:xfrm>
+          <a:prstGeom prst="rect">
+            <a:avLst/>
+          </a:prstGeom>
+          <a:noFill/>
+        </p:spPr>
+        <p:txBody>
+          <a:bodyPr wrap="square" anchor="ctr" lIns="45720" rIns="45720" tIns="27432" bIns="27432">
+            <a:normAutofit/>
+          </a:bodyPr>
+          <a:lstStyle/>
+          <a:p>
+            <a:pPr algn="l"/>
+            <a:r>
+              <a:rPr sz="850" b="1">
+                <a:solidFill>
+                  <a:srgbClr val="157355"/>
+                </a:solidFill>
+                <a:latin typeface="Inter"/>
+              </a:rPr>
+              <a:t>aguda — «rú»</a:t>
+            </a:r>
+          </a:p>
+        </p:txBody>
+      </p:sp>
+      <p:sp>
+        <p:nvSpPr>
+          <p:cNvPr id="31" name="Tarjeta 5"/>
+          <p:cNvSpPr/>
+          <p:nvPr/>
+        </p:nvSpPr>
+        <p:spPr>
+          <a:xfrm>
+            <a:off x="3312414" y="3696462"/>
+            <a:ext cx="2708910" cy="898398"/>
+          </a:xfrm>
+          <a:prstGeom prst="roundRect">
+            <a:avLst>
+              <a:gd name="adj" fmla="val 6000"/>
+            </a:avLst>
+          </a:prstGeom>
+          <a:solidFill>
+            <a:srgbClr val="FFFFFF"/>
+          </a:solidFill>
+          <a:ln w="12700">
+            <a:solidFill>
+              <a:srgbClr val="E4E3DE"/>
+            </a:solidFill>
+          </a:ln>
+          <a:effectLst/>
+        </p:spPr>
+        <p:style>
+          <a:lnRef idx="1">
+            <a:schemeClr val="accent1"/>
+          </a:lnRef>
+          <a:fillRef idx="3">
+            <a:schemeClr val="accent1"/>
+          </a:fillRef>
+          <a:effectRef idx="2">
+            <a:schemeClr val="accent1"/>
+          </a:effectRef>
+          <a:fontRef idx="minor">
+            <a:schemeClr val="lt1"/>
+          </a:fontRef>
+        </p:style>
+        <p:txBody>
+          <a:bodyPr rtlCol="0" anchor="ctr"/>
+          <a:lstStyle/>
+          <a:p/>
+        </p:txBody>
+      </p:sp>
+      <p:sp>
+        <p:nvSpPr>
+          <p:cNvPr id="32" name="TarjetaTxt 5"/>
+          <p:cNvSpPr txBox="1"/>
+          <p:nvPr/>
+        </p:nvSpPr>
+        <p:spPr>
+          <a:xfrm>
+            <a:off x="3403854" y="3751326"/>
+            <a:ext cx="2526030" cy="587502"/>
+          </a:xfrm>
+          <a:prstGeom prst="rect">
+            <a:avLst/>
+          </a:prstGeom>
+          <a:noFill/>
+        </p:spPr>
+        <p:txBody>
+          <a:bodyPr wrap="square" anchor="t" lIns="45720" rIns="45720" tIns="27432" bIns="27432">
+            <a:normAutofit/>
+          </a:bodyPr>
+          <a:lstStyle/>
+          <a:p>
+            <a:pPr algn="l"/>
+            <a:r>
+              <a:rPr sz="1100" b="1">
+                <a:solidFill>
+                  <a:srgbClr val="157355"/>
+                </a:solidFill>
+                <a:latin typeface="Bricolage Grotesque"/>
+              </a:rPr>
+              <a:t>número</a:t>
+            </a:r>
+          </a:p>
+        </p:txBody>
+      </p:sp>
+      <p:sp>
+        <p:nvSpPr>
+          <p:cNvPr id="33" name="Onthul 5"/>
+          <p:cNvSpPr/>
+          <p:nvPr/>
+        </p:nvSpPr>
+        <p:spPr>
+          <a:xfrm>
+            <a:off x="3403854" y="4302252"/>
+            <a:ext cx="2526030" cy="237744"/>
+          </a:xfrm>
+          <a:prstGeom prst="roundRect">
+            <a:avLst>
+              <a:gd name="adj" fmla="val 20000"/>
+            </a:avLst>
+          </a:prstGeom>
+          <a:solidFill>
+            <a:srgbClr val="E4F4EE"/>
+          </a:solidFill>
+          <a:ln>
+            <a:noFill/>
+          </a:ln>
+          <a:effectLst/>
+        </p:spPr>
+        <p:style>
+          <a:lnRef idx="1">
+            <a:schemeClr val="accent1"/>
+          </a:lnRef>
+          <a:fillRef idx="3">
+            <a:schemeClr val="accent1"/>
+          </a:fillRef>
+          <a:effectRef idx="2">
+            <a:schemeClr val="accent1"/>
+          </a:effectRef>
+          <a:fontRef idx="minor">
+            <a:schemeClr val="lt1"/>
+          </a:fontRef>
+        </p:style>
+        <p:txBody>
+          <a:bodyPr rtlCol="0" anchor="ctr"/>
+          <a:lstStyle/>
+          <a:p/>
+        </p:txBody>
+      </p:sp>
+      <p:sp>
+        <p:nvSpPr>
+          <p:cNvPr id="34" name="OnthulTxt 5"/>
+          <p:cNvSpPr txBox="1"/>
+          <p:nvPr/>
+        </p:nvSpPr>
+        <p:spPr>
+          <a:xfrm>
+            <a:off x="3422142" y="4302252"/>
+            <a:ext cx="2489454" cy="237744"/>
+          </a:xfrm>
+          <a:prstGeom prst="rect">
+            <a:avLst/>
+          </a:prstGeom>
+          <a:noFill/>
+        </p:spPr>
+        <p:txBody>
+          <a:bodyPr wrap="square" anchor="ctr" lIns="45720" rIns="45720" tIns="27432" bIns="27432">
+            <a:normAutofit/>
+          </a:bodyPr>
+          <a:lstStyle/>
+          <a:p>
+            <a:pPr algn="l"/>
+            <a:r>
+              <a:rPr sz="850" b="1">
+                <a:solidFill>
+                  <a:srgbClr val="157355"/>
+                </a:solidFill>
+                <a:latin typeface="Inter"/>
+              </a:rPr>
+              <a:t>esdrújula — «nú»</a:t>
+            </a:r>
+          </a:p>
+        </p:txBody>
+      </p:sp>
+      <p:sp>
+        <p:nvSpPr>
+          <p:cNvPr id="35" name="Tarjeta 6"/>
+          <p:cNvSpPr/>
+          <p:nvPr/>
+        </p:nvSpPr>
+        <p:spPr>
+          <a:xfrm>
+            <a:off x="6167628" y="3696462"/>
+            <a:ext cx="2708910" cy="898398"/>
+          </a:xfrm>
+          <a:prstGeom prst="roundRect">
+            <a:avLst>
+              <a:gd name="adj" fmla="val 6000"/>
+            </a:avLst>
+          </a:prstGeom>
+          <a:solidFill>
+            <a:srgbClr val="FFFFFF"/>
+          </a:solidFill>
+          <a:ln w="12700">
+            <a:solidFill>
+              <a:srgbClr val="E4E3DE"/>
+            </a:solidFill>
+          </a:ln>
+          <a:effectLst/>
+        </p:spPr>
+        <p:style>
+          <a:lnRef idx="1">
+            <a:schemeClr val="accent1"/>
+          </a:lnRef>
+          <a:fillRef idx="3">
+            <a:schemeClr val="accent1"/>
+          </a:fillRef>
+          <a:effectRef idx="2">
+            <a:schemeClr val="accent1"/>
+          </a:effectRef>
+          <a:fontRef idx="minor">
+            <a:schemeClr val="lt1"/>
+          </a:fontRef>
+        </p:style>
+        <p:txBody>
+          <a:bodyPr rtlCol="0" anchor="ctr"/>
+          <a:lstStyle/>
+          <a:p/>
+        </p:txBody>
+      </p:sp>
+      <p:sp>
+        <p:nvSpPr>
+          <p:cNvPr id="36" name="TarjetaTxt 6"/>
+          <p:cNvSpPr txBox="1"/>
+          <p:nvPr/>
+        </p:nvSpPr>
+        <p:spPr>
+          <a:xfrm>
+            <a:off x="6259068" y="3751326"/>
+            <a:ext cx="2526030" cy="587502"/>
+          </a:xfrm>
+          <a:prstGeom prst="rect">
+            <a:avLst/>
+          </a:prstGeom>
+          <a:noFill/>
+        </p:spPr>
+        <p:txBody>
+          <a:bodyPr wrap="square" anchor="t" lIns="45720" rIns="45720" tIns="27432" bIns="27432">
+            <a:normAutofit/>
+          </a:bodyPr>
+          <a:lstStyle/>
+          <a:p>
+            <a:pPr algn="l"/>
+            <a:r>
+              <a:rPr sz="1100" b="1">
+                <a:solidFill>
+                  <a:srgbClr val="157355"/>
+                </a:solidFill>
+                <a:latin typeface="Bricolage Grotesque"/>
+              </a:rPr>
+              <a:t>mesa</a:t>
+            </a:r>
+          </a:p>
+        </p:txBody>
+      </p:sp>
+      <p:sp>
+        <p:nvSpPr>
+          <p:cNvPr id="37" name="Onthul 6"/>
+          <p:cNvSpPr/>
+          <p:nvPr/>
+        </p:nvSpPr>
+        <p:spPr>
+          <a:xfrm>
+            <a:off x="6259068" y="4302252"/>
+            <a:ext cx="2526030" cy="237744"/>
+          </a:xfrm>
+          <a:prstGeom prst="roundRect">
+            <a:avLst>
+              <a:gd name="adj" fmla="val 20000"/>
+            </a:avLst>
+          </a:prstGeom>
+          <a:solidFill>
+            <a:srgbClr val="E4F4EE"/>
+          </a:solidFill>
+          <a:ln>
+            <a:noFill/>
+          </a:ln>
+          <a:effectLst/>
+        </p:spPr>
+        <p:style>
+          <a:lnRef idx="1">
+            <a:schemeClr val="accent1"/>
+          </a:lnRef>
+          <a:fillRef idx="3">
+            <a:schemeClr val="accent1"/>
+          </a:fillRef>
+          <a:effectRef idx="2">
+            <a:schemeClr val="accent1"/>
+          </a:effectRef>
+          <a:fontRef idx="minor">
+            <a:schemeClr val="lt1"/>
+          </a:fontRef>
+        </p:style>
+        <p:txBody>
+          <a:bodyPr rtlCol="0" anchor="ctr"/>
+          <a:lstStyle/>
+          <a:p/>
+        </p:txBody>
+      </p:sp>
+      <p:sp>
+        <p:nvSpPr>
+          <p:cNvPr id="38" name="OnthulTxt 6"/>
+          <p:cNvSpPr txBox="1"/>
+          <p:nvPr/>
+        </p:nvSpPr>
+        <p:spPr>
+          <a:xfrm>
+            <a:off x="6277356" y="4302252"/>
+            <a:ext cx="2489454" cy="237744"/>
+          </a:xfrm>
+          <a:prstGeom prst="rect">
+            <a:avLst/>
+          </a:prstGeom>
+          <a:noFill/>
+        </p:spPr>
+        <p:txBody>
+          <a:bodyPr wrap="square" anchor="ctr" lIns="45720" rIns="45720" tIns="27432" bIns="27432">
+            <a:normAutofit/>
+          </a:bodyPr>
+          <a:lstStyle/>
+          <a:p>
+            <a:pPr algn="l"/>
+            <a:r>
+              <a:rPr sz="850" b="1">
+                <a:solidFill>
+                  <a:srgbClr val="157355"/>
+                </a:solidFill>
+                <a:latin typeface="Inter"/>
+              </a:rPr>
+              <a:t>llana — «me»</a:t>
+            </a:r>
+          </a:p>
+        </p:txBody>
+      </p:sp>
+      <p:sp>
+        <p:nvSpPr>
+          <p:cNvPr id="39" name="Tarjeta 7"/>
+          <p:cNvSpPr/>
+          <p:nvPr/>
+        </p:nvSpPr>
+        <p:spPr>
+          <a:xfrm>
+            <a:off x="9022842" y="3696462"/>
+            <a:ext cx="2708910" cy="898398"/>
+          </a:xfrm>
+          <a:prstGeom prst="roundRect">
+            <a:avLst>
+              <a:gd name="adj" fmla="val 6000"/>
+            </a:avLst>
+          </a:prstGeom>
+          <a:solidFill>
+            <a:srgbClr val="FFFFFF"/>
+          </a:solidFill>
+          <a:ln w="12700">
+            <a:solidFill>
+              <a:srgbClr val="E4E3DE"/>
+            </a:solidFill>
+          </a:ln>
+          <a:effectLst/>
+        </p:spPr>
+        <p:style>
+          <a:lnRef idx="1">
+            <a:schemeClr val="accent1"/>
+          </a:lnRef>
+          <a:fillRef idx="3">
+            <a:schemeClr val="accent1"/>
+          </a:fillRef>
+          <a:effectRef idx="2">
+            <a:schemeClr val="accent1"/>
+          </a:effectRef>
+          <a:fontRef idx="minor">
+            <a:schemeClr val="lt1"/>
+          </a:fontRef>
+        </p:style>
+        <p:txBody>
+          <a:bodyPr rtlCol="0" anchor="ctr"/>
+          <a:lstStyle/>
+          <a:p/>
+        </p:txBody>
+      </p:sp>
+      <p:sp>
+        <p:nvSpPr>
+          <p:cNvPr id="40" name="TarjetaTxt 7"/>
+          <p:cNvSpPr txBox="1"/>
+          <p:nvPr/>
+        </p:nvSpPr>
+        <p:spPr>
+          <a:xfrm>
+            <a:off x="9114282" y="3751326"/>
+            <a:ext cx="2526030" cy="587502"/>
+          </a:xfrm>
+          <a:prstGeom prst="rect">
+            <a:avLst/>
+          </a:prstGeom>
+          <a:noFill/>
+        </p:spPr>
+        <p:txBody>
+          <a:bodyPr wrap="square" anchor="t" lIns="45720" rIns="45720" tIns="27432" bIns="27432">
+            <a:normAutofit/>
+          </a:bodyPr>
+          <a:lstStyle/>
+          <a:p>
+            <a:pPr algn="l"/>
+            <a:r>
+              <a:rPr sz="1100" b="1">
+                <a:solidFill>
+                  <a:srgbClr val="157355"/>
+                </a:solidFill>
+                <a:latin typeface="Bricolage Grotesque"/>
+              </a:rPr>
+              <a:t>jamón</a:t>
+            </a:r>
+          </a:p>
+        </p:txBody>
+      </p:sp>
+      <p:sp>
+        <p:nvSpPr>
+          <p:cNvPr id="41" name="Onthul 7"/>
+          <p:cNvSpPr/>
+          <p:nvPr/>
+        </p:nvSpPr>
+        <p:spPr>
+          <a:xfrm>
+            <a:off x="9114282" y="4302252"/>
+            <a:ext cx="2526030" cy="237744"/>
+          </a:xfrm>
+          <a:prstGeom prst="roundRect">
+            <a:avLst>
+              <a:gd name="adj" fmla="val 20000"/>
+            </a:avLst>
+          </a:prstGeom>
+          <a:solidFill>
+            <a:srgbClr val="E4F4EE"/>
+          </a:solidFill>
+          <a:ln>
+            <a:noFill/>
+          </a:ln>
+          <a:effectLst/>
+        </p:spPr>
+        <p:style>
+          <a:lnRef idx="1">
+            <a:schemeClr val="accent1"/>
+          </a:lnRef>
+          <a:fillRef idx="3">
+            <a:schemeClr val="accent1"/>
+          </a:fillRef>
+          <a:effectRef idx="2">
+            <a:schemeClr val="accent1"/>
+          </a:effectRef>
+          <a:fontRef idx="minor">
+            <a:schemeClr val="lt1"/>
+          </a:fontRef>
+        </p:style>
+        <p:txBody>
+          <a:bodyPr rtlCol="0" anchor="ctr"/>
+          <a:lstStyle/>
+          <a:p/>
+        </p:txBody>
+      </p:sp>
+      <p:sp>
+        <p:nvSpPr>
+          <p:cNvPr id="42" name="OnthulTxt 7"/>
+          <p:cNvSpPr txBox="1"/>
+          <p:nvPr/>
+        </p:nvSpPr>
+        <p:spPr>
+          <a:xfrm>
+            <a:off x="9132570" y="4302252"/>
+            <a:ext cx="2489454" cy="237744"/>
+          </a:xfrm>
+          <a:prstGeom prst="rect">
+            <a:avLst/>
+          </a:prstGeom>
+          <a:noFill/>
+        </p:spPr>
+        <p:txBody>
+          <a:bodyPr wrap="square" anchor="ctr" lIns="45720" rIns="45720" tIns="27432" bIns="27432">
+            <a:normAutofit/>
+          </a:bodyPr>
+          <a:lstStyle/>
+          <a:p>
+            <a:pPr algn="l"/>
+            <a:r>
+              <a:rPr sz="850" b="1">
+                <a:solidFill>
+                  <a:srgbClr val="157355"/>
+                </a:solidFill>
+                <a:latin typeface="Inter"/>
+              </a:rPr>
+              <a:t>aguda — «món»</a:t>
+            </a:r>
+          </a:p>
+        </p:txBody>
+      </p:sp>
+      <p:sp>
+        <p:nvSpPr>
+          <p:cNvPr id="43" name="Tarjeta 8"/>
+          <p:cNvSpPr/>
+          <p:nvPr/>
+        </p:nvSpPr>
+        <p:spPr>
+          <a:xfrm>
+            <a:off x="457200" y="4722876"/>
+            <a:ext cx="2708910" cy="898398"/>
+          </a:xfrm>
+          <a:prstGeom prst="roundRect">
+            <a:avLst>
+              <a:gd name="adj" fmla="val 6000"/>
+            </a:avLst>
+          </a:prstGeom>
+          <a:solidFill>
+            <a:srgbClr val="FFFFFF"/>
+          </a:solidFill>
+          <a:ln w="12700">
+            <a:solidFill>
+              <a:srgbClr val="E4E3DE"/>
+            </a:solidFill>
+          </a:ln>
+          <a:effectLst/>
+        </p:spPr>
+        <p:style>
+          <a:lnRef idx="1">
+            <a:schemeClr val="accent1"/>
+          </a:lnRef>
+          <a:fillRef idx="3">
+            <a:schemeClr val="accent1"/>
+          </a:fillRef>
+          <a:effectRef idx="2">
+            <a:schemeClr val="accent1"/>
+          </a:effectRef>
+          <a:fontRef idx="minor">
+            <a:schemeClr val="lt1"/>
+          </a:fontRef>
+        </p:style>
+        <p:txBody>
+          <a:bodyPr rtlCol="0" anchor="ctr"/>
+          <a:lstStyle/>
+          <a:p/>
+        </p:txBody>
+      </p:sp>
+      <p:sp>
+        <p:nvSpPr>
+          <p:cNvPr id="44" name="TarjetaTxt 8"/>
+          <p:cNvSpPr txBox="1"/>
+          <p:nvPr/>
+        </p:nvSpPr>
+        <p:spPr>
+          <a:xfrm>
+            <a:off x="548640" y="4777740"/>
+            <a:ext cx="2526030" cy="587502"/>
+          </a:xfrm>
+          <a:prstGeom prst="rect">
+            <a:avLst/>
+          </a:prstGeom>
+          <a:noFill/>
+        </p:spPr>
+        <p:txBody>
+          <a:bodyPr wrap="square" anchor="t" lIns="45720" rIns="45720" tIns="27432" bIns="27432">
+            <a:normAutofit/>
+          </a:bodyPr>
+          <a:lstStyle/>
+          <a:p>
+            <a:pPr algn="l"/>
+            <a:r>
+              <a:rPr sz="1100" b="1">
+                <a:solidFill>
+                  <a:srgbClr val="157355"/>
+                </a:solidFill>
+                <a:latin typeface="Bricolage Grotesque"/>
+              </a:rPr>
+              <a:t>sábado</a:t>
+            </a:r>
+          </a:p>
+        </p:txBody>
+      </p:sp>
+      <p:sp>
+        <p:nvSpPr>
+          <p:cNvPr id="45" name="Onthul 8"/>
+          <p:cNvSpPr/>
+          <p:nvPr/>
+        </p:nvSpPr>
+        <p:spPr>
+          <a:xfrm>
+            <a:off x="548640" y="5328666"/>
+            <a:ext cx="2526030" cy="237744"/>
+          </a:xfrm>
+          <a:prstGeom prst="roundRect">
+            <a:avLst>
+              <a:gd name="adj" fmla="val 20000"/>
+            </a:avLst>
+          </a:prstGeom>
+          <a:solidFill>
+            <a:srgbClr val="E4F4EE"/>
+          </a:solidFill>
+          <a:ln>
+            <a:noFill/>
+          </a:ln>
+          <a:effectLst/>
+        </p:spPr>
+        <p:style>
+          <a:lnRef idx="1">
+            <a:schemeClr val="accent1"/>
+          </a:lnRef>
+          <a:fillRef idx="3">
+            <a:schemeClr val="accent1"/>
+          </a:fillRef>
+          <a:effectRef idx="2">
+            <a:schemeClr val="accent1"/>
+          </a:effectRef>
+          <a:fontRef idx="minor">
+            <a:schemeClr val="lt1"/>
+          </a:fontRef>
+        </p:style>
+        <p:txBody>
+          <a:bodyPr rtlCol="0" anchor="ctr"/>
+          <a:lstStyle/>
+          <a:p/>
+        </p:txBody>
+      </p:sp>
+      <p:sp>
+        <p:nvSpPr>
+          <p:cNvPr id="46" name="OnthulTxt 8"/>
+          <p:cNvSpPr txBox="1"/>
+          <p:nvPr/>
+        </p:nvSpPr>
+        <p:spPr>
+          <a:xfrm>
+            <a:off x="566928" y="5328666"/>
+            <a:ext cx="2489454" cy="237744"/>
+          </a:xfrm>
+          <a:prstGeom prst="rect">
+            <a:avLst/>
+          </a:prstGeom>
+          <a:noFill/>
+        </p:spPr>
+        <p:txBody>
+          <a:bodyPr wrap="square" anchor="ctr" lIns="45720" rIns="45720" tIns="27432" bIns="27432">
+            <a:normAutofit/>
+          </a:bodyPr>
+          <a:lstStyle/>
+          <a:p>
+            <a:pPr algn="l"/>
+            <a:r>
+              <a:rPr sz="850" b="1">
+                <a:solidFill>
+                  <a:srgbClr val="157355"/>
+                </a:solidFill>
+                <a:latin typeface="Inter"/>
+              </a:rPr>
+              <a:t>esdrújula — «sá»</a:t>
+            </a:r>
+          </a:p>
+        </p:txBody>
+      </p:sp>
+      <p:sp>
+        <p:nvSpPr>
+          <p:cNvPr id="47" name="Tarjeta 9"/>
+          <p:cNvSpPr/>
+          <p:nvPr/>
+        </p:nvSpPr>
+        <p:spPr>
+          <a:xfrm>
+            <a:off x="3312414" y="4722876"/>
+            <a:ext cx="2708910" cy="898398"/>
+          </a:xfrm>
+          <a:prstGeom prst="roundRect">
+            <a:avLst>
+              <a:gd name="adj" fmla="val 6000"/>
+            </a:avLst>
+          </a:prstGeom>
+          <a:solidFill>
+            <a:srgbClr val="FFFFFF"/>
+          </a:solidFill>
+          <a:ln w="12700">
+            <a:solidFill>
+              <a:srgbClr val="E4E3DE"/>
+            </a:solidFill>
+          </a:ln>
+          <a:effectLst/>
+        </p:spPr>
+        <p:style>
+          <a:lnRef idx="1">
+            <a:schemeClr val="accent1"/>
+          </a:lnRef>
+          <a:fillRef idx="3">
+            <a:schemeClr val="accent1"/>
+          </a:fillRef>
+          <a:effectRef idx="2">
+            <a:schemeClr val="accent1"/>
+          </a:effectRef>
+          <a:fontRef idx="minor">
+            <a:schemeClr val="lt1"/>
+          </a:fontRef>
+        </p:style>
+        <p:txBody>
+          <a:bodyPr rtlCol="0" anchor="ctr"/>
+          <a:lstStyle/>
+          <a:p/>
+        </p:txBody>
+      </p:sp>
+      <p:sp>
+        <p:nvSpPr>
+          <p:cNvPr id="48" name="TarjetaTxt 9"/>
+          <p:cNvSpPr txBox="1"/>
+          <p:nvPr/>
+        </p:nvSpPr>
+        <p:spPr>
+          <a:xfrm>
+            <a:off x="3403854" y="4777740"/>
+            <a:ext cx="2526030" cy="587502"/>
+          </a:xfrm>
+          <a:prstGeom prst="rect">
+            <a:avLst/>
+          </a:prstGeom>
+          <a:noFill/>
+        </p:spPr>
+        <p:txBody>
+          <a:bodyPr wrap="square" anchor="t" lIns="45720" rIns="45720" tIns="27432" bIns="27432">
+            <a:normAutofit/>
+          </a:bodyPr>
+          <a:lstStyle/>
+          <a:p>
+            <a:pPr algn="l"/>
+            <a:r>
+              <a:rPr sz="1100" b="1">
+                <a:solidFill>
+                  <a:srgbClr val="157355"/>
+                </a:solidFill>
+                <a:latin typeface="Bricolage Grotesque"/>
+              </a:rPr>
+              <a:t>papel</a:t>
+            </a:r>
+          </a:p>
+        </p:txBody>
+      </p:sp>
+      <p:sp>
+        <p:nvSpPr>
+          <p:cNvPr id="49" name="Onthul 9"/>
+          <p:cNvSpPr/>
+          <p:nvPr/>
+        </p:nvSpPr>
+        <p:spPr>
+          <a:xfrm>
+            <a:off x="3403854" y="5328666"/>
+            <a:ext cx="2526030" cy="237744"/>
+          </a:xfrm>
+          <a:prstGeom prst="roundRect">
+            <a:avLst>
+              <a:gd name="adj" fmla="val 20000"/>
+            </a:avLst>
+          </a:prstGeom>
+          <a:solidFill>
+            <a:srgbClr val="E4F4EE"/>
+          </a:solidFill>
+          <a:ln>
+            <a:noFill/>
+          </a:ln>
+          <a:effectLst/>
+        </p:spPr>
+        <p:style>
+          <a:lnRef idx="1">
+            <a:schemeClr val="accent1"/>
+          </a:lnRef>
+          <a:fillRef idx="3">
+            <a:schemeClr val="accent1"/>
+          </a:fillRef>
+          <a:effectRef idx="2">
+            <a:schemeClr val="accent1"/>
+          </a:effectRef>
+          <a:fontRef idx="minor">
+            <a:schemeClr val="lt1"/>
+          </a:fontRef>
+        </p:style>
+        <p:txBody>
+          <a:bodyPr rtlCol="0" anchor="ctr"/>
+          <a:lstStyle/>
+          <a:p/>
+        </p:txBody>
+      </p:sp>
+      <p:sp>
+        <p:nvSpPr>
+          <p:cNvPr id="50" name="OnthulTxt 9"/>
+          <p:cNvSpPr txBox="1"/>
+          <p:nvPr/>
+        </p:nvSpPr>
+        <p:spPr>
+          <a:xfrm>
+            <a:off x="3422142" y="5328666"/>
+            <a:ext cx="2489454" cy="237744"/>
+          </a:xfrm>
+          <a:prstGeom prst="rect">
+            <a:avLst/>
+          </a:prstGeom>
+          <a:noFill/>
+        </p:spPr>
+        <p:txBody>
+          <a:bodyPr wrap="square" anchor="ctr" lIns="45720" rIns="45720" tIns="27432" bIns="27432">
+            <a:normAutofit/>
+          </a:bodyPr>
+          <a:lstStyle/>
+          <a:p>
+            <a:pPr algn="l"/>
+            <a:r>
+              <a:rPr sz="850" b="1">
+                <a:solidFill>
+                  <a:srgbClr val="157355"/>
+                </a:solidFill>
+                <a:latin typeface="Inter"/>
+              </a:rPr>
+              <a:t>aguda — «pel»</a:t>
+            </a:r>
+          </a:p>
+        </p:txBody>
+      </p:sp>
+      <p:sp>
+        <p:nvSpPr>
+          <p:cNvPr id="51" name="Tarjeta 10"/>
+          <p:cNvSpPr/>
+          <p:nvPr/>
+        </p:nvSpPr>
+        <p:spPr>
+          <a:xfrm>
+            <a:off x="6167628" y="4722876"/>
+            <a:ext cx="2708910" cy="898398"/>
+          </a:xfrm>
+          <a:prstGeom prst="roundRect">
+            <a:avLst>
+              <a:gd name="adj" fmla="val 6000"/>
+            </a:avLst>
+          </a:prstGeom>
+          <a:solidFill>
+            <a:srgbClr val="FFFFFF"/>
+          </a:solidFill>
+          <a:ln w="12700">
+            <a:solidFill>
+              <a:srgbClr val="E4E3DE"/>
+            </a:solidFill>
+          </a:ln>
+          <a:effectLst/>
+        </p:spPr>
+        <p:style>
+          <a:lnRef idx="1">
+            <a:schemeClr val="accent1"/>
+          </a:lnRef>
+          <a:fillRef idx="3">
+            <a:schemeClr val="accent1"/>
+          </a:fillRef>
+          <a:effectRef idx="2">
+            <a:schemeClr val="accent1"/>
+          </a:effectRef>
+          <a:fontRef idx="minor">
+            <a:schemeClr val="lt1"/>
+          </a:fontRef>
+        </p:style>
+        <p:txBody>
+          <a:bodyPr rtlCol="0" anchor="ctr"/>
+          <a:lstStyle/>
+          <a:p/>
+        </p:txBody>
+      </p:sp>
+      <p:sp>
+        <p:nvSpPr>
+          <p:cNvPr id="52" name="TarjetaTxt 10"/>
+          <p:cNvSpPr txBox="1"/>
+          <p:nvPr/>
+        </p:nvSpPr>
+        <p:spPr>
+          <a:xfrm>
+            <a:off x="6259068" y="4777740"/>
+            <a:ext cx="2526030" cy="587502"/>
+          </a:xfrm>
+          <a:prstGeom prst="rect">
+            <a:avLst/>
+          </a:prstGeom>
+          <a:noFill/>
+        </p:spPr>
+        <p:txBody>
+          <a:bodyPr wrap="square" anchor="t" lIns="45720" rIns="45720" tIns="27432" bIns="27432">
+            <a:normAutofit/>
+          </a:bodyPr>
+          <a:lstStyle/>
+          <a:p>
+            <a:pPr algn="l"/>
+            <a:r>
+              <a:rPr sz="1100" b="1">
+                <a:solidFill>
+                  <a:srgbClr val="157355"/>
+                </a:solidFill>
+                <a:latin typeface="Bricolage Grotesque"/>
+              </a:rPr>
+              <a:t>lápiz</a:t>
+            </a:r>
+          </a:p>
+        </p:txBody>
+      </p:sp>
+      <p:sp>
+        <p:nvSpPr>
+          <p:cNvPr id="53" name="Onthul 10"/>
+          <p:cNvSpPr/>
+          <p:nvPr/>
+        </p:nvSpPr>
+        <p:spPr>
+          <a:xfrm>
+            <a:off x="6259068" y="5328666"/>
+            <a:ext cx="2526030" cy="237744"/>
+          </a:xfrm>
+          <a:prstGeom prst="roundRect">
+            <a:avLst>
+              <a:gd name="adj" fmla="val 20000"/>
+            </a:avLst>
+          </a:prstGeom>
+          <a:solidFill>
+            <a:srgbClr val="E4F4EE"/>
+          </a:solidFill>
+          <a:ln>
+            <a:noFill/>
+          </a:ln>
+          <a:effectLst/>
+        </p:spPr>
+        <p:style>
+          <a:lnRef idx="1">
+            <a:schemeClr val="accent1"/>
+          </a:lnRef>
+          <a:fillRef idx="3">
+            <a:schemeClr val="accent1"/>
+          </a:fillRef>
+          <a:effectRef idx="2">
+            <a:schemeClr val="accent1"/>
+          </a:effectRef>
+          <a:fontRef idx="minor">
+            <a:schemeClr val="lt1"/>
+          </a:fontRef>
+        </p:style>
+        <p:txBody>
+          <a:bodyPr rtlCol="0" anchor="ctr"/>
+          <a:lstStyle/>
+          <a:p/>
+        </p:txBody>
+      </p:sp>
+      <p:sp>
+        <p:nvSpPr>
+          <p:cNvPr id="54" name="OnthulTxt 10"/>
+          <p:cNvSpPr txBox="1"/>
+          <p:nvPr/>
+        </p:nvSpPr>
+        <p:spPr>
+          <a:xfrm>
+            <a:off x="6277356" y="5328666"/>
+            <a:ext cx="2489454" cy="237744"/>
+          </a:xfrm>
+          <a:prstGeom prst="rect">
+            <a:avLst/>
+          </a:prstGeom>
+          <a:noFill/>
+        </p:spPr>
+        <p:txBody>
+          <a:bodyPr wrap="square" anchor="ctr" lIns="45720" rIns="45720" tIns="27432" bIns="27432">
+            <a:normAutofit/>
+          </a:bodyPr>
+          <a:lstStyle/>
+          <a:p>
+            <a:pPr algn="l"/>
+            <a:r>
+              <a:rPr sz="850" b="1">
+                <a:solidFill>
+                  <a:srgbClr val="157355"/>
+                </a:solidFill>
+                <a:latin typeface="Inter"/>
+              </a:rPr>
+              <a:t>llana — «lá»</a:t>
+            </a:r>
+          </a:p>
+        </p:txBody>
+      </p:sp>
+      <p:sp>
+        <p:nvSpPr>
+          <p:cNvPr id="55" name="Tarjeta 11"/>
+          <p:cNvSpPr/>
+          <p:nvPr/>
+        </p:nvSpPr>
+        <p:spPr>
+          <a:xfrm>
+            <a:off x="9022842" y="4722876"/>
+            <a:ext cx="2708910" cy="898398"/>
+          </a:xfrm>
+          <a:prstGeom prst="roundRect">
+            <a:avLst>
+              <a:gd name="adj" fmla="val 6000"/>
+            </a:avLst>
+          </a:prstGeom>
+          <a:solidFill>
+            <a:srgbClr val="FFFFFF"/>
+          </a:solidFill>
+          <a:ln w="12700">
+            <a:solidFill>
+              <a:srgbClr val="E4E3DE"/>
+            </a:solidFill>
+          </a:ln>
+          <a:effectLst/>
+        </p:spPr>
+        <p:style>
+          <a:lnRef idx="1">
+            <a:schemeClr val="accent1"/>
+          </a:lnRef>
+          <a:fillRef idx="3">
+            <a:schemeClr val="accent1"/>
+          </a:fillRef>
+          <a:effectRef idx="2">
+            <a:schemeClr val="accent1"/>
+          </a:effectRef>
+          <a:fontRef idx="minor">
+            <a:schemeClr val="lt1"/>
+          </a:fontRef>
+        </p:style>
+        <p:txBody>
+          <a:bodyPr rtlCol="0" anchor="ctr"/>
+          <a:lstStyle/>
+          <a:p/>
+        </p:txBody>
+      </p:sp>
+      <p:sp>
+        <p:nvSpPr>
+          <p:cNvPr id="56" name="TarjetaTxt 11"/>
+          <p:cNvSpPr txBox="1"/>
+          <p:nvPr/>
+        </p:nvSpPr>
+        <p:spPr>
+          <a:xfrm>
+            <a:off x="9114282" y="4777740"/>
+            <a:ext cx="2526030" cy="587502"/>
+          </a:xfrm>
+          <a:prstGeom prst="rect">
+            <a:avLst/>
+          </a:prstGeom>
+          <a:noFill/>
+        </p:spPr>
+        <p:txBody>
+          <a:bodyPr wrap="square" anchor="t" lIns="45720" rIns="45720" tIns="27432" bIns="27432">
+            <a:normAutofit/>
+          </a:bodyPr>
+          <a:lstStyle/>
+          <a:p>
+            <a:pPr algn="l"/>
+            <a:r>
+              <a:rPr sz="1100" b="1">
+                <a:solidFill>
+                  <a:srgbClr val="157355"/>
+                </a:solidFill>
+                <a:latin typeface="Bricolage Grotesque"/>
+              </a:rPr>
+              <a:t>música</a:t>
+            </a:r>
+          </a:p>
+        </p:txBody>
+      </p:sp>
+      <p:sp>
+        <p:nvSpPr>
+          <p:cNvPr id="57" name="Onthul 11"/>
+          <p:cNvSpPr/>
+          <p:nvPr/>
+        </p:nvSpPr>
+        <p:spPr>
+          <a:xfrm>
+            <a:off x="9114282" y="5328666"/>
+            <a:ext cx="2526030" cy="237744"/>
+          </a:xfrm>
+          <a:prstGeom prst="roundRect">
+            <a:avLst>
+              <a:gd name="adj" fmla="val 20000"/>
+            </a:avLst>
+          </a:prstGeom>
+          <a:solidFill>
+            <a:srgbClr val="E4F4EE"/>
+          </a:solidFill>
+          <a:ln>
+            <a:noFill/>
+          </a:ln>
+          <a:effectLst/>
+        </p:spPr>
+        <p:style>
+          <a:lnRef idx="1">
+            <a:schemeClr val="accent1"/>
+          </a:lnRef>
+          <a:fillRef idx="3">
+            <a:schemeClr val="accent1"/>
+          </a:fillRef>
+          <a:effectRef idx="2">
+            <a:schemeClr val="accent1"/>
+          </a:effectRef>
+          <a:fontRef idx="minor">
+            <a:schemeClr val="lt1"/>
+          </a:fontRef>
+        </p:style>
+        <p:txBody>
+          <a:bodyPr rtlCol="0" anchor="ctr"/>
+          <a:lstStyle/>
+          <a:p/>
+        </p:txBody>
+      </p:sp>
+      <p:sp>
+        <p:nvSpPr>
+          <p:cNvPr id="58" name="OnthulTxt 11"/>
+          <p:cNvSpPr txBox="1"/>
+          <p:nvPr/>
+        </p:nvSpPr>
+        <p:spPr>
+          <a:xfrm>
+            <a:off x="9132570" y="5328666"/>
+            <a:ext cx="2489454" cy="237744"/>
+          </a:xfrm>
+          <a:prstGeom prst="rect">
+            <a:avLst/>
+          </a:prstGeom>
+          <a:noFill/>
+        </p:spPr>
+        <p:txBody>
+          <a:bodyPr wrap="square" anchor="ctr" lIns="45720" rIns="45720" tIns="27432" bIns="27432">
+            <a:normAutofit/>
+          </a:bodyPr>
+          <a:lstStyle/>
+          <a:p>
+            <a:pPr algn="l"/>
+            <a:r>
+              <a:rPr sz="850" b="1">
+                <a:solidFill>
+                  <a:srgbClr val="157355"/>
+                </a:solidFill>
+                <a:latin typeface="Inter"/>
+              </a:rPr>
+              <a:t>esdrújula — «mú»</a:t>
+            </a:r>
+          </a:p>
+        </p:txBody>
+      </p:sp>
+      <p:sp>
+        <p:nvSpPr>
+          <p:cNvPr id="59" name="Tarjeta 12"/>
+          <p:cNvSpPr/>
+          <p:nvPr/>
+        </p:nvSpPr>
+        <p:spPr>
+          <a:xfrm>
+            <a:off x="457200" y="5749290"/>
+            <a:ext cx="2708910" cy="898398"/>
+          </a:xfrm>
+          <a:prstGeom prst="roundRect">
+            <a:avLst>
+              <a:gd name="adj" fmla="val 6000"/>
+            </a:avLst>
+          </a:prstGeom>
+          <a:solidFill>
+            <a:srgbClr val="FFFFFF"/>
+          </a:solidFill>
+          <a:ln w="12700">
+            <a:solidFill>
+              <a:srgbClr val="E4E3DE"/>
+            </a:solidFill>
+          </a:ln>
+          <a:effectLst/>
+        </p:spPr>
+        <p:style>
+          <a:lnRef idx="1">
+            <a:schemeClr val="accent1"/>
+          </a:lnRef>
+          <a:fillRef idx="3">
+            <a:schemeClr val="accent1"/>
+          </a:fillRef>
+          <a:effectRef idx="2">
+            <a:schemeClr val="accent1"/>
+          </a:effectRef>
+          <a:fontRef idx="minor">
+            <a:schemeClr val="lt1"/>
+          </a:fontRef>
+        </p:style>
+        <p:txBody>
+          <a:bodyPr rtlCol="0" anchor="ctr"/>
+          <a:lstStyle/>
+          <a:p/>
+        </p:txBody>
+      </p:sp>
+      <p:sp>
+        <p:nvSpPr>
+          <p:cNvPr id="60" name="TarjetaTxt 12"/>
+          <p:cNvSpPr txBox="1"/>
+          <p:nvPr/>
+        </p:nvSpPr>
+        <p:spPr>
+          <a:xfrm>
+            <a:off x="548640" y="5804154"/>
+            <a:ext cx="2526030" cy="587502"/>
+          </a:xfrm>
+          <a:prstGeom prst="rect">
+            <a:avLst/>
+          </a:prstGeom>
+          <a:noFill/>
+        </p:spPr>
+        <p:txBody>
+          <a:bodyPr wrap="square" anchor="t" lIns="45720" rIns="45720" tIns="27432" bIns="27432">
+            <a:normAutofit/>
+          </a:bodyPr>
+          <a:lstStyle/>
+          <a:p>
+            <a:pPr algn="l"/>
+            <a:r>
+              <a:rPr sz="1100" b="1">
+                <a:solidFill>
+                  <a:srgbClr val="157355"/>
+                </a:solidFill>
+                <a:latin typeface="Bricolage Grotesque"/>
+              </a:rPr>
+              <a:t>reloj</a:t>
+            </a:r>
+          </a:p>
+        </p:txBody>
+      </p:sp>
+      <p:sp>
+        <p:nvSpPr>
+          <p:cNvPr id="61" name="Onthul 12"/>
+          <p:cNvSpPr/>
+          <p:nvPr/>
+        </p:nvSpPr>
+        <p:spPr>
+          <a:xfrm>
+            <a:off x="548640" y="6355080"/>
+            <a:ext cx="2526030" cy="237744"/>
+          </a:xfrm>
+          <a:prstGeom prst="roundRect">
+            <a:avLst>
+              <a:gd name="adj" fmla="val 20000"/>
+            </a:avLst>
+          </a:prstGeom>
+          <a:solidFill>
+            <a:srgbClr val="E4F4EE"/>
+          </a:solidFill>
+          <a:ln>
+            <a:noFill/>
+          </a:ln>
+          <a:effectLst/>
+        </p:spPr>
+        <p:style>
+          <a:lnRef idx="1">
+            <a:schemeClr val="accent1"/>
+          </a:lnRef>
+          <a:fillRef idx="3">
+            <a:schemeClr val="accent1"/>
+          </a:fillRef>
+          <a:effectRef idx="2">
+            <a:schemeClr val="accent1"/>
+          </a:effectRef>
+          <a:fontRef idx="minor">
+            <a:schemeClr val="lt1"/>
+          </a:fontRef>
+        </p:style>
+        <p:txBody>
+          <a:bodyPr rtlCol="0" anchor="ctr"/>
+          <a:lstStyle/>
+          <a:p/>
+        </p:txBody>
+      </p:sp>
+      <p:sp>
+        <p:nvSpPr>
+          <p:cNvPr id="62" name="OnthulTxt 12"/>
+          <p:cNvSpPr txBox="1"/>
+          <p:nvPr/>
+        </p:nvSpPr>
+        <p:spPr>
+          <a:xfrm>
+            <a:off x="566928" y="6355080"/>
+            <a:ext cx="2489454" cy="237744"/>
+          </a:xfrm>
+          <a:prstGeom prst="rect">
+            <a:avLst/>
+          </a:prstGeom>
+          <a:noFill/>
+        </p:spPr>
+        <p:txBody>
+          <a:bodyPr wrap="square" anchor="ctr" lIns="45720" rIns="45720" tIns="27432" bIns="27432">
+            <a:normAutofit/>
+          </a:bodyPr>
+          <a:lstStyle/>
+          <a:p>
+            <a:pPr algn="l"/>
+            <a:r>
+              <a:rPr sz="850" b="1">
+                <a:solidFill>
+                  <a:srgbClr val="157355"/>
+                </a:solidFill>
+                <a:latin typeface="Inter"/>
+              </a:rPr>
+              <a:t>aguda — «loj»</a:t>
+            </a:r>
+          </a:p>
+        </p:txBody>
+      </p:sp>
+      <p:sp>
+        <p:nvSpPr>
+          <p:cNvPr id="63" name="Tarjeta 13"/>
+          <p:cNvSpPr/>
+          <p:nvPr/>
+        </p:nvSpPr>
+        <p:spPr>
+          <a:xfrm>
+            <a:off x="3312414" y="5749290"/>
+            <a:ext cx="2708910" cy="898398"/>
+          </a:xfrm>
+          <a:prstGeom prst="roundRect">
+            <a:avLst>
+              <a:gd name="adj" fmla="val 6000"/>
+            </a:avLst>
+          </a:prstGeom>
+          <a:solidFill>
+            <a:srgbClr val="FFFFFF"/>
+          </a:solidFill>
+          <a:ln w="12700">
+            <a:solidFill>
+              <a:srgbClr val="E4E3DE"/>
+            </a:solidFill>
+          </a:ln>
+          <a:effectLst/>
+        </p:spPr>
+        <p:style>
+          <a:lnRef idx="1">
+            <a:schemeClr val="accent1"/>
+          </a:lnRef>
+          <a:fillRef idx="3">
+            <a:schemeClr val="accent1"/>
+          </a:fillRef>
+          <a:effectRef idx="2">
+            <a:schemeClr val="accent1"/>
+          </a:effectRef>
+          <a:fontRef idx="minor">
+            <a:schemeClr val="lt1"/>
+          </a:fontRef>
+        </p:style>
+        <p:txBody>
+          <a:bodyPr rtlCol="0" anchor="ctr"/>
+          <a:lstStyle/>
+          <a:p/>
+        </p:txBody>
+      </p:sp>
+      <p:sp>
+        <p:nvSpPr>
+          <p:cNvPr id="64" name="TarjetaTxt 13"/>
+          <p:cNvSpPr txBox="1"/>
+          <p:nvPr/>
+        </p:nvSpPr>
+        <p:spPr>
+          <a:xfrm>
+            <a:off x="3403854" y="5804154"/>
+            <a:ext cx="2526030" cy="587502"/>
+          </a:xfrm>
+          <a:prstGeom prst="rect">
+            <a:avLst/>
+          </a:prstGeom>
+          <a:noFill/>
+        </p:spPr>
+        <p:txBody>
+          <a:bodyPr wrap="square" anchor="t" lIns="45720" rIns="45720" tIns="27432" bIns="27432">
+            <a:normAutofit/>
+          </a:bodyPr>
+          <a:lstStyle/>
+          <a:p>
+            <a:pPr algn="l"/>
+            <a:r>
+              <a:rPr sz="1100" b="1">
+                <a:solidFill>
+                  <a:srgbClr val="157355"/>
+                </a:solidFill>
+                <a:latin typeface="Bricolage Grotesque"/>
+              </a:rPr>
+              <a:t>ventana</a:t>
+            </a:r>
+          </a:p>
+        </p:txBody>
+      </p:sp>
+      <p:sp>
+        <p:nvSpPr>
+          <p:cNvPr id="65" name="Onthul 13"/>
+          <p:cNvSpPr/>
+          <p:nvPr/>
+        </p:nvSpPr>
+        <p:spPr>
+          <a:xfrm>
+            <a:off x="3403854" y="6355080"/>
+            <a:ext cx="2526030" cy="237744"/>
+          </a:xfrm>
+          <a:prstGeom prst="roundRect">
+            <a:avLst>
+              <a:gd name="adj" fmla="val 20000"/>
+            </a:avLst>
+          </a:prstGeom>
+          <a:solidFill>
+            <a:srgbClr val="E4F4EE"/>
+          </a:solidFill>
+          <a:ln>
+            <a:noFill/>
+          </a:ln>
+          <a:effectLst/>
+        </p:spPr>
+        <p:style>
+          <a:lnRef idx="1">
+            <a:schemeClr val="accent1"/>
+          </a:lnRef>
+          <a:fillRef idx="3">
+            <a:schemeClr val="accent1"/>
+          </a:fillRef>
+          <a:effectRef idx="2">
+            <a:schemeClr val="accent1"/>
+          </a:effectRef>
+          <a:fontRef idx="minor">
+            <a:schemeClr val="lt1"/>
+          </a:fontRef>
+        </p:style>
+        <p:txBody>
+          <a:bodyPr rtlCol="0" anchor="ctr"/>
+          <a:lstStyle/>
+          <a:p/>
+        </p:txBody>
+      </p:sp>
+      <p:sp>
+        <p:nvSpPr>
+          <p:cNvPr id="66" name="OnthulTxt 13"/>
+          <p:cNvSpPr txBox="1"/>
+          <p:nvPr/>
+        </p:nvSpPr>
+        <p:spPr>
+          <a:xfrm>
+            <a:off x="3422142" y="6355080"/>
+            <a:ext cx="2489454" cy="237744"/>
+          </a:xfrm>
+          <a:prstGeom prst="rect">
+            <a:avLst/>
+          </a:prstGeom>
+          <a:noFill/>
+        </p:spPr>
+        <p:txBody>
+          <a:bodyPr wrap="square" anchor="ctr" lIns="45720" rIns="45720" tIns="27432" bIns="27432">
+            <a:normAutofit/>
+          </a:bodyPr>
+          <a:lstStyle/>
+          <a:p>
+            <a:pPr algn="l"/>
+            <a:r>
+              <a:rPr sz="850" b="1">
+                <a:solidFill>
+                  <a:srgbClr val="157355"/>
+                </a:solidFill>
+                <a:latin typeface="Inter"/>
+              </a:rPr>
+              <a:t>llana — «ta»</a:t>
+            </a:r>
+          </a:p>
+        </p:txBody>
+      </p:sp>
+      <p:sp>
+        <p:nvSpPr>
+          <p:cNvPr id="67" name="Tarjeta 14"/>
+          <p:cNvSpPr/>
+          <p:nvPr/>
+        </p:nvSpPr>
+        <p:spPr>
+          <a:xfrm>
+            <a:off x="6167628" y="5749290"/>
+            <a:ext cx="2708910" cy="898398"/>
+          </a:xfrm>
+          <a:prstGeom prst="roundRect">
+            <a:avLst>
+              <a:gd name="adj" fmla="val 6000"/>
+            </a:avLst>
+          </a:prstGeom>
+          <a:solidFill>
+            <a:srgbClr val="FFFFFF"/>
+          </a:solidFill>
+          <a:ln w="12700">
+            <a:solidFill>
+              <a:srgbClr val="E4E3DE"/>
+            </a:solidFill>
+          </a:ln>
+          <a:effectLst/>
+        </p:spPr>
+        <p:style>
+          <a:lnRef idx="1">
+            <a:schemeClr val="accent1"/>
+          </a:lnRef>
+          <a:fillRef idx="3">
+            <a:schemeClr val="accent1"/>
+          </a:fillRef>
+          <a:effectRef idx="2">
+            <a:schemeClr val="accent1"/>
+          </a:effectRef>
+          <a:fontRef idx="minor">
+            <a:schemeClr val="lt1"/>
+          </a:fontRef>
+        </p:style>
+        <p:txBody>
+          <a:bodyPr rtlCol="0" anchor="ctr"/>
+          <a:lstStyle/>
+          <a:p/>
+        </p:txBody>
+      </p:sp>
+      <p:sp>
+        <p:nvSpPr>
+          <p:cNvPr id="68" name="TarjetaTxt 14"/>
+          <p:cNvSpPr txBox="1"/>
+          <p:nvPr/>
+        </p:nvSpPr>
+        <p:spPr>
+          <a:xfrm>
+            <a:off x="6259068" y="5804154"/>
+            <a:ext cx="2526030" cy="587502"/>
+          </a:xfrm>
+          <a:prstGeom prst="rect">
+            <a:avLst/>
+          </a:prstGeom>
+          <a:noFill/>
+        </p:spPr>
+        <p:txBody>
+          <a:bodyPr wrap="square" anchor="t" lIns="45720" rIns="45720" tIns="27432" bIns="27432">
+            <a:normAutofit/>
+          </a:bodyPr>
+          <a:lstStyle/>
+          <a:p>
+            <a:pPr algn="l"/>
+            <a:r>
+              <a:rPr sz="1100" b="1">
+                <a:solidFill>
+                  <a:srgbClr val="157355"/>
+                </a:solidFill>
+                <a:latin typeface="Bricolage Grotesque"/>
+              </a:rPr>
+              <a:t>plátano</a:t>
+            </a:r>
+          </a:p>
+        </p:txBody>
+      </p:sp>
+      <p:sp>
+        <p:nvSpPr>
+          <p:cNvPr id="69" name="Onthul 14"/>
+          <p:cNvSpPr/>
+          <p:nvPr/>
+        </p:nvSpPr>
+        <p:spPr>
+          <a:xfrm>
+            <a:off x="6259068" y="6355080"/>
+            <a:ext cx="2526030" cy="237744"/>
+          </a:xfrm>
+          <a:prstGeom prst="roundRect">
+            <a:avLst>
+              <a:gd name="adj" fmla="val 20000"/>
+            </a:avLst>
+          </a:prstGeom>
+          <a:solidFill>
+            <a:srgbClr val="E4F4EE"/>
+          </a:solidFill>
+          <a:ln>
+            <a:noFill/>
+          </a:ln>
+          <a:effectLst/>
+        </p:spPr>
+        <p:style>
+          <a:lnRef idx="1">
+            <a:schemeClr val="accent1"/>
+          </a:lnRef>
+          <a:fillRef idx="3">
+            <a:schemeClr val="accent1"/>
+          </a:fillRef>
+          <a:effectRef idx="2">
+            <a:schemeClr val="accent1"/>
+          </a:effectRef>
+          <a:fontRef idx="minor">
+            <a:schemeClr val="lt1"/>
+          </a:fontRef>
+        </p:style>
+        <p:txBody>
+          <a:bodyPr rtlCol="0" anchor="ctr"/>
+          <a:lstStyle/>
+          <a:p/>
+        </p:txBody>
+      </p:sp>
+      <p:sp>
+        <p:nvSpPr>
+          <p:cNvPr id="70" name="OnthulTxt 14"/>
+          <p:cNvSpPr txBox="1"/>
+          <p:nvPr/>
+        </p:nvSpPr>
+        <p:spPr>
+          <a:xfrm>
+            <a:off x="6277356" y="6355080"/>
+            <a:ext cx="2489454" cy="237744"/>
+          </a:xfrm>
+          <a:prstGeom prst="rect">
+            <a:avLst/>
+          </a:prstGeom>
+          <a:noFill/>
+        </p:spPr>
+        <p:txBody>
+          <a:bodyPr wrap="square" anchor="ctr" lIns="45720" rIns="45720" tIns="27432" bIns="27432">
+            <a:normAutofit/>
+          </a:bodyPr>
+          <a:lstStyle/>
+          <a:p>
+            <a:pPr algn="l"/>
+            <a:r>
+              <a:rPr sz="850" b="1">
+                <a:solidFill>
+                  <a:srgbClr val="157355"/>
+                </a:solidFill>
+                <a:latin typeface="Inter"/>
+              </a:rPr>
+              <a:t>esdrújula — «plá»</a:t>
+            </a:r>
+          </a:p>
+        </p:txBody>
+      </p:sp>
+    </p:spTree>
+  </p:cSld>
+  <p:clrMapOvr>
+    <a:masterClrMapping/>
+  </p:clrMapOvr>
+  <p:timing>
+    <p:tnLst>
+      <p:par>
+        <p:cTn id="1" dur="indefinite" restart="never" nodeType="tmRoot">
+          <p:childTnLst>
+            <p:seq concurrent="1" nextAc="seek">
+              <p:cTn id="2" dur="indefinite" nodeType="mainSeq">
+                <p:childTnLst>
+                  <p:par>
+                    <p:cTn id="5" fill="hold">
+                      <p:stCondLst>
+                        <p:cond delay="indefinite"/>
+                      </p:stCondLst>
+                      <p:childTnLst>
+                        <p:par>
+                          <p:cTn id="6" fill="hold">
+                            <p:stCondLst>
+                              <p:cond delay="0"/>
+                            </p:stCondLst>
+                            <p:childTnLst>
+                              <p:par>
+                                <p:cTn id="7" presetID="10" presetClass="entr" presetSubtype="0" fill="hold" grpId="0" nodeType="clickEffect">
+                                  <p:stCondLst>
+                                    <p:cond delay="0"/>
+                                  </p:stCondLst>
+                                  <p:childTnLst>
+                                    <p:set>
+                                      <p:cBhvr>
+                                        <p:cTn id="8" dur="1" fill="hold">
+                                          <p:stCondLst>
+                                            <p:cond delay="0"/>
+                                          </p:stCondLst>
+                                        </p:cTn>
+                                        <p:tgtEl>
+                                          <p:spTgt spid="13"/>
+                                        </p:tgtEl>
+                                        <p:attrNameLst>
+                                          <p:attrName>style.visibility</p:attrName>
+                                        </p:attrNameLst>
+                                      </p:cBhvr>
+                                      <p:to>
+                                        <p:strVal val="visible"/>
+                                      </p:to>
+                                    </p:set>
+                                    <p:animEffect transition="in" filter="fade">
+                                      <p:cBhvr>
+                                        <p:cTn id="9" dur="500"/>
+                                        <p:tgtEl>
+                                          <p:spTgt spid="13"/>
+                                        </p:tgtEl>
+                                      </p:cBhvr>
+                                    </p:animEffect>
+                                  </p:childTnLst>
+                                </p:cTn>
+                              </p:par>
+                            </p:childTnLst>
+                          </p:cTn>
+                        </p:par>
+                      </p:childTnLst>
+                    </p:cTn>
+                  </p:par>
+                  <p:par>
+                    <p:cTn id="10" fill="hold">
+                      <p:stCondLst>
+                        <p:cond delay="indefinite"/>
+                      </p:stCondLst>
+                      <p:childTnLst>
+                        <p:par>
+                          <p:cTn id="11" fill="hold">
+                            <p:stCondLst>
+                              <p:cond delay="0"/>
+                            </p:stCondLst>
+                            <p:childTnLst>
+                              <p:par>
+                                <p:cTn id="12" presetID="10" presetClass="entr" presetSubtype="0" fill="hold" grpId="0" nodeType="clickEffect">
+                                  <p:stCondLst>
+                                    <p:cond delay="0"/>
+                                  </p:stCondLst>
+                                  <p:childTnLst>
+                                    <p:set>
+                                      <p:cBhvr>
+                                        <p:cTn id="13" dur="1" fill="hold">
+                                          <p:stCondLst>
+                                            <p:cond delay="0"/>
+                                          </p:stCondLst>
+                                        </p:cTn>
+                                        <p:tgtEl>
+                                          <p:spTgt spid="14"/>
+                                        </p:tgtEl>
+                                        <p:attrNameLst>
+                                          <p:attrName>style.visibility</p:attrName>
+                                        </p:attrNameLst>
+                                      </p:cBhvr>
+                                      <p:to>
+                                        <p:strVal val="visible"/>
+                                      </p:to>
+                                    </p:set>
+                                    <p:animEffect transition="in" filter="fade">
+                                      <p:cBhvr>
+                                        <p:cTn id="14" dur="500"/>
+                                        <p:tgtEl>
+                                          <p:spTgt spid="14"/>
+                                        </p:tgtEl>
+                                      </p:cBhvr>
+                                    </p:animEffect>
+                                  </p:childTnLst>
+                                </p:cTn>
+                              </p:par>
+                            </p:childTnLst>
+                          </p:cTn>
+                        </p:par>
+                      </p:childTnLst>
+                    </p:cTn>
+                  </p:par>
+                  <p:par>
+                    <p:cTn id="15" fill="hold">
+                      <p:stCondLst>
+                        <p:cond delay="indefinite"/>
+                      </p:stCondLst>
+                      <p:childTnLst>
+                        <p:par>
+                          <p:cTn id="16" fill="hold">
+                            <p:stCondLst>
+                              <p:cond delay="0"/>
+                            </p:stCondLst>
+                            <p:childTnLst>
+                              <p:par>
+                                <p:cTn id="17" presetID="10" presetClass="entr" presetSubtype="0" fill="hold" grpId="0" nodeType="clickEffect">
+                                  <p:stCondLst>
+                                    <p:cond delay="0"/>
+                                  </p:stCondLst>
+                                  <p:childTnLst>
+                                    <p:set>
+                                      <p:cBhvr>
+                                        <p:cTn id="18" dur="1" fill="hold">
+                                          <p:stCondLst>
+                                            <p:cond delay="0"/>
+                                          </p:stCondLst>
+                                        </p:cTn>
+                                        <p:tgtEl>
+                                          <p:spTgt spid="17"/>
+                                        </p:tgtEl>
+                                        <p:attrNameLst>
+                                          <p:attrName>style.visibility</p:attrName>
+                                        </p:attrNameLst>
+                                      </p:cBhvr>
+                                      <p:to>
+                                        <p:strVal val="visible"/>
+                                      </p:to>
+                                    </p:set>
+                                    <p:animEffect transition="in" filter="fade">
+                                      <p:cBhvr>
+                                        <p:cTn id="19" dur="500"/>
+                                        <p:tgtEl>
+                                          <p:spTgt spid="17"/>
+                                        </p:tgtEl>
+                                      </p:cBhvr>
+                                    </p:animEffect>
+                                  </p:childTnLst>
+                                </p:cTn>
+                              </p:par>
+                            </p:childTnLst>
+                          </p:cTn>
+                        </p:par>
+                      </p:childTnLst>
+                    </p:cTn>
+                  </p:par>
+                  <p:par>
+                    <p:cTn id="20" fill="hold">
+                      <p:stCondLst>
+                        <p:cond delay="indefinite"/>
+                      </p:stCondLst>
+                      <p:childTnLst>
+                        <p:par>
+                          <p:cTn id="21" fill="hold">
+                            <p:stCondLst>
+                              <p:cond delay="0"/>
+                            </p:stCondLst>
+                            <p:childTnLst>
+                              <p:par>
+                                <p:cTn id="22" presetID="10" presetClass="entr" presetSubtype="0" fill="hold" grpId="0" nodeType="clickEffect">
+                                  <p:stCondLst>
+                                    <p:cond delay="0"/>
+                                  </p:stCondLst>
+                                  <p:childTnLst>
+                                    <p:set>
+                                      <p:cBhvr>
+                                        <p:cTn id="23" dur="1" fill="hold">
+                                          <p:stCondLst>
+                                            <p:cond delay="0"/>
+                                          </p:stCondLst>
+                                        </p:cTn>
+                                        <p:tgtEl>
+                                          <p:spTgt spid="18"/>
+                                        </p:tgtEl>
+                                        <p:attrNameLst>
+                                          <p:attrName>style.visibility</p:attrName>
+                                        </p:attrNameLst>
+                                      </p:cBhvr>
+                                      <p:to>
+                                        <p:strVal val="visible"/>
+                                      </p:to>
+                                    </p:set>
+                                    <p:animEffect transition="in" filter="fade">
+                                      <p:cBhvr>
+                                        <p:cTn id="24" dur="500"/>
+                                        <p:tgtEl>
+                                          <p:spTgt spid="18"/>
+                                        </p:tgtEl>
+                                      </p:cBhvr>
+                                    </p:animEffect>
+                                  </p:childTnLst>
+                                </p:cTn>
+                              </p:par>
+                            </p:childTnLst>
+                          </p:cTn>
+                        </p:par>
+                      </p:childTnLst>
+                    </p:cTn>
+                  </p:par>
+                  <p:par>
+                    <p:cTn id="25" fill="hold">
+                      <p:stCondLst>
+                        <p:cond delay="indefinite"/>
+                      </p:stCondLst>
+                      <p:childTnLst>
+                        <p:par>
+                          <p:cTn id="26" fill="hold">
+                            <p:stCondLst>
+                              <p:cond delay="0"/>
+                            </p:stCondLst>
+                            <p:childTnLst>
+                              <p:par>
+                                <p:cTn id="27" presetID="10" presetClass="entr" presetSubtype="0" fill="hold" grpId="0" nodeType="clickEffect">
+                                  <p:stCondLst>
+                                    <p:cond delay="0"/>
+                                  </p:stCondLst>
+                                  <p:childTnLst>
+                                    <p:set>
+                                      <p:cBhvr>
+                                        <p:cTn id="28" dur="1" fill="hold">
+                                          <p:stCondLst>
+                                            <p:cond delay="0"/>
+                                          </p:stCondLst>
+                                        </p:cTn>
+                                        <p:tgtEl>
+                                          <p:spTgt spid="21"/>
+                                        </p:tgtEl>
+                                        <p:attrNameLst>
+                                          <p:attrName>style.visibility</p:attrName>
+                                        </p:attrNameLst>
+                                      </p:cBhvr>
+                                      <p:to>
+                                        <p:strVal val="visible"/>
+                                      </p:to>
+                                    </p:set>
+                                    <p:animEffect transition="in" filter="fade">
+                                      <p:cBhvr>
+                                        <p:cTn id="29" dur="500"/>
+                                        <p:tgtEl>
+                                          <p:spTgt spid="21"/>
+                                        </p:tgtEl>
+                                      </p:cBhvr>
+                                    </p:animEffect>
+                                  </p:childTnLst>
+                                </p:cTn>
+                              </p:par>
+                            </p:childTnLst>
+                          </p:cTn>
+                        </p:par>
+                      </p:childTnLst>
+                    </p:cTn>
+                  </p:par>
+                  <p:par>
+                    <p:cTn id="30" fill="hold">
+                      <p:stCondLst>
+                        <p:cond delay="indefinite"/>
+                      </p:stCondLst>
+                      <p:childTnLst>
+                        <p:par>
+                          <p:cTn id="31" fill="hold">
+                            <p:stCondLst>
+                              <p:cond delay="0"/>
+                            </p:stCondLst>
+                            <p:childTnLst>
+                              <p:par>
+                                <p:cTn id="32" presetID="10" presetClass="entr" presetSubtype="0" fill="hold" grpId="0" nodeType="clickEffect">
+                                  <p:stCondLst>
+                                    <p:cond delay="0"/>
+                                  </p:stCondLst>
+                                  <p:childTnLst>
+                                    <p:set>
+                                      <p:cBhvr>
+                                        <p:cTn id="33" dur="1" fill="hold">
+                                          <p:stCondLst>
+                                            <p:cond delay="0"/>
+                                          </p:stCondLst>
+                                        </p:cTn>
+                                        <p:tgtEl>
+                                          <p:spTgt spid="22"/>
+                                        </p:tgtEl>
+                                        <p:attrNameLst>
+                                          <p:attrName>style.visibility</p:attrName>
+                                        </p:attrNameLst>
+                                      </p:cBhvr>
+                                      <p:to>
+                                        <p:strVal val="visible"/>
+                                      </p:to>
+                                    </p:set>
+                                    <p:animEffect transition="in" filter="fade">
+                                      <p:cBhvr>
+                                        <p:cTn id="34" dur="500"/>
+                                        <p:tgtEl>
+                                          <p:spTgt spid="22"/>
+                                        </p:tgtEl>
+                                      </p:cBhvr>
+                                    </p:animEffect>
+                                  </p:childTnLst>
+                                </p:cTn>
+                              </p:par>
+                            </p:childTnLst>
+                          </p:cTn>
+                        </p:par>
+                      </p:childTnLst>
+                    </p:cTn>
+                  </p:par>
+                  <p:par>
+                    <p:cTn id="35" fill="hold">
+                      <p:stCondLst>
+                        <p:cond delay="indefinite"/>
+                      </p:stCondLst>
+                      <p:childTnLst>
+                        <p:par>
+                          <p:cTn id="36" fill="hold">
+                            <p:stCondLst>
+                              <p:cond delay="0"/>
+                            </p:stCondLst>
+                            <p:childTnLst>
+                              <p:par>
+                                <p:cTn id="37" presetID="10" presetClass="entr" presetSubtype="0" fill="hold" grpId="0" nodeType="clickEffect">
+                                  <p:stCondLst>
+                                    <p:cond delay="0"/>
+                                  </p:stCondLst>
+                                  <p:childTnLst>
+                                    <p:set>
+                                      <p:cBhvr>
+                                        <p:cTn id="38" dur="1" fill="hold">
+                                          <p:stCondLst>
+                                            <p:cond delay="0"/>
+                                          </p:stCondLst>
+                                        </p:cTn>
+                                        <p:tgtEl>
+                                          <p:spTgt spid="25"/>
+                                        </p:tgtEl>
+                                        <p:attrNameLst>
+                                          <p:attrName>style.visibility</p:attrName>
+                                        </p:attrNameLst>
+                                      </p:cBhvr>
+                                      <p:to>
+                                        <p:strVal val="visible"/>
+                                      </p:to>
+                                    </p:set>
+                                    <p:animEffect transition="in" filter="fade">
+                                      <p:cBhvr>
+                                        <p:cTn id="39" dur="500"/>
+                                        <p:tgtEl>
+                                          <p:spTgt spid="25"/>
+                                        </p:tgtEl>
+                                      </p:cBhvr>
+                                    </p:animEffect>
+                                  </p:childTnLst>
+                                </p:cTn>
+                              </p:par>
+                            </p:childTnLst>
+                          </p:cTn>
+                        </p:par>
+                      </p:childTnLst>
+                    </p:cTn>
+                  </p:par>
+                  <p:par>
+                    <p:cTn id="40" fill="hold">
+                      <p:stCondLst>
+                        <p:cond delay="indefinite"/>
+                      </p:stCondLst>
+                      <p:childTnLst>
+                        <p:par>
+                          <p:cTn id="41" fill="hold">
+                            <p:stCondLst>
+                              <p:cond delay="0"/>
+                            </p:stCondLst>
+                            <p:childTnLst>
+                              <p:par>
+                                <p:cTn id="42" presetID="10" presetClass="entr" presetSubtype="0" fill="hold" grpId="0" nodeType="clickEffect">
+                                  <p:stCondLst>
+                                    <p:cond delay="0"/>
+                                  </p:stCondLst>
+                                  <p:childTnLst>
+                                    <p:set>
+                                      <p:cBhvr>
+                                        <p:cTn id="43" dur="1" fill="hold">
+                                          <p:stCondLst>
+                                            <p:cond delay="0"/>
+                                          </p:stCondLst>
+                                        </p:cTn>
+                                        <p:tgtEl>
+                                          <p:spTgt spid="26"/>
+                                        </p:tgtEl>
+                                        <p:attrNameLst>
+                                          <p:attrName>style.visibility</p:attrName>
+                                        </p:attrNameLst>
+                                      </p:cBhvr>
+                                      <p:to>
+                                        <p:strVal val="visible"/>
+                                      </p:to>
+                                    </p:set>
+                                    <p:animEffect transition="in" filter="fade">
+                                      <p:cBhvr>
+                                        <p:cTn id="44" dur="500"/>
+                                        <p:tgtEl>
+                                          <p:spTgt spid="26"/>
+                                        </p:tgtEl>
+                                      </p:cBhvr>
+                                    </p:animEffect>
+                                  </p:childTnLst>
+                                </p:cTn>
+                              </p:par>
+                            </p:childTnLst>
+                          </p:cTn>
+                        </p:par>
+                      </p:childTnLst>
+                    </p:cTn>
+                  </p:par>
+                  <p:par>
+                    <p:cTn id="45" fill="hold">
+                      <p:stCondLst>
+                        <p:cond delay="indefinite"/>
+                      </p:stCondLst>
+                      <p:childTnLst>
+                        <p:par>
+                          <p:cTn id="46" fill="hold">
+                            <p:stCondLst>
+                              <p:cond delay="0"/>
+                            </p:stCondLst>
+                            <p:childTnLst>
+                              <p:par>
+                                <p:cTn id="47" presetID="10" presetClass="entr" presetSubtype="0" fill="hold" grpId="0" nodeType="clickEffect">
+                                  <p:stCondLst>
+                                    <p:cond delay="0"/>
+                                  </p:stCondLst>
+                                  <p:childTnLst>
+                                    <p:set>
+                                      <p:cBhvr>
+                                        <p:cTn id="48" dur="1" fill="hold">
+                                          <p:stCondLst>
+                                            <p:cond delay="0"/>
+                                          </p:stCondLst>
+                                        </p:cTn>
+                                        <p:tgtEl>
+                                          <p:spTgt spid="29"/>
+                                        </p:tgtEl>
+                                        <p:attrNameLst>
+                                          <p:attrName>style.visibility</p:attrName>
+                                        </p:attrNameLst>
+                                      </p:cBhvr>
+                                      <p:to>
+                                        <p:strVal val="visible"/>
+                                      </p:to>
+                                    </p:set>
+                                    <p:animEffect transition="in" filter="fade">
+                                      <p:cBhvr>
+                                        <p:cTn id="49" dur="500"/>
+                                        <p:tgtEl>
+                                          <p:spTgt spid="29"/>
+                                        </p:tgtEl>
+                                      </p:cBhvr>
+                                    </p:animEffect>
+                                  </p:childTnLst>
+                                </p:cTn>
+                              </p:par>
+                            </p:childTnLst>
+                          </p:cTn>
+                        </p:par>
+                      </p:childTnLst>
+                    </p:cTn>
+                  </p:par>
+                  <p:par>
+                    <p:cTn id="50" fill="hold">
+                      <p:stCondLst>
+                        <p:cond delay="indefinite"/>
+                      </p:stCondLst>
+                      <p:childTnLst>
+                        <p:par>
+                          <p:cTn id="51" fill="hold">
+                            <p:stCondLst>
+                              <p:cond delay="0"/>
+                            </p:stCondLst>
+                            <p:childTnLst>
+                              <p:par>
+                                <p:cTn id="52" presetID="10" presetClass="entr" presetSubtype="0" fill="hold" grpId="0" nodeType="clickEffect">
+                                  <p:stCondLst>
+                                    <p:cond delay="0"/>
+                                  </p:stCondLst>
+                                  <p:childTnLst>
+                                    <p:set>
+                                      <p:cBhvr>
+                                        <p:cTn id="53" dur="1" fill="hold">
+                                          <p:stCondLst>
+                                            <p:cond delay="0"/>
+                                          </p:stCondLst>
+                                        </p:cTn>
+                                        <p:tgtEl>
+                                          <p:spTgt spid="30"/>
+                                        </p:tgtEl>
+                                        <p:attrNameLst>
+                                          <p:attrName>style.visibility</p:attrName>
+                                        </p:attrNameLst>
+                                      </p:cBhvr>
+                                      <p:to>
+                                        <p:strVal val="visible"/>
+                                      </p:to>
+                                    </p:set>
+                                    <p:animEffect transition="in" filter="fade">
+                                      <p:cBhvr>
+                                        <p:cTn id="54" dur="500"/>
+                                        <p:tgtEl>
+                                          <p:spTgt spid="30"/>
+                                        </p:tgtEl>
+                                      </p:cBhvr>
+                                    </p:animEffect>
+                                  </p:childTnLst>
+                                </p:cTn>
+                              </p:par>
+                            </p:childTnLst>
+                          </p:cTn>
+                        </p:par>
+                      </p:childTnLst>
+                    </p:cTn>
+                  </p:par>
+                  <p:par>
+                    <p:cTn id="55" fill="hold">
+                      <p:stCondLst>
+                        <p:cond delay="indefinite"/>
+                      </p:stCondLst>
+                      <p:childTnLst>
+                        <p:par>
+                          <p:cTn id="56" fill="hold">
+                            <p:stCondLst>
+                              <p:cond delay="0"/>
+                            </p:stCondLst>
+                            <p:childTnLst>
+                              <p:par>
+                                <p:cTn id="57" presetID="10" presetClass="entr" presetSubtype="0" fill="hold" grpId="0" nodeType="clickEffect">
+                                  <p:stCondLst>
+                                    <p:cond delay="0"/>
+                                  </p:stCondLst>
+                                  <p:childTnLst>
+                                    <p:set>
+                                      <p:cBhvr>
+                                        <p:cTn id="58" dur="1" fill="hold">
+                                          <p:stCondLst>
+                                            <p:cond delay="0"/>
+                                          </p:stCondLst>
+                                        </p:cTn>
+                                        <p:tgtEl>
+                                          <p:spTgt spid="33"/>
+                                        </p:tgtEl>
+                                        <p:attrNameLst>
+                                          <p:attrName>style.visibility</p:attrName>
+                                        </p:attrNameLst>
+                                      </p:cBhvr>
+                                      <p:to>
+                                        <p:strVal val="visible"/>
+                                      </p:to>
+                                    </p:set>
+                                    <p:animEffect transition="in" filter="fade">
+                                      <p:cBhvr>
+                                        <p:cTn id="59" dur="500"/>
+                                        <p:tgtEl>
+                                          <p:spTgt spid="33"/>
+                                        </p:tgtEl>
+                                      </p:cBhvr>
+                                    </p:animEffect>
+                                  </p:childTnLst>
+                                </p:cTn>
+                              </p:par>
+                            </p:childTnLst>
+                          </p:cTn>
+                        </p:par>
+                      </p:childTnLst>
+                    </p:cTn>
+                  </p:par>
+                  <p:par>
+                    <p:cTn id="60" fill="hold">
+                      <p:stCondLst>
+                        <p:cond delay="indefinite"/>
+                      </p:stCondLst>
+                      <p:childTnLst>
+                        <p:par>
+                          <p:cTn id="61" fill="hold">
+                            <p:stCondLst>
+                              <p:cond delay="0"/>
+                            </p:stCondLst>
+                            <p:childTnLst>
+                              <p:par>
+                                <p:cTn id="62" presetID="10" presetClass="entr" presetSubtype="0" fill="hold" grpId="0" nodeType="clickEffect">
+                                  <p:stCondLst>
+                                    <p:cond delay="0"/>
+                                  </p:stCondLst>
+                                  <p:childTnLst>
+                                    <p:set>
+                                      <p:cBhvr>
+                                        <p:cTn id="63" dur="1" fill="hold">
+                                          <p:stCondLst>
+                                            <p:cond delay="0"/>
+                                          </p:stCondLst>
+                                        </p:cTn>
+                                        <p:tgtEl>
+                                          <p:spTgt spid="34"/>
+                                        </p:tgtEl>
+                                        <p:attrNameLst>
+                                          <p:attrName>style.visibility</p:attrName>
+                                        </p:attrNameLst>
+                                      </p:cBhvr>
+                                      <p:to>
+                                        <p:strVal val="visible"/>
+                                      </p:to>
+                                    </p:set>
+                                    <p:animEffect transition="in" filter="fade">
+                                      <p:cBhvr>
+                                        <p:cTn id="64" dur="500"/>
+                                        <p:tgtEl>
+                                          <p:spTgt spid="34"/>
+                                        </p:tgtEl>
+                                      </p:cBhvr>
+                                    </p:animEffect>
+                                  </p:childTnLst>
+                                </p:cTn>
+                              </p:par>
+                            </p:childTnLst>
+                          </p:cTn>
+                        </p:par>
+                      </p:childTnLst>
+                    </p:cTn>
+                  </p:par>
+                  <p:par>
+                    <p:cTn id="65" fill="hold">
+                      <p:stCondLst>
+                        <p:cond delay="indefinite"/>
+                      </p:stCondLst>
+                      <p:childTnLst>
+                        <p:par>
+                          <p:cTn id="66" fill="hold">
+                            <p:stCondLst>
+                              <p:cond delay="0"/>
+                            </p:stCondLst>
+                            <p:childTnLst>
+                              <p:par>
+                                <p:cTn id="67" presetID="10" presetClass="entr" presetSubtype="0" fill="hold" grpId="0" nodeType="clickEffect">
+                                  <p:stCondLst>
+                                    <p:cond delay="0"/>
+                                  </p:stCondLst>
+                                  <p:childTnLst>
+                                    <p:set>
+                                      <p:cBhvr>
+                                        <p:cTn id="68" dur="1" fill="hold">
+                                          <p:stCondLst>
+                                            <p:cond delay="0"/>
+                                          </p:stCondLst>
+                                        </p:cTn>
+                                        <p:tgtEl>
+                                          <p:spTgt spid="37"/>
+                                        </p:tgtEl>
+                                        <p:attrNameLst>
+                                          <p:attrName>style.visibility</p:attrName>
+                                        </p:attrNameLst>
+                                      </p:cBhvr>
+                                      <p:to>
+                                        <p:strVal val="visible"/>
+                                      </p:to>
+                                    </p:set>
+                                    <p:animEffect transition="in" filter="fade">
+                                      <p:cBhvr>
+                                        <p:cTn id="69" dur="500"/>
+                                        <p:tgtEl>
+                                          <p:spTgt spid="37"/>
+                                        </p:tgtEl>
+                                      </p:cBhvr>
+                                    </p:animEffect>
+                                  </p:childTnLst>
+                                </p:cTn>
+                              </p:par>
+                            </p:childTnLst>
+                          </p:cTn>
+                        </p:par>
+                      </p:childTnLst>
+                    </p:cTn>
+                  </p:par>
+                  <p:par>
+                    <p:cTn id="70" fill="hold">
+                      <p:stCondLst>
+                        <p:cond delay="indefinite"/>
+                      </p:stCondLst>
+                      <p:childTnLst>
+                        <p:par>
+                          <p:cTn id="71" fill="hold">
+                            <p:stCondLst>
+                              <p:cond delay="0"/>
+                            </p:stCondLst>
+                            <p:childTnLst>
+                              <p:par>
+                                <p:cTn id="72" presetID="10" presetClass="entr" presetSubtype="0" fill="hold" grpId="0" nodeType="clickEffect">
+                                  <p:stCondLst>
+                                    <p:cond delay="0"/>
+                                  </p:stCondLst>
+                                  <p:childTnLst>
+                                    <p:set>
+                                      <p:cBhvr>
+                                        <p:cTn id="73" dur="1" fill="hold">
+                                          <p:stCondLst>
+                                            <p:cond delay="0"/>
+                                          </p:stCondLst>
+                                        </p:cTn>
+                                        <p:tgtEl>
+                                          <p:spTgt spid="38"/>
+                                        </p:tgtEl>
+                                        <p:attrNameLst>
+                                          <p:attrName>style.visibility</p:attrName>
+                                        </p:attrNameLst>
+                                      </p:cBhvr>
+                                      <p:to>
+                                        <p:strVal val="visible"/>
+                                      </p:to>
+                                    </p:set>
+                                    <p:animEffect transition="in" filter="fade">
+                                      <p:cBhvr>
+                                        <p:cTn id="74" dur="500"/>
+                                        <p:tgtEl>
+                                          <p:spTgt spid="38"/>
+                                        </p:tgtEl>
+                                      </p:cBhvr>
+                                    </p:animEffect>
+                                  </p:childTnLst>
+                                </p:cTn>
+                              </p:par>
+                            </p:childTnLst>
+                          </p:cTn>
+                        </p:par>
+                      </p:childTnLst>
+                    </p:cTn>
+                  </p:par>
+                  <p:par>
+                    <p:cTn id="75" fill="hold">
+                      <p:stCondLst>
+                        <p:cond delay="indefinite"/>
+                      </p:stCondLst>
+                      <p:childTnLst>
+                        <p:par>
+                          <p:cTn id="76" fill="hold">
+                            <p:stCondLst>
+                              <p:cond delay="0"/>
+                            </p:stCondLst>
+                            <p:childTnLst>
+                              <p:par>
+                                <p:cTn id="77" presetID="10" presetClass="entr" presetSubtype="0" fill="hold" grpId="0" nodeType="clickEffect">
+                                  <p:stCondLst>
+                                    <p:cond delay="0"/>
+                                  </p:stCondLst>
+                                  <p:childTnLst>
+                                    <p:set>
+                                      <p:cBhvr>
+                                        <p:cTn id="78" dur="1" fill="hold">
+                                          <p:stCondLst>
+                                            <p:cond delay="0"/>
+                                          </p:stCondLst>
+                                        </p:cTn>
+                                        <p:tgtEl>
+                                          <p:spTgt spid="41"/>
+                                        </p:tgtEl>
+                                        <p:attrNameLst>
+                                          <p:attrName>style.visibility</p:attrName>
+                                        </p:attrNameLst>
+                                      </p:cBhvr>
+                                      <p:to>
+                                        <p:strVal val="visible"/>
+                                      </p:to>
+                                    </p:set>
+                                    <p:animEffect transition="in" filter="fade">
+                                      <p:cBhvr>
+                                        <p:cTn id="79" dur="500"/>
+                                        <p:tgtEl>
+                                          <p:spTgt spid="41"/>
+                                        </p:tgtEl>
+                                      </p:cBhvr>
+                                    </p:animEffect>
+                                  </p:childTnLst>
+                                </p:cTn>
+                              </p:par>
+                            </p:childTnLst>
+                          </p:cTn>
+                        </p:par>
+                      </p:childTnLst>
+                    </p:cTn>
+                  </p:par>
+                  <p:par>
+                    <p:cTn id="80" fill="hold">
+                      <p:stCondLst>
+                        <p:cond delay="indefinite"/>
+                      </p:stCondLst>
+                      <p:childTnLst>
+                        <p:par>
+                          <p:cTn id="81" fill="hold">
+                            <p:stCondLst>
+                              <p:cond delay="0"/>
+                            </p:stCondLst>
+                            <p:childTnLst>
+                              <p:par>
+                                <p:cTn id="82" presetID="10" presetClass="entr" presetSubtype="0" fill="hold" grpId="0" nodeType="clickEffect">
+                                  <p:stCondLst>
+                                    <p:cond delay="0"/>
+                                  </p:stCondLst>
+                                  <p:childTnLst>
+                                    <p:set>
+                                      <p:cBhvr>
+                                        <p:cTn id="83" dur="1" fill="hold">
+                                          <p:stCondLst>
+                                            <p:cond delay="0"/>
+                                          </p:stCondLst>
+                                        </p:cTn>
+                                        <p:tgtEl>
+                                          <p:spTgt spid="42"/>
+                                        </p:tgtEl>
+                                        <p:attrNameLst>
+                                          <p:attrName>style.visibility</p:attrName>
+                                        </p:attrNameLst>
+                                      </p:cBhvr>
+                                      <p:to>
+                                        <p:strVal val="visible"/>
+                                      </p:to>
+                                    </p:set>
+                                    <p:animEffect transition="in" filter="fade">
+                                      <p:cBhvr>
+                                        <p:cTn id="84" dur="500"/>
+                                        <p:tgtEl>
+                                          <p:spTgt spid="42"/>
+                                        </p:tgtEl>
+                                      </p:cBhvr>
+                                    </p:animEffect>
+                                  </p:childTnLst>
+                                </p:cTn>
+                              </p:par>
+                            </p:childTnLst>
+                          </p:cTn>
+                        </p:par>
+                      </p:childTnLst>
+                    </p:cTn>
+                  </p:par>
+                  <p:par>
+                    <p:cTn id="85" fill="hold">
+                      <p:stCondLst>
+                        <p:cond delay="indefinite"/>
+                      </p:stCondLst>
+                      <p:childTnLst>
+                        <p:par>
+                          <p:cTn id="86" fill="hold">
+                            <p:stCondLst>
+                              <p:cond delay="0"/>
+                            </p:stCondLst>
+                            <p:childTnLst>
+                              <p:par>
+                                <p:cTn id="87" presetID="10" presetClass="entr" presetSubtype="0" fill="hold" grpId="0" nodeType="clickEffect">
+                                  <p:stCondLst>
+                                    <p:cond delay="0"/>
+                                  </p:stCondLst>
+                                  <p:childTnLst>
+                                    <p:set>
+                                      <p:cBhvr>
+                                        <p:cTn id="88" dur="1" fill="hold">
+                                          <p:stCondLst>
+                                            <p:cond delay="0"/>
+                                          </p:stCondLst>
+                                        </p:cTn>
+                                        <p:tgtEl>
+                                          <p:spTgt spid="45"/>
+                                        </p:tgtEl>
+                                        <p:attrNameLst>
+                                          <p:attrName>style.visibility</p:attrName>
+                                        </p:attrNameLst>
+                                      </p:cBhvr>
+                                      <p:to>
+                                        <p:strVal val="visible"/>
+                                      </p:to>
+                                    </p:set>
+                                    <p:animEffect transition="in" filter="fade">
+                                      <p:cBhvr>
+                                        <p:cTn id="89" dur="500"/>
+                                        <p:tgtEl>
+                                          <p:spTgt spid="45"/>
+                                        </p:tgtEl>
+                                      </p:cBhvr>
+                                    </p:animEffect>
+                                  </p:childTnLst>
+                                </p:cTn>
+                              </p:par>
+                            </p:childTnLst>
+                          </p:cTn>
+                        </p:par>
+                      </p:childTnLst>
+                    </p:cTn>
+                  </p:par>
+                  <p:par>
+                    <p:cTn id="90" fill="hold">
+                      <p:stCondLst>
+                        <p:cond delay="indefinite"/>
+                      </p:stCondLst>
+                      <p:childTnLst>
+                        <p:par>
+                          <p:cTn id="91" fill="hold">
+                            <p:stCondLst>
+                              <p:cond delay="0"/>
+                            </p:stCondLst>
+                            <p:childTnLst>
+                              <p:par>
+                                <p:cTn id="92" presetID="10" presetClass="entr" presetSubtype="0" fill="hold" grpId="0" nodeType="clickEffect">
+                                  <p:stCondLst>
+                                    <p:cond delay="0"/>
+                                  </p:stCondLst>
+                                  <p:childTnLst>
+                                    <p:set>
+                                      <p:cBhvr>
+                                        <p:cTn id="93" dur="1" fill="hold">
+                                          <p:stCondLst>
+                                            <p:cond delay="0"/>
+                                          </p:stCondLst>
+                                        </p:cTn>
+                                        <p:tgtEl>
+                                          <p:spTgt spid="46"/>
+                                        </p:tgtEl>
+                                        <p:attrNameLst>
+                                          <p:attrName>style.visibility</p:attrName>
+                                        </p:attrNameLst>
+                                      </p:cBhvr>
+                                      <p:to>
+                                        <p:strVal val="visible"/>
+                                      </p:to>
+                                    </p:set>
+                                    <p:animEffect transition="in" filter="fade">
+                                      <p:cBhvr>
+                                        <p:cTn id="94" dur="500"/>
+                                        <p:tgtEl>
+                                          <p:spTgt spid="46"/>
+                                        </p:tgtEl>
+                                      </p:cBhvr>
+                                    </p:animEffect>
+                                  </p:childTnLst>
+                                </p:cTn>
+                              </p:par>
+                            </p:childTnLst>
+                          </p:cTn>
+                        </p:par>
+                      </p:childTnLst>
+                    </p:cTn>
+                  </p:par>
+                  <p:par>
+                    <p:cTn id="95" fill="hold">
+                      <p:stCondLst>
+                        <p:cond delay="indefinite"/>
+                      </p:stCondLst>
+                      <p:childTnLst>
+                        <p:par>
+                          <p:cTn id="96" fill="hold">
+                            <p:stCondLst>
+                              <p:cond delay="0"/>
+                            </p:stCondLst>
+                            <p:childTnLst>
+                              <p:par>
+                                <p:cTn id="97" presetID="10" presetClass="entr" presetSubtype="0" fill="hold" grpId="0" nodeType="clickEffect">
+                                  <p:stCondLst>
+                                    <p:cond delay="0"/>
+                                  </p:stCondLst>
+                                  <p:childTnLst>
+                                    <p:set>
+                                      <p:cBhvr>
+                                        <p:cTn id="98" dur="1" fill="hold">
+                                          <p:stCondLst>
+                                            <p:cond delay="0"/>
+                                          </p:stCondLst>
+                                        </p:cTn>
+                                        <p:tgtEl>
+                                          <p:spTgt spid="49"/>
+                                        </p:tgtEl>
+                                        <p:attrNameLst>
+                                          <p:attrName>style.visibility</p:attrName>
+                                        </p:attrNameLst>
+                                      </p:cBhvr>
+                                      <p:to>
+                                        <p:strVal val="visible"/>
+                                      </p:to>
+                                    </p:set>
+                                    <p:animEffect transition="in" filter="fade">
+                                      <p:cBhvr>
+                                        <p:cTn id="99" dur="500"/>
+                                        <p:tgtEl>
+                                          <p:spTgt spid="49"/>
+                                        </p:tgtEl>
+                                      </p:cBhvr>
+                                    </p:animEffect>
+                                  </p:childTnLst>
+                                </p:cTn>
+                              </p:par>
+                            </p:childTnLst>
+                          </p:cTn>
+                        </p:par>
+                      </p:childTnLst>
+                    </p:cTn>
+                  </p:par>
+                  <p:par>
+                    <p:cTn id="100" fill="hold">
+                      <p:stCondLst>
+                        <p:cond delay="indefinite"/>
+                      </p:stCondLst>
+                      <p:childTnLst>
+                        <p:par>
+                          <p:cTn id="101" fill="hold">
+                            <p:stCondLst>
+                              <p:cond delay="0"/>
+                            </p:stCondLst>
+                            <p:childTnLst>
+                              <p:par>
+                                <p:cTn id="102" presetID="10" presetClass="entr" presetSubtype="0" fill="hold" grpId="0" nodeType="clickEffect">
+                                  <p:stCondLst>
+                                    <p:cond delay="0"/>
+                                  </p:stCondLst>
+                                  <p:childTnLst>
+                                    <p:set>
+                                      <p:cBhvr>
+                                        <p:cTn id="103" dur="1" fill="hold">
+                                          <p:stCondLst>
+                                            <p:cond delay="0"/>
+                                          </p:stCondLst>
+                                        </p:cTn>
+                                        <p:tgtEl>
+                                          <p:spTgt spid="50"/>
+                                        </p:tgtEl>
+                                        <p:attrNameLst>
+                                          <p:attrName>style.visibility</p:attrName>
+                                        </p:attrNameLst>
+                                      </p:cBhvr>
+                                      <p:to>
+                                        <p:strVal val="visible"/>
+                                      </p:to>
+                                    </p:set>
+                                    <p:animEffect transition="in" filter="fade">
+                                      <p:cBhvr>
+                                        <p:cTn id="104" dur="500"/>
+                                        <p:tgtEl>
+                                          <p:spTgt spid="50"/>
+                                        </p:tgtEl>
+                                      </p:cBhvr>
+                                    </p:animEffect>
+                                  </p:childTnLst>
+                                </p:cTn>
+                              </p:par>
+                            </p:childTnLst>
+                          </p:cTn>
+                        </p:par>
+                      </p:childTnLst>
+                    </p:cTn>
+                  </p:par>
+                  <p:par>
+                    <p:cTn id="105" fill="hold">
+                      <p:stCondLst>
+                        <p:cond delay="indefinite"/>
+                      </p:stCondLst>
+                      <p:childTnLst>
+                        <p:par>
+                          <p:cTn id="106" fill="hold">
+                            <p:stCondLst>
+                              <p:cond delay="0"/>
+                            </p:stCondLst>
+                            <p:childTnLst>
+                              <p:par>
+                                <p:cTn id="107" presetID="10" presetClass="entr" presetSubtype="0" fill="hold" grpId="0" nodeType="clickEffect">
+                                  <p:stCondLst>
+                                    <p:cond delay="0"/>
+                                  </p:stCondLst>
+                                  <p:childTnLst>
+                                    <p:set>
+                                      <p:cBhvr>
+                                        <p:cTn id="108" dur="1" fill="hold">
+                                          <p:stCondLst>
+                                            <p:cond delay="0"/>
+                                          </p:stCondLst>
+                                        </p:cTn>
+                                        <p:tgtEl>
+                                          <p:spTgt spid="53"/>
+                                        </p:tgtEl>
+                                        <p:attrNameLst>
+                                          <p:attrName>style.visibility</p:attrName>
+                                        </p:attrNameLst>
+                                      </p:cBhvr>
+                                      <p:to>
+                                        <p:strVal val="visible"/>
+                                      </p:to>
+                                    </p:set>
+                                    <p:animEffect transition="in" filter="fade">
+                                      <p:cBhvr>
+                                        <p:cTn id="109" dur="500"/>
+                                        <p:tgtEl>
+                                          <p:spTgt spid="53"/>
+                                        </p:tgtEl>
+                                      </p:cBhvr>
+                                    </p:animEffect>
+                                  </p:childTnLst>
+                                </p:cTn>
+                              </p:par>
+                            </p:childTnLst>
+                          </p:cTn>
+                        </p:par>
+                      </p:childTnLst>
+                    </p:cTn>
+                  </p:par>
+                  <p:par>
+                    <p:cTn id="110" fill="hold">
+                      <p:stCondLst>
+                        <p:cond delay="indefinite"/>
+                      </p:stCondLst>
+                      <p:childTnLst>
+                        <p:par>
+                          <p:cTn id="111" fill="hold">
+                            <p:stCondLst>
+                              <p:cond delay="0"/>
+                            </p:stCondLst>
+                            <p:childTnLst>
+                              <p:par>
+                                <p:cTn id="112" presetID="10" presetClass="entr" presetSubtype="0" fill="hold" grpId="0" nodeType="clickEffect">
+                                  <p:stCondLst>
+                                    <p:cond delay="0"/>
+                                  </p:stCondLst>
+                                  <p:childTnLst>
+                                    <p:set>
+                                      <p:cBhvr>
+                                        <p:cTn id="113" dur="1" fill="hold">
+                                          <p:stCondLst>
+                                            <p:cond delay="0"/>
+                                          </p:stCondLst>
+                                        </p:cTn>
+                                        <p:tgtEl>
+                                          <p:spTgt spid="54"/>
+                                        </p:tgtEl>
+                                        <p:attrNameLst>
+                                          <p:attrName>style.visibility</p:attrName>
+                                        </p:attrNameLst>
+                                      </p:cBhvr>
+                                      <p:to>
+                                        <p:strVal val="visible"/>
+                                      </p:to>
+                                    </p:set>
+                                    <p:animEffect transition="in" filter="fade">
+                                      <p:cBhvr>
+                                        <p:cTn id="114" dur="500"/>
+                                        <p:tgtEl>
+                                          <p:spTgt spid="54"/>
+                                        </p:tgtEl>
+                                      </p:cBhvr>
+                                    </p:animEffect>
+                                  </p:childTnLst>
+                                </p:cTn>
+                              </p:par>
+                            </p:childTnLst>
+                          </p:cTn>
+                        </p:par>
+                      </p:childTnLst>
+                    </p:cTn>
+                  </p:par>
+                  <p:par>
+                    <p:cTn id="115" fill="hold">
+                      <p:stCondLst>
+                        <p:cond delay="indefinite"/>
+                      </p:stCondLst>
+                      <p:childTnLst>
+                        <p:par>
+                          <p:cTn id="116" fill="hold">
+                            <p:stCondLst>
+                              <p:cond delay="0"/>
+                            </p:stCondLst>
+                            <p:childTnLst>
+                              <p:par>
+                                <p:cTn id="117" presetID="10" presetClass="entr" presetSubtype="0" fill="hold" grpId="0" nodeType="clickEffect">
+                                  <p:stCondLst>
+                                    <p:cond delay="0"/>
+                                  </p:stCondLst>
+                                  <p:childTnLst>
+                                    <p:set>
+                                      <p:cBhvr>
+                                        <p:cTn id="118" dur="1" fill="hold">
+                                          <p:stCondLst>
+                                            <p:cond delay="0"/>
+                                          </p:stCondLst>
+                                        </p:cTn>
+                                        <p:tgtEl>
+                                          <p:spTgt spid="57"/>
+                                        </p:tgtEl>
+                                        <p:attrNameLst>
+                                          <p:attrName>style.visibility</p:attrName>
+                                        </p:attrNameLst>
+                                      </p:cBhvr>
+                                      <p:to>
+                                        <p:strVal val="visible"/>
+                                      </p:to>
+                                    </p:set>
+                                    <p:animEffect transition="in" filter="fade">
+                                      <p:cBhvr>
+                                        <p:cTn id="119" dur="500"/>
+                                        <p:tgtEl>
+                                          <p:spTgt spid="57"/>
+                                        </p:tgtEl>
+                                      </p:cBhvr>
+                                    </p:animEffect>
+                                  </p:childTnLst>
+                                </p:cTn>
+                              </p:par>
+                            </p:childTnLst>
+                          </p:cTn>
+                        </p:par>
+                      </p:childTnLst>
+                    </p:cTn>
+                  </p:par>
+                  <p:par>
+                    <p:cTn id="120" fill="hold">
+                      <p:stCondLst>
+                        <p:cond delay="indefinite"/>
+                      </p:stCondLst>
+                      <p:childTnLst>
+                        <p:par>
+                          <p:cTn id="121" fill="hold">
+                            <p:stCondLst>
+                              <p:cond delay="0"/>
+                            </p:stCondLst>
+                            <p:childTnLst>
+                              <p:par>
+                                <p:cTn id="122" presetID="10" presetClass="entr" presetSubtype="0" fill="hold" grpId="0" nodeType="clickEffect">
+                                  <p:stCondLst>
+                                    <p:cond delay="0"/>
+                                  </p:stCondLst>
+                                  <p:childTnLst>
+                                    <p:set>
+                                      <p:cBhvr>
+                                        <p:cTn id="123" dur="1" fill="hold">
+                                          <p:stCondLst>
+                                            <p:cond delay="0"/>
+                                          </p:stCondLst>
+                                        </p:cTn>
+                                        <p:tgtEl>
+                                          <p:spTgt spid="58"/>
+                                        </p:tgtEl>
+                                        <p:attrNameLst>
+                                          <p:attrName>style.visibility</p:attrName>
+                                        </p:attrNameLst>
+                                      </p:cBhvr>
+                                      <p:to>
+                                        <p:strVal val="visible"/>
+                                      </p:to>
+                                    </p:set>
+                                    <p:animEffect transition="in" filter="fade">
+                                      <p:cBhvr>
+                                        <p:cTn id="124" dur="500"/>
+                                        <p:tgtEl>
+                                          <p:spTgt spid="58"/>
+                                        </p:tgtEl>
+                                      </p:cBhvr>
+                                    </p:animEffect>
+                                  </p:childTnLst>
+                                </p:cTn>
+                              </p:par>
+                            </p:childTnLst>
+                          </p:cTn>
+                        </p:par>
+                      </p:childTnLst>
+                    </p:cTn>
+                  </p:par>
+                  <p:par>
+                    <p:cTn id="125" fill="hold">
+                      <p:stCondLst>
+                        <p:cond delay="indefinite"/>
+                      </p:stCondLst>
+                      <p:childTnLst>
+                        <p:par>
+                          <p:cTn id="126" fill="hold">
+                            <p:stCondLst>
+                              <p:cond delay="0"/>
+                            </p:stCondLst>
+                            <p:childTnLst>
+                              <p:par>
+                                <p:cTn id="127" presetID="10" presetClass="entr" presetSubtype="0" fill="hold" grpId="0" nodeType="clickEffect">
+                                  <p:stCondLst>
+                                    <p:cond delay="0"/>
+                                  </p:stCondLst>
+                                  <p:childTnLst>
+                                    <p:set>
+                                      <p:cBhvr>
+                                        <p:cTn id="128" dur="1" fill="hold">
+                                          <p:stCondLst>
+                                            <p:cond delay="0"/>
+                                          </p:stCondLst>
+                                        </p:cTn>
+                                        <p:tgtEl>
+                                          <p:spTgt spid="61"/>
+                                        </p:tgtEl>
+                                        <p:attrNameLst>
+                                          <p:attrName>style.visibility</p:attrName>
+                                        </p:attrNameLst>
+                                      </p:cBhvr>
+                                      <p:to>
+                                        <p:strVal val="visible"/>
+                                      </p:to>
+                                    </p:set>
+                                    <p:animEffect transition="in" filter="fade">
+                                      <p:cBhvr>
+                                        <p:cTn id="129" dur="500"/>
+                                        <p:tgtEl>
+                                          <p:spTgt spid="61"/>
+                                        </p:tgtEl>
+                                      </p:cBhvr>
+                                    </p:animEffect>
+                                  </p:childTnLst>
+                                </p:cTn>
+                              </p:par>
+                            </p:childTnLst>
+                          </p:cTn>
+                        </p:par>
+                      </p:childTnLst>
+                    </p:cTn>
+                  </p:par>
+                  <p:par>
+                    <p:cTn id="130" fill="hold">
+                      <p:stCondLst>
+                        <p:cond delay="indefinite"/>
+                      </p:stCondLst>
+                      <p:childTnLst>
+                        <p:par>
+                          <p:cTn id="131" fill="hold">
+                            <p:stCondLst>
+                              <p:cond delay="0"/>
+                            </p:stCondLst>
+                            <p:childTnLst>
+                              <p:par>
+                                <p:cTn id="132" presetID="10" presetClass="entr" presetSubtype="0" fill="hold" grpId="0" nodeType="clickEffect">
+                                  <p:stCondLst>
+                                    <p:cond delay="0"/>
+                                  </p:stCondLst>
+                                  <p:childTnLst>
+                                    <p:set>
+                                      <p:cBhvr>
+                                        <p:cTn id="133" dur="1" fill="hold">
+                                          <p:stCondLst>
+                                            <p:cond delay="0"/>
+                                          </p:stCondLst>
+                                        </p:cTn>
+                                        <p:tgtEl>
+                                          <p:spTgt spid="62"/>
+                                        </p:tgtEl>
+                                        <p:attrNameLst>
+                                          <p:attrName>style.visibility</p:attrName>
+                                        </p:attrNameLst>
+                                      </p:cBhvr>
+                                      <p:to>
+                                        <p:strVal val="visible"/>
+                                      </p:to>
+                                    </p:set>
+                                    <p:animEffect transition="in" filter="fade">
+                                      <p:cBhvr>
+                                        <p:cTn id="134" dur="500"/>
+                                        <p:tgtEl>
+                                          <p:spTgt spid="62"/>
+                                        </p:tgtEl>
+                                      </p:cBhvr>
+                                    </p:animEffect>
+                                  </p:childTnLst>
+                                </p:cTn>
+                              </p:par>
+                            </p:childTnLst>
+                          </p:cTn>
+                        </p:par>
+                      </p:childTnLst>
+                    </p:cTn>
+                  </p:par>
+                  <p:par>
+                    <p:cTn id="135" fill="hold">
+                      <p:stCondLst>
+                        <p:cond delay="indefinite"/>
+                      </p:stCondLst>
+                      <p:childTnLst>
+                        <p:par>
+                          <p:cTn id="136" fill="hold">
+                            <p:stCondLst>
+                              <p:cond delay="0"/>
+                            </p:stCondLst>
+                            <p:childTnLst>
+                              <p:par>
+                                <p:cTn id="137" presetID="10" presetClass="entr" presetSubtype="0" fill="hold" grpId="0" nodeType="clickEffect">
+                                  <p:stCondLst>
+                                    <p:cond delay="0"/>
+                                  </p:stCondLst>
+                                  <p:childTnLst>
+                                    <p:set>
+                                      <p:cBhvr>
+                                        <p:cTn id="138" dur="1" fill="hold">
+                                          <p:stCondLst>
+                                            <p:cond delay="0"/>
+                                          </p:stCondLst>
+                                        </p:cTn>
+                                        <p:tgtEl>
+                                          <p:spTgt spid="65"/>
+                                        </p:tgtEl>
+                                        <p:attrNameLst>
+                                          <p:attrName>style.visibility</p:attrName>
+                                        </p:attrNameLst>
+                                      </p:cBhvr>
+                                      <p:to>
+                                        <p:strVal val="visible"/>
+                                      </p:to>
+                                    </p:set>
+                                    <p:animEffect transition="in" filter="fade">
+                                      <p:cBhvr>
+                                        <p:cTn id="139" dur="500"/>
+                                        <p:tgtEl>
+                                          <p:spTgt spid="65"/>
+                                        </p:tgtEl>
+                                      </p:cBhvr>
+                                    </p:animEffect>
+                                  </p:childTnLst>
+                                </p:cTn>
+                              </p:par>
+                            </p:childTnLst>
+                          </p:cTn>
+                        </p:par>
+                      </p:childTnLst>
+                    </p:cTn>
+                  </p:par>
+                  <p:par>
+                    <p:cTn id="140" fill="hold">
+                      <p:stCondLst>
+                        <p:cond delay="indefinite"/>
+                      </p:stCondLst>
+                      <p:childTnLst>
+                        <p:par>
+                          <p:cTn id="141" fill="hold">
+                            <p:stCondLst>
+                              <p:cond delay="0"/>
+                            </p:stCondLst>
+                            <p:childTnLst>
+                              <p:par>
+                                <p:cTn id="142" presetID="10" presetClass="entr" presetSubtype="0" fill="hold" grpId="0" nodeType="clickEffect">
+                                  <p:stCondLst>
+                                    <p:cond delay="0"/>
+                                  </p:stCondLst>
+                                  <p:childTnLst>
+                                    <p:set>
+                                      <p:cBhvr>
+                                        <p:cTn id="143" dur="1" fill="hold">
+                                          <p:stCondLst>
+                                            <p:cond delay="0"/>
+                                          </p:stCondLst>
+                                        </p:cTn>
+                                        <p:tgtEl>
+                                          <p:spTgt spid="66"/>
+                                        </p:tgtEl>
+                                        <p:attrNameLst>
+                                          <p:attrName>style.visibility</p:attrName>
+                                        </p:attrNameLst>
+                                      </p:cBhvr>
+                                      <p:to>
+                                        <p:strVal val="visible"/>
+                                      </p:to>
+                                    </p:set>
+                                    <p:animEffect transition="in" filter="fade">
+                                      <p:cBhvr>
+                                        <p:cTn id="144" dur="500"/>
+                                        <p:tgtEl>
+                                          <p:spTgt spid="66"/>
+                                        </p:tgtEl>
+                                      </p:cBhvr>
+                                    </p:animEffect>
+                                  </p:childTnLst>
+                                </p:cTn>
+                              </p:par>
+                            </p:childTnLst>
+                          </p:cTn>
+                        </p:par>
+                      </p:childTnLst>
+                    </p:cTn>
+                  </p:par>
+                  <p:par>
+                    <p:cTn id="145" fill="hold">
+                      <p:stCondLst>
+                        <p:cond delay="indefinite"/>
+                      </p:stCondLst>
+                      <p:childTnLst>
+                        <p:par>
+                          <p:cTn id="146" fill="hold">
+                            <p:stCondLst>
+                              <p:cond delay="0"/>
+                            </p:stCondLst>
+                            <p:childTnLst>
+                              <p:par>
+                                <p:cTn id="147" presetID="10" presetClass="entr" presetSubtype="0" fill="hold" grpId="0" nodeType="clickEffect">
+                                  <p:stCondLst>
+                                    <p:cond delay="0"/>
+                                  </p:stCondLst>
+                                  <p:childTnLst>
+                                    <p:set>
+                                      <p:cBhvr>
+                                        <p:cTn id="148" dur="1" fill="hold">
+                                          <p:stCondLst>
+                                            <p:cond delay="0"/>
+                                          </p:stCondLst>
+                                        </p:cTn>
+                                        <p:tgtEl>
+                                          <p:spTgt spid="69"/>
+                                        </p:tgtEl>
+                                        <p:attrNameLst>
+                                          <p:attrName>style.visibility</p:attrName>
+                                        </p:attrNameLst>
+                                      </p:cBhvr>
+                                      <p:to>
+                                        <p:strVal val="visible"/>
+                                      </p:to>
+                                    </p:set>
+                                    <p:animEffect transition="in" filter="fade">
+                                      <p:cBhvr>
+                                        <p:cTn id="149" dur="500"/>
+                                        <p:tgtEl>
+                                          <p:spTgt spid="69"/>
+                                        </p:tgtEl>
+                                      </p:cBhvr>
+                                    </p:animEffect>
+                                  </p:childTnLst>
+                                </p:cTn>
+                              </p:par>
+                            </p:childTnLst>
+                          </p:cTn>
+                        </p:par>
+                      </p:childTnLst>
+                    </p:cTn>
+                  </p:par>
+                  <p:par>
+                    <p:cTn id="150" fill="hold">
+                      <p:stCondLst>
+                        <p:cond delay="indefinite"/>
+                      </p:stCondLst>
+                      <p:childTnLst>
+                        <p:par>
+                          <p:cTn id="151" fill="hold">
+                            <p:stCondLst>
+                              <p:cond delay="0"/>
+                            </p:stCondLst>
+                            <p:childTnLst>
+                              <p:par>
+                                <p:cTn id="152" presetID="10" presetClass="entr" presetSubtype="0" fill="hold" grpId="0" nodeType="clickEffect">
+                                  <p:stCondLst>
+                                    <p:cond delay="0"/>
+                                  </p:stCondLst>
+                                  <p:childTnLst>
+                                    <p:set>
+                                      <p:cBhvr>
+                                        <p:cTn id="153" dur="1" fill="hold">
+                                          <p:stCondLst>
+                                            <p:cond delay="0"/>
+                                          </p:stCondLst>
+                                        </p:cTn>
+                                        <p:tgtEl>
+                                          <p:spTgt spid="70"/>
+                                        </p:tgtEl>
+                                        <p:attrNameLst>
+                                          <p:attrName>style.visibility</p:attrName>
+                                        </p:attrNameLst>
+                                      </p:cBhvr>
+                                      <p:to>
+                                        <p:strVal val="visible"/>
+                                      </p:to>
+                                    </p:set>
+                                    <p:animEffect transition="in" filter="fade">
+                                      <p:cBhvr>
+                                        <p:cTn id="154" dur="500"/>
+                                        <p:tgtEl>
+                                          <p:spTgt spid="70"/>
+                                        </p:tgtEl>
+                                      </p:cBhvr>
+                                    </p:animEffect>
+                                  </p:childTnLst>
+                                </p:cTn>
+                              </p:par>
+                            </p:childTnLst>
+                          </p:cTn>
+                        </p:par>
+                      </p:childTnLst>
+                    </p:cTn>
+                  </p:par>
+                </p:childTnLst>
+              </p:cTn>
+              <p:prevCondLst>
+                <p:cond evt="onPrev" delay="0">
+                  <p:tgtEl>
+                    <p:sldTgt/>
+                  </p:tgtEl>
+                </p:cond>
+              </p:prevCondLst>
+              <p:nextCondLst>
+                <p:cond evt="onNext" delay="0">
+                  <p:tgtEl>
+                    <p:sldTgt/>
+                  </p:tgtEl>
+                </p:cond>
+              </p:nextCondLst>
+            </p:seq>
+          </p:childTnLst>
+        </p:cTn>
+      </p:par>
+    </p:tnLst>
+  </p:timing>
+</p:sld>
+</file>
+
+<file path=ppt/slides/slide25.xml><?xml version="1.0" encoding="utf-8"?>
+<p:sld xmlns:a="http://schemas.openxmlformats.org/drawingml/2006/main" xmlns:p="http://schemas.openxmlformats.org/presentationml/2006/main" xmlns:r="http://schemas.openxmlformats.org/officeDocument/2006/relationships">
+  <p:cSld>
+    <p:spTree>
+      <p:nvGrpSpPr>
+        <p:cNvPr id="1" name=""/>
+        <p:cNvGrpSpPr/>
+        <p:nvPr/>
+      </p:nvGrpSpPr>
+      <p:grpSpPr/>
+      <p:sp>
+        <p:nvSpPr>
+          <p:cNvPr id="2" name="Fondo"/>
+          <p:cNvSpPr/>
+          <p:nvPr/>
+        </p:nvSpPr>
+        <p:spPr>
+          <a:xfrm>
+            <a:off x="0" y="0"/>
+            <a:ext cx="12191695" cy="6858000"/>
+          </a:xfrm>
+          <a:prstGeom prst="rect">
+            <a:avLst/>
+          </a:prstGeom>
+          <a:solidFill>
+            <a:srgbClr val="FCFBF8"/>
+          </a:solidFill>
+          <a:ln>
+            <a:noFill/>
+          </a:ln>
+          <a:effectLst/>
+        </p:spPr>
+        <p:style>
+          <a:lnRef idx="1">
+            <a:schemeClr val="accent1"/>
+          </a:lnRef>
+          <a:fillRef idx="3">
+            <a:schemeClr val="accent1"/>
+          </a:fillRef>
+          <a:effectRef idx="2">
+            <a:schemeClr val="accent1"/>
+          </a:effectRef>
+          <a:fontRef idx="minor">
+            <a:schemeClr val="lt1"/>
+          </a:fontRef>
+        </p:style>
+        <p:txBody>
+          <a:bodyPr rtlCol="0" anchor="ctr"/>
+          <a:lstStyle/>
+          <a:p/>
+        </p:txBody>
+      </p:sp>
+      <p:sp>
+        <p:nvSpPr>
+          <p:cNvPr id="3" name="Cabecera"/>
+          <p:cNvSpPr/>
+          <p:nvPr/>
+        </p:nvSpPr>
+        <p:spPr>
+          <a:xfrm>
+            <a:off x="0" y="0"/>
+            <a:ext cx="12191695" cy="1078992"/>
+          </a:xfrm>
+          <a:prstGeom prst="rect">
+            <a:avLst/>
+          </a:prstGeom>
+          <a:solidFill>
+            <a:srgbClr val="1E9E74"/>
+          </a:solidFill>
+          <a:ln>
+            <a:noFill/>
+          </a:ln>
+          <a:effectLst/>
+        </p:spPr>
+        <p:style>
+          <a:lnRef idx="1">
+            <a:schemeClr val="accent1"/>
+          </a:lnRef>
+          <a:fillRef idx="3">
+            <a:schemeClr val="accent1"/>
+          </a:fillRef>
+          <a:effectRef idx="2">
+            <a:schemeClr val="accent1"/>
+          </a:effectRef>
+          <a:fontRef idx="minor">
+            <a:schemeClr val="lt1"/>
+          </a:fontRef>
+        </p:style>
+        <p:txBody>
+          <a:bodyPr rtlCol="0" anchor="ctr"/>
+          <a:lstStyle/>
+          <a:p/>
+        </p:txBody>
+      </p:sp>
+      <p:sp>
+        <p:nvSpPr>
+          <p:cNvPr id="4" name="Chip"/>
+          <p:cNvSpPr/>
+          <p:nvPr/>
+        </p:nvSpPr>
+        <p:spPr>
+          <a:xfrm>
+            <a:off x="457200" y="182880"/>
+            <a:ext cx="3017520" cy="292608"/>
+          </a:xfrm>
+          <a:prstGeom prst="roundRect">
+            <a:avLst>
+              <a:gd name="adj" fmla="val 50000"/>
+            </a:avLst>
+          </a:prstGeom>
+          <a:solidFill>
+            <a:srgbClr val="FFFFFF"/>
+          </a:solidFill>
+          <a:ln>
+            <a:noFill/>
+          </a:ln>
+          <a:effectLst/>
+        </p:spPr>
+        <p:style>
+          <a:lnRef idx="1">
+            <a:schemeClr val="accent1"/>
+          </a:lnRef>
+          <a:fillRef idx="3">
+            <a:schemeClr val="accent1"/>
+          </a:fillRef>
+          <a:effectRef idx="2">
+            <a:schemeClr val="accent1"/>
+          </a:effectRef>
+          <a:fontRef idx="minor">
+            <a:schemeClr val="lt1"/>
+          </a:fontRef>
+        </p:style>
+        <p:txBody>
+          <a:bodyPr rtlCol="0" anchor="ctr"/>
+          <a:lstStyle/>
+          <a:p/>
+        </p:txBody>
+      </p:sp>
+      <p:sp>
+        <p:nvSpPr>
+          <p:cNvPr id="5" name="ChipTxt"/>
+          <p:cNvSpPr txBox="1"/>
+          <p:nvPr/>
+        </p:nvSpPr>
+        <p:spPr>
+          <a:xfrm>
+            <a:off x="457200" y="173736"/>
+            <a:ext cx="3017520" cy="310896"/>
+          </a:xfrm>
+          <a:prstGeom prst="rect">
+            <a:avLst/>
+          </a:prstGeom>
+          <a:noFill/>
+        </p:spPr>
+        <p:txBody>
+          <a:bodyPr wrap="square" anchor="ctr" lIns="45720" rIns="45720" tIns="27432" bIns="27432">
+            <a:normAutofit/>
+          </a:bodyPr>
+          <a:lstStyle/>
+          <a:p>
+            <a:pPr algn="ctr"/>
+            <a:r>
+              <a:rPr sz="950" b="1">
+                <a:solidFill>
+                  <a:srgbClr val="157355"/>
+                </a:solidFill>
+                <a:latin typeface="Inter"/>
+              </a:rPr>
+              <a:t>RETO 6 · MEDIAFORMAT</a:t>
+            </a:r>
+          </a:p>
+        </p:txBody>
+      </p:sp>
+      <p:sp>
+        <p:nvSpPr>
+          <p:cNvPr id="6" name="Titulo"/>
+          <p:cNvSpPr txBox="1"/>
+          <p:nvPr/>
+        </p:nvSpPr>
+        <p:spPr>
+          <a:xfrm>
+            <a:off x="457200" y="502920"/>
+            <a:ext cx="8412480" cy="475488"/>
+          </a:xfrm>
+          <a:prstGeom prst="rect">
+            <a:avLst/>
+          </a:prstGeom>
+          <a:noFill/>
+        </p:spPr>
+        <p:txBody>
+          <a:bodyPr wrap="square" anchor="t" lIns="45720" rIns="45720" tIns="27432" bIns="27432">
+            <a:normAutofit/>
+          </a:bodyPr>
+          <a:lstStyle/>
+          <a:p>
+            <a:pPr algn="l"/>
+            <a:r>
+              <a:rPr sz="2700" b="1">
+                <a:solidFill>
+                  <a:srgbClr val="FFFFFF"/>
+                </a:solidFill>
+                <a:latin typeface="Bricolage Grotesque"/>
+              </a:rPr>
+              <a:t>Radio Nombres</a:t>
+            </a:r>
+          </a:p>
+        </p:txBody>
+      </p:sp>
+      <p:sp>
+        <p:nvSpPr>
+          <p:cNvPr id="7" name="Badges"/>
+          <p:cNvSpPr txBox="1"/>
+          <p:nvPr/>
+        </p:nvSpPr>
+        <p:spPr>
+          <a:xfrm>
+            <a:off x="9052560" y="256032"/>
+            <a:ext cx="2651760" cy="640080"/>
+          </a:xfrm>
+          <a:prstGeom prst="rect">
+            <a:avLst/>
+          </a:prstGeom>
+          <a:noFill/>
+        </p:spPr>
+        <p:txBody>
+          <a:bodyPr wrap="square" anchor="t" lIns="45720" rIns="45720" tIns="27432" bIns="27432">
+            <a:normAutofit/>
+          </a:bodyPr>
+          <a:lstStyle/>
+          <a:p>
+            <a:pPr algn="r"/>
+            <a:r>
+              <a:rPr sz="1000">
+                <a:solidFill>
+                  <a:srgbClr val="E4F4EE"/>
+                </a:solidFill>
+                <a:latin typeface="Inter"/>
+              </a:rPr>
+              <a:t>🏫 Toda la clase</a:t>
+            </a:r>
+          </a:p>
+          <a:p>
+            <a:pPr algn="r"/>
+            <a:r>
+              <a:rPr sz="1000">
+                <a:solidFill>
+                  <a:srgbClr val="E4F4EE"/>
+                </a:solidFill>
+                <a:latin typeface="Inter"/>
+              </a:rPr>
+              <a:t>± 12 min · ★★☆</a:t>
+            </a:r>
+          </a:p>
+        </p:txBody>
+      </p:sp>
+      <p:sp>
+        <p:nvSpPr>
+          <p:cNvPr id="8" name="Gancho"/>
+          <p:cNvSpPr txBox="1"/>
+          <p:nvPr/>
+        </p:nvSpPr>
+        <p:spPr>
+          <a:xfrm>
+            <a:off x="457200" y="1225296"/>
+            <a:ext cx="11274552" cy="566928"/>
+          </a:xfrm>
+          <a:prstGeom prst="rect">
+            <a:avLst/>
+          </a:prstGeom>
+          <a:noFill/>
+        </p:spPr>
+        <p:txBody>
+          <a:bodyPr wrap="square" anchor="t" lIns="45720" rIns="45720" tIns="27432" bIns="27432">
+            <a:normAutofit/>
+          </a:bodyPr>
+          <a:lstStyle/>
+          <a:p>
+            <a:pPr algn="l"/>
+            <a:r>
+              <a:rPr sz="1600" b="1">
+                <a:solidFill>
+                  <a:srgbClr val="157355"/>
+                </a:solidFill>
+                <a:latin typeface="Bricolage Grotesque"/>
+              </a:rPr>
+              <a:t>Bienvenidos a Radio Nombres, el concurso donde solo cuentan las letras.</a:t>
+            </a:r>
+          </a:p>
+          <a:p>
+            <a:pPr algn="l"/>
+            <a:r>
+              <a:rPr sz="1100" i="1">
+                <a:solidFill>
+                  <a:srgbClr val="6A6E78"/>
+                </a:solidFill>
+                <a:latin typeface="Inter"/>
+              </a:rPr>
+              <a:t>Welkom bij Radio Namen — de spelshow waarin alleen de letters tellen.</a:t>
+            </a:r>
+          </a:p>
+        </p:txBody>
+      </p:sp>
+      <p:sp>
+        <p:nvSpPr>
+          <p:cNvPr id="9" name="ReglaCaja"/>
+          <p:cNvSpPr/>
+          <p:nvPr/>
+        </p:nvSpPr>
+        <p:spPr>
+          <a:xfrm>
+            <a:off x="457200" y="1847088"/>
+            <a:ext cx="11274552" cy="658368"/>
+          </a:xfrm>
+          <a:prstGeom prst="roundRect">
+            <a:avLst>
+              <a:gd name="adj" fmla="val 5000"/>
+            </a:avLst>
+          </a:prstGeom>
+          <a:solidFill>
+            <a:srgbClr val="FBF3D6"/>
+          </a:solidFill>
+          <a:ln>
+            <a:noFill/>
+          </a:ln>
+          <a:effectLst/>
+        </p:spPr>
+        <p:style>
+          <a:lnRef idx="1">
+            <a:schemeClr val="accent1"/>
+          </a:lnRef>
+          <a:fillRef idx="3">
+            <a:schemeClr val="accent1"/>
+          </a:fillRef>
+          <a:effectRef idx="2">
+            <a:schemeClr val="accent1"/>
+          </a:effectRef>
+          <a:fontRef idx="minor">
+            <a:schemeClr val="lt1"/>
+          </a:fontRef>
+        </p:style>
+        <p:txBody>
+          <a:bodyPr rtlCol="0" anchor="ctr"/>
+          <a:lstStyle/>
+          <a:p/>
+        </p:txBody>
+      </p:sp>
+      <p:sp>
+        <p:nvSpPr>
+          <p:cNvPr id="10" name="ReglaTxt"/>
+          <p:cNvSpPr txBox="1"/>
+          <p:nvPr/>
+        </p:nvSpPr>
+        <p:spPr>
+          <a:xfrm>
+            <a:off x="603504" y="1883664"/>
+            <a:ext cx="10972800" cy="585216"/>
+          </a:xfrm>
+          <a:prstGeom prst="rect">
+            <a:avLst/>
+          </a:prstGeom>
+          <a:noFill/>
+        </p:spPr>
+        <p:txBody>
+          <a:bodyPr wrap="square" anchor="t" lIns="45720" rIns="45720" tIns="27432" bIns="27432">
+            <a:normAutofit/>
+          </a:bodyPr>
+          <a:lstStyle/>
+          <a:p>
+            <a:pPr algn="l"/>
+            <a:r>
+              <a:rPr sz="850" b="1">
+                <a:solidFill>
+                  <a:srgbClr val="B7860B"/>
+                </a:solidFill>
+                <a:latin typeface="Inter"/>
+              </a:rPr>
+              <a:t>LA REGLA DEL RETO</a:t>
+            </a:r>
+          </a:p>
+          <a:p>
+            <a:pPr algn="l"/>
+            <a:r>
+              <a:rPr sz="1100">
+                <a:solidFill>
+                  <a:srgbClr val="20242E"/>
+                </a:solidFill>
+                <a:latin typeface="Inter"/>
+              </a:rPr>
+              <a:t>Je zegt de lettersnamen (efe, hache, uve doble), nooit de klanken. Wie «ffff» zegt in plaats van «efe», verliest de beurt.</a:t>
+            </a:r>
+          </a:p>
+        </p:txBody>
+      </p:sp>
+      <p:sp>
+        <p:nvSpPr>
+          <p:cNvPr id="11" name="Tarjeta 0"/>
+          <p:cNvSpPr/>
+          <p:nvPr/>
+        </p:nvSpPr>
+        <p:spPr>
+          <a:xfrm>
+            <a:off x="457200" y="2670048"/>
+            <a:ext cx="2708910" cy="1170432"/>
+          </a:xfrm>
+          <a:prstGeom prst="roundRect">
+            <a:avLst>
+              <a:gd name="adj" fmla="val 6000"/>
+            </a:avLst>
+          </a:prstGeom>
+          <a:solidFill>
+            <a:srgbClr val="FFFFFF"/>
+          </a:solidFill>
+          <a:ln w="12700">
+            <a:solidFill>
+              <a:srgbClr val="E4E3DE"/>
+            </a:solidFill>
+          </a:ln>
+          <a:effectLst/>
+        </p:spPr>
+        <p:style>
+          <a:lnRef idx="1">
+            <a:schemeClr val="accent1"/>
+          </a:lnRef>
+          <a:fillRef idx="3">
+            <a:schemeClr val="accent1"/>
+          </a:fillRef>
+          <a:effectRef idx="2">
+            <a:schemeClr val="accent1"/>
+          </a:effectRef>
+          <a:fontRef idx="minor">
+            <a:schemeClr val="lt1"/>
+          </a:fontRef>
+        </p:style>
+        <p:txBody>
+          <a:bodyPr rtlCol="0" anchor="ctr"/>
+          <a:lstStyle/>
+          <a:p/>
+        </p:txBody>
+      </p:sp>
+      <p:sp>
+        <p:nvSpPr>
+          <p:cNvPr id="12" name="TarjetaTxt 0"/>
+          <p:cNvSpPr txBox="1"/>
+          <p:nvPr/>
+        </p:nvSpPr>
+        <p:spPr>
+          <a:xfrm>
+            <a:off x="548640" y="2724912"/>
+            <a:ext cx="2526030" cy="1060704"/>
+          </a:xfrm>
+          <a:prstGeom prst="rect">
+            <a:avLst/>
+          </a:prstGeom>
+          <a:noFill/>
+        </p:spPr>
+        <p:txBody>
+          <a:bodyPr wrap="square" anchor="t" lIns="45720" rIns="45720" tIns="27432" bIns="27432">
+            <a:normAutofit/>
+          </a:bodyPr>
+          <a:lstStyle/>
+          <a:p>
+            <a:pPr algn="l"/>
+            <a:r>
+              <a:rPr sz="1100" b="1">
+                <a:solidFill>
+                  <a:srgbClr val="157355"/>
+                </a:solidFill>
+                <a:latin typeface="Bricolage Grotesque"/>
+              </a:rPr>
+              <a:t>Ronda 1</a:t>
+            </a:r>
+          </a:p>
+          <a:p>
+            <a:pPr algn="l"/>
+            <a:r>
+              <a:rPr sz="1000">
+                <a:solidFill>
+                  <a:srgbClr val="20242E"/>
+                </a:solidFill>
+                <a:latin typeface="Inter"/>
+              </a:rPr>
+              <a:t>Ronda 1 — los compañeros: deletrea el nombre de alguien de la clase.</a:t>
+            </a:r>
+          </a:p>
+        </p:txBody>
+      </p:sp>
+      <p:sp>
+        <p:nvSpPr>
+          <p:cNvPr id="13" name="Tarjeta 1"/>
+          <p:cNvSpPr/>
+          <p:nvPr/>
+        </p:nvSpPr>
+        <p:spPr>
+          <a:xfrm>
+            <a:off x="3312414" y="2670048"/>
+            <a:ext cx="2708910" cy="1170432"/>
+          </a:xfrm>
+          <a:prstGeom prst="roundRect">
+            <a:avLst>
+              <a:gd name="adj" fmla="val 6000"/>
+            </a:avLst>
+          </a:prstGeom>
+          <a:solidFill>
+            <a:srgbClr val="FFFFFF"/>
+          </a:solidFill>
+          <a:ln w="12700">
+            <a:solidFill>
+              <a:srgbClr val="E4E3DE"/>
+            </a:solidFill>
+          </a:ln>
+          <a:effectLst/>
+        </p:spPr>
+        <p:style>
+          <a:lnRef idx="1">
+            <a:schemeClr val="accent1"/>
+          </a:lnRef>
+          <a:fillRef idx="3">
+            <a:schemeClr val="accent1"/>
+          </a:fillRef>
+          <a:effectRef idx="2">
+            <a:schemeClr val="accent1"/>
+          </a:effectRef>
+          <a:fontRef idx="minor">
+            <a:schemeClr val="lt1"/>
+          </a:fontRef>
+        </p:style>
+        <p:txBody>
+          <a:bodyPr rtlCol="0" anchor="ctr"/>
+          <a:lstStyle/>
+          <a:p/>
+        </p:txBody>
+      </p:sp>
+      <p:sp>
+        <p:nvSpPr>
+          <p:cNvPr id="14" name="TarjetaTxt 1"/>
+          <p:cNvSpPr txBox="1"/>
+          <p:nvPr/>
+        </p:nvSpPr>
+        <p:spPr>
+          <a:xfrm>
+            <a:off x="3403854" y="2724912"/>
+            <a:ext cx="2526030" cy="1060704"/>
+          </a:xfrm>
+          <a:prstGeom prst="rect">
+            <a:avLst/>
+          </a:prstGeom>
+          <a:noFill/>
+        </p:spPr>
+        <p:txBody>
+          <a:bodyPr wrap="square" anchor="t" lIns="45720" rIns="45720" tIns="27432" bIns="27432">
+            <a:normAutofit/>
+          </a:bodyPr>
+          <a:lstStyle/>
+          <a:p>
+            <a:pPr algn="l"/>
+            <a:r>
+              <a:rPr sz="1100" b="1">
+                <a:solidFill>
+                  <a:srgbClr val="157355"/>
+                </a:solidFill>
+                <a:latin typeface="Bricolage Grotesque"/>
+              </a:rPr>
+              <a:t>Ronda 2</a:t>
+            </a:r>
+          </a:p>
+          <a:p>
+            <a:pPr algn="l"/>
+            <a:r>
+              <a:rPr sz="1000">
+                <a:solidFill>
+                  <a:srgbClr val="20242E"/>
+                </a:solidFill>
+                <a:latin typeface="Inter"/>
+              </a:rPr>
+              <a:t>Ronda 2 — las ciudades: el/la profe dice la ciudad, tú la deletreas.</a:t>
+            </a:r>
+          </a:p>
+        </p:txBody>
+      </p:sp>
+      <p:sp>
+        <p:nvSpPr>
+          <p:cNvPr id="15" name="Tarjeta 2"/>
+          <p:cNvSpPr/>
+          <p:nvPr/>
+        </p:nvSpPr>
+        <p:spPr>
+          <a:xfrm>
+            <a:off x="6167628" y="2670048"/>
+            <a:ext cx="2708910" cy="1170432"/>
+          </a:xfrm>
+          <a:prstGeom prst="roundRect">
+            <a:avLst>
+              <a:gd name="adj" fmla="val 6000"/>
+            </a:avLst>
+          </a:prstGeom>
+          <a:solidFill>
+            <a:srgbClr val="FFFFFF"/>
+          </a:solidFill>
+          <a:ln w="12700">
+            <a:solidFill>
+              <a:srgbClr val="E4E3DE"/>
+            </a:solidFill>
+          </a:ln>
+          <a:effectLst/>
+        </p:spPr>
+        <p:style>
+          <a:lnRef idx="1">
+            <a:schemeClr val="accent1"/>
+          </a:lnRef>
+          <a:fillRef idx="3">
+            <a:schemeClr val="accent1"/>
+          </a:fillRef>
+          <a:effectRef idx="2">
+            <a:schemeClr val="accent1"/>
+          </a:effectRef>
+          <a:fontRef idx="minor">
+            <a:schemeClr val="lt1"/>
+          </a:fontRef>
+        </p:style>
+        <p:txBody>
+          <a:bodyPr rtlCol="0" anchor="ctr"/>
+          <a:lstStyle/>
+          <a:p/>
+        </p:txBody>
+      </p:sp>
+      <p:sp>
+        <p:nvSpPr>
+          <p:cNvPr id="16" name="TarjetaTxt 2"/>
+          <p:cNvSpPr txBox="1"/>
+          <p:nvPr/>
+        </p:nvSpPr>
+        <p:spPr>
+          <a:xfrm>
+            <a:off x="6259068" y="2724912"/>
+            <a:ext cx="2526030" cy="1060704"/>
+          </a:xfrm>
+          <a:prstGeom prst="rect">
+            <a:avLst/>
+          </a:prstGeom>
+          <a:noFill/>
+        </p:spPr>
+        <p:txBody>
+          <a:bodyPr wrap="square" anchor="t" lIns="45720" rIns="45720" tIns="27432" bIns="27432">
+            <a:normAutofit/>
+          </a:bodyPr>
+          <a:lstStyle/>
+          <a:p>
+            <a:pPr algn="l"/>
+            <a:r>
+              <a:rPr sz="1100" b="1">
+                <a:solidFill>
+                  <a:srgbClr val="157355"/>
+                </a:solidFill>
+                <a:latin typeface="Bricolage Grotesque"/>
+              </a:rPr>
+              <a:t>Ronda 3</a:t>
+            </a:r>
+          </a:p>
+          <a:p>
+            <a:pPr algn="l"/>
+            <a:r>
+              <a:rPr sz="1000">
+                <a:solidFill>
+                  <a:srgbClr val="20242E"/>
+                </a:solidFill>
+                <a:latin typeface="Inter"/>
+              </a:rPr>
+              <a:t>Ronda 3 — las trampas: nombres flamencos con w, y, ij, j.</a:t>
+            </a:r>
+          </a:p>
+        </p:txBody>
+      </p:sp>
+      <p:sp>
+        <p:nvSpPr>
+          <p:cNvPr id="17" name="Tarjeta 3"/>
+          <p:cNvSpPr/>
+          <p:nvPr/>
+        </p:nvSpPr>
+        <p:spPr>
+          <a:xfrm>
+            <a:off x="9022842" y="2670048"/>
+            <a:ext cx="2708910" cy="1170432"/>
+          </a:xfrm>
+          <a:prstGeom prst="roundRect">
+            <a:avLst>
+              <a:gd name="adj" fmla="val 6000"/>
+            </a:avLst>
+          </a:prstGeom>
+          <a:solidFill>
+            <a:srgbClr val="FFFFFF"/>
+          </a:solidFill>
+          <a:ln w="12700">
+            <a:solidFill>
+              <a:srgbClr val="E4E3DE"/>
+            </a:solidFill>
+          </a:ln>
+          <a:effectLst/>
+        </p:spPr>
+        <p:style>
+          <a:lnRef idx="1">
+            <a:schemeClr val="accent1"/>
+          </a:lnRef>
+          <a:fillRef idx="3">
+            <a:schemeClr val="accent1"/>
+          </a:fillRef>
+          <a:effectRef idx="2">
+            <a:schemeClr val="accent1"/>
+          </a:effectRef>
+          <a:fontRef idx="minor">
+            <a:schemeClr val="lt1"/>
+          </a:fontRef>
+        </p:style>
+        <p:txBody>
+          <a:bodyPr rtlCol="0" anchor="ctr"/>
+          <a:lstStyle/>
+          <a:p/>
+        </p:txBody>
+      </p:sp>
+      <p:sp>
+        <p:nvSpPr>
+          <p:cNvPr id="18" name="TarjetaTxt 3"/>
+          <p:cNvSpPr txBox="1"/>
+          <p:nvPr/>
+        </p:nvSpPr>
+        <p:spPr>
+          <a:xfrm>
+            <a:off x="9114282" y="2724912"/>
+            <a:ext cx="2526030" cy="1060704"/>
+          </a:xfrm>
+          <a:prstGeom prst="rect">
+            <a:avLst/>
+          </a:prstGeom>
+          <a:noFill/>
+        </p:spPr>
+        <p:txBody>
+          <a:bodyPr wrap="square" anchor="t" lIns="45720" rIns="45720" tIns="27432" bIns="27432">
+            <a:normAutofit/>
+          </a:bodyPr>
+          <a:lstStyle/>
+          <a:p>
+            <a:pPr algn="l"/>
+            <a:r>
+              <a:rPr sz="1100" b="1">
+                <a:solidFill>
+                  <a:srgbClr val="157355"/>
+                </a:solidFill>
+                <a:latin typeface="Bricolage Grotesque"/>
+              </a:rPr>
+              <a:t>Ronda 4</a:t>
+            </a:r>
+          </a:p>
+          <a:p>
+            <a:pPr algn="l"/>
+            <a:r>
+              <a:rPr sz="1000">
+                <a:solidFill>
+                  <a:srgbClr val="20242E"/>
+                </a:solidFill>
+                <a:latin typeface="Inter"/>
+              </a:rPr>
+              <a:t>Final — el nombre más largo de la clase, sin errores.</a:t>
+            </a:r>
+          </a:p>
+        </p:txBody>
+      </p:sp>
+      <p:sp>
+        <p:nvSpPr>
+          <p:cNvPr id="19" name="Tarjeta 4"/>
+          <p:cNvSpPr/>
+          <p:nvPr/>
+        </p:nvSpPr>
+        <p:spPr>
+          <a:xfrm>
+            <a:off x="457200" y="3968496"/>
+            <a:ext cx="2708910" cy="1170432"/>
+          </a:xfrm>
+          <a:prstGeom prst="roundRect">
+            <a:avLst>
+              <a:gd name="adj" fmla="val 6000"/>
+            </a:avLst>
+          </a:prstGeom>
+          <a:solidFill>
+            <a:srgbClr val="FFFFFF"/>
+          </a:solidFill>
+          <a:ln w="12700">
+            <a:solidFill>
+              <a:srgbClr val="E4E3DE"/>
+            </a:solidFill>
+          </a:ln>
+          <a:effectLst/>
+        </p:spPr>
+        <p:style>
+          <a:lnRef idx="1">
+            <a:schemeClr val="accent1"/>
+          </a:lnRef>
+          <a:fillRef idx="3">
+            <a:schemeClr val="accent1"/>
+          </a:fillRef>
+          <a:effectRef idx="2">
+            <a:schemeClr val="accent1"/>
+          </a:effectRef>
+          <a:fontRef idx="minor">
+            <a:schemeClr val="lt1"/>
+          </a:fontRef>
+        </p:style>
+        <p:txBody>
+          <a:bodyPr rtlCol="0" anchor="ctr"/>
+          <a:lstStyle/>
+          <a:p/>
+        </p:txBody>
+      </p:sp>
+      <p:sp>
+        <p:nvSpPr>
+          <p:cNvPr id="20" name="TarjetaTxt 4"/>
+          <p:cNvSpPr txBox="1"/>
+          <p:nvPr/>
+        </p:nvSpPr>
+        <p:spPr>
+          <a:xfrm>
+            <a:off x="548640" y="4023360"/>
+            <a:ext cx="2526030" cy="859536"/>
+          </a:xfrm>
+          <a:prstGeom prst="rect">
+            <a:avLst/>
+          </a:prstGeom>
+          <a:noFill/>
+        </p:spPr>
+        <p:txBody>
+          <a:bodyPr wrap="square" anchor="t" lIns="45720" rIns="45720" tIns="27432" bIns="27432">
+            <a:normAutofit/>
+          </a:bodyPr>
+          <a:lstStyle/>
+          <a:p>
+            <a:pPr algn="l"/>
+            <a:r>
+              <a:rPr sz="1100" b="1">
+                <a:solidFill>
+                  <a:srgbClr val="157355"/>
+                </a:solidFill>
+                <a:latin typeface="Bricolage Grotesque"/>
+              </a:rPr>
+              <a:t>W</a:t>
+            </a:r>
+          </a:p>
+          <a:p>
+            <a:pPr algn="l"/>
+            <a:r>
+              <a:rPr sz="1000">
+                <a:solidFill>
+                  <a:srgbClr val="20242E"/>
+                </a:solidFill>
+                <a:latin typeface="Inter"/>
+              </a:rPr>
+              <a:t>uve doble</a:t>
+            </a:r>
+          </a:p>
+        </p:txBody>
+      </p:sp>
+      <p:sp>
+        <p:nvSpPr>
+          <p:cNvPr id="21" name="Onthul 4"/>
+          <p:cNvSpPr/>
+          <p:nvPr/>
+        </p:nvSpPr>
+        <p:spPr>
+          <a:xfrm>
+            <a:off x="548640" y="4846320"/>
+            <a:ext cx="2526030" cy="237744"/>
+          </a:xfrm>
+          <a:prstGeom prst="roundRect">
+            <a:avLst>
+              <a:gd name="adj" fmla="val 20000"/>
+            </a:avLst>
+          </a:prstGeom>
+          <a:solidFill>
+            <a:srgbClr val="E4F4EE"/>
+          </a:solidFill>
+          <a:ln>
+            <a:noFill/>
+          </a:ln>
+          <a:effectLst/>
+        </p:spPr>
+        <p:style>
+          <a:lnRef idx="1">
+            <a:schemeClr val="accent1"/>
+          </a:lnRef>
+          <a:fillRef idx="3">
+            <a:schemeClr val="accent1"/>
+          </a:fillRef>
+          <a:effectRef idx="2">
+            <a:schemeClr val="accent1"/>
+          </a:effectRef>
+          <a:fontRef idx="minor">
+            <a:schemeClr val="lt1"/>
+          </a:fontRef>
+        </p:style>
+        <p:txBody>
+          <a:bodyPr rtlCol="0" anchor="ctr"/>
+          <a:lstStyle/>
+          <a:p/>
+        </p:txBody>
+      </p:sp>
+      <p:sp>
+        <p:nvSpPr>
+          <p:cNvPr id="22" name="OnthulTxt 4"/>
+          <p:cNvSpPr txBox="1"/>
+          <p:nvPr/>
+        </p:nvSpPr>
+        <p:spPr>
+          <a:xfrm>
+            <a:off x="566928" y="4846320"/>
+            <a:ext cx="2489454" cy="237744"/>
+          </a:xfrm>
+          <a:prstGeom prst="rect">
+            <a:avLst/>
+          </a:prstGeom>
+          <a:noFill/>
+        </p:spPr>
+        <p:txBody>
+          <a:bodyPr wrap="square" anchor="ctr" lIns="45720" rIns="45720" tIns="27432" bIns="27432">
+            <a:normAutofit/>
+          </a:bodyPr>
+          <a:lstStyle/>
+          <a:p>
+            <a:pPr algn="l"/>
+            <a:r>
+              <a:rPr sz="850" b="1">
+                <a:solidFill>
+                  <a:srgbClr val="157355"/>
+                </a:solidFill>
+                <a:latin typeface="Inter"/>
+              </a:rPr>
+              <a:t>in Wouter</a:t>
+            </a:r>
+          </a:p>
+        </p:txBody>
+      </p:sp>
+      <p:sp>
+        <p:nvSpPr>
+          <p:cNvPr id="23" name="Tarjeta 5"/>
+          <p:cNvSpPr/>
+          <p:nvPr/>
+        </p:nvSpPr>
+        <p:spPr>
+          <a:xfrm>
+            <a:off x="3312414" y="3968496"/>
+            <a:ext cx="2708910" cy="1170432"/>
+          </a:xfrm>
+          <a:prstGeom prst="roundRect">
+            <a:avLst>
+              <a:gd name="adj" fmla="val 6000"/>
+            </a:avLst>
+          </a:prstGeom>
+          <a:solidFill>
+            <a:srgbClr val="FFFFFF"/>
+          </a:solidFill>
+          <a:ln w="12700">
+            <a:solidFill>
+              <a:srgbClr val="E4E3DE"/>
+            </a:solidFill>
+          </a:ln>
+          <a:effectLst/>
+        </p:spPr>
+        <p:style>
+          <a:lnRef idx="1">
+            <a:schemeClr val="accent1"/>
+          </a:lnRef>
+          <a:fillRef idx="3">
+            <a:schemeClr val="accent1"/>
+          </a:fillRef>
+          <a:effectRef idx="2">
+            <a:schemeClr val="accent1"/>
+          </a:effectRef>
+          <a:fontRef idx="minor">
+            <a:schemeClr val="lt1"/>
+          </a:fontRef>
+        </p:style>
+        <p:txBody>
+          <a:bodyPr rtlCol="0" anchor="ctr"/>
+          <a:lstStyle/>
+          <a:p/>
+        </p:txBody>
+      </p:sp>
+      <p:sp>
+        <p:nvSpPr>
+          <p:cNvPr id="24" name="TarjetaTxt 5"/>
+          <p:cNvSpPr txBox="1"/>
+          <p:nvPr/>
+        </p:nvSpPr>
+        <p:spPr>
+          <a:xfrm>
+            <a:off x="3403854" y="4023360"/>
+            <a:ext cx="2526030" cy="859536"/>
+          </a:xfrm>
+          <a:prstGeom prst="rect">
+            <a:avLst/>
+          </a:prstGeom>
+          <a:noFill/>
+        </p:spPr>
+        <p:txBody>
+          <a:bodyPr wrap="square" anchor="t" lIns="45720" rIns="45720" tIns="27432" bIns="27432">
+            <a:normAutofit/>
+          </a:bodyPr>
+          <a:lstStyle/>
+          <a:p>
+            <a:pPr algn="l"/>
+            <a:r>
+              <a:rPr sz="1100" b="1">
+                <a:solidFill>
+                  <a:srgbClr val="157355"/>
+                </a:solidFill>
+                <a:latin typeface="Bricolage Grotesque"/>
+              </a:rPr>
+              <a:t>Y</a:t>
+            </a:r>
+          </a:p>
+          <a:p>
+            <a:pPr algn="l"/>
+            <a:r>
+              <a:rPr sz="1000">
+                <a:solidFill>
+                  <a:srgbClr val="20242E"/>
+                </a:solidFill>
+                <a:latin typeface="Inter"/>
+              </a:rPr>
+              <a:t>i griega / ye</a:t>
+            </a:r>
+          </a:p>
+        </p:txBody>
+      </p:sp>
+      <p:sp>
+        <p:nvSpPr>
+          <p:cNvPr id="25" name="Onthul 5"/>
+          <p:cNvSpPr/>
+          <p:nvPr/>
+        </p:nvSpPr>
+        <p:spPr>
+          <a:xfrm>
+            <a:off x="3403854" y="4846320"/>
+            <a:ext cx="2526030" cy="237744"/>
+          </a:xfrm>
+          <a:prstGeom prst="roundRect">
+            <a:avLst>
+              <a:gd name="adj" fmla="val 20000"/>
+            </a:avLst>
+          </a:prstGeom>
+          <a:solidFill>
+            <a:srgbClr val="E4F4EE"/>
+          </a:solidFill>
+          <a:ln>
+            <a:noFill/>
+          </a:ln>
+          <a:effectLst/>
+        </p:spPr>
+        <p:style>
+          <a:lnRef idx="1">
+            <a:schemeClr val="accent1"/>
+          </a:lnRef>
+          <a:fillRef idx="3">
+            <a:schemeClr val="accent1"/>
+          </a:fillRef>
+          <a:effectRef idx="2">
+            <a:schemeClr val="accent1"/>
+          </a:effectRef>
+          <a:fontRef idx="minor">
+            <a:schemeClr val="lt1"/>
+          </a:fontRef>
+        </p:style>
+        <p:txBody>
+          <a:bodyPr rtlCol="0" anchor="ctr"/>
+          <a:lstStyle/>
+          <a:p/>
+        </p:txBody>
+      </p:sp>
+      <p:sp>
+        <p:nvSpPr>
+          <p:cNvPr id="26" name="OnthulTxt 5"/>
+          <p:cNvSpPr txBox="1"/>
+          <p:nvPr/>
+        </p:nvSpPr>
+        <p:spPr>
+          <a:xfrm>
+            <a:off x="3422142" y="4846320"/>
+            <a:ext cx="2489454" cy="237744"/>
+          </a:xfrm>
+          <a:prstGeom prst="rect">
+            <a:avLst/>
+          </a:prstGeom>
+          <a:noFill/>
+        </p:spPr>
+        <p:txBody>
+          <a:bodyPr wrap="square" anchor="ctr" lIns="45720" rIns="45720" tIns="27432" bIns="27432">
+            <a:normAutofit/>
+          </a:bodyPr>
+          <a:lstStyle/>
+          <a:p>
+            <a:pPr algn="l"/>
+            <a:r>
+              <a:rPr sz="850" b="1">
+                <a:solidFill>
+                  <a:srgbClr val="157355"/>
+                </a:solidFill>
+                <a:latin typeface="Inter"/>
+              </a:rPr>
+              <a:t>in Yara</a:t>
+            </a:r>
+          </a:p>
+        </p:txBody>
+      </p:sp>
+      <p:sp>
+        <p:nvSpPr>
+          <p:cNvPr id="27" name="Tarjeta 6"/>
+          <p:cNvSpPr/>
+          <p:nvPr/>
+        </p:nvSpPr>
+        <p:spPr>
+          <a:xfrm>
+            <a:off x="6167628" y="3968496"/>
+            <a:ext cx="2708910" cy="1170432"/>
+          </a:xfrm>
+          <a:prstGeom prst="roundRect">
+            <a:avLst>
+              <a:gd name="adj" fmla="val 6000"/>
+            </a:avLst>
+          </a:prstGeom>
+          <a:solidFill>
+            <a:srgbClr val="FFFFFF"/>
+          </a:solidFill>
+          <a:ln w="12700">
+            <a:solidFill>
+              <a:srgbClr val="E4E3DE"/>
+            </a:solidFill>
+          </a:ln>
+          <a:effectLst/>
+        </p:spPr>
+        <p:style>
+          <a:lnRef idx="1">
+            <a:schemeClr val="accent1"/>
+          </a:lnRef>
+          <a:fillRef idx="3">
+            <a:schemeClr val="accent1"/>
+          </a:fillRef>
+          <a:effectRef idx="2">
+            <a:schemeClr val="accent1"/>
+          </a:effectRef>
+          <a:fontRef idx="minor">
+            <a:schemeClr val="lt1"/>
+          </a:fontRef>
+        </p:style>
+        <p:txBody>
+          <a:bodyPr rtlCol="0" anchor="ctr"/>
+          <a:lstStyle/>
+          <a:p/>
+        </p:txBody>
+      </p:sp>
+      <p:sp>
+        <p:nvSpPr>
+          <p:cNvPr id="28" name="TarjetaTxt 6"/>
+          <p:cNvSpPr txBox="1"/>
+          <p:nvPr/>
+        </p:nvSpPr>
+        <p:spPr>
+          <a:xfrm>
+            <a:off x="6259068" y="4023360"/>
+            <a:ext cx="2526030" cy="859536"/>
+          </a:xfrm>
+          <a:prstGeom prst="rect">
+            <a:avLst/>
+          </a:prstGeom>
+          <a:noFill/>
+        </p:spPr>
+        <p:txBody>
+          <a:bodyPr wrap="square" anchor="t" lIns="45720" rIns="45720" tIns="27432" bIns="27432">
+            <a:normAutofit/>
+          </a:bodyPr>
+          <a:lstStyle/>
+          <a:p>
+            <a:pPr algn="l"/>
+            <a:r>
+              <a:rPr sz="1100" b="1">
+                <a:solidFill>
+                  <a:srgbClr val="157355"/>
+                </a:solidFill>
+                <a:latin typeface="Bricolage Grotesque"/>
+              </a:rPr>
+              <a:t>J</a:t>
+            </a:r>
+          </a:p>
+          <a:p>
+            <a:pPr algn="l"/>
+            <a:r>
+              <a:rPr sz="1000">
+                <a:solidFill>
+                  <a:srgbClr val="20242E"/>
+                </a:solidFill>
+                <a:latin typeface="Inter"/>
+              </a:rPr>
+              <a:t>jota</a:t>
+            </a:r>
+          </a:p>
+        </p:txBody>
+      </p:sp>
+      <p:sp>
+        <p:nvSpPr>
+          <p:cNvPr id="29" name="Onthul 6"/>
+          <p:cNvSpPr/>
+          <p:nvPr/>
+        </p:nvSpPr>
+        <p:spPr>
+          <a:xfrm>
+            <a:off x="6259068" y="4846320"/>
+            <a:ext cx="2526030" cy="237744"/>
+          </a:xfrm>
+          <a:prstGeom prst="roundRect">
+            <a:avLst>
+              <a:gd name="adj" fmla="val 20000"/>
+            </a:avLst>
+          </a:prstGeom>
+          <a:solidFill>
+            <a:srgbClr val="E4F4EE"/>
+          </a:solidFill>
+          <a:ln>
+            <a:noFill/>
+          </a:ln>
+          <a:effectLst/>
+        </p:spPr>
+        <p:style>
+          <a:lnRef idx="1">
+            <a:schemeClr val="accent1"/>
+          </a:lnRef>
+          <a:fillRef idx="3">
+            <a:schemeClr val="accent1"/>
+          </a:fillRef>
+          <a:effectRef idx="2">
+            <a:schemeClr val="accent1"/>
+          </a:effectRef>
+          <a:fontRef idx="minor">
+            <a:schemeClr val="lt1"/>
+          </a:fontRef>
+        </p:style>
+        <p:txBody>
+          <a:bodyPr rtlCol="0" anchor="ctr"/>
+          <a:lstStyle/>
+          <a:p/>
+        </p:txBody>
+      </p:sp>
+      <p:sp>
+        <p:nvSpPr>
+          <p:cNvPr id="30" name="OnthulTxt 6"/>
+          <p:cNvSpPr txBox="1"/>
+          <p:nvPr/>
+        </p:nvSpPr>
+        <p:spPr>
+          <a:xfrm>
+            <a:off x="6277356" y="4846320"/>
+            <a:ext cx="2489454" cy="237744"/>
+          </a:xfrm>
+          <a:prstGeom prst="rect">
+            <a:avLst/>
+          </a:prstGeom>
+          <a:noFill/>
+        </p:spPr>
+        <p:txBody>
+          <a:bodyPr wrap="square" anchor="ctr" lIns="45720" rIns="45720" tIns="27432" bIns="27432">
+            <a:normAutofit/>
+          </a:bodyPr>
+          <a:lstStyle/>
+          <a:p>
+            <a:pPr algn="l"/>
+            <a:r>
+              <a:rPr sz="850" b="1">
+                <a:solidFill>
+                  <a:srgbClr val="157355"/>
+                </a:solidFill>
+                <a:latin typeface="Inter"/>
+              </a:rPr>
+              <a:t>in Jeroen</a:t>
+            </a:r>
+          </a:p>
+        </p:txBody>
+      </p:sp>
+      <p:sp>
+        <p:nvSpPr>
+          <p:cNvPr id="31" name="Tarjeta 7"/>
+          <p:cNvSpPr/>
+          <p:nvPr/>
+        </p:nvSpPr>
+        <p:spPr>
+          <a:xfrm>
+            <a:off x="9022842" y="3968496"/>
+            <a:ext cx="2708910" cy="1170432"/>
+          </a:xfrm>
+          <a:prstGeom prst="roundRect">
+            <a:avLst>
+              <a:gd name="adj" fmla="val 6000"/>
+            </a:avLst>
+          </a:prstGeom>
+          <a:solidFill>
+            <a:srgbClr val="FFFFFF"/>
+          </a:solidFill>
+          <a:ln w="12700">
+            <a:solidFill>
+              <a:srgbClr val="E4E3DE"/>
+            </a:solidFill>
+          </a:ln>
+          <a:effectLst/>
+        </p:spPr>
+        <p:style>
+          <a:lnRef idx="1">
+            <a:schemeClr val="accent1"/>
+          </a:lnRef>
+          <a:fillRef idx="3">
+            <a:schemeClr val="accent1"/>
+          </a:fillRef>
+          <a:effectRef idx="2">
+            <a:schemeClr val="accent1"/>
+          </a:effectRef>
+          <a:fontRef idx="minor">
+            <a:schemeClr val="lt1"/>
+          </a:fontRef>
+        </p:style>
+        <p:txBody>
+          <a:bodyPr rtlCol="0" anchor="ctr"/>
+          <a:lstStyle/>
+          <a:p/>
+        </p:txBody>
+      </p:sp>
+      <p:sp>
+        <p:nvSpPr>
+          <p:cNvPr id="32" name="TarjetaTxt 7"/>
+          <p:cNvSpPr txBox="1"/>
+          <p:nvPr/>
+        </p:nvSpPr>
+        <p:spPr>
+          <a:xfrm>
+            <a:off x="9114282" y="4023360"/>
+            <a:ext cx="2526030" cy="859536"/>
+          </a:xfrm>
+          <a:prstGeom prst="rect">
+            <a:avLst/>
+          </a:prstGeom>
+          <a:noFill/>
+        </p:spPr>
+        <p:txBody>
+          <a:bodyPr wrap="square" anchor="t" lIns="45720" rIns="45720" tIns="27432" bIns="27432">
+            <a:normAutofit/>
+          </a:bodyPr>
+          <a:lstStyle/>
+          <a:p>
+            <a:pPr algn="l"/>
+            <a:r>
+              <a:rPr sz="1100" b="1">
+                <a:solidFill>
+                  <a:srgbClr val="157355"/>
+                </a:solidFill>
+                <a:latin typeface="Bricolage Grotesque"/>
+              </a:rPr>
+              <a:t>H</a:t>
+            </a:r>
+          </a:p>
+          <a:p>
+            <a:pPr algn="l"/>
+            <a:r>
+              <a:rPr sz="1000">
+                <a:solidFill>
+                  <a:srgbClr val="20242E"/>
+                </a:solidFill>
+                <a:latin typeface="Inter"/>
+              </a:rPr>
+              <a:t>hache — zwijgt!</a:t>
+            </a:r>
+          </a:p>
+        </p:txBody>
+      </p:sp>
+      <p:sp>
+        <p:nvSpPr>
+          <p:cNvPr id="33" name="Onthul 7"/>
+          <p:cNvSpPr/>
+          <p:nvPr/>
+        </p:nvSpPr>
+        <p:spPr>
+          <a:xfrm>
+            <a:off x="9114282" y="4846320"/>
+            <a:ext cx="2526030" cy="237744"/>
+          </a:xfrm>
+          <a:prstGeom prst="roundRect">
+            <a:avLst>
+              <a:gd name="adj" fmla="val 20000"/>
+            </a:avLst>
+          </a:prstGeom>
+          <a:solidFill>
+            <a:srgbClr val="E4F4EE"/>
+          </a:solidFill>
+          <a:ln>
+            <a:noFill/>
+          </a:ln>
+          <a:effectLst/>
+        </p:spPr>
+        <p:style>
+          <a:lnRef idx="1">
+            <a:schemeClr val="accent1"/>
+          </a:lnRef>
+          <a:fillRef idx="3">
+            <a:schemeClr val="accent1"/>
+          </a:fillRef>
+          <a:effectRef idx="2">
+            <a:schemeClr val="accent1"/>
+          </a:effectRef>
+          <a:fontRef idx="minor">
+            <a:schemeClr val="lt1"/>
+          </a:fontRef>
+        </p:style>
+        <p:txBody>
+          <a:bodyPr rtlCol="0" anchor="ctr"/>
+          <a:lstStyle/>
+          <a:p/>
+        </p:txBody>
+      </p:sp>
+      <p:sp>
+        <p:nvSpPr>
+          <p:cNvPr id="34" name="OnthulTxt 7"/>
+          <p:cNvSpPr txBox="1"/>
+          <p:nvPr/>
+        </p:nvSpPr>
+        <p:spPr>
+          <a:xfrm>
+            <a:off x="9132570" y="4846320"/>
+            <a:ext cx="2489454" cy="237744"/>
+          </a:xfrm>
+          <a:prstGeom prst="rect">
+            <a:avLst/>
+          </a:prstGeom>
+          <a:noFill/>
+        </p:spPr>
+        <p:txBody>
+          <a:bodyPr wrap="square" anchor="ctr" lIns="45720" rIns="45720" tIns="27432" bIns="27432">
+            <a:normAutofit/>
+          </a:bodyPr>
+          <a:lstStyle/>
+          <a:p>
+            <a:pPr algn="l"/>
+            <a:r>
+              <a:rPr sz="850" b="1">
+                <a:solidFill>
+                  <a:srgbClr val="157355"/>
+                </a:solidFill>
+                <a:latin typeface="Inter"/>
+              </a:rPr>
+              <a:t>in Huelva</a:t>
+            </a:r>
+          </a:p>
+        </p:txBody>
+      </p:sp>
+      <p:sp>
+        <p:nvSpPr>
+          <p:cNvPr id="35" name="Tarjeta 8"/>
+          <p:cNvSpPr/>
+          <p:nvPr/>
+        </p:nvSpPr>
+        <p:spPr>
+          <a:xfrm>
+            <a:off x="457200" y="5266944"/>
+            <a:ext cx="2708910" cy="1170432"/>
+          </a:xfrm>
+          <a:prstGeom prst="roundRect">
+            <a:avLst>
+              <a:gd name="adj" fmla="val 6000"/>
+            </a:avLst>
+          </a:prstGeom>
+          <a:solidFill>
+            <a:srgbClr val="FFFFFF"/>
+          </a:solidFill>
+          <a:ln w="12700">
+            <a:solidFill>
+              <a:srgbClr val="E4E3DE"/>
+            </a:solidFill>
+          </a:ln>
+          <a:effectLst/>
+        </p:spPr>
+        <p:style>
+          <a:lnRef idx="1">
+            <a:schemeClr val="accent1"/>
+          </a:lnRef>
+          <a:fillRef idx="3">
+            <a:schemeClr val="accent1"/>
+          </a:fillRef>
+          <a:effectRef idx="2">
+            <a:schemeClr val="accent1"/>
+          </a:effectRef>
+          <a:fontRef idx="minor">
+            <a:schemeClr val="lt1"/>
+          </a:fontRef>
+        </p:style>
+        <p:txBody>
+          <a:bodyPr rtlCol="0" anchor="ctr"/>
+          <a:lstStyle/>
+          <a:p/>
+        </p:txBody>
+      </p:sp>
+      <p:sp>
+        <p:nvSpPr>
+          <p:cNvPr id="36" name="TarjetaTxt 8"/>
+          <p:cNvSpPr txBox="1"/>
+          <p:nvPr/>
+        </p:nvSpPr>
+        <p:spPr>
+          <a:xfrm>
+            <a:off x="548640" y="5321808"/>
+            <a:ext cx="2526030" cy="859536"/>
+          </a:xfrm>
+          <a:prstGeom prst="rect">
+            <a:avLst/>
+          </a:prstGeom>
+          <a:noFill/>
+        </p:spPr>
+        <p:txBody>
+          <a:bodyPr wrap="square" anchor="t" lIns="45720" rIns="45720" tIns="27432" bIns="27432">
+            <a:normAutofit/>
+          </a:bodyPr>
+          <a:lstStyle/>
+          <a:p>
+            <a:pPr algn="l"/>
+            <a:r>
+              <a:rPr sz="1100" b="1">
+                <a:solidFill>
+                  <a:srgbClr val="157355"/>
+                </a:solidFill>
+                <a:latin typeface="Bricolage Grotesque"/>
+              </a:rPr>
+              <a:t>Z</a:t>
+            </a:r>
+          </a:p>
+          <a:p>
+            <a:pPr algn="l"/>
+            <a:r>
+              <a:rPr sz="1000">
+                <a:solidFill>
+                  <a:srgbClr val="20242E"/>
+                </a:solidFill>
+                <a:latin typeface="Inter"/>
+              </a:rPr>
+              <a:t>zeta</a:t>
+            </a:r>
+          </a:p>
+        </p:txBody>
+      </p:sp>
+      <p:sp>
+        <p:nvSpPr>
+          <p:cNvPr id="37" name="Onthul 8"/>
+          <p:cNvSpPr/>
+          <p:nvPr/>
+        </p:nvSpPr>
+        <p:spPr>
+          <a:xfrm>
+            <a:off x="548640" y="6144768"/>
+            <a:ext cx="2526030" cy="237744"/>
+          </a:xfrm>
+          <a:prstGeom prst="roundRect">
+            <a:avLst>
+              <a:gd name="adj" fmla="val 20000"/>
+            </a:avLst>
+          </a:prstGeom>
+          <a:solidFill>
+            <a:srgbClr val="E4F4EE"/>
+          </a:solidFill>
+          <a:ln>
+            <a:noFill/>
+          </a:ln>
+          <a:effectLst/>
+        </p:spPr>
+        <p:style>
+          <a:lnRef idx="1">
+            <a:schemeClr val="accent1"/>
+          </a:lnRef>
+          <a:fillRef idx="3">
+            <a:schemeClr val="accent1"/>
+          </a:fillRef>
+          <a:effectRef idx="2">
+            <a:schemeClr val="accent1"/>
+          </a:effectRef>
+          <a:fontRef idx="minor">
+            <a:schemeClr val="lt1"/>
+          </a:fontRef>
+        </p:style>
+        <p:txBody>
+          <a:bodyPr rtlCol="0" anchor="ctr"/>
+          <a:lstStyle/>
+          <a:p/>
+        </p:txBody>
+      </p:sp>
+      <p:sp>
+        <p:nvSpPr>
+          <p:cNvPr id="38" name="OnthulTxt 8"/>
+          <p:cNvSpPr txBox="1"/>
+          <p:nvPr/>
+        </p:nvSpPr>
+        <p:spPr>
+          <a:xfrm>
+            <a:off x="566928" y="6144768"/>
+            <a:ext cx="2489454" cy="237744"/>
+          </a:xfrm>
+          <a:prstGeom prst="rect">
+            <a:avLst/>
+          </a:prstGeom>
+          <a:noFill/>
+        </p:spPr>
+        <p:txBody>
+          <a:bodyPr wrap="square" anchor="ctr" lIns="45720" rIns="45720" tIns="27432" bIns="27432">
+            <a:normAutofit/>
+          </a:bodyPr>
+          <a:lstStyle/>
+          <a:p>
+            <a:pPr algn="l"/>
+            <a:r>
+              <a:rPr sz="850" b="1">
+                <a:solidFill>
+                  <a:srgbClr val="157355"/>
+                </a:solidFill>
+                <a:latin typeface="Inter"/>
+              </a:rPr>
+              <a:t>in Zaragoza</a:t>
+            </a:r>
+          </a:p>
+        </p:txBody>
+      </p:sp>
+      <p:sp>
+        <p:nvSpPr>
+          <p:cNvPr id="39" name="Tarjeta 9"/>
+          <p:cNvSpPr/>
+          <p:nvPr/>
+        </p:nvSpPr>
+        <p:spPr>
+          <a:xfrm>
+            <a:off x="3312414" y="5266944"/>
+            <a:ext cx="2708910" cy="1170432"/>
+          </a:xfrm>
+          <a:prstGeom prst="roundRect">
+            <a:avLst>
+              <a:gd name="adj" fmla="val 6000"/>
+            </a:avLst>
+          </a:prstGeom>
+          <a:solidFill>
+            <a:srgbClr val="FFFFFF"/>
+          </a:solidFill>
+          <a:ln w="12700">
+            <a:solidFill>
+              <a:srgbClr val="E4E3DE"/>
+            </a:solidFill>
+          </a:ln>
+          <a:effectLst/>
+        </p:spPr>
+        <p:style>
+          <a:lnRef idx="1">
+            <a:schemeClr val="accent1"/>
+          </a:lnRef>
+          <a:fillRef idx="3">
+            <a:schemeClr val="accent1"/>
+          </a:fillRef>
+          <a:effectRef idx="2">
+            <a:schemeClr val="accent1"/>
+          </a:effectRef>
+          <a:fontRef idx="minor">
+            <a:schemeClr val="lt1"/>
+          </a:fontRef>
+        </p:style>
+        <p:txBody>
+          <a:bodyPr rtlCol="0" anchor="ctr"/>
+          <a:lstStyle/>
+          <a:p/>
+        </p:txBody>
+      </p:sp>
+      <p:sp>
+        <p:nvSpPr>
+          <p:cNvPr id="40" name="TarjetaTxt 9"/>
+          <p:cNvSpPr txBox="1"/>
+          <p:nvPr/>
+        </p:nvSpPr>
+        <p:spPr>
+          <a:xfrm>
+            <a:off x="3403854" y="5321808"/>
+            <a:ext cx="2526030" cy="859536"/>
+          </a:xfrm>
+          <a:prstGeom prst="rect">
+            <a:avLst/>
+          </a:prstGeom>
+          <a:noFill/>
+        </p:spPr>
+        <p:txBody>
+          <a:bodyPr wrap="square" anchor="t" lIns="45720" rIns="45720" tIns="27432" bIns="27432">
+            <a:normAutofit/>
+          </a:bodyPr>
+          <a:lstStyle/>
+          <a:p>
+            <a:pPr algn="l"/>
+            <a:r>
+              <a:rPr sz="1100" b="1">
+                <a:solidFill>
+                  <a:srgbClr val="157355"/>
+                </a:solidFill>
+                <a:latin typeface="Bricolage Grotesque"/>
+              </a:rPr>
+              <a:t>X</a:t>
+            </a:r>
+          </a:p>
+          <a:p>
+            <a:pPr algn="l"/>
+            <a:r>
+              <a:rPr sz="1000">
+                <a:solidFill>
+                  <a:srgbClr val="20242E"/>
+                </a:solidFill>
+                <a:latin typeface="Inter"/>
+              </a:rPr>
+              <a:t>equis</a:t>
+            </a:r>
+          </a:p>
+        </p:txBody>
+      </p:sp>
+      <p:sp>
+        <p:nvSpPr>
+          <p:cNvPr id="41" name="Onthul 9"/>
+          <p:cNvSpPr/>
+          <p:nvPr/>
+        </p:nvSpPr>
+        <p:spPr>
+          <a:xfrm>
+            <a:off x="3403854" y="6144768"/>
+            <a:ext cx="2526030" cy="237744"/>
+          </a:xfrm>
+          <a:prstGeom prst="roundRect">
+            <a:avLst>
+              <a:gd name="adj" fmla="val 20000"/>
+            </a:avLst>
+          </a:prstGeom>
+          <a:solidFill>
+            <a:srgbClr val="E4F4EE"/>
+          </a:solidFill>
+          <a:ln>
+            <a:noFill/>
+          </a:ln>
+          <a:effectLst/>
+        </p:spPr>
+        <p:style>
+          <a:lnRef idx="1">
+            <a:schemeClr val="accent1"/>
+          </a:lnRef>
+          <a:fillRef idx="3">
+            <a:schemeClr val="accent1"/>
+          </a:fillRef>
+          <a:effectRef idx="2">
+            <a:schemeClr val="accent1"/>
+          </a:effectRef>
+          <a:fontRef idx="minor">
+            <a:schemeClr val="lt1"/>
+          </a:fontRef>
+        </p:style>
+        <p:txBody>
+          <a:bodyPr rtlCol="0" anchor="ctr"/>
+          <a:lstStyle/>
+          <a:p/>
+        </p:txBody>
+      </p:sp>
+      <p:sp>
+        <p:nvSpPr>
+          <p:cNvPr id="42" name="OnthulTxt 9"/>
+          <p:cNvSpPr txBox="1"/>
+          <p:nvPr/>
+        </p:nvSpPr>
+        <p:spPr>
+          <a:xfrm>
+            <a:off x="3422142" y="6144768"/>
+            <a:ext cx="2489454" cy="237744"/>
+          </a:xfrm>
+          <a:prstGeom prst="rect">
+            <a:avLst/>
+          </a:prstGeom>
+          <a:noFill/>
+        </p:spPr>
+        <p:txBody>
+          <a:bodyPr wrap="square" anchor="ctr" lIns="45720" rIns="45720" tIns="27432" bIns="27432">
+            <a:normAutofit/>
+          </a:bodyPr>
+          <a:lstStyle/>
+          <a:p>
+            <a:pPr algn="l"/>
+            <a:r>
+              <a:rPr sz="850" b="1">
+                <a:solidFill>
+                  <a:srgbClr val="157355"/>
+                </a:solidFill>
+                <a:latin typeface="Inter"/>
+              </a:rPr>
+              <a:t>in Xavier</a:t>
+            </a:r>
+          </a:p>
+        </p:txBody>
+      </p:sp>
+    </p:spTree>
+  </p:cSld>
+  <p:clrMapOvr>
+    <a:masterClrMapping/>
+  </p:clrMapOvr>
+  <p:timing>
+    <p:tnLst>
+      <p:par>
+        <p:cTn id="1" dur="indefinite" restart="never" nodeType="tmRoot">
+          <p:childTnLst>
+            <p:seq concurrent="1" nextAc="seek">
+              <p:cTn id="2" dur="indefinite" nodeType="mainSeq">
+                <p:childTnLst>
+                  <p:par>
+                    <p:cTn id="5" fill="hold">
+                      <p:stCondLst>
+                        <p:cond delay="indefinite"/>
+                      </p:stCondLst>
+                      <p:childTnLst>
+                        <p:par>
+                          <p:cTn id="6" fill="hold">
+                            <p:stCondLst>
+                              <p:cond delay="0"/>
+                            </p:stCondLst>
+                            <p:childTnLst>
+                              <p:par>
+                                <p:cTn id="7" presetID="10" presetClass="entr" presetSubtype="0" fill="hold" grpId="0" nodeType="clickEffect">
+                                  <p:stCondLst>
+                                    <p:cond delay="0"/>
+                                  </p:stCondLst>
+                                  <p:childTnLst>
+                                    <p:set>
+                                      <p:cBhvr>
+                                        <p:cTn id="8" dur="1" fill="hold">
+                                          <p:stCondLst>
+                                            <p:cond delay="0"/>
+                                          </p:stCondLst>
+                                        </p:cTn>
+                                        <p:tgtEl>
+                                          <p:spTgt spid="21"/>
+                                        </p:tgtEl>
+                                        <p:attrNameLst>
+                                          <p:attrName>style.visibility</p:attrName>
+                                        </p:attrNameLst>
+                                      </p:cBhvr>
+                                      <p:to>
+                                        <p:strVal val="visible"/>
+                                      </p:to>
+                                    </p:set>
+                                    <p:animEffect transition="in" filter="fade">
+                                      <p:cBhvr>
+                                        <p:cTn id="9" dur="500"/>
+                                        <p:tgtEl>
+                                          <p:spTgt spid="21"/>
+                                        </p:tgtEl>
+                                      </p:cBhvr>
+                                    </p:animEffect>
+                                  </p:childTnLst>
+                                </p:cTn>
+                              </p:par>
+                            </p:childTnLst>
+                          </p:cTn>
+                        </p:par>
+                      </p:childTnLst>
+                    </p:cTn>
+                  </p:par>
+                  <p:par>
+                    <p:cTn id="10" fill="hold">
+                      <p:stCondLst>
+                        <p:cond delay="indefinite"/>
+                      </p:stCondLst>
+                      <p:childTnLst>
+                        <p:par>
+                          <p:cTn id="11" fill="hold">
+                            <p:stCondLst>
+                              <p:cond delay="0"/>
+                            </p:stCondLst>
+                            <p:childTnLst>
+                              <p:par>
+                                <p:cTn id="12" presetID="10" presetClass="entr" presetSubtype="0" fill="hold" grpId="0" nodeType="clickEffect">
+                                  <p:stCondLst>
+                                    <p:cond delay="0"/>
+                                  </p:stCondLst>
+                                  <p:childTnLst>
+                                    <p:set>
+                                      <p:cBhvr>
+                                        <p:cTn id="13" dur="1" fill="hold">
+                                          <p:stCondLst>
+                                            <p:cond delay="0"/>
+                                          </p:stCondLst>
+                                        </p:cTn>
+                                        <p:tgtEl>
+                                          <p:spTgt spid="22"/>
+                                        </p:tgtEl>
+                                        <p:attrNameLst>
+                                          <p:attrName>style.visibility</p:attrName>
+                                        </p:attrNameLst>
+                                      </p:cBhvr>
+                                      <p:to>
+                                        <p:strVal val="visible"/>
+                                      </p:to>
+                                    </p:set>
+                                    <p:animEffect transition="in" filter="fade">
+                                      <p:cBhvr>
+                                        <p:cTn id="14" dur="500"/>
+                                        <p:tgtEl>
+                                          <p:spTgt spid="22"/>
+                                        </p:tgtEl>
+                                      </p:cBhvr>
+                                    </p:animEffect>
+                                  </p:childTnLst>
+                                </p:cTn>
+                              </p:par>
+                            </p:childTnLst>
+                          </p:cTn>
+                        </p:par>
+                      </p:childTnLst>
+                    </p:cTn>
+                  </p:par>
+                  <p:par>
+                    <p:cTn id="15" fill="hold">
+                      <p:stCondLst>
+                        <p:cond delay="indefinite"/>
+                      </p:stCondLst>
+                      <p:childTnLst>
+                        <p:par>
+                          <p:cTn id="16" fill="hold">
+                            <p:stCondLst>
+                              <p:cond delay="0"/>
+                            </p:stCondLst>
+                            <p:childTnLst>
+                              <p:par>
+                                <p:cTn id="17" presetID="10" presetClass="entr" presetSubtype="0" fill="hold" grpId="0" nodeType="clickEffect">
+                                  <p:stCondLst>
+                                    <p:cond delay="0"/>
+                                  </p:stCondLst>
+                                  <p:childTnLst>
+                                    <p:set>
+                                      <p:cBhvr>
+                                        <p:cTn id="18" dur="1" fill="hold">
+                                          <p:stCondLst>
+                                            <p:cond delay="0"/>
+                                          </p:stCondLst>
+                                        </p:cTn>
+                                        <p:tgtEl>
+                                          <p:spTgt spid="25"/>
+                                        </p:tgtEl>
+                                        <p:attrNameLst>
+                                          <p:attrName>style.visibility</p:attrName>
+                                        </p:attrNameLst>
+                                      </p:cBhvr>
+                                      <p:to>
+                                        <p:strVal val="visible"/>
+                                      </p:to>
+                                    </p:set>
+                                    <p:animEffect transition="in" filter="fade">
+                                      <p:cBhvr>
+                                        <p:cTn id="19" dur="500"/>
+                                        <p:tgtEl>
+                                          <p:spTgt spid="25"/>
+                                        </p:tgtEl>
+                                      </p:cBhvr>
+                                    </p:animEffect>
+                                  </p:childTnLst>
+                                </p:cTn>
+                              </p:par>
+                            </p:childTnLst>
+                          </p:cTn>
+                        </p:par>
+                      </p:childTnLst>
+                    </p:cTn>
+                  </p:par>
+                  <p:par>
+                    <p:cTn id="20" fill="hold">
+                      <p:stCondLst>
+                        <p:cond delay="indefinite"/>
+                      </p:stCondLst>
+                      <p:childTnLst>
+                        <p:par>
+                          <p:cTn id="21" fill="hold">
+                            <p:stCondLst>
+                              <p:cond delay="0"/>
+                            </p:stCondLst>
+                            <p:childTnLst>
+                              <p:par>
+                                <p:cTn id="22" presetID="10" presetClass="entr" presetSubtype="0" fill="hold" grpId="0" nodeType="clickEffect">
+                                  <p:stCondLst>
+                                    <p:cond delay="0"/>
+                                  </p:stCondLst>
+                                  <p:childTnLst>
+                                    <p:set>
+                                      <p:cBhvr>
+                                        <p:cTn id="23" dur="1" fill="hold">
+                                          <p:stCondLst>
+                                            <p:cond delay="0"/>
+                                          </p:stCondLst>
+                                        </p:cTn>
+                                        <p:tgtEl>
+                                          <p:spTgt spid="26"/>
+                                        </p:tgtEl>
+                                        <p:attrNameLst>
+                                          <p:attrName>style.visibility</p:attrName>
+                                        </p:attrNameLst>
+                                      </p:cBhvr>
+                                      <p:to>
+                                        <p:strVal val="visible"/>
+                                      </p:to>
+                                    </p:set>
+                                    <p:animEffect transition="in" filter="fade">
+                                      <p:cBhvr>
+                                        <p:cTn id="24" dur="500"/>
+                                        <p:tgtEl>
+                                          <p:spTgt spid="26"/>
+                                        </p:tgtEl>
+                                      </p:cBhvr>
+                                    </p:animEffect>
+                                  </p:childTnLst>
+                                </p:cTn>
+                              </p:par>
+                            </p:childTnLst>
+                          </p:cTn>
+                        </p:par>
+                      </p:childTnLst>
+                    </p:cTn>
+                  </p:par>
+                  <p:par>
+                    <p:cTn id="25" fill="hold">
+                      <p:stCondLst>
+                        <p:cond delay="indefinite"/>
+                      </p:stCondLst>
+                      <p:childTnLst>
+                        <p:par>
+                          <p:cTn id="26" fill="hold">
+                            <p:stCondLst>
+                              <p:cond delay="0"/>
+                            </p:stCondLst>
+                            <p:childTnLst>
+                              <p:par>
+                                <p:cTn id="27" presetID="10" presetClass="entr" presetSubtype="0" fill="hold" grpId="0" nodeType="clickEffect">
+                                  <p:stCondLst>
+                                    <p:cond delay="0"/>
+                                  </p:stCondLst>
+                                  <p:childTnLst>
+                                    <p:set>
+                                      <p:cBhvr>
+                                        <p:cTn id="28" dur="1" fill="hold">
+                                          <p:stCondLst>
+                                            <p:cond delay="0"/>
+                                          </p:stCondLst>
+                                        </p:cTn>
+                                        <p:tgtEl>
+                                          <p:spTgt spid="29"/>
+                                        </p:tgtEl>
+                                        <p:attrNameLst>
+                                          <p:attrName>style.visibility</p:attrName>
+                                        </p:attrNameLst>
+                                      </p:cBhvr>
+                                      <p:to>
+                                        <p:strVal val="visible"/>
+                                      </p:to>
+                                    </p:set>
+                                    <p:animEffect transition="in" filter="fade">
+                                      <p:cBhvr>
+                                        <p:cTn id="29" dur="500"/>
+                                        <p:tgtEl>
+                                          <p:spTgt spid="29"/>
+                                        </p:tgtEl>
+                                      </p:cBhvr>
+                                    </p:animEffect>
+                                  </p:childTnLst>
+                                </p:cTn>
+                              </p:par>
+                            </p:childTnLst>
+                          </p:cTn>
+                        </p:par>
+                      </p:childTnLst>
+                    </p:cTn>
+                  </p:par>
+                  <p:par>
+                    <p:cTn id="30" fill="hold">
+                      <p:stCondLst>
+                        <p:cond delay="indefinite"/>
+                      </p:stCondLst>
+                      <p:childTnLst>
+                        <p:par>
+                          <p:cTn id="31" fill="hold">
+                            <p:stCondLst>
+                              <p:cond delay="0"/>
+                            </p:stCondLst>
+                            <p:childTnLst>
+                              <p:par>
+                                <p:cTn id="32" presetID="10" presetClass="entr" presetSubtype="0" fill="hold" grpId="0" nodeType="clickEffect">
+                                  <p:stCondLst>
+                                    <p:cond delay="0"/>
+                                  </p:stCondLst>
+                                  <p:childTnLst>
+                                    <p:set>
+                                      <p:cBhvr>
+                                        <p:cTn id="33" dur="1" fill="hold">
+                                          <p:stCondLst>
+                                            <p:cond delay="0"/>
+                                          </p:stCondLst>
+                                        </p:cTn>
+                                        <p:tgtEl>
+                                          <p:spTgt spid="30"/>
+                                        </p:tgtEl>
+                                        <p:attrNameLst>
+                                          <p:attrName>style.visibility</p:attrName>
+                                        </p:attrNameLst>
+                                      </p:cBhvr>
+                                      <p:to>
+                                        <p:strVal val="visible"/>
+                                      </p:to>
+                                    </p:set>
+                                    <p:animEffect transition="in" filter="fade">
+                                      <p:cBhvr>
+                                        <p:cTn id="34" dur="500"/>
+                                        <p:tgtEl>
+                                          <p:spTgt spid="30"/>
+                                        </p:tgtEl>
+                                      </p:cBhvr>
+                                    </p:animEffect>
+                                  </p:childTnLst>
+                                </p:cTn>
+                              </p:par>
+                            </p:childTnLst>
+                          </p:cTn>
+                        </p:par>
+                      </p:childTnLst>
+                    </p:cTn>
+                  </p:par>
+                  <p:par>
+                    <p:cTn id="35" fill="hold">
+                      <p:stCondLst>
+                        <p:cond delay="indefinite"/>
+                      </p:stCondLst>
+                      <p:childTnLst>
+                        <p:par>
+                          <p:cTn id="36" fill="hold">
+                            <p:stCondLst>
+                              <p:cond delay="0"/>
+                            </p:stCondLst>
+                            <p:childTnLst>
+                              <p:par>
+                                <p:cTn id="37" presetID="10" presetClass="entr" presetSubtype="0" fill="hold" grpId="0" nodeType="clickEffect">
+                                  <p:stCondLst>
+                                    <p:cond delay="0"/>
+                                  </p:stCondLst>
+                                  <p:childTnLst>
+                                    <p:set>
+                                      <p:cBhvr>
+                                        <p:cTn id="38" dur="1" fill="hold">
+                                          <p:stCondLst>
+                                            <p:cond delay="0"/>
+                                          </p:stCondLst>
+                                        </p:cTn>
+                                        <p:tgtEl>
+                                          <p:spTgt spid="33"/>
+                                        </p:tgtEl>
+                                        <p:attrNameLst>
+                                          <p:attrName>style.visibility</p:attrName>
+                                        </p:attrNameLst>
+                                      </p:cBhvr>
+                                      <p:to>
+                                        <p:strVal val="visible"/>
+                                      </p:to>
+                                    </p:set>
+                                    <p:animEffect transition="in" filter="fade">
+                                      <p:cBhvr>
+                                        <p:cTn id="39" dur="500"/>
+                                        <p:tgtEl>
+                                          <p:spTgt spid="33"/>
+                                        </p:tgtEl>
+                                      </p:cBhvr>
+                                    </p:animEffect>
+                                  </p:childTnLst>
+                                </p:cTn>
+                              </p:par>
+                            </p:childTnLst>
+                          </p:cTn>
+                        </p:par>
+                      </p:childTnLst>
+                    </p:cTn>
+                  </p:par>
+                  <p:par>
+                    <p:cTn id="40" fill="hold">
+                      <p:stCondLst>
+                        <p:cond delay="indefinite"/>
+                      </p:stCondLst>
+                      <p:childTnLst>
+                        <p:par>
+                          <p:cTn id="41" fill="hold">
+                            <p:stCondLst>
+                              <p:cond delay="0"/>
+                            </p:stCondLst>
+                            <p:childTnLst>
+                              <p:par>
+                                <p:cTn id="42" presetID="10" presetClass="entr" presetSubtype="0" fill="hold" grpId="0" nodeType="clickEffect">
+                                  <p:stCondLst>
+                                    <p:cond delay="0"/>
+                                  </p:stCondLst>
+                                  <p:childTnLst>
+                                    <p:set>
+                                      <p:cBhvr>
+                                        <p:cTn id="43" dur="1" fill="hold">
+                                          <p:stCondLst>
+                                            <p:cond delay="0"/>
+                                          </p:stCondLst>
+                                        </p:cTn>
+                                        <p:tgtEl>
+                                          <p:spTgt spid="34"/>
+                                        </p:tgtEl>
+                                        <p:attrNameLst>
+                                          <p:attrName>style.visibility</p:attrName>
+                                        </p:attrNameLst>
+                                      </p:cBhvr>
+                                      <p:to>
+                                        <p:strVal val="visible"/>
+                                      </p:to>
+                                    </p:set>
+                                    <p:animEffect transition="in" filter="fade">
+                                      <p:cBhvr>
+                                        <p:cTn id="44" dur="500"/>
+                                        <p:tgtEl>
+                                          <p:spTgt spid="34"/>
+                                        </p:tgtEl>
+                                      </p:cBhvr>
+                                    </p:animEffect>
+                                  </p:childTnLst>
+                                </p:cTn>
+                              </p:par>
+                            </p:childTnLst>
+                          </p:cTn>
+                        </p:par>
+                      </p:childTnLst>
+                    </p:cTn>
+                  </p:par>
+                  <p:par>
+                    <p:cTn id="45" fill="hold">
+                      <p:stCondLst>
+                        <p:cond delay="indefinite"/>
+                      </p:stCondLst>
+                      <p:childTnLst>
+                        <p:par>
+                          <p:cTn id="46" fill="hold">
+                            <p:stCondLst>
+                              <p:cond delay="0"/>
+                            </p:stCondLst>
+                            <p:childTnLst>
+                              <p:par>
+                                <p:cTn id="47" presetID="10" presetClass="entr" presetSubtype="0" fill="hold" grpId="0" nodeType="clickEffect">
+                                  <p:stCondLst>
+                                    <p:cond delay="0"/>
+                                  </p:stCondLst>
+                                  <p:childTnLst>
+                                    <p:set>
+                                      <p:cBhvr>
+                                        <p:cTn id="48" dur="1" fill="hold">
+                                          <p:stCondLst>
+                                            <p:cond delay="0"/>
+                                          </p:stCondLst>
+                                        </p:cTn>
+                                        <p:tgtEl>
+                                          <p:spTgt spid="37"/>
+                                        </p:tgtEl>
+                                        <p:attrNameLst>
+                                          <p:attrName>style.visibility</p:attrName>
+                                        </p:attrNameLst>
+                                      </p:cBhvr>
+                                      <p:to>
+                                        <p:strVal val="visible"/>
+                                      </p:to>
+                                    </p:set>
+                                    <p:animEffect transition="in" filter="fade">
+                                      <p:cBhvr>
+                                        <p:cTn id="49" dur="500"/>
+                                        <p:tgtEl>
+                                          <p:spTgt spid="37"/>
+                                        </p:tgtEl>
+                                      </p:cBhvr>
+                                    </p:animEffect>
+                                  </p:childTnLst>
+                                </p:cTn>
+                              </p:par>
+                            </p:childTnLst>
+                          </p:cTn>
+                        </p:par>
+                      </p:childTnLst>
+                    </p:cTn>
+                  </p:par>
+                  <p:par>
+                    <p:cTn id="50" fill="hold">
+                      <p:stCondLst>
+                        <p:cond delay="indefinite"/>
+                      </p:stCondLst>
+                      <p:childTnLst>
+                        <p:par>
+                          <p:cTn id="51" fill="hold">
+                            <p:stCondLst>
+                              <p:cond delay="0"/>
+                            </p:stCondLst>
+                            <p:childTnLst>
+                              <p:par>
+                                <p:cTn id="52" presetID="10" presetClass="entr" presetSubtype="0" fill="hold" grpId="0" nodeType="clickEffect">
+                                  <p:stCondLst>
+                                    <p:cond delay="0"/>
+                                  </p:stCondLst>
+                                  <p:childTnLst>
+                                    <p:set>
+                                      <p:cBhvr>
+                                        <p:cTn id="53" dur="1" fill="hold">
+                                          <p:stCondLst>
+                                            <p:cond delay="0"/>
+                                          </p:stCondLst>
+                                        </p:cTn>
+                                        <p:tgtEl>
+                                          <p:spTgt spid="38"/>
+                                        </p:tgtEl>
+                                        <p:attrNameLst>
+                                          <p:attrName>style.visibility</p:attrName>
+                                        </p:attrNameLst>
+                                      </p:cBhvr>
+                                      <p:to>
+                                        <p:strVal val="visible"/>
+                                      </p:to>
+                                    </p:set>
+                                    <p:animEffect transition="in" filter="fade">
+                                      <p:cBhvr>
+                                        <p:cTn id="54" dur="500"/>
+                                        <p:tgtEl>
+                                          <p:spTgt spid="38"/>
+                                        </p:tgtEl>
+                                      </p:cBhvr>
+                                    </p:animEffect>
+                                  </p:childTnLst>
+                                </p:cTn>
+                              </p:par>
+                            </p:childTnLst>
+                          </p:cTn>
+                        </p:par>
+                      </p:childTnLst>
+                    </p:cTn>
+                  </p:par>
+                  <p:par>
+                    <p:cTn id="55" fill="hold">
+                      <p:stCondLst>
+                        <p:cond delay="indefinite"/>
+                      </p:stCondLst>
+                      <p:childTnLst>
+                        <p:par>
+                          <p:cTn id="56" fill="hold">
+                            <p:stCondLst>
+                              <p:cond delay="0"/>
+                            </p:stCondLst>
+                            <p:childTnLst>
+                              <p:par>
+                                <p:cTn id="57" presetID="10" presetClass="entr" presetSubtype="0" fill="hold" grpId="0" nodeType="clickEffect">
+                                  <p:stCondLst>
+                                    <p:cond delay="0"/>
+                                  </p:stCondLst>
+                                  <p:childTnLst>
+                                    <p:set>
+                                      <p:cBhvr>
+                                        <p:cTn id="58" dur="1" fill="hold">
+                                          <p:stCondLst>
+                                            <p:cond delay="0"/>
+                                          </p:stCondLst>
+                                        </p:cTn>
+                                        <p:tgtEl>
+                                          <p:spTgt spid="41"/>
+                                        </p:tgtEl>
+                                        <p:attrNameLst>
+                                          <p:attrName>style.visibility</p:attrName>
+                                        </p:attrNameLst>
+                                      </p:cBhvr>
+                                      <p:to>
+                                        <p:strVal val="visible"/>
+                                      </p:to>
+                                    </p:set>
+                                    <p:animEffect transition="in" filter="fade">
+                                      <p:cBhvr>
+                                        <p:cTn id="59" dur="500"/>
+                                        <p:tgtEl>
+                                          <p:spTgt spid="41"/>
+                                        </p:tgtEl>
+                                      </p:cBhvr>
+                                    </p:animEffect>
+                                  </p:childTnLst>
+                                </p:cTn>
+                              </p:par>
+                            </p:childTnLst>
+                          </p:cTn>
+                        </p:par>
+                      </p:childTnLst>
+                    </p:cTn>
+                  </p:par>
+                  <p:par>
+                    <p:cTn id="60" fill="hold">
+                      <p:stCondLst>
+                        <p:cond delay="indefinite"/>
+                      </p:stCondLst>
+                      <p:childTnLst>
+                        <p:par>
+                          <p:cTn id="61" fill="hold">
+                            <p:stCondLst>
+                              <p:cond delay="0"/>
+                            </p:stCondLst>
+                            <p:childTnLst>
+                              <p:par>
+                                <p:cTn id="62" presetID="10" presetClass="entr" presetSubtype="0" fill="hold" grpId="0" nodeType="clickEffect">
+                                  <p:stCondLst>
+                                    <p:cond delay="0"/>
+                                  </p:stCondLst>
+                                  <p:childTnLst>
+                                    <p:set>
+                                      <p:cBhvr>
+                                        <p:cTn id="63" dur="1" fill="hold">
+                                          <p:stCondLst>
+                                            <p:cond delay="0"/>
+                                          </p:stCondLst>
+                                        </p:cTn>
+                                        <p:tgtEl>
+                                          <p:spTgt spid="42"/>
+                                        </p:tgtEl>
+                                        <p:attrNameLst>
+                                          <p:attrName>style.visibility</p:attrName>
+                                        </p:attrNameLst>
+                                      </p:cBhvr>
+                                      <p:to>
+                                        <p:strVal val="visible"/>
+                                      </p:to>
+                                    </p:set>
+                                    <p:animEffect transition="in" filter="fade">
+                                      <p:cBhvr>
+                                        <p:cTn id="64" dur="500"/>
+                                        <p:tgtEl>
+                                          <p:spTgt spid="42"/>
+                                        </p:tgtEl>
+                                      </p:cBhvr>
+                                    </p:animEffect>
+                                  </p:childTnLst>
+                                </p:cTn>
+                              </p:par>
+                            </p:childTnLst>
+                          </p:cTn>
+                        </p:par>
+                      </p:childTnLst>
+                    </p:cTn>
+                  </p:par>
+                </p:childTnLst>
+              </p:cTn>
+              <p:prevCondLst>
+                <p:cond evt="onPrev" delay="0">
+                  <p:tgtEl>
+                    <p:sldTgt/>
+                  </p:tgtEl>
+                </p:cond>
+              </p:prevCondLst>
+              <p:nextCondLst>
+                <p:cond evt="onNext" delay="0">
+                  <p:tgtEl>
+                    <p:sldTgt/>
+                  </p:tgtEl>
+                </p:cond>
+              </p:nextCondLst>
+            </p:seq>
+          </p:childTnLst>
+        </p:cTn>
+      </p:par>
+    </p:tnLst>
+  </p:timing>
 </p:sld>
 </file>
 
